--- a/docs/test/stress/e2e-outputs/trading_case10_seocho_old_retail_basic.pptx
+++ b/docs/test/stress/e2e-outputs/trading_case10_seocho_old_retail_basic.pptx
@@ -3998,14 +3998,56 @@
       </p:sp>
       <p:sp>
         <p:nvSpPr>
-          <p:cNvPr id="19" name="Text 17"/>
-          <p:cNvSpPr/>
-          <p:nvPr/>
-        </p:nvSpPr>
-        <p:spPr>
-          <a:xfrm>
-            <a:off x="566928" y="6419088"/>
-            <a:ext cx="11057839" cy="201168"/>
+          <p:cNvPr id="19" name="Shape 17"/>
+          <p:cNvSpPr/>
+          <p:nvPr/>
+        </p:nvSpPr>
+        <p:spPr>
+          <a:xfrm>
+            <a:off x="566928" y="3611880"/>
+            <a:ext cx="5437480" cy="1097280"/>
+          </a:xfrm>
+          <a:prstGeom prst="roundRect">
+            <a:avLst>
+              <a:gd name="adj" fmla="val 5000"/>
+            </a:avLst>
+          </a:prstGeom>
+          <a:solidFill>
+            <a:srgbClr val="DBEAFE"/>
+          </a:solidFill>
+          <a:ln/>
+        </p:spPr>
+      </p:sp>
+      <p:sp>
+        <p:nvSpPr>
+          <p:cNvPr id="20" name="Shape 18"/>
+          <p:cNvSpPr/>
+          <p:nvPr/>
+        </p:nvSpPr>
+        <p:spPr>
+          <a:xfrm>
+            <a:off x="566928" y="3666744"/>
+            <a:ext cx="36576" cy="987552"/>
+          </a:xfrm>
+          <a:prstGeom prst="rect">
+            <a:avLst/>
+          </a:prstGeom>
+          <a:solidFill>
+            <a:srgbClr val="1D4ED8"/>
+          </a:solidFill>
+          <a:ln/>
+        </p:spPr>
+      </p:sp>
+      <p:sp>
+        <p:nvSpPr>
+          <p:cNvPr id="21" name="Text 19"/>
+          <p:cNvSpPr/>
+          <p:nvPr/>
+        </p:nvSpPr>
+        <p:spPr>
+          <a:xfrm>
+            <a:off x="749808" y="3721608"/>
+            <a:ext cx="5108296" cy="201168"/>
           </a:xfrm>
           <a:prstGeom prst="rect">
             <a:avLst/>
@@ -4017,18 +4059,88 @@
           <a:bodyPr wrap="square" lIns="0" tIns="0" rIns="0" bIns="0" rtlCol="0" anchor="ctr"/>
           <a:lstStyle/>
           <a:p>
-            <a:pPr algn="ctr" indent="0" marL="0">
-              <a:buNone/>
-            </a:pPr>
-            <a:r>
-              <a:rPr lang="en-US" sz="750" dirty="0">
-                <a:solidFill>
-                  <a:srgbClr val="64748B"/>
+            <a:pPr indent="0" marL="0">
+              <a:buNone/>
+            </a:pPr>
+            <a:endParaRPr lang="en-US" sz="1050" dirty="0"/>
+          </a:p>
+        </p:txBody>
+      </p:sp>
+      <p:sp>
+        <p:nvSpPr>
+          <p:cNvPr id="22" name="Text 20"/>
+          <p:cNvSpPr/>
+          <p:nvPr/>
+        </p:nvSpPr>
+        <p:spPr>
+          <a:xfrm>
+            <a:off x="749808" y="3941064"/>
+            <a:ext cx="5108296" cy="694944"/>
+          </a:xfrm>
+          <a:prstGeom prst="rect">
+            <a:avLst/>
+          </a:prstGeom>
+          <a:noFill/>
+          <a:ln/>
+        </p:spPr>
+        <p:txBody>
+          <a:bodyPr wrap="square" lIns="0" tIns="0" rIns="0" bIns="0" rtlCol="0" anchor="t"/>
+          <a:lstStyle/>
+          <a:p>
+            <a:pPr indent="0" marL="0">
+              <a:lnSpc>
+                <a:spcPct val="120000"/>
+              </a:lnSpc>
+              <a:buNone/>
+            </a:pPr>
+            <a:r>
+              <a:rPr lang="en-US" sz="930" dirty="0">
+                <a:solidFill>
+                  <a:srgbClr val="0F172A"/>
                 </a:solidFill>
                 <a:latin typeface="Pretendard" pitchFamily="34" charset="0"/>
                 <a:ea typeface="Pretendard" pitchFamily="34" charset="-122"/>
                 <a:cs typeface="Pretendard" pitchFamily="34" charset="-120"/>
               </a:rPr>
+              <a:t>본 매물은 서초권역 대로변 입지의 우량 메디컬 테넌트 만실 운영 자산입니다.</a:t>
+            </a:r>
+            <a:endParaRPr lang="en-US" sz="930" dirty="0"/>
+          </a:p>
+        </p:txBody>
+      </p:sp>
+      <p:sp>
+        <p:nvSpPr>
+          <p:cNvPr id="23" name="Text 21"/>
+          <p:cNvSpPr/>
+          <p:nvPr/>
+        </p:nvSpPr>
+        <p:spPr>
+          <a:xfrm>
+            <a:off x="566928" y="6419088"/>
+            <a:ext cx="11057839" cy="201168"/>
+          </a:xfrm>
+          <a:prstGeom prst="rect">
+            <a:avLst/>
+          </a:prstGeom>
+          <a:noFill/>
+          <a:ln/>
+        </p:spPr>
+        <p:txBody>
+          <a:bodyPr wrap="square" lIns="0" tIns="0" rIns="0" bIns="0" rtlCol="0" anchor="ctr"/>
+          <a:lstStyle/>
+          <a:p>
+            <a:pPr algn="ctr" indent="0" marL="0">
+              <a:buNone/>
+            </a:pPr>
+            <a:r>
+              <a:rPr lang="en-US" sz="750" dirty="0">
+                <a:solidFill>
+                  <a:srgbClr val="64748B"/>
+                </a:solidFill>
+                <a:latin typeface="Pretendard" pitchFamily="34" charset="0"/>
+                <a:ea typeface="Pretendard" pitchFamily="34" charset="-122"/>
+                <a:cs typeface="Pretendard" pitchFamily="34" charset="-120"/>
+              </a:rPr>
               <a:t>크리딜  ·    ·  2</a:t>
             </a:r>
             <a:endParaRPr lang="en-US" sz="750" dirty="0"/>
@@ -4037,7 +4149,7 @@
       </p:sp>
       <p:sp>
         <p:nvSpPr>
-          <p:cNvPr id="20" name="Shape 18"/>
+          <p:cNvPr id="24" name="Shape 22"/>
           <p:cNvSpPr/>
           <p:nvPr/>
         </p:nvSpPr>
@@ -4602,7 +4714,7 @@
                 <a:ea typeface="Pretendard" pitchFamily="34" charset="-122"/>
                 <a:cs typeface="Pretendard" pitchFamily="34" charset="-120"/>
               </a:rPr>
-              <a:t>{"ok"</a:t>
+              <a:t>소재지</a:t>
             </a:r>
             <a:endParaRPr lang="en-US" sz="1400" dirty="0"/>
           </a:p>
@@ -4644,7 +4756,7 @@
                 <a:ea typeface="Pretendard" pitchFamily="34" charset="-122"/>
                 <a:cs typeface="Pretendard" pitchFamily="34" charset="-120"/>
               </a:rPr>
-              <a:t>true,"mocked":true,"extractedFields":{"area_signal":"역삼","asset_type":"오피스빌딩","price_band":"300억","size_signal":"3000평(약 9917.4㎡)"},"extractedFacts":{"region":"역삼","exactAddressCandidate":"역삼동 742-1","assetType":"오피스빌딩","priceText":"300억","sizeText":"3000평(약 9917.4㎡)","currentUse":"오피스","currentUseSignal":"근린생활시설","leaseSignal":"임대중","vacancySignal":"공실없음","tenantNames":"쿠팡","네이버","unitRentTexts":"301호: 1500만","sellerMotivationText":"자산 효율화","brokerNotes":"초역세권 매물"},"detectedSensitiveFields":"exact_address","tenant_name","ambiguousFields":,"warnings":,"areaSignal":"역삼","assetType":"오피스빌딩","priceBand":"300억","sizeSignal":"3000평(약 9917.4㎡)","dealType":"매각","buildingName":"역삼 센트럴타워","exactAddress":"역삼동 742-1","totalFloorArea":9917.3,"buildYear":2015,"currentUseSignal":"근린생활시설","vacancySignal":"공실 없음","fitSummary":"초역세권 근생 빌딩으로 시행/사옥 매입에 최적화","cautionSummary":"주요 임차 업종 만기 조율 필요","hiddenFields":"exact_address","seller_motivation","confidence":{"areaSignal":"confirmed","assetType":"confirmed","priceBand":"ai_hypothesis","fitSummary":"ai_hypothesis"},"missingData":"sizeSignal","boundaryNote":"본 자료는 실거래 통계 기반 참고치입니다.","buyerType":"법인 사옥형","budgetRange":{"min":50,"max":80,"display":"50억~80억"},"preferredRegions":"강남","성수","assetTypes":"꼬마빌딩","사옥용","purchasePurpose":"사옥용 매입","mustHave":"초역세권","주차","niceToHave":"테라스","루프탑","riskTolerance":"medium","financingNote":"자본금 50% 준비","missingQuestions":"구체적인 입주 시기가 언제인가요?","선호하는 수익률이 있나요?","privacyNotes":"연락처 비공개","fitReasons":"매수자 예산(50-80억)에 부합하는 매물입니다.","요청하신 성수/강남 권역에 해당합니다.","cautionReasons":"요청한 용도와 달리 명도 협의가 다소 필요합니다.","recommendedNextAction":"현장 답사 제안","kakaoMessage":"안녕하세요! 요청하신 조건에 부합하는 추천 매물이 있어 안내해 드립니다. 확인해보시고 피드백 부탁드립니다.","title":"강남 역삼역 초역세권 오피스 사옥용 빌딩 매각","shortSummary":"역삼역 도보 5분 거리의 준신축급 대형 오피스빌딩입니다.","dealPoints":"초역세권","사옥 최적","cautionPoints":"명도 조율 필요","hiddenInfoNotice":"보증금 및 지번은 인가 후 확인 가능","gateMessage":"G1 등급 등록이 필요합니다.","kakaoText":"강남 역삼역 오피스 빌딩 매각 안내입니다.","exactUnitCandidate":"101호","floor":"1층","areaSqmText":"150㎡","spaceType":"office","depositText":"5000만","monthlyRentText":"400만","maintenanceFeeText":"50만","availableFromText":"즉시입주","leaseTermMonthsText":"24","incentivesText":"렌트프리 2개월","restrictions":,"landlordIdentity":"김성수","currentTenant":"스타트업","vacancyReason":"이전 확장","rentNegotiation":"협의 가능","region":"성수동","areaSqm":150,"deposit":5000,"monthlyRent":400,"maintenanceFee":50,"availableFrom":"즉시입주","leaseTermMonths":24,"incentives":{"rentFreeMonths":2,"interiorSupport":"일부 인테리어 지원","freeRentDetail":"렌트프리 2개월 지원"},"shortSummaryLease":"성수역 도보 5분 거리 1층 리테일 상가 매물입니다."}</a:t>
+              <a:t>서초권역</a:t>
             </a:r>
             <a:endParaRPr lang="en-US" sz="1400" dirty="0"/>
           </a:p>
@@ -4653,6 +4765,862 @@
       <p:sp>
         <p:nvSpPr>
           <p:cNvPr id="8" name="Shape 6"/>
+          <p:cNvSpPr/>
+          <p:nvPr/>
+        </p:nvSpPr>
+        <p:spPr>
+          <a:xfrm>
+            <a:off x="566928" y="2048256"/>
+            <a:ext cx="6858000" cy="0"/>
+          </a:xfrm>
+          <a:prstGeom prst="line">
+            <a:avLst/>
+          </a:prstGeom>
+          <a:noFill/>
+          <a:ln w="3810">
+            <a:solidFill>
+              <a:srgbClr val="CBD5E1"/>
+            </a:solidFill>
+            <a:prstDash val="solid"/>
+          </a:ln>
+        </p:spPr>
+      </p:sp>
+      <p:sp>
+        <p:nvSpPr>
+          <p:cNvPr id="9" name="Text 7"/>
+          <p:cNvSpPr/>
+          <p:nvPr/>
+        </p:nvSpPr>
+        <p:spPr>
+          <a:xfrm>
+            <a:off x="566928" y="2048256"/>
+            <a:ext cx="2606040" cy="402336"/>
+          </a:xfrm>
+          <a:prstGeom prst="rect">
+            <a:avLst/>
+          </a:prstGeom>
+          <a:noFill/>
+          <a:ln/>
+        </p:spPr>
+        <p:txBody>
+          <a:bodyPr wrap="square" lIns="0" tIns="0" rIns="0" bIns="0" rtlCol="0" anchor="ctr"/>
+          <a:lstStyle/>
+          <a:p>
+            <a:pPr indent="0" marL="0">
+              <a:lnSpc>
+                <a:spcPct val="120000"/>
+              </a:lnSpc>
+              <a:buNone/>
+            </a:pPr>
+            <a:r>
+              <a:rPr lang="en-US" sz="1400" dirty="0">
+                <a:solidFill>
+                  <a:srgbClr val="64748B"/>
+                </a:solidFill>
+                <a:latin typeface="Pretendard" pitchFamily="34" charset="0"/>
+                <a:ea typeface="Pretendard" pitchFamily="34" charset="-122"/>
+                <a:cs typeface="Pretendard" pitchFamily="34" charset="-120"/>
+              </a:rPr>
+              <a:t>주요 용도</a:t>
+            </a:r>
+            <a:endParaRPr lang="en-US" sz="1400" dirty="0"/>
+          </a:p>
+        </p:txBody>
+      </p:sp>
+      <p:sp>
+        <p:nvSpPr>
+          <p:cNvPr id="10" name="Text 8"/>
+          <p:cNvSpPr/>
+          <p:nvPr/>
+        </p:nvSpPr>
+        <p:spPr>
+          <a:xfrm>
+            <a:off x="3172968" y="2048256"/>
+            <a:ext cx="4251960" cy="402336"/>
+          </a:xfrm>
+          <a:prstGeom prst="rect">
+            <a:avLst/>
+          </a:prstGeom>
+          <a:noFill/>
+          <a:ln/>
+        </p:spPr>
+        <p:txBody>
+          <a:bodyPr wrap="square" lIns="0" tIns="0" rIns="0" bIns="0" rtlCol="0" anchor="ctr"/>
+          <a:lstStyle/>
+          <a:p>
+            <a:pPr indent="0" marL="0">
+              <a:lnSpc>
+                <a:spcPct val="120000"/>
+              </a:lnSpc>
+              <a:buNone/>
+            </a:pPr>
+            <a:r>
+              <a:rPr lang="en-US" sz="1400" b="1" dirty="0">
+                <a:solidFill>
+                  <a:srgbClr val="0F172A"/>
+                </a:solidFill>
+                <a:latin typeface="Pretendard" pitchFamily="34" charset="0"/>
+                <a:ea typeface="Pretendard" pitchFamily="34" charset="-122"/>
+                <a:cs typeface="Pretendard" pitchFamily="34" charset="-120"/>
+              </a:rPr>
+              <a:t>근린생활시설 / 메디컬</a:t>
+            </a:r>
+            <a:endParaRPr lang="en-US" sz="1400" dirty="0"/>
+          </a:p>
+        </p:txBody>
+      </p:sp>
+      <p:sp>
+        <p:nvSpPr>
+          <p:cNvPr id="11" name="Shape 9"/>
+          <p:cNvSpPr/>
+          <p:nvPr/>
+        </p:nvSpPr>
+        <p:spPr>
+          <a:xfrm>
+            <a:off x="566928" y="2450592"/>
+            <a:ext cx="6858000" cy="0"/>
+          </a:xfrm>
+          <a:prstGeom prst="line">
+            <a:avLst/>
+          </a:prstGeom>
+          <a:noFill/>
+          <a:ln w="3810">
+            <a:solidFill>
+              <a:srgbClr val="CBD5E1"/>
+            </a:solidFill>
+            <a:prstDash val="solid"/>
+          </a:ln>
+        </p:spPr>
+      </p:sp>
+      <p:sp>
+        <p:nvSpPr>
+          <p:cNvPr id="12" name="Text 10"/>
+          <p:cNvSpPr/>
+          <p:nvPr/>
+        </p:nvSpPr>
+        <p:spPr>
+          <a:xfrm>
+            <a:off x="566928" y="2450592"/>
+            <a:ext cx="2606040" cy="402336"/>
+          </a:xfrm>
+          <a:prstGeom prst="rect">
+            <a:avLst/>
+          </a:prstGeom>
+          <a:noFill/>
+          <a:ln/>
+        </p:spPr>
+        <p:txBody>
+          <a:bodyPr wrap="square" lIns="0" tIns="0" rIns="0" bIns="0" rtlCol="0" anchor="ctr"/>
+          <a:lstStyle/>
+          <a:p>
+            <a:pPr indent="0" marL="0">
+              <a:lnSpc>
+                <a:spcPct val="120000"/>
+              </a:lnSpc>
+              <a:buNone/>
+            </a:pPr>
+            <a:r>
+              <a:rPr lang="en-US" sz="1400" dirty="0">
+                <a:solidFill>
+                  <a:srgbClr val="64748B"/>
+                </a:solidFill>
+                <a:latin typeface="Pretendard" pitchFamily="34" charset="0"/>
+                <a:ea typeface="Pretendard" pitchFamily="34" charset="-122"/>
+                <a:cs typeface="Pretendard" pitchFamily="34" charset="-120"/>
+              </a:rPr>
+              <a:t>연면적</a:t>
+            </a:r>
+            <a:endParaRPr lang="en-US" sz="1400" dirty="0"/>
+          </a:p>
+        </p:txBody>
+      </p:sp>
+      <p:sp>
+        <p:nvSpPr>
+          <p:cNvPr id="13" name="Text 11"/>
+          <p:cNvSpPr/>
+          <p:nvPr/>
+        </p:nvSpPr>
+        <p:spPr>
+          <a:xfrm>
+            <a:off x="3172968" y="2450592"/>
+            <a:ext cx="4251960" cy="402336"/>
+          </a:xfrm>
+          <a:prstGeom prst="rect">
+            <a:avLst/>
+          </a:prstGeom>
+          <a:noFill/>
+          <a:ln/>
+        </p:spPr>
+        <p:txBody>
+          <a:bodyPr wrap="square" lIns="0" tIns="0" rIns="0" bIns="0" rtlCol="0" anchor="ctr"/>
+          <a:lstStyle/>
+          <a:p>
+            <a:pPr indent="0" marL="0">
+              <a:lnSpc>
+                <a:spcPct val="120000"/>
+              </a:lnSpc>
+              <a:buNone/>
+            </a:pPr>
+            <a:r>
+              <a:rPr lang="en-US" sz="1400" b="1" dirty="0">
+                <a:solidFill>
+                  <a:srgbClr val="0F172A"/>
+                </a:solidFill>
+                <a:latin typeface="Pretendard" pitchFamily="34" charset="0"/>
+                <a:ea typeface="Pretendard" pitchFamily="34" charset="-122"/>
+                <a:cs typeface="Pretendard" pitchFamily="34" charset="-120"/>
+              </a:rPr>
+              <a:t>5,000㎡ (약 1513평(약 5001.7㎡))</a:t>
+            </a:r>
+            <a:endParaRPr lang="en-US" sz="1400" dirty="0"/>
+          </a:p>
+        </p:txBody>
+      </p:sp>
+      <p:sp>
+        <p:nvSpPr>
+          <p:cNvPr id="14" name="Shape 12"/>
+          <p:cNvSpPr/>
+          <p:nvPr/>
+        </p:nvSpPr>
+        <p:spPr>
+          <a:xfrm>
+            <a:off x="566928" y="2852928"/>
+            <a:ext cx="6858000" cy="0"/>
+          </a:xfrm>
+          <a:prstGeom prst="line">
+            <a:avLst/>
+          </a:prstGeom>
+          <a:noFill/>
+          <a:ln w="3810">
+            <a:solidFill>
+              <a:srgbClr val="CBD5E1"/>
+            </a:solidFill>
+            <a:prstDash val="solid"/>
+          </a:ln>
+        </p:spPr>
+      </p:sp>
+      <p:sp>
+        <p:nvSpPr>
+          <p:cNvPr id="15" name="Text 13"/>
+          <p:cNvSpPr/>
+          <p:nvPr/>
+        </p:nvSpPr>
+        <p:spPr>
+          <a:xfrm>
+            <a:off x="566928" y="2852928"/>
+            <a:ext cx="2606040" cy="402336"/>
+          </a:xfrm>
+          <a:prstGeom prst="rect">
+            <a:avLst/>
+          </a:prstGeom>
+          <a:noFill/>
+          <a:ln/>
+        </p:spPr>
+        <p:txBody>
+          <a:bodyPr wrap="square" lIns="0" tIns="0" rIns="0" bIns="0" rtlCol="0" anchor="ctr"/>
+          <a:lstStyle/>
+          <a:p>
+            <a:pPr indent="0" marL="0">
+              <a:lnSpc>
+                <a:spcPct val="120000"/>
+              </a:lnSpc>
+              <a:buNone/>
+            </a:pPr>
+            <a:r>
+              <a:rPr lang="en-US" sz="1400" dirty="0">
+                <a:solidFill>
+                  <a:srgbClr val="64748B"/>
+                </a:solidFill>
+                <a:latin typeface="Pretendard" pitchFamily="34" charset="0"/>
+                <a:ea typeface="Pretendard" pitchFamily="34" charset="-122"/>
+                <a:cs typeface="Pretendard" pitchFamily="34" charset="-120"/>
+              </a:rPr>
+              <a:t>대지면적</a:t>
+            </a:r>
+            <a:endParaRPr lang="en-US" sz="1400" dirty="0"/>
+          </a:p>
+        </p:txBody>
+      </p:sp>
+      <p:sp>
+        <p:nvSpPr>
+          <p:cNvPr id="16" name="Text 14"/>
+          <p:cNvSpPr/>
+          <p:nvPr/>
+        </p:nvSpPr>
+        <p:spPr>
+          <a:xfrm>
+            <a:off x="3172968" y="2852928"/>
+            <a:ext cx="4251960" cy="402336"/>
+          </a:xfrm>
+          <a:prstGeom prst="rect">
+            <a:avLst/>
+          </a:prstGeom>
+          <a:noFill/>
+          <a:ln/>
+        </p:spPr>
+        <p:txBody>
+          <a:bodyPr wrap="square" lIns="0" tIns="0" rIns="0" bIns="0" rtlCol="0" anchor="ctr"/>
+          <a:lstStyle/>
+          <a:p>
+            <a:pPr indent="0" marL="0">
+              <a:lnSpc>
+                <a:spcPct val="120000"/>
+              </a:lnSpc>
+              <a:buNone/>
+            </a:pPr>
+            <a:r>
+              <a:rPr lang="en-US" sz="1400" b="1" dirty="0">
+                <a:solidFill>
+                  <a:srgbClr val="0F172A"/>
+                </a:solidFill>
+                <a:latin typeface="Pretendard" pitchFamily="34" charset="0"/>
+                <a:ea typeface="Pretendard" pitchFamily="34" charset="-122"/>
+                <a:cs typeface="Pretendard" pitchFamily="34" charset="-120"/>
+              </a:rPr>
+              <a:t>1,000㎡ (약 303평(약 1001.7㎡))</a:t>
+            </a:r>
+            <a:endParaRPr lang="en-US" sz="1400" dirty="0"/>
+          </a:p>
+        </p:txBody>
+      </p:sp>
+      <p:sp>
+        <p:nvSpPr>
+          <p:cNvPr id="17" name="Shape 15"/>
+          <p:cNvSpPr/>
+          <p:nvPr/>
+        </p:nvSpPr>
+        <p:spPr>
+          <a:xfrm>
+            <a:off x="566928" y="3255264"/>
+            <a:ext cx="6858000" cy="0"/>
+          </a:xfrm>
+          <a:prstGeom prst="line">
+            <a:avLst/>
+          </a:prstGeom>
+          <a:noFill/>
+          <a:ln w="3810">
+            <a:solidFill>
+              <a:srgbClr val="CBD5E1"/>
+            </a:solidFill>
+            <a:prstDash val="solid"/>
+          </a:ln>
+        </p:spPr>
+      </p:sp>
+      <p:sp>
+        <p:nvSpPr>
+          <p:cNvPr id="18" name="Text 16"/>
+          <p:cNvSpPr/>
+          <p:nvPr/>
+        </p:nvSpPr>
+        <p:spPr>
+          <a:xfrm>
+            <a:off x="566928" y="3255264"/>
+            <a:ext cx="2606040" cy="402336"/>
+          </a:xfrm>
+          <a:prstGeom prst="rect">
+            <a:avLst/>
+          </a:prstGeom>
+          <a:noFill/>
+          <a:ln/>
+        </p:spPr>
+        <p:txBody>
+          <a:bodyPr wrap="square" lIns="0" tIns="0" rIns="0" bIns="0" rtlCol="0" anchor="ctr"/>
+          <a:lstStyle/>
+          <a:p>
+            <a:pPr indent="0" marL="0">
+              <a:lnSpc>
+                <a:spcPct val="120000"/>
+              </a:lnSpc>
+              <a:buNone/>
+            </a:pPr>
+            <a:r>
+              <a:rPr lang="en-US" sz="1400" dirty="0">
+                <a:solidFill>
+                  <a:srgbClr val="64748B"/>
+                </a:solidFill>
+                <a:latin typeface="Pretendard" pitchFamily="34" charset="0"/>
+                <a:ea typeface="Pretendard" pitchFamily="34" charset="-122"/>
+                <a:cs typeface="Pretendard" pitchFamily="34" charset="-120"/>
+              </a:rPr>
+              <a:t>용도지역</a:t>
+            </a:r>
+            <a:endParaRPr lang="en-US" sz="1400" dirty="0"/>
+          </a:p>
+        </p:txBody>
+      </p:sp>
+      <p:sp>
+        <p:nvSpPr>
+          <p:cNvPr id="19" name="Text 17"/>
+          <p:cNvSpPr/>
+          <p:nvPr/>
+        </p:nvSpPr>
+        <p:spPr>
+          <a:xfrm>
+            <a:off x="3172968" y="3255264"/>
+            <a:ext cx="4251960" cy="402336"/>
+          </a:xfrm>
+          <a:prstGeom prst="rect">
+            <a:avLst/>
+          </a:prstGeom>
+          <a:noFill/>
+          <a:ln/>
+        </p:spPr>
+        <p:txBody>
+          <a:bodyPr wrap="square" lIns="0" tIns="0" rIns="0" bIns="0" rtlCol="0" anchor="ctr"/>
+          <a:lstStyle/>
+          <a:p>
+            <a:pPr indent="0" marL="0">
+              <a:lnSpc>
+                <a:spcPct val="120000"/>
+              </a:lnSpc>
+              <a:buNone/>
+            </a:pPr>
+            <a:r>
+              <a:rPr lang="en-US" sz="1400" b="1" dirty="0">
+                <a:solidFill>
+                  <a:srgbClr val="0F172A"/>
+                </a:solidFill>
+                <a:latin typeface="Pretendard" pitchFamily="34" charset="0"/>
+                <a:ea typeface="Pretendard" pitchFamily="34" charset="-122"/>
+                <a:cs typeface="Pretendard" pitchFamily="34" charset="-120"/>
+              </a:rPr>
+              <a:t>일반상업지역</a:t>
+            </a:r>
+            <a:endParaRPr lang="en-US" sz="1400" dirty="0"/>
+          </a:p>
+        </p:txBody>
+      </p:sp>
+      <p:sp>
+        <p:nvSpPr>
+          <p:cNvPr id="20" name="Shape 18"/>
+          <p:cNvSpPr/>
+          <p:nvPr/>
+        </p:nvSpPr>
+        <p:spPr>
+          <a:xfrm>
+            <a:off x="566928" y="3657600"/>
+            <a:ext cx="6858000" cy="0"/>
+          </a:xfrm>
+          <a:prstGeom prst="line">
+            <a:avLst/>
+          </a:prstGeom>
+          <a:noFill/>
+          <a:ln w="3810">
+            <a:solidFill>
+              <a:srgbClr val="CBD5E1"/>
+            </a:solidFill>
+            <a:prstDash val="solid"/>
+          </a:ln>
+        </p:spPr>
+      </p:sp>
+      <p:sp>
+        <p:nvSpPr>
+          <p:cNvPr id="21" name="Text 19"/>
+          <p:cNvSpPr/>
+          <p:nvPr/>
+        </p:nvSpPr>
+        <p:spPr>
+          <a:xfrm>
+            <a:off x="566928" y="3657600"/>
+            <a:ext cx="2606040" cy="402336"/>
+          </a:xfrm>
+          <a:prstGeom prst="rect">
+            <a:avLst/>
+          </a:prstGeom>
+          <a:noFill/>
+          <a:ln/>
+        </p:spPr>
+        <p:txBody>
+          <a:bodyPr wrap="square" lIns="0" tIns="0" rIns="0" bIns="0" rtlCol="0" anchor="ctr"/>
+          <a:lstStyle/>
+          <a:p>
+            <a:pPr indent="0" marL="0">
+              <a:lnSpc>
+                <a:spcPct val="120000"/>
+              </a:lnSpc>
+              <a:buNone/>
+            </a:pPr>
+            <a:r>
+              <a:rPr lang="en-US" sz="1400" dirty="0">
+                <a:solidFill>
+                  <a:srgbClr val="64748B"/>
+                </a:solidFill>
+                <a:latin typeface="Pretendard" pitchFamily="34" charset="0"/>
+                <a:ea typeface="Pretendard" pitchFamily="34" charset="-122"/>
+                <a:cs typeface="Pretendard" pitchFamily="34" charset="-120"/>
+              </a:rPr>
+              <a:t>승강기</a:t>
+            </a:r>
+            <a:endParaRPr lang="en-US" sz="1400" dirty="0"/>
+          </a:p>
+        </p:txBody>
+      </p:sp>
+      <p:sp>
+        <p:nvSpPr>
+          <p:cNvPr id="22" name="Text 20"/>
+          <p:cNvSpPr/>
+          <p:nvPr/>
+        </p:nvSpPr>
+        <p:spPr>
+          <a:xfrm>
+            <a:off x="3172968" y="3657600"/>
+            <a:ext cx="4251960" cy="402336"/>
+          </a:xfrm>
+          <a:prstGeom prst="rect">
+            <a:avLst/>
+          </a:prstGeom>
+          <a:noFill/>
+          <a:ln/>
+        </p:spPr>
+        <p:txBody>
+          <a:bodyPr wrap="square" lIns="0" tIns="0" rIns="0" bIns="0" rtlCol="0" anchor="ctr"/>
+          <a:lstStyle/>
+          <a:p>
+            <a:pPr indent="0" marL="0">
+              <a:lnSpc>
+                <a:spcPct val="120000"/>
+              </a:lnSpc>
+              <a:buNone/>
+            </a:pPr>
+            <a:r>
+              <a:rPr lang="en-US" sz="1400" b="1" dirty="0">
+                <a:solidFill>
+                  <a:srgbClr val="0F172A"/>
+                </a:solidFill>
+                <a:latin typeface="Pretendard" pitchFamily="34" charset="0"/>
+                <a:ea typeface="Pretendard" pitchFamily="34" charset="-122"/>
+                <a:cs typeface="Pretendard" pitchFamily="34" charset="-120"/>
+              </a:rPr>
+              <a:t>1대 (15인승 침대용)</a:t>
+            </a:r>
+            <a:endParaRPr lang="en-US" sz="1400" dirty="0"/>
+          </a:p>
+        </p:txBody>
+      </p:sp>
+      <p:sp>
+        <p:nvSpPr>
+          <p:cNvPr id="23" name="Shape 21"/>
+          <p:cNvSpPr/>
+          <p:nvPr/>
+        </p:nvSpPr>
+        <p:spPr>
+          <a:xfrm>
+            <a:off x="566928" y="4059936"/>
+            <a:ext cx="6858000" cy="0"/>
+          </a:xfrm>
+          <a:prstGeom prst="line">
+            <a:avLst/>
+          </a:prstGeom>
+          <a:noFill/>
+          <a:ln w="3810">
+            <a:solidFill>
+              <a:srgbClr val="CBD5E1"/>
+            </a:solidFill>
+            <a:prstDash val="solid"/>
+          </a:ln>
+        </p:spPr>
+      </p:sp>
+      <p:sp>
+        <p:nvSpPr>
+          <p:cNvPr id="24" name="Text 22"/>
+          <p:cNvSpPr/>
+          <p:nvPr/>
+        </p:nvSpPr>
+        <p:spPr>
+          <a:xfrm>
+            <a:off x="566928" y="4059936"/>
+            <a:ext cx="2606040" cy="402336"/>
+          </a:xfrm>
+          <a:prstGeom prst="rect">
+            <a:avLst/>
+          </a:prstGeom>
+          <a:noFill/>
+          <a:ln/>
+        </p:spPr>
+        <p:txBody>
+          <a:bodyPr wrap="square" lIns="0" tIns="0" rIns="0" bIns="0" rtlCol="0" anchor="ctr"/>
+          <a:lstStyle/>
+          <a:p>
+            <a:pPr indent="0" marL="0">
+              <a:lnSpc>
+                <a:spcPct val="120000"/>
+              </a:lnSpc>
+              <a:buNone/>
+            </a:pPr>
+            <a:r>
+              <a:rPr lang="en-US" sz="1400" dirty="0">
+                <a:solidFill>
+                  <a:srgbClr val="64748B"/>
+                </a:solidFill>
+                <a:latin typeface="Pretendard" pitchFamily="34" charset="0"/>
+                <a:ea typeface="Pretendard" pitchFamily="34" charset="-122"/>
+                <a:cs typeface="Pretendard" pitchFamily="34" charset="-120"/>
+              </a:rPr>
+              <a:t>주차 대수</a:t>
+            </a:r>
+            <a:endParaRPr lang="en-US" sz="1400" dirty="0"/>
+          </a:p>
+        </p:txBody>
+      </p:sp>
+      <p:sp>
+        <p:nvSpPr>
+          <p:cNvPr id="25" name="Text 23"/>
+          <p:cNvSpPr/>
+          <p:nvPr/>
+        </p:nvSpPr>
+        <p:spPr>
+          <a:xfrm>
+            <a:off x="3172968" y="4059936"/>
+            <a:ext cx="4251960" cy="402336"/>
+          </a:xfrm>
+          <a:prstGeom prst="rect">
+            <a:avLst/>
+          </a:prstGeom>
+          <a:noFill/>
+          <a:ln/>
+        </p:spPr>
+        <p:txBody>
+          <a:bodyPr wrap="square" lIns="0" tIns="0" rIns="0" bIns="0" rtlCol="0" anchor="ctr"/>
+          <a:lstStyle/>
+          <a:p>
+            <a:pPr indent="0" marL="0">
+              <a:lnSpc>
+                <a:spcPct val="120000"/>
+              </a:lnSpc>
+              <a:buNone/>
+            </a:pPr>
+            <a:r>
+              <a:rPr lang="en-US" sz="1400" b="1" dirty="0">
+                <a:solidFill>
+                  <a:srgbClr val="0F172A"/>
+                </a:solidFill>
+                <a:latin typeface="Pretendard" pitchFamily="34" charset="0"/>
+                <a:ea typeface="Pretendard" pitchFamily="34" charset="-122"/>
+                <a:cs typeface="Pretendard" pitchFamily="34" charset="-120"/>
+              </a:rPr>
+              <a:t>18대 (자주식 완비)</a:t>
+            </a:r>
+            <a:endParaRPr lang="en-US" sz="1400" dirty="0"/>
+          </a:p>
+        </p:txBody>
+      </p:sp>
+      <p:sp>
+        <p:nvSpPr>
+          <p:cNvPr id="26" name="Shape 24"/>
+          <p:cNvSpPr/>
+          <p:nvPr/>
+        </p:nvSpPr>
+        <p:spPr>
+          <a:xfrm>
+            <a:off x="566928" y="4462272"/>
+            <a:ext cx="6858000" cy="0"/>
+          </a:xfrm>
+          <a:prstGeom prst="line">
+            <a:avLst/>
+          </a:prstGeom>
+          <a:noFill/>
+          <a:ln w="3810">
+            <a:solidFill>
+              <a:srgbClr val="CBD5E1"/>
+            </a:solidFill>
+            <a:prstDash val="solid"/>
+          </a:ln>
+        </p:spPr>
+      </p:sp>
+      <p:sp>
+        <p:nvSpPr>
+          <p:cNvPr id="27" name="Text 25"/>
+          <p:cNvSpPr/>
+          <p:nvPr/>
+        </p:nvSpPr>
+        <p:spPr>
+          <a:xfrm>
+            <a:off x="566928" y="4462272"/>
+            <a:ext cx="2606040" cy="402336"/>
+          </a:xfrm>
+          <a:prstGeom prst="rect">
+            <a:avLst/>
+          </a:prstGeom>
+          <a:noFill/>
+          <a:ln/>
+        </p:spPr>
+        <p:txBody>
+          <a:bodyPr wrap="square" lIns="0" tIns="0" rIns="0" bIns="0" rtlCol="0" anchor="ctr"/>
+          <a:lstStyle/>
+          <a:p>
+            <a:pPr indent="0" marL="0">
+              <a:lnSpc>
+                <a:spcPct val="120000"/>
+              </a:lnSpc>
+              <a:buNone/>
+            </a:pPr>
+            <a:r>
+              <a:rPr lang="en-US" sz="1400" dirty="0">
+                <a:solidFill>
+                  <a:srgbClr val="64748B"/>
+                </a:solidFill>
+                <a:latin typeface="Pretendard" pitchFamily="34" charset="0"/>
+                <a:ea typeface="Pretendard" pitchFamily="34" charset="-122"/>
+                <a:cs typeface="Pretendard" pitchFamily="34" charset="-120"/>
+              </a:rPr>
+              <a:t>주구조</a:t>
+            </a:r>
+            <a:endParaRPr lang="en-US" sz="1400" dirty="0"/>
+          </a:p>
+        </p:txBody>
+      </p:sp>
+      <p:sp>
+        <p:nvSpPr>
+          <p:cNvPr id="28" name="Text 26"/>
+          <p:cNvSpPr/>
+          <p:nvPr/>
+        </p:nvSpPr>
+        <p:spPr>
+          <a:xfrm>
+            <a:off x="3172968" y="4462272"/>
+            <a:ext cx="4251960" cy="402336"/>
+          </a:xfrm>
+          <a:prstGeom prst="rect">
+            <a:avLst/>
+          </a:prstGeom>
+          <a:noFill/>
+          <a:ln/>
+        </p:spPr>
+        <p:txBody>
+          <a:bodyPr wrap="square" lIns="0" tIns="0" rIns="0" bIns="0" rtlCol="0" anchor="ctr"/>
+          <a:lstStyle/>
+          <a:p>
+            <a:pPr indent="0" marL="0">
+              <a:lnSpc>
+                <a:spcPct val="120000"/>
+              </a:lnSpc>
+              <a:buNone/>
+            </a:pPr>
+            <a:r>
+              <a:rPr lang="en-US" sz="1400" b="1" dirty="0">
+                <a:solidFill>
+                  <a:srgbClr val="0F172A"/>
+                </a:solidFill>
+                <a:latin typeface="Pretendard" pitchFamily="34" charset="0"/>
+                <a:ea typeface="Pretendard" pitchFamily="34" charset="-122"/>
+                <a:cs typeface="Pretendard" pitchFamily="34" charset="-120"/>
+              </a:rPr>
+              <a:t>철근콘크리트구조</a:t>
+            </a:r>
+            <a:endParaRPr lang="en-US" sz="1400" dirty="0"/>
+          </a:p>
+        </p:txBody>
+      </p:sp>
+      <p:sp>
+        <p:nvSpPr>
+          <p:cNvPr id="29" name="Shape 27"/>
+          <p:cNvSpPr/>
+          <p:nvPr/>
+        </p:nvSpPr>
+        <p:spPr>
+          <a:xfrm>
+            <a:off x="566928" y="4864608"/>
+            <a:ext cx="6858000" cy="0"/>
+          </a:xfrm>
+          <a:prstGeom prst="line">
+            <a:avLst/>
+          </a:prstGeom>
+          <a:noFill/>
+          <a:ln w="3810">
+            <a:solidFill>
+              <a:srgbClr val="CBD5E1"/>
+            </a:solidFill>
+            <a:prstDash val="solid"/>
+          </a:ln>
+        </p:spPr>
+      </p:sp>
+      <p:sp>
+        <p:nvSpPr>
+          <p:cNvPr id="30" name="Text 28"/>
+          <p:cNvSpPr/>
+          <p:nvPr/>
+        </p:nvSpPr>
+        <p:spPr>
+          <a:xfrm>
+            <a:off x="566928" y="4864608"/>
+            <a:ext cx="2606040" cy="402336"/>
+          </a:xfrm>
+          <a:prstGeom prst="rect">
+            <a:avLst/>
+          </a:prstGeom>
+          <a:noFill/>
+          <a:ln/>
+        </p:spPr>
+        <p:txBody>
+          <a:bodyPr wrap="square" lIns="0" tIns="0" rIns="0" bIns="0" rtlCol="0" anchor="ctr"/>
+          <a:lstStyle/>
+          <a:p>
+            <a:pPr indent="0" marL="0">
+              <a:lnSpc>
+                <a:spcPct val="120000"/>
+              </a:lnSpc>
+              <a:buNone/>
+            </a:pPr>
+            <a:r>
+              <a:rPr lang="en-US" sz="1400" dirty="0">
+                <a:solidFill>
+                  <a:srgbClr val="64748B"/>
+                </a:solidFill>
+                <a:latin typeface="Pretendard" pitchFamily="34" charset="0"/>
+                <a:ea typeface="Pretendard" pitchFamily="34" charset="-122"/>
+                <a:cs typeface="Pretendard" pitchFamily="34" charset="-120"/>
+              </a:rPr>
+              <a:t>매매 희망가</a:t>
+            </a:r>
+            <a:endParaRPr lang="en-US" sz="1400" dirty="0"/>
+          </a:p>
+        </p:txBody>
+      </p:sp>
+      <p:sp>
+        <p:nvSpPr>
+          <p:cNvPr id="31" name="Text 29"/>
+          <p:cNvSpPr/>
+          <p:nvPr/>
+        </p:nvSpPr>
+        <p:spPr>
+          <a:xfrm>
+            <a:off x="3172968" y="4864608"/>
+            <a:ext cx="4251960" cy="402336"/>
+          </a:xfrm>
+          <a:prstGeom prst="rect">
+            <a:avLst/>
+          </a:prstGeom>
+          <a:noFill/>
+          <a:ln/>
+        </p:spPr>
+        <p:txBody>
+          <a:bodyPr wrap="square" lIns="0" tIns="0" rIns="0" bIns="0" rtlCol="0" anchor="ctr"/>
+          <a:lstStyle/>
+          <a:p>
+            <a:pPr indent="0" marL="0">
+              <a:lnSpc>
+                <a:spcPct val="120000"/>
+              </a:lnSpc>
+              <a:buNone/>
+            </a:pPr>
+            <a:r>
+              <a:rPr lang="en-US" sz="1400" b="1" dirty="0">
+                <a:solidFill>
+                  <a:srgbClr val="0F172A"/>
+                </a:solidFill>
+                <a:latin typeface="Pretendard" pitchFamily="34" charset="0"/>
+                <a:ea typeface="Pretendard" pitchFamily="34" charset="-122"/>
+                <a:cs typeface="Pretendard" pitchFamily="34" charset="-120"/>
+              </a:rPr>
+              <a:t>115억</a:t>
+            </a:r>
+            <a:endParaRPr lang="en-US" sz="1400" dirty="0"/>
+          </a:p>
+        </p:txBody>
+      </p:sp>
+      <p:sp>
+        <p:nvSpPr>
+          <p:cNvPr id="32" name="Shape 30"/>
           <p:cNvSpPr/>
           <p:nvPr/>
         </p:nvSpPr>
@@ -4675,18 +5643,18 @@
       </p:sp>
       <p:sp>
         <p:nvSpPr>
-          <p:cNvPr id="9" name="Shape 7"/>
+          <p:cNvPr id="33" name="Shape 31"/>
           <p:cNvSpPr/>
           <p:nvPr/>
         </p:nvSpPr>
         <p:spPr>
           <a:xfrm>
             <a:off x="7784287" y="1645920"/>
-            <a:ext cx="3840480" cy="2103120"/>
+            <a:ext cx="3840480" cy="1645920"/>
           </a:xfrm>
           <a:prstGeom prst="roundRect">
             <a:avLst>
-              <a:gd name="adj" fmla="val 2609"/>
+              <a:gd name="adj" fmla="val 3333"/>
             </a:avLst>
           </a:prstGeom>
           <a:solidFill>
@@ -4697,14 +5665,14 @@
       </p:sp>
       <p:sp>
         <p:nvSpPr>
-          <p:cNvPr id="10" name="Shape 8"/>
+          <p:cNvPr id="34" name="Shape 32"/>
           <p:cNvSpPr/>
           <p:nvPr/>
         </p:nvSpPr>
         <p:spPr>
           <a:xfrm>
             <a:off x="7784287" y="1700784"/>
-            <a:ext cx="36576" cy="1993392"/>
+            <a:ext cx="36576" cy="1536192"/>
           </a:xfrm>
           <a:prstGeom prst="rect">
             <a:avLst/>
@@ -4717,7 +5685,7 @@
       </p:sp>
       <p:sp>
         <p:nvSpPr>
-          <p:cNvPr id="11" name="Text 9"/>
+          <p:cNvPr id="35" name="Text 33"/>
           <p:cNvSpPr/>
           <p:nvPr/>
         </p:nvSpPr>
@@ -4739,305 +5707,85 @@
             <a:pPr indent="0" marL="0">
               <a:buNone/>
             </a:pPr>
-            <a:r>
-              <a:rPr lang="en-US" sz="1050" b="1" dirty="0">
-                <a:solidFill>
-                  <a:srgbClr val="1D4ED8"/>
+            <a:endParaRPr lang="en-US" sz="1050" dirty="0"/>
+          </a:p>
+        </p:txBody>
+      </p:sp>
+      <p:sp>
+        <p:nvSpPr>
+          <p:cNvPr id="36" name="Text 34"/>
+          <p:cNvSpPr/>
+          <p:nvPr/>
+        </p:nvSpPr>
+        <p:spPr>
+          <a:xfrm>
+            <a:off x="7967167" y="1975104"/>
+            <a:ext cx="3511296" cy="1243584"/>
+          </a:xfrm>
+          <a:prstGeom prst="rect">
+            <a:avLst/>
+          </a:prstGeom>
+          <a:noFill/>
+          <a:ln/>
+        </p:spPr>
+        <p:txBody>
+          <a:bodyPr wrap="square" lIns="0" tIns="0" rIns="0" bIns="0" rtlCol="0" anchor="t"/>
+          <a:lstStyle/>
+          <a:p>
+            <a:pPr indent="0" marL="0">
+              <a:lnSpc>
+                <a:spcPct val="120000"/>
+              </a:lnSpc>
+              <a:buNone/>
+            </a:pPr>
+            <a:r>
+              <a:rPr lang="en-US" sz="930" dirty="0">
+                <a:solidFill>
+                  <a:srgbClr val="0F172A"/>
                 </a:solidFill>
                 <a:latin typeface="Pretendard" pitchFamily="34" charset="0"/>
                 <a:ea typeface="Pretendard" pitchFamily="34" charset="-122"/>
                 <a:cs typeface="Pretendard" pitchFamily="34" charset="-120"/>
               </a:rPr>
-              <a:t>토지 및 건물 분석 포인트</a:t>
-            </a:r>
-            <a:endParaRPr lang="en-US" sz="1050" dirty="0"/>
-          </a:p>
-        </p:txBody>
-      </p:sp>
-      <p:sp>
-        <p:nvSpPr>
-          <p:cNvPr id="12" name="Text 10"/>
-          <p:cNvSpPr/>
-          <p:nvPr/>
-        </p:nvSpPr>
-        <p:spPr>
-          <a:xfrm>
-            <a:off x="7967167" y="1975104"/>
-            <a:ext cx="3511296" cy="1700784"/>
-          </a:xfrm>
-          <a:prstGeom prst="rect">
-            <a:avLst/>
-          </a:prstGeom>
-          <a:noFill/>
-          <a:ln/>
-        </p:spPr>
-        <p:txBody>
-          <a:bodyPr wrap="square" lIns="0" tIns="0" rIns="0" bIns="0" rtlCol="0" anchor="t"/>
-          <a:lstStyle/>
-          <a:p>
-            <a:pPr marL="342900" indent="-342900">
-              <a:lnSpc>
-                <a:spcPct val="120000"/>
-              </a:lnSpc>
-              <a:buSzPct val="100000"/>
-              <a:buChar char="•"/>
-            </a:pPr>
-            <a:r>
-              <a:rPr lang="en-US" sz="930" dirty="0">
-                <a:solidFill>
-                  <a:srgbClr val="0F172A"/>
+              <a:t>본 매물은 서초권역 대로변 입지의 우량 메디컬 테넌트 만실 운영 자산입니다.</a:t>
+            </a:r>
+            <a:endParaRPr lang="en-US" sz="930" dirty="0"/>
+          </a:p>
+        </p:txBody>
+      </p:sp>
+      <p:sp>
+        <p:nvSpPr>
+          <p:cNvPr id="37" name="Text 35"/>
+          <p:cNvSpPr/>
+          <p:nvPr/>
+        </p:nvSpPr>
+        <p:spPr>
+          <a:xfrm>
+            <a:off x="566928" y="6419088"/>
+            <a:ext cx="11057839" cy="201168"/>
+          </a:xfrm>
+          <a:prstGeom prst="rect">
+            <a:avLst/>
+          </a:prstGeom>
+          <a:noFill/>
+          <a:ln/>
+        </p:spPr>
+        <p:txBody>
+          <a:bodyPr wrap="square" lIns="0" tIns="0" rIns="0" bIns="0" rtlCol="0" anchor="ctr"/>
+          <a:lstStyle/>
+          <a:p>
+            <a:pPr algn="ctr" indent="0" marL="0">
+              <a:buNone/>
+            </a:pPr>
+            <a:r>
+              <a:rPr lang="en-US" sz="750" dirty="0">
+                <a:solidFill>
+                  <a:srgbClr val="64748B"/>
                 </a:solidFill>
                 <a:latin typeface="Pretendard" pitchFamily="34" charset="0"/>
                 <a:ea typeface="Pretendard" pitchFamily="34" charset="-122"/>
                 <a:cs typeface="Pretendard" pitchFamily="34" charset="-120"/>
               </a:rPr>
-              <a:t>서초대로 25m 메인 도로변 우수한 가시성 확보</a:t>
-            </a:r>
-            <a:endParaRPr lang="en-US" sz="930" dirty="0"/>
-          </a:p>
-          <a:p>
-            <a:pPr marL="342900" indent="-342900">
-              <a:lnSpc>
-                <a:spcPct val="120000"/>
-              </a:lnSpc>
-              <a:buSzPct val="100000"/>
-              <a:buChar char="•"/>
-            </a:pPr>
-            <a:r>
-              <a:rPr lang="en-US" sz="930" dirty="0">
-                <a:solidFill>
-                  <a:srgbClr val="0F172A"/>
-                </a:solidFill>
-                <a:latin typeface="Pretendard" pitchFamily="34" charset="0"/>
-                <a:ea typeface="Pretendard" pitchFamily="34" charset="-122"/>
-                <a:cs typeface="Pretendard" pitchFamily="34" charset="-120"/>
-              </a:rPr>
-              <a:t>제3종일반주거지역 법정 용적률 완비 자산</a:t>
-            </a:r>
-            <a:endParaRPr lang="en-US" sz="930" dirty="0"/>
-          </a:p>
-          <a:p>
-            <a:pPr marL="342900" indent="-342900">
-              <a:lnSpc>
-                <a:spcPct val="120000"/>
-              </a:lnSpc>
-              <a:buSzPct val="100000"/>
-              <a:buChar char="•"/>
-            </a:pPr>
-            <a:r>
-              <a:rPr lang="en-US" sz="930" dirty="0">
-                <a:solidFill>
-                  <a:srgbClr val="0F172A"/>
-                </a:solidFill>
-                <a:latin typeface="Pretendard" pitchFamily="34" charset="0"/>
-                <a:ea typeface="Pretendard" pitchFamily="34" charset="-122"/>
-                <a:cs typeface="Pretendard" pitchFamily="34" charset="-120"/>
-              </a:rPr>
-              <a:t>침대용 승강기 완비로 병의원 입점 최적화 구조</a:t>
-            </a:r>
-            <a:endParaRPr lang="en-US" sz="930" dirty="0"/>
-          </a:p>
-        </p:txBody>
-      </p:sp>
-      <p:sp>
-        <p:nvSpPr>
-          <p:cNvPr id="13" name="Shape 11"/>
-          <p:cNvSpPr/>
-          <p:nvPr/>
-        </p:nvSpPr>
-        <p:spPr>
-          <a:xfrm>
-            <a:off x="7784287" y="3977640"/>
-            <a:ext cx="3840480" cy="2148840"/>
-          </a:xfrm>
-          <a:prstGeom prst="roundRect">
-            <a:avLst>
-              <a:gd name="adj" fmla="val 2553"/>
-            </a:avLst>
-          </a:prstGeom>
-          <a:solidFill>
-            <a:srgbClr val="DBEAFE"/>
-          </a:solidFill>
-          <a:ln/>
-        </p:spPr>
-      </p:sp>
-      <p:sp>
-        <p:nvSpPr>
-          <p:cNvPr id="14" name="Shape 12"/>
-          <p:cNvSpPr/>
-          <p:nvPr/>
-        </p:nvSpPr>
-        <p:spPr>
-          <a:xfrm>
-            <a:off x="7784287" y="4032504"/>
-            <a:ext cx="36576" cy="2039112"/>
-          </a:xfrm>
-          <a:prstGeom prst="rect">
-            <a:avLst/>
-          </a:prstGeom>
-          <a:solidFill>
-            <a:srgbClr val="1D4ED8"/>
-          </a:solidFill>
-          <a:ln/>
-        </p:spPr>
-      </p:sp>
-      <p:sp>
-        <p:nvSpPr>
-          <p:cNvPr id="15" name="Text 13"/>
-          <p:cNvSpPr/>
-          <p:nvPr/>
-        </p:nvSpPr>
-        <p:spPr>
-          <a:xfrm>
-            <a:off x="7967167" y="4087368"/>
-            <a:ext cx="3511296" cy="201168"/>
-          </a:xfrm>
-          <a:prstGeom prst="rect">
-            <a:avLst/>
-          </a:prstGeom>
-          <a:noFill/>
-          <a:ln/>
-        </p:spPr>
-        <p:txBody>
-          <a:bodyPr wrap="square" lIns="0" tIns="0" rIns="0" bIns="0" rtlCol="0" anchor="ctr"/>
-          <a:lstStyle/>
-          <a:p>
-            <a:pPr indent="0" marL="0">
-              <a:buNone/>
-            </a:pPr>
-            <a:r>
-              <a:rPr lang="en-US" sz="1050" b="1" dirty="0">
-                <a:solidFill>
-                  <a:srgbClr val="1D4ED8"/>
-                </a:solidFill>
-                <a:latin typeface="Pretendard" pitchFamily="34" charset="0"/>
-                <a:ea typeface="Pretendard" pitchFamily="34" charset="-122"/>
-                <a:cs typeface="Pretendard" pitchFamily="34" charset="-120"/>
-              </a:rPr>
-              <a:t>물건 실사 및 관리 상태</a:t>
-            </a:r>
-            <a:endParaRPr lang="en-US" sz="1050" dirty="0"/>
-          </a:p>
-        </p:txBody>
-      </p:sp>
-      <p:sp>
-        <p:nvSpPr>
-          <p:cNvPr id="16" name="Text 14"/>
-          <p:cNvSpPr/>
-          <p:nvPr/>
-        </p:nvSpPr>
-        <p:spPr>
-          <a:xfrm>
-            <a:off x="7967167" y="4306824"/>
-            <a:ext cx="3511296" cy="1746504"/>
-          </a:xfrm>
-          <a:prstGeom prst="rect">
-            <a:avLst/>
-          </a:prstGeom>
-          <a:noFill/>
-          <a:ln/>
-        </p:spPr>
-        <p:txBody>
-          <a:bodyPr wrap="square" lIns="0" tIns="0" rIns="0" bIns="0" rtlCol="0" anchor="t"/>
-          <a:lstStyle/>
-          <a:p>
-            <a:pPr marL="342900" indent="-342900">
-              <a:lnSpc>
-                <a:spcPct val="120000"/>
-              </a:lnSpc>
-              <a:buSzPct val="100000"/>
-              <a:buChar char="•"/>
-            </a:pPr>
-            <a:r>
-              <a:rPr lang="en-US" sz="930" dirty="0">
-                <a:solidFill>
-                  <a:srgbClr val="0F172A"/>
-                </a:solidFill>
-                <a:latin typeface="Pretendard" pitchFamily="34" charset="0"/>
-                <a:ea typeface="Pretendard" pitchFamily="34" charset="-122"/>
-                <a:cs typeface="Pretendard" pitchFamily="34" charset="-120"/>
-              </a:rPr>
-              <a:t>2017년 준공 신축급 상태로 누수·균열 0건</a:t>
-            </a:r>
-            <a:endParaRPr lang="en-US" sz="930" dirty="0"/>
-          </a:p>
-          <a:p>
-            <a:pPr marL="342900" indent="-342900">
-              <a:lnSpc>
-                <a:spcPct val="120000"/>
-              </a:lnSpc>
-              <a:buSzPct val="100000"/>
-              <a:buChar char="•"/>
-            </a:pPr>
-            <a:r>
-              <a:rPr lang="en-US" sz="930" dirty="0">
-                <a:solidFill>
-                  <a:srgbClr val="0F172A"/>
-                </a:solidFill>
-                <a:latin typeface="Pretendard" pitchFamily="34" charset="0"/>
-                <a:ea typeface="Pretendard" pitchFamily="34" charset="-122"/>
-                <a:cs typeface="Pretendard" pitchFamily="34" charset="-120"/>
-              </a:rPr>
-              <a:t>단독 법인 소유로 권리관계 투명</a:t>
-            </a:r>
-            <a:endParaRPr lang="en-US" sz="930" dirty="0"/>
-          </a:p>
-          <a:p>
-            <a:pPr marL="342900" indent="-342900">
-              <a:lnSpc>
-                <a:spcPct val="120000"/>
-              </a:lnSpc>
-              <a:buSzPct val="100000"/>
-              <a:buChar char="•"/>
-            </a:pPr>
-            <a:r>
-              <a:rPr lang="en-US" sz="930" dirty="0">
-                <a:solidFill>
-                  <a:srgbClr val="0F172A"/>
-                </a:solidFill>
-                <a:latin typeface="Pretendard" pitchFamily="34" charset="0"/>
-                <a:ea typeface="Pretendard" pitchFamily="34" charset="-122"/>
-                <a:cs typeface="Pretendard" pitchFamily="34" charset="-120"/>
-              </a:rPr>
-              <a:t>1금융권 담보대출 85억 원 승계 적격</a:t>
-            </a:r>
-            <a:endParaRPr lang="en-US" sz="930" dirty="0"/>
-          </a:p>
-        </p:txBody>
-      </p:sp>
-      <p:sp>
-        <p:nvSpPr>
-          <p:cNvPr id="17" name="Text 15"/>
-          <p:cNvSpPr/>
-          <p:nvPr/>
-        </p:nvSpPr>
-        <p:spPr>
-          <a:xfrm>
-            <a:off x="566928" y="6419088"/>
-            <a:ext cx="11057839" cy="201168"/>
-          </a:xfrm>
-          <a:prstGeom prst="rect">
-            <a:avLst/>
-          </a:prstGeom>
-          <a:noFill/>
-          <a:ln/>
-        </p:spPr>
-        <p:txBody>
-          <a:bodyPr wrap="square" lIns="0" tIns="0" rIns="0" bIns="0" rtlCol="0" anchor="ctr"/>
-          <a:lstStyle/>
-          <a:p>
-            <a:pPr algn="ctr" indent="0" marL="0">
-              <a:buNone/>
-            </a:pPr>
-            <a:r>
-              <a:rPr lang="en-US" sz="750" dirty="0">
-                <a:solidFill>
-                  <a:srgbClr val="64748B"/>
-                </a:solidFill>
-                <a:latin typeface="Pretendard" pitchFamily="34" charset="0"/>
-                <a:ea typeface="Pretendard" pitchFamily="34" charset="-122"/>
-                <a:cs typeface="Pretendard" pitchFamily="34" charset="-120"/>
-              </a:rPr>
               <a:t>크리딜  ·    ·  4</a:t>
             </a:r>
             <a:endParaRPr lang="en-US" sz="750" dirty="0"/>
@@ -5046,7 +5794,7 @@
       </p:sp>
       <p:sp>
         <p:nvSpPr>
-          <p:cNvPr id="18" name="Shape 16"/>
+          <p:cNvPr id="38" name="Shape 36"/>
           <p:cNvSpPr/>
           <p:nvPr/>
         </p:nvSpPr>
@@ -7432,7 +8180,7 @@
                 <a:ea typeface="Pretendard" pitchFamily="34" charset="-122"/>
                 <a:cs typeface="Pretendard" pitchFamily="34" charset="-120"/>
               </a:rPr>
-              <a:t>용도 리스크</a:t>
+              <a:t>건물 물리적 상태</a:t>
             </a:r>
             <a:endParaRPr lang="en-US" sz="1350" dirty="0"/>
           </a:p>
@@ -7471,7 +8219,7 @@
                 <a:ea typeface="Pretendard" pitchFamily="34" charset="-122"/>
                 <a:cs typeface="Pretendard" pitchFamily="34" charset="-120"/>
               </a:rPr>
-              <a:t>—</a:t>
+              <a:t>2017년 준공 신축급 상태 (누수/균열</a:t>
             </a:r>
             <a:endParaRPr lang="en-US" sz="1500" dirty="0"/>
           </a:p>
@@ -7511,7 +8259,7 @@
                 <a:ea typeface="Pretendard" pitchFamily="34" charset="-122"/>
                 <a:cs typeface="Pretendard" pitchFamily="34" charset="-120"/>
               </a:rPr>
-              <a:t>{"ok":true,"mocked":true,"extractedFields":{"area_signal":"역삼","asset_type":"오피스빌딩","price_band":"300억","size_signal":"3000평(약 9917.4㎡)"},"extractedFacts":{"region":"역삼","exactAddressCandidate":"역삼동 7</a:t>
+              <a:t>준공 10년 미만으로 대규모 수선비용 발생 가능성 낮음</a:t>
             </a:r>
             <a:endParaRPr lang="en-US" sz="1250" dirty="0"/>
           </a:p>
@@ -7519,14 +8267,79 @@
       </p:sp>
       <p:sp>
         <p:nvSpPr>
-          <p:cNvPr id="11" name="Text 9"/>
-          <p:cNvSpPr/>
-          <p:nvPr/>
-        </p:nvSpPr>
-        <p:spPr>
-          <a:xfrm>
-            <a:off x="566928" y="6419088"/>
-            <a:ext cx="11057839" cy="201168"/>
+          <p:cNvPr id="11" name="Shape 9"/>
+          <p:cNvSpPr/>
+          <p:nvPr/>
+        </p:nvSpPr>
+        <p:spPr>
+          <a:xfrm>
+            <a:off x="4344314" y="1417320"/>
+            <a:ext cx="3503066" cy="3611880"/>
+          </a:xfrm>
+          <a:prstGeom prst="rect">
+            <a:avLst/>
+          </a:prstGeom>
+          <a:solidFill>
+            <a:srgbClr val="F8FAFC"/>
+          </a:solidFill>
+          <a:ln w="3810">
+            <a:solidFill>
+              <a:srgbClr val="CBD5E1"/>
+            </a:solidFill>
+            <a:prstDash val="solid"/>
+          </a:ln>
+        </p:spPr>
+      </p:sp>
+      <p:sp>
+        <p:nvSpPr>
+          <p:cNvPr id="12" name="Shape 10"/>
+          <p:cNvSpPr/>
+          <p:nvPr/>
+        </p:nvSpPr>
+        <p:spPr>
+          <a:xfrm>
+            <a:off x="4344314" y="1417320"/>
+            <a:ext cx="3503066" cy="36576"/>
+          </a:xfrm>
+          <a:prstGeom prst="rect">
+            <a:avLst/>
+          </a:prstGeom>
+          <a:solidFill>
+            <a:srgbClr val="6B8E00"/>
+          </a:solidFill>
+          <a:ln/>
+        </p:spPr>
+      </p:sp>
+      <p:sp>
+        <p:nvSpPr>
+          <p:cNvPr id="13" name="Shape 11"/>
+          <p:cNvSpPr/>
+          <p:nvPr/>
+        </p:nvSpPr>
+        <p:spPr>
+          <a:xfrm>
+            <a:off x="4344314" y="1417320"/>
+            <a:ext cx="3503066" cy="45720"/>
+          </a:xfrm>
+          <a:prstGeom prst="rect">
+            <a:avLst/>
+          </a:prstGeom>
+          <a:solidFill>
+            <a:srgbClr val="6B8E00"/>
+          </a:solidFill>
+          <a:ln/>
+        </p:spPr>
+      </p:sp>
+      <p:sp>
+        <p:nvSpPr>
+          <p:cNvPr id="14" name="Text 12"/>
+          <p:cNvSpPr/>
+          <p:nvPr/>
+        </p:nvSpPr>
+        <p:spPr>
+          <a:xfrm>
+            <a:off x="4572914" y="1618488"/>
+            <a:ext cx="3045866" cy="292608"/>
           </a:xfrm>
           <a:prstGeom prst="rect">
             <a:avLst/>
@@ -7538,18 +8351,403 @@
           <a:bodyPr wrap="square" lIns="0" tIns="0" rIns="0" bIns="0" rtlCol="0" anchor="ctr"/>
           <a:lstStyle/>
           <a:p>
-            <a:pPr algn="ctr" indent="0" marL="0">
-              <a:buNone/>
-            </a:pPr>
-            <a:r>
-              <a:rPr lang="en-US" sz="750" dirty="0">
-                <a:solidFill>
-                  <a:srgbClr val="64748B"/>
+            <a:pPr indent="0" marL="0">
+              <a:buNone/>
+            </a:pPr>
+            <a:r>
+              <a:rPr lang="en-US" sz="1350" b="1" dirty="0">
+                <a:solidFill>
+                  <a:srgbClr val="4F6A00"/>
                 </a:solidFill>
                 <a:latin typeface="Pretendard" pitchFamily="34" charset="0"/>
                 <a:ea typeface="Pretendard" pitchFamily="34" charset="-122"/>
                 <a:cs typeface="Pretendard" pitchFamily="34" charset="-120"/>
               </a:rPr>
+              <a:t>승강기 및 설비</a:t>
+            </a:r>
+            <a:endParaRPr lang="en-US" sz="1350" dirty="0"/>
+          </a:p>
+        </p:txBody>
+      </p:sp>
+      <p:sp>
+        <p:nvSpPr>
+          <p:cNvPr id="15" name="Text 13"/>
+          <p:cNvSpPr/>
+          <p:nvPr/>
+        </p:nvSpPr>
+        <p:spPr>
+          <a:xfrm>
+            <a:off x="4572914" y="1929384"/>
+            <a:ext cx="3045866" cy="347472"/>
+          </a:xfrm>
+          <a:prstGeom prst="rect">
+            <a:avLst/>
+          </a:prstGeom>
+          <a:noFill/>
+          <a:ln/>
+        </p:spPr>
+        <p:txBody>
+          <a:bodyPr wrap="square" lIns="0" tIns="0" rIns="0" bIns="0" rtlCol="0" anchor="ctr"/>
+          <a:lstStyle/>
+          <a:p>
+            <a:pPr indent="0" marL="0">
+              <a:buNone/>
+            </a:pPr>
+            <a:r>
+              <a:rPr lang="en-US" sz="1500" b="1" dirty="0">
+                <a:solidFill>
+                  <a:srgbClr val="0F172A"/>
+                </a:solidFill>
+                <a:latin typeface="Pretendard" pitchFamily="34" charset="0"/>
+                <a:ea typeface="Pretendard" pitchFamily="34" charset="-122"/>
+                <a:cs typeface="Pretendard" pitchFamily="34" charset="-120"/>
+              </a:rPr>
+              <a:t>15인승 침대용 승강기 및 냉난방 설비 </a:t>
+            </a:r>
+            <a:endParaRPr lang="en-US" sz="1500" dirty="0"/>
+          </a:p>
+        </p:txBody>
+      </p:sp>
+      <p:sp>
+        <p:nvSpPr>
+          <p:cNvPr id="16" name="Text 14"/>
+          <p:cNvSpPr/>
+          <p:nvPr/>
+        </p:nvSpPr>
+        <p:spPr>
+          <a:xfrm>
+            <a:off x="4572914" y="2313432"/>
+            <a:ext cx="3045866" cy="2606040"/>
+          </a:xfrm>
+          <a:prstGeom prst="rect">
+            <a:avLst/>
+          </a:prstGeom>
+          <a:noFill/>
+          <a:ln/>
+        </p:spPr>
+        <p:txBody>
+          <a:bodyPr wrap="square" lIns="0" tIns="0" rIns="0" bIns="0" rtlCol="0" anchor="t"/>
+          <a:lstStyle/>
+          <a:p>
+            <a:pPr marL="342900" indent="-342900">
+              <a:buSzPct val="100000"/>
+              <a:buChar char="•"/>
+            </a:pPr>
+            <a:r>
+              <a:rPr lang="en-US" sz="1250" dirty="0">
+                <a:solidFill>
+                  <a:srgbClr val="0F172A"/>
+                </a:solidFill>
+                <a:latin typeface="Pretendard" pitchFamily="34" charset="0"/>
+                <a:ea typeface="Pretendard" pitchFamily="34" charset="-122"/>
+                <a:cs typeface="Pretendard" pitchFamily="34" charset="-120"/>
+              </a:rPr>
+              <a:t>주기적 정기 점검 계약 유지로 관리 리스크 최소화</a:t>
+            </a:r>
+            <a:endParaRPr lang="en-US" sz="1250" dirty="0"/>
+          </a:p>
+        </p:txBody>
+      </p:sp>
+      <p:sp>
+        <p:nvSpPr>
+          <p:cNvPr id="17" name="Shape 15"/>
+          <p:cNvSpPr/>
+          <p:nvPr/>
+        </p:nvSpPr>
+        <p:spPr>
+          <a:xfrm>
+            <a:off x="8121701" y="1417320"/>
+            <a:ext cx="3503066" cy="3611880"/>
+          </a:xfrm>
+          <a:prstGeom prst="rect">
+            <a:avLst/>
+          </a:prstGeom>
+          <a:solidFill>
+            <a:srgbClr val="F8FAFC"/>
+          </a:solidFill>
+          <a:ln w="3810">
+            <a:solidFill>
+              <a:srgbClr val="CBD5E1"/>
+            </a:solidFill>
+            <a:prstDash val="solid"/>
+          </a:ln>
+        </p:spPr>
+      </p:sp>
+      <p:sp>
+        <p:nvSpPr>
+          <p:cNvPr id="18" name="Shape 16"/>
+          <p:cNvSpPr/>
+          <p:nvPr/>
+        </p:nvSpPr>
+        <p:spPr>
+          <a:xfrm>
+            <a:off x="8121701" y="1417320"/>
+            <a:ext cx="3503066" cy="36576"/>
+          </a:xfrm>
+          <a:prstGeom prst="rect">
+            <a:avLst/>
+          </a:prstGeom>
+          <a:solidFill>
+            <a:srgbClr val="6B8E00"/>
+          </a:solidFill>
+          <a:ln/>
+        </p:spPr>
+      </p:sp>
+      <p:sp>
+        <p:nvSpPr>
+          <p:cNvPr id="19" name="Shape 17"/>
+          <p:cNvSpPr/>
+          <p:nvPr/>
+        </p:nvSpPr>
+        <p:spPr>
+          <a:xfrm>
+            <a:off x="8121701" y="1417320"/>
+            <a:ext cx="3503066" cy="45720"/>
+          </a:xfrm>
+          <a:prstGeom prst="rect">
+            <a:avLst/>
+          </a:prstGeom>
+          <a:solidFill>
+            <a:srgbClr val="6B8E00"/>
+          </a:solidFill>
+          <a:ln/>
+        </p:spPr>
+      </p:sp>
+      <p:sp>
+        <p:nvSpPr>
+          <p:cNvPr id="20" name="Text 18"/>
+          <p:cNvSpPr/>
+          <p:nvPr/>
+        </p:nvSpPr>
+        <p:spPr>
+          <a:xfrm>
+            <a:off x="8350301" y="1618488"/>
+            <a:ext cx="3045866" cy="292608"/>
+          </a:xfrm>
+          <a:prstGeom prst="rect">
+            <a:avLst/>
+          </a:prstGeom>
+          <a:noFill/>
+          <a:ln/>
+        </p:spPr>
+        <p:txBody>
+          <a:bodyPr wrap="square" lIns="0" tIns="0" rIns="0" bIns="0" rtlCol="0" anchor="ctr"/>
+          <a:lstStyle/>
+          <a:p>
+            <a:pPr indent="0" marL="0">
+              <a:buNone/>
+            </a:pPr>
+            <a:r>
+              <a:rPr lang="en-US" sz="1350" b="1" dirty="0">
+                <a:solidFill>
+                  <a:srgbClr val="4F6A00"/>
+                </a:solidFill>
+                <a:latin typeface="Pretendard" pitchFamily="34" charset="0"/>
+                <a:ea typeface="Pretendard" pitchFamily="34" charset="-122"/>
+                <a:cs typeface="Pretendard" pitchFamily="34" charset="-120"/>
+              </a:rPr>
+              <a:t>임차인 이탈 위험</a:t>
+            </a:r>
+            <a:endParaRPr lang="en-US" sz="1350" dirty="0"/>
+          </a:p>
+        </p:txBody>
+      </p:sp>
+      <p:sp>
+        <p:nvSpPr>
+          <p:cNvPr id="21" name="Text 19"/>
+          <p:cNvSpPr/>
+          <p:nvPr/>
+        </p:nvSpPr>
+        <p:spPr>
+          <a:xfrm>
+            <a:off x="8350301" y="1929384"/>
+            <a:ext cx="3045866" cy="347472"/>
+          </a:xfrm>
+          <a:prstGeom prst="rect">
+            <a:avLst/>
+          </a:prstGeom>
+          <a:noFill/>
+          <a:ln/>
+        </p:spPr>
+        <p:txBody>
+          <a:bodyPr wrap="square" lIns="0" tIns="0" rIns="0" bIns="0" rtlCol="0" anchor="ctr"/>
+          <a:lstStyle/>
+          <a:p>
+            <a:pPr indent="0" marL="0">
+              <a:buNone/>
+            </a:pPr>
+            <a:r>
+              <a:rPr lang="en-US" sz="1500" b="1" dirty="0">
+                <a:solidFill>
+                  <a:srgbClr val="0F172A"/>
+                </a:solidFill>
+                <a:latin typeface="Pretendard" pitchFamily="34" charset="0"/>
+                <a:ea typeface="Pretendard" pitchFamily="34" charset="-122"/>
+                <a:cs typeface="Pretendard" pitchFamily="34" charset="-120"/>
+              </a:rPr>
+              <a:t>병의원/약국 인테리어 투자비(호실당 5억</a:t>
+            </a:r>
+            <a:endParaRPr lang="en-US" sz="1500" dirty="0"/>
+          </a:p>
+        </p:txBody>
+      </p:sp>
+      <p:sp>
+        <p:nvSpPr>
+          <p:cNvPr id="22" name="Text 20"/>
+          <p:cNvSpPr/>
+          <p:nvPr/>
+        </p:nvSpPr>
+        <p:spPr>
+          <a:xfrm>
+            <a:off x="8350301" y="2313432"/>
+            <a:ext cx="3045866" cy="2606040"/>
+          </a:xfrm>
+          <a:prstGeom prst="rect">
+            <a:avLst/>
+          </a:prstGeom>
+          <a:noFill/>
+          <a:ln/>
+        </p:spPr>
+        <p:txBody>
+          <a:bodyPr wrap="square" lIns="0" tIns="0" rIns="0" bIns="0" rtlCol="0" anchor="t"/>
+          <a:lstStyle/>
+          <a:p>
+            <a:pPr marL="342900" indent="-342900">
+              <a:buSzPct val="100000"/>
+              <a:buChar char="•"/>
+            </a:pPr>
+            <a:r>
+              <a:rPr lang="en-US" sz="1250" dirty="0">
+                <a:solidFill>
+                  <a:srgbClr val="0F172A"/>
+                </a:solidFill>
+                <a:latin typeface="Pretendard" pitchFamily="34" charset="0"/>
+                <a:ea typeface="Pretendard" pitchFamily="34" charset="-122"/>
+                <a:cs typeface="Pretendard" pitchFamily="34" charset="-120"/>
+              </a:rPr>
+              <a:t>WALE 3.5년 확보 및 만기 6개월 전 재계약 협상 개시</a:t>
+            </a:r>
+            <a:endParaRPr lang="en-US" sz="1250" dirty="0"/>
+          </a:p>
+        </p:txBody>
+      </p:sp>
+      <p:sp>
+        <p:nvSpPr>
+          <p:cNvPr id="23" name="Shape 21"/>
+          <p:cNvSpPr/>
+          <p:nvPr/>
+        </p:nvSpPr>
+        <p:spPr>
+          <a:xfrm>
+            <a:off x="566928" y="5193792"/>
+            <a:ext cx="11057839" cy="621792"/>
+          </a:xfrm>
+          <a:prstGeom prst="rect">
+            <a:avLst/>
+          </a:prstGeom>
+          <a:solidFill>
+            <a:srgbClr val="F8FAFC"/>
+          </a:solidFill>
+          <a:ln w="3810">
+            <a:solidFill>
+              <a:srgbClr val="CBD5E1"/>
+            </a:solidFill>
+            <a:prstDash val="solid"/>
+          </a:ln>
+        </p:spPr>
+      </p:sp>
+      <p:sp>
+        <p:nvSpPr>
+          <p:cNvPr id="24" name="Shape 22"/>
+          <p:cNvSpPr/>
+          <p:nvPr/>
+        </p:nvSpPr>
+        <p:spPr>
+          <a:xfrm>
+            <a:off x="566928" y="5193792"/>
+            <a:ext cx="11057839" cy="36576"/>
+          </a:xfrm>
+          <a:prstGeom prst="rect">
+            <a:avLst/>
+          </a:prstGeom>
+          <a:solidFill>
+            <a:srgbClr val="6B8E00"/>
+          </a:solidFill>
+          <a:ln/>
+        </p:spPr>
+      </p:sp>
+      <p:sp>
+        <p:nvSpPr>
+          <p:cNvPr id="25" name="Text 23"/>
+          <p:cNvSpPr/>
+          <p:nvPr/>
+        </p:nvSpPr>
+        <p:spPr>
+          <a:xfrm>
+            <a:off x="795528" y="5193792"/>
+            <a:ext cx="10600639" cy="621792"/>
+          </a:xfrm>
+          <a:prstGeom prst="rect">
+            <a:avLst/>
+          </a:prstGeom>
+          <a:noFill/>
+          <a:ln/>
+        </p:spPr>
+        <p:txBody>
+          <a:bodyPr wrap="square" lIns="0" tIns="0" rIns="0" bIns="0" rtlCol="0" anchor="ctr"/>
+          <a:lstStyle/>
+          <a:p>
+            <a:pPr indent="0" marL="0">
+              <a:buNone/>
+            </a:pPr>
+            <a:r>
+              <a:rPr lang="en-US" sz="1200" dirty="0">
+                <a:solidFill>
+                  <a:srgbClr val="0F172A"/>
+                </a:solidFill>
+                <a:latin typeface="Pretendard" pitchFamily="34" charset="0"/>
+                <a:ea typeface="Pretendard" pitchFamily="34" charset="-122"/>
+                <a:cs typeface="Pretendard" pitchFamily="34" charset="-120"/>
+              </a:rPr>
+              <a:t>실사 총평: 자산의 물리적·권리적 하자가 없으며, 세부 임대차 계약서 및 등기사항증명서는 LOI 접수 후 원본 열람 검토 여지가 있으나, 관련 법규·인허가·시설 요건의 현장 확인이 필요합니다..</a:t>
+            </a:r>
+            <a:endParaRPr lang="en-US" sz="1200" dirty="0"/>
+          </a:p>
+        </p:txBody>
+      </p:sp>
+      <p:sp>
+        <p:nvSpPr>
+          <p:cNvPr id="26" name="Text 24"/>
+          <p:cNvSpPr/>
+          <p:nvPr/>
+        </p:nvSpPr>
+        <p:spPr>
+          <a:xfrm>
+            <a:off x="566928" y="6419088"/>
+            <a:ext cx="11057839" cy="201168"/>
+          </a:xfrm>
+          <a:prstGeom prst="rect">
+            <a:avLst/>
+          </a:prstGeom>
+          <a:noFill/>
+          <a:ln/>
+        </p:spPr>
+        <p:txBody>
+          <a:bodyPr wrap="square" lIns="0" tIns="0" rIns="0" bIns="0" rtlCol="0" anchor="ctr"/>
+          <a:lstStyle/>
+          <a:p>
+            <a:pPr algn="ctr" indent="0" marL="0">
+              <a:buNone/>
+            </a:pPr>
+            <a:r>
+              <a:rPr lang="en-US" sz="750" dirty="0">
+                <a:solidFill>
+                  <a:srgbClr val="64748B"/>
+                </a:solidFill>
+                <a:latin typeface="Pretendard" pitchFamily="34" charset="0"/>
+                <a:ea typeface="Pretendard" pitchFamily="34" charset="-122"/>
+                <a:cs typeface="Pretendard" pitchFamily="34" charset="-120"/>
+              </a:rPr>
               <a:t>크리딜  ·    ·  7</a:t>
             </a:r>
             <a:endParaRPr lang="en-US" sz="750" dirty="0"/>
@@ -7558,7 +8756,7 @@
       </p:sp>
       <p:sp>
         <p:nvSpPr>
-          <p:cNvPr id="12" name="Shape 10"/>
+          <p:cNvPr id="27" name="Shape 25"/>
           <p:cNvSpPr/>
           <p:nvPr/>
         </p:nvSpPr>
@@ -7742,7 +8940,7 @@
                 <a:ea typeface="Pretendard" pitchFamily="34" charset="-122"/>
                 <a:cs typeface="Pretendard" pitchFamily="34" charset="-120"/>
               </a:rPr>
-              <a:t>3대 핵심 투자 포인트 (Investment Highlights)</a:t>
+              <a:t>밸류업 시나리오 (AI 추정)</a:t>
             </a:r>
             <a:endParaRPr lang="en-US" sz="1050" dirty="0"/>
           </a:p>
@@ -7751,642 +8949,6 @@
       <p:sp>
         <p:nvSpPr>
           <p:cNvPr id="6" name="Shape 4"/>
-          <p:cNvSpPr/>
-          <p:nvPr/>
-        </p:nvSpPr>
-        <p:spPr>
-          <a:xfrm>
-            <a:off x="566928" y="1481328"/>
-            <a:ext cx="3472586" cy="3474720"/>
-          </a:xfrm>
-          <a:prstGeom prst="roundRect">
-            <a:avLst>
-              <a:gd name="adj" fmla="val 2107"/>
-            </a:avLst>
-          </a:prstGeom>
-          <a:solidFill>
-            <a:srgbClr val="F8FAFC"/>
-          </a:solidFill>
-          <a:ln w="10160">
-            <a:solidFill>
-              <a:srgbClr val="CBD5E1"/>
-            </a:solidFill>
-            <a:prstDash val="solid"/>
-          </a:ln>
-        </p:spPr>
-      </p:sp>
-      <p:sp>
-        <p:nvSpPr>
-          <p:cNvPr id="7" name="Shape 5"/>
-          <p:cNvSpPr/>
-          <p:nvPr/>
-        </p:nvSpPr>
-        <p:spPr>
-          <a:xfrm>
-            <a:off x="566928" y="1481328"/>
-            <a:ext cx="3472586" cy="54864"/>
-          </a:xfrm>
-          <a:prstGeom prst="rect">
-            <a:avLst/>
-          </a:prstGeom>
-          <a:solidFill>
-            <a:srgbClr val="6B8E00"/>
-          </a:solidFill>
-          <a:ln/>
-        </p:spPr>
-      </p:sp>
-      <p:sp>
-        <p:nvSpPr>
-          <p:cNvPr id="8" name="Shape 6"/>
-          <p:cNvSpPr/>
-          <p:nvPr/>
-        </p:nvSpPr>
-        <p:spPr>
-          <a:xfrm>
-            <a:off x="795528" y="1755648"/>
-            <a:ext cx="475488" cy="292608"/>
-          </a:xfrm>
-          <a:prstGeom prst="roundRect">
-            <a:avLst>
-              <a:gd name="adj" fmla="val 12500"/>
-            </a:avLst>
-          </a:prstGeom>
-          <a:solidFill>
-            <a:srgbClr val="A3D900"/>
-          </a:solidFill>
-          <a:ln/>
-        </p:spPr>
-      </p:sp>
-      <p:sp>
-        <p:nvSpPr>
-          <p:cNvPr id="9" name="Text 7"/>
-          <p:cNvSpPr/>
-          <p:nvPr/>
-        </p:nvSpPr>
-        <p:spPr>
-          <a:xfrm>
-            <a:off x="795528" y="1755648"/>
-            <a:ext cx="475488" cy="292608"/>
-          </a:xfrm>
-          <a:prstGeom prst="rect">
-            <a:avLst/>
-          </a:prstGeom>
-          <a:noFill/>
-          <a:ln/>
-        </p:spPr>
-        <p:txBody>
-          <a:bodyPr wrap="square" lIns="0" tIns="0" rIns="0" bIns="0" rtlCol="0" anchor="ctr"/>
-          <a:lstStyle/>
-          <a:p>
-            <a:pPr algn="ctr" indent="0" marL="0">
-              <a:buNone/>
-            </a:pPr>
-            <a:r>
-              <a:rPr lang="en-US" sz="1100" b="1" dirty="0">
-                <a:solidFill>
-                  <a:srgbClr val="4F6A00"/>
-                </a:solidFill>
-                <a:latin typeface="Arial" pitchFamily="34" charset="0"/>
-                <a:ea typeface="Arial" pitchFamily="34" charset="-122"/>
-                <a:cs typeface="Arial" pitchFamily="34" charset="-120"/>
-              </a:rPr>
-              <a:t>01</a:t>
-            </a:r>
-            <a:endParaRPr lang="en-US" sz="1100" dirty="0"/>
-          </a:p>
-        </p:txBody>
-      </p:sp>
-      <p:sp>
-        <p:nvSpPr>
-          <p:cNvPr id="10" name="Text 8"/>
-          <p:cNvSpPr/>
-          <p:nvPr/>
-        </p:nvSpPr>
-        <p:spPr>
-          <a:xfrm>
-            <a:off x="795528" y="2194560"/>
-            <a:ext cx="3015386" cy="365760"/>
-          </a:xfrm>
-          <a:prstGeom prst="rect">
-            <a:avLst/>
-          </a:prstGeom>
-          <a:noFill/>
-          <a:ln/>
-        </p:spPr>
-        <p:txBody>
-          <a:bodyPr wrap="square" lIns="0" tIns="0" rIns="0" bIns="0" rtlCol="0" anchor="t"/>
-          <a:lstStyle/>
-          <a:p>
-            <a:pPr indent="0" marL="0">
-              <a:buNone/>
-            </a:pPr>
-            <a:r>
-              <a:rPr lang="en-US" sz="1500" b="1" dirty="0">
-                <a:solidFill>
-                  <a:srgbClr val="0F172A"/>
-                </a:solidFill>
-                <a:latin typeface="Pretendard" pitchFamily="34" charset="0"/>
-                <a:ea typeface="Pretendard" pitchFamily="34" charset="-122"/>
-                <a:cs typeface="Pretendard" pitchFamily="34" charset="-120"/>
-              </a:rPr>
-              <a:t>원금 안전판 확보</a:t>
-            </a:r>
-            <a:endParaRPr lang="en-US" sz="1500" dirty="0"/>
-          </a:p>
-        </p:txBody>
-      </p:sp>
-      <p:sp>
-        <p:nvSpPr>
-          <p:cNvPr id="11" name="Shape 9"/>
-          <p:cNvSpPr/>
-          <p:nvPr/>
-        </p:nvSpPr>
-        <p:spPr>
-          <a:xfrm>
-            <a:off x="795528" y="2624328"/>
-            <a:ext cx="3015386" cy="0"/>
-          </a:xfrm>
-          <a:prstGeom prst="line">
-            <a:avLst/>
-          </a:prstGeom>
-          <a:noFill/>
-          <a:ln w="6350">
-            <a:solidFill>
-              <a:srgbClr val="CBD5E1"/>
-            </a:solidFill>
-            <a:prstDash val="solid"/>
-          </a:ln>
-        </p:spPr>
-      </p:sp>
-      <p:sp>
-        <p:nvSpPr>
-          <p:cNvPr id="12" name="Text 10"/>
-          <p:cNvSpPr/>
-          <p:nvPr/>
-        </p:nvSpPr>
-        <p:spPr>
-          <a:xfrm>
-            <a:off x="795528" y="2779776"/>
-            <a:ext cx="3015386" cy="1965960"/>
-          </a:xfrm>
-          <a:prstGeom prst="rect">
-            <a:avLst/>
-          </a:prstGeom>
-          <a:noFill/>
-          <a:ln/>
-        </p:spPr>
-        <p:txBody>
-          <a:bodyPr wrap="square" lIns="0" tIns="0" rIns="0" bIns="0" rtlCol="0" anchor="t"/>
-          <a:lstStyle/>
-          <a:p>
-            <a:pPr indent="0" marL="0">
-              <a:lnSpc>
-                <a:spcPct val="130000"/>
-              </a:lnSpc>
-              <a:buNone/>
-            </a:pPr>
-            <a:r>
-              <a:rPr lang="en-US" sz="1200" dirty="0">
-                <a:solidFill>
-                  <a:srgbClr val="0F172A"/>
-                </a:solidFill>
-                <a:latin typeface="Pretendard" pitchFamily="34" charset="0"/>
-                <a:ea typeface="Pretendard" pitchFamily="34" charset="-122"/>
-                <a:cs typeface="Pretendard" pitchFamily="34" charset="-120"/>
-              </a:rPr>
-              <a:t>서초권역의 핵심 입지로, 우량한 대지 지분 가치가 하방 경직성을 강력히 지지합니다.</a:t>
-            </a:r>
-            <a:endParaRPr lang="en-US" sz="1200" dirty="0"/>
-          </a:p>
-        </p:txBody>
-      </p:sp>
-      <p:sp>
-        <p:nvSpPr>
-          <p:cNvPr id="13" name="Shape 11"/>
-          <p:cNvSpPr/>
-          <p:nvPr/>
-        </p:nvSpPr>
-        <p:spPr>
-          <a:xfrm>
-            <a:off x="4359554" y="1481328"/>
-            <a:ext cx="3472586" cy="3474720"/>
-          </a:xfrm>
-          <a:prstGeom prst="roundRect">
-            <a:avLst>
-              <a:gd name="adj" fmla="val 2107"/>
-            </a:avLst>
-          </a:prstGeom>
-          <a:solidFill>
-            <a:srgbClr val="F8FAFC"/>
-          </a:solidFill>
-          <a:ln w="10160">
-            <a:solidFill>
-              <a:srgbClr val="CBD5E1"/>
-            </a:solidFill>
-            <a:prstDash val="solid"/>
-          </a:ln>
-        </p:spPr>
-      </p:sp>
-      <p:sp>
-        <p:nvSpPr>
-          <p:cNvPr id="14" name="Shape 12"/>
-          <p:cNvSpPr/>
-          <p:nvPr/>
-        </p:nvSpPr>
-        <p:spPr>
-          <a:xfrm>
-            <a:off x="4359554" y="1481328"/>
-            <a:ext cx="3472586" cy="54864"/>
-          </a:xfrm>
-          <a:prstGeom prst="rect">
-            <a:avLst/>
-          </a:prstGeom>
-          <a:solidFill>
-            <a:srgbClr val="6B8E00"/>
-          </a:solidFill>
-          <a:ln/>
-        </p:spPr>
-      </p:sp>
-      <p:sp>
-        <p:nvSpPr>
-          <p:cNvPr id="15" name="Shape 13"/>
-          <p:cNvSpPr/>
-          <p:nvPr/>
-        </p:nvSpPr>
-        <p:spPr>
-          <a:xfrm>
-            <a:off x="4588154" y="1755648"/>
-            <a:ext cx="475488" cy="292608"/>
-          </a:xfrm>
-          <a:prstGeom prst="roundRect">
-            <a:avLst>
-              <a:gd name="adj" fmla="val 12500"/>
-            </a:avLst>
-          </a:prstGeom>
-          <a:solidFill>
-            <a:srgbClr val="A3D900"/>
-          </a:solidFill>
-          <a:ln/>
-        </p:spPr>
-      </p:sp>
-      <p:sp>
-        <p:nvSpPr>
-          <p:cNvPr id="16" name="Text 14"/>
-          <p:cNvSpPr/>
-          <p:nvPr/>
-        </p:nvSpPr>
-        <p:spPr>
-          <a:xfrm>
-            <a:off x="4588154" y="1755648"/>
-            <a:ext cx="475488" cy="292608"/>
-          </a:xfrm>
-          <a:prstGeom prst="rect">
-            <a:avLst/>
-          </a:prstGeom>
-          <a:noFill/>
-          <a:ln/>
-        </p:spPr>
-        <p:txBody>
-          <a:bodyPr wrap="square" lIns="0" tIns="0" rIns="0" bIns="0" rtlCol="0" anchor="ctr"/>
-          <a:lstStyle/>
-          <a:p>
-            <a:pPr algn="ctr" indent="0" marL="0">
-              <a:buNone/>
-            </a:pPr>
-            <a:r>
-              <a:rPr lang="en-US" sz="1100" b="1" dirty="0">
-                <a:solidFill>
-                  <a:srgbClr val="4F6A00"/>
-                </a:solidFill>
-                <a:latin typeface="Arial" pitchFamily="34" charset="0"/>
-                <a:ea typeface="Arial" pitchFamily="34" charset="-122"/>
-                <a:cs typeface="Arial" pitchFamily="34" charset="-120"/>
-              </a:rPr>
-              <a:t>02</a:t>
-            </a:r>
-            <a:endParaRPr lang="en-US" sz="1100" dirty="0"/>
-          </a:p>
-        </p:txBody>
-      </p:sp>
-      <p:sp>
-        <p:nvSpPr>
-          <p:cNvPr id="17" name="Text 15"/>
-          <p:cNvSpPr/>
-          <p:nvPr/>
-        </p:nvSpPr>
-        <p:spPr>
-          <a:xfrm>
-            <a:off x="4588154" y="2194560"/>
-            <a:ext cx="3015386" cy="365760"/>
-          </a:xfrm>
-          <a:prstGeom prst="rect">
-            <a:avLst/>
-          </a:prstGeom>
-          <a:noFill/>
-          <a:ln/>
-        </p:spPr>
-        <p:txBody>
-          <a:bodyPr wrap="square" lIns="0" tIns="0" rIns="0" bIns="0" rtlCol="0" anchor="t"/>
-          <a:lstStyle/>
-          <a:p>
-            <a:pPr indent="0" marL="0">
-              <a:buNone/>
-            </a:pPr>
-            <a:r>
-              <a:rPr lang="en-US" sz="1500" b="1" dirty="0">
-                <a:solidFill>
-                  <a:srgbClr val="0F172A"/>
-                </a:solidFill>
-                <a:latin typeface="Pretendard" pitchFamily="34" charset="0"/>
-                <a:ea typeface="Pretendard" pitchFamily="34" charset="-122"/>
-                <a:cs typeface="Pretendard" pitchFamily="34" charset="-120"/>
-              </a:rPr>
-              <a:t>확실한 월 현금흐름</a:t>
-            </a:r>
-            <a:endParaRPr lang="en-US" sz="1500" dirty="0"/>
-          </a:p>
-        </p:txBody>
-      </p:sp>
-      <p:sp>
-        <p:nvSpPr>
-          <p:cNvPr id="18" name="Shape 16"/>
-          <p:cNvSpPr/>
-          <p:nvPr/>
-        </p:nvSpPr>
-        <p:spPr>
-          <a:xfrm>
-            <a:off x="4588154" y="2624328"/>
-            <a:ext cx="3015386" cy="0"/>
-          </a:xfrm>
-          <a:prstGeom prst="line">
-            <a:avLst/>
-          </a:prstGeom>
-          <a:noFill/>
-          <a:ln w="6350">
-            <a:solidFill>
-              <a:srgbClr val="CBD5E1"/>
-            </a:solidFill>
-            <a:prstDash val="solid"/>
-          </a:ln>
-        </p:spPr>
-      </p:sp>
-      <p:sp>
-        <p:nvSpPr>
-          <p:cNvPr id="19" name="Text 17"/>
-          <p:cNvSpPr/>
-          <p:nvPr/>
-        </p:nvSpPr>
-        <p:spPr>
-          <a:xfrm>
-            <a:off x="4588154" y="2779776"/>
-            <a:ext cx="3015386" cy="1965960"/>
-          </a:xfrm>
-          <a:prstGeom prst="rect">
-            <a:avLst/>
-          </a:prstGeom>
-          <a:noFill/>
-          <a:ln/>
-        </p:spPr>
-        <p:txBody>
-          <a:bodyPr wrap="square" lIns="0" tIns="0" rIns="0" bIns="0" rtlCol="0" anchor="t"/>
-          <a:lstStyle/>
-          <a:p>
-            <a:pPr indent="0" marL="0">
-              <a:lnSpc>
-                <a:spcPct val="130000"/>
-              </a:lnSpc>
-              <a:buNone/>
-            </a:pPr>
-            <a:r>
-              <a:rPr lang="en-US" sz="1200" dirty="0">
-                <a:solidFill>
-                  <a:srgbClr val="0F172A"/>
-                </a:solidFill>
-                <a:latin typeface="Pretendard" pitchFamily="34" charset="0"/>
-                <a:ea typeface="Pretendard" pitchFamily="34" charset="-122"/>
-                <a:cs typeface="Pretendard" pitchFamily="34" charset="-120"/>
-              </a:rPr>
-              <a:t>우량 테넌트 만실 운영 및 장기 계약 구조를 통해 매월 안정적인 순수익 창출이 검토 여지가 있으나, 관련 법규·인허가·시설 요건의 현장 확인이 필요합니다..</a:t>
-            </a:r>
-            <a:endParaRPr lang="en-US" sz="1200" dirty="0"/>
-          </a:p>
-        </p:txBody>
-      </p:sp>
-      <p:sp>
-        <p:nvSpPr>
-          <p:cNvPr id="20" name="Shape 18"/>
-          <p:cNvSpPr/>
-          <p:nvPr/>
-        </p:nvSpPr>
-        <p:spPr>
-          <a:xfrm>
-            <a:off x="8152181" y="1481328"/>
-            <a:ext cx="3472586" cy="3474720"/>
-          </a:xfrm>
-          <a:prstGeom prst="roundRect">
-            <a:avLst>
-              <a:gd name="adj" fmla="val 2107"/>
-            </a:avLst>
-          </a:prstGeom>
-          <a:solidFill>
-            <a:srgbClr val="F8FAFC"/>
-          </a:solidFill>
-          <a:ln w="10160">
-            <a:solidFill>
-              <a:srgbClr val="CBD5E1"/>
-            </a:solidFill>
-            <a:prstDash val="solid"/>
-          </a:ln>
-        </p:spPr>
-      </p:sp>
-      <p:sp>
-        <p:nvSpPr>
-          <p:cNvPr id="21" name="Shape 19"/>
-          <p:cNvSpPr/>
-          <p:nvPr/>
-        </p:nvSpPr>
-        <p:spPr>
-          <a:xfrm>
-            <a:off x="8152181" y="1481328"/>
-            <a:ext cx="3472586" cy="54864"/>
-          </a:xfrm>
-          <a:prstGeom prst="rect">
-            <a:avLst/>
-          </a:prstGeom>
-          <a:solidFill>
-            <a:srgbClr val="6B8E00"/>
-          </a:solidFill>
-          <a:ln/>
-        </p:spPr>
-      </p:sp>
-      <p:sp>
-        <p:nvSpPr>
-          <p:cNvPr id="22" name="Shape 20"/>
-          <p:cNvSpPr/>
-          <p:nvPr/>
-        </p:nvSpPr>
-        <p:spPr>
-          <a:xfrm>
-            <a:off x="8380781" y="1755648"/>
-            <a:ext cx="475488" cy="292608"/>
-          </a:xfrm>
-          <a:prstGeom prst="roundRect">
-            <a:avLst>
-              <a:gd name="adj" fmla="val 12500"/>
-            </a:avLst>
-          </a:prstGeom>
-          <a:solidFill>
-            <a:srgbClr val="A3D900"/>
-          </a:solidFill>
-          <a:ln/>
-        </p:spPr>
-      </p:sp>
-      <p:sp>
-        <p:nvSpPr>
-          <p:cNvPr id="23" name="Text 21"/>
-          <p:cNvSpPr/>
-          <p:nvPr/>
-        </p:nvSpPr>
-        <p:spPr>
-          <a:xfrm>
-            <a:off x="8380781" y="1755648"/>
-            <a:ext cx="475488" cy="292608"/>
-          </a:xfrm>
-          <a:prstGeom prst="rect">
-            <a:avLst/>
-          </a:prstGeom>
-          <a:noFill/>
-          <a:ln/>
-        </p:spPr>
-        <p:txBody>
-          <a:bodyPr wrap="square" lIns="0" tIns="0" rIns="0" bIns="0" rtlCol="0" anchor="ctr"/>
-          <a:lstStyle/>
-          <a:p>
-            <a:pPr algn="ctr" indent="0" marL="0">
-              <a:buNone/>
-            </a:pPr>
-            <a:r>
-              <a:rPr lang="en-US" sz="1100" b="1" dirty="0">
-                <a:solidFill>
-                  <a:srgbClr val="4F6A00"/>
-                </a:solidFill>
-                <a:latin typeface="Arial" pitchFamily="34" charset="0"/>
-                <a:ea typeface="Arial" pitchFamily="34" charset="-122"/>
-                <a:cs typeface="Arial" pitchFamily="34" charset="-120"/>
-              </a:rPr>
-              <a:t>03</a:t>
-            </a:r>
-            <a:endParaRPr lang="en-US" sz="1100" dirty="0"/>
-          </a:p>
-        </p:txBody>
-      </p:sp>
-      <p:sp>
-        <p:nvSpPr>
-          <p:cNvPr id="24" name="Text 22"/>
-          <p:cNvSpPr/>
-          <p:nvPr/>
-        </p:nvSpPr>
-        <p:spPr>
-          <a:xfrm>
-            <a:off x="8380781" y="2194560"/>
-            <a:ext cx="3015386" cy="365760"/>
-          </a:xfrm>
-          <a:prstGeom prst="rect">
-            <a:avLst/>
-          </a:prstGeom>
-          <a:noFill/>
-          <a:ln/>
-        </p:spPr>
-        <p:txBody>
-          <a:bodyPr wrap="square" lIns="0" tIns="0" rIns="0" bIns="0" rtlCol="0" anchor="t"/>
-          <a:lstStyle/>
-          <a:p>
-            <a:pPr indent="0" marL="0">
-              <a:buNone/>
-            </a:pPr>
-            <a:r>
-              <a:rPr lang="en-US" sz="1500" b="1" dirty="0">
-                <a:solidFill>
-                  <a:srgbClr val="0F172A"/>
-                </a:solidFill>
-                <a:latin typeface="Pretendard" pitchFamily="34" charset="0"/>
-                <a:ea typeface="Pretendard" pitchFamily="34" charset="-122"/>
-                <a:cs typeface="Pretendard" pitchFamily="34" charset="-120"/>
-              </a:rPr>
-              <a:t>가치 상승 및 출구 전략</a:t>
-            </a:r>
-            <a:endParaRPr lang="en-US" sz="1500" dirty="0"/>
-          </a:p>
-        </p:txBody>
-      </p:sp>
-      <p:sp>
-        <p:nvSpPr>
-          <p:cNvPr id="25" name="Shape 23"/>
-          <p:cNvSpPr/>
-          <p:nvPr/>
-        </p:nvSpPr>
-        <p:spPr>
-          <a:xfrm>
-            <a:off x="8380781" y="2624328"/>
-            <a:ext cx="3015386" cy="0"/>
-          </a:xfrm>
-          <a:prstGeom prst="line">
-            <a:avLst/>
-          </a:prstGeom>
-          <a:noFill/>
-          <a:ln w="6350">
-            <a:solidFill>
-              <a:srgbClr val="CBD5E1"/>
-            </a:solidFill>
-            <a:prstDash val="solid"/>
-          </a:ln>
-        </p:spPr>
-      </p:sp>
-      <p:sp>
-        <p:nvSpPr>
-          <p:cNvPr id="26" name="Text 24"/>
-          <p:cNvSpPr/>
-          <p:nvPr/>
-        </p:nvSpPr>
-        <p:spPr>
-          <a:xfrm>
-            <a:off x="8380781" y="2779776"/>
-            <a:ext cx="3015386" cy="1965960"/>
-          </a:xfrm>
-          <a:prstGeom prst="rect">
-            <a:avLst/>
-          </a:prstGeom>
-          <a:noFill/>
-          <a:ln/>
-        </p:spPr>
-        <p:txBody>
-          <a:bodyPr wrap="square" lIns="0" tIns="0" rIns="0" bIns="0" rtlCol="0" anchor="t"/>
-          <a:lstStyle/>
-          <a:p>
-            <a:pPr indent="0" marL="0">
-              <a:lnSpc>
-                <a:spcPct val="130000"/>
-              </a:lnSpc>
-              <a:buNone/>
-            </a:pPr>
-            <a:r>
-              <a:rPr lang="en-US" sz="1200" dirty="0">
-                <a:solidFill>
-                  <a:srgbClr val="0F172A"/>
-                </a:solidFill>
-                <a:latin typeface="Pretendard" pitchFamily="34" charset="0"/>
-                <a:ea typeface="Pretendard" pitchFamily="34" charset="-122"/>
-                <a:cs typeface="Pretendard" pitchFamily="34" charset="-120"/>
-              </a:rPr>
-              <a:t>현행 공법 여력을 활용한 밸류업 기회와 더불어 향후 권역 지가 상승에 따른 시세차익 실현이 유력합니다.</a:t>
-            </a:r>
-            <a:endParaRPr lang="en-US" sz="1200" dirty="0"/>
-          </a:p>
-        </p:txBody>
-      </p:sp>
-      <p:sp>
-        <p:nvSpPr>
-          <p:cNvPr id="27" name="Shape 25"/>
           <p:cNvSpPr/>
           <p:nvPr/>
         </p:nvSpPr>
@@ -8413,7 +8975,7 @@
       </p:sp>
       <p:sp>
         <p:nvSpPr>
-          <p:cNvPr id="28" name="Text 26"/>
+          <p:cNvPr id="7" name="Text 5"/>
           <p:cNvSpPr/>
           <p:nvPr/>
         </p:nvSpPr>
@@ -8452,7 +9014,7 @@
       </p:sp>
       <p:sp>
         <p:nvSpPr>
-          <p:cNvPr id="29" name="Text 27"/>
+          <p:cNvPr id="8" name="Text 6"/>
           <p:cNvSpPr/>
           <p:nvPr/>
         </p:nvSpPr>
@@ -8486,7 +9048,7 @@
                 <a:ea typeface="Pretendard" pitchFamily="34" charset="-122"/>
                 <a:cs typeface="Pretendard" pitchFamily="34" charset="-120"/>
               </a:rPr>
-              <a:t>본 자산의 3대 핵심 투자 포인트와 예상 매수자 유형 분석입니다. &gt; 밸류업 시나리오는 AI 추정이며 실제 시장 조건에 따라 다를 수 있습니다.</a:t>
+              <a:t>{"ok":true,"mocked":true,"extractedFields":{"area_signal":"역삼","asset_type":"오피스빌딩","price_band":"300억","size_signal":"3000평(약 9917.4㎡)"},"extractedFacts":{"region":"역삼","exactAddressCandidate":"역삼동 742-1","assetType":"오피스빌딩","priceText":"300억","sizeText":"3000평(약 9917.4㎡)","currentUse":"오피스","currentUseSignal":"근린생활시설","leaseSignal":"임대중","vacancySignal":"공실없음","tenantNames":["쿠팡","네이버"],"unitRentTexts":["301호: 1500만"],"sellerMotivationText":"자산 효율화","brokerNotes":["초역세권 매물"]},"detectedSensitiveFields":["exact_address","tenant_name"],"ambiguousFields":[],"warnings":[],"areaSignal":"역삼","assetType":"오피스빌딩","priceBand":"300억","sizeSignal":"3000평(약 9917.4㎡)","dealType":"매각","buildingName":"역삼 센트럴타워","exactAddress":"역삼동 742-1","totalFloorArea":9917.3,"buildYear":2015,"currentUseSignal":"근린생활시설","vacancySignal":"공실 없음","fitSummary":"초역세권 근생 빌딩으로 시행/사옥 매입에 최적화","cautionSummary":"주요 임차 업종 만기 조율 필요","hiddenFields":["exact_address","seller_motivation"],"confidence":{"areaSignal":"confirmed","assetType":"confirmed","priceBand":"ai_hypothesis","fitSummary":"ai_hypothesis"},"missingData":["sizeSignal"],"boundaryNote":"본 자료는 실거래 통계 기반 참고치입니다.","buyerType":"법인 사옥형","budgetRange":{"min":50,"max":80,"display":"50억~80억"},"preferredRegions":["강남","성수"],"assetTypes":["꼬마빌딩","사옥용"],"purchasePurpose":"사옥용 매입","mustHave":["초역세권","주차"],"niceToHave":["테라스","루프탑"],"riskTolerance":"medium","financingNote":"자본금 50% 준비","missingQuestions":["구체적인 입주 시기가 언제인가요?","선호하는 수익률이 있나요?"],"privacyNotes":["연락처 비공개"],"fitReasons":["매수자 예산(50-80억)에 부합하는 매물입니다.","요청하신 성수/강남 권역에 해당합니다."],"cautionReasons":["요청한 용도와 달리 명도 협의가 다소 필요합니다."],"recommendedNextAction":"현장 답사 제안","kakaoMessage":"안녕하세요! 요청하신 조건에 부합하는 추천 매물이 있어 안내해 드립니다. 확인해보시고 피드백 부탁드립니다.","title":"강남 역삼역 초역세권 오피스 사옥용 빌딩 매각","shortSummary":"역삼역 도보 5분 거리의 준신축급 대형 오피스빌딩입니다.","dealPoints":["초역세권","사옥 최적"],"cautionPoints":["명도 조율 필요"],"hiddenInfoNotice":["보증금 및 지번은 인가 후 확인 가능"],"gateMessage":"G1 등급 등록이 필요합니다.","kakaoText":"강남 역삼역 오피스 빌딩 매각 안내입니다.","exactUnitCandidate":"101호","floor":"1층","areaSqmText":"150㎡","spaceType":"office","depositText":"5000만","monthlyRentText":"400만","maintenanceFeeText":"50만","availableFromText":"즉시입주","leaseTermMonthsText":"24","incentivesText":"렌트프리 2개월","restrictions":[],"landlordIdentity":"김성수","currentTenant":"스타트업","vacancyReason":"이전 확장","rentNegotiation":"협의 가능","region":"성수동","areaSqm":150,"deposit":5000,"monthlyRent":400,"maintenanceFee":50,"availableFrom":"즉시입주","leaseTermMonths":24,"incentives":{"rentFreeMonths":2,"interiorSupport":"일부 인테리어 지원","freeRentDetail":"렌트프리 2개월 지원"},"shortSummaryLease":"성수역 도보 5분 거리 1층 리테일 상가 매물입니다."} &gt; 밸류업 시나리오는 AI 추정이며 실제 시장 조건에 따라 다를 수 있습니다.</a:t>
             </a:r>
             <a:endParaRPr lang="en-US" sz="1000" dirty="0"/>
           </a:p>
@@ -8494,7 +9056,7 @@
       </p:sp>
       <p:sp>
         <p:nvSpPr>
-          <p:cNvPr id="30" name="Text 28"/>
+          <p:cNvPr id="9" name="Text 7"/>
           <p:cNvSpPr/>
           <p:nvPr/>
         </p:nvSpPr>
@@ -8533,7 +9095,7 @@
       </p:sp>
       <p:sp>
         <p:nvSpPr>
-          <p:cNvPr id="31" name="Shape 29"/>
+          <p:cNvPr id="10" name="Shape 8"/>
           <p:cNvSpPr/>
           <p:nvPr/>
         </p:nvSpPr>
@@ -8693,7 +9255,7 @@
         <p:spPr>
           <a:xfrm>
             <a:off x="566928" y="1572768"/>
-            <a:ext cx="11057839" cy="3200400"/>
+            <a:ext cx="3442106" cy="3200400"/>
           </a:xfrm>
           <a:prstGeom prst="rect">
             <a:avLst/>
@@ -8718,7 +9280,7 @@
         <p:spPr>
           <a:xfrm>
             <a:off x="566928" y="1572768"/>
-            <a:ext cx="11057839" cy="36576"/>
+            <a:ext cx="3442106" cy="36576"/>
           </a:xfrm>
           <a:prstGeom prst="rect">
             <a:avLst/>
@@ -8797,7 +9359,7 @@
         <p:spPr>
           <a:xfrm>
             <a:off x="786384" y="2304288"/>
-            <a:ext cx="10618927" cy="365760"/>
+            <a:ext cx="3003194" cy="365760"/>
           </a:xfrm>
           <a:prstGeom prst="rect">
             <a:avLst/>
@@ -8821,7 +9383,7 @@
                 <a:ea typeface="Pretendard" pitchFamily="34" charset="-122"/>
                 <a:cs typeface="Pretendard" pitchFamily="34" charset="-120"/>
               </a:rPr>
-              <a:t>{"ok"</a:t>
+              <a:t>초기 관심 표명 → 담당자 연락</a:t>
             </a:r>
             <a:endParaRPr lang="en-US" sz="1600" dirty="0"/>
           </a:p>
@@ -8836,7 +9398,7 @@
         <p:spPr>
           <a:xfrm>
             <a:off x="786384" y="2761488"/>
-            <a:ext cx="10618927" cy="1828800"/>
+            <a:ext cx="3003194" cy="1828800"/>
           </a:xfrm>
           <a:prstGeom prst="rect">
             <a:avLst/>
@@ -8851,8 +9413,165 @@
             <a:pPr indent="0" marL="0">
               <a:buNone/>
             </a:pPr>
-            <a:r>
-              <a:rPr lang="en-US" sz="1100" dirty="0">
+            <a:endParaRPr lang="en-US" sz="1100" dirty="0"/>
+          </a:p>
+        </p:txBody>
+      </p:sp>
+      <p:sp>
+        <p:nvSpPr>
+          <p:cNvPr id="11" name="Shape 9"/>
+          <p:cNvSpPr/>
+          <p:nvPr/>
+        </p:nvSpPr>
+        <p:spPr>
+          <a:xfrm>
+            <a:off x="4100474" y="3035808"/>
+            <a:ext cx="182880" cy="274320"/>
+          </a:xfrm>
+          <a:prstGeom prst="rightArrow">
+            <a:avLst/>
+          </a:prstGeom>
+          <a:solidFill>
+            <a:srgbClr val="CBD5E1"/>
+          </a:solidFill>
+          <a:ln w="6350">
+            <a:solidFill>
+              <a:srgbClr val="64748B"/>
+            </a:solidFill>
+            <a:prstDash val="solid"/>
+          </a:ln>
+        </p:spPr>
+      </p:sp>
+      <p:sp>
+        <p:nvSpPr>
+          <p:cNvPr id="12" name="Shape 10"/>
+          <p:cNvSpPr/>
+          <p:nvPr/>
+        </p:nvSpPr>
+        <p:spPr>
+          <a:xfrm>
+            <a:off x="4374794" y="1572768"/>
+            <a:ext cx="3442106" cy="3200400"/>
+          </a:xfrm>
+          <a:prstGeom prst="rect">
+            <a:avLst/>
+          </a:prstGeom>
+          <a:solidFill>
+            <a:srgbClr val="F8FAFC"/>
+          </a:solidFill>
+          <a:ln w="3810">
+            <a:solidFill>
+              <a:srgbClr val="CBD5E1"/>
+            </a:solidFill>
+            <a:prstDash val="solid"/>
+          </a:ln>
+        </p:spPr>
+      </p:sp>
+      <p:sp>
+        <p:nvSpPr>
+          <p:cNvPr id="13" name="Shape 11"/>
+          <p:cNvSpPr/>
+          <p:nvPr/>
+        </p:nvSpPr>
+        <p:spPr>
+          <a:xfrm>
+            <a:off x="4374794" y="1572768"/>
+            <a:ext cx="3442106" cy="36576"/>
+          </a:xfrm>
+          <a:prstGeom prst="rect">
+            <a:avLst/>
+          </a:prstGeom>
+          <a:solidFill>
+            <a:srgbClr val="6B8E00"/>
+          </a:solidFill>
+          <a:ln/>
+        </p:spPr>
+      </p:sp>
+      <p:sp>
+        <p:nvSpPr>
+          <p:cNvPr id="14" name="Shape 12"/>
+          <p:cNvSpPr/>
+          <p:nvPr/>
+        </p:nvSpPr>
+        <p:spPr>
+          <a:xfrm>
+            <a:off x="4594250" y="1792224"/>
+            <a:ext cx="384048" cy="384048"/>
+          </a:xfrm>
+          <a:prstGeom prst="ellipse">
+            <a:avLst/>
+          </a:prstGeom>
+          <a:solidFill>
+            <a:srgbClr val="6B8E00"/>
+          </a:solidFill>
+          <a:ln/>
+        </p:spPr>
+      </p:sp>
+      <p:sp>
+        <p:nvSpPr>
+          <p:cNvPr id="15" name="Text 13"/>
+          <p:cNvSpPr/>
+          <p:nvPr/>
+        </p:nvSpPr>
+        <p:spPr>
+          <a:xfrm>
+            <a:off x="4594250" y="1792224"/>
+            <a:ext cx="384048" cy="384048"/>
+          </a:xfrm>
+          <a:prstGeom prst="rect">
+            <a:avLst/>
+          </a:prstGeom>
+          <a:noFill/>
+          <a:ln/>
+        </p:spPr>
+        <p:txBody>
+          <a:bodyPr wrap="square" lIns="0" tIns="0" rIns="0" bIns="0" rtlCol="0" anchor="ctr"/>
+          <a:lstStyle/>
+          <a:p>
+            <a:pPr algn="ctr" indent="0" marL="0">
+              <a:buNone/>
+            </a:pPr>
+            <a:r>
+              <a:rPr lang="en-US" sz="1300" b="1" dirty="0">
+                <a:solidFill>
+                  <a:srgbClr val="FFFFFF"/>
+                </a:solidFill>
+                <a:latin typeface="Arial" pitchFamily="34" charset="0"/>
+                <a:ea typeface="Arial" pitchFamily="34" charset="-122"/>
+                <a:cs typeface="Arial" pitchFamily="34" charset="-120"/>
+              </a:rPr>
+              <a:t>STEP 2</a:t>
+            </a:r>
+            <a:endParaRPr lang="en-US" sz="1300" dirty="0"/>
+          </a:p>
+        </p:txBody>
+      </p:sp>
+      <p:sp>
+        <p:nvSpPr>
+          <p:cNvPr id="16" name="Text 14"/>
+          <p:cNvSpPr/>
+          <p:nvPr/>
+        </p:nvSpPr>
+        <p:spPr>
+          <a:xfrm>
+            <a:off x="4594250" y="2304288"/>
+            <a:ext cx="3003194" cy="365760"/>
+          </a:xfrm>
+          <a:prstGeom prst="rect">
+            <a:avLst/>
+          </a:prstGeom>
+          <a:noFill/>
+          <a:ln/>
+        </p:spPr>
+        <p:txBody>
+          <a:bodyPr wrap="square" rtlCol="0" anchor="ctr"/>
+          <a:lstStyle/>
+          <a:p>
+            <a:pPr indent="0" marL="0">
+              <a:buNone/>
+            </a:pPr>
+            <a:r>
+              <a:rPr lang="en-US" sz="1600" b="1" dirty="0">
                 <a:solidFill>
                   <a:srgbClr val="0F172A"/>
                 </a:solidFill>
@@ -8860,22 +9579,140 @@
                 <a:ea typeface="Pretendard" pitchFamily="34" charset="-122"/>
                 <a:cs typeface="Pretendard" pitchFamily="34" charset="-120"/>
               </a:rPr>
-              <a:t>true,"mocked":true,"extractedFields":{"area_signal":"역삼","asset_type":"오피스빌딩","price_band":"300억","size_signal":"3000평(약 9917.4㎡)"},"extractedFacts":{"region":"역삼","exactAddressCandidate":"역삼동 742-1","assetType":"오피스빌딩","priceText":"300억","sizeText":"3000평(약 9917.4㎡)","currentUse":"오피스","currentUseSignal":"근린생활시설","leaseSignal":"임대중","vacancySignal":"공실없음","tenantNames":["쿠팡","네이버"],"unitRentTexts":["301호: 1500만"],"sellerMotivationText":"자산 효율화","brokerNotes":["초역세권 매물"]},"detectedSensitiveFields":["exact_address","tenant_name"],"ambiguousFields":[],"warnings":[],"areaSignal":"역삼","assetType":"오피스빌딩","priceBand":"300억","sizeSignal":"3000평(약 9917.4㎡)","dealType":"매각","buildingName":"역삼 센트럴타워","exactAddress":"역삼동 742-1","totalFloorArea":9917.3,"buildYear":2015,"currentUseSignal":"근린생활시설","vacancySignal":"공실 없음","fitSummary":"초역세권 근생 빌딩으로 시행/사옥 매입에 최적화","cautionSummary":"주요 임차 업종 만기 조율 필요","hiddenFields":["exact_address","seller_motivation"],"confidence":{"areaSignal":"confirmed","assetType":"confirmed","priceBand":"ai_hypothesis","fitSummary":"ai_hypothesis"},"missingData":["sizeSignal"],"boundaryNote":"본 자료는 실거래 통계 기반 참고치입니다.","buyerType":"법인 사옥형","budgetRange":{"min":50,"max":80,"display":"50억~80억"},"preferredRegions":["강남","성수"],"assetTypes":["꼬마빌딩","사옥용"],"purchasePurpose":"사옥용 매입","mustHave":["초역세권","주차"],"niceToHave":["테라스","루프탑"],"riskTolerance":"medium","financingNote":"자본금 50% 준비","missingQuestions":["구체적인 입주 시기가 언제인가요?","선호하는 수익률이 있나요?"],"privacyNotes":["연락처 비공개"],"fitReasons":["매수자 예산(50-80억)에 부합하는 매물입니다.","요청하신 성수/강남 권역에 해당합니다."],"cautionReasons":["요청한 용도와 달리 명도 협의가 다소 필요합니다."],"recommendedNextAction":"현장 답사 제안","kakaoMessage":"안녕하세요! 요청하신 조건에 부합하는 추천 매물이 있어 안내해 드립니다. 확인해보시고 피드백 부탁드립니다.","title":"강남 역삼역 초역세권 오피스 사옥용 빌딩 매각","shortSummary":"역삼역 도보 5분 거리의 준신축급 대형 오피스빌딩입니다.","dealPoints":["초역세권","사옥 최적"],"cautionPoints":["명도 조율 필요"],"hiddenInfoNotice":["보증금 및 지번은 인가 후 확인 가능"],"gateMessage":"G1 등급 등록이 필요합니다.","kakaoText":"강남 역삼역 오피스 빌딩 매각 안내입니다.","exactUnitCandidate":"101호","floor":"1층","areaSqmText":"150㎡","spaceType":"office","depositText":"5000만","monthlyRentText":"400만","maintenanceFeeText":"50만","availableFromText":"즉시입주","leaseTermMonthsText":"24","incentivesText":"렌트프리 2개월","restrictions":[],"landlordIdentity":"김성수","currentTenant":"스타트업","vacancyReason":"이전 확장","rentNegotiation":"협의 가능","region":"성수동","areaSqm":150,"deposit":5000,"monthlyRent":400,"maintenanceFee":50,"availableFrom":"즉시입주","leaseTermMonths":24,"incentives":{"rentFreeMonths":2,"interiorSupport":"일부 인테리어 지원","freeRentDetail":"렌트프리 2개월 지원"},"shortSummaryLease":"성수역 도보 5분 거리 1층 리테일 상가 매물입니다."}</a:t>
-            </a:r>
+              <a:t>NDA 체결 → 임차인 정보 및 임대차계약서 제공</a:t>
+            </a:r>
+            <a:endParaRPr lang="en-US" sz="1600" dirty="0"/>
+          </a:p>
+        </p:txBody>
+      </p:sp>
+      <p:sp>
+        <p:nvSpPr>
+          <p:cNvPr id="17" name="Text 15"/>
+          <p:cNvSpPr/>
+          <p:nvPr/>
+        </p:nvSpPr>
+        <p:spPr>
+          <a:xfrm>
+            <a:off x="4594250" y="2761488"/>
+            <a:ext cx="3003194" cy="1828800"/>
+          </a:xfrm>
+          <a:prstGeom prst="rect">
+            <a:avLst/>
+          </a:prstGeom>
+          <a:noFill/>
+          <a:ln/>
+        </p:spPr>
+        <p:txBody>
+          <a:bodyPr wrap="square" rtlCol="0" anchor="t"/>
+          <a:lstStyle/>
+          <a:p>
+            <a:pPr indent="0" marL="0">
+              <a:buNone/>
+            </a:pPr>
             <a:endParaRPr lang="en-US" sz="1100" dirty="0"/>
           </a:p>
         </p:txBody>
       </p:sp>
       <p:sp>
         <p:nvSpPr>
-          <p:cNvPr id="11" name="Text 9"/>
-          <p:cNvSpPr/>
-          <p:nvPr/>
-        </p:nvSpPr>
-        <p:spPr>
-          <a:xfrm>
-            <a:off x="566928" y="6419088"/>
-            <a:ext cx="11057839" cy="201168"/>
+          <p:cNvPr id="18" name="Shape 16"/>
+          <p:cNvSpPr/>
+          <p:nvPr/>
+        </p:nvSpPr>
+        <p:spPr>
+          <a:xfrm>
+            <a:off x="7908341" y="3035808"/>
+            <a:ext cx="182880" cy="274320"/>
+          </a:xfrm>
+          <a:prstGeom prst="rightArrow">
+            <a:avLst/>
+          </a:prstGeom>
+          <a:solidFill>
+            <a:srgbClr val="CBD5E1"/>
+          </a:solidFill>
+          <a:ln w="6350">
+            <a:solidFill>
+              <a:srgbClr val="64748B"/>
+            </a:solidFill>
+            <a:prstDash val="solid"/>
+          </a:ln>
+        </p:spPr>
+      </p:sp>
+      <p:sp>
+        <p:nvSpPr>
+          <p:cNvPr id="19" name="Shape 17"/>
+          <p:cNvSpPr/>
+          <p:nvPr/>
+        </p:nvSpPr>
+        <p:spPr>
+          <a:xfrm>
+            <a:off x="8182661" y="1572768"/>
+            <a:ext cx="3442106" cy="3200400"/>
+          </a:xfrm>
+          <a:prstGeom prst="rect">
+            <a:avLst/>
+          </a:prstGeom>
+          <a:solidFill>
+            <a:srgbClr val="F8FAFC"/>
+          </a:solidFill>
+          <a:ln w="3810">
+            <a:solidFill>
+              <a:srgbClr val="CBD5E1"/>
+            </a:solidFill>
+            <a:prstDash val="solid"/>
+          </a:ln>
+        </p:spPr>
+      </p:sp>
+      <p:sp>
+        <p:nvSpPr>
+          <p:cNvPr id="20" name="Shape 18"/>
+          <p:cNvSpPr/>
+          <p:nvPr/>
+        </p:nvSpPr>
+        <p:spPr>
+          <a:xfrm>
+            <a:off x="8182661" y="1572768"/>
+            <a:ext cx="3442106" cy="36576"/>
+          </a:xfrm>
+          <a:prstGeom prst="rect">
+            <a:avLst/>
+          </a:prstGeom>
+          <a:solidFill>
+            <a:srgbClr val="6B8E00"/>
+          </a:solidFill>
+          <a:ln/>
+        </p:spPr>
+      </p:sp>
+      <p:sp>
+        <p:nvSpPr>
+          <p:cNvPr id="21" name="Shape 19"/>
+          <p:cNvSpPr/>
+          <p:nvPr/>
+        </p:nvSpPr>
+        <p:spPr>
+          <a:xfrm>
+            <a:off x="8402117" y="1792224"/>
+            <a:ext cx="384048" cy="384048"/>
+          </a:xfrm>
+          <a:prstGeom prst="ellipse">
+            <a:avLst/>
+          </a:prstGeom>
+          <a:solidFill>
+            <a:srgbClr val="6B8E00"/>
+          </a:solidFill>
+          <a:ln/>
+        </p:spPr>
+      </p:sp>
+      <p:sp>
+        <p:nvSpPr>
+          <p:cNvPr id="22" name="Text 20"/>
+          <p:cNvSpPr/>
+          <p:nvPr/>
+        </p:nvSpPr>
+        <p:spPr>
+          <a:xfrm>
+            <a:off x="8402117" y="1792224"/>
+            <a:ext cx="384048" cy="384048"/>
           </a:xfrm>
           <a:prstGeom prst="rect">
             <a:avLst/>
@@ -8891,14 +9728,120 @@
               <a:buNone/>
             </a:pPr>
             <a:r>
-              <a:rPr lang="en-US" sz="750" dirty="0">
-                <a:solidFill>
-                  <a:srgbClr val="64748B"/>
+              <a:rPr lang="en-US" sz="1300" b="1" dirty="0">
+                <a:solidFill>
+                  <a:srgbClr val="FFFFFF"/>
+                </a:solidFill>
+                <a:latin typeface="Arial" pitchFamily="34" charset="0"/>
+                <a:ea typeface="Arial" pitchFamily="34" charset="-122"/>
+                <a:cs typeface="Arial" pitchFamily="34" charset="-120"/>
+              </a:rPr>
+              <a:t>STEP 3</a:t>
+            </a:r>
+            <a:endParaRPr lang="en-US" sz="1300" dirty="0"/>
+          </a:p>
+        </p:txBody>
+      </p:sp>
+      <p:sp>
+        <p:nvSpPr>
+          <p:cNvPr id="23" name="Text 21"/>
+          <p:cNvSpPr/>
+          <p:nvPr/>
+        </p:nvSpPr>
+        <p:spPr>
+          <a:xfrm>
+            <a:off x="8402117" y="2304288"/>
+            <a:ext cx="3003194" cy="365760"/>
+          </a:xfrm>
+          <a:prstGeom prst="rect">
+            <a:avLst/>
+          </a:prstGeom>
+          <a:noFill/>
+          <a:ln/>
+        </p:spPr>
+        <p:txBody>
+          <a:bodyPr wrap="square" rtlCol="0" anchor="ctr"/>
+          <a:lstStyle/>
+          <a:p>
+            <a:pPr indent="0" marL="0">
+              <a:buNone/>
+            </a:pPr>
+            <a:r>
+              <a:rPr lang="en-US" sz="1600" b="1" dirty="0">
+                <a:solidFill>
+                  <a:srgbClr val="0F172A"/>
                 </a:solidFill>
                 <a:latin typeface="Pretendard" pitchFamily="34" charset="0"/>
                 <a:ea typeface="Pretendard" pitchFamily="34" charset="-122"/>
                 <a:cs typeface="Pretendard" pitchFamily="34" charset="-120"/>
               </a:rPr>
+              <a:t>현장 실사 일정 조율 → 건물 컨디션 및 설비 직접 확인</a:t>
+            </a:r>
+            <a:endParaRPr lang="en-US" sz="1600" dirty="0"/>
+          </a:p>
+        </p:txBody>
+      </p:sp>
+      <p:sp>
+        <p:nvSpPr>
+          <p:cNvPr id="24" name="Text 22"/>
+          <p:cNvSpPr/>
+          <p:nvPr/>
+        </p:nvSpPr>
+        <p:spPr>
+          <a:xfrm>
+            <a:off x="8402117" y="2761488"/>
+            <a:ext cx="3003194" cy="1828800"/>
+          </a:xfrm>
+          <a:prstGeom prst="rect">
+            <a:avLst/>
+          </a:prstGeom>
+          <a:noFill/>
+          <a:ln/>
+        </p:spPr>
+        <p:txBody>
+          <a:bodyPr wrap="square" rtlCol="0" anchor="t"/>
+          <a:lstStyle/>
+          <a:p>
+            <a:pPr indent="0" marL="0">
+              <a:buNone/>
+            </a:pPr>
+            <a:endParaRPr lang="en-US" sz="1100" dirty="0"/>
+          </a:p>
+        </p:txBody>
+      </p:sp>
+      <p:sp>
+        <p:nvSpPr>
+          <p:cNvPr id="25" name="Text 23"/>
+          <p:cNvSpPr/>
+          <p:nvPr/>
+        </p:nvSpPr>
+        <p:spPr>
+          <a:xfrm>
+            <a:off x="566928" y="6419088"/>
+            <a:ext cx="11057839" cy="201168"/>
+          </a:xfrm>
+          <a:prstGeom prst="rect">
+            <a:avLst/>
+          </a:prstGeom>
+          <a:noFill/>
+          <a:ln/>
+        </p:spPr>
+        <p:txBody>
+          <a:bodyPr wrap="square" lIns="0" tIns="0" rIns="0" bIns="0" rtlCol="0" anchor="ctr"/>
+          <a:lstStyle/>
+          <a:p>
+            <a:pPr algn="ctr" indent="0" marL="0">
+              <a:buNone/>
+            </a:pPr>
+            <a:r>
+              <a:rPr lang="en-US" sz="750" dirty="0">
+                <a:solidFill>
+                  <a:srgbClr val="64748B"/>
+                </a:solidFill>
+                <a:latin typeface="Pretendard" pitchFamily="34" charset="0"/>
+                <a:ea typeface="Pretendard" pitchFamily="34" charset="-122"/>
+                <a:cs typeface="Pretendard" pitchFamily="34" charset="-120"/>
+              </a:rPr>
               <a:t>크리딜  ·    ·  9</a:t>
             </a:r>
             <a:endParaRPr lang="en-US" sz="750" dirty="0"/>
@@ -8907,7 +9850,7 @@
       </p:sp>
       <p:sp>
         <p:nvSpPr>
-          <p:cNvPr id="12" name="Shape 10"/>
+          <p:cNvPr id="26" name="Shape 24"/>
           <p:cNvSpPr/>
           <p:nvPr/>
         </p:nvSpPr>

--- a/docs/test/stress/e2e-outputs/trading_case10_seocho_old_retail_basic.pptx
+++ b/docs/test/stress/e2e-outputs/trading_case10_seocho_old_retail_basic.pptx
@@ -6531,1137 +6531,16 @@
           </a:p>
         </p:txBody>
       </p:sp>
-      <p:graphicFrame>
-        <p:nvGraphicFramePr>
-          <p:cNvPr id="7" name="Table 0"/>
-          <p:cNvGraphicFramePr>
-            <a:graphicFrameLocks noGrp="1"/>
-          </p:cNvGraphicFramePr>
-          <p:nvPr>
-            <p:extLst>
-              <p:ext uri="{D42A27DB-BD31-4B8C-83A1-F6EECF244321}">
-                <p14:modId xmlns:p14="http://schemas.microsoft.com/office/powerpoint/2010/main" val="1579011935"/>
-              </p:ext>
-            </p:extLst>
-          </p:nvPr>
-        </p:nvGraphicFramePr>
-        <p:xfrm>
-          <a:off x="566928" y="1645920"/>
-          <a:ext cx="11057839" cy="914400"/>
-        </p:xfrm>
-        <a:graphic>
-          <a:graphicData uri="http://schemas.openxmlformats.org/drawingml/2006/table">
-            <a:tbl>
-              <a:tblPr/>
-              <a:tblGrid>
-                <a:gridCol w="2551809"/>
-                <a:gridCol w="4253015"/>
-                <a:gridCol w="4253015"/>
-              </a:tblGrid>
-              <a:tr h="457200">
-                <a:tc>
-                  <a:txBody>
-                    <a:bodyPr/>
-                    <a:lstStyle/>
-                    <a:p>
-                      <a:pPr indent="0" marL="0">
-                        <a:buNone/>
-                      </a:pPr>
-                      <a:r>
-                        <a:rPr lang="en-US" sz="1300" b="1" dirty="0">
-                          <a:solidFill>
-                            <a:srgbClr val="718096"/>
-                          </a:solidFill>
-                          <a:latin typeface="Pretendard" pitchFamily="34" charset="0"/>
-                          <a:ea typeface="Pretendard" pitchFamily="34" charset="-122"/>
-                          <a:cs typeface="Pretendard" pitchFamily="34" charset="-120"/>
-                        </a:rPr>
-                        <a:t>구분</a:t>
-                      </a:r>
-                      <a:endParaRPr lang="en-US" sz="1300" dirty="0">
-                        <a:latin typeface="Pretendard" charset="0"/>
-                        <a:ea typeface="Pretendard" charset="0"/>
-                        <a:cs typeface="Pretendard" charset="0"/>
-                      </a:endParaRPr>
-                    </a:p>
-                  </a:txBody>
-                  <a:tcPr marL="50800" marR="50800" marT="25400" marB="25400" anchor="ctr">
-                    <a:lnL w="3810" cap="flat" cmpd="sng" algn="ctr">
-                      <a:solidFill>
-                        <a:srgbClr val="CBD5E0"/>
-                      </a:solidFill>
-                      <a:prstDash val="solid"/>
-                      <a:round/>
-                      <a:headEnd type="none" w="med" len="med"/>
-                      <a:tailEnd type="none" w="med" len="med"/>
-                    </a:lnL>
-                    <a:lnR w="3810" cap="flat" cmpd="sng" algn="ctr">
-                      <a:solidFill>
-                        <a:srgbClr val="CBD5E0"/>
-                      </a:solidFill>
-                      <a:prstDash val="solid"/>
-                      <a:round/>
-                      <a:headEnd type="none" w="med" len="med"/>
-                      <a:tailEnd type="none" w="med" len="med"/>
-                    </a:lnR>
-                    <a:lnT w="3810" cap="flat" cmpd="sng" algn="ctr">
-                      <a:solidFill>
-                        <a:srgbClr val="CBD5E0"/>
-                      </a:solidFill>
-                      <a:prstDash val="solid"/>
-                      <a:round/>
-                      <a:headEnd type="none" w="med" len="med"/>
-                      <a:tailEnd type="none" w="med" len="med"/>
-                    </a:lnT>
-                    <a:lnB w="3810" cap="flat" cmpd="sng" algn="ctr">
-                      <a:solidFill>
-                        <a:srgbClr val="CBD5E0"/>
-                      </a:solidFill>
-                      <a:prstDash val="solid"/>
-                      <a:round/>
-                      <a:headEnd type="none" w="med" len="med"/>
-                      <a:tailEnd type="none" w="med" len="med"/>
-                    </a:lnB>
-                    <a:solidFill>
-                      <a:srgbClr val="F7FAFC"/>
-                    </a:solidFill>
-                  </a:tcPr>
-                </a:tc>
-                <a:tc>
-                  <a:txBody>
-                    <a:bodyPr/>
-                    <a:lstStyle/>
-                    <a:p>
-                      <a:pPr indent="0" marL="0">
-                        <a:buNone/>
-                      </a:pPr>
-                      <a:r>
-                        <a:rPr lang="en-US" sz="1300" b="1" dirty="0">
-                          <a:solidFill>
-                            <a:srgbClr val="718096"/>
-                          </a:solidFill>
-                          <a:latin typeface="Pretendard" pitchFamily="34" charset="0"/>
-                          <a:ea typeface="Pretendard" pitchFamily="34" charset="-122"/>
-                          <a:cs typeface="Pretendard" pitchFamily="34" charset="-120"/>
-                        </a:rPr>
-                        <a:t>타겟 </a:t>
-                      </a:r>
-                      <a:pPr indent="0" marL="0">
-                        <a:buNone/>
-                      </a:pPr>
-                      <a:r>
-                        <a:rPr lang="en-US" sz="1300" b="1" dirty="0">
-                          <a:solidFill>
-                            <a:srgbClr val="718096"/>
-                          </a:solidFill>
-                          <a:latin typeface="Pretendard" pitchFamily="34" charset="0"/>
-                          <a:ea typeface="Pretendard" pitchFamily="34" charset="-122"/>
-                          <a:cs typeface="Pretendard" pitchFamily="34" charset="-120"/>
-                        </a:rPr>
-                        <a:t>수치</a:t>
-                      </a:r>
-                      <a:endParaRPr lang="en-US" sz="1300" dirty="0">
-                        <a:latin typeface="Pretendard" charset="0"/>
-                        <a:ea typeface="Pretendard" charset="0"/>
-                        <a:cs typeface="Pretendard" charset="0"/>
-                      </a:endParaRPr>
-                    </a:p>
-                  </a:txBody>
-                  <a:tcPr marL="50800" marR="50800" marT="25400" marB="25400" anchor="ctr">
-                    <a:lnL w="3810" cap="flat" cmpd="sng" algn="ctr">
-                      <a:solidFill>
-                        <a:srgbClr val="CBD5E0"/>
-                      </a:solidFill>
-                      <a:prstDash val="solid"/>
-                      <a:round/>
-                      <a:headEnd type="none" w="med" len="med"/>
-                      <a:tailEnd type="none" w="med" len="med"/>
-                    </a:lnL>
-                    <a:lnR w="3810" cap="flat" cmpd="sng" algn="ctr">
-                      <a:solidFill>
-                        <a:srgbClr val="CBD5E0"/>
-                      </a:solidFill>
-                      <a:prstDash val="solid"/>
-                      <a:round/>
-                      <a:headEnd type="none" w="med" len="med"/>
-                      <a:tailEnd type="none" w="med" len="med"/>
-                    </a:lnR>
-                    <a:lnT w="3810" cap="flat" cmpd="sng" algn="ctr">
-                      <a:solidFill>
-                        <a:srgbClr val="CBD5E0"/>
-                      </a:solidFill>
-                      <a:prstDash val="solid"/>
-                      <a:round/>
-                      <a:headEnd type="none" w="med" len="med"/>
-                      <a:tailEnd type="none" w="med" len="med"/>
-                    </a:lnT>
-                    <a:lnB w="3810" cap="flat" cmpd="sng" algn="ctr">
-                      <a:solidFill>
-                        <a:srgbClr val="CBD5E0"/>
-                      </a:solidFill>
-                      <a:prstDash val="solid"/>
-                      <a:round/>
-                      <a:headEnd type="none" w="med" len="med"/>
-                      <a:tailEnd type="none" w="med" len="med"/>
-                    </a:lnB>
-                    <a:solidFill>
-                      <a:srgbClr val="F7FAFC"/>
-                    </a:solidFill>
-                  </a:tcPr>
-                </a:tc>
-                <a:tc>
-                  <a:txBody>
-                    <a:bodyPr/>
-                    <a:lstStyle/>
-                    <a:p>
-                      <a:pPr indent="0" marL="0">
-                        <a:buNone/>
-                      </a:pPr>
-                      <a:r>
-                        <a:rPr lang="en-US" sz="1300" b="1" dirty="0">
-                          <a:solidFill>
-                            <a:srgbClr val="718096"/>
-                          </a:solidFill>
-                          <a:latin typeface="Pretendard" pitchFamily="34" charset="0"/>
-                          <a:ea typeface="Pretendard" pitchFamily="34" charset="-122"/>
-                          <a:cs typeface="Pretendard" pitchFamily="34" charset="-120"/>
-                        </a:rPr>
-                        <a:t>비고</a:t>
-                      </a:r>
-                      <a:endParaRPr lang="en-US" sz="1300" dirty="0">
-                        <a:latin typeface="Pretendard" charset="0"/>
-                        <a:ea typeface="Pretendard" charset="0"/>
-                        <a:cs typeface="Pretendard" charset="0"/>
-                      </a:endParaRPr>
-                    </a:p>
-                  </a:txBody>
-                  <a:tcPr marL="50800" marR="50800" marT="25400" marB="25400" anchor="ctr">
-                    <a:lnL w="3810" cap="flat" cmpd="sng" algn="ctr">
-                      <a:solidFill>
-                        <a:srgbClr val="CBD5E0"/>
-                      </a:solidFill>
-                      <a:prstDash val="solid"/>
-                      <a:round/>
-                      <a:headEnd type="none" w="med" len="med"/>
-                      <a:tailEnd type="none" w="med" len="med"/>
-                    </a:lnL>
-                    <a:lnR w="3810" cap="flat" cmpd="sng" algn="ctr">
-                      <a:solidFill>
-                        <a:srgbClr val="CBD5E0"/>
-                      </a:solidFill>
-                      <a:prstDash val="solid"/>
-                      <a:round/>
-                      <a:headEnd type="none" w="med" len="med"/>
-                      <a:tailEnd type="none" w="med" len="med"/>
-                    </a:lnR>
-                    <a:lnT w="3810" cap="flat" cmpd="sng" algn="ctr">
-                      <a:solidFill>
-                        <a:srgbClr val="CBD5E0"/>
-                      </a:solidFill>
-                      <a:prstDash val="solid"/>
-                      <a:round/>
-                      <a:headEnd type="none" w="med" len="med"/>
-                      <a:tailEnd type="none" w="med" len="med"/>
-                    </a:lnT>
-                    <a:lnB w="3810" cap="flat" cmpd="sng" algn="ctr">
-                      <a:solidFill>
-                        <a:srgbClr val="CBD5E0"/>
-                      </a:solidFill>
-                      <a:prstDash val="solid"/>
-                      <a:round/>
-                      <a:headEnd type="none" w="med" len="med"/>
-                      <a:tailEnd type="none" w="med" len="med"/>
-                    </a:lnB>
-                    <a:solidFill>
-                      <a:srgbClr val="F7FAFC"/>
-                    </a:solidFill>
-                  </a:tcPr>
-                </a:tc>
-              </a:tr>
-              <a:tr h="457200">
-                <a:tc>
-                  <a:txBody>
-                    <a:bodyPr/>
-                    <a:lstStyle/>
-                    <a:p>
-                      <a:pPr indent="0" marL="0">
-                        <a:buNone/>
-                      </a:pPr>
-                      <a:r>
-                        <a:rPr lang="en-US" sz="1300" b="1" dirty="0">
-                          <a:solidFill>
-                            <a:srgbClr val="10161F"/>
-                          </a:solidFill>
-                          <a:latin typeface="Pretendard" pitchFamily="34" charset="0"/>
-                          <a:ea typeface="Pretendard" pitchFamily="34" charset="-122"/>
-                          <a:cs typeface="Pretendard" pitchFamily="34" charset="-120"/>
-                        </a:rPr>
-                        <a:t>목표 </a:t>
-                      </a:r>
-                      <a:pPr indent="0" marL="0">
-                        <a:buNone/>
-                      </a:pPr>
-                      <a:r>
-                        <a:rPr lang="en-US" sz="1300" b="1" dirty="0">
-                          <a:solidFill>
-                            <a:srgbClr val="10161F"/>
-                          </a:solidFill>
-                          <a:latin typeface="Pretendard" pitchFamily="34" charset="0"/>
-                          <a:ea typeface="Pretendard" pitchFamily="34" charset="-122"/>
-                          <a:cs typeface="Pretendard" pitchFamily="34" charset="-120"/>
-                        </a:rPr>
-                        <a:t>매각가</a:t>
-                      </a:r>
-                      <a:endParaRPr lang="en-US" sz="1300" dirty="0">
-                        <a:latin typeface="Pretendard" charset="0"/>
-                        <a:ea typeface="Pretendard" charset="0"/>
-                        <a:cs typeface="Pretendard" charset="0"/>
-                      </a:endParaRPr>
-                    </a:p>
-                  </a:txBody>
-                  <a:tcPr marL="50800" marR="50800" marT="25400" marB="25400" anchor="ctr">
-                    <a:lnL w="3810" cap="flat" cmpd="sng" algn="ctr">
-                      <a:solidFill>
-                        <a:srgbClr val="CBD5E0"/>
-                      </a:solidFill>
-                      <a:prstDash val="solid"/>
-                      <a:round/>
-                      <a:headEnd type="none" w="med" len="med"/>
-                      <a:tailEnd type="none" w="med" len="med"/>
-                    </a:lnL>
-                    <a:lnR w="3810" cap="flat" cmpd="sng" algn="ctr">
-                      <a:solidFill>
-                        <a:srgbClr val="CBD5E0"/>
-                      </a:solidFill>
-                      <a:prstDash val="solid"/>
-                      <a:round/>
-                      <a:headEnd type="none" w="med" len="med"/>
-                      <a:tailEnd type="none" w="med" len="med"/>
-                    </a:lnR>
-                    <a:lnT w="3810" cap="flat" cmpd="sng" algn="ctr">
-                      <a:solidFill>
-                        <a:srgbClr val="CBD5E0"/>
-                      </a:solidFill>
-                      <a:prstDash val="solid"/>
-                      <a:round/>
-                      <a:headEnd type="none" w="med" len="med"/>
-                      <a:tailEnd type="none" w="med" len="med"/>
-                    </a:lnT>
-                    <a:lnB w="3810" cap="flat" cmpd="sng" algn="ctr">
-                      <a:solidFill>
-                        <a:srgbClr val="CBD5E0"/>
-                      </a:solidFill>
-                      <a:prstDash val="solid"/>
-                      <a:round/>
-                      <a:headEnd type="none" w="med" len="med"/>
-                      <a:tailEnd type="none" w="med" len="med"/>
-                    </a:lnB>
-                    <a:solidFill>
-                      <a:srgbClr val="FFFFFF"/>
-                    </a:solidFill>
-                  </a:tcPr>
-                </a:tc>
-                <a:tc>
-                  <a:txBody>
-                    <a:bodyPr/>
-                    <a:lstStyle/>
-                    <a:p>
-                      <a:pPr indent="0" marL="0">
-                        <a:buNone/>
-                      </a:pPr>
-                      <a:r>
-                        <a:rPr lang="en-US" sz="1300" dirty="0">
-                          <a:solidFill>
-                            <a:srgbClr val="10161F"/>
-                          </a:solidFill>
-                          <a:latin typeface="Pretendard" pitchFamily="34" charset="0"/>
-                          <a:ea typeface="Pretendard" pitchFamily="34" charset="-122"/>
-                          <a:cs typeface="Pretendard" pitchFamily="34" charset="-120"/>
-                        </a:rPr>
-                        <a:t>주변 </a:t>
-                      </a:r>
-                      <a:pPr indent="0" marL="0">
-                        <a:buNone/>
-                      </a:pPr>
-                      <a:r>
-                        <a:rPr lang="en-US" sz="1300" dirty="0">
-                          <a:solidFill>
-                            <a:srgbClr val="10161F"/>
-                          </a:solidFill>
-                          <a:latin typeface="Pretendard" pitchFamily="34" charset="0"/>
-                          <a:ea typeface="Pretendard" pitchFamily="34" charset="-122"/>
-                          <a:cs typeface="Pretendard" pitchFamily="34" charset="-120"/>
-                        </a:rPr>
-                        <a:t>시세 </a:t>
-                      </a:r>
-                      <a:pPr indent="0" marL="0">
-                        <a:buNone/>
-                      </a:pPr>
-                      <a:r>
-                        <a:rPr lang="en-US" sz="1300" dirty="0">
-                          <a:solidFill>
-                            <a:srgbClr val="10161F"/>
-                          </a:solidFill>
-                          <a:latin typeface="Pretendard" pitchFamily="34" charset="0"/>
-                          <a:ea typeface="Pretendard" pitchFamily="34" charset="-122"/>
-                          <a:cs typeface="Pretendard" pitchFamily="34" charset="-120"/>
-                        </a:rPr>
-                        <a:t>상단 </a:t>
-                      </a:r>
-                      <a:pPr indent="0" marL="0">
-                        <a:buNone/>
-                      </a:pPr>
-                      <a:r>
-                        <a:rPr lang="en-US" sz="1300" dirty="0">
-                          <a:solidFill>
-                            <a:srgbClr val="10161F"/>
-                          </a:solidFill>
-                          <a:latin typeface="Pretendard" pitchFamily="34" charset="0"/>
-                          <a:ea typeface="Pretendard" pitchFamily="34" charset="-122"/>
-                          <a:cs typeface="Pretendard" pitchFamily="34" charset="-120"/>
-                        </a:rPr>
-                        <a:t>추정</a:t>
-                      </a:r>
-                      <a:endParaRPr lang="en-US" sz="1300" dirty="0">
-                        <a:latin typeface="Pretendard" charset="0"/>
-                        <a:ea typeface="Pretendard" charset="0"/>
-                        <a:cs typeface="Pretendard" charset="0"/>
-                      </a:endParaRPr>
-                    </a:p>
-                  </a:txBody>
-                  <a:tcPr marL="50800" marR="50800" marT="25400" marB="25400" anchor="ctr">
-                    <a:lnL w="3810" cap="flat" cmpd="sng" algn="ctr">
-                      <a:solidFill>
-                        <a:srgbClr val="CBD5E0"/>
-                      </a:solidFill>
-                      <a:prstDash val="solid"/>
-                      <a:round/>
-                      <a:headEnd type="none" w="med" len="med"/>
-                      <a:tailEnd type="none" w="med" len="med"/>
-                    </a:lnL>
-                    <a:lnR w="3810" cap="flat" cmpd="sng" algn="ctr">
-                      <a:solidFill>
-                        <a:srgbClr val="CBD5E0"/>
-                      </a:solidFill>
-                      <a:prstDash val="solid"/>
-                      <a:round/>
-                      <a:headEnd type="none" w="med" len="med"/>
-                      <a:tailEnd type="none" w="med" len="med"/>
-                    </a:lnR>
-                    <a:lnT w="3810" cap="flat" cmpd="sng" algn="ctr">
-                      <a:solidFill>
-                        <a:srgbClr val="CBD5E0"/>
-                      </a:solidFill>
-                      <a:prstDash val="solid"/>
-                      <a:round/>
-                      <a:headEnd type="none" w="med" len="med"/>
-                      <a:tailEnd type="none" w="med" len="med"/>
-                    </a:lnT>
-                    <a:lnB w="3810" cap="flat" cmpd="sng" algn="ctr">
-                      <a:solidFill>
-                        <a:srgbClr val="CBD5E0"/>
-                      </a:solidFill>
-                      <a:prstDash val="solid"/>
-                      <a:round/>
-                      <a:headEnd type="none" w="med" len="med"/>
-                      <a:tailEnd type="none" w="med" len="med"/>
-                    </a:lnB>
-                    <a:solidFill>
-                      <a:srgbClr val="FFFFFF"/>
-                    </a:solidFill>
-                  </a:tcPr>
-                </a:tc>
-                <a:tc>
-                  <a:txBody>
-                    <a:bodyPr/>
-                    <a:lstStyle/>
-                    <a:p>
-                      <a:pPr indent="0" marL="0">
-                        <a:buNone/>
-                      </a:pPr>
-                      <a:r>
-                        <a:rPr lang="en-US" sz="1300" dirty="0">
-                          <a:solidFill>
-                            <a:srgbClr val="10161F"/>
-                          </a:solidFill>
-                          <a:latin typeface="Pretendard" pitchFamily="34" charset="0"/>
-                          <a:ea typeface="Pretendard" pitchFamily="34" charset="-122"/>
-                          <a:cs typeface="Pretendard" pitchFamily="34" charset="-120"/>
-                        </a:rPr>
-                        <a:t>리밸런싱 </a:t>
-                      </a:r>
-                      <a:pPr indent="0" marL="0">
-                        <a:buNone/>
-                      </a:pPr>
-                      <a:r>
-                        <a:rPr lang="en-US" sz="1300" dirty="0">
-                          <a:solidFill>
-                            <a:srgbClr val="10161F"/>
-                          </a:solidFill>
-                          <a:latin typeface="Pretendard" pitchFamily="34" charset="0"/>
-                          <a:ea typeface="Pretendard" pitchFamily="34" charset="-122"/>
-                          <a:cs typeface="Pretendard" pitchFamily="34" charset="-120"/>
-                        </a:rPr>
-                        <a:t>타겟</a:t>
-                      </a:r>
-                      <a:endParaRPr lang="en-US" sz="1300" dirty="0">
-                        <a:latin typeface="Pretendard" charset="0"/>
-                        <a:ea typeface="Pretendard" charset="0"/>
-                        <a:cs typeface="Pretendard" charset="0"/>
-                      </a:endParaRPr>
-                    </a:p>
-                  </a:txBody>
-                  <a:tcPr marL="50800" marR="50800" marT="25400" marB="25400" anchor="ctr">
-                    <a:lnL w="3810" cap="flat" cmpd="sng" algn="ctr">
-                      <a:solidFill>
-                        <a:srgbClr val="CBD5E0"/>
-                      </a:solidFill>
-                      <a:prstDash val="solid"/>
-                      <a:round/>
-                      <a:headEnd type="none" w="med" len="med"/>
-                      <a:tailEnd type="none" w="med" len="med"/>
-                    </a:lnL>
-                    <a:lnR w="3810" cap="flat" cmpd="sng" algn="ctr">
-                      <a:solidFill>
-                        <a:srgbClr val="CBD5E0"/>
-                      </a:solidFill>
-                      <a:prstDash val="solid"/>
-                      <a:round/>
-                      <a:headEnd type="none" w="med" len="med"/>
-                      <a:tailEnd type="none" w="med" len="med"/>
-                    </a:lnR>
-                    <a:lnT w="3810" cap="flat" cmpd="sng" algn="ctr">
-                      <a:solidFill>
-                        <a:srgbClr val="CBD5E0"/>
-                      </a:solidFill>
-                      <a:prstDash val="solid"/>
-                      <a:round/>
-                      <a:headEnd type="none" w="med" len="med"/>
-                      <a:tailEnd type="none" w="med" len="med"/>
-                    </a:lnT>
-                    <a:lnB w="3810" cap="flat" cmpd="sng" algn="ctr">
-                      <a:solidFill>
-                        <a:srgbClr val="CBD5E0"/>
-                      </a:solidFill>
-                      <a:prstDash val="solid"/>
-                      <a:round/>
-                      <a:headEnd type="none" w="med" len="med"/>
-                      <a:tailEnd type="none" w="med" len="med"/>
-                    </a:lnB>
-                    <a:solidFill>
-                      <a:srgbClr val="FFFFFF"/>
-                    </a:solidFill>
-                  </a:tcPr>
-                </a:tc>
-              </a:tr>
-              <a:tr h="457200">
-                <a:tc>
-                  <a:txBody>
-                    <a:bodyPr/>
-                    <a:lstStyle/>
-                    <a:p>
-                      <a:pPr indent="0" marL="0">
-                        <a:buNone/>
-                      </a:pPr>
-                      <a:r>
-                        <a:rPr lang="en-US" sz="1300" b="1" dirty="0">
-                          <a:solidFill>
-                            <a:srgbClr val="10161F"/>
-                          </a:solidFill>
-                          <a:latin typeface="Pretendard" pitchFamily="34" charset="0"/>
-                          <a:ea typeface="Pretendard" pitchFamily="34" charset="-122"/>
-                          <a:cs typeface="Pretendard" pitchFamily="34" charset="-120"/>
-                        </a:rPr>
-                        <a:t>목표 </a:t>
-                      </a:r>
-                      <a:pPr indent="0" marL="0">
-                        <a:buNone/>
-                      </a:pPr>
-                      <a:r>
-                        <a:rPr lang="en-US" sz="1300" b="1" dirty="0">
-                          <a:solidFill>
-                            <a:srgbClr val="10161F"/>
-                          </a:solidFill>
-                          <a:latin typeface="Pretendard" pitchFamily="34" charset="0"/>
-                          <a:ea typeface="Pretendard" pitchFamily="34" charset="-122"/>
-                          <a:cs typeface="Pretendard" pitchFamily="34" charset="-120"/>
-                        </a:rPr>
-                        <a:t>시세차익</a:t>
-                      </a:r>
-                      <a:endParaRPr lang="en-US" sz="1300" dirty="0">
-                        <a:latin typeface="Pretendard" charset="0"/>
-                        <a:ea typeface="Pretendard" charset="0"/>
-                        <a:cs typeface="Pretendard" charset="0"/>
-                      </a:endParaRPr>
-                    </a:p>
-                  </a:txBody>
-                  <a:tcPr marL="50800" marR="50800" marT="25400" marB="25400" anchor="ctr">
-                    <a:lnL w="3810" cap="flat" cmpd="sng" algn="ctr">
-                      <a:solidFill>
-                        <a:srgbClr val="CBD5E0"/>
-                      </a:solidFill>
-                      <a:prstDash val="solid"/>
-                      <a:round/>
-                      <a:headEnd type="none" w="med" len="med"/>
-                      <a:tailEnd type="none" w="med" len="med"/>
-                    </a:lnL>
-                    <a:lnR w="3810" cap="flat" cmpd="sng" algn="ctr">
-                      <a:solidFill>
-                        <a:srgbClr val="CBD5E0"/>
-                      </a:solidFill>
-                      <a:prstDash val="solid"/>
-                      <a:round/>
-                      <a:headEnd type="none" w="med" len="med"/>
-                      <a:tailEnd type="none" w="med" len="med"/>
-                    </a:lnR>
-                    <a:lnT w="3810" cap="flat" cmpd="sng" algn="ctr">
-                      <a:solidFill>
-                        <a:srgbClr val="CBD5E0"/>
-                      </a:solidFill>
-                      <a:prstDash val="solid"/>
-                      <a:round/>
-                      <a:headEnd type="none" w="med" len="med"/>
-                      <a:tailEnd type="none" w="med" len="med"/>
-                    </a:lnT>
-                    <a:lnB w="3810" cap="flat" cmpd="sng" algn="ctr">
-                      <a:solidFill>
-                        <a:srgbClr val="CBD5E0"/>
-                      </a:solidFill>
-                      <a:prstDash val="solid"/>
-                      <a:round/>
-                      <a:headEnd type="none" w="med" len="med"/>
-                      <a:tailEnd type="none" w="med" len="med"/>
-                    </a:lnB>
-                    <a:solidFill>
-                      <a:srgbClr val="F7FAFC"/>
-                    </a:solidFill>
-                  </a:tcPr>
-                </a:tc>
-                <a:tc>
-                  <a:txBody>
-                    <a:bodyPr/>
-                    <a:lstStyle/>
-                    <a:p>
-                      <a:pPr indent="0" marL="0">
-                        <a:buNone/>
-                      </a:pPr>
-                      <a:r>
-                        <a:rPr lang="en-US" sz="1300" dirty="0">
-                          <a:solidFill>
-                            <a:srgbClr val="10161F"/>
-                          </a:solidFill>
-                          <a:latin typeface="Pretendard" pitchFamily="34" charset="0"/>
-                          <a:ea typeface="Pretendard" pitchFamily="34" charset="-122"/>
-                          <a:cs typeface="Pretendard" pitchFamily="34" charset="-120"/>
-                        </a:rPr>
-                        <a:t>매수 </a:t>
-                      </a:r>
-                      <a:pPr indent="0" marL="0">
-                        <a:buNone/>
-                      </a:pPr>
-                      <a:r>
-                        <a:rPr lang="en-US" sz="1300" dirty="0">
-                          <a:solidFill>
-                            <a:srgbClr val="10161F"/>
-                          </a:solidFill>
-                          <a:latin typeface="Pretendard" pitchFamily="34" charset="0"/>
-                          <a:ea typeface="Pretendard" pitchFamily="34" charset="-122"/>
-                          <a:cs typeface="Pretendard" pitchFamily="34" charset="-120"/>
-                        </a:rPr>
-                        <a:t>희망가 </a:t>
-                      </a:r>
-                      <a:pPr indent="0" marL="0">
-                        <a:buNone/>
-                      </a:pPr>
-                      <a:r>
-                        <a:rPr lang="en-US" sz="1300" dirty="0">
-                          <a:solidFill>
-                            <a:srgbClr val="10161F"/>
-                          </a:solidFill>
-                          <a:latin typeface="Pretendard" pitchFamily="34" charset="0"/>
-                          <a:ea typeface="Pretendard" pitchFamily="34" charset="-122"/>
-                          <a:cs typeface="Pretendard" pitchFamily="34" charset="-120"/>
-                        </a:rPr>
-                        <a:t>대비 </a:t>
-                      </a:r>
-                      <a:pPr indent="0" marL="0">
-                        <a:buNone/>
-                      </a:pPr>
-                      <a:r>
-                        <a:rPr lang="en-US" sz="1300" dirty="0">
-                          <a:solidFill>
-                            <a:srgbClr val="10161F"/>
-                          </a:solidFill>
-                          <a:latin typeface="Pretendard" pitchFamily="34" charset="0"/>
-                          <a:ea typeface="Pretendard" pitchFamily="34" charset="-122"/>
-                          <a:cs typeface="Pretendard" pitchFamily="34" charset="-120"/>
-                        </a:rPr>
-                        <a:t>갭</a:t>
-                      </a:r>
-                      <a:endParaRPr lang="en-US" sz="1300" dirty="0">
-                        <a:latin typeface="Pretendard" charset="0"/>
-                        <a:ea typeface="Pretendard" charset="0"/>
-                        <a:cs typeface="Pretendard" charset="0"/>
-                      </a:endParaRPr>
-                    </a:p>
-                  </a:txBody>
-                  <a:tcPr marL="50800" marR="50800" marT="25400" marB="25400" anchor="ctr">
-                    <a:lnL w="3810" cap="flat" cmpd="sng" algn="ctr">
-                      <a:solidFill>
-                        <a:srgbClr val="CBD5E0"/>
-                      </a:solidFill>
-                      <a:prstDash val="solid"/>
-                      <a:round/>
-                      <a:headEnd type="none" w="med" len="med"/>
-                      <a:tailEnd type="none" w="med" len="med"/>
-                    </a:lnL>
-                    <a:lnR w="3810" cap="flat" cmpd="sng" algn="ctr">
-                      <a:solidFill>
-                        <a:srgbClr val="CBD5E0"/>
-                      </a:solidFill>
-                      <a:prstDash val="solid"/>
-                      <a:round/>
-                      <a:headEnd type="none" w="med" len="med"/>
-                      <a:tailEnd type="none" w="med" len="med"/>
-                    </a:lnR>
-                    <a:lnT w="3810" cap="flat" cmpd="sng" algn="ctr">
-                      <a:solidFill>
-                        <a:srgbClr val="CBD5E0"/>
-                      </a:solidFill>
-                      <a:prstDash val="solid"/>
-                      <a:round/>
-                      <a:headEnd type="none" w="med" len="med"/>
-                      <a:tailEnd type="none" w="med" len="med"/>
-                    </a:lnT>
-                    <a:lnB w="3810" cap="flat" cmpd="sng" algn="ctr">
-                      <a:solidFill>
-                        <a:srgbClr val="CBD5E0"/>
-                      </a:solidFill>
-                      <a:prstDash val="solid"/>
-                      <a:round/>
-                      <a:headEnd type="none" w="med" len="med"/>
-                      <a:tailEnd type="none" w="med" len="med"/>
-                    </a:lnB>
-                    <a:solidFill>
-                      <a:srgbClr val="F7FAFC"/>
-                    </a:solidFill>
-                  </a:tcPr>
-                </a:tc>
-                <a:tc>
-                  <a:txBody>
-                    <a:bodyPr/>
-                    <a:lstStyle/>
-                    <a:p>
-                      <a:pPr indent="0" marL="0">
-                        <a:buNone/>
-                      </a:pPr>
-                      <a:r>
-                        <a:rPr lang="en-US" sz="1300" dirty="0">
-                          <a:solidFill>
-                            <a:srgbClr val="10161F"/>
-                          </a:solidFill>
-                          <a:latin typeface="Pretendard" pitchFamily="34" charset="0"/>
-                          <a:ea typeface="Pretendard" pitchFamily="34" charset="-122"/>
-                          <a:cs typeface="Pretendard" pitchFamily="34" charset="-120"/>
-                        </a:rPr>
-                        <a:t>자본 </a:t>
-                      </a:r>
-                      <a:pPr indent="0" marL="0">
-                        <a:buNone/>
-                      </a:pPr>
-                      <a:r>
-                        <a:rPr lang="en-US" sz="1300" dirty="0">
-                          <a:solidFill>
-                            <a:srgbClr val="10161F"/>
-                          </a:solidFill>
-                          <a:latin typeface="Pretendard" pitchFamily="34" charset="0"/>
-                          <a:ea typeface="Pretendard" pitchFamily="34" charset="-122"/>
-                          <a:cs typeface="Pretendard" pitchFamily="34" charset="-120"/>
-                        </a:rPr>
-                        <a:t>이득</a:t>
-                      </a:r>
-                      <a:endParaRPr lang="en-US" sz="1300" dirty="0">
-                        <a:latin typeface="Pretendard" charset="0"/>
-                        <a:ea typeface="Pretendard" charset="0"/>
-                        <a:cs typeface="Pretendard" charset="0"/>
-                      </a:endParaRPr>
-                    </a:p>
-                  </a:txBody>
-                  <a:tcPr marL="50800" marR="50800" marT="25400" marB="25400" anchor="ctr">
-                    <a:lnL w="3810" cap="flat" cmpd="sng" algn="ctr">
-                      <a:solidFill>
-                        <a:srgbClr val="CBD5E0"/>
-                      </a:solidFill>
-                      <a:prstDash val="solid"/>
-                      <a:round/>
-                      <a:headEnd type="none" w="med" len="med"/>
-                      <a:tailEnd type="none" w="med" len="med"/>
-                    </a:lnL>
-                    <a:lnR w="3810" cap="flat" cmpd="sng" algn="ctr">
-                      <a:solidFill>
-                        <a:srgbClr val="CBD5E0"/>
-                      </a:solidFill>
-                      <a:prstDash val="solid"/>
-                      <a:round/>
-                      <a:headEnd type="none" w="med" len="med"/>
-                      <a:tailEnd type="none" w="med" len="med"/>
-                    </a:lnR>
-                    <a:lnT w="3810" cap="flat" cmpd="sng" algn="ctr">
-                      <a:solidFill>
-                        <a:srgbClr val="CBD5E0"/>
-                      </a:solidFill>
-                      <a:prstDash val="solid"/>
-                      <a:round/>
-                      <a:headEnd type="none" w="med" len="med"/>
-                      <a:tailEnd type="none" w="med" len="med"/>
-                    </a:lnT>
-                    <a:lnB w="3810" cap="flat" cmpd="sng" algn="ctr">
-                      <a:solidFill>
-                        <a:srgbClr val="CBD5E0"/>
-                      </a:solidFill>
-                      <a:prstDash val="solid"/>
-                      <a:round/>
-                      <a:headEnd type="none" w="med" len="med"/>
-                      <a:tailEnd type="none" w="med" len="med"/>
-                    </a:lnB>
-                    <a:solidFill>
-                      <a:srgbClr val="F7FAFC"/>
-                    </a:solidFill>
-                  </a:tcPr>
-                </a:tc>
-              </a:tr>
-              <a:tr h="457200">
-                <a:tc>
-                  <a:txBody>
-                    <a:bodyPr/>
-                    <a:lstStyle/>
-                    <a:p>
-                      <a:pPr indent="0" marL="0">
-                        <a:buNone/>
-                      </a:pPr>
-                      <a:r>
-                        <a:rPr lang="en-US" sz="1300" b="1" dirty="0">
-                          <a:solidFill>
-                            <a:srgbClr val="10161F"/>
-                          </a:solidFill>
-                          <a:latin typeface="Pretendard" pitchFamily="34" charset="0"/>
-                          <a:ea typeface="Pretendard" pitchFamily="34" charset="-122"/>
-                          <a:cs typeface="Pretendard" pitchFamily="34" charset="-120"/>
-                        </a:rPr>
-                        <a:t>목표 </a:t>
-                      </a:r>
-                      <a:pPr indent="0" marL="0">
-                        <a:buNone/>
-                      </a:pPr>
-                      <a:r>
-                        <a:rPr lang="en-US" sz="1300" b="1" dirty="0">
-                          <a:solidFill>
-                            <a:srgbClr val="10161F"/>
-                          </a:solidFill>
-                          <a:latin typeface="Pretendard" pitchFamily="34" charset="0"/>
-                          <a:ea typeface="Pretendard" pitchFamily="34" charset="-122"/>
-                          <a:cs typeface="Pretendard" pitchFamily="34" charset="-120"/>
-                        </a:rPr>
-                        <a:t>보유기간 </a:t>
-                      </a:r>
-                      <a:pPr indent="0" marL="0">
-                        <a:buNone/>
-                      </a:pPr>
-                      <a:r>
-                        <a:rPr lang="en-US" sz="1300" b="1" dirty="0">
-                          <a:solidFill>
-                            <a:srgbClr val="10161F"/>
-                          </a:solidFill>
-                          <a:latin typeface="Pretendard" pitchFamily="34" charset="0"/>
-                          <a:ea typeface="Pretendard" pitchFamily="34" charset="-122"/>
-                          <a:cs typeface="Pretendard" pitchFamily="34" charset="-120"/>
-                        </a:rPr>
-                        <a:t>수익률 </a:t>
-                      </a:r>
-                      <a:pPr indent="0" marL="0">
-                        <a:buNone/>
-                      </a:pPr>
-                      <a:r>
-                        <a:rPr lang="en-US" sz="1300" b="1" dirty="0">
-                          <a:solidFill>
-                            <a:srgbClr val="10161F"/>
-                          </a:solidFill>
-                          <a:latin typeface="Pretendard" pitchFamily="34" charset="0"/>
-                          <a:ea typeface="Pretendard" pitchFamily="34" charset="-122"/>
-                          <a:cs typeface="Pretendard" pitchFamily="34" charset="-120"/>
-                        </a:rPr>
-                        <a:t>(HPR)</a:t>
-                      </a:r>
-                      <a:endParaRPr lang="en-US" sz="1300" dirty="0">
-                        <a:latin typeface="Pretendard" charset="0"/>
-                        <a:ea typeface="Pretendard" charset="0"/>
-                        <a:cs typeface="Pretendard" charset="0"/>
-                      </a:endParaRPr>
-                    </a:p>
-                  </a:txBody>
-                  <a:tcPr marL="50800" marR="50800" marT="25400" marB="25400" anchor="ctr">
-                    <a:lnL w="3810" cap="flat" cmpd="sng" algn="ctr">
-                      <a:solidFill>
-                        <a:srgbClr val="CBD5E0"/>
-                      </a:solidFill>
-                      <a:prstDash val="solid"/>
-                      <a:round/>
-                      <a:headEnd type="none" w="med" len="med"/>
-                      <a:tailEnd type="none" w="med" len="med"/>
-                    </a:lnL>
-                    <a:lnR w="3810" cap="flat" cmpd="sng" algn="ctr">
-                      <a:solidFill>
-                        <a:srgbClr val="CBD5E0"/>
-                      </a:solidFill>
-                      <a:prstDash val="solid"/>
-                      <a:round/>
-                      <a:headEnd type="none" w="med" len="med"/>
-                      <a:tailEnd type="none" w="med" len="med"/>
-                    </a:lnR>
-                    <a:lnT w="3810" cap="flat" cmpd="sng" algn="ctr">
-                      <a:solidFill>
-                        <a:srgbClr val="CBD5E0"/>
-                      </a:solidFill>
-                      <a:prstDash val="solid"/>
-                      <a:round/>
-                      <a:headEnd type="none" w="med" len="med"/>
-                      <a:tailEnd type="none" w="med" len="med"/>
-                    </a:lnT>
-                    <a:lnB w="3810" cap="flat" cmpd="sng" algn="ctr">
-                      <a:solidFill>
-                        <a:srgbClr val="CBD5E0"/>
-                      </a:solidFill>
-                      <a:prstDash val="solid"/>
-                      <a:round/>
-                      <a:headEnd type="none" w="med" len="med"/>
-                      <a:tailEnd type="none" w="med" len="med"/>
-                    </a:lnB>
-                    <a:solidFill>
-                      <a:srgbClr val="FFFFFF"/>
-                    </a:solidFill>
-                  </a:tcPr>
-                </a:tc>
-                <a:tc>
-                  <a:txBody>
-                    <a:bodyPr/>
-                    <a:lstStyle/>
-                    <a:p>
-                      <a:pPr indent="0" marL="0">
-                        <a:buNone/>
-                      </a:pPr>
-                      <a:r>
-                        <a:rPr lang="en-US" sz="1300" dirty="0">
-                          <a:solidFill>
-                            <a:srgbClr val="10161F"/>
-                          </a:solidFill>
-                          <a:latin typeface="Pretendard" pitchFamily="34" charset="0"/>
-                          <a:ea typeface="Pretendard" pitchFamily="34" charset="-122"/>
-                          <a:cs typeface="Pretendard" pitchFamily="34" charset="-120"/>
-                        </a:rPr>
-                        <a:t>10% </a:t>
-                      </a:r>
-                      <a:pPr indent="0" marL="0">
-                        <a:buNone/>
-                      </a:pPr>
-                      <a:r>
-                        <a:rPr lang="en-US" sz="1300" dirty="0">
-                          <a:solidFill>
-                            <a:srgbClr val="10161F"/>
-                          </a:solidFill>
-                          <a:latin typeface="Pretendard" pitchFamily="34" charset="0"/>
-                          <a:ea typeface="Pretendard" pitchFamily="34" charset="-122"/>
-                          <a:cs typeface="Pretendard" pitchFamily="34" charset="-120"/>
-                        </a:rPr>
-                        <a:t>~ </a:t>
-                      </a:r>
-                      <a:pPr indent="0" marL="0">
-                        <a:buNone/>
-                      </a:pPr>
-                      <a:r>
-                        <a:rPr lang="en-US" sz="1300" dirty="0">
-                          <a:solidFill>
-                            <a:srgbClr val="10161F"/>
-                          </a:solidFill>
-                          <a:latin typeface="Pretendard" pitchFamily="34" charset="0"/>
-                          <a:ea typeface="Pretendard" pitchFamily="34" charset="-122"/>
-                          <a:cs typeface="Pretendard" pitchFamily="34" charset="-120"/>
-                        </a:rPr>
-                        <a:t>20%</a:t>
-                      </a:r>
-                      <a:endParaRPr lang="en-US" sz="1300" dirty="0">
-                        <a:latin typeface="Pretendard" charset="0"/>
-                        <a:ea typeface="Pretendard" charset="0"/>
-                        <a:cs typeface="Pretendard" charset="0"/>
-                      </a:endParaRPr>
-                    </a:p>
-                  </a:txBody>
-                  <a:tcPr marL="50800" marR="50800" marT="25400" marB="25400" anchor="ctr">
-                    <a:lnL w="3810" cap="flat" cmpd="sng" algn="ctr">
-                      <a:solidFill>
-                        <a:srgbClr val="CBD5E0"/>
-                      </a:solidFill>
-                      <a:prstDash val="solid"/>
-                      <a:round/>
-                      <a:headEnd type="none" w="med" len="med"/>
-                      <a:tailEnd type="none" w="med" len="med"/>
-                    </a:lnL>
-                    <a:lnR w="3810" cap="flat" cmpd="sng" algn="ctr">
-                      <a:solidFill>
-                        <a:srgbClr val="CBD5E0"/>
-                      </a:solidFill>
-                      <a:prstDash val="solid"/>
-                      <a:round/>
-                      <a:headEnd type="none" w="med" len="med"/>
-                      <a:tailEnd type="none" w="med" len="med"/>
-                    </a:lnR>
-                    <a:lnT w="3810" cap="flat" cmpd="sng" algn="ctr">
-                      <a:solidFill>
-                        <a:srgbClr val="CBD5E0"/>
-                      </a:solidFill>
-                      <a:prstDash val="solid"/>
-                      <a:round/>
-                      <a:headEnd type="none" w="med" len="med"/>
-                      <a:tailEnd type="none" w="med" len="med"/>
-                    </a:lnT>
-                    <a:lnB w="3810" cap="flat" cmpd="sng" algn="ctr">
-                      <a:solidFill>
-                        <a:srgbClr val="CBD5E0"/>
-                      </a:solidFill>
-                      <a:prstDash val="solid"/>
-                      <a:round/>
-                      <a:headEnd type="none" w="med" len="med"/>
-                      <a:tailEnd type="none" w="med" len="med"/>
-                    </a:lnB>
-                    <a:solidFill>
-                      <a:srgbClr val="FFFFFF"/>
-                    </a:solidFill>
-                  </a:tcPr>
-                </a:tc>
-                <a:tc>
-                  <a:txBody>
-                    <a:bodyPr/>
-                    <a:lstStyle/>
-                    <a:p>
-                      <a:pPr indent="0" marL="0">
-                        <a:buNone/>
-                      </a:pPr>
-                      <a:r>
-                        <a:rPr lang="en-US" sz="1300" dirty="0">
-                          <a:solidFill>
-                            <a:srgbClr val="10161F"/>
-                          </a:solidFill>
-                          <a:latin typeface="Pretendard" pitchFamily="34" charset="0"/>
-                          <a:ea typeface="Pretendard" pitchFamily="34" charset="-122"/>
-                          <a:cs typeface="Pretendard" pitchFamily="34" charset="-120"/>
-                        </a:rPr>
-                        <a:t>보유 </a:t>
-                      </a:r>
-                      <a:pPr indent="0" marL="0">
-                        <a:buNone/>
-                      </a:pPr>
-                      <a:r>
-                        <a:rPr lang="en-US" sz="1300" dirty="0">
-                          <a:solidFill>
-                            <a:srgbClr val="10161F"/>
-                          </a:solidFill>
-                          <a:latin typeface="Pretendard" pitchFamily="34" charset="0"/>
-                          <a:ea typeface="Pretendard" pitchFamily="34" charset="-122"/>
-                          <a:cs typeface="Pretendard" pitchFamily="34" charset="-120"/>
-                        </a:rPr>
-                        <a:t>기간 </a:t>
-                      </a:r>
-                      <a:pPr indent="0" marL="0">
-                        <a:buNone/>
-                      </a:pPr>
-                      <a:r>
-                        <a:rPr lang="en-US" sz="1300" dirty="0">
-                          <a:solidFill>
-                            <a:srgbClr val="10161F"/>
-                          </a:solidFill>
-                          <a:latin typeface="Pretendard" pitchFamily="34" charset="0"/>
-                          <a:ea typeface="Pretendard" pitchFamily="34" charset="-122"/>
-                          <a:cs typeface="Pretendard" pitchFamily="34" charset="-120"/>
-                        </a:rPr>
-                        <a:t>2~3년 </a:t>
-                      </a:r>
-                      <a:pPr indent="0" marL="0">
-                        <a:buNone/>
-                      </a:pPr>
-                      <a:r>
-                        <a:rPr lang="en-US" sz="1300" dirty="0">
-                          <a:solidFill>
-                            <a:srgbClr val="10161F"/>
-                          </a:solidFill>
-                          <a:latin typeface="Pretendard" pitchFamily="34" charset="0"/>
-                          <a:ea typeface="Pretendard" pitchFamily="34" charset="-122"/>
-                          <a:cs typeface="Pretendard" pitchFamily="34" charset="-120"/>
-                        </a:rPr>
-                        <a:t>가정</a:t>
-                      </a:r>
-                      <a:endParaRPr lang="en-US" sz="1300" dirty="0">
-                        <a:latin typeface="Pretendard" charset="0"/>
-                        <a:ea typeface="Pretendard" charset="0"/>
-                        <a:cs typeface="Pretendard" charset="0"/>
-                      </a:endParaRPr>
-                    </a:p>
-                  </a:txBody>
-                  <a:tcPr marL="50800" marR="50800" marT="25400" marB="25400" anchor="ctr">
-                    <a:lnL w="3810" cap="flat" cmpd="sng" algn="ctr">
-                      <a:solidFill>
-                        <a:srgbClr val="CBD5E0"/>
-                      </a:solidFill>
-                      <a:prstDash val="solid"/>
-                      <a:round/>
-                      <a:headEnd type="none" w="med" len="med"/>
-                      <a:tailEnd type="none" w="med" len="med"/>
-                    </a:lnL>
-                    <a:lnR w="3810" cap="flat" cmpd="sng" algn="ctr">
-                      <a:solidFill>
-                        <a:srgbClr val="CBD5E0"/>
-                      </a:solidFill>
-                      <a:prstDash val="solid"/>
-                      <a:round/>
-                      <a:headEnd type="none" w="med" len="med"/>
-                      <a:tailEnd type="none" w="med" len="med"/>
-                    </a:lnR>
-                    <a:lnT w="3810" cap="flat" cmpd="sng" algn="ctr">
-                      <a:solidFill>
-                        <a:srgbClr val="CBD5E0"/>
-                      </a:solidFill>
-                      <a:prstDash val="solid"/>
-                      <a:round/>
-                      <a:headEnd type="none" w="med" len="med"/>
-                      <a:tailEnd type="none" w="med" len="med"/>
-                    </a:lnT>
-                    <a:lnB w="3810" cap="flat" cmpd="sng" algn="ctr">
-                      <a:solidFill>
-                        <a:srgbClr val="CBD5E0"/>
-                      </a:solidFill>
-                      <a:prstDash val="solid"/>
-                      <a:round/>
-                      <a:headEnd type="none" w="med" len="med"/>
-                      <a:tailEnd type="none" w="med" len="med"/>
-                    </a:lnB>
-                    <a:solidFill>
-                      <a:srgbClr val="FFFFFF"/>
-                    </a:solidFill>
-                  </a:tcPr>
-                </a:tc>
-              </a:tr>
-            </a:tbl>
-          </a:graphicData>
-        </a:graphic>
-      </p:graphicFrame>
-      <p:sp>
-        <p:nvSpPr>
-          <p:cNvPr id="7" name="Text 4"/>
-          <p:cNvSpPr/>
-          <p:nvPr/>
-        </p:nvSpPr>
-        <p:spPr>
-          <a:xfrm>
-            <a:off x="566928" y="3621024"/>
-            <a:ext cx="11057839" cy="384048"/>
+      <p:sp>
+        <p:nvSpPr>
+          <p:cNvPr id="6" name="Text 4"/>
+          <p:cNvSpPr/>
+          <p:nvPr/>
+        </p:nvSpPr>
+        <p:spPr>
+          <a:xfrm>
+            <a:off x="566928" y="1645920"/>
+            <a:ext cx="4201979" cy="402336"/>
           </a:xfrm>
           <a:prstGeom prst="rect">
             <a:avLst/>
@@ -7675,35 +6554,35 @@
           <a:p>
             <a:pPr indent="0" marL="0">
               <a:lnSpc>
-                <a:spcPct val="125000"/>
+                <a:spcPct val="120000"/>
               </a:lnSpc>
               <a:buNone/>
             </a:pPr>
             <a:r>
-              <a:rPr lang="en-US" sz="780" dirty="0">
-                <a:solidFill>
-                  <a:srgbClr val="A0AEC0"/>
+              <a:rPr lang="en-US" sz="1400" dirty="0">
+                <a:solidFill>
+                  <a:srgbClr val="718096"/>
                 </a:solidFill>
                 <a:latin typeface="Pretendard" pitchFamily="34" charset="0"/>
                 <a:ea typeface="Pretendard" pitchFamily="34" charset="-122"/>
                 <a:cs typeface="Pretendard" pitchFamily="34" charset="-120"/>
               </a:rPr>
-              <a:t>[참고] 리모델링 또는 밸류업 후 단기 매각(Trading)을 통한 Capital Gain 실현 시나리오입니다.</a:t>
-            </a:r>
-            <a:endParaRPr lang="en-US" sz="780" dirty="0"/>
-          </a:p>
-        </p:txBody>
-      </p:sp>
-      <p:sp>
-        <p:nvSpPr>
-          <p:cNvPr id="8" name="Text 5"/>
-          <p:cNvSpPr/>
-          <p:nvPr/>
-        </p:nvSpPr>
-        <p:spPr>
-          <a:xfrm>
-            <a:off x="566928" y="6382512"/>
-            <a:ext cx="7315200" cy="219456"/>
+              <a:t>{"ok"</a:t>
+            </a:r>
+            <a:endParaRPr lang="en-US" sz="1400" dirty="0"/>
+          </a:p>
+        </p:txBody>
+      </p:sp>
+      <p:sp>
+        <p:nvSpPr>
+          <p:cNvPr id="7" name="Text 5"/>
+          <p:cNvSpPr/>
+          <p:nvPr/>
+        </p:nvSpPr>
+        <p:spPr>
+          <a:xfrm>
+            <a:off x="4768907" y="1645920"/>
+            <a:ext cx="6855860" cy="402336"/>
           </a:xfrm>
           <a:prstGeom prst="rect">
             <a:avLst/>
@@ -7716,17 +6595,59 @@
           <a:lstStyle/>
           <a:p>
             <a:pPr indent="0" marL="0">
-              <a:buNone/>
-            </a:pPr>
-            <a:r>
-              <a:rPr lang="en-US" sz="800" dirty="0">
-                <a:solidFill>
-                  <a:srgbClr val="718096"/>
+              <a:lnSpc>
+                <a:spcPct val="120000"/>
+              </a:lnSpc>
+              <a:buNone/>
+            </a:pPr>
+            <a:r>
+              <a:rPr lang="en-US" sz="1400" b="1" dirty="0">
+                <a:solidFill>
+                  <a:srgbClr val="10161F"/>
                 </a:solidFill>
                 <a:latin typeface="Pretendard" pitchFamily="34" charset="0"/>
                 <a:ea typeface="Pretendard" pitchFamily="34" charset="-122"/>
                 <a:cs typeface="Pretendard" pitchFamily="34" charset="-120"/>
               </a:rPr>
+              <a:t>true,"mocked":true,"extractedFields":{"area_signal":"역삼","asset_type":"오피스빌딩","price_band":"300억","size_signal":"3000평(약 9917.4㎡)"},"extractedFacts":{"region":"역삼","exactAddressCandidate":"역삼동 742-1","assetType":"오피스빌딩","priceText":"300억","sizeText":"3000평(약 9917.4㎡)","currentUse":"오피스","currentUseSignal":"근린생활시설","leaseSignal":"임대중","vacancySignal":"공실없음","tenantNames":"쿠팡","네이버","unitRentTexts":"301호: 1500만","sellerMotivationText":"자산 효율화","brokerNotes":"초역세권 매물"},"detectedSensitiveFields":"exact_address","tenant_name","ambiguousFields":,"warnings":,"areaSignal":"역삼","assetType":"오피스빌딩","priceBand":"300억","sizeSignal":"3000평(약 9917.4㎡)","dealType":"매각","buildingName":"역삼 센트럴타워","exactAddress":"역삼동 742-1","totalFloorArea":9917.3,"buildYear":2015,"currentUseSignal":"근린생활시설","vacancySignal":"공실 없음","fitSummary":"초역세권 근생 빌딩으로 시행/사옥 매입에 최적화","cautionSummary":"주요 임차 업종 만기 조율 필요","hiddenFields":"exact_address","seller_motivation","confidence":{"areaSignal":"confirmed","assetType":"confirmed","priceBand":"ai_hypothesis","fitSummary":"ai_hypothesis"},"missingData":"sizeSignal","boundaryNote":"본 자료는 실거래 통계 기반 참고치입니다.","buyerType":"법인 사옥형","budgetRange":{"min":50,"max":80,"display":"50억~80억"},"preferredRegions":"강남","성수","assetTypes":"꼬마빌딩","사옥용","purchasePurpose":"사옥용 매입","mustHave":"초역세권","주차","niceToHave":"테라스","루프탑","riskTolerance":"medium","financingNote":"자본금 50% 준비","missingQuestions":"구체적인 입주 시기가 언제인가요?","선호하는 수익률이 있나요?","privacyNotes":"연락처 비공개","fitReasons":"매수자 예산(50-80억)에 부합하는 매물입니다.","요청하신 성수/강남 권역에 해당합니다.","cautionReasons":"요청한 용도와 달리 명도 협의가 다소 필요합니다.","recommendedNextAction":"현장 답사 제안","kakaoMessage":"안녕하세요! 요청하신 조건에 부합하는 추천 매물이 있어 안내해 드립니다. 확인해보시고 피드백 부탁드립니다.","title":"강남 역삼역 초역세권 오피스 사옥용 빌딩 매각","shortSummary":"역삼역 도보 5분 거리의 준신축급 대형 오피스빌딩입니다.","dealPoints":"초역세권","사옥 최적","cautionPoints":"명도 조율 필요","hiddenInfoNotice":"보증금 및 지번은 인가 후 확인 가능","gateMessage":"G1 등급 등록이 필요합니다.","kakaoText":"강남 역삼역 오피스 빌딩 매각 안내입니다.","exactUnitCandidate":"101호","floor":"1층","areaSqmText":"150㎡","spaceType":"office","depositText":"5000만","monthlyRentText":"400만","maintenanceFeeText":"50만","availableFromText":"즉시입주","leaseTermMonthsText":"24","incentivesText":"렌트프리 2개월","restrictions":,"landlordIdentity":"김성수","currentTenant":"스타트업","vacancyReason":"이전 확장","rentNegotiation":"협의 가능","region":"성수동","areaSqm":150,"deposit":5000,"monthlyRent":400,"maintenanceFee":50,"availableFrom":"즉시입주","leaseTermMonths":24,"incentives":{"rentFreeMonths":2,"interiorSupport":"일부 인테리어 지원","freeRentDetail":"렌트프리 2개월 지원"},"shortSummaryLease":"성수역 도보 5분 거리 1층 리테일 상가 매물입니다."}</a:t>
+            </a:r>
+            <a:endParaRPr lang="en-US" sz="1400" dirty="0"/>
+          </a:p>
+        </p:txBody>
+      </p:sp>
+      <p:sp>
+        <p:nvSpPr>
+          <p:cNvPr id="8" name="Text 6"/>
+          <p:cNvSpPr/>
+          <p:nvPr/>
+        </p:nvSpPr>
+        <p:spPr>
+          <a:xfrm>
+            <a:off x="566928" y="6382512"/>
+            <a:ext cx="7315200" cy="219456"/>
+          </a:xfrm>
+          <a:prstGeom prst="rect">
+            <a:avLst/>
+          </a:prstGeom>
+          <a:noFill/>
+          <a:ln/>
+        </p:spPr>
+        <p:txBody>
+          <a:bodyPr wrap="square" lIns="0" tIns="0" rIns="0" bIns="0" rtlCol="0" anchor="ctr"/>
+          <a:lstStyle/>
+          <a:p>
+            <a:pPr indent="0" marL="0">
+              <a:buNone/>
+            </a:pPr>
+            <a:r>
+              <a:rPr lang="en-US" sz="800" dirty="0">
+                <a:solidFill>
+                  <a:srgbClr val="718096"/>
+                </a:solidFill>
+                <a:latin typeface="Pretendard" pitchFamily="34" charset="0"/>
+                <a:ea typeface="Pretendard" pitchFamily="34" charset="-122"/>
+                <a:cs typeface="Pretendard" pitchFamily="34" charset="-120"/>
+              </a:rPr>
               <a:t>크리딜   |   </a:t>
             </a:r>
             <a:endParaRPr lang="en-US" sz="800" dirty="0"/>
@@ -7735,7 +6656,7 @@
       </p:sp>
       <p:sp>
         <p:nvSpPr>
-          <p:cNvPr id="9" name="Text 6"/>
+          <p:cNvPr id="9" name="Text 7"/>
           <p:cNvSpPr/>
           <p:nvPr/>
         </p:nvSpPr>
@@ -7950,11 +6871,11 @@
         <p:spPr>
           <a:xfrm>
             <a:off x="566928" y="1417320"/>
-            <a:ext cx="11057839" cy="3611880"/>
+            <a:ext cx="1992112" cy="3611880"/>
           </a:xfrm>
           <a:prstGeom prst="roundRect">
             <a:avLst>
-              <a:gd name="adj" fmla="val 1519"/>
+              <a:gd name="adj" fmla="val 2754"/>
             </a:avLst>
           </a:prstGeom>
           <a:solidFill>
@@ -7977,7 +6898,7 @@
         <p:spPr>
           <a:xfrm>
             <a:off x="566928" y="1417320"/>
-            <a:ext cx="11057839" cy="45720"/>
+            <a:ext cx="1992112" cy="45720"/>
           </a:xfrm>
           <a:prstGeom prst="rect">
             <a:avLst/>
@@ -7997,7 +6918,7 @@
         <p:spPr>
           <a:xfrm>
             <a:off x="795528" y="1618488"/>
-            <a:ext cx="10600639" cy="292608"/>
+            <a:ext cx="1534912" cy="292608"/>
           </a:xfrm>
           <a:prstGeom prst="rect">
             <a:avLst/>
@@ -8013,7 +6934,7 @@
               <a:buNone/>
             </a:pPr>
             <a:r>
-              <a:rPr lang="en-US" sz="1350" b="1" dirty="0">
+              <a:rPr lang="en-US" sz="1150" b="1" dirty="0">
                 <a:solidFill>
                   <a:srgbClr val="977024"/>
                 </a:solidFill>
@@ -8021,9 +6942,9 @@
                 <a:ea typeface="Pretendard" pitchFamily="34" charset="-122"/>
                 <a:cs typeface="Pretendard" pitchFamily="34" charset="-120"/>
               </a:rPr>
-              <a:t>용도 리스크</a:t>
-            </a:r>
-            <a:endParaRPr lang="en-US" sz="1350" dirty="0"/>
+              <a:t>건물 물리적 상태</a:t>
+            </a:r>
+            <a:endParaRPr lang="en-US" sz="1150" dirty="0"/>
           </a:p>
         </p:txBody>
       </p:sp>
@@ -8036,7 +6957,7 @@
         <p:spPr>
           <a:xfrm>
             <a:off x="795528" y="1911096"/>
-            <a:ext cx="10600639" cy="402336"/>
+            <a:ext cx="1534912" cy="402336"/>
           </a:xfrm>
           <a:prstGeom prst="rect">
             <a:avLst/>
@@ -8054,7 +6975,7 @@
               <a:buNone/>
             </a:pPr>
             <a:r>
-              <a:rPr lang="en-US" sz="1350" b="1" dirty="0">
+              <a:rPr lang="en-US" sz="1150" b="1" dirty="0">
                 <a:solidFill>
                   <a:srgbClr val="10161F"/>
                 </a:solidFill>
@@ -8062,9 +6983,9 @@
                 <a:ea typeface="Pretendard" pitchFamily="34" charset="-122"/>
                 <a:cs typeface="Pretendard" pitchFamily="34" charset="-120"/>
               </a:rPr>
-              <a:t>—</a:t>
-            </a:r>
-            <a:endParaRPr lang="en-US" sz="1350" dirty="0"/>
+              <a:t>2017년 준공 신축급 상태 (누수/균열 결함 없음)</a:t>
+            </a:r>
+            <a:endParaRPr lang="en-US" sz="1150" dirty="0"/>
           </a:p>
         </p:txBody>
       </p:sp>
@@ -8077,7 +6998,7 @@
         <p:spPr>
           <a:xfrm>
             <a:off x="795528" y="2377440"/>
-            <a:ext cx="10600639" cy="2560320"/>
+            <a:ext cx="1534912" cy="2560320"/>
           </a:xfrm>
           <a:prstGeom prst="rect">
             <a:avLst/>
@@ -8099,7 +7020,7 @@
               <a:buChar char="•"/>
             </a:pPr>
             <a:r>
-              <a:rPr lang="en-US" sz="1200" dirty="0">
+              <a:rPr lang="en-US" sz="1050" dirty="0">
                 <a:solidFill>
                   <a:srgbClr val="10161F"/>
                 </a:solidFill>
@@ -8107,22 +7028,69 @@
                 <a:ea typeface="Pretendard" pitchFamily="34" charset="-122"/>
                 <a:cs typeface="Pretendard" pitchFamily="34" charset="-120"/>
               </a:rPr>
-              <a:t>{"ok":true,"mocked":true,"extractedFields":{"area_signal":"역삼","asset_type":"오피스빌딩","price_band":"300억","size_signal":"3000평(약 9917.4㎡)"},"extractedFacts":{"region":"역삼","exactAddressCandidate":"역삼동 7</a:t>
-            </a:r>
-            <a:endParaRPr lang="en-US" sz="1200" dirty="0"/>
-          </a:p>
-        </p:txBody>
-      </p:sp>
-      <p:sp>
-        <p:nvSpPr>
-          <p:cNvPr id="11" name="Text 9"/>
-          <p:cNvSpPr/>
-          <p:nvPr/>
-        </p:nvSpPr>
-        <p:spPr>
-          <a:xfrm>
-            <a:off x="566928" y="6382512"/>
-            <a:ext cx="7315200" cy="219456"/>
+              <a:t>준공 10년 미만으로 대규모 수선비용 발생 가능성 낮음</a:t>
+            </a:r>
+            <a:endParaRPr lang="en-US" sz="1050" dirty="0"/>
+          </a:p>
+        </p:txBody>
+      </p:sp>
+      <p:sp>
+        <p:nvSpPr>
+          <p:cNvPr id="11" name="Shape 9"/>
+          <p:cNvSpPr/>
+          <p:nvPr/>
+        </p:nvSpPr>
+        <p:spPr>
+          <a:xfrm>
+            <a:off x="2833360" y="1417320"/>
+            <a:ext cx="1992112" cy="3611880"/>
+          </a:xfrm>
+          <a:prstGeom prst="roundRect">
+            <a:avLst>
+              <a:gd name="adj" fmla="val 2754"/>
+            </a:avLst>
+          </a:prstGeom>
+          <a:solidFill>
+            <a:srgbClr val="F7FAFC"/>
+          </a:solidFill>
+          <a:ln w="6350">
+            <a:solidFill>
+              <a:srgbClr val="CBD5E0"/>
+            </a:solidFill>
+            <a:prstDash val="solid"/>
+          </a:ln>
+        </p:spPr>
+      </p:sp>
+      <p:sp>
+        <p:nvSpPr>
+          <p:cNvPr id="12" name="Shape 10"/>
+          <p:cNvSpPr/>
+          <p:nvPr/>
+        </p:nvSpPr>
+        <p:spPr>
+          <a:xfrm>
+            <a:off x="2833360" y="1417320"/>
+            <a:ext cx="1992112" cy="45720"/>
+          </a:xfrm>
+          <a:prstGeom prst="rect">
+            <a:avLst/>
+          </a:prstGeom>
+          <a:solidFill>
+            <a:srgbClr val="B98A2E"/>
+          </a:solidFill>
+          <a:ln/>
+        </p:spPr>
+      </p:sp>
+      <p:sp>
+        <p:nvSpPr>
+          <p:cNvPr id="13" name="Text 11"/>
+          <p:cNvSpPr/>
+          <p:nvPr/>
+        </p:nvSpPr>
+        <p:spPr>
+          <a:xfrm>
+            <a:off x="3061960" y="1618488"/>
+            <a:ext cx="1534912" cy="292608"/>
           </a:xfrm>
           <a:prstGeom prst="rect">
             <a:avLst/>
@@ -8138,14 +7106,721 @@
               <a:buNone/>
             </a:pPr>
             <a:r>
-              <a:rPr lang="en-US" sz="800" dirty="0">
-                <a:solidFill>
-                  <a:srgbClr val="718096"/>
+              <a:rPr lang="en-US" sz="1150" b="1" dirty="0">
+                <a:solidFill>
+                  <a:srgbClr val="977024"/>
                 </a:solidFill>
                 <a:latin typeface="Pretendard" pitchFamily="34" charset="0"/>
                 <a:ea typeface="Pretendard" pitchFamily="34" charset="-122"/>
                 <a:cs typeface="Pretendard" pitchFamily="34" charset="-120"/>
               </a:rPr>
+              <a:t>승강기 및 설비</a:t>
+            </a:r>
+            <a:endParaRPr lang="en-US" sz="1150" dirty="0"/>
+          </a:p>
+        </p:txBody>
+      </p:sp>
+      <p:sp>
+        <p:nvSpPr>
+          <p:cNvPr id="14" name="Text 12"/>
+          <p:cNvSpPr/>
+          <p:nvPr/>
+        </p:nvSpPr>
+        <p:spPr>
+          <a:xfrm>
+            <a:off x="3061960" y="1911096"/>
+            <a:ext cx="1534912" cy="402336"/>
+          </a:xfrm>
+          <a:prstGeom prst="rect">
+            <a:avLst/>
+          </a:prstGeom>
+          <a:noFill/>
+          <a:ln/>
+        </p:spPr>
+        <p:txBody>
+          <a:bodyPr wrap="square" lIns="0" tIns="0" rIns="0" bIns="0" rtlCol="0" anchor="ctr">
+            <a:normAutofit/>
+          </a:bodyPr>
+          <a:lstStyle/>
+          <a:p>
+            <a:pPr indent="0" marL="0">
+              <a:buNone/>
+            </a:pPr>
+            <a:r>
+              <a:rPr lang="en-US" sz="1150" b="1" dirty="0">
+                <a:solidFill>
+                  <a:srgbClr val="10161F"/>
+                </a:solidFill>
+                <a:latin typeface="Pretendard" pitchFamily="34" charset="0"/>
+                <a:ea typeface="Pretendard" pitchFamily="34" charset="-122"/>
+                <a:cs typeface="Pretendard" pitchFamily="34" charset="-120"/>
+              </a:rPr>
+              <a:t>15인승 침대용 승강기 및 냉난방 설비 양호</a:t>
+            </a:r>
+            <a:endParaRPr lang="en-US" sz="1150" dirty="0"/>
+          </a:p>
+        </p:txBody>
+      </p:sp>
+      <p:sp>
+        <p:nvSpPr>
+          <p:cNvPr id="15" name="Text 13"/>
+          <p:cNvSpPr/>
+          <p:nvPr/>
+        </p:nvSpPr>
+        <p:spPr>
+          <a:xfrm>
+            <a:off x="3061960" y="2377440"/>
+            <a:ext cx="1534912" cy="2560320"/>
+          </a:xfrm>
+          <a:prstGeom prst="rect">
+            <a:avLst/>
+          </a:prstGeom>
+          <a:noFill/>
+          <a:ln/>
+        </p:spPr>
+        <p:txBody>
+          <a:bodyPr wrap="square" lIns="0" tIns="0" rIns="0" bIns="0" rtlCol="0" anchor="t">
+            <a:normAutofit/>
+          </a:bodyPr>
+          <a:lstStyle/>
+          <a:p>
+            <a:pPr marL="342900" indent="-342900">
+              <a:lnSpc>
+                <a:spcPct val="125000"/>
+              </a:lnSpc>
+              <a:buSzPct val="100000"/>
+              <a:buChar char="•"/>
+            </a:pPr>
+            <a:r>
+              <a:rPr lang="en-US" sz="1050" dirty="0">
+                <a:solidFill>
+                  <a:srgbClr val="10161F"/>
+                </a:solidFill>
+                <a:latin typeface="Pretendard" pitchFamily="34" charset="0"/>
+                <a:ea typeface="Pretendard" pitchFamily="34" charset="-122"/>
+                <a:cs typeface="Pretendard" pitchFamily="34" charset="-120"/>
+              </a:rPr>
+              <a:t>주기적 정기 점검 계약 유지로 관리 리스크 최소화</a:t>
+            </a:r>
+            <a:endParaRPr lang="en-US" sz="1050" dirty="0"/>
+          </a:p>
+        </p:txBody>
+      </p:sp>
+      <p:sp>
+        <p:nvSpPr>
+          <p:cNvPr id="16" name="Shape 14"/>
+          <p:cNvSpPr/>
+          <p:nvPr/>
+        </p:nvSpPr>
+        <p:spPr>
+          <a:xfrm>
+            <a:off x="5099792" y="1417320"/>
+            <a:ext cx="1992112" cy="3611880"/>
+          </a:xfrm>
+          <a:prstGeom prst="roundRect">
+            <a:avLst>
+              <a:gd name="adj" fmla="val 2754"/>
+            </a:avLst>
+          </a:prstGeom>
+          <a:solidFill>
+            <a:srgbClr val="F7FAFC"/>
+          </a:solidFill>
+          <a:ln w="6350">
+            <a:solidFill>
+              <a:srgbClr val="CBD5E0"/>
+            </a:solidFill>
+            <a:prstDash val="solid"/>
+          </a:ln>
+        </p:spPr>
+      </p:sp>
+      <p:sp>
+        <p:nvSpPr>
+          <p:cNvPr id="17" name="Shape 15"/>
+          <p:cNvSpPr/>
+          <p:nvPr/>
+        </p:nvSpPr>
+        <p:spPr>
+          <a:xfrm>
+            <a:off x="5099792" y="1417320"/>
+            <a:ext cx="1992112" cy="45720"/>
+          </a:xfrm>
+          <a:prstGeom prst="rect">
+            <a:avLst/>
+          </a:prstGeom>
+          <a:solidFill>
+            <a:srgbClr val="B98A2E"/>
+          </a:solidFill>
+          <a:ln/>
+        </p:spPr>
+      </p:sp>
+      <p:sp>
+        <p:nvSpPr>
+          <p:cNvPr id="18" name="Text 16"/>
+          <p:cNvSpPr/>
+          <p:nvPr/>
+        </p:nvSpPr>
+        <p:spPr>
+          <a:xfrm>
+            <a:off x="5328392" y="1618488"/>
+            <a:ext cx="1534912" cy="292608"/>
+          </a:xfrm>
+          <a:prstGeom prst="rect">
+            <a:avLst/>
+          </a:prstGeom>
+          <a:noFill/>
+          <a:ln/>
+        </p:spPr>
+        <p:txBody>
+          <a:bodyPr wrap="square" lIns="0" tIns="0" rIns="0" bIns="0" rtlCol="0" anchor="ctr"/>
+          <a:lstStyle/>
+          <a:p>
+            <a:pPr indent="0" marL="0">
+              <a:buNone/>
+            </a:pPr>
+            <a:r>
+              <a:rPr lang="en-US" sz="1150" b="1" dirty="0">
+                <a:solidFill>
+                  <a:srgbClr val="977024"/>
+                </a:solidFill>
+                <a:latin typeface="Pretendard" pitchFamily="34" charset="0"/>
+                <a:ea typeface="Pretendard" pitchFamily="34" charset="-122"/>
+                <a:cs typeface="Pretendard" pitchFamily="34" charset="-120"/>
+              </a:rPr>
+              <a:t>임차인 이탈 위험</a:t>
+            </a:r>
+            <a:endParaRPr lang="en-US" sz="1150" dirty="0"/>
+          </a:p>
+        </p:txBody>
+      </p:sp>
+      <p:sp>
+        <p:nvSpPr>
+          <p:cNvPr id="19" name="Text 17"/>
+          <p:cNvSpPr/>
+          <p:nvPr/>
+        </p:nvSpPr>
+        <p:spPr>
+          <a:xfrm>
+            <a:off x="5328392" y="1911096"/>
+            <a:ext cx="1534912" cy="402336"/>
+          </a:xfrm>
+          <a:prstGeom prst="rect">
+            <a:avLst/>
+          </a:prstGeom>
+          <a:noFill/>
+          <a:ln/>
+        </p:spPr>
+        <p:txBody>
+          <a:bodyPr wrap="square" lIns="0" tIns="0" rIns="0" bIns="0" rtlCol="0" anchor="ctr">
+            <a:normAutofit/>
+          </a:bodyPr>
+          <a:lstStyle/>
+          <a:p>
+            <a:pPr indent="0" marL="0">
+              <a:buNone/>
+            </a:pPr>
+            <a:r>
+              <a:rPr lang="en-US" sz="1150" b="1" dirty="0">
+                <a:solidFill>
+                  <a:srgbClr val="10161F"/>
+                </a:solidFill>
+                <a:latin typeface="Pretendard" pitchFamily="34" charset="0"/>
+                <a:ea typeface="Pretendard" pitchFamily="34" charset="-122"/>
+                <a:cs typeface="Pretendard" pitchFamily="34" charset="-120"/>
+              </a:rPr>
+              <a:t>병의원/약국 인테리어 투자비(호실당 5억↑) 존속</a:t>
+            </a:r>
+            <a:endParaRPr lang="en-US" sz="1150" dirty="0"/>
+          </a:p>
+        </p:txBody>
+      </p:sp>
+      <p:sp>
+        <p:nvSpPr>
+          <p:cNvPr id="20" name="Text 18"/>
+          <p:cNvSpPr/>
+          <p:nvPr/>
+        </p:nvSpPr>
+        <p:spPr>
+          <a:xfrm>
+            <a:off x="5328392" y="2377440"/>
+            <a:ext cx="1534912" cy="2560320"/>
+          </a:xfrm>
+          <a:prstGeom prst="rect">
+            <a:avLst/>
+          </a:prstGeom>
+          <a:noFill/>
+          <a:ln/>
+        </p:spPr>
+        <p:txBody>
+          <a:bodyPr wrap="square" lIns="0" tIns="0" rIns="0" bIns="0" rtlCol="0" anchor="t">
+            <a:normAutofit/>
+          </a:bodyPr>
+          <a:lstStyle/>
+          <a:p>
+            <a:pPr marL="342900" indent="-342900">
+              <a:lnSpc>
+                <a:spcPct val="125000"/>
+              </a:lnSpc>
+              <a:buSzPct val="100000"/>
+              <a:buChar char="•"/>
+            </a:pPr>
+            <a:r>
+              <a:rPr lang="en-US" sz="1050" dirty="0">
+                <a:solidFill>
+                  <a:srgbClr val="10161F"/>
+                </a:solidFill>
+                <a:latin typeface="Pretendard" pitchFamily="34" charset="0"/>
+                <a:ea typeface="Pretendard" pitchFamily="34" charset="-122"/>
+                <a:cs typeface="Pretendard" pitchFamily="34" charset="-120"/>
+              </a:rPr>
+              <a:t>WALE 3.5년 확보 및 만기 6개월 전 재계약 협상 개시</a:t>
+            </a:r>
+            <a:endParaRPr lang="en-US" sz="1050" dirty="0"/>
+          </a:p>
+        </p:txBody>
+      </p:sp>
+      <p:sp>
+        <p:nvSpPr>
+          <p:cNvPr id="21" name="Shape 19"/>
+          <p:cNvSpPr/>
+          <p:nvPr/>
+        </p:nvSpPr>
+        <p:spPr>
+          <a:xfrm>
+            <a:off x="7366224" y="1417320"/>
+            <a:ext cx="1992112" cy="3611880"/>
+          </a:xfrm>
+          <a:prstGeom prst="roundRect">
+            <a:avLst>
+              <a:gd name="adj" fmla="val 2754"/>
+            </a:avLst>
+          </a:prstGeom>
+          <a:solidFill>
+            <a:srgbClr val="F7FAFC"/>
+          </a:solidFill>
+          <a:ln w="6350">
+            <a:solidFill>
+              <a:srgbClr val="CBD5E0"/>
+            </a:solidFill>
+            <a:prstDash val="solid"/>
+          </a:ln>
+        </p:spPr>
+      </p:sp>
+      <p:sp>
+        <p:nvSpPr>
+          <p:cNvPr id="22" name="Shape 20"/>
+          <p:cNvSpPr/>
+          <p:nvPr/>
+        </p:nvSpPr>
+        <p:spPr>
+          <a:xfrm>
+            <a:off x="7366224" y="1417320"/>
+            <a:ext cx="1992112" cy="45720"/>
+          </a:xfrm>
+          <a:prstGeom prst="rect">
+            <a:avLst/>
+          </a:prstGeom>
+          <a:solidFill>
+            <a:srgbClr val="B98A2E"/>
+          </a:solidFill>
+          <a:ln/>
+        </p:spPr>
+      </p:sp>
+      <p:sp>
+        <p:nvSpPr>
+          <p:cNvPr id="23" name="Text 21"/>
+          <p:cNvSpPr/>
+          <p:nvPr/>
+        </p:nvSpPr>
+        <p:spPr>
+          <a:xfrm>
+            <a:off x="7594824" y="1618488"/>
+            <a:ext cx="1534912" cy="292608"/>
+          </a:xfrm>
+          <a:prstGeom prst="rect">
+            <a:avLst/>
+          </a:prstGeom>
+          <a:noFill/>
+          <a:ln/>
+        </p:spPr>
+        <p:txBody>
+          <a:bodyPr wrap="square" lIns="0" tIns="0" rIns="0" bIns="0" rtlCol="0" anchor="ctr"/>
+          <a:lstStyle/>
+          <a:p>
+            <a:pPr indent="0" marL="0">
+              <a:buNone/>
+            </a:pPr>
+            <a:r>
+              <a:rPr lang="en-US" sz="1150" b="1" dirty="0">
+                <a:solidFill>
+                  <a:srgbClr val="977024"/>
+                </a:solidFill>
+                <a:latin typeface="Pretendard" pitchFamily="34" charset="0"/>
+                <a:ea typeface="Pretendard" pitchFamily="34" charset="-122"/>
+                <a:cs typeface="Pretendard" pitchFamily="34" charset="-120"/>
+              </a:rPr>
+              <a:t>명도 및 분쟁</a:t>
+            </a:r>
+            <a:endParaRPr lang="en-US" sz="1150" dirty="0"/>
+          </a:p>
+        </p:txBody>
+      </p:sp>
+      <p:sp>
+        <p:nvSpPr>
+          <p:cNvPr id="24" name="Text 22"/>
+          <p:cNvSpPr/>
+          <p:nvPr/>
+        </p:nvSpPr>
+        <p:spPr>
+          <a:xfrm>
+            <a:off x="7594824" y="1911096"/>
+            <a:ext cx="1534912" cy="402336"/>
+          </a:xfrm>
+          <a:prstGeom prst="rect">
+            <a:avLst/>
+          </a:prstGeom>
+          <a:noFill/>
+          <a:ln/>
+        </p:spPr>
+        <p:txBody>
+          <a:bodyPr wrap="square" lIns="0" tIns="0" rIns="0" bIns="0" rtlCol="0" anchor="ctr">
+            <a:normAutofit/>
+          </a:bodyPr>
+          <a:lstStyle/>
+          <a:p>
+            <a:pPr indent="0" marL="0">
+              <a:buNone/>
+            </a:pPr>
+            <a:r>
+              <a:rPr lang="en-US" sz="1150" b="1" dirty="0">
+                <a:solidFill>
+                  <a:srgbClr val="10161F"/>
+                </a:solidFill>
+                <a:latin typeface="Pretendard" pitchFamily="34" charset="0"/>
+                <a:ea typeface="Pretendard" pitchFamily="34" charset="-122"/>
+                <a:cs typeface="Pretendard" pitchFamily="34" charset="-120"/>
+              </a:rPr>
+              <a:t>전층 정상 임대차 상태 (임대료 연체 0건)</a:t>
+            </a:r>
+            <a:endParaRPr lang="en-US" sz="1150" dirty="0"/>
+          </a:p>
+        </p:txBody>
+      </p:sp>
+      <p:sp>
+        <p:nvSpPr>
+          <p:cNvPr id="25" name="Text 23"/>
+          <p:cNvSpPr/>
+          <p:nvPr/>
+        </p:nvSpPr>
+        <p:spPr>
+          <a:xfrm>
+            <a:off x="7594824" y="2377440"/>
+            <a:ext cx="1534912" cy="2560320"/>
+          </a:xfrm>
+          <a:prstGeom prst="rect">
+            <a:avLst/>
+          </a:prstGeom>
+          <a:noFill/>
+          <a:ln/>
+        </p:spPr>
+        <p:txBody>
+          <a:bodyPr wrap="square" lIns="0" tIns="0" rIns="0" bIns="0" rtlCol="0" anchor="t">
+            <a:normAutofit/>
+          </a:bodyPr>
+          <a:lstStyle/>
+          <a:p>
+            <a:pPr marL="342900" indent="-342900">
+              <a:lnSpc>
+                <a:spcPct val="125000"/>
+              </a:lnSpc>
+              <a:buSzPct val="100000"/>
+              <a:buChar char="•"/>
+            </a:pPr>
+            <a:r>
+              <a:rPr lang="en-US" sz="1050" dirty="0">
+                <a:solidFill>
+                  <a:srgbClr val="10161F"/>
+                </a:solidFill>
+                <a:latin typeface="Pretendard" pitchFamily="34" charset="0"/>
+                <a:ea typeface="Pretendard" pitchFamily="34" charset="-122"/>
+                <a:cs typeface="Pretendard" pitchFamily="34" charset="-120"/>
+              </a:rPr>
+              <a:t>임대차 분쟁 및 소송 이력 없음 (명도 리스크 극소)</a:t>
+            </a:r>
+            <a:endParaRPr lang="en-US" sz="1050" dirty="0"/>
+          </a:p>
+        </p:txBody>
+      </p:sp>
+      <p:sp>
+        <p:nvSpPr>
+          <p:cNvPr id="26" name="Shape 24"/>
+          <p:cNvSpPr/>
+          <p:nvPr/>
+        </p:nvSpPr>
+        <p:spPr>
+          <a:xfrm>
+            <a:off x="9632655" y="1417320"/>
+            <a:ext cx="1992112" cy="3611880"/>
+          </a:xfrm>
+          <a:prstGeom prst="roundRect">
+            <a:avLst>
+              <a:gd name="adj" fmla="val 2754"/>
+            </a:avLst>
+          </a:prstGeom>
+          <a:solidFill>
+            <a:srgbClr val="F7FAFC"/>
+          </a:solidFill>
+          <a:ln w="6350">
+            <a:solidFill>
+              <a:srgbClr val="CBD5E0"/>
+            </a:solidFill>
+            <a:prstDash val="solid"/>
+          </a:ln>
+        </p:spPr>
+      </p:sp>
+      <p:sp>
+        <p:nvSpPr>
+          <p:cNvPr id="27" name="Shape 25"/>
+          <p:cNvSpPr/>
+          <p:nvPr/>
+        </p:nvSpPr>
+        <p:spPr>
+          <a:xfrm>
+            <a:off x="9632655" y="1417320"/>
+            <a:ext cx="1992112" cy="45720"/>
+          </a:xfrm>
+          <a:prstGeom prst="rect">
+            <a:avLst/>
+          </a:prstGeom>
+          <a:solidFill>
+            <a:srgbClr val="B98A2E"/>
+          </a:solidFill>
+          <a:ln/>
+        </p:spPr>
+      </p:sp>
+      <p:sp>
+        <p:nvSpPr>
+          <p:cNvPr id="28" name="Text 26"/>
+          <p:cNvSpPr/>
+          <p:nvPr/>
+        </p:nvSpPr>
+        <p:spPr>
+          <a:xfrm>
+            <a:off x="9861255" y="1618488"/>
+            <a:ext cx="1534912" cy="292608"/>
+          </a:xfrm>
+          <a:prstGeom prst="rect">
+            <a:avLst/>
+          </a:prstGeom>
+          <a:noFill/>
+          <a:ln/>
+        </p:spPr>
+        <p:txBody>
+          <a:bodyPr wrap="square" lIns="0" tIns="0" rIns="0" bIns="0" rtlCol="0" anchor="ctr"/>
+          <a:lstStyle/>
+          <a:p>
+            <a:pPr indent="0" marL="0">
+              <a:buNone/>
+            </a:pPr>
+            <a:r>
+              <a:rPr lang="en-US" sz="1150" b="1" dirty="0">
+                <a:solidFill>
+                  <a:srgbClr val="977024"/>
+                </a:solidFill>
+                <a:latin typeface="Pretendard" pitchFamily="34" charset="0"/>
+                <a:ea typeface="Pretendard" pitchFamily="34" charset="-122"/>
+                <a:cs typeface="Pretendard" pitchFamily="34" charset="-120"/>
+              </a:rPr>
+              <a:t>권리관계 및 금융</a:t>
+            </a:r>
+            <a:endParaRPr lang="en-US" sz="1150" dirty="0"/>
+          </a:p>
+        </p:txBody>
+      </p:sp>
+      <p:sp>
+        <p:nvSpPr>
+          <p:cNvPr id="29" name="Text 27"/>
+          <p:cNvSpPr/>
+          <p:nvPr/>
+        </p:nvSpPr>
+        <p:spPr>
+          <a:xfrm>
+            <a:off x="9861255" y="1911096"/>
+            <a:ext cx="1534912" cy="402336"/>
+          </a:xfrm>
+          <a:prstGeom prst="rect">
+            <a:avLst/>
+          </a:prstGeom>
+          <a:noFill/>
+          <a:ln/>
+        </p:spPr>
+        <p:txBody>
+          <a:bodyPr wrap="square" lIns="0" tIns="0" rIns="0" bIns="0" rtlCol="0" anchor="ctr">
+            <a:normAutofit/>
+          </a:bodyPr>
+          <a:lstStyle/>
+          <a:p>
+            <a:pPr indent="0" marL="0">
+              <a:buNone/>
+            </a:pPr>
+            <a:r>
+              <a:rPr lang="en-US" sz="1150" b="1" dirty="0">
+                <a:solidFill>
+                  <a:srgbClr val="10161F"/>
+                </a:solidFill>
+                <a:latin typeface="Pretendard" pitchFamily="34" charset="0"/>
+                <a:ea typeface="Pretendard" pitchFamily="34" charset="-122"/>
+                <a:cs typeface="Pretendard" pitchFamily="34" charset="-120"/>
+              </a:rPr>
+              <a:t>단독 법인 소유 (가압류/가처분 일체 없음)</a:t>
+            </a:r>
+            <a:endParaRPr lang="en-US" sz="1150" dirty="0"/>
+          </a:p>
+        </p:txBody>
+      </p:sp>
+      <p:sp>
+        <p:nvSpPr>
+          <p:cNvPr id="30" name="Text 28"/>
+          <p:cNvSpPr/>
+          <p:nvPr/>
+        </p:nvSpPr>
+        <p:spPr>
+          <a:xfrm>
+            <a:off x="9861255" y="2377440"/>
+            <a:ext cx="1534912" cy="2560320"/>
+          </a:xfrm>
+          <a:prstGeom prst="rect">
+            <a:avLst/>
+          </a:prstGeom>
+          <a:noFill/>
+          <a:ln/>
+        </p:spPr>
+        <p:txBody>
+          <a:bodyPr wrap="square" lIns="0" tIns="0" rIns="0" bIns="0" rtlCol="0" anchor="t">
+            <a:normAutofit/>
+          </a:bodyPr>
+          <a:lstStyle/>
+          <a:p>
+            <a:pPr marL="342900" indent="-342900">
+              <a:lnSpc>
+                <a:spcPct val="125000"/>
+              </a:lnSpc>
+              <a:buSzPct val="100000"/>
+              <a:buChar char="•"/>
+            </a:pPr>
+            <a:r>
+              <a:rPr lang="en-US" sz="1050" dirty="0">
+                <a:solidFill>
+                  <a:srgbClr val="10161F"/>
+                </a:solidFill>
+                <a:latin typeface="Pretendard" pitchFamily="34" charset="0"/>
+                <a:ea typeface="Pretendard" pitchFamily="34" charset="-122"/>
+                <a:cs typeface="Pretendard" pitchFamily="34" charset="-120"/>
+              </a:rPr>
+              <a:t>1금융권 기존 담보대출 85억(연 4.1%) 승계 적격 판정</a:t>
+            </a:r>
+            <a:endParaRPr lang="en-US" sz="1050" dirty="0"/>
+          </a:p>
+        </p:txBody>
+      </p:sp>
+      <p:sp>
+        <p:nvSpPr>
+          <p:cNvPr id="31" name="Shape 29"/>
+          <p:cNvSpPr/>
+          <p:nvPr/>
+        </p:nvSpPr>
+        <p:spPr>
+          <a:xfrm>
+            <a:off x="566928" y="5193792"/>
+            <a:ext cx="11057839" cy="621792"/>
+          </a:xfrm>
+          <a:prstGeom prst="roundRect">
+            <a:avLst>
+              <a:gd name="adj" fmla="val 8824"/>
+            </a:avLst>
+          </a:prstGeom>
+          <a:solidFill>
+            <a:srgbClr val="F7FAFC"/>
+          </a:solidFill>
+          <a:ln w="6350">
+            <a:solidFill>
+              <a:srgbClr val="CBD5E0"/>
+            </a:solidFill>
+            <a:prstDash val="solid"/>
+          </a:ln>
+        </p:spPr>
+      </p:sp>
+      <p:sp>
+        <p:nvSpPr>
+          <p:cNvPr id="32" name="Text 30"/>
+          <p:cNvSpPr/>
+          <p:nvPr/>
+        </p:nvSpPr>
+        <p:spPr>
+          <a:xfrm>
+            <a:off x="795528" y="5193792"/>
+            <a:ext cx="10600639" cy="621792"/>
+          </a:xfrm>
+          <a:prstGeom prst="rect">
+            <a:avLst/>
+          </a:prstGeom>
+          <a:noFill/>
+          <a:ln/>
+        </p:spPr>
+        <p:txBody>
+          <a:bodyPr wrap="square" lIns="0" tIns="0" rIns="0" bIns="0" rtlCol="0" anchor="ctr"/>
+          <a:lstStyle/>
+          <a:p>
+            <a:pPr indent="0" marL="0">
+              <a:buNone/>
+            </a:pPr>
+            <a:r>
+              <a:rPr lang="en-US" sz="1200" dirty="0">
+                <a:solidFill>
+                  <a:srgbClr val="10161F"/>
+                </a:solidFill>
+                <a:latin typeface="Pretendard" pitchFamily="34" charset="0"/>
+                <a:ea typeface="Pretendard" pitchFamily="34" charset="-122"/>
+                <a:cs typeface="Pretendard" pitchFamily="34" charset="-120"/>
+              </a:rPr>
+              <a:t>실사 총평: 자산의 물리적·권리적 하자가 없으며, 세부 임대차 계약서 및 등기사항증명서는 LOI 접수 후 원본 열람 가능합니다.</a:t>
+            </a:r>
+            <a:endParaRPr lang="en-US" sz="1200" dirty="0"/>
+          </a:p>
+        </p:txBody>
+      </p:sp>
+      <p:sp>
+        <p:nvSpPr>
+          <p:cNvPr id="33" name="Text 31"/>
+          <p:cNvSpPr/>
+          <p:nvPr/>
+        </p:nvSpPr>
+        <p:spPr>
+          <a:xfrm>
+            <a:off x="566928" y="6382512"/>
+            <a:ext cx="7315200" cy="219456"/>
+          </a:xfrm>
+          <a:prstGeom prst="rect">
+            <a:avLst/>
+          </a:prstGeom>
+          <a:noFill/>
+          <a:ln/>
+        </p:spPr>
+        <p:txBody>
+          <a:bodyPr wrap="square" lIns="0" tIns="0" rIns="0" bIns="0" rtlCol="0" anchor="ctr"/>
+          <a:lstStyle/>
+          <a:p>
+            <a:pPr indent="0" marL="0">
+              <a:buNone/>
+            </a:pPr>
+            <a:r>
+              <a:rPr lang="en-US" sz="800" dirty="0">
+                <a:solidFill>
+                  <a:srgbClr val="718096"/>
+                </a:solidFill>
+                <a:latin typeface="Pretendard" pitchFamily="34" charset="0"/>
+                <a:ea typeface="Pretendard" pitchFamily="34" charset="-122"/>
+                <a:cs typeface="Pretendard" pitchFamily="34" charset="-120"/>
+              </a:rPr>
               <a:t>크리딜   |   </a:t>
             </a:r>
             <a:endParaRPr lang="en-US" sz="800" dirty="0"/>
@@ -8154,7 +7829,7 @@
       </p:sp>
       <p:sp>
         <p:nvSpPr>
-          <p:cNvPr id="12" name="Text 10"/>
+          <p:cNvPr id="34" name="Text 32"/>
           <p:cNvSpPr/>
           <p:nvPr/>
         </p:nvSpPr>
@@ -9883,11 +9558,11 @@
         <p:spPr>
           <a:xfrm>
             <a:off x="566928" y="1572768"/>
-            <a:ext cx="11057839" cy="3200400"/>
+            <a:ext cx="2490140" cy="3200400"/>
           </a:xfrm>
           <a:prstGeom prst="roundRect">
             <a:avLst>
-              <a:gd name="adj" fmla="val 1714"/>
+              <a:gd name="adj" fmla="val 2203"/>
             </a:avLst>
           </a:prstGeom>
           <a:solidFill>
@@ -9969,7 +9644,7 @@
         <p:spPr>
           <a:xfrm>
             <a:off x="786384" y="2304288"/>
-            <a:ext cx="10618927" cy="365760"/>
+            <a:ext cx="2051228" cy="365760"/>
           </a:xfrm>
           <a:prstGeom prst="rect">
             <a:avLst/>
@@ -9993,7 +9668,7 @@
                 <a:ea typeface="Pretendard" pitchFamily="34" charset="-122"/>
                 <a:cs typeface="Pretendard" pitchFamily="34" charset="-120"/>
               </a:rPr>
-              <a:t>{"ok"</a:t>
+              <a:t>초기 관심 표명 → 담당자 연락</a:t>
             </a:r>
             <a:endParaRPr lang="en-US" sz="1600" dirty="0"/>
           </a:p>
@@ -10008,7 +9683,7 @@
         <p:spPr>
           <a:xfrm>
             <a:off x="786384" y="2761488"/>
-            <a:ext cx="10618927" cy="1828800"/>
+            <a:ext cx="2051228" cy="1828800"/>
           </a:xfrm>
           <a:prstGeom prst="rect">
             <a:avLst/>
@@ -10023,8 +9698,147 @@
             <a:pPr indent="0" marL="0">
               <a:buNone/>
             </a:pPr>
-            <a:r>
-              <a:rPr lang="en-US" sz="1100" dirty="0">
+            <a:endParaRPr lang="en-US" sz="1100" dirty="0"/>
+          </a:p>
+        </p:txBody>
+      </p:sp>
+      <p:sp>
+        <p:nvSpPr>
+          <p:cNvPr id="11" name="Shape 9"/>
+          <p:cNvSpPr/>
+          <p:nvPr/>
+        </p:nvSpPr>
+        <p:spPr>
+          <a:xfrm>
+            <a:off x="3148508" y="3035808"/>
+            <a:ext cx="182880" cy="274320"/>
+          </a:xfrm>
+          <a:prstGeom prst="rightArrow">
+            <a:avLst/>
+          </a:prstGeom>
+          <a:solidFill>
+            <a:srgbClr val="CBD5E0"/>
+          </a:solidFill>
+          <a:ln w="6350">
+            <a:solidFill>
+              <a:srgbClr val="718096"/>
+            </a:solidFill>
+            <a:prstDash val="solid"/>
+          </a:ln>
+        </p:spPr>
+      </p:sp>
+      <p:sp>
+        <p:nvSpPr>
+          <p:cNvPr id="12" name="Shape 10"/>
+          <p:cNvSpPr/>
+          <p:nvPr/>
+        </p:nvSpPr>
+        <p:spPr>
+          <a:xfrm>
+            <a:off x="3422828" y="1572768"/>
+            <a:ext cx="2490140" cy="3200400"/>
+          </a:xfrm>
+          <a:prstGeom prst="roundRect">
+            <a:avLst>
+              <a:gd name="adj" fmla="val 2203"/>
+            </a:avLst>
+          </a:prstGeom>
+          <a:solidFill>
+            <a:srgbClr val="F7FAFC"/>
+          </a:solidFill>
+          <a:ln w="6350">
+            <a:solidFill>
+              <a:srgbClr val="CBD5E0"/>
+            </a:solidFill>
+            <a:prstDash val="solid"/>
+          </a:ln>
+        </p:spPr>
+      </p:sp>
+      <p:sp>
+        <p:nvSpPr>
+          <p:cNvPr id="13" name="Shape 11"/>
+          <p:cNvSpPr/>
+          <p:nvPr/>
+        </p:nvSpPr>
+        <p:spPr>
+          <a:xfrm>
+            <a:off x="3642284" y="1792224"/>
+            <a:ext cx="384048" cy="384048"/>
+          </a:xfrm>
+          <a:prstGeom prst="ellipse">
+            <a:avLst/>
+          </a:prstGeom>
+          <a:solidFill>
+            <a:srgbClr val="B98A2E"/>
+          </a:solidFill>
+          <a:ln/>
+        </p:spPr>
+      </p:sp>
+      <p:sp>
+        <p:nvSpPr>
+          <p:cNvPr id="14" name="Text 12"/>
+          <p:cNvSpPr/>
+          <p:nvPr/>
+        </p:nvSpPr>
+        <p:spPr>
+          <a:xfrm>
+            <a:off x="3642284" y="1792224"/>
+            <a:ext cx="384048" cy="384048"/>
+          </a:xfrm>
+          <a:prstGeom prst="rect">
+            <a:avLst/>
+          </a:prstGeom>
+          <a:noFill/>
+          <a:ln/>
+        </p:spPr>
+        <p:txBody>
+          <a:bodyPr wrap="square" lIns="0" tIns="0" rIns="0" bIns="0" rtlCol="0" anchor="ctr"/>
+          <a:lstStyle/>
+          <a:p>
+            <a:pPr algn="ctr" indent="0" marL="0">
+              <a:buNone/>
+            </a:pPr>
+            <a:r>
+              <a:rPr lang="en-US" sz="1300" b="1" dirty="0">
+                <a:solidFill>
+                  <a:srgbClr val="FFFFFF"/>
+                </a:solidFill>
+                <a:latin typeface="Arial" pitchFamily="34" charset="0"/>
+                <a:ea typeface="Arial" pitchFamily="34" charset="-122"/>
+                <a:cs typeface="Arial" pitchFamily="34" charset="-120"/>
+              </a:rPr>
+              <a:t>STEP 2</a:t>
+            </a:r>
+            <a:endParaRPr lang="en-US" sz="1300" dirty="0"/>
+          </a:p>
+        </p:txBody>
+      </p:sp>
+      <p:sp>
+        <p:nvSpPr>
+          <p:cNvPr id="15" name="Text 13"/>
+          <p:cNvSpPr/>
+          <p:nvPr/>
+        </p:nvSpPr>
+        <p:spPr>
+          <a:xfrm>
+            <a:off x="3642284" y="2304288"/>
+            <a:ext cx="2051228" cy="365760"/>
+          </a:xfrm>
+          <a:prstGeom prst="rect">
+            <a:avLst/>
+          </a:prstGeom>
+          <a:noFill/>
+          <a:ln/>
+        </p:spPr>
+        <p:txBody>
+          <a:bodyPr wrap="square" rtlCol="0" anchor="ctr"/>
+          <a:lstStyle/>
+          <a:p>
+            <a:pPr indent="0" marL="0">
+              <a:buNone/>
+            </a:pPr>
+            <a:r>
+              <a:rPr lang="en-US" sz="1600" b="1" dirty="0">
                 <a:solidFill>
                   <a:srgbClr val="10161F"/>
                 </a:solidFill>
@@ -10032,45 +9846,429 @@
                 <a:ea typeface="Pretendard" pitchFamily="34" charset="-122"/>
                 <a:cs typeface="Pretendard" pitchFamily="34" charset="-120"/>
               </a:rPr>
-              <a:t>true,"mocked":true,"extractedFields":{"area_signal":"역삼","asset_type":"오피스빌딩","price_band":"300억","size_signal":"3000평(약 9917.4㎡)"},"extractedFacts":{"region":"역삼","exactAddressCandidate":"역삼동 742-1","assetType":"오피스빌딩","priceText":"300억","sizeText":"3000평(약 9917.4㎡)","currentUse":"오피스","currentUseSignal":"근린생활시설","leaseSignal":"임대중","vacancySignal":"공실없음","tenantNames":["쿠팡","네이버"],"unitRentTexts":["301호: 1500만"],"sellerMotivationText":"자산 효율화","brokerNotes":["초역세권 매물"]},"detectedSensitiveFields":["exact_address","tenant_name"],"ambiguousFields":[],"warnings":[],"areaSignal":"역삼","assetType":"오피스빌딩","priceBand":"300억","sizeSignal":"3000평(약 9917.4㎡)","dealType":"매각","buildingName":"역삼 센트럴타워","exactAddress":"역삼동 742-1","totalFloorArea":9917.3,"buildYear":2015,"currentUseSignal":"근린생활시설","vacancySignal":"공실 없음","fitSummary":"초역세권 근생 빌딩으로 시행/사옥 매입에 최적화","cautionSummary":"주요 임차 업종 만기 조율 필요","hiddenFields":["exact_address","seller_motivation"],"confidence":{"areaSignal":"confirmed","assetType":"confirmed","priceBand":"ai_hypothesis","fitSummary":"ai_hypothesis"},"missingData":["sizeSignal"],"boundaryNote":"본 자료는 실거래 통계 기반 참고치입니다.","buyerType":"법인 사옥형","budgetRange":{"min":50,"max":80,"display":"50억~80억"},"preferredRegions":["강남","성수"],"assetTypes":["꼬마빌딩","사옥용"],"purchasePurpose":"사옥용 매입","mustHave":["초역세권","주차"],"niceToHave":["테라스","루프탑"],"riskTolerance":"medium","financingNote":"자본금 50% 준비","missingQuestions":["구체적인 입주 시기가 언제인가요?","선호하는 수익률이 있나요?"],"privacyNotes":["연락처 비공개"],"fitReasons":["매수자 예산(50-80억)에 부합하는 매물입니다.","요청하신 성수/강남 권역에 해당합니다."],"cautionReasons":["요청한 용도와 달리 명도 협의가 다소 필요합니다."],"recommendedNextAction":"현장 답사 제안","kakaoMessage":"안녕하세요! 요청하신 조건에 부합하는 추천 매물이 있어 안내해 드립니다. 확인해보시고 피드백 부탁드립니다.","title":"강남 역삼역 초역세권 오피스 사옥용 빌딩 매각","shortSummary":"역삼역 도보 5분 거리의 준신축급 대형 오피스빌딩입니다.","dealPoints":["초역세권","사옥 최적"],"cautionPoints":["명도 조율 필요"],"hiddenInfoNotice":["보증금 및 지번은 인가 후 확인 가능"],"gateMessage":"G1 등급 등록이 필요합니다.","kakaoText":"강남 역삼역 오피스 빌딩 매각 안내입니다.","exactUnitCandidate":"101호","floor":"1층","areaSqmText":"150㎡","spaceType":"office","depositText":"5000만","monthlyRentText":"400만","maintenanceFeeText":"50만","availableFromText":"즉시입주","leaseTermMonthsText":"24","incentivesText":"렌트프리 2개월","restrictions":[],"landlordIdentity":"김성수","currentTenant":"스타트업","vacancyReason":"이전 확장","rentNegotiation":"협의 가능","region":"성수동","areaSqm":150,"deposit":5000,"monthlyRent":400,"maintenanceFee":50,"availableFrom":"즉시입주","leaseTermMonths":24,"incentives":{"rentFreeMonths":2,"interiorSupport":"일부 인테리어 지원","freeRentDetail":"렌트프리 2개월 지원"},"shortSummaryLease":"성수역 도보 5분 거리 1층 리테일 상가 매물입니다."}</a:t>
-            </a:r>
+              <a:t>NDA 체결 → 임차인 정보 및 임대차계약서 제공</a:t>
+            </a:r>
+            <a:endParaRPr lang="en-US" sz="1600" dirty="0"/>
+          </a:p>
+        </p:txBody>
+      </p:sp>
+      <p:sp>
+        <p:nvSpPr>
+          <p:cNvPr id="16" name="Text 14"/>
+          <p:cNvSpPr/>
+          <p:nvPr/>
+        </p:nvSpPr>
+        <p:spPr>
+          <a:xfrm>
+            <a:off x="3642284" y="2761488"/>
+            <a:ext cx="2051228" cy="1828800"/>
+          </a:xfrm>
+          <a:prstGeom prst="rect">
+            <a:avLst/>
+          </a:prstGeom>
+          <a:noFill/>
+          <a:ln/>
+        </p:spPr>
+        <p:txBody>
+          <a:bodyPr wrap="square" rtlCol="0" anchor="t"/>
+          <a:lstStyle/>
+          <a:p>
+            <a:pPr indent="0" marL="0">
+              <a:buNone/>
+            </a:pPr>
             <a:endParaRPr lang="en-US" sz="1100" dirty="0"/>
           </a:p>
         </p:txBody>
       </p:sp>
       <p:sp>
         <p:nvSpPr>
-          <p:cNvPr id="11" name="Text 9"/>
-          <p:cNvSpPr/>
-          <p:nvPr/>
-        </p:nvSpPr>
-        <p:spPr>
-          <a:xfrm>
-            <a:off x="566928" y="6382512"/>
-            <a:ext cx="7315200" cy="219456"/>
-          </a:xfrm>
-          <a:prstGeom prst="rect">
-            <a:avLst/>
-          </a:prstGeom>
-          <a:noFill/>
-          <a:ln/>
-        </p:spPr>
-        <p:txBody>
-          <a:bodyPr wrap="square" lIns="0" tIns="0" rIns="0" bIns="0" rtlCol="0" anchor="ctr"/>
+          <p:cNvPr id="17" name="Shape 15"/>
+          <p:cNvSpPr/>
+          <p:nvPr/>
+        </p:nvSpPr>
+        <p:spPr>
+          <a:xfrm>
+            <a:off x="6004408" y="3035808"/>
+            <a:ext cx="182880" cy="274320"/>
+          </a:xfrm>
+          <a:prstGeom prst="rightArrow">
+            <a:avLst/>
+          </a:prstGeom>
+          <a:solidFill>
+            <a:srgbClr val="CBD5E0"/>
+          </a:solidFill>
+          <a:ln w="6350">
+            <a:solidFill>
+              <a:srgbClr val="718096"/>
+            </a:solidFill>
+            <a:prstDash val="solid"/>
+          </a:ln>
+        </p:spPr>
+      </p:sp>
+      <p:sp>
+        <p:nvSpPr>
+          <p:cNvPr id="18" name="Shape 16"/>
+          <p:cNvSpPr/>
+          <p:nvPr/>
+        </p:nvSpPr>
+        <p:spPr>
+          <a:xfrm>
+            <a:off x="6278728" y="1572768"/>
+            <a:ext cx="2490140" cy="3200400"/>
+          </a:xfrm>
+          <a:prstGeom prst="roundRect">
+            <a:avLst>
+              <a:gd name="adj" fmla="val 2203"/>
+            </a:avLst>
+          </a:prstGeom>
+          <a:solidFill>
+            <a:srgbClr val="F7FAFC"/>
+          </a:solidFill>
+          <a:ln w="6350">
+            <a:solidFill>
+              <a:srgbClr val="CBD5E0"/>
+            </a:solidFill>
+            <a:prstDash val="solid"/>
+          </a:ln>
+        </p:spPr>
+      </p:sp>
+      <p:sp>
+        <p:nvSpPr>
+          <p:cNvPr id="19" name="Shape 17"/>
+          <p:cNvSpPr/>
+          <p:nvPr/>
+        </p:nvSpPr>
+        <p:spPr>
+          <a:xfrm>
+            <a:off x="6498184" y="1792224"/>
+            <a:ext cx="384048" cy="384048"/>
+          </a:xfrm>
+          <a:prstGeom prst="ellipse">
+            <a:avLst/>
+          </a:prstGeom>
+          <a:solidFill>
+            <a:srgbClr val="B98A2E"/>
+          </a:solidFill>
+          <a:ln/>
+        </p:spPr>
+      </p:sp>
+      <p:sp>
+        <p:nvSpPr>
+          <p:cNvPr id="20" name="Text 18"/>
+          <p:cNvSpPr/>
+          <p:nvPr/>
+        </p:nvSpPr>
+        <p:spPr>
+          <a:xfrm>
+            <a:off x="6498184" y="1792224"/>
+            <a:ext cx="384048" cy="384048"/>
+          </a:xfrm>
+          <a:prstGeom prst="rect">
+            <a:avLst/>
+          </a:prstGeom>
+          <a:noFill/>
+          <a:ln/>
+        </p:spPr>
+        <p:txBody>
+          <a:bodyPr wrap="square" lIns="0" tIns="0" rIns="0" bIns="0" rtlCol="0" anchor="ctr"/>
+          <a:lstStyle/>
+          <a:p>
+            <a:pPr algn="ctr" indent="0" marL="0">
+              <a:buNone/>
+            </a:pPr>
+            <a:r>
+              <a:rPr lang="en-US" sz="1300" b="1" dirty="0">
+                <a:solidFill>
+                  <a:srgbClr val="FFFFFF"/>
+                </a:solidFill>
+                <a:latin typeface="Arial" pitchFamily="34" charset="0"/>
+                <a:ea typeface="Arial" pitchFamily="34" charset="-122"/>
+                <a:cs typeface="Arial" pitchFamily="34" charset="-120"/>
+              </a:rPr>
+              <a:t>STEP 3</a:t>
+            </a:r>
+            <a:endParaRPr lang="en-US" sz="1300" dirty="0"/>
+          </a:p>
+        </p:txBody>
+      </p:sp>
+      <p:sp>
+        <p:nvSpPr>
+          <p:cNvPr id="21" name="Text 19"/>
+          <p:cNvSpPr/>
+          <p:nvPr/>
+        </p:nvSpPr>
+        <p:spPr>
+          <a:xfrm>
+            <a:off x="6498184" y="2304288"/>
+            <a:ext cx="2051228" cy="365760"/>
+          </a:xfrm>
+          <a:prstGeom prst="rect">
+            <a:avLst/>
+          </a:prstGeom>
+          <a:noFill/>
+          <a:ln/>
+        </p:spPr>
+        <p:txBody>
+          <a:bodyPr wrap="square" rtlCol="0" anchor="ctr"/>
           <a:lstStyle/>
           <a:p>
             <a:pPr indent="0" marL="0">
               <a:buNone/>
             </a:pPr>
             <a:r>
-              <a:rPr lang="en-US" sz="800" dirty="0">
-                <a:solidFill>
-                  <a:srgbClr val="718096"/>
+              <a:rPr lang="en-US" sz="1600" b="1" dirty="0">
+                <a:solidFill>
+                  <a:srgbClr val="10161F"/>
                 </a:solidFill>
                 <a:latin typeface="Pretendard" pitchFamily="34" charset="0"/>
                 <a:ea typeface="Pretendard" pitchFamily="34" charset="-122"/>
                 <a:cs typeface="Pretendard" pitchFamily="34" charset="-120"/>
               </a:rPr>
+              <a:t>현장 실사 일정 조율 → 건물 컨디션 및 설비 직접 확인</a:t>
+            </a:r>
+            <a:endParaRPr lang="en-US" sz="1600" dirty="0"/>
+          </a:p>
+        </p:txBody>
+      </p:sp>
+      <p:sp>
+        <p:nvSpPr>
+          <p:cNvPr id="22" name="Text 20"/>
+          <p:cNvSpPr/>
+          <p:nvPr/>
+        </p:nvSpPr>
+        <p:spPr>
+          <a:xfrm>
+            <a:off x="6498184" y="2761488"/>
+            <a:ext cx="2051228" cy="1828800"/>
+          </a:xfrm>
+          <a:prstGeom prst="rect">
+            <a:avLst/>
+          </a:prstGeom>
+          <a:noFill/>
+          <a:ln/>
+        </p:spPr>
+        <p:txBody>
+          <a:bodyPr wrap="square" rtlCol="0" anchor="t"/>
+          <a:lstStyle/>
+          <a:p>
+            <a:pPr indent="0" marL="0">
+              <a:buNone/>
+            </a:pPr>
+            <a:endParaRPr lang="en-US" sz="1100" dirty="0"/>
+          </a:p>
+        </p:txBody>
+      </p:sp>
+      <p:sp>
+        <p:nvSpPr>
+          <p:cNvPr id="23" name="Shape 21"/>
+          <p:cNvSpPr/>
+          <p:nvPr/>
+        </p:nvSpPr>
+        <p:spPr>
+          <a:xfrm>
+            <a:off x="8860307" y="3035808"/>
+            <a:ext cx="182880" cy="274320"/>
+          </a:xfrm>
+          <a:prstGeom prst="rightArrow">
+            <a:avLst/>
+          </a:prstGeom>
+          <a:solidFill>
+            <a:srgbClr val="CBD5E0"/>
+          </a:solidFill>
+          <a:ln w="6350">
+            <a:solidFill>
+              <a:srgbClr val="718096"/>
+            </a:solidFill>
+            <a:prstDash val="solid"/>
+          </a:ln>
+        </p:spPr>
+      </p:sp>
+      <p:sp>
+        <p:nvSpPr>
+          <p:cNvPr id="24" name="Shape 22"/>
+          <p:cNvSpPr/>
+          <p:nvPr/>
+        </p:nvSpPr>
+        <p:spPr>
+          <a:xfrm>
+            <a:off x="9134627" y="1572768"/>
+            <a:ext cx="2490140" cy="3200400"/>
+          </a:xfrm>
+          <a:prstGeom prst="roundRect">
+            <a:avLst>
+              <a:gd name="adj" fmla="val 2203"/>
+            </a:avLst>
+          </a:prstGeom>
+          <a:solidFill>
+            <a:srgbClr val="F7FAFC"/>
+          </a:solidFill>
+          <a:ln w="6350">
+            <a:solidFill>
+              <a:srgbClr val="CBD5E0"/>
+            </a:solidFill>
+            <a:prstDash val="solid"/>
+          </a:ln>
+        </p:spPr>
+      </p:sp>
+      <p:sp>
+        <p:nvSpPr>
+          <p:cNvPr id="25" name="Shape 23"/>
+          <p:cNvSpPr/>
+          <p:nvPr/>
+        </p:nvSpPr>
+        <p:spPr>
+          <a:xfrm>
+            <a:off x="9354083" y="1792224"/>
+            <a:ext cx="384048" cy="384048"/>
+          </a:xfrm>
+          <a:prstGeom prst="ellipse">
+            <a:avLst/>
+          </a:prstGeom>
+          <a:solidFill>
+            <a:srgbClr val="B98A2E"/>
+          </a:solidFill>
+          <a:ln/>
+        </p:spPr>
+      </p:sp>
+      <p:sp>
+        <p:nvSpPr>
+          <p:cNvPr id="26" name="Text 24"/>
+          <p:cNvSpPr/>
+          <p:nvPr/>
+        </p:nvSpPr>
+        <p:spPr>
+          <a:xfrm>
+            <a:off x="9354083" y="1792224"/>
+            <a:ext cx="384048" cy="384048"/>
+          </a:xfrm>
+          <a:prstGeom prst="rect">
+            <a:avLst/>
+          </a:prstGeom>
+          <a:noFill/>
+          <a:ln/>
+        </p:spPr>
+        <p:txBody>
+          <a:bodyPr wrap="square" lIns="0" tIns="0" rIns="0" bIns="0" rtlCol="0" anchor="ctr"/>
+          <a:lstStyle/>
+          <a:p>
+            <a:pPr algn="ctr" indent="0" marL="0">
+              <a:buNone/>
+            </a:pPr>
+            <a:r>
+              <a:rPr lang="en-US" sz="1300" b="1" dirty="0">
+                <a:solidFill>
+                  <a:srgbClr val="FFFFFF"/>
+                </a:solidFill>
+                <a:latin typeface="Arial" pitchFamily="34" charset="0"/>
+                <a:ea typeface="Arial" pitchFamily="34" charset="-122"/>
+                <a:cs typeface="Arial" pitchFamily="34" charset="-120"/>
+              </a:rPr>
+              <a:t>STEP 4</a:t>
+            </a:r>
+            <a:endParaRPr lang="en-US" sz="1300" dirty="0"/>
+          </a:p>
+        </p:txBody>
+      </p:sp>
+      <p:sp>
+        <p:nvSpPr>
+          <p:cNvPr id="27" name="Text 25"/>
+          <p:cNvSpPr/>
+          <p:nvPr/>
+        </p:nvSpPr>
+        <p:spPr>
+          <a:xfrm>
+            <a:off x="9354083" y="2304288"/>
+            <a:ext cx="2051228" cy="365760"/>
+          </a:xfrm>
+          <a:prstGeom prst="rect">
+            <a:avLst/>
+          </a:prstGeom>
+          <a:noFill/>
+          <a:ln/>
+        </p:spPr>
+        <p:txBody>
+          <a:bodyPr wrap="square" rtlCol="0" anchor="ctr"/>
+          <a:lstStyle/>
+          <a:p>
+            <a:pPr indent="0" marL="0">
+              <a:buNone/>
+            </a:pPr>
+            <a:r>
+              <a:rPr lang="en-US" sz="1600" b="1" dirty="0">
+                <a:solidFill>
+                  <a:srgbClr val="10161F"/>
+                </a:solidFill>
+                <a:latin typeface="Pretendard" pitchFamily="34" charset="0"/>
+                <a:ea typeface="Pretendard" pitchFamily="34" charset="-122"/>
+                <a:cs typeface="Pretendard" pitchFamily="34" charset="-120"/>
+              </a:rPr>
+              <a:t>LOI(투자의향서) 제출 → 가격 협의 개시</a:t>
+            </a:r>
+            <a:endParaRPr lang="en-US" sz="1600" dirty="0"/>
+          </a:p>
+        </p:txBody>
+      </p:sp>
+      <p:sp>
+        <p:nvSpPr>
+          <p:cNvPr id="28" name="Text 26"/>
+          <p:cNvSpPr/>
+          <p:nvPr/>
+        </p:nvSpPr>
+        <p:spPr>
+          <a:xfrm>
+            <a:off x="9354083" y="2761488"/>
+            <a:ext cx="2051228" cy="1828800"/>
+          </a:xfrm>
+          <a:prstGeom prst="rect">
+            <a:avLst/>
+          </a:prstGeom>
+          <a:noFill/>
+          <a:ln/>
+        </p:spPr>
+        <p:txBody>
+          <a:bodyPr wrap="square" rtlCol="0" anchor="t"/>
+          <a:lstStyle/>
+          <a:p>
+            <a:pPr indent="0" marL="0">
+              <a:buNone/>
+            </a:pPr>
+            <a:endParaRPr lang="en-US" sz="1100" dirty="0"/>
+          </a:p>
+        </p:txBody>
+      </p:sp>
+      <p:sp>
+        <p:nvSpPr>
+          <p:cNvPr id="29" name="Text 27"/>
+          <p:cNvSpPr/>
+          <p:nvPr/>
+        </p:nvSpPr>
+        <p:spPr>
+          <a:xfrm>
+            <a:off x="566928" y="6382512"/>
+            <a:ext cx="7315200" cy="219456"/>
+          </a:xfrm>
+          <a:prstGeom prst="rect">
+            <a:avLst/>
+          </a:prstGeom>
+          <a:noFill/>
+          <a:ln/>
+        </p:spPr>
+        <p:txBody>
+          <a:bodyPr wrap="square" lIns="0" tIns="0" rIns="0" bIns="0" rtlCol="0" anchor="ctr"/>
+          <a:lstStyle/>
+          <a:p>
+            <a:pPr indent="0" marL="0">
+              <a:buNone/>
+            </a:pPr>
+            <a:r>
+              <a:rPr lang="en-US" sz="800" dirty="0">
+                <a:solidFill>
+                  <a:srgbClr val="718096"/>
+                </a:solidFill>
+                <a:latin typeface="Pretendard" pitchFamily="34" charset="0"/>
+                <a:ea typeface="Pretendard" pitchFamily="34" charset="-122"/>
+                <a:cs typeface="Pretendard" pitchFamily="34" charset="-120"/>
+              </a:rPr>
               <a:t>크리딜   |   </a:t>
             </a:r>
             <a:endParaRPr lang="en-US" sz="800" dirty="0"/>
@@ -10079,7 +10277,7 @@
       </p:sp>
       <p:sp>
         <p:nvSpPr>
-          <p:cNvPr id="12" name="Text 10"/>
+          <p:cNvPr id="30" name="Text 28"/>
           <p:cNvSpPr/>
           <p:nvPr/>
         </p:nvSpPr>

--- a/docs/test/stress/e2e-outputs/trading_case10_seocho_old_retail_basic.pptx
+++ b/docs/test/stress/e2e-outputs/trading_case10_seocho_old_retail_basic.pptx
@@ -6531,16 +6531,1137 @@
           </a:p>
         </p:txBody>
       </p:sp>
-      <p:sp>
-        <p:nvSpPr>
-          <p:cNvPr id="6" name="Text 4"/>
-          <p:cNvSpPr/>
-          <p:nvPr/>
-        </p:nvSpPr>
-        <p:spPr>
-          <a:xfrm>
-            <a:off x="566928" y="1645920"/>
-            <a:ext cx="4201979" cy="402336"/>
+      <p:graphicFrame>
+        <p:nvGraphicFramePr>
+          <p:cNvPr id="7" name="Table 0"/>
+          <p:cNvGraphicFramePr>
+            <a:graphicFrameLocks noGrp="1"/>
+          </p:cNvGraphicFramePr>
+          <p:nvPr>
+            <p:extLst>
+              <p:ext uri="{D42A27DB-BD31-4B8C-83A1-F6EECF244321}">
+                <p14:modId xmlns:p14="http://schemas.microsoft.com/office/powerpoint/2010/main" val="1579011935"/>
+              </p:ext>
+            </p:extLst>
+          </p:nvPr>
+        </p:nvGraphicFramePr>
+        <p:xfrm>
+          <a:off x="566928" y="1645920"/>
+          <a:ext cx="11057839" cy="914400"/>
+        </p:xfrm>
+        <a:graphic>
+          <a:graphicData uri="http://schemas.openxmlformats.org/drawingml/2006/table">
+            <a:tbl>
+              <a:tblPr/>
+              <a:tblGrid>
+                <a:gridCol w="2551809"/>
+                <a:gridCol w="4253015"/>
+                <a:gridCol w="4253015"/>
+              </a:tblGrid>
+              <a:tr h="438912">
+                <a:tc>
+                  <a:txBody>
+                    <a:bodyPr/>
+                    <a:lstStyle/>
+                    <a:p>
+                      <a:pPr indent="0" marL="0">
+                        <a:buNone/>
+                      </a:pPr>
+                      <a:r>
+                        <a:rPr lang="en-US" sz="1300" b="1" dirty="0">
+                          <a:solidFill>
+                            <a:srgbClr val="718096"/>
+                          </a:solidFill>
+                          <a:latin typeface="Pretendard" pitchFamily="34" charset="0"/>
+                          <a:ea typeface="Pretendard" pitchFamily="34" charset="-122"/>
+                          <a:cs typeface="Pretendard" pitchFamily="34" charset="-120"/>
+                        </a:rPr>
+                        <a:t>구분</a:t>
+                      </a:r>
+                      <a:endParaRPr lang="en-US" sz="1300" dirty="0">
+                        <a:latin typeface="Pretendard" charset="0"/>
+                        <a:ea typeface="Pretendard" charset="0"/>
+                        <a:cs typeface="Pretendard" charset="0"/>
+                      </a:endParaRPr>
+                    </a:p>
+                  </a:txBody>
+                  <a:tcPr marL="50800" marR="50800" marT="25400" marB="25400" anchor="ctr">
+                    <a:lnL w="3810" cap="flat" cmpd="sng" algn="ctr">
+                      <a:solidFill>
+                        <a:srgbClr val="CBD5E0"/>
+                      </a:solidFill>
+                      <a:prstDash val="solid"/>
+                      <a:round/>
+                      <a:headEnd type="none" w="med" len="med"/>
+                      <a:tailEnd type="none" w="med" len="med"/>
+                    </a:lnL>
+                    <a:lnR w="3810" cap="flat" cmpd="sng" algn="ctr">
+                      <a:solidFill>
+                        <a:srgbClr val="CBD5E0"/>
+                      </a:solidFill>
+                      <a:prstDash val="solid"/>
+                      <a:round/>
+                      <a:headEnd type="none" w="med" len="med"/>
+                      <a:tailEnd type="none" w="med" len="med"/>
+                    </a:lnR>
+                    <a:lnT w="3810" cap="flat" cmpd="sng" algn="ctr">
+                      <a:solidFill>
+                        <a:srgbClr val="CBD5E0"/>
+                      </a:solidFill>
+                      <a:prstDash val="solid"/>
+                      <a:round/>
+                      <a:headEnd type="none" w="med" len="med"/>
+                      <a:tailEnd type="none" w="med" len="med"/>
+                    </a:lnT>
+                    <a:lnB w="3810" cap="flat" cmpd="sng" algn="ctr">
+                      <a:solidFill>
+                        <a:srgbClr val="CBD5E0"/>
+                      </a:solidFill>
+                      <a:prstDash val="solid"/>
+                      <a:round/>
+                      <a:headEnd type="none" w="med" len="med"/>
+                      <a:tailEnd type="none" w="med" len="med"/>
+                    </a:lnB>
+                    <a:solidFill>
+                      <a:srgbClr val="F7FAFC"/>
+                    </a:solidFill>
+                  </a:tcPr>
+                </a:tc>
+                <a:tc>
+                  <a:txBody>
+                    <a:bodyPr/>
+                    <a:lstStyle/>
+                    <a:p>
+                      <a:pPr indent="0" marL="0">
+                        <a:buNone/>
+                      </a:pPr>
+                      <a:r>
+                        <a:rPr lang="en-US" sz="1300" b="1" dirty="0">
+                          <a:solidFill>
+                            <a:srgbClr val="718096"/>
+                          </a:solidFill>
+                          <a:latin typeface="Pretendard" pitchFamily="34" charset="0"/>
+                          <a:ea typeface="Pretendard" pitchFamily="34" charset="-122"/>
+                          <a:cs typeface="Pretendard" pitchFamily="34" charset="-120"/>
+                        </a:rPr>
+                        <a:t>타겟 </a:t>
+                      </a:r>
+                      <a:pPr indent="0" marL="0">
+                        <a:buNone/>
+                      </a:pPr>
+                      <a:r>
+                        <a:rPr lang="en-US" sz="1300" b="1" dirty="0">
+                          <a:solidFill>
+                            <a:srgbClr val="718096"/>
+                          </a:solidFill>
+                          <a:latin typeface="Pretendard" pitchFamily="34" charset="0"/>
+                          <a:ea typeface="Pretendard" pitchFamily="34" charset="-122"/>
+                          <a:cs typeface="Pretendard" pitchFamily="34" charset="-120"/>
+                        </a:rPr>
+                        <a:t>수치</a:t>
+                      </a:r>
+                      <a:endParaRPr lang="en-US" sz="1300" dirty="0">
+                        <a:latin typeface="Pretendard" charset="0"/>
+                        <a:ea typeface="Pretendard" charset="0"/>
+                        <a:cs typeface="Pretendard" charset="0"/>
+                      </a:endParaRPr>
+                    </a:p>
+                  </a:txBody>
+                  <a:tcPr marL="50800" marR="50800" marT="25400" marB="25400" anchor="ctr">
+                    <a:lnL w="3810" cap="flat" cmpd="sng" algn="ctr">
+                      <a:solidFill>
+                        <a:srgbClr val="CBD5E0"/>
+                      </a:solidFill>
+                      <a:prstDash val="solid"/>
+                      <a:round/>
+                      <a:headEnd type="none" w="med" len="med"/>
+                      <a:tailEnd type="none" w="med" len="med"/>
+                    </a:lnL>
+                    <a:lnR w="3810" cap="flat" cmpd="sng" algn="ctr">
+                      <a:solidFill>
+                        <a:srgbClr val="CBD5E0"/>
+                      </a:solidFill>
+                      <a:prstDash val="solid"/>
+                      <a:round/>
+                      <a:headEnd type="none" w="med" len="med"/>
+                      <a:tailEnd type="none" w="med" len="med"/>
+                    </a:lnR>
+                    <a:lnT w="3810" cap="flat" cmpd="sng" algn="ctr">
+                      <a:solidFill>
+                        <a:srgbClr val="CBD5E0"/>
+                      </a:solidFill>
+                      <a:prstDash val="solid"/>
+                      <a:round/>
+                      <a:headEnd type="none" w="med" len="med"/>
+                      <a:tailEnd type="none" w="med" len="med"/>
+                    </a:lnT>
+                    <a:lnB w="3810" cap="flat" cmpd="sng" algn="ctr">
+                      <a:solidFill>
+                        <a:srgbClr val="CBD5E0"/>
+                      </a:solidFill>
+                      <a:prstDash val="solid"/>
+                      <a:round/>
+                      <a:headEnd type="none" w="med" len="med"/>
+                      <a:tailEnd type="none" w="med" len="med"/>
+                    </a:lnB>
+                    <a:solidFill>
+                      <a:srgbClr val="F7FAFC"/>
+                    </a:solidFill>
+                  </a:tcPr>
+                </a:tc>
+                <a:tc>
+                  <a:txBody>
+                    <a:bodyPr/>
+                    <a:lstStyle/>
+                    <a:p>
+                      <a:pPr indent="0" marL="0">
+                        <a:buNone/>
+                      </a:pPr>
+                      <a:r>
+                        <a:rPr lang="en-US" sz="1300" b="1" dirty="0">
+                          <a:solidFill>
+                            <a:srgbClr val="718096"/>
+                          </a:solidFill>
+                          <a:latin typeface="Pretendard" pitchFamily="34" charset="0"/>
+                          <a:ea typeface="Pretendard" pitchFamily="34" charset="-122"/>
+                          <a:cs typeface="Pretendard" pitchFamily="34" charset="-120"/>
+                        </a:rPr>
+                        <a:t>비고</a:t>
+                      </a:r>
+                      <a:endParaRPr lang="en-US" sz="1300" dirty="0">
+                        <a:latin typeface="Pretendard" charset="0"/>
+                        <a:ea typeface="Pretendard" charset="0"/>
+                        <a:cs typeface="Pretendard" charset="0"/>
+                      </a:endParaRPr>
+                    </a:p>
+                  </a:txBody>
+                  <a:tcPr marL="50800" marR="50800" marT="25400" marB="25400" anchor="ctr">
+                    <a:lnL w="3810" cap="flat" cmpd="sng" algn="ctr">
+                      <a:solidFill>
+                        <a:srgbClr val="CBD5E0"/>
+                      </a:solidFill>
+                      <a:prstDash val="solid"/>
+                      <a:round/>
+                      <a:headEnd type="none" w="med" len="med"/>
+                      <a:tailEnd type="none" w="med" len="med"/>
+                    </a:lnL>
+                    <a:lnR w="3810" cap="flat" cmpd="sng" algn="ctr">
+                      <a:solidFill>
+                        <a:srgbClr val="CBD5E0"/>
+                      </a:solidFill>
+                      <a:prstDash val="solid"/>
+                      <a:round/>
+                      <a:headEnd type="none" w="med" len="med"/>
+                      <a:tailEnd type="none" w="med" len="med"/>
+                    </a:lnR>
+                    <a:lnT w="3810" cap="flat" cmpd="sng" algn="ctr">
+                      <a:solidFill>
+                        <a:srgbClr val="CBD5E0"/>
+                      </a:solidFill>
+                      <a:prstDash val="solid"/>
+                      <a:round/>
+                      <a:headEnd type="none" w="med" len="med"/>
+                      <a:tailEnd type="none" w="med" len="med"/>
+                    </a:lnT>
+                    <a:lnB w="3810" cap="flat" cmpd="sng" algn="ctr">
+                      <a:solidFill>
+                        <a:srgbClr val="CBD5E0"/>
+                      </a:solidFill>
+                      <a:prstDash val="solid"/>
+                      <a:round/>
+                      <a:headEnd type="none" w="med" len="med"/>
+                      <a:tailEnd type="none" w="med" len="med"/>
+                    </a:lnB>
+                    <a:solidFill>
+                      <a:srgbClr val="F7FAFC"/>
+                    </a:solidFill>
+                  </a:tcPr>
+                </a:tc>
+              </a:tr>
+              <a:tr h="438912">
+                <a:tc>
+                  <a:txBody>
+                    <a:bodyPr/>
+                    <a:lstStyle/>
+                    <a:p>
+                      <a:pPr indent="0" marL="0">
+                        <a:buNone/>
+                      </a:pPr>
+                      <a:r>
+                        <a:rPr lang="en-US" sz="1300" b="1" dirty="0">
+                          <a:solidFill>
+                            <a:srgbClr val="10161F"/>
+                          </a:solidFill>
+                          <a:latin typeface="Pretendard" pitchFamily="34" charset="0"/>
+                          <a:ea typeface="Pretendard" pitchFamily="34" charset="-122"/>
+                          <a:cs typeface="Pretendard" pitchFamily="34" charset="-120"/>
+                        </a:rPr>
+                        <a:t>목표 </a:t>
+                      </a:r>
+                      <a:pPr indent="0" marL="0">
+                        <a:buNone/>
+                      </a:pPr>
+                      <a:r>
+                        <a:rPr lang="en-US" sz="1300" b="1" dirty="0">
+                          <a:solidFill>
+                            <a:srgbClr val="10161F"/>
+                          </a:solidFill>
+                          <a:latin typeface="Pretendard" pitchFamily="34" charset="0"/>
+                          <a:ea typeface="Pretendard" pitchFamily="34" charset="-122"/>
+                          <a:cs typeface="Pretendard" pitchFamily="34" charset="-120"/>
+                        </a:rPr>
+                        <a:t>매각가</a:t>
+                      </a:r>
+                      <a:endParaRPr lang="en-US" sz="1300" dirty="0">
+                        <a:latin typeface="Pretendard" charset="0"/>
+                        <a:ea typeface="Pretendard" charset="0"/>
+                        <a:cs typeface="Pretendard" charset="0"/>
+                      </a:endParaRPr>
+                    </a:p>
+                  </a:txBody>
+                  <a:tcPr marL="50800" marR="50800" marT="25400" marB="25400" anchor="ctr">
+                    <a:lnL w="3810" cap="flat" cmpd="sng" algn="ctr">
+                      <a:solidFill>
+                        <a:srgbClr val="CBD5E0"/>
+                      </a:solidFill>
+                      <a:prstDash val="solid"/>
+                      <a:round/>
+                      <a:headEnd type="none" w="med" len="med"/>
+                      <a:tailEnd type="none" w="med" len="med"/>
+                    </a:lnL>
+                    <a:lnR w="3810" cap="flat" cmpd="sng" algn="ctr">
+                      <a:solidFill>
+                        <a:srgbClr val="CBD5E0"/>
+                      </a:solidFill>
+                      <a:prstDash val="solid"/>
+                      <a:round/>
+                      <a:headEnd type="none" w="med" len="med"/>
+                      <a:tailEnd type="none" w="med" len="med"/>
+                    </a:lnR>
+                    <a:lnT w="3810" cap="flat" cmpd="sng" algn="ctr">
+                      <a:solidFill>
+                        <a:srgbClr val="CBD5E0"/>
+                      </a:solidFill>
+                      <a:prstDash val="solid"/>
+                      <a:round/>
+                      <a:headEnd type="none" w="med" len="med"/>
+                      <a:tailEnd type="none" w="med" len="med"/>
+                    </a:lnT>
+                    <a:lnB w="3810" cap="flat" cmpd="sng" algn="ctr">
+                      <a:solidFill>
+                        <a:srgbClr val="CBD5E0"/>
+                      </a:solidFill>
+                      <a:prstDash val="solid"/>
+                      <a:round/>
+                      <a:headEnd type="none" w="med" len="med"/>
+                      <a:tailEnd type="none" w="med" len="med"/>
+                    </a:lnB>
+                    <a:solidFill>
+                      <a:srgbClr val="FFFFFF"/>
+                    </a:solidFill>
+                  </a:tcPr>
+                </a:tc>
+                <a:tc>
+                  <a:txBody>
+                    <a:bodyPr/>
+                    <a:lstStyle/>
+                    <a:p>
+                      <a:pPr indent="0" marL="0">
+                        <a:buNone/>
+                      </a:pPr>
+                      <a:r>
+                        <a:rPr lang="en-US" sz="1300" dirty="0">
+                          <a:solidFill>
+                            <a:srgbClr val="10161F"/>
+                          </a:solidFill>
+                          <a:latin typeface="Pretendard" pitchFamily="34" charset="0"/>
+                          <a:ea typeface="Pretendard" pitchFamily="34" charset="-122"/>
+                          <a:cs typeface="Pretendard" pitchFamily="34" charset="-120"/>
+                        </a:rPr>
+                        <a:t>주변 </a:t>
+                      </a:r>
+                      <a:pPr indent="0" marL="0">
+                        <a:buNone/>
+                      </a:pPr>
+                      <a:r>
+                        <a:rPr lang="en-US" sz="1300" dirty="0">
+                          <a:solidFill>
+                            <a:srgbClr val="10161F"/>
+                          </a:solidFill>
+                          <a:latin typeface="Pretendard" pitchFamily="34" charset="0"/>
+                          <a:ea typeface="Pretendard" pitchFamily="34" charset="-122"/>
+                          <a:cs typeface="Pretendard" pitchFamily="34" charset="-120"/>
+                        </a:rPr>
+                        <a:t>시세 </a:t>
+                      </a:r>
+                      <a:pPr indent="0" marL="0">
+                        <a:buNone/>
+                      </a:pPr>
+                      <a:r>
+                        <a:rPr lang="en-US" sz="1300" dirty="0">
+                          <a:solidFill>
+                            <a:srgbClr val="10161F"/>
+                          </a:solidFill>
+                          <a:latin typeface="Pretendard" pitchFamily="34" charset="0"/>
+                          <a:ea typeface="Pretendard" pitchFamily="34" charset="-122"/>
+                          <a:cs typeface="Pretendard" pitchFamily="34" charset="-120"/>
+                        </a:rPr>
+                        <a:t>상단 </a:t>
+                      </a:r>
+                      <a:pPr indent="0" marL="0">
+                        <a:buNone/>
+                      </a:pPr>
+                      <a:r>
+                        <a:rPr lang="en-US" sz="1300" dirty="0">
+                          <a:solidFill>
+                            <a:srgbClr val="10161F"/>
+                          </a:solidFill>
+                          <a:latin typeface="Pretendard" pitchFamily="34" charset="0"/>
+                          <a:ea typeface="Pretendard" pitchFamily="34" charset="-122"/>
+                          <a:cs typeface="Pretendard" pitchFamily="34" charset="-120"/>
+                        </a:rPr>
+                        <a:t>추정</a:t>
+                      </a:r>
+                      <a:endParaRPr lang="en-US" sz="1300" dirty="0">
+                        <a:latin typeface="Pretendard" charset="0"/>
+                        <a:ea typeface="Pretendard" charset="0"/>
+                        <a:cs typeface="Pretendard" charset="0"/>
+                      </a:endParaRPr>
+                    </a:p>
+                  </a:txBody>
+                  <a:tcPr marL="50800" marR="50800" marT="25400" marB="25400" anchor="ctr">
+                    <a:lnL w="3810" cap="flat" cmpd="sng" algn="ctr">
+                      <a:solidFill>
+                        <a:srgbClr val="CBD5E0"/>
+                      </a:solidFill>
+                      <a:prstDash val="solid"/>
+                      <a:round/>
+                      <a:headEnd type="none" w="med" len="med"/>
+                      <a:tailEnd type="none" w="med" len="med"/>
+                    </a:lnL>
+                    <a:lnR w="3810" cap="flat" cmpd="sng" algn="ctr">
+                      <a:solidFill>
+                        <a:srgbClr val="CBD5E0"/>
+                      </a:solidFill>
+                      <a:prstDash val="solid"/>
+                      <a:round/>
+                      <a:headEnd type="none" w="med" len="med"/>
+                      <a:tailEnd type="none" w="med" len="med"/>
+                    </a:lnR>
+                    <a:lnT w="3810" cap="flat" cmpd="sng" algn="ctr">
+                      <a:solidFill>
+                        <a:srgbClr val="CBD5E0"/>
+                      </a:solidFill>
+                      <a:prstDash val="solid"/>
+                      <a:round/>
+                      <a:headEnd type="none" w="med" len="med"/>
+                      <a:tailEnd type="none" w="med" len="med"/>
+                    </a:lnT>
+                    <a:lnB w="3810" cap="flat" cmpd="sng" algn="ctr">
+                      <a:solidFill>
+                        <a:srgbClr val="CBD5E0"/>
+                      </a:solidFill>
+                      <a:prstDash val="solid"/>
+                      <a:round/>
+                      <a:headEnd type="none" w="med" len="med"/>
+                      <a:tailEnd type="none" w="med" len="med"/>
+                    </a:lnB>
+                    <a:solidFill>
+                      <a:srgbClr val="FFFFFF"/>
+                    </a:solidFill>
+                  </a:tcPr>
+                </a:tc>
+                <a:tc>
+                  <a:txBody>
+                    <a:bodyPr/>
+                    <a:lstStyle/>
+                    <a:p>
+                      <a:pPr indent="0" marL="0">
+                        <a:buNone/>
+                      </a:pPr>
+                      <a:r>
+                        <a:rPr lang="en-US" sz="1300" dirty="0">
+                          <a:solidFill>
+                            <a:srgbClr val="10161F"/>
+                          </a:solidFill>
+                          <a:latin typeface="Pretendard" pitchFamily="34" charset="0"/>
+                          <a:ea typeface="Pretendard" pitchFamily="34" charset="-122"/>
+                          <a:cs typeface="Pretendard" pitchFamily="34" charset="-120"/>
+                        </a:rPr>
+                        <a:t>리밸런싱 </a:t>
+                      </a:r>
+                      <a:pPr indent="0" marL="0">
+                        <a:buNone/>
+                      </a:pPr>
+                      <a:r>
+                        <a:rPr lang="en-US" sz="1300" dirty="0">
+                          <a:solidFill>
+                            <a:srgbClr val="10161F"/>
+                          </a:solidFill>
+                          <a:latin typeface="Pretendard" pitchFamily="34" charset="0"/>
+                          <a:ea typeface="Pretendard" pitchFamily="34" charset="-122"/>
+                          <a:cs typeface="Pretendard" pitchFamily="34" charset="-120"/>
+                        </a:rPr>
+                        <a:t>타겟</a:t>
+                      </a:r>
+                      <a:endParaRPr lang="en-US" sz="1300" dirty="0">
+                        <a:latin typeface="Pretendard" charset="0"/>
+                        <a:ea typeface="Pretendard" charset="0"/>
+                        <a:cs typeface="Pretendard" charset="0"/>
+                      </a:endParaRPr>
+                    </a:p>
+                  </a:txBody>
+                  <a:tcPr marL="50800" marR="50800" marT="25400" marB="25400" anchor="ctr">
+                    <a:lnL w="3810" cap="flat" cmpd="sng" algn="ctr">
+                      <a:solidFill>
+                        <a:srgbClr val="CBD5E0"/>
+                      </a:solidFill>
+                      <a:prstDash val="solid"/>
+                      <a:round/>
+                      <a:headEnd type="none" w="med" len="med"/>
+                      <a:tailEnd type="none" w="med" len="med"/>
+                    </a:lnL>
+                    <a:lnR w="3810" cap="flat" cmpd="sng" algn="ctr">
+                      <a:solidFill>
+                        <a:srgbClr val="CBD5E0"/>
+                      </a:solidFill>
+                      <a:prstDash val="solid"/>
+                      <a:round/>
+                      <a:headEnd type="none" w="med" len="med"/>
+                      <a:tailEnd type="none" w="med" len="med"/>
+                    </a:lnR>
+                    <a:lnT w="3810" cap="flat" cmpd="sng" algn="ctr">
+                      <a:solidFill>
+                        <a:srgbClr val="CBD5E0"/>
+                      </a:solidFill>
+                      <a:prstDash val="solid"/>
+                      <a:round/>
+                      <a:headEnd type="none" w="med" len="med"/>
+                      <a:tailEnd type="none" w="med" len="med"/>
+                    </a:lnT>
+                    <a:lnB w="3810" cap="flat" cmpd="sng" algn="ctr">
+                      <a:solidFill>
+                        <a:srgbClr val="CBD5E0"/>
+                      </a:solidFill>
+                      <a:prstDash val="solid"/>
+                      <a:round/>
+                      <a:headEnd type="none" w="med" len="med"/>
+                      <a:tailEnd type="none" w="med" len="med"/>
+                    </a:lnB>
+                    <a:solidFill>
+                      <a:srgbClr val="FFFFFF"/>
+                    </a:solidFill>
+                  </a:tcPr>
+                </a:tc>
+              </a:tr>
+              <a:tr h="438912">
+                <a:tc>
+                  <a:txBody>
+                    <a:bodyPr/>
+                    <a:lstStyle/>
+                    <a:p>
+                      <a:pPr indent="0" marL="0">
+                        <a:buNone/>
+                      </a:pPr>
+                      <a:r>
+                        <a:rPr lang="en-US" sz="1300" b="1" dirty="0">
+                          <a:solidFill>
+                            <a:srgbClr val="10161F"/>
+                          </a:solidFill>
+                          <a:latin typeface="Pretendard" pitchFamily="34" charset="0"/>
+                          <a:ea typeface="Pretendard" pitchFamily="34" charset="-122"/>
+                          <a:cs typeface="Pretendard" pitchFamily="34" charset="-120"/>
+                        </a:rPr>
+                        <a:t>목표 </a:t>
+                      </a:r>
+                      <a:pPr indent="0" marL="0">
+                        <a:buNone/>
+                      </a:pPr>
+                      <a:r>
+                        <a:rPr lang="en-US" sz="1300" b="1" dirty="0">
+                          <a:solidFill>
+                            <a:srgbClr val="10161F"/>
+                          </a:solidFill>
+                          <a:latin typeface="Pretendard" pitchFamily="34" charset="0"/>
+                          <a:ea typeface="Pretendard" pitchFamily="34" charset="-122"/>
+                          <a:cs typeface="Pretendard" pitchFamily="34" charset="-120"/>
+                        </a:rPr>
+                        <a:t>시세차익</a:t>
+                      </a:r>
+                      <a:endParaRPr lang="en-US" sz="1300" dirty="0">
+                        <a:latin typeface="Pretendard" charset="0"/>
+                        <a:ea typeface="Pretendard" charset="0"/>
+                        <a:cs typeface="Pretendard" charset="0"/>
+                      </a:endParaRPr>
+                    </a:p>
+                  </a:txBody>
+                  <a:tcPr marL="50800" marR="50800" marT="25400" marB="25400" anchor="ctr">
+                    <a:lnL w="3810" cap="flat" cmpd="sng" algn="ctr">
+                      <a:solidFill>
+                        <a:srgbClr val="CBD5E0"/>
+                      </a:solidFill>
+                      <a:prstDash val="solid"/>
+                      <a:round/>
+                      <a:headEnd type="none" w="med" len="med"/>
+                      <a:tailEnd type="none" w="med" len="med"/>
+                    </a:lnL>
+                    <a:lnR w="3810" cap="flat" cmpd="sng" algn="ctr">
+                      <a:solidFill>
+                        <a:srgbClr val="CBD5E0"/>
+                      </a:solidFill>
+                      <a:prstDash val="solid"/>
+                      <a:round/>
+                      <a:headEnd type="none" w="med" len="med"/>
+                      <a:tailEnd type="none" w="med" len="med"/>
+                    </a:lnR>
+                    <a:lnT w="3810" cap="flat" cmpd="sng" algn="ctr">
+                      <a:solidFill>
+                        <a:srgbClr val="CBD5E0"/>
+                      </a:solidFill>
+                      <a:prstDash val="solid"/>
+                      <a:round/>
+                      <a:headEnd type="none" w="med" len="med"/>
+                      <a:tailEnd type="none" w="med" len="med"/>
+                    </a:lnT>
+                    <a:lnB w="3810" cap="flat" cmpd="sng" algn="ctr">
+                      <a:solidFill>
+                        <a:srgbClr val="CBD5E0"/>
+                      </a:solidFill>
+                      <a:prstDash val="solid"/>
+                      <a:round/>
+                      <a:headEnd type="none" w="med" len="med"/>
+                      <a:tailEnd type="none" w="med" len="med"/>
+                    </a:lnB>
+                    <a:solidFill>
+                      <a:srgbClr val="F7FAFC"/>
+                    </a:solidFill>
+                  </a:tcPr>
+                </a:tc>
+                <a:tc>
+                  <a:txBody>
+                    <a:bodyPr/>
+                    <a:lstStyle/>
+                    <a:p>
+                      <a:pPr indent="0" marL="0">
+                        <a:buNone/>
+                      </a:pPr>
+                      <a:r>
+                        <a:rPr lang="en-US" sz="1300" dirty="0">
+                          <a:solidFill>
+                            <a:srgbClr val="10161F"/>
+                          </a:solidFill>
+                          <a:latin typeface="Pretendard" pitchFamily="34" charset="0"/>
+                          <a:ea typeface="Pretendard" pitchFamily="34" charset="-122"/>
+                          <a:cs typeface="Pretendard" pitchFamily="34" charset="-120"/>
+                        </a:rPr>
+                        <a:t>매수 </a:t>
+                      </a:r>
+                      <a:pPr indent="0" marL="0">
+                        <a:buNone/>
+                      </a:pPr>
+                      <a:r>
+                        <a:rPr lang="en-US" sz="1300" dirty="0">
+                          <a:solidFill>
+                            <a:srgbClr val="10161F"/>
+                          </a:solidFill>
+                          <a:latin typeface="Pretendard" pitchFamily="34" charset="0"/>
+                          <a:ea typeface="Pretendard" pitchFamily="34" charset="-122"/>
+                          <a:cs typeface="Pretendard" pitchFamily="34" charset="-120"/>
+                        </a:rPr>
+                        <a:t>희망가 </a:t>
+                      </a:r>
+                      <a:pPr indent="0" marL="0">
+                        <a:buNone/>
+                      </a:pPr>
+                      <a:r>
+                        <a:rPr lang="en-US" sz="1300" dirty="0">
+                          <a:solidFill>
+                            <a:srgbClr val="10161F"/>
+                          </a:solidFill>
+                          <a:latin typeface="Pretendard" pitchFamily="34" charset="0"/>
+                          <a:ea typeface="Pretendard" pitchFamily="34" charset="-122"/>
+                          <a:cs typeface="Pretendard" pitchFamily="34" charset="-120"/>
+                        </a:rPr>
+                        <a:t>대비 </a:t>
+                      </a:r>
+                      <a:pPr indent="0" marL="0">
+                        <a:buNone/>
+                      </a:pPr>
+                      <a:r>
+                        <a:rPr lang="en-US" sz="1300" dirty="0">
+                          <a:solidFill>
+                            <a:srgbClr val="10161F"/>
+                          </a:solidFill>
+                          <a:latin typeface="Pretendard" pitchFamily="34" charset="0"/>
+                          <a:ea typeface="Pretendard" pitchFamily="34" charset="-122"/>
+                          <a:cs typeface="Pretendard" pitchFamily="34" charset="-120"/>
+                        </a:rPr>
+                        <a:t>갭</a:t>
+                      </a:r>
+                      <a:endParaRPr lang="en-US" sz="1300" dirty="0">
+                        <a:latin typeface="Pretendard" charset="0"/>
+                        <a:ea typeface="Pretendard" charset="0"/>
+                        <a:cs typeface="Pretendard" charset="0"/>
+                      </a:endParaRPr>
+                    </a:p>
+                  </a:txBody>
+                  <a:tcPr marL="50800" marR="50800" marT="25400" marB="25400" anchor="ctr">
+                    <a:lnL w="3810" cap="flat" cmpd="sng" algn="ctr">
+                      <a:solidFill>
+                        <a:srgbClr val="CBD5E0"/>
+                      </a:solidFill>
+                      <a:prstDash val="solid"/>
+                      <a:round/>
+                      <a:headEnd type="none" w="med" len="med"/>
+                      <a:tailEnd type="none" w="med" len="med"/>
+                    </a:lnL>
+                    <a:lnR w="3810" cap="flat" cmpd="sng" algn="ctr">
+                      <a:solidFill>
+                        <a:srgbClr val="CBD5E0"/>
+                      </a:solidFill>
+                      <a:prstDash val="solid"/>
+                      <a:round/>
+                      <a:headEnd type="none" w="med" len="med"/>
+                      <a:tailEnd type="none" w="med" len="med"/>
+                    </a:lnR>
+                    <a:lnT w="3810" cap="flat" cmpd="sng" algn="ctr">
+                      <a:solidFill>
+                        <a:srgbClr val="CBD5E0"/>
+                      </a:solidFill>
+                      <a:prstDash val="solid"/>
+                      <a:round/>
+                      <a:headEnd type="none" w="med" len="med"/>
+                      <a:tailEnd type="none" w="med" len="med"/>
+                    </a:lnT>
+                    <a:lnB w="3810" cap="flat" cmpd="sng" algn="ctr">
+                      <a:solidFill>
+                        <a:srgbClr val="CBD5E0"/>
+                      </a:solidFill>
+                      <a:prstDash val="solid"/>
+                      <a:round/>
+                      <a:headEnd type="none" w="med" len="med"/>
+                      <a:tailEnd type="none" w="med" len="med"/>
+                    </a:lnB>
+                    <a:solidFill>
+                      <a:srgbClr val="F7FAFC"/>
+                    </a:solidFill>
+                  </a:tcPr>
+                </a:tc>
+                <a:tc>
+                  <a:txBody>
+                    <a:bodyPr/>
+                    <a:lstStyle/>
+                    <a:p>
+                      <a:pPr indent="0" marL="0">
+                        <a:buNone/>
+                      </a:pPr>
+                      <a:r>
+                        <a:rPr lang="en-US" sz="1300" dirty="0">
+                          <a:solidFill>
+                            <a:srgbClr val="10161F"/>
+                          </a:solidFill>
+                          <a:latin typeface="Pretendard" pitchFamily="34" charset="0"/>
+                          <a:ea typeface="Pretendard" pitchFamily="34" charset="-122"/>
+                          <a:cs typeface="Pretendard" pitchFamily="34" charset="-120"/>
+                        </a:rPr>
+                        <a:t>자본 </a:t>
+                      </a:r>
+                      <a:pPr indent="0" marL="0">
+                        <a:buNone/>
+                      </a:pPr>
+                      <a:r>
+                        <a:rPr lang="en-US" sz="1300" dirty="0">
+                          <a:solidFill>
+                            <a:srgbClr val="10161F"/>
+                          </a:solidFill>
+                          <a:latin typeface="Pretendard" pitchFamily="34" charset="0"/>
+                          <a:ea typeface="Pretendard" pitchFamily="34" charset="-122"/>
+                          <a:cs typeface="Pretendard" pitchFamily="34" charset="-120"/>
+                        </a:rPr>
+                        <a:t>이득</a:t>
+                      </a:r>
+                      <a:endParaRPr lang="en-US" sz="1300" dirty="0">
+                        <a:latin typeface="Pretendard" charset="0"/>
+                        <a:ea typeface="Pretendard" charset="0"/>
+                        <a:cs typeface="Pretendard" charset="0"/>
+                      </a:endParaRPr>
+                    </a:p>
+                  </a:txBody>
+                  <a:tcPr marL="50800" marR="50800" marT="25400" marB="25400" anchor="ctr">
+                    <a:lnL w="3810" cap="flat" cmpd="sng" algn="ctr">
+                      <a:solidFill>
+                        <a:srgbClr val="CBD5E0"/>
+                      </a:solidFill>
+                      <a:prstDash val="solid"/>
+                      <a:round/>
+                      <a:headEnd type="none" w="med" len="med"/>
+                      <a:tailEnd type="none" w="med" len="med"/>
+                    </a:lnL>
+                    <a:lnR w="3810" cap="flat" cmpd="sng" algn="ctr">
+                      <a:solidFill>
+                        <a:srgbClr val="CBD5E0"/>
+                      </a:solidFill>
+                      <a:prstDash val="solid"/>
+                      <a:round/>
+                      <a:headEnd type="none" w="med" len="med"/>
+                      <a:tailEnd type="none" w="med" len="med"/>
+                    </a:lnR>
+                    <a:lnT w="3810" cap="flat" cmpd="sng" algn="ctr">
+                      <a:solidFill>
+                        <a:srgbClr val="CBD5E0"/>
+                      </a:solidFill>
+                      <a:prstDash val="solid"/>
+                      <a:round/>
+                      <a:headEnd type="none" w="med" len="med"/>
+                      <a:tailEnd type="none" w="med" len="med"/>
+                    </a:lnT>
+                    <a:lnB w="3810" cap="flat" cmpd="sng" algn="ctr">
+                      <a:solidFill>
+                        <a:srgbClr val="CBD5E0"/>
+                      </a:solidFill>
+                      <a:prstDash val="solid"/>
+                      <a:round/>
+                      <a:headEnd type="none" w="med" len="med"/>
+                      <a:tailEnd type="none" w="med" len="med"/>
+                    </a:lnB>
+                    <a:solidFill>
+                      <a:srgbClr val="F7FAFC"/>
+                    </a:solidFill>
+                  </a:tcPr>
+                </a:tc>
+              </a:tr>
+              <a:tr h="438912">
+                <a:tc>
+                  <a:txBody>
+                    <a:bodyPr/>
+                    <a:lstStyle/>
+                    <a:p>
+                      <a:pPr indent="0" marL="0">
+                        <a:buNone/>
+                      </a:pPr>
+                      <a:r>
+                        <a:rPr lang="en-US" sz="1300" b="1" dirty="0">
+                          <a:solidFill>
+                            <a:srgbClr val="10161F"/>
+                          </a:solidFill>
+                          <a:latin typeface="Pretendard" pitchFamily="34" charset="0"/>
+                          <a:ea typeface="Pretendard" pitchFamily="34" charset="-122"/>
+                          <a:cs typeface="Pretendard" pitchFamily="34" charset="-120"/>
+                        </a:rPr>
+                        <a:t>목표 </a:t>
+                      </a:r>
+                      <a:pPr indent="0" marL="0">
+                        <a:buNone/>
+                      </a:pPr>
+                      <a:r>
+                        <a:rPr lang="en-US" sz="1300" b="1" dirty="0">
+                          <a:solidFill>
+                            <a:srgbClr val="10161F"/>
+                          </a:solidFill>
+                          <a:latin typeface="Pretendard" pitchFamily="34" charset="0"/>
+                          <a:ea typeface="Pretendard" pitchFamily="34" charset="-122"/>
+                          <a:cs typeface="Pretendard" pitchFamily="34" charset="-120"/>
+                        </a:rPr>
+                        <a:t>보유기간 </a:t>
+                      </a:r>
+                      <a:pPr indent="0" marL="0">
+                        <a:buNone/>
+                      </a:pPr>
+                      <a:r>
+                        <a:rPr lang="en-US" sz="1300" b="1" dirty="0">
+                          <a:solidFill>
+                            <a:srgbClr val="10161F"/>
+                          </a:solidFill>
+                          <a:latin typeface="Pretendard" pitchFamily="34" charset="0"/>
+                          <a:ea typeface="Pretendard" pitchFamily="34" charset="-122"/>
+                          <a:cs typeface="Pretendard" pitchFamily="34" charset="-120"/>
+                        </a:rPr>
+                        <a:t>수익률 </a:t>
+                      </a:r>
+                      <a:pPr indent="0" marL="0">
+                        <a:buNone/>
+                      </a:pPr>
+                      <a:r>
+                        <a:rPr lang="en-US" sz="1300" b="1" dirty="0">
+                          <a:solidFill>
+                            <a:srgbClr val="10161F"/>
+                          </a:solidFill>
+                          <a:latin typeface="Pretendard" pitchFamily="34" charset="0"/>
+                          <a:ea typeface="Pretendard" pitchFamily="34" charset="-122"/>
+                          <a:cs typeface="Pretendard" pitchFamily="34" charset="-120"/>
+                        </a:rPr>
+                        <a:t>(HPR)</a:t>
+                      </a:r>
+                      <a:endParaRPr lang="en-US" sz="1300" dirty="0">
+                        <a:latin typeface="Pretendard" charset="0"/>
+                        <a:ea typeface="Pretendard" charset="0"/>
+                        <a:cs typeface="Pretendard" charset="0"/>
+                      </a:endParaRPr>
+                    </a:p>
+                  </a:txBody>
+                  <a:tcPr marL="50800" marR="50800" marT="25400" marB="25400" anchor="ctr">
+                    <a:lnL w="3810" cap="flat" cmpd="sng" algn="ctr">
+                      <a:solidFill>
+                        <a:srgbClr val="CBD5E0"/>
+                      </a:solidFill>
+                      <a:prstDash val="solid"/>
+                      <a:round/>
+                      <a:headEnd type="none" w="med" len="med"/>
+                      <a:tailEnd type="none" w="med" len="med"/>
+                    </a:lnL>
+                    <a:lnR w="3810" cap="flat" cmpd="sng" algn="ctr">
+                      <a:solidFill>
+                        <a:srgbClr val="CBD5E0"/>
+                      </a:solidFill>
+                      <a:prstDash val="solid"/>
+                      <a:round/>
+                      <a:headEnd type="none" w="med" len="med"/>
+                      <a:tailEnd type="none" w="med" len="med"/>
+                    </a:lnR>
+                    <a:lnT w="3810" cap="flat" cmpd="sng" algn="ctr">
+                      <a:solidFill>
+                        <a:srgbClr val="CBD5E0"/>
+                      </a:solidFill>
+                      <a:prstDash val="solid"/>
+                      <a:round/>
+                      <a:headEnd type="none" w="med" len="med"/>
+                      <a:tailEnd type="none" w="med" len="med"/>
+                    </a:lnT>
+                    <a:lnB w="3810" cap="flat" cmpd="sng" algn="ctr">
+                      <a:solidFill>
+                        <a:srgbClr val="CBD5E0"/>
+                      </a:solidFill>
+                      <a:prstDash val="solid"/>
+                      <a:round/>
+                      <a:headEnd type="none" w="med" len="med"/>
+                      <a:tailEnd type="none" w="med" len="med"/>
+                    </a:lnB>
+                    <a:solidFill>
+                      <a:srgbClr val="FFFFFF"/>
+                    </a:solidFill>
+                  </a:tcPr>
+                </a:tc>
+                <a:tc>
+                  <a:txBody>
+                    <a:bodyPr/>
+                    <a:lstStyle/>
+                    <a:p>
+                      <a:pPr indent="0" marL="0">
+                        <a:buNone/>
+                      </a:pPr>
+                      <a:r>
+                        <a:rPr lang="en-US" sz="1300" dirty="0">
+                          <a:solidFill>
+                            <a:srgbClr val="10161F"/>
+                          </a:solidFill>
+                          <a:latin typeface="Pretendard" pitchFamily="34" charset="0"/>
+                          <a:ea typeface="Pretendard" pitchFamily="34" charset="-122"/>
+                          <a:cs typeface="Pretendard" pitchFamily="34" charset="-120"/>
+                        </a:rPr>
+                        <a:t>10% </a:t>
+                      </a:r>
+                      <a:pPr indent="0" marL="0">
+                        <a:buNone/>
+                      </a:pPr>
+                      <a:r>
+                        <a:rPr lang="en-US" sz="1300" dirty="0">
+                          <a:solidFill>
+                            <a:srgbClr val="10161F"/>
+                          </a:solidFill>
+                          <a:latin typeface="Pretendard" pitchFamily="34" charset="0"/>
+                          <a:ea typeface="Pretendard" pitchFamily="34" charset="-122"/>
+                          <a:cs typeface="Pretendard" pitchFamily="34" charset="-120"/>
+                        </a:rPr>
+                        <a:t>~ </a:t>
+                      </a:r>
+                      <a:pPr indent="0" marL="0">
+                        <a:buNone/>
+                      </a:pPr>
+                      <a:r>
+                        <a:rPr lang="en-US" sz="1300" dirty="0">
+                          <a:solidFill>
+                            <a:srgbClr val="10161F"/>
+                          </a:solidFill>
+                          <a:latin typeface="Pretendard" pitchFamily="34" charset="0"/>
+                          <a:ea typeface="Pretendard" pitchFamily="34" charset="-122"/>
+                          <a:cs typeface="Pretendard" pitchFamily="34" charset="-120"/>
+                        </a:rPr>
+                        <a:t>20%</a:t>
+                      </a:r>
+                      <a:endParaRPr lang="en-US" sz="1300" dirty="0">
+                        <a:latin typeface="Pretendard" charset="0"/>
+                        <a:ea typeface="Pretendard" charset="0"/>
+                        <a:cs typeface="Pretendard" charset="0"/>
+                      </a:endParaRPr>
+                    </a:p>
+                  </a:txBody>
+                  <a:tcPr marL="50800" marR="50800" marT="25400" marB="25400" anchor="ctr">
+                    <a:lnL w="3810" cap="flat" cmpd="sng" algn="ctr">
+                      <a:solidFill>
+                        <a:srgbClr val="CBD5E0"/>
+                      </a:solidFill>
+                      <a:prstDash val="solid"/>
+                      <a:round/>
+                      <a:headEnd type="none" w="med" len="med"/>
+                      <a:tailEnd type="none" w="med" len="med"/>
+                    </a:lnL>
+                    <a:lnR w="3810" cap="flat" cmpd="sng" algn="ctr">
+                      <a:solidFill>
+                        <a:srgbClr val="CBD5E0"/>
+                      </a:solidFill>
+                      <a:prstDash val="solid"/>
+                      <a:round/>
+                      <a:headEnd type="none" w="med" len="med"/>
+                      <a:tailEnd type="none" w="med" len="med"/>
+                    </a:lnR>
+                    <a:lnT w="3810" cap="flat" cmpd="sng" algn="ctr">
+                      <a:solidFill>
+                        <a:srgbClr val="CBD5E0"/>
+                      </a:solidFill>
+                      <a:prstDash val="solid"/>
+                      <a:round/>
+                      <a:headEnd type="none" w="med" len="med"/>
+                      <a:tailEnd type="none" w="med" len="med"/>
+                    </a:lnT>
+                    <a:lnB w="3810" cap="flat" cmpd="sng" algn="ctr">
+                      <a:solidFill>
+                        <a:srgbClr val="CBD5E0"/>
+                      </a:solidFill>
+                      <a:prstDash val="solid"/>
+                      <a:round/>
+                      <a:headEnd type="none" w="med" len="med"/>
+                      <a:tailEnd type="none" w="med" len="med"/>
+                    </a:lnB>
+                    <a:solidFill>
+                      <a:srgbClr val="FFFFFF"/>
+                    </a:solidFill>
+                  </a:tcPr>
+                </a:tc>
+                <a:tc>
+                  <a:txBody>
+                    <a:bodyPr/>
+                    <a:lstStyle/>
+                    <a:p>
+                      <a:pPr indent="0" marL="0">
+                        <a:buNone/>
+                      </a:pPr>
+                      <a:r>
+                        <a:rPr lang="en-US" sz="1300" dirty="0">
+                          <a:solidFill>
+                            <a:srgbClr val="10161F"/>
+                          </a:solidFill>
+                          <a:latin typeface="Pretendard" pitchFamily="34" charset="0"/>
+                          <a:ea typeface="Pretendard" pitchFamily="34" charset="-122"/>
+                          <a:cs typeface="Pretendard" pitchFamily="34" charset="-120"/>
+                        </a:rPr>
+                        <a:t>보유 </a:t>
+                      </a:r>
+                      <a:pPr indent="0" marL="0">
+                        <a:buNone/>
+                      </a:pPr>
+                      <a:r>
+                        <a:rPr lang="en-US" sz="1300" dirty="0">
+                          <a:solidFill>
+                            <a:srgbClr val="10161F"/>
+                          </a:solidFill>
+                          <a:latin typeface="Pretendard" pitchFamily="34" charset="0"/>
+                          <a:ea typeface="Pretendard" pitchFamily="34" charset="-122"/>
+                          <a:cs typeface="Pretendard" pitchFamily="34" charset="-120"/>
+                        </a:rPr>
+                        <a:t>기간 </a:t>
+                      </a:r>
+                      <a:pPr indent="0" marL="0">
+                        <a:buNone/>
+                      </a:pPr>
+                      <a:r>
+                        <a:rPr lang="en-US" sz="1300" dirty="0">
+                          <a:solidFill>
+                            <a:srgbClr val="10161F"/>
+                          </a:solidFill>
+                          <a:latin typeface="Pretendard" pitchFamily="34" charset="0"/>
+                          <a:ea typeface="Pretendard" pitchFamily="34" charset="-122"/>
+                          <a:cs typeface="Pretendard" pitchFamily="34" charset="-120"/>
+                        </a:rPr>
+                        <a:t>2~3년 </a:t>
+                      </a:r>
+                      <a:pPr indent="0" marL="0">
+                        <a:buNone/>
+                      </a:pPr>
+                      <a:r>
+                        <a:rPr lang="en-US" sz="1300" dirty="0">
+                          <a:solidFill>
+                            <a:srgbClr val="10161F"/>
+                          </a:solidFill>
+                          <a:latin typeface="Pretendard" pitchFamily="34" charset="0"/>
+                          <a:ea typeface="Pretendard" pitchFamily="34" charset="-122"/>
+                          <a:cs typeface="Pretendard" pitchFamily="34" charset="-120"/>
+                        </a:rPr>
+                        <a:t>가정</a:t>
+                      </a:r>
+                      <a:endParaRPr lang="en-US" sz="1300" dirty="0">
+                        <a:latin typeface="Pretendard" charset="0"/>
+                        <a:ea typeface="Pretendard" charset="0"/>
+                        <a:cs typeface="Pretendard" charset="0"/>
+                      </a:endParaRPr>
+                    </a:p>
+                  </a:txBody>
+                  <a:tcPr marL="50800" marR="50800" marT="25400" marB="25400" anchor="ctr">
+                    <a:lnL w="3810" cap="flat" cmpd="sng" algn="ctr">
+                      <a:solidFill>
+                        <a:srgbClr val="CBD5E0"/>
+                      </a:solidFill>
+                      <a:prstDash val="solid"/>
+                      <a:round/>
+                      <a:headEnd type="none" w="med" len="med"/>
+                      <a:tailEnd type="none" w="med" len="med"/>
+                    </a:lnL>
+                    <a:lnR w="3810" cap="flat" cmpd="sng" algn="ctr">
+                      <a:solidFill>
+                        <a:srgbClr val="CBD5E0"/>
+                      </a:solidFill>
+                      <a:prstDash val="solid"/>
+                      <a:round/>
+                      <a:headEnd type="none" w="med" len="med"/>
+                      <a:tailEnd type="none" w="med" len="med"/>
+                    </a:lnR>
+                    <a:lnT w="3810" cap="flat" cmpd="sng" algn="ctr">
+                      <a:solidFill>
+                        <a:srgbClr val="CBD5E0"/>
+                      </a:solidFill>
+                      <a:prstDash val="solid"/>
+                      <a:round/>
+                      <a:headEnd type="none" w="med" len="med"/>
+                      <a:tailEnd type="none" w="med" len="med"/>
+                    </a:lnT>
+                    <a:lnB w="3810" cap="flat" cmpd="sng" algn="ctr">
+                      <a:solidFill>
+                        <a:srgbClr val="CBD5E0"/>
+                      </a:solidFill>
+                      <a:prstDash val="solid"/>
+                      <a:round/>
+                      <a:headEnd type="none" w="med" len="med"/>
+                      <a:tailEnd type="none" w="med" len="med"/>
+                    </a:lnB>
+                    <a:solidFill>
+                      <a:srgbClr val="FFFFFF"/>
+                    </a:solidFill>
+                  </a:tcPr>
+                </a:tc>
+              </a:tr>
+            </a:tbl>
+          </a:graphicData>
+        </a:graphic>
+      </p:graphicFrame>
+      <p:sp>
+        <p:nvSpPr>
+          <p:cNvPr id="7" name="Text 4"/>
+          <p:cNvSpPr/>
+          <p:nvPr/>
+        </p:nvSpPr>
+        <p:spPr>
+          <a:xfrm>
+            <a:off x="566928" y="3493008"/>
+            <a:ext cx="11057839" cy="384048"/>
           </a:xfrm>
           <a:prstGeom prst="rect">
             <a:avLst/>
@@ -6554,35 +7675,35 @@
           <a:p>
             <a:pPr indent="0" marL="0">
               <a:lnSpc>
-                <a:spcPct val="120000"/>
+                <a:spcPct val="125000"/>
               </a:lnSpc>
               <a:buNone/>
             </a:pPr>
             <a:r>
-              <a:rPr lang="en-US" sz="1400" dirty="0">
-                <a:solidFill>
-                  <a:srgbClr val="718096"/>
+              <a:rPr lang="en-US" sz="780" dirty="0">
+                <a:solidFill>
+                  <a:srgbClr val="A0AEC0"/>
                 </a:solidFill>
                 <a:latin typeface="Pretendard" pitchFamily="34" charset="0"/>
                 <a:ea typeface="Pretendard" pitchFamily="34" charset="-122"/>
                 <a:cs typeface="Pretendard" pitchFamily="34" charset="-120"/>
               </a:rPr>
-              <a:t>{"ok"</a:t>
-            </a:r>
-            <a:endParaRPr lang="en-US" sz="1400" dirty="0"/>
-          </a:p>
-        </p:txBody>
-      </p:sp>
-      <p:sp>
-        <p:nvSpPr>
-          <p:cNvPr id="7" name="Text 5"/>
-          <p:cNvSpPr/>
-          <p:nvPr/>
-        </p:nvSpPr>
-        <p:spPr>
-          <a:xfrm>
-            <a:off x="4768907" y="1645920"/>
-            <a:ext cx="6855860" cy="402336"/>
+              <a:t>[참고] 리모델링 또는 밸류업 후 단기 매각(Trading)을 통한 Capital Gain 실현 시나리오입니다.</a:t>
+            </a:r>
+            <a:endParaRPr lang="en-US" sz="780" dirty="0"/>
+          </a:p>
+        </p:txBody>
+      </p:sp>
+      <p:sp>
+        <p:nvSpPr>
+          <p:cNvPr id="8" name="Text 5"/>
+          <p:cNvSpPr/>
+          <p:nvPr/>
+        </p:nvSpPr>
+        <p:spPr>
+          <a:xfrm>
+            <a:off x="566928" y="6382512"/>
+            <a:ext cx="7315200" cy="219456"/>
           </a:xfrm>
           <a:prstGeom prst="rect">
             <a:avLst/>
@@ -6595,59 +7716,17 @@
           <a:lstStyle/>
           <a:p>
             <a:pPr indent="0" marL="0">
-              <a:lnSpc>
-                <a:spcPct val="120000"/>
-              </a:lnSpc>
-              <a:buNone/>
-            </a:pPr>
-            <a:r>
-              <a:rPr lang="en-US" sz="1400" b="1" dirty="0">
-                <a:solidFill>
-                  <a:srgbClr val="10161F"/>
+              <a:buNone/>
+            </a:pPr>
+            <a:r>
+              <a:rPr lang="en-US" sz="800" dirty="0">
+                <a:solidFill>
+                  <a:srgbClr val="718096"/>
                 </a:solidFill>
                 <a:latin typeface="Pretendard" pitchFamily="34" charset="0"/>
                 <a:ea typeface="Pretendard" pitchFamily="34" charset="-122"/>
                 <a:cs typeface="Pretendard" pitchFamily="34" charset="-120"/>
               </a:rPr>
-              <a:t>true,"mocked":true,"extractedFields":{"area_signal":"역삼","asset_type":"오피스빌딩","price_band":"300억","size_signal":"3000평(약 9917.4㎡)"},"extractedFacts":{"region":"역삼","exactAddressCandidate":"역삼동 742-1","assetType":"오피스빌딩","priceText":"300억","sizeText":"3000평(약 9917.4㎡)","currentUse":"오피스","currentUseSignal":"근린생활시설","leaseSignal":"임대중","vacancySignal":"공실없음","tenantNames":"쿠팡","네이버","unitRentTexts":"301호: 1500만","sellerMotivationText":"자산 효율화","brokerNotes":"초역세권 매물"},"detectedSensitiveFields":"exact_address","tenant_name","ambiguousFields":,"warnings":,"areaSignal":"역삼","assetType":"오피스빌딩","priceBand":"300억","sizeSignal":"3000평(약 9917.4㎡)","dealType":"매각","buildingName":"역삼 센트럴타워","exactAddress":"역삼동 742-1","totalFloorArea":9917.3,"buildYear":2015,"currentUseSignal":"근린생활시설","vacancySignal":"공실 없음","fitSummary":"초역세권 근생 빌딩으로 시행/사옥 매입에 최적화","cautionSummary":"주요 임차 업종 만기 조율 필요","hiddenFields":"exact_address","seller_motivation","confidence":{"areaSignal":"confirmed","assetType":"confirmed","priceBand":"ai_hypothesis","fitSummary":"ai_hypothesis"},"missingData":"sizeSignal","boundaryNote":"본 자료는 실거래 통계 기반 참고치입니다.","buyerType":"법인 사옥형","budgetRange":{"min":50,"max":80,"display":"50억~80억"},"preferredRegions":"강남","성수","assetTypes":"꼬마빌딩","사옥용","purchasePurpose":"사옥용 매입","mustHave":"초역세권","주차","niceToHave":"테라스","루프탑","riskTolerance":"medium","financingNote":"자본금 50% 준비","missingQuestions":"구체적인 입주 시기가 언제인가요?","선호하는 수익률이 있나요?","privacyNotes":"연락처 비공개","fitReasons":"매수자 예산(50-80억)에 부합하는 매물입니다.","요청하신 성수/강남 권역에 해당합니다.","cautionReasons":"요청한 용도와 달리 명도 협의가 다소 필요합니다.","recommendedNextAction":"현장 답사 제안","kakaoMessage":"안녕하세요! 요청하신 조건에 부합하는 추천 매물이 있어 안내해 드립니다. 확인해보시고 피드백 부탁드립니다.","title":"강남 역삼역 초역세권 오피스 사옥용 빌딩 매각","shortSummary":"역삼역 도보 5분 거리의 준신축급 대형 오피스빌딩입니다.","dealPoints":"초역세권","사옥 최적","cautionPoints":"명도 조율 필요","hiddenInfoNotice":"보증금 및 지번은 인가 후 확인 가능","gateMessage":"G1 등급 등록이 필요합니다.","kakaoText":"강남 역삼역 오피스 빌딩 매각 안내입니다.","exactUnitCandidate":"101호","floor":"1층","areaSqmText":"150㎡","spaceType":"office","depositText":"5000만","monthlyRentText":"400만","maintenanceFeeText":"50만","availableFromText":"즉시입주","leaseTermMonthsText":"24","incentivesText":"렌트프리 2개월","restrictions":,"landlordIdentity":"김성수","currentTenant":"스타트업","vacancyReason":"이전 확장","rentNegotiation":"협의 가능","region":"성수동","areaSqm":150,"deposit":5000,"monthlyRent":400,"maintenanceFee":50,"availableFrom":"즉시입주","leaseTermMonths":24,"incentives":{"rentFreeMonths":2,"interiorSupport":"일부 인테리어 지원","freeRentDetail":"렌트프리 2개월 지원"},"shortSummaryLease":"성수역 도보 5분 거리 1층 리테일 상가 매물입니다."}</a:t>
-            </a:r>
-            <a:endParaRPr lang="en-US" sz="1400" dirty="0"/>
-          </a:p>
-        </p:txBody>
-      </p:sp>
-      <p:sp>
-        <p:nvSpPr>
-          <p:cNvPr id="8" name="Text 6"/>
-          <p:cNvSpPr/>
-          <p:nvPr/>
-        </p:nvSpPr>
-        <p:spPr>
-          <a:xfrm>
-            <a:off x="566928" y="6382512"/>
-            <a:ext cx="7315200" cy="219456"/>
-          </a:xfrm>
-          <a:prstGeom prst="rect">
-            <a:avLst/>
-          </a:prstGeom>
-          <a:noFill/>
-          <a:ln/>
-        </p:spPr>
-        <p:txBody>
-          <a:bodyPr wrap="square" lIns="0" tIns="0" rIns="0" bIns="0" rtlCol="0" anchor="ctr"/>
-          <a:lstStyle/>
-          <a:p>
-            <a:pPr indent="0" marL="0">
-              <a:buNone/>
-            </a:pPr>
-            <a:r>
-              <a:rPr lang="en-US" sz="800" dirty="0">
-                <a:solidFill>
-                  <a:srgbClr val="718096"/>
-                </a:solidFill>
-                <a:latin typeface="Pretendard" pitchFamily="34" charset="0"/>
-                <a:ea typeface="Pretendard" pitchFamily="34" charset="-122"/>
-                <a:cs typeface="Pretendard" pitchFamily="34" charset="-120"/>
-              </a:rPr>
               <a:t>크리딜   |   </a:t>
             </a:r>
             <a:endParaRPr lang="en-US" sz="800" dirty="0"/>
@@ -6656,7 +7735,7 @@
       </p:sp>
       <p:sp>
         <p:nvSpPr>
-          <p:cNvPr id="9" name="Text 7"/>
+          <p:cNvPr id="9" name="Text 6"/>
           <p:cNvSpPr/>
           <p:nvPr/>
         </p:nvSpPr>
@@ -6871,11 +7950,11 @@
         <p:spPr>
           <a:xfrm>
             <a:off x="566928" y="1417320"/>
-            <a:ext cx="1992112" cy="3611880"/>
+            <a:ext cx="3515258" cy="3657600"/>
           </a:xfrm>
           <a:prstGeom prst="roundRect">
             <a:avLst>
-              <a:gd name="adj" fmla="val 2754"/>
+              <a:gd name="adj" fmla="val 1561"/>
             </a:avLst>
           </a:prstGeom>
           <a:solidFill>
@@ -6898,7 +7977,7 @@
         <p:spPr>
           <a:xfrm>
             <a:off x="566928" y="1417320"/>
-            <a:ext cx="1992112" cy="45720"/>
+            <a:ext cx="3515258" cy="45720"/>
           </a:xfrm>
           <a:prstGeom prst="rect">
             <a:avLst/>
@@ -6918,7 +7997,7 @@
         <p:spPr>
           <a:xfrm>
             <a:off x="795528" y="1618488"/>
-            <a:ext cx="1534912" cy="292608"/>
+            <a:ext cx="3058058" cy="292608"/>
           </a:xfrm>
           <a:prstGeom prst="rect">
             <a:avLst/>
@@ -6934,7 +8013,7 @@
               <a:buNone/>
             </a:pPr>
             <a:r>
-              <a:rPr lang="en-US" sz="1150" b="1" dirty="0">
+              <a:rPr lang="en-US" sz="1350" b="1" dirty="0">
                 <a:solidFill>
                   <a:srgbClr val="977024"/>
                 </a:solidFill>
@@ -6944,7 +8023,7 @@
               </a:rPr>
               <a:t>건물 물리적 상태</a:t>
             </a:r>
-            <a:endParaRPr lang="en-US" sz="1150" dirty="0"/>
+            <a:endParaRPr lang="en-US" sz="1350" dirty="0"/>
           </a:p>
         </p:txBody>
       </p:sp>
@@ -6956,8 +8035,8 @@
         </p:nvSpPr>
         <p:spPr>
           <a:xfrm>
-            <a:off x="795528" y="1911096"/>
-            <a:ext cx="1534912" cy="402336"/>
+            <a:off x="795528" y="1947672"/>
+            <a:ext cx="3058058" cy="365760"/>
           </a:xfrm>
           <a:prstGeom prst="rect">
             <a:avLst/>
@@ -6975,7 +8054,7 @@
               <a:buNone/>
             </a:pPr>
             <a:r>
-              <a:rPr lang="en-US" sz="1150" b="1" dirty="0">
+              <a:rPr lang="en-US" sz="1250" b="1" dirty="0">
                 <a:solidFill>
                   <a:srgbClr val="10161F"/>
                 </a:solidFill>
@@ -6985,7 +8064,7 @@
               </a:rPr>
               <a:t>2017년 준공 신축급 상태 (누수/균열 결함 없음)</a:t>
             </a:r>
-            <a:endParaRPr lang="en-US" sz="1150" dirty="0"/>
+            <a:endParaRPr lang="en-US" sz="1250" dirty="0"/>
           </a:p>
         </p:txBody>
       </p:sp>
@@ -6998,7 +8077,7 @@
         <p:spPr>
           <a:xfrm>
             <a:off x="795528" y="2377440"/>
-            <a:ext cx="1534912" cy="2560320"/>
+            <a:ext cx="3058058" cy="2606040"/>
           </a:xfrm>
           <a:prstGeom prst="rect">
             <a:avLst/>
@@ -7020,7 +8099,7 @@
               <a:buChar char="•"/>
             </a:pPr>
             <a:r>
-              <a:rPr lang="en-US" sz="1050" dirty="0">
+              <a:rPr lang="en-US" sz="1100" dirty="0">
                 <a:solidFill>
                   <a:srgbClr val="10161F"/>
                 </a:solidFill>
@@ -7030,7 +8109,7 @@
               </a:rPr>
               <a:t>준공 10년 미만으로 대규모 수선비용 발생 가능성 낮음</a:t>
             </a:r>
-            <a:endParaRPr lang="en-US" sz="1050" dirty="0"/>
+            <a:endParaRPr lang="en-US" sz="1100" dirty="0"/>
           </a:p>
         </p:txBody>
       </p:sp>
@@ -7042,12 +8121,12 @@
         </p:nvSpPr>
         <p:spPr>
           <a:xfrm>
-            <a:off x="2833360" y="1417320"/>
-            <a:ext cx="1992112" cy="3611880"/>
+            <a:off x="4338218" y="1417320"/>
+            <a:ext cx="3515258" cy="3657600"/>
           </a:xfrm>
           <a:prstGeom prst="roundRect">
             <a:avLst>
-              <a:gd name="adj" fmla="val 2754"/>
+              <a:gd name="adj" fmla="val 1561"/>
             </a:avLst>
           </a:prstGeom>
           <a:solidFill>
@@ -7069,8 +8148,8 @@
         </p:nvSpPr>
         <p:spPr>
           <a:xfrm>
-            <a:off x="2833360" y="1417320"/>
-            <a:ext cx="1992112" cy="45720"/>
+            <a:off x="4338218" y="1417320"/>
+            <a:ext cx="3515258" cy="45720"/>
           </a:xfrm>
           <a:prstGeom prst="rect">
             <a:avLst/>
@@ -7089,8 +8168,8 @@
         </p:nvSpPr>
         <p:spPr>
           <a:xfrm>
-            <a:off x="3061960" y="1618488"/>
-            <a:ext cx="1534912" cy="292608"/>
+            <a:off x="4566818" y="1618488"/>
+            <a:ext cx="3058058" cy="292608"/>
           </a:xfrm>
           <a:prstGeom prst="rect">
             <a:avLst/>
@@ -7106,7 +8185,7 @@
               <a:buNone/>
             </a:pPr>
             <a:r>
-              <a:rPr lang="en-US" sz="1150" b="1" dirty="0">
+              <a:rPr lang="en-US" sz="1350" b="1" dirty="0">
                 <a:solidFill>
                   <a:srgbClr val="977024"/>
                 </a:solidFill>
@@ -7116,7 +8195,7 @@
               </a:rPr>
               <a:t>승강기 및 설비</a:t>
             </a:r>
-            <a:endParaRPr lang="en-US" sz="1150" dirty="0"/>
+            <a:endParaRPr lang="en-US" sz="1350" dirty="0"/>
           </a:p>
         </p:txBody>
       </p:sp>
@@ -7128,8 +8207,8 @@
         </p:nvSpPr>
         <p:spPr>
           <a:xfrm>
-            <a:off x="3061960" y="1911096"/>
-            <a:ext cx="1534912" cy="402336"/>
+            <a:off x="4566818" y="1947672"/>
+            <a:ext cx="3058058" cy="365760"/>
           </a:xfrm>
           <a:prstGeom prst="rect">
             <a:avLst/>
@@ -7147,7 +8226,7 @@
               <a:buNone/>
             </a:pPr>
             <a:r>
-              <a:rPr lang="en-US" sz="1150" b="1" dirty="0">
+              <a:rPr lang="en-US" sz="1250" b="1" dirty="0">
                 <a:solidFill>
                   <a:srgbClr val="10161F"/>
                 </a:solidFill>
@@ -7157,7 +8236,7 @@
               </a:rPr>
               <a:t>15인승 침대용 승강기 및 냉난방 설비 양호</a:t>
             </a:r>
-            <a:endParaRPr lang="en-US" sz="1150" dirty="0"/>
+            <a:endParaRPr lang="en-US" sz="1250" dirty="0"/>
           </a:p>
         </p:txBody>
       </p:sp>
@@ -7169,8 +8248,8 @@
         </p:nvSpPr>
         <p:spPr>
           <a:xfrm>
-            <a:off x="3061960" y="2377440"/>
-            <a:ext cx="1534912" cy="2560320"/>
+            <a:off x="4566818" y="2377440"/>
+            <a:ext cx="3058058" cy="2606040"/>
           </a:xfrm>
           <a:prstGeom prst="rect">
             <a:avLst/>
@@ -7192,7 +8271,7 @@
               <a:buChar char="•"/>
             </a:pPr>
             <a:r>
-              <a:rPr lang="en-US" sz="1050" dirty="0">
+              <a:rPr lang="en-US" sz="1100" dirty="0">
                 <a:solidFill>
                   <a:srgbClr val="10161F"/>
                 </a:solidFill>
@@ -7202,7 +8281,7 @@
               </a:rPr>
               <a:t>주기적 정기 점검 계약 유지로 관리 리스크 최소화</a:t>
             </a:r>
-            <a:endParaRPr lang="en-US" sz="1050" dirty="0"/>
+            <a:endParaRPr lang="en-US" sz="1100" dirty="0"/>
           </a:p>
         </p:txBody>
       </p:sp>
@@ -7214,12 +8293,12 @@
         </p:nvSpPr>
         <p:spPr>
           <a:xfrm>
-            <a:off x="5099792" y="1417320"/>
-            <a:ext cx="1992112" cy="3611880"/>
+            <a:off x="8109509" y="1417320"/>
+            <a:ext cx="3515258" cy="3657600"/>
           </a:xfrm>
           <a:prstGeom prst="roundRect">
             <a:avLst>
-              <a:gd name="adj" fmla="val 2754"/>
+              <a:gd name="adj" fmla="val 1561"/>
             </a:avLst>
           </a:prstGeom>
           <a:solidFill>
@@ -7241,8 +8320,8 @@
         </p:nvSpPr>
         <p:spPr>
           <a:xfrm>
-            <a:off x="5099792" y="1417320"/>
-            <a:ext cx="1992112" cy="45720"/>
+            <a:off x="8109509" y="1417320"/>
+            <a:ext cx="3515258" cy="45720"/>
           </a:xfrm>
           <a:prstGeom prst="rect">
             <a:avLst/>
@@ -7261,8 +8340,8 @@
         </p:nvSpPr>
         <p:spPr>
           <a:xfrm>
-            <a:off x="5328392" y="1618488"/>
-            <a:ext cx="1534912" cy="292608"/>
+            <a:off x="8338109" y="1618488"/>
+            <a:ext cx="3058058" cy="292608"/>
           </a:xfrm>
           <a:prstGeom prst="rect">
             <a:avLst/>
@@ -7278,7 +8357,7 @@
               <a:buNone/>
             </a:pPr>
             <a:r>
-              <a:rPr lang="en-US" sz="1150" b="1" dirty="0">
+              <a:rPr lang="en-US" sz="1350" b="1" dirty="0">
                 <a:solidFill>
                   <a:srgbClr val="977024"/>
                 </a:solidFill>
@@ -7288,7 +8367,7 @@
               </a:rPr>
               <a:t>임차인 이탈 위험</a:t>
             </a:r>
-            <a:endParaRPr lang="en-US" sz="1150" dirty="0"/>
+            <a:endParaRPr lang="en-US" sz="1350" dirty="0"/>
           </a:p>
         </p:txBody>
       </p:sp>
@@ -7300,8 +8379,8 @@
         </p:nvSpPr>
         <p:spPr>
           <a:xfrm>
-            <a:off x="5328392" y="1911096"/>
-            <a:ext cx="1534912" cy="402336"/>
+            <a:off x="8338109" y="1947672"/>
+            <a:ext cx="3058058" cy="365760"/>
           </a:xfrm>
           <a:prstGeom prst="rect">
             <a:avLst/>
@@ -7319,7 +8398,7 @@
               <a:buNone/>
             </a:pPr>
             <a:r>
-              <a:rPr lang="en-US" sz="1150" b="1" dirty="0">
+              <a:rPr lang="en-US" sz="1250" b="1" dirty="0">
                 <a:solidFill>
                   <a:srgbClr val="10161F"/>
                 </a:solidFill>
@@ -7329,7 +8408,7 @@
               </a:rPr>
               <a:t>병의원/약국 인테리어 투자비(호실당 5억↑) 존속</a:t>
             </a:r>
-            <a:endParaRPr lang="en-US" sz="1150" dirty="0"/>
+            <a:endParaRPr lang="en-US" sz="1250" dirty="0"/>
           </a:p>
         </p:txBody>
       </p:sp>
@@ -7341,8 +8420,8 @@
         </p:nvSpPr>
         <p:spPr>
           <a:xfrm>
-            <a:off x="5328392" y="2377440"/>
-            <a:ext cx="1534912" cy="2560320"/>
+            <a:off x="8338109" y="2377440"/>
+            <a:ext cx="3058058" cy="2606040"/>
           </a:xfrm>
           <a:prstGeom prst="rect">
             <a:avLst/>
@@ -7364,7 +8443,7 @@
               <a:buChar char="•"/>
             </a:pPr>
             <a:r>
-              <a:rPr lang="en-US" sz="1050" dirty="0">
+              <a:rPr lang="en-US" sz="1100" dirty="0">
                 <a:solidFill>
                   <a:srgbClr val="10161F"/>
                 </a:solidFill>
@@ -7374,7 +8453,7 @@
               </a:rPr>
               <a:t>WALE 3.5년 확보 및 만기 6개월 전 재계약 협상 개시</a:t>
             </a:r>
-            <a:endParaRPr lang="en-US" sz="1050" dirty="0"/>
+            <a:endParaRPr lang="en-US" sz="1100" dirty="0"/>
           </a:p>
         </p:txBody>
       </p:sp>
@@ -7386,12 +8465,12 @@
         </p:nvSpPr>
         <p:spPr>
           <a:xfrm>
-            <a:off x="7366224" y="1417320"/>
-            <a:ext cx="1992112" cy="3611880"/>
+            <a:off x="566928" y="5193792"/>
+            <a:ext cx="11057839" cy="621792"/>
           </a:xfrm>
           <a:prstGeom prst="roundRect">
             <a:avLst>
-              <a:gd name="adj" fmla="val 2754"/>
+              <a:gd name="adj" fmla="val 8824"/>
             </a:avLst>
           </a:prstGeom>
           <a:solidFill>
@@ -7407,34 +8486,14 @@
       </p:sp>
       <p:sp>
         <p:nvSpPr>
-          <p:cNvPr id="22" name="Shape 20"/>
-          <p:cNvSpPr/>
-          <p:nvPr/>
-        </p:nvSpPr>
-        <p:spPr>
-          <a:xfrm>
-            <a:off x="7366224" y="1417320"/>
-            <a:ext cx="1992112" cy="45720"/>
-          </a:xfrm>
-          <a:prstGeom prst="rect">
-            <a:avLst/>
-          </a:prstGeom>
-          <a:solidFill>
-            <a:srgbClr val="B98A2E"/>
-          </a:solidFill>
-          <a:ln/>
-        </p:spPr>
-      </p:sp>
-      <p:sp>
-        <p:nvSpPr>
-          <p:cNvPr id="23" name="Text 21"/>
-          <p:cNvSpPr/>
-          <p:nvPr/>
-        </p:nvSpPr>
-        <p:spPr>
-          <a:xfrm>
-            <a:off x="7594824" y="1618488"/>
-            <a:ext cx="1534912" cy="292608"/>
+          <p:cNvPr id="22" name="Text 20"/>
+          <p:cNvSpPr/>
+          <p:nvPr/>
+        </p:nvSpPr>
+        <p:spPr>
+          <a:xfrm>
+            <a:off x="795528" y="5193792"/>
+            <a:ext cx="10600639" cy="621792"/>
           </a:xfrm>
           <a:prstGeom prst="rect">
             <a:avLst/>
@@ -7450,377 +8509,53 @@
               <a:buNone/>
             </a:pPr>
             <a:r>
-              <a:rPr lang="en-US" sz="1150" b="1" dirty="0">
-                <a:solidFill>
-                  <a:srgbClr val="977024"/>
+              <a:rPr lang="en-US" sz="1100" dirty="0">
+                <a:solidFill>
+                  <a:srgbClr val="10161F"/>
                 </a:solidFill>
                 <a:latin typeface="Pretendard" pitchFamily="34" charset="0"/>
                 <a:ea typeface="Pretendard" pitchFamily="34" charset="-122"/>
                 <a:cs typeface="Pretendard" pitchFamily="34" charset="-120"/>
               </a:rPr>
-              <a:t>명도 및 분쟁</a:t>
-            </a:r>
-            <a:endParaRPr lang="en-US" sz="1150" dirty="0"/>
-          </a:p>
-        </p:txBody>
-      </p:sp>
-      <p:sp>
-        <p:nvSpPr>
-          <p:cNvPr id="24" name="Text 22"/>
-          <p:cNvSpPr/>
-          <p:nvPr/>
-        </p:nvSpPr>
-        <p:spPr>
-          <a:xfrm>
-            <a:off x="7594824" y="1911096"/>
-            <a:ext cx="1534912" cy="402336"/>
-          </a:xfrm>
-          <a:prstGeom prst="rect">
-            <a:avLst/>
-          </a:prstGeom>
-          <a:noFill/>
-          <a:ln/>
-        </p:spPr>
-        <p:txBody>
-          <a:bodyPr wrap="square" lIns="0" tIns="0" rIns="0" bIns="0" rtlCol="0" anchor="ctr">
-            <a:normAutofit/>
-          </a:bodyPr>
+              <a:t>실사 총평: 자산의 물리적·권리적 하자가 없으며, 세부 임대차 계약서 및 등기사항증명서는 LOI 접수 후 원본 열람 가능합니다.</a:t>
+            </a:r>
+            <a:endParaRPr lang="en-US" sz="1100" dirty="0"/>
+          </a:p>
+        </p:txBody>
+      </p:sp>
+      <p:sp>
+        <p:nvSpPr>
+          <p:cNvPr id="23" name="Text 21"/>
+          <p:cNvSpPr/>
+          <p:nvPr/>
+        </p:nvSpPr>
+        <p:spPr>
+          <a:xfrm>
+            <a:off x="566928" y="6382512"/>
+            <a:ext cx="7315200" cy="219456"/>
+          </a:xfrm>
+          <a:prstGeom prst="rect">
+            <a:avLst/>
+          </a:prstGeom>
+          <a:noFill/>
+          <a:ln/>
+        </p:spPr>
+        <p:txBody>
+          <a:bodyPr wrap="square" lIns="0" tIns="0" rIns="0" bIns="0" rtlCol="0" anchor="ctr"/>
           <a:lstStyle/>
           <a:p>
             <a:pPr indent="0" marL="0">
               <a:buNone/>
             </a:pPr>
             <a:r>
-              <a:rPr lang="en-US" sz="1150" b="1" dirty="0">
-                <a:solidFill>
-                  <a:srgbClr val="10161F"/>
+              <a:rPr lang="en-US" sz="800" dirty="0">
+                <a:solidFill>
+                  <a:srgbClr val="718096"/>
                 </a:solidFill>
                 <a:latin typeface="Pretendard" pitchFamily="34" charset="0"/>
                 <a:ea typeface="Pretendard" pitchFamily="34" charset="-122"/>
                 <a:cs typeface="Pretendard" pitchFamily="34" charset="-120"/>
               </a:rPr>
-              <a:t>전층 정상 임대차 상태 (임대료 연체 0건)</a:t>
-            </a:r>
-            <a:endParaRPr lang="en-US" sz="1150" dirty="0"/>
-          </a:p>
-        </p:txBody>
-      </p:sp>
-      <p:sp>
-        <p:nvSpPr>
-          <p:cNvPr id="25" name="Text 23"/>
-          <p:cNvSpPr/>
-          <p:nvPr/>
-        </p:nvSpPr>
-        <p:spPr>
-          <a:xfrm>
-            <a:off x="7594824" y="2377440"/>
-            <a:ext cx="1534912" cy="2560320"/>
-          </a:xfrm>
-          <a:prstGeom prst="rect">
-            <a:avLst/>
-          </a:prstGeom>
-          <a:noFill/>
-          <a:ln/>
-        </p:spPr>
-        <p:txBody>
-          <a:bodyPr wrap="square" lIns="0" tIns="0" rIns="0" bIns="0" rtlCol="0" anchor="t">
-            <a:normAutofit/>
-          </a:bodyPr>
-          <a:lstStyle/>
-          <a:p>
-            <a:pPr marL="342900" indent="-342900">
-              <a:lnSpc>
-                <a:spcPct val="125000"/>
-              </a:lnSpc>
-              <a:buSzPct val="100000"/>
-              <a:buChar char="•"/>
-            </a:pPr>
-            <a:r>
-              <a:rPr lang="en-US" sz="1050" dirty="0">
-                <a:solidFill>
-                  <a:srgbClr val="10161F"/>
-                </a:solidFill>
-                <a:latin typeface="Pretendard" pitchFamily="34" charset="0"/>
-                <a:ea typeface="Pretendard" pitchFamily="34" charset="-122"/>
-                <a:cs typeface="Pretendard" pitchFamily="34" charset="-120"/>
-              </a:rPr>
-              <a:t>임대차 분쟁 및 소송 이력 없음 (명도 리스크 극소)</a:t>
-            </a:r>
-            <a:endParaRPr lang="en-US" sz="1050" dirty="0"/>
-          </a:p>
-        </p:txBody>
-      </p:sp>
-      <p:sp>
-        <p:nvSpPr>
-          <p:cNvPr id="26" name="Shape 24"/>
-          <p:cNvSpPr/>
-          <p:nvPr/>
-        </p:nvSpPr>
-        <p:spPr>
-          <a:xfrm>
-            <a:off x="9632655" y="1417320"/>
-            <a:ext cx="1992112" cy="3611880"/>
-          </a:xfrm>
-          <a:prstGeom prst="roundRect">
-            <a:avLst>
-              <a:gd name="adj" fmla="val 2754"/>
-            </a:avLst>
-          </a:prstGeom>
-          <a:solidFill>
-            <a:srgbClr val="F7FAFC"/>
-          </a:solidFill>
-          <a:ln w="6350">
-            <a:solidFill>
-              <a:srgbClr val="CBD5E0"/>
-            </a:solidFill>
-            <a:prstDash val="solid"/>
-          </a:ln>
-        </p:spPr>
-      </p:sp>
-      <p:sp>
-        <p:nvSpPr>
-          <p:cNvPr id="27" name="Shape 25"/>
-          <p:cNvSpPr/>
-          <p:nvPr/>
-        </p:nvSpPr>
-        <p:spPr>
-          <a:xfrm>
-            <a:off x="9632655" y="1417320"/>
-            <a:ext cx="1992112" cy="45720"/>
-          </a:xfrm>
-          <a:prstGeom prst="rect">
-            <a:avLst/>
-          </a:prstGeom>
-          <a:solidFill>
-            <a:srgbClr val="B98A2E"/>
-          </a:solidFill>
-          <a:ln/>
-        </p:spPr>
-      </p:sp>
-      <p:sp>
-        <p:nvSpPr>
-          <p:cNvPr id="28" name="Text 26"/>
-          <p:cNvSpPr/>
-          <p:nvPr/>
-        </p:nvSpPr>
-        <p:spPr>
-          <a:xfrm>
-            <a:off x="9861255" y="1618488"/>
-            <a:ext cx="1534912" cy="292608"/>
-          </a:xfrm>
-          <a:prstGeom prst="rect">
-            <a:avLst/>
-          </a:prstGeom>
-          <a:noFill/>
-          <a:ln/>
-        </p:spPr>
-        <p:txBody>
-          <a:bodyPr wrap="square" lIns="0" tIns="0" rIns="0" bIns="0" rtlCol="0" anchor="ctr"/>
-          <a:lstStyle/>
-          <a:p>
-            <a:pPr indent="0" marL="0">
-              <a:buNone/>
-            </a:pPr>
-            <a:r>
-              <a:rPr lang="en-US" sz="1150" b="1" dirty="0">
-                <a:solidFill>
-                  <a:srgbClr val="977024"/>
-                </a:solidFill>
-                <a:latin typeface="Pretendard" pitchFamily="34" charset="0"/>
-                <a:ea typeface="Pretendard" pitchFamily="34" charset="-122"/>
-                <a:cs typeface="Pretendard" pitchFamily="34" charset="-120"/>
-              </a:rPr>
-              <a:t>권리관계 및 금융</a:t>
-            </a:r>
-            <a:endParaRPr lang="en-US" sz="1150" dirty="0"/>
-          </a:p>
-        </p:txBody>
-      </p:sp>
-      <p:sp>
-        <p:nvSpPr>
-          <p:cNvPr id="29" name="Text 27"/>
-          <p:cNvSpPr/>
-          <p:nvPr/>
-        </p:nvSpPr>
-        <p:spPr>
-          <a:xfrm>
-            <a:off x="9861255" y="1911096"/>
-            <a:ext cx="1534912" cy="402336"/>
-          </a:xfrm>
-          <a:prstGeom prst="rect">
-            <a:avLst/>
-          </a:prstGeom>
-          <a:noFill/>
-          <a:ln/>
-        </p:spPr>
-        <p:txBody>
-          <a:bodyPr wrap="square" lIns="0" tIns="0" rIns="0" bIns="0" rtlCol="0" anchor="ctr">
-            <a:normAutofit/>
-          </a:bodyPr>
-          <a:lstStyle/>
-          <a:p>
-            <a:pPr indent="0" marL="0">
-              <a:buNone/>
-            </a:pPr>
-            <a:r>
-              <a:rPr lang="en-US" sz="1150" b="1" dirty="0">
-                <a:solidFill>
-                  <a:srgbClr val="10161F"/>
-                </a:solidFill>
-                <a:latin typeface="Pretendard" pitchFamily="34" charset="0"/>
-                <a:ea typeface="Pretendard" pitchFamily="34" charset="-122"/>
-                <a:cs typeface="Pretendard" pitchFamily="34" charset="-120"/>
-              </a:rPr>
-              <a:t>단독 법인 소유 (가압류/가처분 일체 없음)</a:t>
-            </a:r>
-            <a:endParaRPr lang="en-US" sz="1150" dirty="0"/>
-          </a:p>
-        </p:txBody>
-      </p:sp>
-      <p:sp>
-        <p:nvSpPr>
-          <p:cNvPr id="30" name="Text 28"/>
-          <p:cNvSpPr/>
-          <p:nvPr/>
-        </p:nvSpPr>
-        <p:spPr>
-          <a:xfrm>
-            <a:off x="9861255" y="2377440"/>
-            <a:ext cx="1534912" cy="2560320"/>
-          </a:xfrm>
-          <a:prstGeom prst="rect">
-            <a:avLst/>
-          </a:prstGeom>
-          <a:noFill/>
-          <a:ln/>
-        </p:spPr>
-        <p:txBody>
-          <a:bodyPr wrap="square" lIns="0" tIns="0" rIns="0" bIns="0" rtlCol="0" anchor="t">
-            <a:normAutofit/>
-          </a:bodyPr>
-          <a:lstStyle/>
-          <a:p>
-            <a:pPr marL="342900" indent="-342900">
-              <a:lnSpc>
-                <a:spcPct val="125000"/>
-              </a:lnSpc>
-              <a:buSzPct val="100000"/>
-              <a:buChar char="•"/>
-            </a:pPr>
-            <a:r>
-              <a:rPr lang="en-US" sz="1050" dirty="0">
-                <a:solidFill>
-                  <a:srgbClr val="10161F"/>
-                </a:solidFill>
-                <a:latin typeface="Pretendard" pitchFamily="34" charset="0"/>
-                <a:ea typeface="Pretendard" pitchFamily="34" charset="-122"/>
-                <a:cs typeface="Pretendard" pitchFamily="34" charset="-120"/>
-              </a:rPr>
-              <a:t>1금융권 기존 담보대출 85억(연 4.1%) 승계 적격 판정</a:t>
-            </a:r>
-            <a:endParaRPr lang="en-US" sz="1050" dirty="0"/>
-          </a:p>
-        </p:txBody>
-      </p:sp>
-      <p:sp>
-        <p:nvSpPr>
-          <p:cNvPr id="31" name="Shape 29"/>
-          <p:cNvSpPr/>
-          <p:nvPr/>
-        </p:nvSpPr>
-        <p:spPr>
-          <a:xfrm>
-            <a:off x="566928" y="5193792"/>
-            <a:ext cx="11057839" cy="621792"/>
-          </a:xfrm>
-          <a:prstGeom prst="roundRect">
-            <a:avLst>
-              <a:gd name="adj" fmla="val 8824"/>
-            </a:avLst>
-          </a:prstGeom>
-          <a:solidFill>
-            <a:srgbClr val="F7FAFC"/>
-          </a:solidFill>
-          <a:ln w="6350">
-            <a:solidFill>
-              <a:srgbClr val="CBD5E0"/>
-            </a:solidFill>
-            <a:prstDash val="solid"/>
-          </a:ln>
-        </p:spPr>
-      </p:sp>
-      <p:sp>
-        <p:nvSpPr>
-          <p:cNvPr id="32" name="Text 30"/>
-          <p:cNvSpPr/>
-          <p:nvPr/>
-        </p:nvSpPr>
-        <p:spPr>
-          <a:xfrm>
-            <a:off x="795528" y="5193792"/>
-            <a:ext cx="10600639" cy="621792"/>
-          </a:xfrm>
-          <a:prstGeom prst="rect">
-            <a:avLst/>
-          </a:prstGeom>
-          <a:noFill/>
-          <a:ln/>
-        </p:spPr>
-        <p:txBody>
-          <a:bodyPr wrap="square" lIns="0" tIns="0" rIns="0" bIns="0" rtlCol="0" anchor="ctr"/>
-          <a:lstStyle/>
-          <a:p>
-            <a:pPr indent="0" marL="0">
-              <a:buNone/>
-            </a:pPr>
-            <a:r>
-              <a:rPr lang="en-US" sz="1200" dirty="0">
-                <a:solidFill>
-                  <a:srgbClr val="10161F"/>
-                </a:solidFill>
-                <a:latin typeface="Pretendard" pitchFamily="34" charset="0"/>
-                <a:ea typeface="Pretendard" pitchFamily="34" charset="-122"/>
-                <a:cs typeface="Pretendard" pitchFamily="34" charset="-120"/>
-              </a:rPr>
-              <a:t>실사 총평: 자산의 물리적·권리적 하자가 없으며, 세부 임대차 계약서 및 등기사항증명서는 LOI 접수 후 원본 열람 가능합니다.</a:t>
-            </a:r>
-            <a:endParaRPr lang="en-US" sz="1200" dirty="0"/>
-          </a:p>
-        </p:txBody>
-      </p:sp>
-      <p:sp>
-        <p:nvSpPr>
-          <p:cNvPr id="33" name="Text 31"/>
-          <p:cNvSpPr/>
-          <p:nvPr/>
-        </p:nvSpPr>
-        <p:spPr>
-          <a:xfrm>
-            <a:off x="566928" y="6382512"/>
-            <a:ext cx="7315200" cy="219456"/>
-          </a:xfrm>
-          <a:prstGeom prst="rect">
-            <a:avLst/>
-          </a:prstGeom>
-          <a:noFill/>
-          <a:ln/>
-        </p:spPr>
-        <p:txBody>
-          <a:bodyPr wrap="square" lIns="0" tIns="0" rIns="0" bIns="0" rtlCol="0" anchor="ctr"/>
-          <a:lstStyle/>
-          <a:p>
-            <a:pPr indent="0" marL="0">
-              <a:buNone/>
-            </a:pPr>
-            <a:r>
-              <a:rPr lang="en-US" sz="800" dirty="0">
-                <a:solidFill>
-                  <a:srgbClr val="718096"/>
-                </a:solidFill>
-                <a:latin typeface="Pretendard" pitchFamily="34" charset="0"/>
-                <a:ea typeface="Pretendard" pitchFamily="34" charset="-122"/>
-                <a:cs typeface="Pretendard" pitchFamily="34" charset="-120"/>
-              </a:rPr>
               <a:t>크리딜   |   </a:t>
             </a:r>
             <a:endParaRPr lang="en-US" sz="800" dirty="0"/>
@@ -7829,7 +8564,7 @@
       </p:sp>
       <p:sp>
         <p:nvSpPr>
-          <p:cNvPr id="34" name="Text 32"/>
+          <p:cNvPr id="24" name="Text 22"/>
           <p:cNvSpPr/>
           <p:nvPr/>
         </p:nvSpPr>
@@ -9558,11 +10293,11 @@
         <p:spPr>
           <a:xfrm>
             <a:off x="566928" y="1572768"/>
-            <a:ext cx="2490140" cy="3200400"/>
+            <a:ext cx="11057839" cy="3200400"/>
           </a:xfrm>
           <a:prstGeom prst="roundRect">
             <a:avLst>
-              <a:gd name="adj" fmla="val 2203"/>
+              <a:gd name="adj" fmla="val 1714"/>
             </a:avLst>
           </a:prstGeom>
           <a:solidFill>
@@ -9644,7 +10379,7 @@
         <p:spPr>
           <a:xfrm>
             <a:off x="786384" y="2304288"/>
-            <a:ext cx="2051228" cy="365760"/>
+            <a:ext cx="10618927" cy="365760"/>
           </a:xfrm>
           <a:prstGeom prst="rect">
             <a:avLst/>
@@ -9668,7 +10403,7 @@
                 <a:ea typeface="Pretendard" pitchFamily="34" charset="-122"/>
                 <a:cs typeface="Pretendard" pitchFamily="34" charset="-120"/>
               </a:rPr>
-              <a:t>초기 관심 표명 → 담당자 연락</a:t>
+              <a:t>{"ok"</a:t>
             </a:r>
             <a:endParaRPr lang="en-US" sz="1600" dirty="0"/>
           </a:p>
@@ -9683,7 +10418,7 @@
         <p:spPr>
           <a:xfrm>
             <a:off x="786384" y="2761488"/>
-            <a:ext cx="2051228" cy="1828800"/>
+            <a:ext cx="10618927" cy="1828800"/>
           </a:xfrm>
           <a:prstGeom prst="rect">
             <a:avLst/>
@@ -9698,147 +10433,8 @@
             <a:pPr indent="0" marL="0">
               <a:buNone/>
             </a:pPr>
-            <a:endParaRPr lang="en-US" sz="1100" dirty="0"/>
-          </a:p>
-        </p:txBody>
-      </p:sp>
-      <p:sp>
-        <p:nvSpPr>
-          <p:cNvPr id="11" name="Shape 9"/>
-          <p:cNvSpPr/>
-          <p:nvPr/>
-        </p:nvSpPr>
-        <p:spPr>
-          <a:xfrm>
-            <a:off x="3148508" y="3035808"/>
-            <a:ext cx="182880" cy="274320"/>
-          </a:xfrm>
-          <a:prstGeom prst="rightArrow">
-            <a:avLst/>
-          </a:prstGeom>
-          <a:solidFill>
-            <a:srgbClr val="CBD5E0"/>
-          </a:solidFill>
-          <a:ln w="6350">
-            <a:solidFill>
-              <a:srgbClr val="718096"/>
-            </a:solidFill>
-            <a:prstDash val="solid"/>
-          </a:ln>
-        </p:spPr>
-      </p:sp>
-      <p:sp>
-        <p:nvSpPr>
-          <p:cNvPr id="12" name="Shape 10"/>
-          <p:cNvSpPr/>
-          <p:nvPr/>
-        </p:nvSpPr>
-        <p:spPr>
-          <a:xfrm>
-            <a:off x="3422828" y="1572768"/>
-            <a:ext cx="2490140" cy="3200400"/>
-          </a:xfrm>
-          <a:prstGeom prst="roundRect">
-            <a:avLst>
-              <a:gd name="adj" fmla="val 2203"/>
-            </a:avLst>
-          </a:prstGeom>
-          <a:solidFill>
-            <a:srgbClr val="F7FAFC"/>
-          </a:solidFill>
-          <a:ln w="6350">
-            <a:solidFill>
-              <a:srgbClr val="CBD5E0"/>
-            </a:solidFill>
-            <a:prstDash val="solid"/>
-          </a:ln>
-        </p:spPr>
-      </p:sp>
-      <p:sp>
-        <p:nvSpPr>
-          <p:cNvPr id="13" name="Shape 11"/>
-          <p:cNvSpPr/>
-          <p:nvPr/>
-        </p:nvSpPr>
-        <p:spPr>
-          <a:xfrm>
-            <a:off x="3642284" y="1792224"/>
-            <a:ext cx="384048" cy="384048"/>
-          </a:xfrm>
-          <a:prstGeom prst="ellipse">
-            <a:avLst/>
-          </a:prstGeom>
-          <a:solidFill>
-            <a:srgbClr val="B98A2E"/>
-          </a:solidFill>
-          <a:ln/>
-        </p:spPr>
-      </p:sp>
-      <p:sp>
-        <p:nvSpPr>
-          <p:cNvPr id="14" name="Text 12"/>
-          <p:cNvSpPr/>
-          <p:nvPr/>
-        </p:nvSpPr>
-        <p:spPr>
-          <a:xfrm>
-            <a:off x="3642284" y="1792224"/>
-            <a:ext cx="384048" cy="384048"/>
-          </a:xfrm>
-          <a:prstGeom prst="rect">
-            <a:avLst/>
-          </a:prstGeom>
-          <a:noFill/>
-          <a:ln/>
-        </p:spPr>
-        <p:txBody>
-          <a:bodyPr wrap="square" lIns="0" tIns="0" rIns="0" bIns="0" rtlCol="0" anchor="ctr"/>
-          <a:lstStyle/>
-          <a:p>
-            <a:pPr algn="ctr" indent="0" marL="0">
-              <a:buNone/>
-            </a:pPr>
-            <a:r>
-              <a:rPr lang="en-US" sz="1300" b="1" dirty="0">
-                <a:solidFill>
-                  <a:srgbClr val="FFFFFF"/>
-                </a:solidFill>
-                <a:latin typeface="Arial" pitchFamily="34" charset="0"/>
-                <a:ea typeface="Arial" pitchFamily="34" charset="-122"/>
-                <a:cs typeface="Arial" pitchFamily="34" charset="-120"/>
-              </a:rPr>
-              <a:t>STEP 2</a:t>
-            </a:r>
-            <a:endParaRPr lang="en-US" sz="1300" dirty="0"/>
-          </a:p>
-        </p:txBody>
-      </p:sp>
-      <p:sp>
-        <p:nvSpPr>
-          <p:cNvPr id="15" name="Text 13"/>
-          <p:cNvSpPr/>
-          <p:nvPr/>
-        </p:nvSpPr>
-        <p:spPr>
-          <a:xfrm>
-            <a:off x="3642284" y="2304288"/>
-            <a:ext cx="2051228" cy="365760"/>
-          </a:xfrm>
-          <a:prstGeom prst="rect">
-            <a:avLst/>
-          </a:prstGeom>
-          <a:noFill/>
-          <a:ln/>
-        </p:spPr>
-        <p:txBody>
-          <a:bodyPr wrap="square" rtlCol="0" anchor="ctr"/>
-          <a:lstStyle/>
-          <a:p>
-            <a:pPr indent="0" marL="0">
-              <a:buNone/>
-            </a:pPr>
-            <a:r>
-              <a:rPr lang="en-US" sz="1600" b="1" dirty="0">
+            <a:r>
+              <a:rPr lang="en-US" sz="1100" dirty="0">
                 <a:solidFill>
                   <a:srgbClr val="10161F"/>
                 </a:solidFill>
@@ -9846,429 +10442,45 @@
                 <a:ea typeface="Pretendard" pitchFamily="34" charset="-122"/>
                 <a:cs typeface="Pretendard" pitchFamily="34" charset="-120"/>
               </a:rPr>
-              <a:t>NDA 체결 → 임차인 정보 및 임대차계약서 제공</a:t>
-            </a:r>
-            <a:endParaRPr lang="en-US" sz="1600" dirty="0"/>
-          </a:p>
-        </p:txBody>
-      </p:sp>
-      <p:sp>
-        <p:nvSpPr>
-          <p:cNvPr id="16" name="Text 14"/>
-          <p:cNvSpPr/>
-          <p:nvPr/>
-        </p:nvSpPr>
-        <p:spPr>
-          <a:xfrm>
-            <a:off x="3642284" y="2761488"/>
-            <a:ext cx="2051228" cy="1828800"/>
-          </a:xfrm>
-          <a:prstGeom prst="rect">
-            <a:avLst/>
-          </a:prstGeom>
-          <a:noFill/>
-          <a:ln/>
-        </p:spPr>
-        <p:txBody>
-          <a:bodyPr wrap="square" rtlCol="0" anchor="t"/>
+              <a:t>true,"mocked":true,"extractedFields":{"area_signal":"역삼","asset_type":"오피스빌딩","price_band":"300억","size_signal":"3000평(약 9917.4㎡)"},"extractedFacts":{"region":"역삼","exactAddressCandidate":"역삼동 742-1","assetType":"오피스빌딩","priceText":"300억","sizeText":"3000평(약 9917.4㎡)","currentUse":"오피스","currentUseSignal":"근린생활시설","leaseSignal":"임대중","vacancySignal":"공실없음","tenantNames":["쿠팡","네이버"],"unitRentTexts":["301호: 1500만"],"sellerMotivationText":"자산 효율화","brokerNotes":["초역세권 매물"]},"detectedSensitiveFields":["exact_address","tenant_name"],"ambiguousFields":[],"warnings":[],"areaSignal":"역삼","assetType":"오피스빌딩","priceBand":"300억","sizeSignal":"3000평(약 9917.4㎡)","dealType":"매각","buildingName":"역삼 센트럴타워","exactAddress":"역삼동 742-1","totalFloorArea":9917.3,"buildYear":2015,"currentUseSignal":"근린생활시설","vacancySignal":"공실 없음","fitSummary":"초역세권 근생 빌딩으로 시행/사옥 매입에 최적화","cautionSummary":"주요 임차 업종 만기 조율 필요","hiddenFields":["exact_address","seller_motivation"],"confidence":{"areaSignal":"confirmed","assetType":"confirmed","priceBand":"ai_hypothesis","fitSummary":"ai_hypothesis"},"missingData":["sizeSignal"],"boundaryNote":"본 자료는 실거래 통계 기반 참고치입니다.","buyerType":"법인 사옥형","budgetRange":{"min":50,"max":80,"display":"50억~80억"},"preferredRegions":["강남","성수"],"assetTypes":["꼬마빌딩","사옥용"],"purchasePurpose":"사옥용 매입","mustHave":["초역세권","주차"],"niceToHave":["테라스","루프탑"],"riskTolerance":"medium","financingNote":"자본금 50% 준비","missingQuestions":["구체적인 입주 시기가 언제인가요?","선호하는 수익률이 있나요?"],"privacyNotes":["연락처 비공개"],"fitReasons":["매수자 예산(50-80억)에 부합하는 매물입니다.","요청하신 성수/강남 권역에 해당합니다."],"cautionReasons":["요청한 용도와 달리 명도 협의가 다소 필요합니다."],"recommendedNextAction":"현장 답사 제안","kakaoMessage":"안녕하세요! 요청하신 조건에 부합하는 추천 매물이 있어 안내해 드립니다. 확인해보시고 피드백 부탁드립니다.","title":"강남 역삼역 초역세권 오피스 사옥용 빌딩 매각","shortSummary":"역삼역 도보 5분 거리의 준신축급 대형 오피스빌딩입니다.","dealPoints":["초역세권","사옥 최적"],"cautionPoints":["명도 조율 필요"],"hiddenInfoNotice":["보증금 및 지번은 인가 후 확인 가능"],"gateMessage":"G1 등급 등록이 필요합니다.","kakaoText":"강남 역삼역 오피스 빌딩 매각 안내입니다.","exactUnitCandidate":"101호","floor":"1층","areaSqmText":"150㎡","spaceType":"office","depositText":"5000만","monthlyRentText":"400만","maintenanceFeeText":"50만","availableFromText":"즉시입주","leaseTermMonthsText":"24","incentivesText":"렌트프리 2개월","restrictions":[],"landlordIdentity":"김성수","currentTenant":"스타트업","vacancyReason":"이전 확장","rentNegotiation":"협의 가능","region":"성수동","areaSqm":150,"deposit":5000,"monthlyRent":400,"maintenanceFee":50,"availableFrom":"즉시입주","leaseTermMonths":24,"incentives":{"rentFreeMonths":2,"interiorSupport":"일부 인테리어 지원","freeRentDetail":"렌트프리 2개월 지원"},"shortSummaryLease":"성수역 도보 5분 거리 1층 리테일 상가 매물입니다."}</a:t>
+            </a:r>
+            <a:endParaRPr lang="en-US" sz="1100" dirty="0"/>
+          </a:p>
+        </p:txBody>
+      </p:sp>
+      <p:sp>
+        <p:nvSpPr>
+          <p:cNvPr id="11" name="Text 9"/>
+          <p:cNvSpPr/>
+          <p:nvPr/>
+        </p:nvSpPr>
+        <p:spPr>
+          <a:xfrm>
+            <a:off x="566928" y="6382512"/>
+            <a:ext cx="7315200" cy="219456"/>
+          </a:xfrm>
+          <a:prstGeom prst="rect">
+            <a:avLst/>
+          </a:prstGeom>
+          <a:noFill/>
+          <a:ln/>
+        </p:spPr>
+        <p:txBody>
+          <a:bodyPr wrap="square" lIns="0" tIns="0" rIns="0" bIns="0" rtlCol="0" anchor="ctr"/>
           <a:lstStyle/>
           <a:p>
             <a:pPr indent="0" marL="0">
               <a:buNone/>
             </a:pPr>
-            <a:endParaRPr lang="en-US" sz="1100" dirty="0"/>
-          </a:p>
-        </p:txBody>
-      </p:sp>
-      <p:sp>
-        <p:nvSpPr>
-          <p:cNvPr id="17" name="Shape 15"/>
-          <p:cNvSpPr/>
-          <p:nvPr/>
-        </p:nvSpPr>
-        <p:spPr>
-          <a:xfrm>
-            <a:off x="6004408" y="3035808"/>
-            <a:ext cx="182880" cy="274320"/>
-          </a:xfrm>
-          <a:prstGeom prst="rightArrow">
-            <a:avLst/>
-          </a:prstGeom>
-          <a:solidFill>
-            <a:srgbClr val="CBD5E0"/>
-          </a:solidFill>
-          <a:ln w="6350">
-            <a:solidFill>
-              <a:srgbClr val="718096"/>
-            </a:solidFill>
-            <a:prstDash val="solid"/>
-          </a:ln>
-        </p:spPr>
-      </p:sp>
-      <p:sp>
-        <p:nvSpPr>
-          <p:cNvPr id="18" name="Shape 16"/>
-          <p:cNvSpPr/>
-          <p:nvPr/>
-        </p:nvSpPr>
-        <p:spPr>
-          <a:xfrm>
-            <a:off x="6278728" y="1572768"/>
-            <a:ext cx="2490140" cy="3200400"/>
-          </a:xfrm>
-          <a:prstGeom prst="roundRect">
-            <a:avLst>
-              <a:gd name="adj" fmla="val 2203"/>
-            </a:avLst>
-          </a:prstGeom>
-          <a:solidFill>
-            <a:srgbClr val="F7FAFC"/>
-          </a:solidFill>
-          <a:ln w="6350">
-            <a:solidFill>
-              <a:srgbClr val="CBD5E0"/>
-            </a:solidFill>
-            <a:prstDash val="solid"/>
-          </a:ln>
-        </p:spPr>
-      </p:sp>
-      <p:sp>
-        <p:nvSpPr>
-          <p:cNvPr id="19" name="Shape 17"/>
-          <p:cNvSpPr/>
-          <p:nvPr/>
-        </p:nvSpPr>
-        <p:spPr>
-          <a:xfrm>
-            <a:off x="6498184" y="1792224"/>
-            <a:ext cx="384048" cy="384048"/>
-          </a:xfrm>
-          <a:prstGeom prst="ellipse">
-            <a:avLst/>
-          </a:prstGeom>
-          <a:solidFill>
-            <a:srgbClr val="B98A2E"/>
-          </a:solidFill>
-          <a:ln/>
-        </p:spPr>
-      </p:sp>
-      <p:sp>
-        <p:nvSpPr>
-          <p:cNvPr id="20" name="Text 18"/>
-          <p:cNvSpPr/>
-          <p:nvPr/>
-        </p:nvSpPr>
-        <p:spPr>
-          <a:xfrm>
-            <a:off x="6498184" y="1792224"/>
-            <a:ext cx="384048" cy="384048"/>
-          </a:xfrm>
-          <a:prstGeom prst="rect">
-            <a:avLst/>
-          </a:prstGeom>
-          <a:noFill/>
-          <a:ln/>
-        </p:spPr>
-        <p:txBody>
-          <a:bodyPr wrap="square" lIns="0" tIns="0" rIns="0" bIns="0" rtlCol="0" anchor="ctr"/>
-          <a:lstStyle/>
-          <a:p>
-            <a:pPr algn="ctr" indent="0" marL="0">
-              <a:buNone/>
-            </a:pPr>
-            <a:r>
-              <a:rPr lang="en-US" sz="1300" b="1" dirty="0">
-                <a:solidFill>
-                  <a:srgbClr val="FFFFFF"/>
-                </a:solidFill>
-                <a:latin typeface="Arial" pitchFamily="34" charset="0"/>
-                <a:ea typeface="Arial" pitchFamily="34" charset="-122"/>
-                <a:cs typeface="Arial" pitchFamily="34" charset="-120"/>
-              </a:rPr>
-              <a:t>STEP 3</a:t>
-            </a:r>
-            <a:endParaRPr lang="en-US" sz="1300" dirty="0"/>
-          </a:p>
-        </p:txBody>
-      </p:sp>
-      <p:sp>
-        <p:nvSpPr>
-          <p:cNvPr id="21" name="Text 19"/>
-          <p:cNvSpPr/>
-          <p:nvPr/>
-        </p:nvSpPr>
-        <p:spPr>
-          <a:xfrm>
-            <a:off x="6498184" y="2304288"/>
-            <a:ext cx="2051228" cy="365760"/>
-          </a:xfrm>
-          <a:prstGeom prst="rect">
-            <a:avLst/>
-          </a:prstGeom>
-          <a:noFill/>
-          <a:ln/>
-        </p:spPr>
-        <p:txBody>
-          <a:bodyPr wrap="square" rtlCol="0" anchor="ctr"/>
-          <a:lstStyle/>
-          <a:p>
-            <a:pPr indent="0" marL="0">
-              <a:buNone/>
-            </a:pPr>
-            <a:r>
-              <a:rPr lang="en-US" sz="1600" b="1" dirty="0">
-                <a:solidFill>
-                  <a:srgbClr val="10161F"/>
+            <a:r>
+              <a:rPr lang="en-US" sz="800" dirty="0">
+                <a:solidFill>
+                  <a:srgbClr val="718096"/>
                 </a:solidFill>
                 <a:latin typeface="Pretendard" pitchFamily="34" charset="0"/>
                 <a:ea typeface="Pretendard" pitchFamily="34" charset="-122"/>
                 <a:cs typeface="Pretendard" pitchFamily="34" charset="-120"/>
               </a:rPr>
-              <a:t>현장 실사 일정 조율 → 건물 컨디션 및 설비 직접 확인</a:t>
-            </a:r>
-            <a:endParaRPr lang="en-US" sz="1600" dirty="0"/>
-          </a:p>
-        </p:txBody>
-      </p:sp>
-      <p:sp>
-        <p:nvSpPr>
-          <p:cNvPr id="22" name="Text 20"/>
-          <p:cNvSpPr/>
-          <p:nvPr/>
-        </p:nvSpPr>
-        <p:spPr>
-          <a:xfrm>
-            <a:off x="6498184" y="2761488"/>
-            <a:ext cx="2051228" cy="1828800"/>
-          </a:xfrm>
-          <a:prstGeom prst="rect">
-            <a:avLst/>
-          </a:prstGeom>
-          <a:noFill/>
-          <a:ln/>
-        </p:spPr>
-        <p:txBody>
-          <a:bodyPr wrap="square" rtlCol="0" anchor="t"/>
-          <a:lstStyle/>
-          <a:p>
-            <a:pPr indent="0" marL="0">
-              <a:buNone/>
-            </a:pPr>
-            <a:endParaRPr lang="en-US" sz="1100" dirty="0"/>
-          </a:p>
-        </p:txBody>
-      </p:sp>
-      <p:sp>
-        <p:nvSpPr>
-          <p:cNvPr id="23" name="Shape 21"/>
-          <p:cNvSpPr/>
-          <p:nvPr/>
-        </p:nvSpPr>
-        <p:spPr>
-          <a:xfrm>
-            <a:off x="8860307" y="3035808"/>
-            <a:ext cx="182880" cy="274320"/>
-          </a:xfrm>
-          <a:prstGeom prst="rightArrow">
-            <a:avLst/>
-          </a:prstGeom>
-          <a:solidFill>
-            <a:srgbClr val="CBD5E0"/>
-          </a:solidFill>
-          <a:ln w="6350">
-            <a:solidFill>
-              <a:srgbClr val="718096"/>
-            </a:solidFill>
-            <a:prstDash val="solid"/>
-          </a:ln>
-        </p:spPr>
-      </p:sp>
-      <p:sp>
-        <p:nvSpPr>
-          <p:cNvPr id="24" name="Shape 22"/>
-          <p:cNvSpPr/>
-          <p:nvPr/>
-        </p:nvSpPr>
-        <p:spPr>
-          <a:xfrm>
-            <a:off x="9134627" y="1572768"/>
-            <a:ext cx="2490140" cy="3200400"/>
-          </a:xfrm>
-          <a:prstGeom prst="roundRect">
-            <a:avLst>
-              <a:gd name="adj" fmla="val 2203"/>
-            </a:avLst>
-          </a:prstGeom>
-          <a:solidFill>
-            <a:srgbClr val="F7FAFC"/>
-          </a:solidFill>
-          <a:ln w="6350">
-            <a:solidFill>
-              <a:srgbClr val="CBD5E0"/>
-            </a:solidFill>
-            <a:prstDash val="solid"/>
-          </a:ln>
-        </p:spPr>
-      </p:sp>
-      <p:sp>
-        <p:nvSpPr>
-          <p:cNvPr id="25" name="Shape 23"/>
-          <p:cNvSpPr/>
-          <p:nvPr/>
-        </p:nvSpPr>
-        <p:spPr>
-          <a:xfrm>
-            <a:off x="9354083" y="1792224"/>
-            <a:ext cx="384048" cy="384048"/>
-          </a:xfrm>
-          <a:prstGeom prst="ellipse">
-            <a:avLst/>
-          </a:prstGeom>
-          <a:solidFill>
-            <a:srgbClr val="B98A2E"/>
-          </a:solidFill>
-          <a:ln/>
-        </p:spPr>
-      </p:sp>
-      <p:sp>
-        <p:nvSpPr>
-          <p:cNvPr id="26" name="Text 24"/>
-          <p:cNvSpPr/>
-          <p:nvPr/>
-        </p:nvSpPr>
-        <p:spPr>
-          <a:xfrm>
-            <a:off x="9354083" y="1792224"/>
-            <a:ext cx="384048" cy="384048"/>
-          </a:xfrm>
-          <a:prstGeom prst="rect">
-            <a:avLst/>
-          </a:prstGeom>
-          <a:noFill/>
-          <a:ln/>
-        </p:spPr>
-        <p:txBody>
-          <a:bodyPr wrap="square" lIns="0" tIns="0" rIns="0" bIns="0" rtlCol="0" anchor="ctr"/>
-          <a:lstStyle/>
-          <a:p>
-            <a:pPr algn="ctr" indent="0" marL="0">
-              <a:buNone/>
-            </a:pPr>
-            <a:r>
-              <a:rPr lang="en-US" sz="1300" b="1" dirty="0">
-                <a:solidFill>
-                  <a:srgbClr val="FFFFFF"/>
-                </a:solidFill>
-                <a:latin typeface="Arial" pitchFamily="34" charset="0"/>
-                <a:ea typeface="Arial" pitchFamily="34" charset="-122"/>
-                <a:cs typeface="Arial" pitchFamily="34" charset="-120"/>
-              </a:rPr>
-              <a:t>STEP 4</a:t>
-            </a:r>
-            <a:endParaRPr lang="en-US" sz="1300" dirty="0"/>
-          </a:p>
-        </p:txBody>
-      </p:sp>
-      <p:sp>
-        <p:nvSpPr>
-          <p:cNvPr id="27" name="Text 25"/>
-          <p:cNvSpPr/>
-          <p:nvPr/>
-        </p:nvSpPr>
-        <p:spPr>
-          <a:xfrm>
-            <a:off x="9354083" y="2304288"/>
-            <a:ext cx="2051228" cy="365760"/>
-          </a:xfrm>
-          <a:prstGeom prst="rect">
-            <a:avLst/>
-          </a:prstGeom>
-          <a:noFill/>
-          <a:ln/>
-        </p:spPr>
-        <p:txBody>
-          <a:bodyPr wrap="square" rtlCol="0" anchor="ctr"/>
-          <a:lstStyle/>
-          <a:p>
-            <a:pPr indent="0" marL="0">
-              <a:buNone/>
-            </a:pPr>
-            <a:r>
-              <a:rPr lang="en-US" sz="1600" b="1" dirty="0">
-                <a:solidFill>
-                  <a:srgbClr val="10161F"/>
-                </a:solidFill>
-                <a:latin typeface="Pretendard" pitchFamily="34" charset="0"/>
-                <a:ea typeface="Pretendard" pitchFamily="34" charset="-122"/>
-                <a:cs typeface="Pretendard" pitchFamily="34" charset="-120"/>
-              </a:rPr>
-              <a:t>LOI(투자의향서) 제출 → 가격 협의 개시</a:t>
-            </a:r>
-            <a:endParaRPr lang="en-US" sz="1600" dirty="0"/>
-          </a:p>
-        </p:txBody>
-      </p:sp>
-      <p:sp>
-        <p:nvSpPr>
-          <p:cNvPr id="28" name="Text 26"/>
-          <p:cNvSpPr/>
-          <p:nvPr/>
-        </p:nvSpPr>
-        <p:spPr>
-          <a:xfrm>
-            <a:off x="9354083" y="2761488"/>
-            <a:ext cx="2051228" cy="1828800"/>
-          </a:xfrm>
-          <a:prstGeom prst="rect">
-            <a:avLst/>
-          </a:prstGeom>
-          <a:noFill/>
-          <a:ln/>
-        </p:spPr>
-        <p:txBody>
-          <a:bodyPr wrap="square" rtlCol="0" anchor="t"/>
-          <a:lstStyle/>
-          <a:p>
-            <a:pPr indent="0" marL="0">
-              <a:buNone/>
-            </a:pPr>
-            <a:endParaRPr lang="en-US" sz="1100" dirty="0"/>
-          </a:p>
-        </p:txBody>
-      </p:sp>
-      <p:sp>
-        <p:nvSpPr>
-          <p:cNvPr id="29" name="Text 27"/>
-          <p:cNvSpPr/>
-          <p:nvPr/>
-        </p:nvSpPr>
-        <p:spPr>
-          <a:xfrm>
-            <a:off x="566928" y="6382512"/>
-            <a:ext cx="7315200" cy="219456"/>
-          </a:xfrm>
-          <a:prstGeom prst="rect">
-            <a:avLst/>
-          </a:prstGeom>
-          <a:noFill/>
-          <a:ln/>
-        </p:spPr>
-        <p:txBody>
-          <a:bodyPr wrap="square" lIns="0" tIns="0" rIns="0" bIns="0" rtlCol="0" anchor="ctr"/>
-          <a:lstStyle/>
-          <a:p>
-            <a:pPr indent="0" marL="0">
-              <a:buNone/>
-            </a:pPr>
-            <a:r>
-              <a:rPr lang="en-US" sz="800" dirty="0">
-                <a:solidFill>
-                  <a:srgbClr val="718096"/>
-                </a:solidFill>
-                <a:latin typeface="Pretendard" pitchFamily="34" charset="0"/>
-                <a:ea typeface="Pretendard" pitchFamily="34" charset="-122"/>
-                <a:cs typeface="Pretendard" pitchFamily="34" charset="-120"/>
-              </a:rPr>
               <a:t>크리딜   |   </a:t>
             </a:r>
             <a:endParaRPr lang="en-US" sz="800" dirty="0"/>
@@ -10277,7 +10489,7 @@
       </p:sp>
       <p:sp>
         <p:nvSpPr>
-          <p:cNvPr id="30" name="Text 28"/>
+          <p:cNvPr id="12" name="Text 10"/>
           <p:cNvSpPr/>
           <p:nvPr/>
         </p:nvSpPr>

--- a/docs/test/stress/e2e-outputs/trading_case10_seocho_old_retail_basic.pptx
+++ b/docs/test/stress/e2e-outputs/trading_case10_seocho_old_retail_basic.pptx
@@ -1905,7 +1905,7 @@
                 <a:ea typeface="Arial" pitchFamily="34" charset="-122"/>
                 <a:cs typeface="Arial" pitchFamily="34" charset="-120"/>
               </a:rPr>
-              <a:t>BASIC IM</a:t>
+              <a:t>INVESTMENT MEMORANDUM</a:t>
             </a:r>
             <a:endParaRPr lang="en-US" sz="1000" dirty="0"/>
           </a:p>
@@ -3988,7 +3988,7 @@
                 <a:ea typeface="Pretendard" pitchFamily="34" charset="-122"/>
                 <a:cs typeface="Pretendard" pitchFamily="34" charset="-120"/>
               </a:rPr>
-              <a:t>서초권역 내 노후근생, 매각 희망가 115억. 입지·임대차 현황을 감안할 때 투자 검토 가치가 있는 물건입니다.</a:t>
+              <a:t>서초권역 소재 노후근생, 희망가 115억 투자 검토 자료입니다.</a:t>
             </a:r>
             <a:endParaRPr lang="en-US" sz="1500" dirty="0"/>
           </a:p>
@@ -4610,7 +4610,7 @@
                 <a:ea typeface="Pretendard" pitchFamily="34" charset="-122"/>
                 <a:cs typeface="Pretendard" pitchFamily="34" charset="-120"/>
               </a:rPr>
-              <a:t>원금 안전판: 서초권역 핵심 입지 및 우량 대지 지분 가치로 하방 경직성 확보</a:t>
+              <a:t>입지 가치: 서초권역 소재 자산으로 중장기 자산 가치 및 안정적 수요 검토</a:t>
             </a:r>
             <a:endParaRPr lang="en-US" sz="1150" dirty="0"/>
           </a:p>
@@ -4742,7 +4742,7 @@
                 <a:ea typeface="Pretendard" pitchFamily="34" charset="-122"/>
                 <a:cs typeface="Pretendard" pitchFamily="34" charset="-120"/>
               </a:rPr>
-              <a:t>수익 안정성: 매각 희망가 115억 대비 안정적인 월 임대수익 창출 구조</a:t>
+              <a:t>임대 구조: 115억 수준의 가격대 및 현 임대차 기반의 현금흐름 분석</a:t>
             </a:r>
             <a:endParaRPr lang="en-US" sz="1150" dirty="0"/>
           </a:p>
@@ -4874,7 +4874,7 @@
                 <a:ea typeface="Pretendard" pitchFamily="34" charset="-122"/>
                 <a:cs typeface="Pretendard" pitchFamily="34" charset="-120"/>
               </a:rPr>
-              <a:t>미래 가치: 향후 권역 지가 상승 및 공법상 잔여 용적률 활용 밸류업 기회</a:t>
+              <a:t>실사 점검: 계약서 및 공부 확인을 통한 권리관계·물리적 상태 정밀 진단</a:t>
             </a:r>
             <a:endParaRPr lang="en-US" sz="1150" dirty="0"/>
           </a:p>
@@ -5346,7 +5346,7 @@
                 <a:ea typeface="Pretendard" pitchFamily="34" charset="-122"/>
                 <a:cs typeface="Pretendard" pitchFamily="34" charset="-120"/>
               </a:rPr>
-              <a:t>{"ok":true,"mocked":true,"extractedFields":{"area_signal":"역삼","asset_type":"오피스빌딩","price_band":"300억","size_signal":"3000평(약 9917.4㎡)"},"extractedFacts":{"region":"역삼","exactAddressCandidate":"역삼동 742-1","assetType":"오피스빌딩","priceText":"300억","sizeText":"3000평(약 9917.4㎡)","currentUse":"오피스","currentUseSignal":"근린생활시설","leaseSignal":"임대중","vacancySignal":"공실없음","tenantNames":["쿠팡","네이버"],"unitRentTexts":["301호: 1500만"],"sellerMotivationText":"자산 효율화","brokerNotes":["초역세권 매물"]},"detectedSensitiveFields":["exact_address","tenant_name"],"ambiguousFields":[],"warnings":[],"areaSignal":"역삼","assetType":"오피스빌딩","priceBand":"300억","sizeSignal":"3000평(약 9917.4㎡)","dealType":"매각","buildingName":"역삼 센트럴타워","exactAddress":"역삼동 742-1","totalFloorArea":9917.3,"buildYear":2015,"currentUseSignal":"근린생활시설","vacancySignal":"공실 없음","fitSummary":"초역세권 근생 빌딩으로 시행/사옥 매입에 최적화","cautionSummary":"주요 임차 업종 만기 조율 필요","hiddenFields":["exact_address","seller_motivation"],"confidence":{"areaSignal":"confirmed","assetType":"confirmed","priceBand":"ai_hypothesis","fitSummary":"ai_hypothesis"},"missingData":["sizeSignal"],"boundaryNote":"본 자료는 실거래 통계 기반 참고치입니다.","buyerType":"법인 사옥형","budgetRange":{"min":50,"max":80,"display":"50억~80억"},"preferredRegions":["강남","성수"],"assetTypes":["꼬마빌딩","사옥용"],"purchasePurpose":"사옥용 매입","mustHave":["초역세권","주차"],"niceToHave":["테라스","루프탑"],"riskTolerance":"medium","financingNote":"자본금 50% 준비","missingQuestions":["구체적인 입주 시기가 언제인가요?","선호하는 수익률이 있나요?"],"privacyNotes":["연락처 비공개"],"fitReasons":["매수자 예산(50-80억)에 부합하는 매물입니다.","요청하신 성수/강남 권역에 해당합니다."],"cautionReasons":["요청한 용도와 달리 명도 협의가 다소 필요합니다."],"recommendedNextAction":"현장 답사 제안","kakaoMessage":"안녕하세요! 요청하신 조건에 부합하는 추천 매물이 있어 안내해 드립니다. 확인해보시고 피드백 부탁드립니다.","title":"강남 역삼역 초역세권 오피스 사옥용 빌딩 매각","shortSummary":"역삼역 도보 5분 거리의 준신축급 대형 오피스빌딩입니다.","dealPoints":["초역세권","사옥 최적"],"cautionPoints":["명도 조율 필요"],"hiddenInfoNotice":["보증금 및 지번은 인가 후 확인 가능"],"gateMessage":"G1 등급 등록이 필요합니다.","kakaoText":"강남 역삼역 오피스 빌딩 매각 안내입니다.","exactUnitCandidate":"101호","floor":"1층","areaSqmText":"150㎡","spaceType":"office","depositText":"5000만","monthlyRentText":"400만","maintenanceFeeText":"50만","availableFromText":"즉시입주","leaseTermMonthsText":"24","incentivesText":"렌트프리 2개월","restrictions":[],"landlordIdentity":"김성수","currentTenant":"스타트업","vacancyReason":"이전 확장","rentNegotiation":"협의 가능","region":"성수동","areaSqm":150,"deposit":5000,"monthlyRent":400,"maintenanceFee":50,"availableFrom":"즉시입주","leaseTermMonths":24,"incentives":{"rentFreeMonths":2,"interiorSupport":"일부 인테리어 지원","freeRentDetail":"렌트프리 2개월 지원"},"shortSummaryLease":"성수역 도보 5분 거리 1층 리테일 상가 매물입니다."}</a:t>
+              <a:t>{"ok":true,"mocked":true,"extractedFields":{"area_signal":"역삼","asset_type":"오피스빌딩","price_band":"300억","size_signal":"3000평(약 9917.4㎡)"},"extractedFacts":{"region":"역삼","exactAddressCandidate":"역삼동 742-1","assetType":"오피스빌딩","priceText":"300억","sizeText":"3000평(약 9917.4㎡)","currentUse":"오피스","currentUseSignal":"근린생활시설","leaseSignal":"임대중","vacancySignal":"공실없음","tenantNames":["쿠팡","네이버"],"unitRentTexts":["301호: 1500만"],"sellerMotivationText":"자산 효율화","brokerNotes":["초역세권 매물"]},"detectedSensitiveFields":["exact_address","tenant_name"],"ambiguousFields":[],"warnings":[],"areaSignal":"역삼","assetType":"오피스빌딩","priceBand":"300억","sizeSignal":"3000평(약 9917.4㎡)","dealType":"매각","buildingName":"역삼 센트럴타워","exactAddress":"역삼동 742-1","totalFloorArea":9917.3,"buildYear":2015,"currentUseSignal":"근린생활시설","vacancySignal":"공실 없음","fitSummary":"초역세권 근생 빌딩으로 시행/사옥 매입에 최적화","cautionSummary":"주요 임차인 만기 조율 필요","hiddenFields":["exact_address","seller_motivation"],"confidence":{"areaSignal":"confirmed","assetType":"confirmed","priceBand":"ai_hypothesis","fitSummary":"ai_hypothesis"},"missingData":["sizeSignal"],"boundaryNote":"본 자료는 실거래 통계 기반 참고치입니다.","buyerType":"법인 사옥형","budgetRange":{"min":50,"max":80,"display":"50억~80억"},"preferredRegions":["강남","성수"],"assetTypes":["꼬마빌딩","사옥용"],"purchasePurpose":"사옥용 매입","mustHave":["초역세권","주차"],"niceToHave":["테라스","루프탑"],"riskTolerance":"medium","financingNote":"자본금 50% 준비","missingQuestions":["구체적인 입주 시기가 언제인가요?","선호하는 수익률이 있나요?"],"privacyNotes":["연락처 비공개"],"fitReasons":["매수자 예산(50-80억)에 부합하는 매물입니다.","요청하신 성수/강남 권역에 해당합니다."],"cautionReasons":["요청한 용도와 달리 명도 협의가 다소 필요합니다."],"recommendedNextAction":"현장 답사 제안","kakaoMessage":"안녕하세요! 요청하신 조건에 부합하는 추천 매물이 있어 안내해 드립니다. 확인해보시고 피드백 부탁드립니다.","title":"강남 역삼역 초역세권 오피스 사옥용 빌딩 매각","shortSummary":"역삼역 도보 5분 거리의 준신축급 대형 오피스빌딩입니다.","dealPoints":["초역세권","사옥 최적"],"cautionPoints":["명도 조율 필요"],"hiddenInfoNotice":["보증금 및 지번은 인가 후 확인 가능"],"gateMessage":"G1 등급 등록이 필요합니다.","kakaoText":"강남 역삼역 오피스 빌딩 매각 안내입니다.","exactUnitCandidate":"101호","floor":"1층","areaSqmText":"150㎡","spaceType":"office","depositText":"5000만","monthlyRentText":"400만","maintenanceFeeText":"50만","availableFromText":"즉시입주","leaseTermMonthsText":"24","incentivesText":"렌트프리 2개월","restrictions":[],"landlordIdentity":"김성수","currentTenant":"스타트업","vacancyReason":"이전 확장","rentNegotiation":"협의 가능","region":"성수동","areaSqm":150,"deposit":5000,"monthlyRent":400,"maintenanceFee":50,"availableFrom":"즉시입주","leaseTermMonths":24,"incentives":{"rentFreeMonths":2,"interiorSupport":"일부 인테리어 지원","freeRentDetail":"렌트프리 2개월 지원"},"shortSummaryLease":"성수역 도보 5분 거리 1층 리테일 상가 매물입니다."}</a:t>
             </a:r>
             <a:endParaRPr lang="en-US" sz="1000" dirty="0"/>
           </a:p>
@@ -5638,7 +5638,7 @@
                 <a:ea typeface="Pretendard" pitchFamily="34" charset="-122"/>
                 <a:cs typeface="Pretendard" pitchFamily="34" charset="-120"/>
               </a:rPr>
-              <a:t>true,"mocked":true,"extractedFields":{"area_signal":"역삼","asset_type":"오피스빌딩","price_band":"300억","size_signal":"3000평(약 9917.4㎡)"},"extractedFacts":{"region":"역삼","exactAddressCandidate":"역삼동 742-1","assetType":"오피스빌딩","priceText":"300억","sizeText":"3000평(약 9917.4㎡)","currentUse":"오피스","currentUseSignal":"근린생활시설","leaseSignal":"임대중","vacancySignal":"공실없음","tenantNames":"쿠팡","네이버","unitRentTexts":"301호: 1500만","sellerMotivationText":"자산 효율화","brokerNotes":"초역세권 매물"},"detectedSensitiveFields":"exact_address","tenant_name","ambiguousFields":,"warnings":,"areaSignal":"역삼","assetType":"오피스빌딩","priceBand":"300억","sizeSignal":"3000평(약 9917.4㎡)","dealType":"매각","buildingName":"역삼 센트럴타워","exactAddress":"역삼동 742-1","totalFloorArea":9917.3,"buildYear":2015,"currentUseSignal":"근린생활시설","vacancySignal":"공실 없음","fitSummary":"초역세권 근생 빌딩으로 시행/사옥 매입에 최적화","cautionSummary":"주요 임차 업종 만기 조율 필요","hiddenFields":"exact_address","seller_motivation","confidence":{"areaSignal":"confirmed","assetType":"confirmed","priceBand":"ai_hypothesis","fitSummary":"ai_hypothesis"},"missingData":"sizeSignal","boundaryNote":"본 자료는 실거래 통계 기반 참고치입니다.","buyerType":"법인 사옥형","budgetRange":{"min":50,"max":80,"display":"50억~80억"},"preferredRegions":"강남","성수","assetTypes":"꼬마빌딩","사옥용","purchasePurpose":"사옥용 매입","mustHave":"초역세권","주차","niceToHave":"테라스","루프탑","riskTolerance":"medium","financingNote":"자본금 50% 준비","missingQuestions":"구체적인 입주 시기가 언제인가요?","선호하는 수익률이 있나요?","privacyNotes":"연락처 비공개","fitReasons":"매수자 예산(50-80억)에 부합하는 매물입니다.","요청하신 성수/강남 권역에 해당합니다.","cautionReasons":"요청한 용도와 달리 명도 협의가 다소 필요합니다.","recommendedNextAction":"현장 답사 제안","kakaoMessage":"안녕하세요! 요청하신 조건에 부합하는 추천 매물이 있어 안내해 드립니다. 확인해보시고 피드백 부탁드립니다.","title":"강남 역삼역 초역세권 오피스 사옥용 빌딩 매각","shortSummary":"역삼역 도보 5분 거리의 준신축급 대형 오피스빌딩입니다.","dealPoints":"초역세권","사옥 최적","cautionPoints":"명도 조율 필요","hiddenInfoNotice":"보증금 및 지번은 인가 후 확인 가능","gateMessage":"G1 등급 등록이 필요합니다.","kakaoText":"강남 역삼역 오피스 빌딩 매각 안내입니다.","exactUnitCandidate":"101호","floor":"1층","areaSqmText":"150㎡","spaceType":"office","depositText":"5000만","monthlyRentText":"400만","maintenanceFeeText":"50만","availableFromText":"즉시입주","leaseTermMonthsText":"24","incentivesText":"렌트프리 2개월","restrictions":,"landlordIdentity":"김성수","currentTenant":"스타트업","vacancyReason":"이전 확장","rentNegotiation":"협의 가능","region":"성수동","areaSqm":150,"deposit":5000,"monthlyRent":400,"maintenanceFee":50,"availableFrom":"즉시입주","leaseTermMonths":24,"incentives":{"rentFreeMonths":2,"interiorSupport":"일부 인테리어 지원","freeRentDetail":"렌트프리 2개월 지원"},"shortSummaryLease":"성수역 도보 5분 거리 1층 리테일 상가 매물입니다."}</a:t>
+              <a:t>true,"mocked":true,"extractedFields":{"area_signal":"역삼","asset_type":"오피스빌딩","price_band":"300억","size_signal":"3000평(약 9917.4㎡)"},"extractedFacts":{"region":"역삼","exactAddressCandidate":"역삼동 742-1","assetType":"오피스빌딩","priceText":"300억","sizeText":"3000평(약 9917.4㎡)","currentUse":"오피스","currentUseSignal":"근린생활시설","leaseSignal":"임대중","vacancySignal":"공실없음","tenantNames":"쿠팡","네이버","unitRentTexts":"301호: 1500만","sellerMotivationText":"자산 효율화","brokerNotes":"초역세권 매물"},"detectedSensitiveFields":"exact_address","tenant_name","ambiguousFields":,"warnings":,"areaSignal":"역삼","assetType":"오피스빌딩","priceBand":"300억","sizeSignal":"3000평(약 9917.4㎡)","dealType":"매각","buildingName":"역삼 센트럴타워","exactAddress":"역삼동 742-1","totalFloorArea":9917.3,"buildYear":2015,"currentUseSignal":"근린생활시설","vacancySignal":"공실 없음","fitSummary":"초역세권 근생 빌딩으로 시행/사옥 매입에 최적화","cautionSummary":"주요 임차인 만기 조율 필요","hiddenFields":"exact_address","seller_motivation","confidence":{"areaSignal":"confirmed","assetType":"confirmed","priceBand":"ai_hypothesis","fitSummary":"ai_hypothesis"},"missingData":"sizeSignal","boundaryNote":"본 자료는 실거래 통계 기반 참고치입니다.","buyerType":"법인 사옥형","budgetRange":{"min":50,"max":80,"display":"50억~80억"},"preferredRegions":"강남","성수","assetTypes":"꼬마빌딩","사옥용","purchasePurpose":"사옥용 매입","mustHave":"초역세권","주차","niceToHave":"테라스","루프탑","riskTolerance":"medium","financingNote":"자본금 50% 준비","missingQuestions":"구체적인 입주 시기가 언제인가요?","선호하는 수익률이 있나요?","privacyNotes":"연락처 비공개","fitReasons":"매수자 예산(50-80억)에 부합하는 매물입니다.","요청하신 성수/강남 권역에 해당합니다.","cautionReasons":"요청한 용도와 달리 명도 협의가 다소 필요합니다.","recommendedNextAction":"현장 답사 제안","kakaoMessage":"안녕하세요! 요청하신 조건에 부합하는 추천 매물이 있어 안내해 드립니다. 확인해보시고 피드백 부탁드립니다.","title":"강남 역삼역 초역세권 오피스 사옥용 빌딩 매각","shortSummary":"역삼역 도보 5분 거리의 준신축급 대형 오피스빌딩입니다.","dealPoints":"초역세권","사옥 최적","cautionPoints":"명도 조율 필요","hiddenInfoNotice":"보증금 및 지번은 인가 후 확인 가능","gateMessage":"G1 등급 등록이 필요합니다.","kakaoText":"강남 역삼역 오피스 빌딩 매각 안내입니다.","exactUnitCandidate":"101호","floor":"1층","areaSqmText":"150㎡","spaceType":"office","depositText":"5000만","monthlyRentText":"400만","maintenanceFeeText":"50만","availableFromText":"즉시입주","leaseTermMonthsText":"24","incentivesText":"렌트프리 2개월","restrictions":,"landlordIdentity":"김성수","currentTenant":"스타트업","vacancyReason":"이전 확장","rentNegotiation":"협의 가능","region":"성수동","areaSqm":150,"deposit":5000,"monthlyRent":400,"maintenanceFee":50,"availableFrom":"즉시입주","leaseTermMonths":24,"incentives":{"rentFreeMonths":2,"interiorSupport":"일부 인테리어 지원","freeRentDetail":"렌트프리 2개월 지원"},"shortSummaryLease":"성수역 도보 5분 거리 1층 리테일 상가 매물입니다."}</a:t>
             </a:r>
             <a:endParaRPr lang="en-US" sz="1400" dirty="0"/>
           </a:p>
@@ -6059,7 +6059,7 @@
                 <a:ea typeface="Pretendard" pitchFamily="34" charset="-122"/>
                 <a:cs typeface="Pretendard" pitchFamily="34" charset="-120"/>
               </a:rPr>
-              <a:t>건축물 개요 및 물리 스펙</a:t>
+              <a:t>시장 포지셔닝 및 시세 갭 분석</a:t>
             </a:r>
             <a:endParaRPr lang="en-US" sz="1100" dirty="0"/>
           </a:p>
@@ -6101,7 +6101,7 @@
                 <a:ea typeface="Pretendard" pitchFamily="34" charset="-122"/>
                 <a:cs typeface="Pretendard" pitchFamily="34" charset="-120"/>
               </a:rPr>
-              <a:t>{"ok"</a:t>
+              <a:t>평당 매매가</a:t>
             </a:r>
             <a:endParaRPr lang="en-US" sz="1400" dirty="0"/>
           </a:p>
@@ -6143,7 +6143,7 @@
                 <a:ea typeface="Pretendard" pitchFamily="34" charset="-122"/>
                 <a:cs typeface="Pretendard" pitchFamily="34" charset="-120"/>
               </a:rPr>
-              <a:t>true,"mocked":true,"extractedFields":{"area_signal":"역삼","asset_type":"오피스빌딩","price_band":"300억","size_signal":"3000평(약 9917.4㎡)"},"extractedFacts":{"region":"역삼","exactAddressCandidate":"역삼동 742-1","assetType":"오피스빌딩","priceText":"300억","sizeText":"3000평(약 9917.4㎡)","currentUse":"오피스","currentUseSignal":"근린생활시설","leaseSignal":"임대중","vacancySignal":"공실없음","tenantNames":"쿠팡","네이버","unitRentTexts":"301호: 1500만","sellerMotivationText":"자산 효율화","brokerNotes":"초역세권 매물"},"detectedSensitiveFields":"exact_address","tenant_name","ambiguousFields":,"warnings":,"areaSignal":"역삼","assetType":"오피스빌딩","priceBand":"300억","sizeSignal":"3000평(약 9917.4㎡)","dealType":"매각","buildingName":"역삼 센트럴타워","exactAddress":"역삼동 742-1","totalFloorArea":9917.3,"buildYear":2015,"currentUseSignal":"근린생활시설","vacancySignal":"공실 없음","fitSummary":"초역세권 근생 빌딩으로 시행/사옥 매입에 최적화","cautionSummary":"주요 임차 업종 만기 조율 필요","hiddenFields":"exact_address","seller_motivation","confidence":{"areaSignal":"confirmed","assetType":"confirmed","priceBand":"ai_hypothesis","fitSummary":"ai_hypothesis"},"missingData":"sizeSignal","boundaryNote":"본 자료는 실거래 통계 기반 참고치입니다.","buyerType":"법인 사옥형","budgetRange":{"min":50,"max":80,"display":"50억~80억"},"preferredRegions":"강남","성수","assetTypes":"꼬마빌딩","사옥용","purchasePurpose":"사옥용 매입","mustHave":"초역세권","주차","niceToHave":"테라스","루프탑","riskTolerance":"medium","financingNote":"자본금 50% 준비","missingQuestions":"구체적인 입주 시기가 언제인가요?","선호하는 수익률이 있나요?","privacyNotes":"연락처 비공개","fitReasons":"매수자 예산(50-80억)에 부합하는 매물입니다.","요청하신 성수/강남 권역에 해당합니다.","cautionReasons":"요청한 용도와 달리 명도 협의가 다소 필요합니다.","recommendedNextAction":"현장 답사 제안","kakaoMessage":"안녕하세요! 요청하신 조건에 부합하는 추천 매물이 있어 안내해 드립니다. 확인해보시고 피드백 부탁드립니다.","title":"강남 역삼역 초역세권 오피스 사옥용 빌딩 매각","shortSummary":"역삼역 도보 5분 거리의 준신축급 대형 오피스빌딩입니다.","dealPoints":"초역세권","사옥 최적","cautionPoints":"명도 조율 필요","hiddenInfoNotice":"보증금 및 지번은 인가 후 확인 가능","gateMessage":"G1 등급 등록이 필요합니다.","kakaoText":"강남 역삼역 오피스 빌딩 매각 안내입니다.","exactUnitCandidate":"101호","floor":"1층","areaSqmText":"150㎡","spaceType":"office","depositText":"5000만","monthlyRentText":"400만","maintenanceFeeText":"50만","availableFromText":"즉시입주","leaseTermMonthsText":"24","incentivesText":"렌트프리 2개월","restrictions":,"landlordIdentity":"김성수","currentTenant":"스타트업","vacancyReason":"이전 확장","rentNegotiation":"협의 가능","region":"성수동","areaSqm":150,"deposit":5000,"monthlyRent":400,"maintenanceFee":50,"availableFrom":"즉시입주","leaseTermMonths":24,"incentives":{"rentFreeMonths":2,"interiorSupport":"일부 인테리어 지원","freeRentDetail":"렌트프리 2개월 지원"},"shortSummaryLease":"성수역 도보 5분 거리 1층 리테일 상가 매물입니다."}</a:t>
+              <a:t>매각 희망가 기준</a:t>
             </a:r>
             <a:endParaRPr lang="en-US" sz="1400" dirty="0"/>
           </a:p>
@@ -6152,6 +6152,113 @@
       <p:sp>
         <p:nvSpPr>
           <p:cNvPr id="9" name="Shape 7"/>
+          <p:cNvSpPr/>
+          <p:nvPr/>
+        </p:nvSpPr>
+        <p:spPr>
+          <a:xfrm>
+            <a:off x="566928" y="2048256"/>
+            <a:ext cx="6858000" cy="0"/>
+          </a:xfrm>
+          <a:prstGeom prst="line">
+            <a:avLst/>
+          </a:prstGeom>
+          <a:noFill/>
+          <a:ln w="3810">
+            <a:solidFill>
+              <a:srgbClr val="CBD5E0"/>
+            </a:solidFill>
+            <a:prstDash val="solid"/>
+          </a:ln>
+        </p:spPr>
+      </p:sp>
+      <p:sp>
+        <p:nvSpPr>
+          <p:cNvPr id="10" name="Text 8"/>
+          <p:cNvSpPr/>
+          <p:nvPr/>
+        </p:nvSpPr>
+        <p:spPr>
+          <a:xfrm>
+            <a:off x="566928" y="2048256"/>
+            <a:ext cx="2606040" cy="402336"/>
+          </a:xfrm>
+          <a:prstGeom prst="rect">
+            <a:avLst/>
+          </a:prstGeom>
+          <a:noFill/>
+          <a:ln/>
+        </p:spPr>
+        <p:txBody>
+          <a:bodyPr wrap="square" lIns="0" tIns="0" rIns="0" bIns="0" rtlCol="0" anchor="ctr"/>
+          <a:lstStyle/>
+          <a:p>
+            <a:pPr indent="0" marL="0">
+              <a:lnSpc>
+                <a:spcPct val="120000"/>
+              </a:lnSpc>
+              <a:buNone/>
+            </a:pPr>
+            <a:r>
+              <a:rPr lang="en-US" sz="1400" dirty="0">
+                <a:solidFill>
+                  <a:srgbClr val="718096"/>
+                </a:solidFill>
+                <a:latin typeface="Pretendard" pitchFamily="34" charset="0"/>
+                <a:ea typeface="Pretendard" pitchFamily="34" charset="-122"/>
+                <a:cs typeface="Pretendard" pitchFamily="34" charset="-120"/>
+              </a:rPr>
+              <a:t>입지 프리미엄</a:t>
+            </a:r>
+            <a:endParaRPr lang="en-US" sz="1400" dirty="0"/>
+          </a:p>
+        </p:txBody>
+      </p:sp>
+      <p:sp>
+        <p:nvSpPr>
+          <p:cNvPr id="11" name="Text 9"/>
+          <p:cNvSpPr/>
+          <p:nvPr/>
+        </p:nvSpPr>
+        <p:spPr>
+          <a:xfrm>
+            <a:off x="3172968" y="2048256"/>
+            <a:ext cx="4251960" cy="402336"/>
+          </a:xfrm>
+          <a:prstGeom prst="rect">
+            <a:avLst/>
+          </a:prstGeom>
+          <a:noFill/>
+          <a:ln/>
+        </p:spPr>
+        <p:txBody>
+          <a:bodyPr wrap="square" lIns="0" tIns="0" rIns="0" bIns="0" rtlCol="0" anchor="ctr"/>
+          <a:lstStyle/>
+          <a:p>
+            <a:pPr indent="0" marL="0">
+              <a:lnSpc>
+                <a:spcPct val="120000"/>
+              </a:lnSpc>
+              <a:buNone/>
+            </a:pPr>
+            <a:r>
+              <a:rPr lang="en-US" sz="1400" b="1" dirty="0">
+                <a:solidFill>
+                  <a:srgbClr val="10161F"/>
+                </a:solidFill>
+                <a:latin typeface="Pretendard" pitchFamily="34" charset="0"/>
+                <a:ea typeface="Pretendard" pitchFamily="34" charset="-122"/>
+                <a:cs typeface="Pretendard" pitchFamily="34" charset="-120"/>
+              </a:rPr>
+              <a:t>입지 및 접근성 우수</a:t>
+            </a:r>
+            <a:endParaRPr lang="en-US" sz="1400" dirty="0"/>
+          </a:p>
+        </p:txBody>
+      </p:sp>
+      <p:sp>
+        <p:nvSpPr>
+          <p:cNvPr id="12" name="Shape 10"/>
           <p:cNvSpPr/>
           <p:nvPr/>
         </p:nvSpPr>
@@ -6174,18 +6281,18 @@
       </p:sp>
       <p:sp>
         <p:nvSpPr>
-          <p:cNvPr id="10" name="Shape 8"/>
+          <p:cNvPr id="13" name="Shape 11"/>
           <p:cNvSpPr/>
           <p:nvPr/>
         </p:nvSpPr>
         <p:spPr>
           <a:xfrm>
             <a:off x="7784287" y="1645920"/>
-            <a:ext cx="3840480" cy="2103120"/>
+            <a:ext cx="3840480" cy="1810512"/>
           </a:xfrm>
           <a:prstGeom prst="roundRect">
             <a:avLst>
-              <a:gd name="adj" fmla="val 2609"/>
+              <a:gd name="adj" fmla="val 3030"/>
             </a:avLst>
           </a:prstGeom>
           <a:solidFill>
@@ -6196,14 +6303,14 @@
       </p:sp>
       <p:sp>
         <p:nvSpPr>
-          <p:cNvPr id="11" name="Shape 9"/>
+          <p:cNvPr id="14" name="Shape 12"/>
           <p:cNvSpPr/>
           <p:nvPr/>
         </p:nvSpPr>
         <p:spPr>
           <a:xfrm>
             <a:off x="7784287" y="1700784"/>
-            <a:ext cx="36576" cy="1993392"/>
+            <a:ext cx="36576" cy="1700784"/>
           </a:xfrm>
           <a:prstGeom prst="rect">
             <a:avLst/>
@@ -6216,7 +6323,7 @@
       </p:sp>
       <p:sp>
         <p:nvSpPr>
-          <p:cNvPr id="12" name="Text 10"/>
+          <p:cNvPr id="15" name="Text 13"/>
           <p:cNvSpPr/>
           <p:nvPr/>
         </p:nvSpPr>
@@ -6244,14 +6351,14 @@
       </p:sp>
       <p:sp>
         <p:nvSpPr>
-          <p:cNvPr id="13" name="Text 11"/>
+          <p:cNvPr id="16" name="Text 14"/>
           <p:cNvSpPr/>
           <p:nvPr/>
         </p:nvSpPr>
         <p:spPr>
           <a:xfrm>
             <a:off x="7967167" y="1975104"/>
-            <a:ext cx="3511296" cy="1700784"/>
+            <a:ext cx="3511296" cy="1408176"/>
           </a:xfrm>
           <a:prstGeom prst="rect">
             <a:avLst/>
@@ -6278,7 +6385,7 @@
                 <a:ea typeface="Pretendard" pitchFamily="34" charset="-122"/>
                 <a:cs typeface="Pretendard" pitchFamily="34" charset="-120"/>
               </a:rPr>
-              <a:t>{"ok":true,"mocked":true,"extractedFields":{"area_signal":"역삼","asset_type":"오피스빌딩","price_band":"300억","size_signal":"3</a:t>
+              <a:t>본 자산의 매각 희망가(115억)를 인근 권역 유사 매물의 거래사례 및 시세와 비교하여 가격 경쟁력을 평가합니다. ### 마켓 포지셔닝 비교</a:t>
             </a:r>
             <a:endParaRPr lang="en-US" sz="930" dirty="0"/>
           </a:p>
@@ -6286,7 +6393,7 @@
       </p:sp>
       <p:sp>
         <p:nvSpPr>
-          <p:cNvPr id="14" name="Text 12"/>
+          <p:cNvPr id="17" name="Text 15"/>
           <p:cNvSpPr/>
           <p:nvPr/>
         </p:nvSpPr>
@@ -6325,7 +6432,7 @@
       </p:sp>
       <p:sp>
         <p:nvSpPr>
-          <p:cNvPr id="15" name="Text 13"/>
+          <p:cNvPr id="18" name="Text 16"/>
           <p:cNvSpPr/>
           <p:nvPr/>
         </p:nvSpPr>
@@ -7458,7 +7565,7 @@
                           <a:ea typeface="Pretendard" pitchFamily="34" charset="-122"/>
                           <a:cs typeface="Pretendard" pitchFamily="34" charset="-120"/>
                         </a:rPr>
-                        <a:t>10% </a:t>
+                        <a:t>산출 </a:t>
                       </a:r>
                       <a:pPr indent="0" marL="0">
                         <a:buNone/>
@@ -7472,7 +7579,7 @@
                           <a:ea typeface="Pretendard" pitchFamily="34" charset="-122"/>
                           <a:cs typeface="Pretendard" pitchFamily="34" charset="-120"/>
                         </a:rPr>
-                        <a:t>~ </a:t>
+                        <a:t>불가 </a:t>
                       </a:r>
                       <a:pPr indent="0" marL="0">
                         <a:buNone/>
@@ -7486,7 +7593,35 @@
                           <a:ea typeface="Pretendard" pitchFamily="34" charset="-122"/>
                           <a:cs typeface="Pretendard" pitchFamily="34" charset="-120"/>
                         </a:rPr>
-                        <a:t>20%</a:t>
+                        <a:t>(매도가 </a:t>
+                      </a:r>
+                      <a:pPr indent="0" marL="0">
+                        <a:buNone/>
+                      </a:pPr>
+                      <a:r>
+                        <a:rPr lang="en-US" sz="1300" dirty="0">
+                          <a:solidFill>
+                            <a:srgbClr val="10161F"/>
+                          </a:solidFill>
+                          <a:latin typeface="Pretendard" pitchFamily="34" charset="0"/>
+                          <a:ea typeface="Pretendard" pitchFamily="34" charset="-122"/>
+                          <a:cs typeface="Pretendard" pitchFamily="34" charset="-120"/>
+                        </a:rPr>
+                        <a:t>데이터 </a:t>
+                      </a:r>
+                      <a:pPr indent="0" marL="0">
+                        <a:buNone/>
+                      </a:pPr>
+                      <a:r>
+                        <a:rPr lang="en-US" sz="1300" dirty="0">
+                          <a:solidFill>
+                            <a:srgbClr val="10161F"/>
+                          </a:solidFill>
+                          <a:latin typeface="Pretendard" pitchFamily="34" charset="0"/>
+                          <a:ea typeface="Pretendard" pitchFamily="34" charset="-122"/>
+                          <a:cs typeface="Pretendard" pitchFamily="34" charset="-120"/>
+                        </a:rPr>
+                        <a:t>부족)</a:t>
                       </a:r>
                       <a:endParaRPr lang="en-US" sz="1300" dirty="0">
                         <a:latin typeface="Pretendard" charset="0"/>
@@ -7660,8 +7795,8 @@
         </p:nvSpPr>
         <p:spPr>
           <a:xfrm>
-            <a:off x="566928" y="3493008"/>
-            <a:ext cx="11057839" cy="384048"/>
+            <a:off x="566928" y="6382512"/>
+            <a:ext cx="7315200" cy="219456"/>
           </a:xfrm>
           <a:prstGeom prst="rect">
             <a:avLst/>
@@ -7674,68 +7809,26 @@
           <a:lstStyle/>
           <a:p>
             <a:pPr indent="0" marL="0">
-              <a:lnSpc>
-                <a:spcPct val="125000"/>
-              </a:lnSpc>
-              <a:buNone/>
-            </a:pPr>
-            <a:r>
-              <a:rPr lang="en-US" sz="780" dirty="0">
-                <a:solidFill>
-                  <a:srgbClr val="A0AEC0"/>
+              <a:buNone/>
+            </a:pPr>
+            <a:r>
+              <a:rPr lang="en-US" sz="800" dirty="0">
+                <a:solidFill>
+                  <a:srgbClr val="718096"/>
                 </a:solidFill>
                 <a:latin typeface="Pretendard" pitchFamily="34" charset="0"/>
                 <a:ea typeface="Pretendard" pitchFamily="34" charset="-122"/>
                 <a:cs typeface="Pretendard" pitchFamily="34" charset="-120"/>
               </a:rPr>
-              <a:t>[참고] 리모델링 또는 밸류업 후 단기 매각(Trading)을 통한 Capital Gain 실현 시나리오입니다.</a:t>
-            </a:r>
-            <a:endParaRPr lang="en-US" sz="780" dirty="0"/>
+              <a:t>크리딜   |   </a:t>
+            </a:r>
+            <a:endParaRPr lang="en-US" sz="800" dirty="0"/>
           </a:p>
         </p:txBody>
       </p:sp>
       <p:sp>
         <p:nvSpPr>
           <p:cNvPr id="8" name="Text 5"/>
-          <p:cNvSpPr/>
-          <p:nvPr/>
-        </p:nvSpPr>
-        <p:spPr>
-          <a:xfrm>
-            <a:off x="566928" y="6382512"/>
-            <a:ext cx="7315200" cy="219456"/>
-          </a:xfrm>
-          <a:prstGeom prst="rect">
-            <a:avLst/>
-          </a:prstGeom>
-          <a:noFill/>
-          <a:ln/>
-        </p:spPr>
-        <p:txBody>
-          <a:bodyPr wrap="square" lIns="0" tIns="0" rIns="0" bIns="0" rtlCol="0" anchor="ctr"/>
-          <a:lstStyle/>
-          <a:p>
-            <a:pPr indent="0" marL="0">
-              <a:buNone/>
-            </a:pPr>
-            <a:r>
-              <a:rPr lang="en-US" sz="800" dirty="0">
-                <a:solidFill>
-                  <a:srgbClr val="718096"/>
-                </a:solidFill>
-                <a:latin typeface="Pretendard" pitchFamily="34" charset="0"/>
-                <a:ea typeface="Pretendard" pitchFamily="34" charset="-122"/>
-                <a:cs typeface="Pretendard" pitchFamily="34" charset="-120"/>
-              </a:rPr>
-              <a:t>크리딜   |   </a:t>
-            </a:r>
-            <a:endParaRPr lang="en-US" sz="800" dirty="0"/>
-          </a:p>
-        </p:txBody>
-      </p:sp>
-      <p:sp>
-        <p:nvSpPr>
-          <p:cNvPr id="9" name="Text 6"/>
           <p:cNvSpPr/>
           <p:nvPr/>
         </p:nvSpPr>
@@ -7950,11 +8043,11 @@
         <p:spPr>
           <a:xfrm>
             <a:off x="566928" y="1417320"/>
-            <a:ext cx="3515258" cy="3657600"/>
+            <a:ext cx="11057839" cy="3657600"/>
           </a:xfrm>
           <a:prstGeom prst="roundRect">
             <a:avLst>
-              <a:gd name="adj" fmla="val 1561"/>
+              <a:gd name="adj" fmla="val 1500"/>
             </a:avLst>
           </a:prstGeom>
           <a:solidFill>
@@ -7977,7 +8070,7 @@
         <p:spPr>
           <a:xfrm>
             <a:off x="566928" y="1417320"/>
-            <a:ext cx="3515258" cy="45720"/>
+            <a:ext cx="11057839" cy="45720"/>
           </a:xfrm>
           <a:prstGeom prst="rect">
             <a:avLst/>
@@ -7997,7 +8090,7 @@
         <p:spPr>
           <a:xfrm>
             <a:off x="795528" y="1618488"/>
-            <a:ext cx="3058058" cy="292608"/>
+            <a:ext cx="10600639" cy="292608"/>
           </a:xfrm>
           <a:prstGeom prst="rect">
             <a:avLst/>
@@ -8021,7 +8114,7 @@
                 <a:ea typeface="Pretendard" pitchFamily="34" charset="-122"/>
                 <a:cs typeface="Pretendard" pitchFamily="34" charset="-120"/>
               </a:rPr>
-              <a:t>건물 물리적 상태</a:t>
+              <a:t>용도 리스크</a:t>
             </a:r>
             <a:endParaRPr lang="en-US" sz="1350" dirty="0"/>
           </a:p>
@@ -8036,7 +8129,7 @@
         <p:spPr>
           <a:xfrm>
             <a:off x="795528" y="1947672"/>
-            <a:ext cx="3058058" cy="365760"/>
+            <a:ext cx="10600639" cy="365760"/>
           </a:xfrm>
           <a:prstGeom prst="rect">
             <a:avLst/>
@@ -8062,7 +8155,7 @@
                 <a:ea typeface="Pretendard" pitchFamily="34" charset="-122"/>
                 <a:cs typeface="Pretendard" pitchFamily="34" charset="-120"/>
               </a:rPr>
-              <a:t>2017년 준공 신축급 상태 (누수/균열 결함 없음)</a:t>
+              <a:t>—</a:t>
             </a:r>
             <a:endParaRPr lang="en-US" sz="1250" dirty="0"/>
           </a:p>
@@ -8077,7 +8170,7 @@
         <p:spPr>
           <a:xfrm>
             <a:off x="795528" y="2377440"/>
-            <a:ext cx="3058058" cy="2606040"/>
+            <a:ext cx="10600639" cy="2606040"/>
           </a:xfrm>
           <a:prstGeom prst="rect">
             <a:avLst/>
@@ -8107,7 +8200,7 @@
                 <a:ea typeface="Pretendard" pitchFamily="34" charset="-122"/>
                 <a:cs typeface="Pretendard" pitchFamily="34" charset="-120"/>
               </a:rPr>
-              <a:t>준공 10년 미만으로 대규모 수선비용 발생 가능성 낮음</a:t>
+              <a:t>{"ok":true,"mocked":true,"extractedFields":{"area_signal":"역삼","asset_type":"오피스빌딩","price_band":"300억","size_signal":"3000평(약 9917.4㎡)"},"extractedFacts":{"region":"역삼","exactAddressCandidate":"역삼동 7</a:t>
             </a:r>
             <a:endParaRPr lang="en-US" sz="1100" dirty="0"/>
           </a:p>
@@ -8121,12 +8214,12 @@
         </p:nvSpPr>
         <p:spPr>
           <a:xfrm>
-            <a:off x="4338218" y="1417320"/>
-            <a:ext cx="3515258" cy="3657600"/>
+            <a:off x="566928" y="5193792"/>
+            <a:ext cx="11057839" cy="621792"/>
           </a:xfrm>
           <a:prstGeom prst="roundRect">
             <a:avLst>
-              <a:gd name="adj" fmla="val 1561"/>
+              <a:gd name="adj" fmla="val 8824"/>
             </a:avLst>
           </a:prstGeom>
           <a:solidFill>
@@ -8142,34 +8235,14 @@
       </p:sp>
       <p:sp>
         <p:nvSpPr>
-          <p:cNvPr id="12" name="Shape 10"/>
-          <p:cNvSpPr/>
-          <p:nvPr/>
-        </p:nvSpPr>
-        <p:spPr>
-          <a:xfrm>
-            <a:off x="4338218" y="1417320"/>
-            <a:ext cx="3515258" cy="45720"/>
-          </a:xfrm>
-          <a:prstGeom prst="rect">
-            <a:avLst/>
-          </a:prstGeom>
-          <a:solidFill>
-            <a:srgbClr val="B98A2E"/>
-          </a:solidFill>
-          <a:ln/>
-        </p:spPr>
-      </p:sp>
-      <p:sp>
-        <p:nvSpPr>
-          <p:cNvPr id="13" name="Text 11"/>
-          <p:cNvSpPr/>
-          <p:nvPr/>
-        </p:nvSpPr>
-        <p:spPr>
-          <a:xfrm>
-            <a:off x="4566818" y="1618488"/>
-            <a:ext cx="3058058" cy="292608"/>
+          <p:cNvPr id="12" name="Text 10"/>
+          <p:cNvSpPr/>
+          <p:nvPr/>
+        </p:nvSpPr>
+        <p:spPr>
+          <a:xfrm>
+            <a:off x="795528" y="5193792"/>
+            <a:ext cx="10600639" cy="621792"/>
           </a:xfrm>
           <a:prstGeom prst="rect">
             <a:avLst/>
@@ -8185,377 +8258,53 @@
               <a:buNone/>
             </a:pPr>
             <a:r>
-              <a:rPr lang="en-US" sz="1350" b="1" dirty="0">
-                <a:solidFill>
-                  <a:srgbClr val="977024"/>
+              <a:rPr lang="en-US" sz="1100" dirty="0">
+                <a:solidFill>
+                  <a:srgbClr val="10161F"/>
                 </a:solidFill>
                 <a:latin typeface="Pretendard" pitchFamily="34" charset="0"/>
                 <a:ea typeface="Pretendard" pitchFamily="34" charset="-122"/>
                 <a:cs typeface="Pretendard" pitchFamily="34" charset="-120"/>
               </a:rPr>
-              <a:t>승강기 및 설비</a:t>
-            </a:r>
-            <a:endParaRPr lang="en-US" sz="1350" dirty="0"/>
-          </a:p>
-        </p:txBody>
-      </p:sp>
-      <p:sp>
-        <p:nvSpPr>
-          <p:cNvPr id="14" name="Text 12"/>
-          <p:cNvSpPr/>
-          <p:nvPr/>
-        </p:nvSpPr>
-        <p:spPr>
-          <a:xfrm>
-            <a:off x="4566818" y="1947672"/>
-            <a:ext cx="3058058" cy="365760"/>
-          </a:xfrm>
-          <a:prstGeom prst="rect">
-            <a:avLst/>
-          </a:prstGeom>
-          <a:noFill/>
-          <a:ln/>
-        </p:spPr>
-        <p:txBody>
-          <a:bodyPr wrap="square" lIns="0" tIns="0" rIns="0" bIns="0" rtlCol="0" anchor="ctr">
-            <a:normAutofit/>
-          </a:bodyPr>
+              <a:t>※ 본 리스크 체크는 공부 및 브로커 확인 기반이며, 매수 전 전문 실사팀(변호사/건축사)을 통한 정밀 실사가 필요합니다.</a:t>
+            </a:r>
+            <a:endParaRPr lang="en-US" sz="1100" dirty="0"/>
+          </a:p>
+        </p:txBody>
+      </p:sp>
+      <p:sp>
+        <p:nvSpPr>
+          <p:cNvPr id="13" name="Text 11"/>
+          <p:cNvSpPr/>
+          <p:nvPr/>
+        </p:nvSpPr>
+        <p:spPr>
+          <a:xfrm>
+            <a:off x="566928" y="6382512"/>
+            <a:ext cx="7315200" cy="219456"/>
+          </a:xfrm>
+          <a:prstGeom prst="rect">
+            <a:avLst/>
+          </a:prstGeom>
+          <a:noFill/>
+          <a:ln/>
+        </p:spPr>
+        <p:txBody>
+          <a:bodyPr wrap="square" lIns="0" tIns="0" rIns="0" bIns="0" rtlCol="0" anchor="ctr"/>
           <a:lstStyle/>
           <a:p>
             <a:pPr indent="0" marL="0">
               <a:buNone/>
             </a:pPr>
             <a:r>
-              <a:rPr lang="en-US" sz="1250" b="1" dirty="0">
-                <a:solidFill>
-                  <a:srgbClr val="10161F"/>
+              <a:rPr lang="en-US" sz="800" dirty="0">
+                <a:solidFill>
+                  <a:srgbClr val="718096"/>
                 </a:solidFill>
                 <a:latin typeface="Pretendard" pitchFamily="34" charset="0"/>
                 <a:ea typeface="Pretendard" pitchFamily="34" charset="-122"/>
                 <a:cs typeface="Pretendard" pitchFamily="34" charset="-120"/>
               </a:rPr>
-              <a:t>15인승 침대용 승강기 및 냉난방 설비 양호</a:t>
-            </a:r>
-            <a:endParaRPr lang="en-US" sz="1250" dirty="0"/>
-          </a:p>
-        </p:txBody>
-      </p:sp>
-      <p:sp>
-        <p:nvSpPr>
-          <p:cNvPr id="15" name="Text 13"/>
-          <p:cNvSpPr/>
-          <p:nvPr/>
-        </p:nvSpPr>
-        <p:spPr>
-          <a:xfrm>
-            <a:off x="4566818" y="2377440"/>
-            <a:ext cx="3058058" cy="2606040"/>
-          </a:xfrm>
-          <a:prstGeom prst="rect">
-            <a:avLst/>
-          </a:prstGeom>
-          <a:noFill/>
-          <a:ln/>
-        </p:spPr>
-        <p:txBody>
-          <a:bodyPr wrap="square" lIns="0" tIns="0" rIns="0" bIns="0" rtlCol="0" anchor="t">
-            <a:normAutofit/>
-          </a:bodyPr>
-          <a:lstStyle/>
-          <a:p>
-            <a:pPr marL="342900" indent="-342900">
-              <a:lnSpc>
-                <a:spcPct val="125000"/>
-              </a:lnSpc>
-              <a:buSzPct val="100000"/>
-              <a:buChar char="•"/>
-            </a:pPr>
-            <a:r>
-              <a:rPr lang="en-US" sz="1100" dirty="0">
-                <a:solidFill>
-                  <a:srgbClr val="10161F"/>
-                </a:solidFill>
-                <a:latin typeface="Pretendard" pitchFamily="34" charset="0"/>
-                <a:ea typeface="Pretendard" pitchFamily="34" charset="-122"/>
-                <a:cs typeface="Pretendard" pitchFamily="34" charset="-120"/>
-              </a:rPr>
-              <a:t>주기적 정기 점검 계약 유지로 관리 리스크 최소화</a:t>
-            </a:r>
-            <a:endParaRPr lang="en-US" sz="1100" dirty="0"/>
-          </a:p>
-        </p:txBody>
-      </p:sp>
-      <p:sp>
-        <p:nvSpPr>
-          <p:cNvPr id="16" name="Shape 14"/>
-          <p:cNvSpPr/>
-          <p:nvPr/>
-        </p:nvSpPr>
-        <p:spPr>
-          <a:xfrm>
-            <a:off x="8109509" y="1417320"/>
-            <a:ext cx="3515258" cy="3657600"/>
-          </a:xfrm>
-          <a:prstGeom prst="roundRect">
-            <a:avLst>
-              <a:gd name="adj" fmla="val 1561"/>
-            </a:avLst>
-          </a:prstGeom>
-          <a:solidFill>
-            <a:srgbClr val="F7FAFC"/>
-          </a:solidFill>
-          <a:ln w="6350">
-            <a:solidFill>
-              <a:srgbClr val="CBD5E0"/>
-            </a:solidFill>
-            <a:prstDash val="solid"/>
-          </a:ln>
-        </p:spPr>
-      </p:sp>
-      <p:sp>
-        <p:nvSpPr>
-          <p:cNvPr id="17" name="Shape 15"/>
-          <p:cNvSpPr/>
-          <p:nvPr/>
-        </p:nvSpPr>
-        <p:spPr>
-          <a:xfrm>
-            <a:off x="8109509" y="1417320"/>
-            <a:ext cx="3515258" cy="45720"/>
-          </a:xfrm>
-          <a:prstGeom prst="rect">
-            <a:avLst/>
-          </a:prstGeom>
-          <a:solidFill>
-            <a:srgbClr val="B98A2E"/>
-          </a:solidFill>
-          <a:ln/>
-        </p:spPr>
-      </p:sp>
-      <p:sp>
-        <p:nvSpPr>
-          <p:cNvPr id="18" name="Text 16"/>
-          <p:cNvSpPr/>
-          <p:nvPr/>
-        </p:nvSpPr>
-        <p:spPr>
-          <a:xfrm>
-            <a:off x="8338109" y="1618488"/>
-            <a:ext cx="3058058" cy="292608"/>
-          </a:xfrm>
-          <a:prstGeom prst="rect">
-            <a:avLst/>
-          </a:prstGeom>
-          <a:noFill/>
-          <a:ln/>
-        </p:spPr>
-        <p:txBody>
-          <a:bodyPr wrap="square" lIns="0" tIns="0" rIns="0" bIns="0" rtlCol="0" anchor="ctr"/>
-          <a:lstStyle/>
-          <a:p>
-            <a:pPr indent="0" marL="0">
-              <a:buNone/>
-            </a:pPr>
-            <a:r>
-              <a:rPr lang="en-US" sz="1350" b="1" dirty="0">
-                <a:solidFill>
-                  <a:srgbClr val="977024"/>
-                </a:solidFill>
-                <a:latin typeface="Pretendard" pitchFamily="34" charset="0"/>
-                <a:ea typeface="Pretendard" pitchFamily="34" charset="-122"/>
-                <a:cs typeface="Pretendard" pitchFamily="34" charset="-120"/>
-              </a:rPr>
-              <a:t>임차인 이탈 위험</a:t>
-            </a:r>
-            <a:endParaRPr lang="en-US" sz="1350" dirty="0"/>
-          </a:p>
-        </p:txBody>
-      </p:sp>
-      <p:sp>
-        <p:nvSpPr>
-          <p:cNvPr id="19" name="Text 17"/>
-          <p:cNvSpPr/>
-          <p:nvPr/>
-        </p:nvSpPr>
-        <p:spPr>
-          <a:xfrm>
-            <a:off x="8338109" y="1947672"/>
-            <a:ext cx="3058058" cy="365760"/>
-          </a:xfrm>
-          <a:prstGeom prst="rect">
-            <a:avLst/>
-          </a:prstGeom>
-          <a:noFill/>
-          <a:ln/>
-        </p:spPr>
-        <p:txBody>
-          <a:bodyPr wrap="square" lIns="0" tIns="0" rIns="0" bIns="0" rtlCol="0" anchor="ctr">
-            <a:normAutofit/>
-          </a:bodyPr>
-          <a:lstStyle/>
-          <a:p>
-            <a:pPr indent="0" marL="0">
-              <a:buNone/>
-            </a:pPr>
-            <a:r>
-              <a:rPr lang="en-US" sz="1250" b="1" dirty="0">
-                <a:solidFill>
-                  <a:srgbClr val="10161F"/>
-                </a:solidFill>
-                <a:latin typeface="Pretendard" pitchFamily="34" charset="0"/>
-                <a:ea typeface="Pretendard" pitchFamily="34" charset="-122"/>
-                <a:cs typeface="Pretendard" pitchFamily="34" charset="-120"/>
-              </a:rPr>
-              <a:t>병의원/약국 인테리어 투자비(호실당 5억↑) 존속</a:t>
-            </a:r>
-            <a:endParaRPr lang="en-US" sz="1250" dirty="0"/>
-          </a:p>
-        </p:txBody>
-      </p:sp>
-      <p:sp>
-        <p:nvSpPr>
-          <p:cNvPr id="20" name="Text 18"/>
-          <p:cNvSpPr/>
-          <p:nvPr/>
-        </p:nvSpPr>
-        <p:spPr>
-          <a:xfrm>
-            <a:off x="8338109" y="2377440"/>
-            <a:ext cx="3058058" cy="2606040"/>
-          </a:xfrm>
-          <a:prstGeom prst="rect">
-            <a:avLst/>
-          </a:prstGeom>
-          <a:noFill/>
-          <a:ln/>
-        </p:spPr>
-        <p:txBody>
-          <a:bodyPr wrap="square" lIns="0" tIns="0" rIns="0" bIns="0" rtlCol="0" anchor="t">
-            <a:normAutofit/>
-          </a:bodyPr>
-          <a:lstStyle/>
-          <a:p>
-            <a:pPr marL="342900" indent="-342900">
-              <a:lnSpc>
-                <a:spcPct val="125000"/>
-              </a:lnSpc>
-              <a:buSzPct val="100000"/>
-              <a:buChar char="•"/>
-            </a:pPr>
-            <a:r>
-              <a:rPr lang="en-US" sz="1100" dirty="0">
-                <a:solidFill>
-                  <a:srgbClr val="10161F"/>
-                </a:solidFill>
-                <a:latin typeface="Pretendard" pitchFamily="34" charset="0"/>
-                <a:ea typeface="Pretendard" pitchFamily="34" charset="-122"/>
-                <a:cs typeface="Pretendard" pitchFamily="34" charset="-120"/>
-              </a:rPr>
-              <a:t>WALE 3.5년 확보 및 만기 6개월 전 재계약 협상 개시</a:t>
-            </a:r>
-            <a:endParaRPr lang="en-US" sz="1100" dirty="0"/>
-          </a:p>
-        </p:txBody>
-      </p:sp>
-      <p:sp>
-        <p:nvSpPr>
-          <p:cNvPr id="21" name="Shape 19"/>
-          <p:cNvSpPr/>
-          <p:nvPr/>
-        </p:nvSpPr>
-        <p:spPr>
-          <a:xfrm>
-            <a:off x="566928" y="5193792"/>
-            <a:ext cx="11057839" cy="621792"/>
-          </a:xfrm>
-          <a:prstGeom prst="roundRect">
-            <a:avLst>
-              <a:gd name="adj" fmla="val 8824"/>
-            </a:avLst>
-          </a:prstGeom>
-          <a:solidFill>
-            <a:srgbClr val="F7FAFC"/>
-          </a:solidFill>
-          <a:ln w="6350">
-            <a:solidFill>
-              <a:srgbClr val="CBD5E0"/>
-            </a:solidFill>
-            <a:prstDash val="solid"/>
-          </a:ln>
-        </p:spPr>
-      </p:sp>
-      <p:sp>
-        <p:nvSpPr>
-          <p:cNvPr id="22" name="Text 20"/>
-          <p:cNvSpPr/>
-          <p:nvPr/>
-        </p:nvSpPr>
-        <p:spPr>
-          <a:xfrm>
-            <a:off x="795528" y="5193792"/>
-            <a:ext cx="10600639" cy="621792"/>
-          </a:xfrm>
-          <a:prstGeom prst="rect">
-            <a:avLst/>
-          </a:prstGeom>
-          <a:noFill/>
-          <a:ln/>
-        </p:spPr>
-        <p:txBody>
-          <a:bodyPr wrap="square" lIns="0" tIns="0" rIns="0" bIns="0" rtlCol="0" anchor="ctr"/>
-          <a:lstStyle/>
-          <a:p>
-            <a:pPr indent="0" marL="0">
-              <a:buNone/>
-            </a:pPr>
-            <a:r>
-              <a:rPr lang="en-US" sz="1100" dirty="0">
-                <a:solidFill>
-                  <a:srgbClr val="10161F"/>
-                </a:solidFill>
-                <a:latin typeface="Pretendard" pitchFamily="34" charset="0"/>
-                <a:ea typeface="Pretendard" pitchFamily="34" charset="-122"/>
-                <a:cs typeface="Pretendard" pitchFamily="34" charset="-120"/>
-              </a:rPr>
-              <a:t>실사 총평: 자산의 물리적·권리적 하자가 없으며, 세부 임대차 계약서 및 등기사항증명서는 LOI 접수 후 원본 열람 가능합니다.</a:t>
-            </a:r>
-            <a:endParaRPr lang="en-US" sz="1100" dirty="0"/>
-          </a:p>
-        </p:txBody>
-      </p:sp>
-      <p:sp>
-        <p:nvSpPr>
-          <p:cNvPr id="23" name="Text 21"/>
-          <p:cNvSpPr/>
-          <p:nvPr/>
-        </p:nvSpPr>
-        <p:spPr>
-          <a:xfrm>
-            <a:off x="566928" y="6382512"/>
-            <a:ext cx="7315200" cy="219456"/>
-          </a:xfrm>
-          <a:prstGeom prst="rect">
-            <a:avLst/>
-          </a:prstGeom>
-          <a:noFill/>
-          <a:ln/>
-        </p:spPr>
-        <p:txBody>
-          <a:bodyPr wrap="square" lIns="0" tIns="0" rIns="0" bIns="0" rtlCol="0" anchor="ctr"/>
-          <a:lstStyle/>
-          <a:p>
-            <a:pPr indent="0" marL="0">
-              <a:buNone/>
-            </a:pPr>
-            <a:r>
-              <a:rPr lang="en-US" sz="800" dirty="0">
-                <a:solidFill>
-                  <a:srgbClr val="718096"/>
-                </a:solidFill>
-                <a:latin typeface="Pretendard" pitchFamily="34" charset="0"/>
-                <a:ea typeface="Pretendard" pitchFamily="34" charset="-122"/>
-                <a:cs typeface="Pretendard" pitchFamily="34" charset="-120"/>
-              </a:rPr>
               <a:t>크리딜   |   </a:t>
             </a:r>
             <a:endParaRPr lang="en-US" sz="800" dirty="0"/>
@@ -8564,7 +8313,7 @@
       </p:sp>
       <p:sp>
         <p:nvSpPr>
-          <p:cNvPr id="24" name="Text 22"/>
+          <p:cNvPr id="14" name="Text 12"/>
           <p:cNvSpPr/>
           <p:nvPr/>
         </p:nvSpPr>
@@ -8770,45 +8519,6 @@
           </a:p>
         </p:txBody>
       </p:sp>
-      <p:sp>
-        <p:nvSpPr>
-          <p:cNvPr id="6" name="Text 4"/>
-          <p:cNvSpPr/>
-          <p:nvPr/>
-        </p:nvSpPr>
-        <p:spPr>
-          <a:xfrm>
-            <a:off x="1133856" y="1005840"/>
-            <a:ext cx="10490911" cy="237744"/>
-          </a:xfrm>
-          <a:prstGeom prst="rect">
-            <a:avLst/>
-          </a:prstGeom>
-          <a:noFill/>
-          <a:ln/>
-        </p:spPr>
-        <p:txBody>
-          <a:bodyPr wrap="square" lIns="0" tIns="0" rIns="0" bIns="0" rtlCol="0" anchor="ctr"/>
-          <a:lstStyle/>
-          <a:p>
-            <a:pPr indent="0" marL="0">
-              <a:buNone/>
-            </a:pPr>
-            <a:r>
-              <a:rPr lang="en-US" sz="1100" dirty="0">
-                <a:solidFill>
-                  <a:srgbClr val="718096"/>
-                </a:solidFill>
-                <a:latin typeface="Pretendard" pitchFamily="34" charset="0"/>
-                <a:ea typeface="Pretendard" pitchFamily="34" charset="-122"/>
-                <a:cs typeface="Pretendard" pitchFamily="34" charset="-120"/>
-              </a:rPr>
-              <a:t>밸류업 시나리오 (AI 추정)</a:t>
-            </a:r>
-            <a:endParaRPr lang="en-US" sz="1100" dirty="0"/>
-          </a:p>
-        </p:txBody>
-      </p:sp>
       <p:graphicFrame>
         <p:nvGraphicFramePr>
           <p:cNvPr id="9" name="Table 0"/>
@@ -8824,7 +8534,7 @@
           </p:nvPr>
         </p:nvGraphicFramePr>
         <p:xfrm>
-          <a:off x="566928" y="4178808"/>
+          <a:off x="566928" y="4023360"/>
           <a:ext cx="11057839" cy="914400"/>
         </p:xfrm>
         <a:graphic>
@@ -9931,13 +9641,13 @@
       </p:graphicFrame>
       <p:sp>
         <p:nvSpPr>
-          <p:cNvPr id="8" name="Shape 5"/>
-          <p:cNvSpPr/>
-          <p:nvPr/>
-        </p:nvSpPr>
-        <p:spPr>
-          <a:xfrm>
-            <a:off x="566928" y="5349240"/>
+          <p:cNvPr id="7" name="Shape 4"/>
+          <p:cNvSpPr/>
+          <p:nvPr/>
+        </p:nvSpPr>
+        <p:spPr>
+          <a:xfrm>
+            <a:off x="566928" y="5193792"/>
             <a:ext cx="11057839" cy="804672"/>
           </a:xfrm>
           <a:prstGeom prst="roundRect">
@@ -9958,13 +9668,13 @@
       </p:sp>
       <p:sp>
         <p:nvSpPr>
-          <p:cNvPr id="9" name="Text 6"/>
-          <p:cNvSpPr/>
-          <p:nvPr/>
-        </p:nvSpPr>
-        <p:spPr>
-          <a:xfrm>
-            <a:off x="749808" y="5458968"/>
+          <p:cNvPr id="8" name="Text 5"/>
+          <p:cNvSpPr/>
+          <p:nvPr/>
+        </p:nvSpPr>
+        <p:spPr>
+          <a:xfrm>
+            <a:off x="749808" y="5303520"/>
             <a:ext cx="1691640" cy="256032"/>
           </a:xfrm>
           <a:prstGeom prst="rect">
@@ -9997,13 +9707,13 @@
       </p:sp>
       <p:sp>
         <p:nvSpPr>
-          <p:cNvPr id="10" name="Text 7"/>
-          <p:cNvSpPr/>
-          <p:nvPr/>
-        </p:nvSpPr>
-        <p:spPr>
-          <a:xfrm>
-            <a:off x="2487168" y="5422392"/>
+          <p:cNvPr id="9" name="Text 6"/>
+          <p:cNvSpPr/>
+          <p:nvPr/>
+        </p:nvSpPr>
+        <p:spPr>
+          <a:xfrm>
+            <a:off x="2487168" y="5266944"/>
             <a:ext cx="8954719" cy="658368"/>
           </a:xfrm>
           <a:prstGeom prst="rect">
@@ -10031,7 +9741,7 @@
                 <a:ea typeface="Pretendard" pitchFamily="34" charset="-122"/>
                 <a:cs typeface="Pretendard" pitchFamily="34" charset="-120"/>
               </a:rPr>
-              <a:t>{"ok":true,"mocked":true,"extractedFields":{"area_signal":"역삼","asset_type":"오피스빌딩","price_band":"300억","size_signal":"3000평(약 9917.4㎡)"},"extractedFacts":{"region":"역삼","exactAddressCandidate":"역삼동 742-1","assetType":"오피스빌딩","priceText":"300억","sizeText":"3000평(약 9917.4㎡)","currentUse":"오피스","currentUseSignal":"근린생활시설","leaseSignal":"임대중","vacancySignal":"공실없음","tenantNames":["쿠팡","네이버"],"unitRentTexts":["301호: 1500만"],"sellerMotivationText":"자산 효율화","brokerNotes":["초역세권 매물"]},"detectedSensitiveFields":["exact_address","tenant_name"],"ambiguousFields":[],"warnings":[],"areaSignal":"역삼","assetType":"오피스빌딩","priceBand":"300억","sizeSignal":"3000평(약 9917.4㎡)","dealType":"매각","buildingName":"역삼 센트럴타워","exactAddress":"역삼동 742-1","totalFloorArea":9917.3,"buildYear":2015,"currentUseSignal":"근린생활시설","vacancySignal":"공실 없음","fitSummary":"초역세권 근생 빌딩으로 시행/사옥 매입에 최적화","cautionSummary":"주요 임차 업종 만기 조율 필요","hiddenFields":["exact_address","seller_motivation"],"confidence":{"areaSignal":"confirmed","assetType":"confirmed","priceBand":"ai_hypothesis","fitSummary":"ai_hypothesis"},"missingData":["sizeSignal"],"boundaryNote":"본 자료는 실거래 통계 기반 참고치입니다.","buyerType":"법인 사옥형","budgetRange":{"min":50,"max":80,"display":"50억~80억"},"preferredRegions":["강남","성수"],"assetTypes":["꼬마빌딩","사옥용"],"purchasePurpose":"사옥용 매입","mustHave":["초역세권","주차"],"niceToHave":["테라스","루프탑"],"riskTolerance":"medium","financingNote":"자본금 50% 준비","missingQuestions":["구체적인 입주 시기가 언제인가요?","선호하는 수익률이 있나요?"],"privacyNotes":["연락처 비공개"],"fitReasons":["매수자 예산(50-80억)에 부합하는 매물입니다.","요청하신 성수/강남 권역에 해당합니다."],"cautionReasons":["요청한 용도와 달리 명도 협의가 다소 필요합니다."],"recommendedNextAction":"현장 답사 제안","kakaoMessage":"안녕하세요! 요청하신 조건에 부합하는 추천 매물이 있어 안내해 드립니다. 확인해보시고 피드백 부탁드립니다.","title":"강남 역삼역 초역세권 오피스 사옥용 빌딩 매각","shortSummary":"역삼역 도보 5분 거리의 준신축급 대형 오피스빌딩입니다.","dealPoints":["초역세권","사옥 최적"],"cautionPoints":["명도 조율 필요"],"hiddenInfoNotice":["보증금 및 지번은 인가 후 확인 가능"],"gateMessage":"G1 등급 등록이 필요합니다.","kakaoText":"강남 역삼역 오피스 빌딩 매각 안내입니다.","exactUnitCandidate":"101호","floor":"1층","areaSqmText":"150㎡","spaceType":"office","depositText":"5000만","monthlyRentText":"400만","maintenanceFeeText":"50만","availableFromText":"즉시입주","leaseTermMonthsText":"24","incentivesText":"렌트프리 2개월","restrictions":[],"landlordIdentity":"김성수","currentTenant":"스타트업","vacancyReason":"이전 확장","rentNegotiation":"협의 가능","region":"성수동","areaSqm":150,"deposit":5000,"monthlyRent":400,"maintenanceFee":50,"availableFrom":"즉시입주","leaseTermMonths":24,"incentives":{"rentFreeMonths":2,"interiorSupport":"일부 인테리어 지원","freeRentDetail":"렌트프리 2개월 지원"},"shortSummaryLease":"성수역 도보 5분 거리 1층 리테일 상가 매물입니다."}</a:t>
+              <a:t>{"ok":true,"mocked":true,"extractedFields":{"area_signal":"역삼","asset_type":"오피스빌딩","price_band":"300억","size_signal":"3000평(약 9917.4㎡)"},"extractedFacts":{"region":"역삼","exactAddressCandidate":"역삼동 742-1","assetType":"오피스빌딩","priceText":"300억","sizeText":"3000평(약 9917.4㎡)","currentUse":"오피스","currentUseSignal":"근린생활시설","leaseSignal":"임대중","vacancySignal":"공실없음","tenantNames":["쿠팡","네이버"],"unitRentTexts":["301호: 1500만"],"sellerMotivationText":"자산 효율화","brokerNotes":["초역세권 매물"]},"detectedSensitiveFields":["exact_address","tenant_name"],"ambiguousFields":[],"warnings":[],"areaSignal":"역삼","assetType":"오피스빌딩","priceBand":"300억","sizeSignal":"3000평(약 9917.4㎡)","dealType":"매각","buildingName":"역삼 센트럴타워","exactAddress":"역삼동 742-1","totalFloorArea":9917.3,"buildYear":2015,"currentUseSignal":"근린생활시설","vacancySignal":"공실 없음","fitSummary":"초역세권 근생 빌딩으로 시행/사옥 매입에 최적화","cautionSummary":"주요 임차인 만기 조율 필요","hiddenFields":["exact_address","seller_motivation"],"confidence":{"areaSignal":"confirmed","assetType":"confirmed","priceBand":"ai_hypothesis","fitSummary":"ai_hypothesis"},"missingData":["sizeSignal"],"boundaryNote":"본 자료는 실거래 통계 기반 참고치입니다.","buyerType":"법인 사옥형","budgetRange":{"min":50,"max":80,"display":"50억~80억"},"preferredRegions":["강남","성수"],"assetTypes":["꼬마빌딩","사옥용"],"purchasePurpose":"사옥용 매입","mustHave":["초역세권","주차"],"niceToHave":["테라스","루프탑"],"riskTolerance":"medium","financingNote":"자본금 50% 준비","missingQuestions":["구체적인 입주 시기가 언제인가요?","선호하는 수익률이 있나요?"],"privacyNotes":["연락처 비공개"],"fitReasons":["매수자 예산(50-80억)에 부합하는 매물입니다.","요청하신 성수/강남 권역에 해당합니다."],"cautionReasons":["요청한 용도와 달리 명도 협의가 다소 필요합니다."],"recommendedNextAction":"현장 답사 제안","kakaoMessage":"안녕하세요! 요청하신 조건에 부합하는 추천 매물이 있어 안내해 드립니다. 확인해보시고 피드백 부탁드립니다.","title":"강남 역삼역 초역세권 오피스 사옥용 빌딩 매각","shortSummary":"역삼역 도보 5분 거리의 준신축급 대형 오피스빌딩입니다.","dealPoints":["초역세권","사옥 최적"],"cautionPoints":["명도 조율 필요"],"hiddenInfoNotice":["보증금 및 지번은 인가 후 확인 가능"],"gateMessage":"G1 등급 등록이 필요합니다.","kakaoText":"강남 역삼역 오피스 빌딩 매각 안내입니다.","exactUnitCandidate":"101호","floor":"1층","areaSqmText":"150㎡","spaceType":"office","depositText":"5000만","monthlyRentText":"400만","maintenanceFeeText":"50만","availableFromText":"즉시입주","leaseTermMonthsText":"24","incentivesText":"렌트프리 2개월","restrictions":[],"landlordIdentity":"김성수","currentTenant":"스타트업","vacancyReason":"이전 확장","rentNegotiation":"협의 가능","region":"성수동","areaSqm":150,"deposit":5000,"monthlyRent":400,"maintenanceFee":50,"availableFrom":"즉시입주","leaseTermMonths":24,"incentives":{"rentFreeMonths":2,"interiorSupport":"일부 인테리어 지원","freeRentDetail":"렌트프리 2개월 지원"},"shortSummaryLease":"성수역 도보 5분 거리 1층 리테일 상가 매물입니다."} ### 밸류업 시나리오 (AI 추정)</a:t>
             </a:r>
             <a:endParaRPr lang="en-US" sz="1100" dirty="0"/>
           </a:p>
@@ -10039,7 +9749,7 @@
       </p:sp>
       <p:sp>
         <p:nvSpPr>
-          <p:cNvPr id="11" name="Text 8"/>
+          <p:cNvPr id="10" name="Text 7"/>
           <p:cNvSpPr/>
           <p:nvPr/>
         </p:nvSpPr>
@@ -10078,7 +9788,7 @@
       </p:sp>
       <p:sp>
         <p:nvSpPr>
-          <p:cNvPr id="12" name="Text 9"/>
+          <p:cNvPr id="11" name="Text 8"/>
           <p:cNvSpPr/>
           <p:nvPr/>
         </p:nvSpPr>
@@ -10293,11 +10003,11 @@
         <p:spPr>
           <a:xfrm>
             <a:off x="566928" y="1572768"/>
-            <a:ext cx="11057839" cy="3200400"/>
+            <a:ext cx="2490140" cy="3200400"/>
           </a:xfrm>
           <a:prstGeom prst="roundRect">
             <a:avLst>
-              <a:gd name="adj" fmla="val 1714"/>
+              <a:gd name="adj" fmla="val 2203"/>
             </a:avLst>
           </a:prstGeom>
           <a:solidFill>
@@ -10320,7 +10030,7 @@
         <p:spPr>
           <a:xfrm>
             <a:off x="786384" y="1792224"/>
-            <a:ext cx="384048" cy="384048"/>
+            <a:ext cx="438912" cy="438912"/>
           </a:xfrm>
           <a:prstGeom prst="ellipse">
             <a:avLst/>
@@ -10340,7 +10050,7 @@
         <p:spPr>
           <a:xfrm>
             <a:off x="786384" y="1792224"/>
-            <a:ext cx="384048" cy="384048"/>
+            <a:ext cx="438912" cy="438912"/>
           </a:xfrm>
           <a:prstGeom prst="rect">
             <a:avLst/>
@@ -10356,7 +10066,7 @@
               <a:buNone/>
             </a:pPr>
             <a:r>
-              <a:rPr lang="en-US" sz="1300" b="1" dirty="0">
+              <a:rPr lang="en-US" sz="1400" b="1" dirty="0">
                 <a:solidFill>
                   <a:srgbClr val="FFFFFF"/>
                 </a:solidFill>
@@ -10364,9 +10074,9 @@
                 <a:ea typeface="Arial" pitchFamily="34" charset="-122"/>
                 <a:cs typeface="Arial" pitchFamily="34" charset="-120"/>
               </a:rPr>
-              <a:t>STEP 1</a:t>
-            </a:r>
-            <a:endParaRPr lang="en-US" sz="1300" dirty="0"/>
+              <a:t>01</a:t>
+            </a:r>
+            <a:endParaRPr lang="en-US" sz="1400" dirty="0"/>
           </a:p>
         </p:txBody>
       </p:sp>
@@ -10379,7 +10089,7 @@
         <p:spPr>
           <a:xfrm>
             <a:off x="786384" y="2304288"/>
-            <a:ext cx="10618927" cy="365760"/>
+            <a:ext cx="2051228" cy="365760"/>
           </a:xfrm>
           <a:prstGeom prst="rect">
             <a:avLst/>
@@ -10403,7 +10113,7 @@
                 <a:ea typeface="Pretendard" pitchFamily="34" charset="-122"/>
                 <a:cs typeface="Pretendard" pitchFamily="34" charset="-120"/>
               </a:rPr>
-              <a:t>{"ok"</a:t>
+              <a:t>1단계</a:t>
             </a:r>
             <a:endParaRPr lang="en-US" sz="1600" dirty="0"/>
           </a:p>
@@ -10418,7 +10128,7 @@
         <p:spPr>
           <a:xfrm>
             <a:off x="786384" y="2761488"/>
-            <a:ext cx="10618927" cy="1828800"/>
+            <a:ext cx="2051228" cy="1828800"/>
           </a:xfrm>
           <a:prstGeom prst="rect">
             <a:avLst/>
@@ -10442,7 +10152,7 @@
                 <a:ea typeface="Pretendard" pitchFamily="34" charset="-122"/>
                 <a:cs typeface="Pretendard" pitchFamily="34" charset="-120"/>
               </a:rPr>
-              <a:t>true,"mocked":true,"extractedFields":{"area_signal":"역삼","asset_type":"오피스빌딩","price_band":"300억","size_signal":"3000평(약 9917.4㎡)"},"extractedFacts":{"region":"역삼","exactAddressCandidate":"역삼동 742-1","assetType":"오피스빌딩","priceText":"300억","sizeText":"3000평(약 9917.4㎡)","currentUse":"오피스","currentUseSignal":"근린생활시설","leaseSignal":"임대중","vacancySignal":"공실없음","tenantNames":["쿠팡","네이버"],"unitRentTexts":["301호: 1500만"],"sellerMotivationText":"자산 효율화","brokerNotes":["초역세권 매물"]},"detectedSensitiveFields":["exact_address","tenant_name"],"ambiguousFields":[],"warnings":[],"areaSignal":"역삼","assetType":"오피스빌딩","priceBand":"300억","sizeSignal":"3000평(약 9917.4㎡)","dealType":"매각","buildingName":"역삼 센트럴타워","exactAddress":"역삼동 742-1","totalFloorArea":9917.3,"buildYear":2015,"currentUseSignal":"근린생활시설","vacancySignal":"공실 없음","fitSummary":"초역세권 근생 빌딩으로 시행/사옥 매입에 최적화","cautionSummary":"주요 임차 업종 만기 조율 필요","hiddenFields":["exact_address","seller_motivation"],"confidence":{"areaSignal":"confirmed","assetType":"confirmed","priceBand":"ai_hypothesis","fitSummary":"ai_hypothesis"},"missingData":["sizeSignal"],"boundaryNote":"본 자료는 실거래 통계 기반 참고치입니다.","buyerType":"법인 사옥형","budgetRange":{"min":50,"max":80,"display":"50억~80억"},"preferredRegions":["강남","성수"],"assetTypes":["꼬마빌딩","사옥용"],"purchasePurpose":"사옥용 매입","mustHave":["초역세권","주차"],"niceToHave":["테라스","루프탑"],"riskTolerance":"medium","financingNote":"자본금 50% 준비","missingQuestions":["구체적인 입주 시기가 언제인가요?","선호하는 수익률이 있나요?"],"privacyNotes":["연락처 비공개"],"fitReasons":["매수자 예산(50-80억)에 부합하는 매물입니다.","요청하신 성수/강남 권역에 해당합니다."],"cautionReasons":["요청한 용도와 달리 명도 협의가 다소 필요합니다."],"recommendedNextAction":"현장 답사 제안","kakaoMessage":"안녕하세요! 요청하신 조건에 부합하는 추천 매물이 있어 안내해 드립니다. 확인해보시고 피드백 부탁드립니다.","title":"강남 역삼역 초역세권 오피스 사옥용 빌딩 매각","shortSummary":"역삼역 도보 5분 거리의 준신축급 대형 오피스빌딩입니다.","dealPoints":["초역세권","사옥 최적"],"cautionPoints":["명도 조율 필요"],"hiddenInfoNotice":["보증금 및 지번은 인가 후 확인 가능"],"gateMessage":"G1 등급 등록이 필요합니다.","kakaoText":"강남 역삼역 오피스 빌딩 매각 안내입니다.","exactUnitCandidate":"101호","floor":"1층","areaSqmText":"150㎡","spaceType":"office","depositText":"5000만","monthlyRentText":"400만","maintenanceFeeText":"50만","availableFromText":"즉시입주","leaseTermMonthsText":"24","incentivesText":"렌트프리 2개월","restrictions":[],"landlordIdentity":"김성수","currentTenant":"스타트업","vacancyReason":"이전 확장","rentNegotiation":"협의 가능","region":"성수동","areaSqm":150,"deposit":5000,"monthlyRent":400,"maintenanceFee":50,"availableFrom":"즉시입주","leaseTermMonths":24,"incentives":{"rentFreeMonths":2,"interiorSupport":"일부 인테리어 지원","freeRentDetail":"렌트프리 2개월 지원"},"shortSummaryLease":"성수역 도보 5분 거리 1층 리테일 상가 매물입니다."}</a:t>
+              <a:t>초기 관심 표명 → 담당자 연락</a:t>
             </a:r>
             <a:endParaRPr lang="en-US" sz="1100" dirty="0"/>
           </a:p>
@@ -10450,14 +10160,86 @@
       </p:sp>
       <p:sp>
         <p:nvSpPr>
-          <p:cNvPr id="11" name="Text 9"/>
-          <p:cNvSpPr/>
-          <p:nvPr/>
-        </p:nvSpPr>
-        <p:spPr>
-          <a:xfrm>
-            <a:off x="566928" y="6382512"/>
-            <a:ext cx="7315200" cy="219456"/>
+          <p:cNvPr id="11" name="Shape 9"/>
+          <p:cNvSpPr/>
+          <p:nvPr/>
+        </p:nvSpPr>
+        <p:spPr>
+          <a:xfrm>
+            <a:off x="3148508" y="3035808"/>
+            <a:ext cx="182880" cy="274320"/>
+          </a:xfrm>
+          <a:prstGeom prst="rightArrow">
+            <a:avLst/>
+          </a:prstGeom>
+          <a:solidFill>
+            <a:srgbClr val="CBD5E0"/>
+          </a:solidFill>
+          <a:ln w="6350">
+            <a:solidFill>
+              <a:srgbClr val="718096"/>
+            </a:solidFill>
+            <a:prstDash val="solid"/>
+          </a:ln>
+        </p:spPr>
+      </p:sp>
+      <p:sp>
+        <p:nvSpPr>
+          <p:cNvPr id="12" name="Shape 10"/>
+          <p:cNvSpPr/>
+          <p:nvPr/>
+        </p:nvSpPr>
+        <p:spPr>
+          <a:xfrm>
+            <a:off x="3422828" y="1572768"/>
+            <a:ext cx="2490140" cy="3200400"/>
+          </a:xfrm>
+          <a:prstGeom prst="roundRect">
+            <a:avLst>
+              <a:gd name="adj" fmla="val 2203"/>
+            </a:avLst>
+          </a:prstGeom>
+          <a:solidFill>
+            <a:srgbClr val="F7FAFC"/>
+          </a:solidFill>
+          <a:ln w="6350">
+            <a:solidFill>
+              <a:srgbClr val="CBD5E0"/>
+            </a:solidFill>
+            <a:prstDash val="solid"/>
+          </a:ln>
+        </p:spPr>
+      </p:sp>
+      <p:sp>
+        <p:nvSpPr>
+          <p:cNvPr id="13" name="Shape 11"/>
+          <p:cNvSpPr/>
+          <p:nvPr/>
+        </p:nvSpPr>
+        <p:spPr>
+          <a:xfrm>
+            <a:off x="3642284" y="1792224"/>
+            <a:ext cx="438912" cy="438912"/>
+          </a:xfrm>
+          <a:prstGeom prst="ellipse">
+            <a:avLst/>
+          </a:prstGeom>
+          <a:solidFill>
+            <a:srgbClr val="B98A2E"/>
+          </a:solidFill>
+          <a:ln/>
+        </p:spPr>
+      </p:sp>
+      <p:sp>
+        <p:nvSpPr>
+          <p:cNvPr id="14" name="Text 12"/>
+          <p:cNvSpPr/>
+          <p:nvPr/>
+        </p:nvSpPr>
+        <p:spPr>
+          <a:xfrm>
+            <a:off x="3642284" y="1792224"/>
+            <a:ext cx="438912" cy="438912"/>
           </a:xfrm>
           <a:prstGeom prst="rect">
             <a:avLst/>
@@ -10469,18 +10251,513 @@
           <a:bodyPr wrap="square" lIns="0" tIns="0" rIns="0" bIns="0" rtlCol="0" anchor="ctr"/>
           <a:lstStyle/>
           <a:p>
+            <a:pPr algn="ctr" indent="0" marL="0">
+              <a:buNone/>
+            </a:pPr>
+            <a:r>
+              <a:rPr lang="en-US" sz="1400" b="1" dirty="0">
+                <a:solidFill>
+                  <a:srgbClr val="FFFFFF"/>
+                </a:solidFill>
+                <a:latin typeface="Arial" pitchFamily="34" charset="0"/>
+                <a:ea typeface="Arial" pitchFamily="34" charset="-122"/>
+                <a:cs typeface="Arial" pitchFamily="34" charset="-120"/>
+              </a:rPr>
+              <a:t>02</a:t>
+            </a:r>
+            <a:endParaRPr lang="en-US" sz="1400" dirty="0"/>
+          </a:p>
+        </p:txBody>
+      </p:sp>
+      <p:sp>
+        <p:nvSpPr>
+          <p:cNvPr id="15" name="Text 13"/>
+          <p:cNvSpPr/>
+          <p:nvPr/>
+        </p:nvSpPr>
+        <p:spPr>
+          <a:xfrm>
+            <a:off x="3642284" y="2304288"/>
+            <a:ext cx="2051228" cy="365760"/>
+          </a:xfrm>
+          <a:prstGeom prst="rect">
+            <a:avLst/>
+          </a:prstGeom>
+          <a:noFill/>
+          <a:ln/>
+        </p:spPr>
+        <p:txBody>
+          <a:bodyPr wrap="square" rtlCol="0" anchor="ctr"/>
+          <a:lstStyle/>
+          <a:p>
             <a:pPr indent="0" marL="0">
               <a:buNone/>
             </a:pPr>
             <a:r>
-              <a:rPr lang="en-US" sz="800" dirty="0">
-                <a:solidFill>
-                  <a:srgbClr val="718096"/>
+              <a:rPr lang="en-US" sz="1600" b="1" dirty="0">
+                <a:solidFill>
+                  <a:srgbClr val="10161F"/>
                 </a:solidFill>
                 <a:latin typeface="Pretendard" pitchFamily="34" charset="0"/>
                 <a:ea typeface="Pretendard" pitchFamily="34" charset="-122"/>
                 <a:cs typeface="Pretendard" pitchFamily="34" charset="-120"/>
               </a:rPr>
+              <a:t>2단계</a:t>
+            </a:r>
+            <a:endParaRPr lang="en-US" sz="1600" dirty="0"/>
+          </a:p>
+        </p:txBody>
+      </p:sp>
+      <p:sp>
+        <p:nvSpPr>
+          <p:cNvPr id="16" name="Text 14"/>
+          <p:cNvSpPr/>
+          <p:nvPr/>
+        </p:nvSpPr>
+        <p:spPr>
+          <a:xfrm>
+            <a:off x="3642284" y="2761488"/>
+            <a:ext cx="2051228" cy="1828800"/>
+          </a:xfrm>
+          <a:prstGeom prst="rect">
+            <a:avLst/>
+          </a:prstGeom>
+          <a:noFill/>
+          <a:ln/>
+        </p:spPr>
+        <p:txBody>
+          <a:bodyPr wrap="square" rtlCol="0" anchor="t"/>
+          <a:lstStyle/>
+          <a:p>
+            <a:pPr indent="0" marL="0">
+              <a:buNone/>
+            </a:pPr>
+            <a:r>
+              <a:rPr lang="en-US" sz="1100" dirty="0">
+                <a:solidFill>
+                  <a:srgbClr val="10161F"/>
+                </a:solidFill>
+                <a:latin typeface="Pretendard" pitchFamily="34" charset="0"/>
+                <a:ea typeface="Pretendard" pitchFamily="34" charset="-122"/>
+                <a:cs typeface="Pretendard" pitchFamily="34" charset="-120"/>
+              </a:rPr>
+              <a:t>NDA 체결 → 임차인 정보 및 임대차계약서 제공</a:t>
+            </a:r>
+            <a:endParaRPr lang="en-US" sz="1100" dirty="0"/>
+          </a:p>
+        </p:txBody>
+      </p:sp>
+      <p:sp>
+        <p:nvSpPr>
+          <p:cNvPr id="17" name="Shape 15"/>
+          <p:cNvSpPr/>
+          <p:nvPr/>
+        </p:nvSpPr>
+        <p:spPr>
+          <a:xfrm>
+            <a:off x="6004408" y="3035808"/>
+            <a:ext cx="182880" cy="274320"/>
+          </a:xfrm>
+          <a:prstGeom prst="rightArrow">
+            <a:avLst/>
+          </a:prstGeom>
+          <a:solidFill>
+            <a:srgbClr val="CBD5E0"/>
+          </a:solidFill>
+          <a:ln w="6350">
+            <a:solidFill>
+              <a:srgbClr val="718096"/>
+            </a:solidFill>
+            <a:prstDash val="solid"/>
+          </a:ln>
+        </p:spPr>
+      </p:sp>
+      <p:sp>
+        <p:nvSpPr>
+          <p:cNvPr id="18" name="Shape 16"/>
+          <p:cNvSpPr/>
+          <p:nvPr/>
+        </p:nvSpPr>
+        <p:spPr>
+          <a:xfrm>
+            <a:off x="6278728" y="1572768"/>
+            <a:ext cx="2490140" cy="3200400"/>
+          </a:xfrm>
+          <a:prstGeom prst="roundRect">
+            <a:avLst>
+              <a:gd name="adj" fmla="val 2203"/>
+            </a:avLst>
+          </a:prstGeom>
+          <a:solidFill>
+            <a:srgbClr val="F7FAFC"/>
+          </a:solidFill>
+          <a:ln w="6350">
+            <a:solidFill>
+              <a:srgbClr val="CBD5E0"/>
+            </a:solidFill>
+            <a:prstDash val="solid"/>
+          </a:ln>
+        </p:spPr>
+      </p:sp>
+      <p:sp>
+        <p:nvSpPr>
+          <p:cNvPr id="19" name="Shape 17"/>
+          <p:cNvSpPr/>
+          <p:nvPr/>
+        </p:nvSpPr>
+        <p:spPr>
+          <a:xfrm>
+            <a:off x="6498184" y="1792224"/>
+            <a:ext cx="438912" cy="438912"/>
+          </a:xfrm>
+          <a:prstGeom prst="ellipse">
+            <a:avLst/>
+          </a:prstGeom>
+          <a:solidFill>
+            <a:srgbClr val="B98A2E"/>
+          </a:solidFill>
+          <a:ln/>
+        </p:spPr>
+      </p:sp>
+      <p:sp>
+        <p:nvSpPr>
+          <p:cNvPr id="20" name="Text 18"/>
+          <p:cNvSpPr/>
+          <p:nvPr/>
+        </p:nvSpPr>
+        <p:spPr>
+          <a:xfrm>
+            <a:off x="6498184" y="1792224"/>
+            <a:ext cx="438912" cy="438912"/>
+          </a:xfrm>
+          <a:prstGeom prst="rect">
+            <a:avLst/>
+          </a:prstGeom>
+          <a:noFill/>
+          <a:ln/>
+        </p:spPr>
+        <p:txBody>
+          <a:bodyPr wrap="square" lIns="0" tIns="0" rIns="0" bIns="0" rtlCol="0" anchor="ctr"/>
+          <a:lstStyle/>
+          <a:p>
+            <a:pPr algn="ctr" indent="0" marL="0">
+              <a:buNone/>
+            </a:pPr>
+            <a:r>
+              <a:rPr lang="en-US" sz="1400" b="1" dirty="0">
+                <a:solidFill>
+                  <a:srgbClr val="FFFFFF"/>
+                </a:solidFill>
+                <a:latin typeface="Arial" pitchFamily="34" charset="0"/>
+                <a:ea typeface="Arial" pitchFamily="34" charset="-122"/>
+                <a:cs typeface="Arial" pitchFamily="34" charset="-120"/>
+              </a:rPr>
+              <a:t>03</a:t>
+            </a:r>
+            <a:endParaRPr lang="en-US" sz="1400" dirty="0"/>
+          </a:p>
+        </p:txBody>
+      </p:sp>
+      <p:sp>
+        <p:nvSpPr>
+          <p:cNvPr id="21" name="Text 19"/>
+          <p:cNvSpPr/>
+          <p:nvPr/>
+        </p:nvSpPr>
+        <p:spPr>
+          <a:xfrm>
+            <a:off x="6498184" y="2304288"/>
+            <a:ext cx="2051228" cy="365760"/>
+          </a:xfrm>
+          <a:prstGeom prst="rect">
+            <a:avLst/>
+          </a:prstGeom>
+          <a:noFill/>
+          <a:ln/>
+        </p:spPr>
+        <p:txBody>
+          <a:bodyPr wrap="square" rtlCol="0" anchor="ctr"/>
+          <a:lstStyle/>
+          <a:p>
+            <a:pPr indent="0" marL="0">
+              <a:buNone/>
+            </a:pPr>
+            <a:r>
+              <a:rPr lang="en-US" sz="1600" b="1" dirty="0">
+                <a:solidFill>
+                  <a:srgbClr val="10161F"/>
+                </a:solidFill>
+                <a:latin typeface="Pretendard" pitchFamily="34" charset="0"/>
+                <a:ea typeface="Pretendard" pitchFamily="34" charset="-122"/>
+                <a:cs typeface="Pretendard" pitchFamily="34" charset="-120"/>
+              </a:rPr>
+              <a:t>3단계</a:t>
+            </a:r>
+            <a:endParaRPr lang="en-US" sz="1600" dirty="0"/>
+          </a:p>
+        </p:txBody>
+      </p:sp>
+      <p:sp>
+        <p:nvSpPr>
+          <p:cNvPr id="22" name="Text 20"/>
+          <p:cNvSpPr/>
+          <p:nvPr/>
+        </p:nvSpPr>
+        <p:spPr>
+          <a:xfrm>
+            <a:off x="6498184" y="2761488"/>
+            <a:ext cx="2051228" cy="1828800"/>
+          </a:xfrm>
+          <a:prstGeom prst="rect">
+            <a:avLst/>
+          </a:prstGeom>
+          <a:noFill/>
+          <a:ln/>
+        </p:spPr>
+        <p:txBody>
+          <a:bodyPr wrap="square" rtlCol="0" anchor="t"/>
+          <a:lstStyle/>
+          <a:p>
+            <a:pPr indent="0" marL="0">
+              <a:buNone/>
+            </a:pPr>
+            <a:r>
+              <a:rPr lang="en-US" sz="1100" dirty="0">
+                <a:solidFill>
+                  <a:srgbClr val="10161F"/>
+                </a:solidFill>
+                <a:latin typeface="Pretendard" pitchFamily="34" charset="0"/>
+                <a:ea typeface="Pretendard" pitchFamily="34" charset="-122"/>
+                <a:cs typeface="Pretendard" pitchFamily="34" charset="-120"/>
+              </a:rPr>
+              <a:t>현장 실사 일정 조율 → 건물 컨디션 및 설비 직접 확인</a:t>
+            </a:r>
+            <a:endParaRPr lang="en-US" sz="1100" dirty="0"/>
+          </a:p>
+        </p:txBody>
+      </p:sp>
+      <p:sp>
+        <p:nvSpPr>
+          <p:cNvPr id="23" name="Shape 21"/>
+          <p:cNvSpPr/>
+          <p:nvPr/>
+        </p:nvSpPr>
+        <p:spPr>
+          <a:xfrm>
+            <a:off x="8860307" y="3035808"/>
+            <a:ext cx="182880" cy="274320"/>
+          </a:xfrm>
+          <a:prstGeom prst="rightArrow">
+            <a:avLst/>
+          </a:prstGeom>
+          <a:solidFill>
+            <a:srgbClr val="CBD5E0"/>
+          </a:solidFill>
+          <a:ln w="6350">
+            <a:solidFill>
+              <a:srgbClr val="718096"/>
+            </a:solidFill>
+            <a:prstDash val="solid"/>
+          </a:ln>
+        </p:spPr>
+      </p:sp>
+      <p:sp>
+        <p:nvSpPr>
+          <p:cNvPr id="24" name="Shape 22"/>
+          <p:cNvSpPr/>
+          <p:nvPr/>
+        </p:nvSpPr>
+        <p:spPr>
+          <a:xfrm>
+            <a:off x="9134627" y="1572768"/>
+            <a:ext cx="2490140" cy="3200400"/>
+          </a:xfrm>
+          <a:prstGeom prst="roundRect">
+            <a:avLst>
+              <a:gd name="adj" fmla="val 2203"/>
+            </a:avLst>
+          </a:prstGeom>
+          <a:solidFill>
+            <a:srgbClr val="F7FAFC"/>
+          </a:solidFill>
+          <a:ln w="6350">
+            <a:solidFill>
+              <a:srgbClr val="CBD5E0"/>
+            </a:solidFill>
+            <a:prstDash val="solid"/>
+          </a:ln>
+        </p:spPr>
+      </p:sp>
+      <p:sp>
+        <p:nvSpPr>
+          <p:cNvPr id="25" name="Shape 23"/>
+          <p:cNvSpPr/>
+          <p:nvPr/>
+        </p:nvSpPr>
+        <p:spPr>
+          <a:xfrm>
+            <a:off x="9354083" y="1792224"/>
+            <a:ext cx="438912" cy="438912"/>
+          </a:xfrm>
+          <a:prstGeom prst="ellipse">
+            <a:avLst/>
+          </a:prstGeom>
+          <a:solidFill>
+            <a:srgbClr val="B98A2E"/>
+          </a:solidFill>
+          <a:ln/>
+        </p:spPr>
+      </p:sp>
+      <p:sp>
+        <p:nvSpPr>
+          <p:cNvPr id="26" name="Text 24"/>
+          <p:cNvSpPr/>
+          <p:nvPr/>
+        </p:nvSpPr>
+        <p:spPr>
+          <a:xfrm>
+            <a:off x="9354083" y="1792224"/>
+            <a:ext cx="438912" cy="438912"/>
+          </a:xfrm>
+          <a:prstGeom prst="rect">
+            <a:avLst/>
+          </a:prstGeom>
+          <a:noFill/>
+          <a:ln/>
+        </p:spPr>
+        <p:txBody>
+          <a:bodyPr wrap="square" lIns="0" tIns="0" rIns="0" bIns="0" rtlCol="0" anchor="ctr"/>
+          <a:lstStyle/>
+          <a:p>
+            <a:pPr algn="ctr" indent="0" marL="0">
+              <a:buNone/>
+            </a:pPr>
+            <a:r>
+              <a:rPr lang="en-US" sz="1400" b="1" dirty="0">
+                <a:solidFill>
+                  <a:srgbClr val="FFFFFF"/>
+                </a:solidFill>
+                <a:latin typeface="Arial" pitchFamily="34" charset="0"/>
+                <a:ea typeface="Arial" pitchFamily="34" charset="-122"/>
+                <a:cs typeface="Arial" pitchFamily="34" charset="-120"/>
+              </a:rPr>
+              <a:t>04</a:t>
+            </a:r>
+            <a:endParaRPr lang="en-US" sz="1400" dirty="0"/>
+          </a:p>
+        </p:txBody>
+      </p:sp>
+      <p:sp>
+        <p:nvSpPr>
+          <p:cNvPr id="27" name="Text 25"/>
+          <p:cNvSpPr/>
+          <p:nvPr/>
+        </p:nvSpPr>
+        <p:spPr>
+          <a:xfrm>
+            <a:off x="9354083" y="2304288"/>
+            <a:ext cx="2051228" cy="365760"/>
+          </a:xfrm>
+          <a:prstGeom prst="rect">
+            <a:avLst/>
+          </a:prstGeom>
+          <a:noFill/>
+          <a:ln/>
+        </p:spPr>
+        <p:txBody>
+          <a:bodyPr wrap="square" rtlCol="0" anchor="ctr"/>
+          <a:lstStyle/>
+          <a:p>
+            <a:pPr indent="0" marL="0">
+              <a:buNone/>
+            </a:pPr>
+            <a:r>
+              <a:rPr lang="en-US" sz="1600" b="1" dirty="0">
+                <a:solidFill>
+                  <a:srgbClr val="10161F"/>
+                </a:solidFill>
+                <a:latin typeface="Pretendard" pitchFamily="34" charset="0"/>
+                <a:ea typeface="Pretendard" pitchFamily="34" charset="-122"/>
+                <a:cs typeface="Pretendard" pitchFamily="34" charset="-120"/>
+              </a:rPr>
+              <a:t>4단계</a:t>
+            </a:r>
+            <a:endParaRPr lang="en-US" sz="1600" dirty="0"/>
+          </a:p>
+        </p:txBody>
+      </p:sp>
+      <p:sp>
+        <p:nvSpPr>
+          <p:cNvPr id="28" name="Text 26"/>
+          <p:cNvSpPr/>
+          <p:nvPr/>
+        </p:nvSpPr>
+        <p:spPr>
+          <a:xfrm>
+            <a:off x="9354083" y="2761488"/>
+            <a:ext cx="2051228" cy="1828800"/>
+          </a:xfrm>
+          <a:prstGeom prst="rect">
+            <a:avLst/>
+          </a:prstGeom>
+          <a:noFill/>
+          <a:ln/>
+        </p:spPr>
+        <p:txBody>
+          <a:bodyPr wrap="square" rtlCol="0" anchor="t"/>
+          <a:lstStyle/>
+          <a:p>
+            <a:pPr indent="0" marL="0">
+              <a:buNone/>
+            </a:pPr>
+            <a:r>
+              <a:rPr lang="en-US" sz="1100" dirty="0">
+                <a:solidFill>
+                  <a:srgbClr val="10161F"/>
+                </a:solidFill>
+                <a:latin typeface="Pretendard" pitchFamily="34" charset="0"/>
+                <a:ea typeface="Pretendard" pitchFamily="34" charset="-122"/>
+                <a:cs typeface="Pretendard" pitchFamily="34" charset="-120"/>
+              </a:rPr>
+              <a:t>LOI(투자의향서) 제출 → 가격 협의 개시</a:t>
+            </a:r>
+            <a:endParaRPr lang="en-US" sz="1100" dirty="0"/>
+          </a:p>
+        </p:txBody>
+      </p:sp>
+      <p:sp>
+        <p:nvSpPr>
+          <p:cNvPr id="29" name="Text 27"/>
+          <p:cNvSpPr/>
+          <p:nvPr/>
+        </p:nvSpPr>
+        <p:spPr>
+          <a:xfrm>
+            <a:off x="566928" y="6382512"/>
+            <a:ext cx="7315200" cy="219456"/>
+          </a:xfrm>
+          <a:prstGeom prst="rect">
+            <a:avLst/>
+          </a:prstGeom>
+          <a:noFill/>
+          <a:ln/>
+        </p:spPr>
+        <p:txBody>
+          <a:bodyPr wrap="square" lIns="0" tIns="0" rIns="0" bIns="0" rtlCol="0" anchor="ctr"/>
+          <a:lstStyle/>
+          <a:p>
+            <a:pPr indent="0" marL="0">
+              <a:buNone/>
+            </a:pPr>
+            <a:r>
+              <a:rPr lang="en-US" sz="800" dirty="0">
+                <a:solidFill>
+                  <a:srgbClr val="718096"/>
+                </a:solidFill>
+                <a:latin typeface="Pretendard" pitchFamily="34" charset="0"/>
+                <a:ea typeface="Pretendard" pitchFamily="34" charset="-122"/>
+                <a:cs typeface="Pretendard" pitchFamily="34" charset="-120"/>
+              </a:rPr>
               <a:t>크리딜   |   </a:t>
             </a:r>
             <a:endParaRPr lang="en-US" sz="800" dirty="0"/>
@@ -10489,7 +10766,7 @@
       </p:sp>
       <p:sp>
         <p:nvSpPr>
-          <p:cNvPr id="12" name="Text 10"/>
+          <p:cNvPr id="30" name="Text 28"/>
           <p:cNvSpPr/>
           <p:nvPr/>
         </p:nvSpPr>

--- a/docs/test/stress/e2e-outputs/trading_case10_seocho_old_retail_basic.pptx
+++ b/docs/test/stress/e2e-outputs/trading_case10_seocho_old_retail_basic.pptx
@@ -5596,7 +5596,7 @@
                 <a:ea typeface="Pretendard" pitchFamily="34" charset="-122"/>
                 <a:cs typeface="Pretendard" pitchFamily="34" charset="-120"/>
               </a:rPr>
-              <a:t>{"ok"</a:t>
+              <a:t>주요 용도</a:t>
             </a:r>
             <a:endParaRPr lang="en-US" sz="1400" dirty="0"/>
           </a:p>
@@ -5638,7 +5638,7 @@
                 <a:ea typeface="Pretendard" pitchFamily="34" charset="-122"/>
                 <a:cs typeface="Pretendard" pitchFamily="34" charset="-120"/>
               </a:rPr>
-              <a:t>true,"mocked":true,"extractedFields":{"area_signal":"역삼","asset_type":"오피스빌딩","price_band":"300억","size_signal":"3000평(약 9917.4㎡)"},"extractedFacts":{"region":"역삼","exactAddressCandidate":"역삼동 742-1","assetType":"오피스빌딩","priceText":"300억","sizeText":"3000평(약 9917.4㎡)","currentUse":"오피스","currentUseSignal":"근린생활시설","leaseSignal":"임대중","vacancySignal":"공실없음","tenantNames":"쿠팡","네이버","unitRentTexts":"301호: 1500만","sellerMotivationText":"자산 효율화","brokerNotes":"초역세권 매물"},"detectedSensitiveFields":"exact_address","tenant_name","ambiguousFields":,"warnings":,"areaSignal":"역삼","assetType":"오피스빌딩","priceBand":"300억","sizeSignal":"3000평(약 9917.4㎡)","dealType":"매각","buildingName":"역삼 센트럴타워","exactAddress":"역삼동 742-1","totalFloorArea":9917.3,"buildYear":2015,"currentUseSignal":"근린생활시설","vacancySignal":"공실 없음","fitSummary":"초역세권 근생 빌딩으로 시행/사옥 매입에 최적화","cautionSummary":"주요 임차인 만기 조율 필요","hiddenFields":"exact_address","seller_motivation","confidence":{"areaSignal":"confirmed","assetType":"confirmed","priceBand":"ai_hypothesis","fitSummary":"ai_hypothesis"},"missingData":"sizeSignal","boundaryNote":"본 자료는 실거래 통계 기반 참고치입니다.","buyerType":"법인 사옥형","budgetRange":{"min":50,"max":80,"display":"50억~80억"},"preferredRegions":"강남","성수","assetTypes":"꼬마빌딩","사옥용","purchasePurpose":"사옥용 매입","mustHave":"초역세권","주차","niceToHave":"테라스","루프탑","riskTolerance":"medium","financingNote":"자본금 50% 준비","missingQuestions":"구체적인 입주 시기가 언제인가요?","선호하는 수익률이 있나요?","privacyNotes":"연락처 비공개","fitReasons":"매수자 예산(50-80억)에 부합하는 매물입니다.","요청하신 성수/강남 권역에 해당합니다.","cautionReasons":"요청한 용도와 달리 명도 협의가 다소 필요합니다.","recommendedNextAction":"현장 답사 제안","kakaoMessage":"안녕하세요! 요청하신 조건에 부합하는 추천 매물이 있어 안내해 드립니다. 확인해보시고 피드백 부탁드립니다.","title":"강남 역삼역 초역세권 오피스 사옥용 빌딩 매각","shortSummary":"역삼역 도보 5분 거리의 준신축급 대형 오피스빌딩입니다.","dealPoints":"초역세권","사옥 최적","cautionPoints":"명도 조율 필요","hiddenInfoNotice":"보증금 및 지번은 인가 후 확인 가능","gateMessage":"G1 등급 등록이 필요합니다.","kakaoText":"강남 역삼역 오피스 빌딩 매각 안내입니다.","exactUnitCandidate":"101호","floor":"1층","areaSqmText":"150㎡","spaceType":"office","depositText":"5000만","monthlyRentText":"400만","maintenanceFeeText":"50만","availableFromText":"즉시입주","leaseTermMonthsText":"24","incentivesText":"렌트프리 2개월","restrictions":,"landlordIdentity":"김성수","currentTenant":"스타트업","vacancyReason":"이전 확장","rentNegotiation":"협의 가능","region":"성수동","areaSqm":150,"deposit":5000,"monthlyRent":400,"maintenanceFee":50,"availableFrom":"즉시입주","leaseTermMonths":24,"incentives":{"rentFreeMonths":2,"interiorSupport":"일부 인테리어 지원","freeRentDetail":"렌트프리 2개월 지원"},"shortSummaryLease":"성수역 도보 5분 거리 1층 리테일 상가 매물입니다."}</a:t>
+              <a:t>확인 필요</a:t>
             </a:r>
             <a:endParaRPr lang="en-US" sz="1400" dirty="0"/>
           </a:p>
@@ -5647,6 +5647,434 @@
       <p:sp>
         <p:nvSpPr>
           <p:cNvPr id="9" name="Shape 7"/>
+          <p:cNvSpPr/>
+          <p:nvPr/>
+        </p:nvSpPr>
+        <p:spPr>
+          <a:xfrm>
+            <a:off x="566928" y="2048256"/>
+            <a:ext cx="6858000" cy="0"/>
+          </a:xfrm>
+          <a:prstGeom prst="line">
+            <a:avLst/>
+          </a:prstGeom>
+          <a:noFill/>
+          <a:ln w="3810">
+            <a:solidFill>
+              <a:srgbClr val="CBD5E0"/>
+            </a:solidFill>
+            <a:prstDash val="solid"/>
+          </a:ln>
+        </p:spPr>
+      </p:sp>
+      <p:sp>
+        <p:nvSpPr>
+          <p:cNvPr id="10" name="Text 8"/>
+          <p:cNvSpPr/>
+          <p:nvPr/>
+        </p:nvSpPr>
+        <p:spPr>
+          <a:xfrm>
+            <a:off x="566928" y="2048256"/>
+            <a:ext cx="2606040" cy="402336"/>
+          </a:xfrm>
+          <a:prstGeom prst="rect">
+            <a:avLst/>
+          </a:prstGeom>
+          <a:noFill/>
+          <a:ln/>
+        </p:spPr>
+        <p:txBody>
+          <a:bodyPr wrap="square" lIns="0" tIns="0" rIns="0" bIns="0" rtlCol="0" anchor="ctr"/>
+          <a:lstStyle/>
+          <a:p>
+            <a:pPr indent="0" marL="0">
+              <a:lnSpc>
+                <a:spcPct val="120000"/>
+              </a:lnSpc>
+              <a:buNone/>
+            </a:pPr>
+            <a:r>
+              <a:rPr lang="en-US" sz="1400" dirty="0">
+                <a:solidFill>
+                  <a:srgbClr val="718096"/>
+                </a:solidFill>
+                <a:latin typeface="Pretendard" pitchFamily="34" charset="0"/>
+                <a:ea typeface="Pretendard" pitchFamily="34" charset="-122"/>
+                <a:cs typeface="Pretendard" pitchFamily="34" charset="-120"/>
+              </a:rPr>
+              <a:t>연면적</a:t>
+            </a:r>
+            <a:endParaRPr lang="en-US" sz="1400" dirty="0"/>
+          </a:p>
+        </p:txBody>
+      </p:sp>
+      <p:sp>
+        <p:nvSpPr>
+          <p:cNvPr id="11" name="Text 9"/>
+          <p:cNvSpPr/>
+          <p:nvPr/>
+        </p:nvSpPr>
+        <p:spPr>
+          <a:xfrm>
+            <a:off x="3172968" y="2048256"/>
+            <a:ext cx="4251960" cy="402336"/>
+          </a:xfrm>
+          <a:prstGeom prst="rect">
+            <a:avLst/>
+          </a:prstGeom>
+          <a:noFill/>
+          <a:ln/>
+        </p:spPr>
+        <p:txBody>
+          <a:bodyPr wrap="square" lIns="0" tIns="0" rIns="0" bIns="0" rtlCol="0" anchor="ctr"/>
+          <a:lstStyle/>
+          <a:p>
+            <a:pPr indent="0" marL="0">
+              <a:lnSpc>
+                <a:spcPct val="120000"/>
+              </a:lnSpc>
+              <a:buNone/>
+            </a:pPr>
+            <a:r>
+              <a:rPr lang="en-US" sz="1400" b="1" dirty="0">
+                <a:solidFill>
+                  <a:srgbClr val="10161F"/>
+                </a:solidFill>
+                <a:latin typeface="Pretendard" pitchFamily="34" charset="0"/>
+                <a:ea typeface="Pretendard" pitchFamily="34" charset="-122"/>
+                <a:cs typeface="Pretendard" pitchFamily="34" charset="-120"/>
+              </a:rPr>
+              <a:t>5,000㎡ (약 1513평(약 5001.7㎡))</a:t>
+            </a:r>
+            <a:endParaRPr lang="en-US" sz="1400" dirty="0"/>
+          </a:p>
+        </p:txBody>
+      </p:sp>
+      <p:sp>
+        <p:nvSpPr>
+          <p:cNvPr id="12" name="Shape 10"/>
+          <p:cNvSpPr/>
+          <p:nvPr/>
+        </p:nvSpPr>
+        <p:spPr>
+          <a:xfrm>
+            <a:off x="566928" y="2450592"/>
+            <a:ext cx="6858000" cy="0"/>
+          </a:xfrm>
+          <a:prstGeom prst="line">
+            <a:avLst/>
+          </a:prstGeom>
+          <a:noFill/>
+          <a:ln w="3810">
+            <a:solidFill>
+              <a:srgbClr val="CBD5E0"/>
+            </a:solidFill>
+            <a:prstDash val="solid"/>
+          </a:ln>
+        </p:spPr>
+      </p:sp>
+      <p:sp>
+        <p:nvSpPr>
+          <p:cNvPr id="13" name="Text 11"/>
+          <p:cNvSpPr/>
+          <p:nvPr/>
+        </p:nvSpPr>
+        <p:spPr>
+          <a:xfrm>
+            <a:off x="566928" y="2450592"/>
+            <a:ext cx="2606040" cy="402336"/>
+          </a:xfrm>
+          <a:prstGeom prst="rect">
+            <a:avLst/>
+          </a:prstGeom>
+          <a:noFill/>
+          <a:ln/>
+        </p:spPr>
+        <p:txBody>
+          <a:bodyPr wrap="square" lIns="0" tIns="0" rIns="0" bIns="0" rtlCol="0" anchor="ctr"/>
+          <a:lstStyle/>
+          <a:p>
+            <a:pPr indent="0" marL="0">
+              <a:lnSpc>
+                <a:spcPct val="120000"/>
+              </a:lnSpc>
+              <a:buNone/>
+            </a:pPr>
+            <a:r>
+              <a:rPr lang="en-US" sz="1400" dirty="0">
+                <a:solidFill>
+                  <a:srgbClr val="718096"/>
+                </a:solidFill>
+                <a:latin typeface="Pretendard" pitchFamily="34" charset="0"/>
+                <a:ea typeface="Pretendard" pitchFamily="34" charset="-122"/>
+                <a:cs typeface="Pretendard" pitchFamily="34" charset="-120"/>
+              </a:rPr>
+              <a:t>대지면적</a:t>
+            </a:r>
+            <a:endParaRPr lang="en-US" sz="1400" dirty="0"/>
+          </a:p>
+        </p:txBody>
+      </p:sp>
+      <p:sp>
+        <p:nvSpPr>
+          <p:cNvPr id="14" name="Text 12"/>
+          <p:cNvSpPr/>
+          <p:nvPr/>
+        </p:nvSpPr>
+        <p:spPr>
+          <a:xfrm>
+            <a:off x="3172968" y="2450592"/>
+            <a:ext cx="4251960" cy="402336"/>
+          </a:xfrm>
+          <a:prstGeom prst="rect">
+            <a:avLst/>
+          </a:prstGeom>
+          <a:noFill/>
+          <a:ln/>
+        </p:spPr>
+        <p:txBody>
+          <a:bodyPr wrap="square" lIns="0" tIns="0" rIns="0" bIns="0" rtlCol="0" anchor="ctr"/>
+          <a:lstStyle/>
+          <a:p>
+            <a:pPr indent="0" marL="0">
+              <a:lnSpc>
+                <a:spcPct val="120000"/>
+              </a:lnSpc>
+              <a:buNone/>
+            </a:pPr>
+            <a:r>
+              <a:rPr lang="en-US" sz="1400" b="1" dirty="0">
+                <a:solidFill>
+                  <a:srgbClr val="10161F"/>
+                </a:solidFill>
+                <a:latin typeface="Pretendard" pitchFamily="34" charset="0"/>
+                <a:ea typeface="Pretendard" pitchFamily="34" charset="-122"/>
+                <a:cs typeface="Pretendard" pitchFamily="34" charset="-120"/>
+              </a:rPr>
+              <a:t>1,000㎡ (약 303평(약 1001.7㎡))</a:t>
+            </a:r>
+            <a:endParaRPr lang="en-US" sz="1400" dirty="0"/>
+          </a:p>
+        </p:txBody>
+      </p:sp>
+      <p:sp>
+        <p:nvSpPr>
+          <p:cNvPr id="15" name="Shape 13"/>
+          <p:cNvSpPr/>
+          <p:nvPr/>
+        </p:nvSpPr>
+        <p:spPr>
+          <a:xfrm>
+            <a:off x="566928" y="2852928"/>
+            <a:ext cx="6858000" cy="0"/>
+          </a:xfrm>
+          <a:prstGeom prst="line">
+            <a:avLst/>
+          </a:prstGeom>
+          <a:noFill/>
+          <a:ln w="3810">
+            <a:solidFill>
+              <a:srgbClr val="CBD5E0"/>
+            </a:solidFill>
+            <a:prstDash val="solid"/>
+          </a:ln>
+        </p:spPr>
+      </p:sp>
+      <p:sp>
+        <p:nvSpPr>
+          <p:cNvPr id="16" name="Text 14"/>
+          <p:cNvSpPr/>
+          <p:nvPr/>
+        </p:nvSpPr>
+        <p:spPr>
+          <a:xfrm>
+            <a:off x="566928" y="2852928"/>
+            <a:ext cx="2606040" cy="402336"/>
+          </a:xfrm>
+          <a:prstGeom prst="rect">
+            <a:avLst/>
+          </a:prstGeom>
+          <a:noFill/>
+          <a:ln/>
+        </p:spPr>
+        <p:txBody>
+          <a:bodyPr wrap="square" lIns="0" tIns="0" rIns="0" bIns="0" rtlCol="0" anchor="ctr"/>
+          <a:lstStyle/>
+          <a:p>
+            <a:pPr indent="0" marL="0">
+              <a:lnSpc>
+                <a:spcPct val="120000"/>
+              </a:lnSpc>
+              <a:buNone/>
+            </a:pPr>
+            <a:r>
+              <a:rPr lang="en-US" sz="1400" dirty="0">
+                <a:solidFill>
+                  <a:srgbClr val="718096"/>
+                </a:solidFill>
+                <a:latin typeface="Pretendard" pitchFamily="34" charset="0"/>
+                <a:ea typeface="Pretendard" pitchFamily="34" charset="-122"/>
+                <a:cs typeface="Pretendard" pitchFamily="34" charset="-120"/>
+              </a:rPr>
+              <a:t>용도지역</a:t>
+            </a:r>
+            <a:endParaRPr lang="en-US" sz="1400" dirty="0"/>
+          </a:p>
+        </p:txBody>
+      </p:sp>
+      <p:sp>
+        <p:nvSpPr>
+          <p:cNvPr id="17" name="Text 15"/>
+          <p:cNvSpPr/>
+          <p:nvPr/>
+        </p:nvSpPr>
+        <p:spPr>
+          <a:xfrm>
+            <a:off x="3172968" y="2852928"/>
+            <a:ext cx="4251960" cy="402336"/>
+          </a:xfrm>
+          <a:prstGeom prst="rect">
+            <a:avLst/>
+          </a:prstGeom>
+          <a:noFill/>
+          <a:ln/>
+        </p:spPr>
+        <p:txBody>
+          <a:bodyPr wrap="square" lIns="0" tIns="0" rIns="0" bIns="0" rtlCol="0" anchor="ctr"/>
+          <a:lstStyle/>
+          <a:p>
+            <a:pPr indent="0" marL="0">
+              <a:lnSpc>
+                <a:spcPct val="120000"/>
+              </a:lnSpc>
+              <a:buNone/>
+            </a:pPr>
+            <a:r>
+              <a:rPr lang="en-US" sz="1400" b="1" dirty="0">
+                <a:solidFill>
+                  <a:srgbClr val="10161F"/>
+                </a:solidFill>
+                <a:latin typeface="Pretendard" pitchFamily="34" charset="0"/>
+                <a:ea typeface="Pretendard" pitchFamily="34" charset="-122"/>
+                <a:cs typeface="Pretendard" pitchFamily="34" charset="-120"/>
+              </a:rPr>
+              <a:t>일반상업지역</a:t>
+            </a:r>
+            <a:endParaRPr lang="en-US" sz="1400" dirty="0"/>
+          </a:p>
+        </p:txBody>
+      </p:sp>
+      <p:sp>
+        <p:nvSpPr>
+          <p:cNvPr id="18" name="Shape 16"/>
+          <p:cNvSpPr/>
+          <p:nvPr/>
+        </p:nvSpPr>
+        <p:spPr>
+          <a:xfrm>
+            <a:off x="566928" y="3255264"/>
+            <a:ext cx="6858000" cy="0"/>
+          </a:xfrm>
+          <a:prstGeom prst="line">
+            <a:avLst/>
+          </a:prstGeom>
+          <a:noFill/>
+          <a:ln w="3810">
+            <a:solidFill>
+              <a:srgbClr val="CBD5E0"/>
+            </a:solidFill>
+            <a:prstDash val="solid"/>
+          </a:ln>
+        </p:spPr>
+      </p:sp>
+      <p:sp>
+        <p:nvSpPr>
+          <p:cNvPr id="19" name="Text 17"/>
+          <p:cNvSpPr/>
+          <p:nvPr/>
+        </p:nvSpPr>
+        <p:spPr>
+          <a:xfrm>
+            <a:off x="566928" y="3255264"/>
+            <a:ext cx="2606040" cy="402336"/>
+          </a:xfrm>
+          <a:prstGeom prst="rect">
+            <a:avLst/>
+          </a:prstGeom>
+          <a:noFill/>
+          <a:ln/>
+        </p:spPr>
+        <p:txBody>
+          <a:bodyPr wrap="square" lIns="0" tIns="0" rIns="0" bIns="0" rtlCol="0" anchor="ctr"/>
+          <a:lstStyle/>
+          <a:p>
+            <a:pPr indent="0" marL="0">
+              <a:lnSpc>
+                <a:spcPct val="120000"/>
+              </a:lnSpc>
+              <a:buNone/>
+            </a:pPr>
+            <a:r>
+              <a:rPr lang="en-US" sz="1400" dirty="0">
+                <a:solidFill>
+                  <a:srgbClr val="718096"/>
+                </a:solidFill>
+                <a:latin typeface="Pretendard" pitchFamily="34" charset="0"/>
+                <a:ea typeface="Pretendard" pitchFamily="34" charset="-122"/>
+                <a:cs typeface="Pretendard" pitchFamily="34" charset="-120"/>
+              </a:rPr>
+              <a:t>매매 희망가</a:t>
+            </a:r>
+            <a:endParaRPr lang="en-US" sz="1400" dirty="0"/>
+          </a:p>
+        </p:txBody>
+      </p:sp>
+      <p:sp>
+        <p:nvSpPr>
+          <p:cNvPr id="20" name="Text 18"/>
+          <p:cNvSpPr/>
+          <p:nvPr/>
+        </p:nvSpPr>
+        <p:spPr>
+          <a:xfrm>
+            <a:off x="3172968" y="3255264"/>
+            <a:ext cx="4251960" cy="402336"/>
+          </a:xfrm>
+          <a:prstGeom prst="rect">
+            <a:avLst/>
+          </a:prstGeom>
+          <a:noFill/>
+          <a:ln/>
+        </p:spPr>
+        <p:txBody>
+          <a:bodyPr wrap="square" lIns="0" tIns="0" rIns="0" bIns="0" rtlCol="0" anchor="ctr"/>
+          <a:lstStyle/>
+          <a:p>
+            <a:pPr indent="0" marL="0">
+              <a:lnSpc>
+                <a:spcPct val="120000"/>
+              </a:lnSpc>
+              <a:buNone/>
+            </a:pPr>
+            <a:r>
+              <a:rPr lang="en-US" sz="1400" b="1" dirty="0">
+                <a:solidFill>
+                  <a:srgbClr val="10161F"/>
+                </a:solidFill>
+                <a:latin typeface="Pretendard" pitchFamily="34" charset="0"/>
+                <a:ea typeface="Pretendard" pitchFamily="34" charset="-122"/>
+                <a:cs typeface="Pretendard" pitchFamily="34" charset="-120"/>
+              </a:rPr>
+              <a:t>115억</a:t>
+            </a:r>
+            <a:endParaRPr lang="en-US" sz="1400" dirty="0"/>
+          </a:p>
+        </p:txBody>
+      </p:sp>
+      <p:sp>
+        <p:nvSpPr>
+          <p:cNvPr id="21" name="Shape 19"/>
           <p:cNvSpPr/>
           <p:nvPr/>
         </p:nvSpPr>
@@ -5669,7 +6097,7 @@
       </p:sp>
       <p:sp>
         <p:nvSpPr>
-          <p:cNvPr id="10" name="Shape 8"/>
+          <p:cNvPr id="22" name="Shape 20"/>
           <p:cNvSpPr/>
           <p:nvPr/>
         </p:nvSpPr>
@@ -5684,14 +6112,14 @@
             </a:avLst>
           </a:prstGeom>
           <a:solidFill>
-            <a:srgbClr val="F3EBDA"/>
+            <a:srgbClr val="BEE3F8"/>
           </a:solidFill>
           <a:ln/>
         </p:spPr>
       </p:sp>
       <p:sp>
         <p:nvSpPr>
-          <p:cNvPr id="11" name="Shape 9"/>
+          <p:cNvPr id="23" name="Shape 21"/>
           <p:cNvSpPr/>
           <p:nvPr/>
         </p:nvSpPr>
@@ -5704,14 +6132,14 @@
             <a:avLst/>
           </a:prstGeom>
           <a:solidFill>
-            <a:srgbClr val="977024"/>
+            <a:srgbClr val="2B6CB0"/>
           </a:solidFill>
           <a:ln/>
         </p:spPr>
       </p:sp>
       <p:sp>
         <p:nvSpPr>
-          <p:cNvPr id="12" name="Text 10"/>
+          <p:cNvPr id="24" name="Text 22"/>
           <p:cNvSpPr/>
           <p:nvPr/>
         </p:nvSpPr>
@@ -5733,13 +6161,24 @@
             <a:pPr indent="0" marL="0">
               <a:buNone/>
             </a:pPr>
+            <a:r>
+              <a:rPr lang="en-US" sz="1050" b="1" dirty="0">
+                <a:solidFill>
+                  <a:srgbClr val="2B6CB0"/>
+                </a:solidFill>
+                <a:latin typeface="Pretendard" pitchFamily="34" charset="0"/>
+                <a:ea typeface="Pretendard" pitchFamily="34" charset="-122"/>
+                <a:cs typeface="Pretendard" pitchFamily="34" charset="-120"/>
+              </a:rPr>
+              <a:t>토지 및 건물 분석 포인트</a:t>
+            </a:r>
             <a:endParaRPr lang="en-US" sz="1050" dirty="0"/>
           </a:p>
         </p:txBody>
       </p:sp>
       <p:sp>
         <p:nvSpPr>
-          <p:cNvPr id="13" name="Text 11"/>
+          <p:cNvPr id="25" name="Text 23"/>
           <p:cNvSpPr/>
           <p:nvPr/>
         </p:nvSpPr>
@@ -5758,11 +6197,12 @@
           <a:bodyPr wrap="square" lIns="0" tIns="0" rIns="0" bIns="0" rtlCol="0" anchor="t"/>
           <a:lstStyle/>
           <a:p>
-            <a:pPr indent="0" marL="0">
+            <a:pPr marL="342900" indent="-342900">
               <a:lnSpc>
                 <a:spcPct val="120000"/>
               </a:lnSpc>
-              <a:buNone/>
+              <a:buSzPct val="100000"/>
+              <a:buChar char="•"/>
             </a:pPr>
             <a:r>
               <a:rPr lang="en-US" sz="930" dirty="0">
@@ -5773,15 +6213,223 @@
                 <a:ea typeface="Pretendard" pitchFamily="34" charset="-122"/>
                 <a:cs typeface="Pretendard" pitchFamily="34" charset="-120"/>
               </a:rPr>
-              <a:t>{"ok":true,"mocked":true,"extractedFields":{"area_signal":"역삼","asset_type":"오피스빌딩","price_band":"300억","size_signal":"3</a:t>
+              <a:t>물건 접면 도로 및 교통 여건은 현장 확인 사항입니다</a:t>
             </a:r>
             <a:endParaRPr lang="en-US" sz="930" dirty="0"/>
           </a:p>
-        </p:txBody>
-      </p:sp>
-      <p:sp>
-        <p:nvSpPr>
-          <p:cNvPr id="14" name="Text 12"/>
+          <a:p>
+            <a:pPr marL="342900" indent="-342900">
+              <a:lnSpc>
+                <a:spcPct val="120000"/>
+              </a:lnSpc>
+              <a:buSzPct val="100000"/>
+              <a:buChar char="•"/>
+            </a:pPr>
+            <a:r>
+              <a:rPr lang="en-US" sz="930" dirty="0">
+                <a:solidFill>
+                  <a:srgbClr val="10161F"/>
+                </a:solidFill>
+                <a:latin typeface="Pretendard" pitchFamily="34" charset="0"/>
+                <a:ea typeface="Pretendard" pitchFamily="34" charset="-122"/>
+                <a:cs typeface="Pretendard" pitchFamily="34" charset="-120"/>
+              </a:rPr>
+              <a:t>상세 건물 제원은 실사 자료를 참조하시기 바랍니다</a:t>
+            </a:r>
+            <a:endParaRPr lang="en-US" sz="930" dirty="0"/>
+          </a:p>
+          <a:p>
+            <a:pPr marL="342900" indent="-342900">
+              <a:lnSpc>
+                <a:spcPct val="120000"/>
+              </a:lnSpc>
+              <a:buSzPct val="100000"/>
+              <a:buChar char="•"/>
+            </a:pPr>
+            <a:r>
+              <a:rPr lang="en-US" sz="930" dirty="0">
+                <a:solidFill>
+                  <a:srgbClr val="10161F"/>
+                </a:solidFill>
+                <a:latin typeface="Pretendard" pitchFamily="34" charset="0"/>
+                <a:ea typeface="Pretendard" pitchFamily="34" charset="-122"/>
+                <a:cs typeface="Pretendard" pitchFamily="34" charset="-120"/>
+              </a:rPr>
+              <a:t>건물 현황 및 규모는 첨부 대장을 기준으로 합니다</a:t>
+            </a:r>
+            <a:endParaRPr lang="en-US" sz="930" dirty="0"/>
+          </a:p>
+        </p:txBody>
+      </p:sp>
+      <p:sp>
+        <p:nvSpPr>
+          <p:cNvPr id="26" name="Shape 24"/>
+          <p:cNvSpPr/>
+          <p:nvPr/>
+        </p:nvSpPr>
+        <p:spPr>
+          <a:xfrm>
+            <a:off x="7784287" y="3977640"/>
+            <a:ext cx="3840480" cy="2148840"/>
+          </a:xfrm>
+          <a:prstGeom prst="roundRect">
+            <a:avLst>
+              <a:gd name="adj" fmla="val 2553"/>
+            </a:avLst>
+          </a:prstGeom>
+          <a:solidFill>
+            <a:srgbClr val="BEE3F8"/>
+          </a:solidFill>
+          <a:ln/>
+        </p:spPr>
+      </p:sp>
+      <p:sp>
+        <p:nvSpPr>
+          <p:cNvPr id="27" name="Shape 25"/>
+          <p:cNvSpPr/>
+          <p:nvPr/>
+        </p:nvSpPr>
+        <p:spPr>
+          <a:xfrm>
+            <a:off x="7784287" y="4032504"/>
+            <a:ext cx="36576" cy="2039112"/>
+          </a:xfrm>
+          <a:prstGeom prst="rect">
+            <a:avLst/>
+          </a:prstGeom>
+          <a:solidFill>
+            <a:srgbClr val="2B6CB0"/>
+          </a:solidFill>
+          <a:ln/>
+        </p:spPr>
+      </p:sp>
+      <p:sp>
+        <p:nvSpPr>
+          <p:cNvPr id="28" name="Text 26"/>
+          <p:cNvSpPr/>
+          <p:nvPr/>
+        </p:nvSpPr>
+        <p:spPr>
+          <a:xfrm>
+            <a:off x="7967167" y="4087368"/>
+            <a:ext cx="3511296" cy="201168"/>
+          </a:xfrm>
+          <a:prstGeom prst="rect">
+            <a:avLst/>
+          </a:prstGeom>
+          <a:noFill/>
+          <a:ln/>
+        </p:spPr>
+        <p:txBody>
+          <a:bodyPr wrap="square" lIns="0" tIns="0" rIns="0" bIns="0" rtlCol="0" anchor="ctr"/>
+          <a:lstStyle/>
+          <a:p>
+            <a:pPr indent="0" marL="0">
+              <a:buNone/>
+            </a:pPr>
+            <a:r>
+              <a:rPr lang="en-US" sz="1050" b="1" dirty="0">
+                <a:solidFill>
+                  <a:srgbClr val="2B6CB0"/>
+                </a:solidFill>
+                <a:latin typeface="Pretendard" pitchFamily="34" charset="0"/>
+                <a:ea typeface="Pretendard" pitchFamily="34" charset="-122"/>
+                <a:cs typeface="Pretendard" pitchFamily="34" charset="-120"/>
+              </a:rPr>
+              <a:t>물건 실사 및 관리 상태</a:t>
+            </a:r>
+            <a:endParaRPr lang="en-US" sz="1050" dirty="0"/>
+          </a:p>
+        </p:txBody>
+      </p:sp>
+      <p:sp>
+        <p:nvSpPr>
+          <p:cNvPr id="29" name="Text 27"/>
+          <p:cNvSpPr/>
+          <p:nvPr/>
+        </p:nvSpPr>
+        <p:spPr>
+          <a:xfrm>
+            <a:off x="7967167" y="4306824"/>
+            <a:ext cx="3511296" cy="1746504"/>
+          </a:xfrm>
+          <a:prstGeom prst="rect">
+            <a:avLst/>
+          </a:prstGeom>
+          <a:noFill/>
+          <a:ln/>
+        </p:spPr>
+        <p:txBody>
+          <a:bodyPr wrap="square" lIns="0" tIns="0" rIns="0" bIns="0" rtlCol="0" anchor="t"/>
+          <a:lstStyle/>
+          <a:p>
+            <a:pPr marL="342900" indent="-342900">
+              <a:lnSpc>
+                <a:spcPct val="120000"/>
+              </a:lnSpc>
+              <a:buSzPct val="100000"/>
+              <a:buChar char="•"/>
+            </a:pPr>
+            <a:r>
+              <a:rPr lang="en-US" sz="930" dirty="0">
+                <a:solidFill>
+                  <a:srgbClr val="10161F"/>
+                </a:solidFill>
+                <a:latin typeface="Pretendard" pitchFamily="34" charset="0"/>
+                <a:ea typeface="Pretendard" pitchFamily="34" charset="-122"/>
+                <a:cs typeface="Pretendard" pitchFamily="34" charset="-120"/>
+              </a:rPr>
+              <a:t>건물 상태 및 설비 현황은 실사 보고서를 참조하십시오</a:t>
+            </a:r>
+            <a:endParaRPr lang="en-US" sz="930" dirty="0"/>
+          </a:p>
+          <a:p>
+            <a:pPr marL="342900" indent="-342900">
+              <a:lnSpc>
+                <a:spcPct val="120000"/>
+              </a:lnSpc>
+              <a:buSzPct val="100000"/>
+              <a:buChar char="•"/>
+            </a:pPr>
+            <a:r>
+              <a:rPr lang="en-US" sz="930" dirty="0">
+                <a:solidFill>
+                  <a:srgbClr val="10161F"/>
+                </a:solidFill>
+                <a:latin typeface="Pretendard" pitchFamily="34" charset="0"/>
+                <a:ea typeface="Pretendard" pitchFamily="34" charset="-122"/>
+                <a:cs typeface="Pretendard" pitchFamily="34" charset="-120"/>
+              </a:rPr>
+              <a:t>자금 조달 및 대출 조건은 금융 자문 후 확정됩니다</a:t>
+            </a:r>
+            <a:endParaRPr lang="en-US" sz="930" dirty="0"/>
+          </a:p>
+          <a:p>
+            <a:pPr marL="342900" indent="-342900">
+              <a:lnSpc>
+                <a:spcPct val="120000"/>
+              </a:lnSpc>
+              <a:buSzPct val="100000"/>
+              <a:buChar char="•"/>
+            </a:pPr>
+            <a:r>
+              <a:rPr lang="en-US" sz="930" dirty="0">
+                <a:solidFill>
+                  <a:srgbClr val="10161F"/>
+                </a:solidFill>
+                <a:latin typeface="Pretendard" pitchFamily="34" charset="0"/>
+                <a:ea typeface="Pretendard" pitchFamily="34" charset="-122"/>
+                <a:cs typeface="Pretendard" pitchFamily="34" charset="-120"/>
+              </a:rPr>
+              <a:t>상세 실사 단계에서 구체적인 계약 조건 및 세무 검토가 진행됩니다</a:t>
+            </a:r>
+            <a:endParaRPr lang="en-US" sz="930" dirty="0"/>
+          </a:p>
+        </p:txBody>
+      </p:sp>
+      <p:sp>
+        <p:nvSpPr>
+          <p:cNvPr id="30" name="Text 28"/>
           <p:cNvSpPr/>
           <p:nvPr/>
         </p:nvSpPr>
@@ -5820,7 +6468,7 @@
       </p:sp>
       <p:sp>
         <p:nvSpPr>
-          <p:cNvPr id="15" name="Text 13"/>
+          <p:cNvPr id="31" name="Text 29"/>
           <p:cNvSpPr/>
           <p:nvPr/>
         </p:nvSpPr>
@@ -6059,7 +6707,7 @@
                 <a:ea typeface="Pretendard" pitchFamily="34" charset="-122"/>
                 <a:cs typeface="Pretendard" pitchFamily="34" charset="-120"/>
               </a:rPr>
-              <a:t>시장 포지셔닝 및 시세 갭 분석</a:t>
+              <a:t>건축물 개요 및 물리 스펙</a:t>
             </a:r>
             <a:endParaRPr lang="en-US" sz="1100" dirty="0"/>
           </a:p>
@@ -6101,7 +6749,7 @@
                 <a:ea typeface="Pretendard" pitchFamily="34" charset="-122"/>
                 <a:cs typeface="Pretendard" pitchFamily="34" charset="-120"/>
               </a:rPr>
-              <a:t>평당 매매가</a:t>
+              <a:t>{"ok"</a:t>
             </a:r>
             <a:endParaRPr lang="en-US" sz="1400" dirty="0"/>
           </a:p>
@@ -6143,7 +6791,7 @@
                 <a:ea typeface="Pretendard" pitchFamily="34" charset="-122"/>
                 <a:cs typeface="Pretendard" pitchFamily="34" charset="-120"/>
               </a:rPr>
-              <a:t>매각 희망가 기준</a:t>
+              <a:t>true,"mocked":true,"extractedFields":{"area_signal":"역삼","asset_type":"오피스빌딩","price_band":"300억","size_signal":"3000평(약 9917.4㎡)"},"extractedFacts":{"region":"역삼","exactAddressCandidate":"역삼동 742-1","assetType":"오피스빌딩","priceText":"300억","sizeText":"3000평(약 9917.4㎡)","currentUse":"오피스","currentUseSignal":"근린생활시설","leaseSignal":"임대중","vacancySignal":"공실없음","tenantNames":"쿠팡","네이버","unitRentTexts":"301호: 1500만","sellerMotivationText":"자산 효율화","brokerNotes":"초역세권 매물"},"detectedSensitiveFields":"exact_address","tenant_name","ambiguousFields":,"warnings":,"areaSignal":"역삼","assetType":"오피스빌딩","priceBand":"300억","sizeSignal":"3000평(약 9917.4㎡)","dealType":"매각","buildingName":"역삼 센트럴타워","exactAddress":"역삼동 742-1","totalFloorArea":9917.3,"buildYear":2015,"currentUseSignal":"근린생활시설","vacancySignal":"공실 없음","fitSummary":"초역세권 근생 빌딩으로 시행/사옥 매입에 최적화","cautionSummary":"주요 임차인 만기 조율 필요","hiddenFields":"exact_address","seller_motivation","confidence":{"areaSignal":"confirmed","assetType":"confirmed","priceBand":"ai_hypothesis","fitSummary":"ai_hypothesis"},"missingData":"sizeSignal","boundaryNote":"본 자료는 실거래 통계 기반 참고치입니다.","buyerType":"법인 사옥형","budgetRange":{"min":50,"max":80,"display":"50억~80억"},"preferredRegions":"강남","성수","assetTypes":"꼬마빌딩","사옥용","purchasePurpose":"사옥용 매입","mustHave":"초역세권","주차","niceToHave":"테라스","루프탑","riskTolerance":"medium","financingNote":"자본금 50% 준비","missingQuestions":"구체적인 입주 시기가 언제인가요?","선호하는 수익률이 있나요?","privacyNotes":"연락처 비공개","fitReasons":"매수자 예산(50-80억)에 부합하는 매물입니다.","요청하신 성수/강남 권역에 해당합니다.","cautionReasons":"요청한 용도와 달리 명도 협의가 다소 필요합니다.","recommendedNextAction":"현장 답사 제안","kakaoMessage":"안녕하세요! 요청하신 조건에 부합하는 추천 매물이 있어 안내해 드립니다. 확인해보시고 피드백 부탁드립니다.","title":"강남 역삼역 초역세권 오피스 사옥용 빌딩 매각","shortSummary":"역삼역 도보 5분 거리의 준신축급 대형 오피스빌딩입니다.","dealPoints":"초역세권","사옥 최적","cautionPoints":"명도 조율 필요","hiddenInfoNotice":"보증금 및 지번은 인가 후 확인 가능","gateMessage":"G1 등급 등록이 필요합니다.","kakaoText":"강남 역삼역 오피스 빌딩 매각 안내입니다.","exactUnitCandidate":"101호","floor":"1층","areaSqmText":"150㎡","spaceType":"office","depositText":"5000만","monthlyRentText":"400만","maintenanceFeeText":"50만","availableFromText":"즉시입주","leaseTermMonthsText":"24","incentivesText":"렌트프리 2개월","restrictions":,"landlordIdentity":"김성수","currentTenant":"스타트업","vacancyReason":"이전 확장","rentNegotiation":"협의 가능","region":"성수동","areaSqm":150,"deposit":5000,"monthlyRent":400,"maintenanceFee":50,"availableFrom":"즉시입주","leaseTermMonths":24,"incentives":{"rentFreeMonths":2,"interiorSupport":"일부 인테리어 지원","freeRentDetail":"렌트프리 2개월 지원"},"shortSummaryLease":"성수역 도보 5분 거리 1층 리테일 상가 매물입니다."}</a:t>
             </a:r>
             <a:endParaRPr lang="en-US" sz="1400" dirty="0"/>
           </a:p>
@@ -6152,113 +6800,6 @@
       <p:sp>
         <p:nvSpPr>
           <p:cNvPr id="9" name="Shape 7"/>
-          <p:cNvSpPr/>
-          <p:nvPr/>
-        </p:nvSpPr>
-        <p:spPr>
-          <a:xfrm>
-            <a:off x="566928" y="2048256"/>
-            <a:ext cx="6858000" cy="0"/>
-          </a:xfrm>
-          <a:prstGeom prst="line">
-            <a:avLst/>
-          </a:prstGeom>
-          <a:noFill/>
-          <a:ln w="3810">
-            <a:solidFill>
-              <a:srgbClr val="CBD5E0"/>
-            </a:solidFill>
-            <a:prstDash val="solid"/>
-          </a:ln>
-        </p:spPr>
-      </p:sp>
-      <p:sp>
-        <p:nvSpPr>
-          <p:cNvPr id="10" name="Text 8"/>
-          <p:cNvSpPr/>
-          <p:nvPr/>
-        </p:nvSpPr>
-        <p:spPr>
-          <a:xfrm>
-            <a:off x="566928" y="2048256"/>
-            <a:ext cx="2606040" cy="402336"/>
-          </a:xfrm>
-          <a:prstGeom prst="rect">
-            <a:avLst/>
-          </a:prstGeom>
-          <a:noFill/>
-          <a:ln/>
-        </p:spPr>
-        <p:txBody>
-          <a:bodyPr wrap="square" lIns="0" tIns="0" rIns="0" bIns="0" rtlCol="0" anchor="ctr"/>
-          <a:lstStyle/>
-          <a:p>
-            <a:pPr indent="0" marL="0">
-              <a:lnSpc>
-                <a:spcPct val="120000"/>
-              </a:lnSpc>
-              <a:buNone/>
-            </a:pPr>
-            <a:r>
-              <a:rPr lang="en-US" sz="1400" dirty="0">
-                <a:solidFill>
-                  <a:srgbClr val="718096"/>
-                </a:solidFill>
-                <a:latin typeface="Pretendard" pitchFamily="34" charset="0"/>
-                <a:ea typeface="Pretendard" pitchFamily="34" charset="-122"/>
-                <a:cs typeface="Pretendard" pitchFamily="34" charset="-120"/>
-              </a:rPr>
-              <a:t>입지 프리미엄</a:t>
-            </a:r>
-            <a:endParaRPr lang="en-US" sz="1400" dirty="0"/>
-          </a:p>
-        </p:txBody>
-      </p:sp>
-      <p:sp>
-        <p:nvSpPr>
-          <p:cNvPr id="11" name="Text 9"/>
-          <p:cNvSpPr/>
-          <p:nvPr/>
-        </p:nvSpPr>
-        <p:spPr>
-          <a:xfrm>
-            <a:off x="3172968" y="2048256"/>
-            <a:ext cx="4251960" cy="402336"/>
-          </a:xfrm>
-          <a:prstGeom prst="rect">
-            <a:avLst/>
-          </a:prstGeom>
-          <a:noFill/>
-          <a:ln/>
-        </p:spPr>
-        <p:txBody>
-          <a:bodyPr wrap="square" lIns="0" tIns="0" rIns="0" bIns="0" rtlCol="0" anchor="ctr"/>
-          <a:lstStyle/>
-          <a:p>
-            <a:pPr indent="0" marL="0">
-              <a:lnSpc>
-                <a:spcPct val="120000"/>
-              </a:lnSpc>
-              <a:buNone/>
-            </a:pPr>
-            <a:r>
-              <a:rPr lang="en-US" sz="1400" b="1" dirty="0">
-                <a:solidFill>
-                  <a:srgbClr val="10161F"/>
-                </a:solidFill>
-                <a:latin typeface="Pretendard" pitchFamily="34" charset="0"/>
-                <a:ea typeface="Pretendard" pitchFamily="34" charset="-122"/>
-                <a:cs typeface="Pretendard" pitchFamily="34" charset="-120"/>
-              </a:rPr>
-              <a:t>입지 및 접근성 우수</a:t>
-            </a:r>
-            <a:endParaRPr lang="en-US" sz="1400" dirty="0"/>
-          </a:p>
-        </p:txBody>
-      </p:sp>
-      <p:sp>
-        <p:nvSpPr>
-          <p:cNvPr id="12" name="Shape 10"/>
           <p:cNvSpPr/>
           <p:nvPr/>
         </p:nvSpPr>
@@ -6281,18 +6822,18 @@
       </p:sp>
       <p:sp>
         <p:nvSpPr>
-          <p:cNvPr id="13" name="Shape 11"/>
+          <p:cNvPr id="10" name="Shape 8"/>
           <p:cNvSpPr/>
           <p:nvPr/>
         </p:nvSpPr>
         <p:spPr>
           <a:xfrm>
             <a:off x="7784287" y="1645920"/>
-            <a:ext cx="3840480" cy="1810512"/>
+            <a:ext cx="3840480" cy="2103120"/>
           </a:xfrm>
           <a:prstGeom prst="roundRect">
             <a:avLst>
-              <a:gd name="adj" fmla="val 3030"/>
+              <a:gd name="adj" fmla="val 2609"/>
             </a:avLst>
           </a:prstGeom>
           <a:solidFill>
@@ -6303,14 +6844,14 @@
       </p:sp>
       <p:sp>
         <p:nvSpPr>
-          <p:cNvPr id="14" name="Shape 12"/>
+          <p:cNvPr id="11" name="Shape 9"/>
           <p:cNvSpPr/>
           <p:nvPr/>
         </p:nvSpPr>
         <p:spPr>
           <a:xfrm>
             <a:off x="7784287" y="1700784"/>
-            <a:ext cx="36576" cy="1700784"/>
+            <a:ext cx="36576" cy="1993392"/>
           </a:xfrm>
           <a:prstGeom prst="rect">
             <a:avLst/>
@@ -6323,7 +6864,7 @@
       </p:sp>
       <p:sp>
         <p:nvSpPr>
-          <p:cNvPr id="15" name="Text 13"/>
+          <p:cNvPr id="12" name="Text 10"/>
           <p:cNvSpPr/>
           <p:nvPr/>
         </p:nvSpPr>
@@ -6351,14 +6892,14 @@
       </p:sp>
       <p:sp>
         <p:nvSpPr>
-          <p:cNvPr id="16" name="Text 14"/>
+          <p:cNvPr id="13" name="Text 11"/>
           <p:cNvSpPr/>
           <p:nvPr/>
         </p:nvSpPr>
         <p:spPr>
           <a:xfrm>
             <a:off x="7967167" y="1975104"/>
-            <a:ext cx="3511296" cy="1408176"/>
+            <a:ext cx="3511296" cy="1700784"/>
           </a:xfrm>
           <a:prstGeom prst="rect">
             <a:avLst/>
@@ -6385,7 +6926,7 @@
                 <a:ea typeface="Pretendard" pitchFamily="34" charset="-122"/>
                 <a:cs typeface="Pretendard" pitchFamily="34" charset="-120"/>
               </a:rPr>
-              <a:t>본 자산의 매각 희망가(115억)를 인근 권역 유사 매물의 거래사례 및 시세와 비교하여 가격 경쟁력을 평가합니다. ### 마켓 포지셔닝 비교</a:t>
+              <a:t>{"ok":true,"mocked":true,"extractedFields":{"area_signal":"역삼","asset_type":"오피스빌딩","price_band":"300억","size_signal":"3</a:t>
             </a:r>
             <a:endParaRPr lang="en-US" sz="930" dirty="0"/>
           </a:p>
@@ -6393,7 +6934,7 @@
       </p:sp>
       <p:sp>
         <p:nvSpPr>
-          <p:cNvPr id="17" name="Text 15"/>
+          <p:cNvPr id="14" name="Text 12"/>
           <p:cNvSpPr/>
           <p:nvPr/>
         </p:nvSpPr>
@@ -6432,7 +6973,7 @@
       </p:sp>
       <p:sp>
         <p:nvSpPr>
-          <p:cNvPr id="18" name="Text 16"/>
+          <p:cNvPr id="15" name="Text 13"/>
           <p:cNvSpPr/>
           <p:nvPr/>
         </p:nvSpPr>
@@ -6638,1158 +7179,93 @@
           </a:p>
         </p:txBody>
       </p:sp>
-      <p:graphicFrame>
-        <p:nvGraphicFramePr>
-          <p:cNvPr id="7" name="Table 0"/>
-          <p:cNvGraphicFramePr>
-            <a:graphicFrameLocks noGrp="1"/>
-          </p:cNvGraphicFramePr>
-          <p:nvPr>
-            <p:extLst>
-              <p:ext uri="{D42A27DB-BD31-4B8C-83A1-F6EECF244321}">
-                <p14:modId xmlns:p14="http://schemas.microsoft.com/office/powerpoint/2010/main" val="1579011935"/>
-              </p:ext>
-            </p:extLst>
-          </p:nvPr>
-        </p:nvGraphicFramePr>
-        <p:xfrm>
-          <a:off x="566928" y="1645920"/>
-          <a:ext cx="11057839" cy="914400"/>
-        </p:xfrm>
-        <a:graphic>
-          <a:graphicData uri="http://schemas.openxmlformats.org/drawingml/2006/table">
-            <a:tbl>
-              <a:tblPr/>
-              <a:tblGrid>
-                <a:gridCol w="2551809"/>
-                <a:gridCol w="4253015"/>
-                <a:gridCol w="4253015"/>
-              </a:tblGrid>
-              <a:tr h="438912">
-                <a:tc>
-                  <a:txBody>
-                    <a:bodyPr/>
-                    <a:lstStyle/>
-                    <a:p>
-                      <a:pPr indent="0" marL="0">
-                        <a:buNone/>
-                      </a:pPr>
-                      <a:r>
-                        <a:rPr lang="en-US" sz="1300" b="1" dirty="0">
-                          <a:solidFill>
-                            <a:srgbClr val="718096"/>
-                          </a:solidFill>
-                          <a:latin typeface="Pretendard" pitchFamily="34" charset="0"/>
-                          <a:ea typeface="Pretendard" pitchFamily="34" charset="-122"/>
-                          <a:cs typeface="Pretendard" pitchFamily="34" charset="-120"/>
-                        </a:rPr>
-                        <a:t>구분</a:t>
-                      </a:r>
-                      <a:endParaRPr lang="en-US" sz="1300" dirty="0">
-                        <a:latin typeface="Pretendard" charset="0"/>
-                        <a:ea typeface="Pretendard" charset="0"/>
-                        <a:cs typeface="Pretendard" charset="0"/>
-                      </a:endParaRPr>
-                    </a:p>
-                  </a:txBody>
-                  <a:tcPr marL="50800" marR="50800" marT="25400" marB="25400" anchor="ctr">
-                    <a:lnL w="3810" cap="flat" cmpd="sng" algn="ctr">
-                      <a:solidFill>
-                        <a:srgbClr val="CBD5E0"/>
-                      </a:solidFill>
-                      <a:prstDash val="solid"/>
-                      <a:round/>
-                      <a:headEnd type="none" w="med" len="med"/>
-                      <a:tailEnd type="none" w="med" len="med"/>
-                    </a:lnL>
-                    <a:lnR w="3810" cap="flat" cmpd="sng" algn="ctr">
-                      <a:solidFill>
-                        <a:srgbClr val="CBD5E0"/>
-                      </a:solidFill>
-                      <a:prstDash val="solid"/>
-                      <a:round/>
-                      <a:headEnd type="none" w="med" len="med"/>
-                      <a:tailEnd type="none" w="med" len="med"/>
-                    </a:lnR>
-                    <a:lnT w="3810" cap="flat" cmpd="sng" algn="ctr">
-                      <a:solidFill>
-                        <a:srgbClr val="CBD5E0"/>
-                      </a:solidFill>
-                      <a:prstDash val="solid"/>
-                      <a:round/>
-                      <a:headEnd type="none" w="med" len="med"/>
-                      <a:tailEnd type="none" w="med" len="med"/>
-                    </a:lnT>
-                    <a:lnB w="3810" cap="flat" cmpd="sng" algn="ctr">
-                      <a:solidFill>
-                        <a:srgbClr val="CBD5E0"/>
-                      </a:solidFill>
-                      <a:prstDash val="solid"/>
-                      <a:round/>
-                      <a:headEnd type="none" w="med" len="med"/>
-                      <a:tailEnd type="none" w="med" len="med"/>
-                    </a:lnB>
-                    <a:solidFill>
-                      <a:srgbClr val="F7FAFC"/>
-                    </a:solidFill>
-                  </a:tcPr>
-                </a:tc>
-                <a:tc>
-                  <a:txBody>
-                    <a:bodyPr/>
-                    <a:lstStyle/>
-                    <a:p>
-                      <a:pPr indent="0" marL="0">
-                        <a:buNone/>
-                      </a:pPr>
-                      <a:r>
-                        <a:rPr lang="en-US" sz="1300" b="1" dirty="0">
-                          <a:solidFill>
-                            <a:srgbClr val="718096"/>
-                          </a:solidFill>
-                          <a:latin typeface="Pretendard" pitchFamily="34" charset="0"/>
-                          <a:ea typeface="Pretendard" pitchFamily="34" charset="-122"/>
-                          <a:cs typeface="Pretendard" pitchFamily="34" charset="-120"/>
-                        </a:rPr>
-                        <a:t>타겟 </a:t>
-                      </a:r>
-                      <a:pPr indent="0" marL="0">
-                        <a:buNone/>
-                      </a:pPr>
-                      <a:r>
-                        <a:rPr lang="en-US" sz="1300" b="1" dirty="0">
-                          <a:solidFill>
-                            <a:srgbClr val="718096"/>
-                          </a:solidFill>
-                          <a:latin typeface="Pretendard" pitchFamily="34" charset="0"/>
-                          <a:ea typeface="Pretendard" pitchFamily="34" charset="-122"/>
-                          <a:cs typeface="Pretendard" pitchFamily="34" charset="-120"/>
-                        </a:rPr>
-                        <a:t>수치</a:t>
-                      </a:r>
-                      <a:endParaRPr lang="en-US" sz="1300" dirty="0">
-                        <a:latin typeface="Pretendard" charset="0"/>
-                        <a:ea typeface="Pretendard" charset="0"/>
-                        <a:cs typeface="Pretendard" charset="0"/>
-                      </a:endParaRPr>
-                    </a:p>
-                  </a:txBody>
-                  <a:tcPr marL="50800" marR="50800" marT="25400" marB="25400" anchor="ctr">
-                    <a:lnL w="3810" cap="flat" cmpd="sng" algn="ctr">
-                      <a:solidFill>
-                        <a:srgbClr val="CBD5E0"/>
-                      </a:solidFill>
-                      <a:prstDash val="solid"/>
-                      <a:round/>
-                      <a:headEnd type="none" w="med" len="med"/>
-                      <a:tailEnd type="none" w="med" len="med"/>
-                    </a:lnL>
-                    <a:lnR w="3810" cap="flat" cmpd="sng" algn="ctr">
-                      <a:solidFill>
-                        <a:srgbClr val="CBD5E0"/>
-                      </a:solidFill>
-                      <a:prstDash val="solid"/>
-                      <a:round/>
-                      <a:headEnd type="none" w="med" len="med"/>
-                      <a:tailEnd type="none" w="med" len="med"/>
-                    </a:lnR>
-                    <a:lnT w="3810" cap="flat" cmpd="sng" algn="ctr">
-                      <a:solidFill>
-                        <a:srgbClr val="CBD5E0"/>
-                      </a:solidFill>
-                      <a:prstDash val="solid"/>
-                      <a:round/>
-                      <a:headEnd type="none" w="med" len="med"/>
-                      <a:tailEnd type="none" w="med" len="med"/>
-                    </a:lnT>
-                    <a:lnB w="3810" cap="flat" cmpd="sng" algn="ctr">
-                      <a:solidFill>
-                        <a:srgbClr val="CBD5E0"/>
-                      </a:solidFill>
-                      <a:prstDash val="solid"/>
-                      <a:round/>
-                      <a:headEnd type="none" w="med" len="med"/>
-                      <a:tailEnd type="none" w="med" len="med"/>
-                    </a:lnB>
-                    <a:solidFill>
-                      <a:srgbClr val="F7FAFC"/>
-                    </a:solidFill>
-                  </a:tcPr>
-                </a:tc>
-                <a:tc>
-                  <a:txBody>
-                    <a:bodyPr/>
-                    <a:lstStyle/>
-                    <a:p>
-                      <a:pPr indent="0" marL="0">
-                        <a:buNone/>
-                      </a:pPr>
-                      <a:r>
-                        <a:rPr lang="en-US" sz="1300" b="1" dirty="0">
-                          <a:solidFill>
-                            <a:srgbClr val="718096"/>
-                          </a:solidFill>
-                          <a:latin typeface="Pretendard" pitchFamily="34" charset="0"/>
-                          <a:ea typeface="Pretendard" pitchFamily="34" charset="-122"/>
-                          <a:cs typeface="Pretendard" pitchFamily="34" charset="-120"/>
-                        </a:rPr>
-                        <a:t>비고</a:t>
-                      </a:r>
-                      <a:endParaRPr lang="en-US" sz="1300" dirty="0">
-                        <a:latin typeface="Pretendard" charset="0"/>
-                        <a:ea typeface="Pretendard" charset="0"/>
-                        <a:cs typeface="Pretendard" charset="0"/>
-                      </a:endParaRPr>
-                    </a:p>
-                  </a:txBody>
-                  <a:tcPr marL="50800" marR="50800" marT="25400" marB="25400" anchor="ctr">
-                    <a:lnL w="3810" cap="flat" cmpd="sng" algn="ctr">
-                      <a:solidFill>
-                        <a:srgbClr val="CBD5E0"/>
-                      </a:solidFill>
-                      <a:prstDash val="solid"/>
-                      <a:round/>
-                      <a:headEnd type="none" w="med" len="med"/>
-                      <a:tailEnd type="none" w="med" len="med"/>
-                    </a:lnL>
-                    <a:lnR w="3810" cap="flat" cmpd="sng" algn="ctr">
-                      <a:solidFill>
-                        <a:srgbClr val="CBD5E0"/>
-                      </a:solidFill>
-                      <a:prstDash val="solid"/>
-                      <a:round/>
-                      <a:headEnd type="none" w="med" len="med"/>
-                      <a:tailEnd type="none" w="med" len="med"/>
-                    </a:lnR>
-                    <a:lnT w="3810" cap="flat" cmpd="sng" algn="ctr">
-                      <a:solidFill>
-                        <a:srgbClr val="CBD5E0"/>
-                      </a:solidFill>
-                      <a:prstDash val="solid"/>
-                      <a:round/>
-                      <a:headEnd type="none" w="med" len="med"/>
-                      <a:tailEnd type="none" w="med" len="med"/>
-                    </a:lnT>
-                    <a:lnB w="3810" cap="flat" cmpd="sng" algn="ctr">
-                      <a:solidFill>
-                        <a:srgbClr val="CBD5E0"/>
-                      </a:solidFill>
-                      <a:prstDash val="solid"/>
-                      <a:round/>
-                      <a:headEnd type="none" w="med" len="med"/>
-                      <a:tailEnd type="none" w="med" len="med"/>
-                    </a:lnB>
-                    <a:solidFill>
-                      <a:srgbClr val="F7FAFC"/>
-                    </a:solidFill>
-                  </a:tcPr>
-                </a:tc>
-              </a:tr>
-              <a:tr h="438912">
-                <a:tc>
-                  <a:txBody>
-                    <a:bodyPr/>
-                    <a:lstStyle/>
-                    <a:p>
-                      <a:pPr indent="0" marL="0">
-                        <a:buNone/>
-                      </a:pPr>
-                      <a:r>
-                        <a:rPr lang="en-US" sz="1300" b="1" dirty="0">
-                          <a:solidFill>
-                            <a:srgbClr val="10161F"/>
-                          </a:solidFill>
-                          <a:latin typeface="Pretendard" pitchFamily="34" charset="0"/>
-                          <a:ea typeface="Pretendard" pitchFamily="34" charset="-122"/>
-                          <a:cs typeface="Pretendard" pitchFamily="34" charset="-120"/>
-                        </a:rPr>
-                        <a:t>목표 </a:t>
-                      </a:r>
-                      <a:pPr indent="0" marL="0">
-                        <a:buNone/>
-                      </a:pPr>
-                      <a:r>
-                        <a:rPr lang="en-US" sz="1300" b="1" dirty="0">
-                          <a:solidFill>
-                            <a:srgbClr val="10161F"/>
-                          </a:solidFill>
-                          <a:latin typeface="Pretendard" pitchFamily="34" charset="0"/>
-                          <a:ea typeface="Pretendard" pitchFamily="34" charset="-122"/>
-                          <a:cs typeface="Pretendard" pitchFamily="34" charset="-120"/>
-                        </a:rPr>
-                        <a:t>매각가</a:t>
-                      </a:r>
-                      <a:endParaRPr lang="en-US" sz="1300" dirty="0">
-                        <a:latin typeface="Pretendard" charset="0"/>
-                        <a:ea typeface="Pretendard" charset="0"/>
-                        <a:cs typeface="Pretendard" charset="0"/>
-                      </a:endParaRPr>
-                    </a:p>
-                  </a:txBody>
-                  <a:tcPr marL="50800" marR="50800" marT="25400" marB="25400" anchor="ctr">
-                    <a:lnL w="3810" cap="flat" cmpd="sng" algn="ctr">
-                      <a:solidFill>
-                        <a:srgbClr val="CBD5E0"/>
-                      </a:solidFill>
-                      <a:prstDash val="solid"/>
-                      <a:round/>
-                      <a:headEnd type="none" w="med" len="med"/>
-                      <a:tailEnd type="none" w="med" len="med"/>
-                    </a:lnL>
-                    <a:lnR w="3810" cap="flat" cmpd="sng" algn="ctr">
-                      <a:solidFill>
-                        <a:srgbClr val="CBD5E0"/>
-                      </a:solidFill>
-                      <a:prstDash val="solid"/>
-                      <a:round/>
-                      <a:headEnd type="none" w="med" len="med"/>
-                      <a:tailEnd type="none" w="med" len="med"/>
-                    </a:lnR>
-                    <a:lnT w="3810" cap="flat" cmpd="sng" algn="ctr">
-                      <a:solidFill>
-                        <a:srgbClr val="CBD5E0"/>
-                      </a:solidFill>
-                      <a:prstDash val="solid"/>
-                      <a:round/>
-                      <a:headEnd type="none" w="med" len="med"/>
-                      <a:tailEnd type="none" w="med" len="med"/>
-                    </a:lnT>
-                    <a:lnB w="3810" cap="flat" cmpd="sng" algn="ctr">
-                      <a:solidFill>
-                        <a:srgbClr val="CBD5E0"/>
-                      </a:solidFill>
-                      <a:prstDash val="solid"/>
-                      <a:round/>
-                      <a:headEnd type="none" w="med" len="med"/>
-                      <a:tailEnd type="none" w="med" len="med"/>
-                    </a:lnB>
-                    <a:solidFill>
-                      <a:srgbClr val="FFFFFF"/>
-                    </a:solidFill>
-                  </a:tcPr>
-                </a:tc>
-                <a:tc>
-                  <a:txBody>
-                    <a:bodyPr/>
-                    <a:lstStyle/>
-                    <a:p>
-                      <a:pPr indent="0" marL="0">
-                        <a:buNone/>
-                      </a:pPr>
-                      <a:r>
-                        <a:rPr lang="en-US" sz="1300" dirty="0">
-                          <a:solidFill>
-                            <a:srgbClr val="10161F"/>
-                          </a:solidFill>
-                          <a:latin typeface="Pretendard" pitchFamily="34" charset="0"/>
-                          <a:ea typeface="Pretendard" pitchFamily="34" charset="-122"/>
-                          <a:cs typeface="Pretendard" pitchFamily="34" charset="-120"/>
-                        </a:rPr>
-                        <a:t>주변 </a:t>
-                      </a:r>
-                      <a:pPr indent="0" marL="0">
-                        <a:buNone/>
-                      </a:pPr>
-                      <a:r>
-                        <a:rPr lang="en-US" sz="1300" dirty="0">
-                          <a:solidFill>
-                            <a:srgbClr val="10161F"/>
-                          </a:solidFill>
-                          <a:latin typeface="Pretendard" pitchFamily="34" charset="0"/>
-                          <a:ea typeface="Pretendard" pitchFamily="34" charset="-122"/>
-                          <a:cs typeface="Pretendard" pitchFamily="34" charset="-120"/>
-                        </a:rPr>
-                        <a:t>시세 </a:t>
-                      </a:r>
-                      <a:pPr indent="0" marL="0">
-                        <a:buNone/>
-                      </a:pPr>
-                      <a:r>
-                        <a:rPr lang="en-US" sz="1300" dirty="0">
-                          <a:solidFill>
-                            <a:srgbClr val="10161F"/>
-                          </a:solidFill>
-                          <a:latin typeface="Pretendard" pitchFamily="34" charset="0"/>
-                          <a:ea typeface="Pretendard" pitchFamily="34" charset="-122"/>
-                          <a:cs typeface="Pretendard" pitchFamily="34" charset="-120"/>
-                        </a:rPr>
-                        <a:t>상단 </a:t>
-                      </a:r>
-                      <a:pPr indent="0" marL="0">
-                        <a:buNone/>
-                      </a:pPr>
-                      <a:r>
-                        <a:rPr lang="en-US" sz="1300" dirty="0">
-                          <a:solidFill>
-                            <a:srgbClr val="10161F"/>
-                          </a:solidFill>
-                          <a:latin typeface="Pretendard" pitchFamily="34" charset="0"/>
-                          <a:ea typeface="Pretendard" pitchFamily="34" charset="-122"/>
-                          <a:cs typeface="Pretendard" pitchFamily="34" charset="-120"/>
-                        </a:rPr>
-                        <a:t>추정</a:t>
-                      </a:r>
-                      <a:endParaRPr lang="en-US" sz="1300" dirty="0">
-                        <a:latin typeface="Pretendard" charset="0"/>
-                        <a:ea typeface="Pretendard" charset="0"/>
-                        <a:cs typeface="Pretendard" charset="0"/>
-                      </a:endParaRPr>
-                    </a:p>
-                  </a:txBody>
-                  <a:tcPr marL="50800" marR="50800" marT="25400" marB="25400" anchor="ctr">
-                    <a:lnL w="3810" cap="flat" cmpd="sng" algn="ctr">
-                      <a:solidFill>
-                        <a:srgbClr val="CBD5E0"/>
-                      </a:solidFill>
-                      <a:prstDash val="solid"/>
-                      <a:round/>
-                      <a:headEnd type="none" w="med" len="med"/>
-                      <a:tailEnd type="none" w="med" len="med"/>
-                    </a:lnL>
-                    <a:lnR w="3810" cap="flat" cmpd="sng" algn="ctr">
-                      <a:solidFill>
-                        <a:srgbClr val="CBD5E0"/>
-                      </a:solidFill>
-                      <a:prstDash val="solid"/>
-                      <a:round/>
-                      <a:headEnd type="none" w="med" len="med"/>
-                      <a:tailEnd type="none" w="med" len="med"/>
-                    </a:lnR>
-                    <a:lnT w="3810" cap="flat" cmpd="sng" algn="ctr">
-                      <a:solidFill>
-                        <a:srgbClr val="CBD5E0"/>
-                      </a:solidFill>
-                      <a:prstDash val="solid"/>
-                      <a:round/>
-                      <a:headEnd type="none" w="med" len="med"/>
-                      <a:tailEnd type="none" w="med" len="med"/>
-                    </a:lnT>
-                    <a:lnB w="3810" cap="flat" cmpd="sng" algn="ctr">
-                      <a:solidFill>
-                        <a:srgbClr val="CBD5E0"/>
-                      </a:solidFill>
-                      <a:prstDash val="solid"/>
-                      <a:round/>
-                      <a:headEnd type="none" w="med" len="med"/>
-                      <a:tailEnd type="none" w="med" len="med"/>
-                    </a:lnB>
-                    <a:solidFill>
-                      <a:srgbClr val="FFFFFF"/>
-                    </a:solidFill>
-                  </a:tcPr>
-                </a:tc>
-                <a:tc>
-                  <a:txBody>
-                    <a:bodyPr/>
-                    <a:lstStyle/>
-                    <a:p>
-                      <a:pPr indent="0" marL="0">
-                        <a:buNone/>
-                      </a:pPr>
-                      <a:r>
-                        <a:rPr lang="en-US" sz="1300" dirty="0">
-                          <a:solidFill>
-                            <a:srgbClr val="10161F"/>
-                          </a:solidFill>
-                          <a:latin typeface="Pretendard" pitchFamily="34" charset="0"/>
-                          <a:ea typeface="Pretendard" pitchFamily="34" charset="-122"/>
-                          <a:cs typeface="Pretendard" pitchFamily="34" charset="-120"/>
-                        </a:rPr>
-                        <a:t>리밸런싱 </a:t>
-                      </a:r>
-                      <a:pPr indent="0" marL="0">
-                        <a:buNone/>
-                      </a:pPr>
-                      <a:r>
-                        <a:rPr lang="en-US" sz="1300" dirty="0">
-                          <a:solidFill>
-                            <a:srgbClr val="10161F"/>
-                          </a:solidFill>
-                          <a:latin typeface="Pretendard" pitchFamily="34" charset="0"/>
-                          <a:ea typeface="Pretendard" pitchFamily="34" charset="-122"/>
-                          <a:cs typeface="Pretendard" pitchFamily="34" charset="-120"/>
-                        </a:rPr>
-                        <a:t>타겟</a:t>
-                      </a:r>
-                      <a:endParaRPr lang="en-US" sz="1300" dirty="0">
-                        <a:latin typeface="Pretendard" charset="0"/>
-                        <a:ea typeface="Pretendard" charset="0"/>
-                        <a:cs typeface="Pretendard" charset="0"/>
-                      </a:endParaRPr>
-                    </a:p>
-                  </a:txBody>
-                  <a:tcPr marL="50800" marR="50800" marT="25400" marB="25400" anchor="ctr">
-                    <a:lnL w="3810" cap="flat" cmpd="sng" algn="ctr">
-                      <a:solidFill>
-                        <a:srgbClr val="CBD5E0"/>
-                      </a:solidFill>
-                      <a:prstDash val="solid"/>
-                      <a:round/>
-                      <a:headEnd type="none" w="med" len="med"/>
-                      <a:tailEnd type="none" w="med" len="med"/>
-                    </a:lnL>
-                    <a:lnR w="3810" cap="flat" cmpd="sng" algn="ctr">
-                      <a:solidFill>
-                        <a:srgbClr val="CBD5E0"/>
-                      </a:solidFill>
-                      <a:prstDash val="solid"/>
-                      <a:round/>
-                      <a:headEnd type="none" w="med" len="med"/>
-                      <a:tailEnd type="none" w="med" len="med"/>
-                    </a:lnR>
-                    <a:lnT w="3810" cap="flat" cmpd="sng" algn="ctr">
-                      <a:solidFill>
-                        <a:srgbClr val="CBD5E0"/>
-                      </a:solidFill>
-                      <a:prstDash val="solid"/>
-                      <a:round/>
-                      <a:headEnd type="none" w="med" len="med"/>
-                      <a:tailEnd type="none" w="med" len="med"/>
-                    </a:lnT>
-                    <a:lnB w="3810" cap="flat" cmpd="sng" algn="ctr">
-                      <a:solidFill>
-                        <a:srgbClr val="CBD5E0"/>
-                      </a:solidFill>
-                      <a:prstDash val="solid"/>
-                      <a:round/>
-                      <a:headEnd type="none" w="med" len="med"/>
-                      <a:tailEnd type="none" w="med" len="med"/>
-                    </a:lnB>
-                    <a:solidFill>
-                      <a:srgbClr val="FFFFFF"/>
-                    </a:solidFill>
-                  </a:tcPr>
-                </a:tc>
-              </a:tr>
-              <a:tr h="438912">
-                <a:tc>
-                  <a:txBody>
-                    <a:bodyPr/>
-                    <a:lstStyle/>
-                    <a:p>
-                      <a:pPr indent="0" marL="0">
-                        <a:buNone/>
-                      </a:pPr>
-                      <a:r>
-                        <a:rPr lang="en-US" sz="1300" b="1" dirty="0">
-                          <a:solidFill>
-                            <a:srgbClr val="10161F"/>
-                          </a:solidFill>
-                          <a:latin typeface="Pretendard" pitchFamily="34" charset="0"/>
-                          <a:ea typeface="Pretendard" pitchFamily="34" charset="-122"/>
-                          <a:cs typeface="Pretendard" pitchFamily="34" charset="-120"/>
-                        </a:rPr>
-                        <a:t>목표 </a:t>
-                      </a:r>
-                      <a:pPr indent="0" marL="0">
-                        <a:buNone/>
-                      </a:pPr>
-                      <a:r>
-                        <a:rPr lang="en-US" sz="1300" b="1" dirty="0">
-                          <a:solidFill>
-                            <a:srgbClr val="10161F"/>
-                          </a:solidFill>
-                          <a:latin typeface="Pretendard" pitchFamily="34" charset="0"/>
-                          <a:ea typeface="Pretendard" pitchFamily="34" charset="-122"/>
-                          <a:cs typeface="Pretendard" pitchFamily="34" charset="-120"/>
-                        </a:rPr>
-                        <a:t>시세차익</a:t>
-                      </a:r>
-                      <a:endParaRPr lang="en-US" sz="1300" dirty="0">
-                        <a:latin typeface="Pretendard" charset="0"/>
-                        <a:ea typeface="Pretendard" charset="0"/>
-                        <a:cs typeface="Pretendard" charset="0"/>
-                      </a:endParaRPr>
-                    </a:p>
-                  </a:txBody>
-                  <a:tcPr marL="50800" marR="50800" marT="25400" marB="25400" anchor="ctr">
-                    <a:lnL w="3810" cap="flat" cmpd="sng" algn="ctr">
-                      <a:solidFill>
-                        <a:srgbClr val="CBD5E0"/>
-                      </a:solidFill>
-                      <a:prstDash val="solid"/>
-                      <a:round/>
-                      <a:headEnd type="none" w="med" len="med"/>
-                      <a:tailEnd type="none" w="med" len="med"/>
-                    </a:lnL>
-                    <a:lnR w="3810" cap="flat" cmpd="sng" algn="ctr">
-                      <a:solidFill>
-                        <a:srgbClr val="CBD5E0"/>
-                      </a:solidFill>
-                      <a:prstDash val="solid"/>
-                      <a:round/>
-                      <a:headEnd type="none" w="med" len="med"/>
-                      <a:tailEnd type="none" w="med" len="med"/>
-                    </a:lnR>
-                    <a:lnT w="3810" cap="flat" cmpd="sng" algn="ctr">
-                      <a:solidFill>
-                        <a:srgbClr val="CBD5E0"/>
-                      </a:solidFill>
-                      <a:prstDash val="solid"/>
-                      <a:round/>
-                      <a:headEnd type="none" w="med" len="med"/>
-                      <a:tailEnd type="none" w="med" len="med"/>
-                    </a:lnT>
-                    <a:lnB w="3810" cap="flat" cmpd="sng" algn="ctr">
-                      <a:solidFill>
-                        <a:srgbClr val="CBD5E0"/>
-                      </a:solidFill>
-                      <a:prstDash val="solid"/>
-                      <a:round/>
-                      <a:headEnd type="none" w="med" len="med"/>
-                      <a:tailEnd type="none" w="med" len="med"/>
-                    </a:lnB>
-                    <a:solidFill>
-                      <a:srgbClr val="F7FAFC"/>
-                    </a:solidFill>
-                  </a:tcPr>
-                </a:tc>
-                <a:tc>
-                  <a:txBody>
-                    <a:bodyPr/>
-                    <a:lstStyle/>
-                    <a:p>
-                      <a:pPr indent="0" marL="0">
-                        <a:buNone/>
-                      </a:pPr>
-                      <a:r>
-                        <a:rPr lang="en-US" sz="1300" dirty="0">
-                          <a:solidFill>
-                            <a:srgbClr val="10161F"/>
-                          </a:solidFill>
-                          <a:latin typeface="Pretendard" pitchFamily="34" charset="0"/>
-                          <a:ea typeface="Pretendard" pitchFamily="34" charset="-122"/>
-                          <a:cs typeface="Pretendard" pitchFamily="34" charset="-120"/>
-                        </a:rPr>
-                        <a:t>매수 </a:t>
-                      </a:r>
-                      <a:pPr indent="0" marL="0">
-                        <a:buNone/>
-                      </a:pPr>
-                      <a:r>
-                        <a:rPr lang="en-US" sz="1300" dirty="0">
-                          <a:solidFill>
-                            <a:srgbClr val="10161F"/>
-                          </a:solidFill>
-                          <a:latin typeface="Pretendard" pitchFamily="34" charset="0"/>
-                          <a:ea typeface="Pretendard" pitchFamily="34" charset="-122"/>
-                          <a:cs typeface="Pretendard" pitchFamily="34" charset="-120"/>
-                        </a:rPr>
-                        <a:t>희망가 </a:t>
-                      </a:r>
-                      <a:pPr indent="0" marL="0">
-                        <a:buNone/>
-                      </a:pPr>
-                      <a:r>
-                        <a:rPr lang="en-US" sz="1300" dirty="0">
-                          <a:solidFill>
-                            <a:srgbClr val="10161F"/>
-                          </a:solidFill>
-                          <a:latin typeface="Pretendard" pitchFamily="34" charset="0"/>
-                          <a:ea typeface="Pretendard" pitchFamily="34" charset="-122"/>
-                          <a:cs typeface="Pretendard" pitchFamily="34" charset="-120"/>
-                        </a:rPr>
-                        <a:t>대비 </a:t>
-                      </a:r>
-                      <a:pPr indent="0" marL="0">
-                        <a:buNone/>
-                      </a:pPr>
-                      <a:r>
-                        <a:rPr lang="en-US" sz="1300" dirty="0">
-                          <a:solidFill>
-                            <a:srgbClr val="10161F"/>
-                          </a:solidFill>
-                          <a:latin typeface="Pretendard" pitchFamily="34" charset="0"/>
-                          <a:ea typeface="Pretendard" pitchFamily="34" charset="-122"/>
-                          <a:cs typeface="Pretendard" pitchFamily="34" charset="-120"/>
-                        </a:rPr>
-                        <a:t>갭</a:t>
-                      </a:r>
-                      <a:endParaRPr lang="en-US" sz="1300" dirty="0">
-                        <a:latin typeface="Pretendard" charset="0"/>
-                        <a:ea typeface="Pretendard" charset="0"/>
-                        <a:cs typeface="Pretendard" charset="0"/>
-                      </a:endParaRPr>
-                    </a:p>
-                  </a:txBody>
-                  <a:tcPr marL="50800" marR="50800" marT="25400" marB="25400" anchor="ctr">
-                    <a:lnL w="3810" cap="flat" cmpd="sng" algn="ctr">
-                      <a:solidFill>
-                        <a:srgbClr val="CBD5E0"/>
-                      </a:solidFill>
-                      <a:prstDash val="solid"/>
-                      <a:round/>
-                      <a:headEnd type="none" w="med" len="med"/>
-                      <a:tailEnd type="none" w="med" len="med"/>
-                    </a:lnL>
-                    <a:lnR w="3810" cap="flat" cmpd="sng" algn="ctr">
-                      <a:solidFill>
-                        <a:srgbClr val="CBD5E0"/>
-                      </a:solidFill>
-                      <a:prstDash val="solid"/>
-                      <a:round/>
-                      <a:headEnd type="none" w="med" len="med"/>
-                      <a:tailEnd type="none" w="med" len="med"/>
-                    </a:lnR>
-                    <a:lnT w="3810" cap="flat" cmpd="sng" algn="ctr">
-                      <a:solidFill>
-                        <a:srgbClr val="CBD5E0"/>
-                      </a:solidFill>
-                      <a:prstDash val="solid"/>
-                      <a:round/>
-                      <a:headEnd type="none" w="med" len="med"/>
-                      <a:tailEnd type="none" w="med" len="med"/>
-                    </a:lnT>
-                    <a:lnB w="3810" cap="flat" cmpd="sng" algn="ctr">
-                      <a:solidFill>
-                        <a:srgbClr val="CBD5E0"/>
-                      </a:solidFill>
-                      <a:prstDash val="solid"/>
-                      <a:round/>
-                      <a:headEnd type="none" w="med" len="med"/>
-                      <a:tailEnd type="none" w="med" len="med"/>
-                    </a:lnB>
-                    <a:solidFill>
-                      <a:srgbClr val="F7FAFC"/>
-                    </a:solidFill>
-                  </a:tcPr>
-                </a:tc>
-                <a:tc>
-                  <a:txBody>
-                    <a:bodyPr/>
-                    <a:lstStyle/>
-                    <a:p>
-                      <a:pPr indent="0" marL="0">
-                        <a:buNone/>
-                      </a:pPr>
-                      <a:r>
-                        <a:rPr lang="en-US" sz="1300" dirty="0">
-                          <a:solidFill>
-                            <a:srgbClr val="10161F"/>
-                          </a:solidFill>
-                          <a:latin typeface="Pretendard" pitchFamily="34" charset="0"/>
-                          <a:ea typeface="Pretendard" pitchFamily="34" charset="-122"/>
-                          <a:cs typeface="Pretendard" pitchFamily="34" charset="-120"/>
-                        </a:rPr>
-                        <a:t>자본 </a:t>
-                      </a:r>
-                      <a:pPr indent="0" marL="0">
-                        <a:buNone/>
-                      </a:pPr>
-                      <a:r>
-                        <a:rPr lang="en-US" sz="1300" dirty="0">
-                          <a:solidFill>
-                            <a:srgbClr val="10161F"/>
-                          </a:solidFill>
-                          <a:latin typeface="Pretendard" pitchFamily="34" charset="0"/>
-                          <a:ea typeface="Pretendard" pitchFamily="34" charset="-122"/>
-                          <a:cs typeface="Pretendard" pitchFamily="34" charset="-120"/>
-                        </a:rPr>
-                        <a:t>이득</a:t>
-                      </a:r>
-                      <a:endParaRPr lang="en-US" sz="1300" dirty="0">
-                        <a:latin typeface="Pretendard" charset="0"/>
-                        <a:ea typeface="Pretendard" charset="0"/>
-                        <a:cs typeface="Pretendard" charset="0"/>
-                      </a:endParaRPr>
-                    </a:p>
-                  </a:txBody>
-                  <a:tcPr marL="50800" marR="50800" marT="25400" marB="25400" anchor="ctr">
-                    <a:lnL w="3810" cap="flat" cmpd="sng" algn="ctr">
-                      <a:solidFill>
-                        <a:srgbClr val="CBD5E0"/>
-                      </a:solidFill>
-                      <a:prstDash val="solid"/>
-                      <a:round/>
-                      <a:headEnd type="none" w="med" len="med"/>
-                      <a:tailEnd type="none" w="med" len="med"/>
-                    </a:lnL>
-                    <a:lnR w="3810" cap="flat" cmpd="sng" algn="ctr">
-                      <a:solidFill>
-                        <a:srgbClr val="CBD5E0"/>
-                      </a:solidFill>
-                      <a:prstDash val="solid"/>
-                      <a:round/>
-                      <a:headEnd type="none" w="med" len="med"/>
-                      <a:tailEnd type="none" w="med" len="med"/>
-                    </a:lnR>
-                    <a:lnT w="3810" cap="flat" cmpd="sng" algn="ctr">
-                      <a:solidFill>
-                        <a:srgbClr val="CBD5E0"/>
-                      </a:solidFill>
-                      <a:prstDash val="solid"/>
-                      <a:round/>
-                      <a:headEnd type="none" w="med" len="med"/>
-                      <a:tailEnd type="none" w="med" len="med"/>
-                    </a:lnT>
-                    <a:lnB w="3810" cap="flat" cmpd="sng" algn="ctr">
-                      <a:solidFill>
-                        <a:srgbClr val="CBD5E0"/>
-                      </a:solidFill>
-                      <a:prstDash val="solid"/>
-                      <a:round/>
-                      <a:headEnd type="none" w="med" len="med"/>
-                      <a:tailEnd type="none" w="med" len="med"/>
-                    </a:lnB>
-                    <a:solidFill>
-                      <a:srgbClr val="F7FAFC"/>
-                    </a:solidFill>
-                  </a:tcPr>
-                </a:tc>
-              </a:tr>
-              <a:tr h="438912">
-                <a:tc>
-                  <a:txBody>
-                    <a:bodyPr/>
-                    <a:lstStyle/>
-                    <a:p>
-                      <a:pPr indent="0" marL="0">
-                        <a:buNone/>
-                      </a:pPr>
-                      <a:r>
-                        <a:rPr lang="en-US" sz="1300" b="1" dirty="0">
-                          <a:solidFill>
-                            <a:srgbClr val="10161F"/>
-                          </a:solidFill>
-                          <a:latin typeface="Pretendard" pitchFamily="34" charset="0"/>
-                          <a:ea typeface="Pretendard" pitchFamily="34" charset="-122"/>
-                          <a:cs typeface="Pretendard" pitchFamily="34" charset="-120"/>
-                        </a:rPr>
-                        <a:t>목표 </a:t>
-                      </a:r>
-                      <a:pPr indent="0" marL="0">
-                        <a:buNone/>
-                      </a:pPr>
-                      <a:r>
-                        <a:rPr lang="en-US" sz="1300" b="1" dirty="0">
-                          <a:solidFill>
-                            <a:srgbClr val="10161F"/>
-                          </a:solidFill>
-                          <a:latin typeface="Pretendard" pitchFamily="34" charset="0"/>
-                          <a:ea typeface="Pretendard" pitchFamily="34" charset="-122"/>
-                          <a:cs typeface="Pretendard" pitchFamily="34" charset="-120"/>
-                        </a:rPr>
-                        <a:t>보유기간 </a:t>
-                      </a:r>
-                      <a:pPr indent="0" marL="0">
-                        <a:buNone/>
-                      </a:pPr>
-                      <a:r>
-                        <a:rPr lang="en-US" sz="1300" b="1" dirty="0">
-                          <a:solidFill>
-                            <a:srgbClr val="10161F"/>
-                          </a:solidFill>
-                          <a:latin typeface="Pretendard" pitchFamily="34" charset="0"/>
-                          <a:ea typeface="Pretendard" pitchFamily="34" charset="-122"/>
-                          <a:cs typeface="Pretendard" pitchFamily="34" charset="-120"/>
-                        </a:rPr>
-                        <a:t>수익률 </a:t>
-                      </a:r>
-                      <a:pPr indent="0" marL="0">
-                        <a:buNone/>
-                      </a:pPr>
-                      <a:r>
-                        <a:rPr lang="en-US" sz="1300" b="1" dirty="0">
-                          <a:solidFill>
-                            <a:srgbClr val="10161F"/>
-                          </a:solidFill>
-                          <a:latin typeface="Pretendard" pitchFamily="34" charset="0"/>
-                          <a:ea typeface="Pretendard" pitchFamily="34" charset="-122"/>
-                          <a:cs typeface="Pretendard" pitchFamily="34" charset="-120"/>
-                        </a:rPr>
-                        <a:t>(HPR)</a:t>
-                      </a:r>
-                      <a:endParaRPr lang="en-US" sz="1300" dirty="0">
-                        <a:latin typeface="Pretendard" charset="0"/>
-                        <a:ea typeface="Pretendard" charset="0"/>
-                        <a:cs typeface="Pretendard" charset="0"/>
-                      </a:endParaRPr>
-                    </a:p>
-                  </a:txBody>
-                  <a:tcPr marL="50800" marR="50800" marT="25400" marB="25400" anchor="ctr">
-                    <a:lnL w="3810" cap="flat" cmpd="sng" algn="ctr">
-                      <a:solidFill>
-                        <a:srgbClr val="CBD5E0"/>
-                      </a:solidFill>
-                      <a:prstDash val="solid"/>
-                      <a:round/>
-                      <a:headEnd type="none" w="med" len="med"/>
-                      <a:tailEnd type="none" w="med" len="med"/>
-                    </a:lnL>
-                    <a:lnR w="3810" cap="flat" cmpd="sng" algn="ctr">
-                      <a:solidFill>
-                        <a:srgbClr val="CBD5E0"/>
-                      </a:solidFill>
-                      <a:prstDash val="solid"/>
-                      <a:round/>
-                      <a:headEnd type="none" w="med" len="med"/>
-                      <a:tailEnd type="none" w="med" len="med"/>
-                    </a:lnR>
-                    <a:lnT w="3810" cap="flat" cmpd="sng" algn="ctr">
-                      <a:solidFill>
-                        <a:srgbClr val="CBD5E0"/>
-                      </a:solidFill>
-                      <a:prstDash val="solid"/>
-                      <a:round/>
-                      <a:headEnd type="none" w="med" len="med"/>
-                      <a:tailEnd type="none" w="med" len="med"/>
-                    </a:lnT>
-                    <a:lnB w="3810" cap="flat" cmpd="sng" algn="ctr">
-                      <a:solidFill>
-                        <a:srgbClr val="CBD5E0"/>
-                      </a:solidFill>
-                      <a:prstDash val="solid"/>
-                      <a:round/>
-                      <a:headEnd type="none" w="med" len="med"/>
-                      <a:tailEnd type="none" w="med" len="med"/>
-                    </a:lnB>
-                    <a:solidFill>
-                      <a:srgbClr val="FFFFFF"/>
-                    </a:solidFill>
-                  </a:tcPr>
-                </a:tc>
-                <a:tc>
-                  <a:txBody>
-                    <a:bodyPr/>
-                    <a:lstStyle/>
-                    <a:p>
-                      <a:pPr indent="0" marL="0">
-                        <a:buNone/>
-                      </a:pPr>
-                      <a:r>
-                        <a:rPr lang="en-US" sz="1300" dirty="0">
-                          <a:solidFill>
-                            <a:srgbClr val="10161F"/>
-                          </a:solidFill>
-                          <a:latin typeface="Pretendard" pitchFamily="34" charset="0"/>
-                          <a:ea typeface="Pretendard" pitchFamily="34" charset="-122"/>
-                          <a:cs typeface="Pretendard" pitchFamily="34" charset="-120"/>
-                        </a:rPr>
-                        <a:t>산출 </a:t>
-                      </a:r>
-                      <a:pPr indent="0" marL="0">
-                        <a:buNone/>
-                      </a:pPr>
-                      <a:r>
-                        <a:rPr lang="en-US" sz="1300" dirty="0">
-                          <a:solidFill>
-                            <a:srgbClr val="10161F"/>
-                          </a:solidFill>
-                          <a:latin typeface="Pretendard" pitchFamily="34" charset="0"/>
-                          <a:ea typeface="Pretendard" pitchFamily="34" charset="-122"/>
-                          <a:cs typeface="Pretendard" pitchFamily="34" charset="-120"/>
-                        </a:rPr>
-                        <a:t>불가 </a:t>
-                      </a:r>
-                      <a:pPr indent="0" marL="0">
-                        <a:buNone/>
-                      </a:pPr>
-                      <a:r>
-                        <a:rPr lang="en-US" sz="1300" dirty="0">
-                          <a:solidFill>
-                            <a:srgbClr val="10161F"/>
-                          </a:solidFill>
-                          <a:latin typeface="Pretendard" pitchFamily="34" charset="0"/>
-                          <a:ea typeface="Pretendard" pitchFamily="34" charset="-122"/>
-                          <a:cs typeface="Pretendard" pitchFamily="34" charset="-120"/>
-                        </a:rPr>
-                        <a:t>(매도가 </a:t>
-                      </a:r>
-                      <a:pPr indent="0" marL="0">
-                        <a:buNone/>
-                      </a:pPr>
-                      <a:r>
-                        <a:rPr lang="en-US" sz="1300" dirty="0">
-                          <a:solidFill>
-                            <a:srgbClr val="10161F"/>
-                          </a:solidFill>
-                          <a:latin typeface="Pretendard" pitchFamily="34" charset="0"/>
-                          <a:ea typeface="Pretendard" pitchFamily="34" charset="-122"/>
-                          <a:cs typeface="Pretendard" pitchFamily="34" charset="-120"/>
-                        </a:rPr>
-                        <a:t>데이터 </a:t>
-                      </a:r>
-                      <a:pPr indent="0" marL="0">
-                        <a:buNone/>
-                      </a:pPr>
-                      <a:r>
-                        <a:rPr lang="en-US" sz="1300" dirty="0">
-                          <a:solidFill>
-                            <a:srgbClr val="10161F"/>
-                          </a:solidFill>
-                          <a:latin typeface="Pretendard" pitchFamily="34" charset="0"/>
-                          <a:ea typeface="Pretendard" pitchFamily="34" charset="-122"/>
-                          <a:cs typeface="Pretendard" pitchFamily="34" charset="-120"/>
-                        </a:rPr>
-                        <a:t>부족)</a:t>
-                      </a:r>
-                      <a:endParaRPr lang="en-US" sz="1300" dirty="0">
-                        <a:latin typeface="Pretendard" charset="0"/>
-                        <a:ea typeface="Pretendard" charset="0"/>
-                        <a:cs typeface="Pretendard" charset="0"/>
-                      </a:endParaRPr>
-                    </a:p>
-                  </a:txBody>
-                  <a:tcPr marL="50800" marR="50800" marT="25400" marB="25400" anchor="ctr">
-                    <a:lnL w="3810" cap="flat" cmpd="sng" algn="ctr">
-                      <a:solidFill>
-                        <a:srgbClr val="CBD5E0"/>
-                      </a:solidFill>
-                      <a:prstDash val="solid"/>
-                      <a:round/>
-                      <a:headEnd type="none" w="med" len="med"/>
-                      <a:tailEnd type="none" w="med" len="med"/>
-                    </a:lnL>
-                    <a:lnR w="3810" cap="flat" cmpd="sng" algn="ctr">
-                      <a:solidFill>
-                        <a:srgbClr val="CBD5E0"/>
-                      </a:solidFill>
-                      <a:prstDash val="solid"/>
-                      <a:round/>
-                      <a:headEnd type="none" w="med" len="med"/>
-                      <a:tailEnd type="none" w="med" len="med"/>
-                    </a:lnR>
-                    <a:lnT w="3810" cap="flat" cmpd="sng" algn="ctr">
-                      <a:solidFill>
-                        <a:srgbClr val="CBD5E0"/>
-                      </a:solidFill>
-                      <a:prstDash val="solid"/>
-                      <a:round/>
-                      <a:headEnd type="none" w="med" len="med"/>
-                      <a:tailEnd type="none" w="med" len="med"/>
-                    </a:lnT>
-                    <a:lnB w="3810" cap="flat" cmpd="sng" algn="ctr">
-                      <a:solidFill>
-                        <a:srgbClr val="CBD5E0"/>
-                      </a:solidFill>
-                      <a:prstDash val="solid"/>
-                      <a:round/>
-                      <a:headEnd type="none" w="med" len="med"/>
-                      <a:tailEnd type="none" w="med" len="med"/>
-                    </a:lnB>
-                    <a:solidFill>
-                      <a:srgbClr val="FFFFFF"/>
-                    </a:solidFill>
-                  </a:tcPr>
-                </a:tc>
-                <a:tc>
-                  <a:txBody>
-                    <a:bodyPr/>
-                    <a:lstStyle/>
-                    <a:p>
-                      <a:pPr indent="0" marL="0">
-                        <a:buNone/>
-                      </a:pPr>
-                      <a:r>
-                        <a:rPr lang="en-US" sz="1300" dirty="0">
-                          <a:solidFill>
-                            <a:srgbClr val="10161F"/>
-                          </a:solidFill>
-                          <a:latin typeface="Pretendard" pitchFamily="34" charset="0"/>
-                          <a:ea typeface="Pretendard" pitchFamily="34" charset="-122"/>
-                          <a:cs typeface="Pretendard" pitchFamily="34" charset="-120"/>
-                        </a:rPr>
-                        <a:t>보유 </a:t>
-                      </a:r>
-                      <a:pPr indent="0" marL="0">
-                        <a:buNone/>
-                      </a:pPr>
-                      <a:r>
-                        <a:rPr lang="en-US" sz="1300" dirty="0">
-                          <a:solidFill>
-                            <a:srgbClr val="10161F"/>
-                          </a:solidFill>
-                          <a:latin typeface="Pretendard" pitchFamily="34" charset="0"/>
-                          <a:ea typeface="Pretendard" pitchFamily="34" charset="-122"/>
-                          <a:cs typeface="Pretendard" pitchFamily="34" charset="-120"/>
-                        </a:rPr>
-                        <a:t>기간 </a:t>
-                      </a:r>
-                      <a:pPr indent="0" marL="0">
-                        <a:buNone/>
-                      </a:pPr>
-                      <a:r>
-                        <a:rPr lang="en-US" sz="1300" dirty="0">
-                          <a:solidFill>
-                            <a:srgbClr val="10161F"/>
-                          </a:solidFill>
-                          <a:latin typeface="Pretendard" pitchFamily="34" charset="0"/>
-                          <a:ea typeface="Pretendard" pitchFamily="34" charset="-122"/>
-                          <a:cs typeface="Pretendard" pitchFamily="34" charset="-120"/>
-                        </a:rPr>
-                        <a:t>2~3년 </a:t>
-                      </a:r>
-                      <a:pPr indent="0" marL="0">
-                        <a:buNone/>
-                      </a:pPr>
-                      <a:r>
-                        <a:rPr lang="en-US" sz="1300" dirty="0">
-                          <a:solidFill>
-                            <a:srgbClr val="10161F"/>
-                          </a:solidFill>
-                          <a:latin typeface="Pretendard" pitchFamily="34" charset="0"/>
-                          <a:ea typeface="Pretendard" pitchFamily="34" charset="-122"/>
-                          <a:cs typeface="Pretendard" pitchFamily="34" charset="-120"/>
-                        </a:rPr>
-                        <a:t>가정</a:t>
-                      </a:r>
-                      <a:endParaRPr lang="en-US" sz="1300" dirty="0">
-                        <a:latin typeface="Pretendard" charset="0"/>
-                        <a:ea typeface="Pretendard" charset="0"/>
-                        <a:cs typeface="Pretendard" charset="0"/>
-                      </a:endParaRPr>
-                    </a:p>
-                  </a:txBody>
-                  <a:tcPr marL="50800" marR="50800" marT="25400" marB="25400" anchor="ctr">
-                    <a:lnL w="3810" cap="flat" cmpd="sng" algn="ctr">
-                      <a:solidFill>
-                        <a:srgbClr val="CBD5E0"/>
-                      </a:solidFill>
-                      <a:prstDash val="solid"/>
-                      <a:round/>
-                      <a:headEnd type="none" w="med" len="med"/>
-                      <a:tailEnd type="none" w="med" len="med"/>
-                    </a:lnL>
-                    <a:lnR w="3810" cap="flat" cmpd="sng" algn="ctr">
-                      <a:solidFill>
-                        <a:srgbClr val="CBD5E0"/>
-                      </a:solidFill>
-                      <a:prstDash val="solid"/>
-                      <a:round/>
-                      <a:headEnd type="none" w="med" len="med"/>
-                      <a:tailEnd type="none" w="med" len="med"/>
-                    </a:lnR>
-                    <a:lnT w="3810" cap="flat" cmpd="sng" algn="ctr">
-                      <a:solidFill>
-                        <a:srgbClr val="CBD5E0"/>
-                      </a:solidFill>
-                      <a:prstDash val="solid"/>
-                      <a:round/>
-                      <a:headEnd type="none" w="med" len="med"/>
-                      <a:tailEnd type="none" w="med" len="med"/>
-                    </a:lnT>
-                    <a:lnB w="3810" cap="flat" cmpd="sng" algn="ctr">
-                      <a:solidFill>
-                        <a:srgbClr val="CBD5E0"/>
-                      </a:solidFill>
-                      <a:prstDash val="solid"/>
-                      <a:round/>
-                      <a:headEnd type="none" w="med" len="med"/>
-                      <a:tailEnd type="none" w="med" len="med"/>
-                    </a:lnB>
-                    <a:solidFill>
-                      <a:srgbClr val="FFFFFF"/>
-                    </a:solidFill>
-                  </a:tcPr>
-                </a:tc>
-              </a:tr>
-            </a:tbl>
-          </a:graphicData>
-        </a:graphic>
-      </p:graphicFrame>
-      <p:sp>
-        <p:nvSpPr>
-          <p:cNvPr id="7" name="Text 4"/>
+      <p:sp>
+        <p:nvSpPr>
+          <p:cNvPr id="6" name="Text 4"/>
+          <p:cNvSpPr/>
+          <p:nvPr/>
+        </p:nvSpPr>
+        <p:spPr>
+          <a:xfrm>
+            <a:off x="566928" y="1645920"/>
+            <a:ext cx="4201979" cy="402336"/>
+          </a:xfrm>
+          <a:prstGeom prst="rect">
+            <a:avLst/>
+          </a:prstGeom>
+          <a:noFill/>
+          <a:ln/>
+        </p:spPr>
+        <p:txBody>
+          <a:bodyPr wrap="square" lIns="0" tIns="0" rIns="0" bIns="0" rtlCol="0" anchor="ctr"/>
+          <a:lstStyle/>
+          <a:p>
+            <a:pPr indent="0" marL="0">
+              <a:lnSpc>
+                <a:spcPct val="120000"/>
+              </a:lnSpc>
+              <a:buNone/>
+            </a:pPr>
+            <a:r>
+              <a:rPr lang="en-US" sz="1400" dirty="0">
+                <a:solidFill>
+                  <a:srgbClr val="718096"/>
+                </a:solidFill>
+                <a:latin typeface="Pretendard" pitchFamily="34" charset="0"/>
+                <a:ea typeface="Pretendard" pitchFamily="34" charset="-122"/>
+                <a:cs typeface="Pretendard" pitchFamily="34" charset="-120"/>
+              </a:rPr>
+              <a:t>{"ok"</a:t>
+            </a:r>
+            <a:endParaRPr lang="en-US" sz="1400" dirty="0"/>
+          </a:p>
+        </p:txBody>
+      </p:sp>
+      <p:sp>
+        <p:nvSpPr>
+          <p:cNvPr id="7" name="Text 5"/>
+          <p:cNvSpPr/>
+          <p:nvPr/>
+        </p:nvSpPr>
+        <p:spPr>
+          <a:xfrm>
+            <a:off x="4768907" y="1645920"/>
+            <a:ext cx="6855860" cy="402336"/>
+          </a:xfrm>
+          <a:prstGeom prst="rect">
+            <a:avLst/>
+          </a:prstGeom>
+          <a:noFill/>
+          <a:ln/>
+        </p:spPr>
+        <p:txBody>
+          <a:bodyPr wrap="square" lIns="0" tIns="0" rIns="0" bIns="0" rtlCol="0" anchor="ctr"/>
+          <a:lstStyle/>
+          <a:p>
+            <a:pPr indent="0" marL="0">
+              <a:lnSpc>
+                <a:spcPct val="120000"/>
+              </a:lnSpc>
+              <a:buNone/>
+            </a:pPr>
+            <a:r>
+              <a:rPr lang="en-US" sz="1400" b="1" dirty="0">
+                <a:solidFill>
+                  <a:srgbClr val="10161F"/>
+                </a:solidFill>
+                <a:latin typeface="Pretendard" pitchFamily="34" charset="0"/>
+                <a:ea typeface="Pretendard" pitchFamily="34" charset="-122"/>
+                <a:cs typeface="Pretendard" pitchFamily="34" charset="-120"/>
+              </a:rPr>
+              <a:t>true,"mocked":true,"extractedFields":{"area_signal":"역삼","asset_type":"오피스빌딩","price_band":"300억","size_signal":"3000평(약 9917.4㎡)"},"extractedFacts":{"region":"역삼","exactAddressCandidate":"역삼동 742-1","assetType":"오피스빌딩","priceText":"300억","sizeText":"3000평(약 9917.4㎡)","currentUse":"오피스","currentUseSignal":"근린생활시설","leaseSignal":"임대중","vacancySignal":"공실없음","tenantNames":"쿠팡","네이버","unitRentTexts":"301호: 1500만","sellerMotivationText":"자산 효율화","brokerNotes":"초역세권 매물"},"detectedSensitiveFields":"exact_address","tenant_name","ambiguousFields":,"warnings":,"areaSignal":"역삼","assetType":"오피스빌딩","priceBand":"300억","sizeSignal":"3000평(약 9917.4㎡)","dealType":"매각","buildingName":"역삼 센트럴타워","exactAddress":"역삼동 742-1","totalFloorArea":9917.3,"buildYear":2015,"currentUseSignal":"근린생활시설","vacancySignal":"공실 없음","fitSummary":"초역세권 근생 빌딩으로 시행/사옥 매입에 최적화","cautionSummary":"주요 임차인 만기 조율 필요","hiddenFields":"exact_address","seller_motivation","confidence":{"areaSignal":"confirmed","assetType":"confirmed","priceBand":"ai_hypothesis","fitSummary":"ai_hypothesis"},"missingData":"sizeSignal","boundaryNote":"본 자료는 실거래 통계 기반 참고치입니다.","buyerType":"법인 사옥형","budgetRange":{"min":50,"max":80,"display":"50억~80억"},"preferredRegions":"강남","성수","assetTypes":"꼬마빌딩","사옥용","purchasePurpose":"사옥용 매입","mustHave":"초역세권","주차","niceToHave":"테라스","루프탑","riskTolerance":"medium","financingNote":"자본금 50% 준비","missingQuestions":"구체적인 입주 시기가 언제인가요?","선호하는 수익률이 있나요?","privacyNotes":"연락처 비공개","fitReasons":"매수자 예산(50-80억)에 부합하는 매물입니다.","요청하신 성수/강남 권역에 해당합니다.","cautionReasons":"요청한 용도와 달리 명도 협의가 다소 필요합니다.","recommendedNextAction":"현장 답사 제안","kakaoMessage":"안녕하세요! 요청하신 조건에 부합하는 추천 매물이 있어 안내해 드립니다. 확인해보시고 피드백 부탁드립니다.","title":"강남 역삼역 초역세권 오피스 사옥용 빌딩 매각","shortSummary":"역삼역 도보 5분 거리의 준신축급 대형 오피스빌딩입니다.","dealPoints":"초역세권","사옥 최적","cautionPoints":"명도 조율 필요","hiddenInfoNotice":"보증금 및 지번은 인가 후 확인 가능","gateMessage":"G1 등급 등록이 필요합니다.","kakaoText":"강남 역삼역 오피스 빌딩 매각 안내입니다.","exactUnitCandidate":"101호","floor":"1층","areaSqmText":"150㎡","spaceType":"office","depositText":"5000만","monthlyRentText":"400만","maintenanceFeeText":"50만","availableFromText":"즉시입주","leaseTermMonthsText":"24","incentivesText":"렌트프리 2개월","restrictions":,"landlordIdentity":"김성수","currentTenant":"스타트업","vacancyReason":"이전 확장","rentNegotiation":"협의 가능","region":"성수동","areaSqm":150,"deposit":5000,"monthlyRent":400,"maintenanceFee":50,"availableFrom":"즉시입주","leaseTermMonths":24,"incentives":{"rentFreeMonths":2,"interiorSupport":"일부 인테리어 지원","freeRentDetail":"렌트프리 2개월 지원"},"shortSummaryLease":"성수역 도보 5분 거리 1층 리테일 상가 매물입니다."}</a:t>
+            </a:r>
+            <a:endParaRPr lang="en-US" sz="1400" dirty="0"/>
+          </a:p>
+        </p:txBody>
+      </p:sp>
+      <p:sp>
+        <p:nvSpPr>
+          <p:cNvPr id="8" name="Text 6"/>
           <p:cNvSpPr/>
           <p:nvPr/>
         </p:nvSpPr>
@@ -7828,7 +7304,7 @@
       </p:sp>
       <p:sp>
         <p:nvSpPr>
-          <p:cNvPr id="8" name="Text 5"/>
+          <p:cNvPr id="9" name="Text 7"/>
           <p:cNvSpPr/>
           <p:nvPr/>
         </p:nvSpPr>
@@ -8361,13 +7837,6 @@
 <file path=ppt/slides/slide8.xml><?xml version="1.0" encoding="utf-8"?>
 <p:sld xmlns:a="http://schemas.openxmlformats.org/drawingml/2006/main" xmlns:r="http://schemas.openxmlformats.org/officeDocument/2006/relationships" xmlns:p="http://schemas.openxmlformats.org/presentationml/2006/main">
   <p:cSld name="Slide 8">
-    <p:bg>
-      <p:bgPr>
-        <a:solidFill>
-          <a:srgbClr val="FFFFFF"/>
-        </a:solidFill>
-      </p:bgPr>
-    </p:bg>
     <p:spTree>
       <p:nvGrpSpPr>
         <p:cNvPr id="1" name=""/>
@@ -8474,7 +7943,7 @@
                 <a:ea typeface="Arial" pitchFamily="34" charset="-122"/>
                 <a:cs typeface="Arial" pitchFamily="34" charset="-120"/>
               </a:rPr>
-              <a:t>Thesis</a:t>
+              <a:t>Checklist</a:t>
             </a:r>
             <a:endParaRPr lang="en-US" sz="950" dirty="0"/>
           </a:p>
@@ -8513,1243 +7982,71 @@
                 <a:ea typeface="Pretendard" pitchFamily="34" charset="-122"/>
                 <a:cs typeface="Pretendard" pitchFamily="34" charset="-120"/>
               </a:rPr>
-              <a:t>왜 지금 이 건물을 사야 하는가</a:t>
+              <a:t>섹션 상세</a:t>
             </a:r>
             <a:endParaRPr lang="en-US" sz="2300" dirty="0"/>
           </a:p>
         </p:txBody>
       </p:sp>
-      <p:graphicFrame>
-        <p:nvGraphicFramePr>
-          <p:cNvPr id="9" name="Table 0"/>
-          <p:cNvGraphicFramePr>
-            <a:graphicFrameLocks noGrp="1"/>
-          </p:cNvGraphicFramePr>
-          <p:nvPr>
-            <p:extLst>
-              <p:ext uri="{D42A27DB-BD31-4B8C-83A1-F6EECF244321}">
-                <p14:modId xmlns:p14="http://schemas.microsoft.com/office/powerpoint/2010/main" val="1579011935"/>
-              </p:ext>
-            </p:extLst>
-          </p:nvPr>
-        </p:nvGraphicFramePr>
-        <p:xfrm>
-          <a:off x="566928" y="4023360"/>
-          <a:ext cx="11057839" cy="914400"/>
-        </p:xfrm>
-        <a:graphic>
-          <a:graphicData uri="http://schemas.openxmlformats.org/drawingml/2006/table">
-            <a:tbl>
-              <a:tblPr/>
-              <a:tblGrid>
-                <a:gridCol w="2764460"/>
-                <a:gridCol w="2764460"/>
-                <a:gridCol w="2764460"/>
-                <a:gridCol w="2764460"/>
-              </a:tblGrid>
-              <a:tr h="329184">
-                <a:tc>
-                  <a:txBody>
-                    <a:bodyPr/>
-                    <a:lstStyle/>
-                    <a:p>
-                      <a:pPr indent="0" marL="0">
-                        <a:buNone/>
-                      </a:pPr>
-                      <a:r>
-                        <a:rPr lang="en-US" sz="1050" b="1" dirty="0">
-                          <a:solidFill>
-                            <a:srgbClr val="718096"/>
-                          </a:solidFill>
-                          <a:latin typeface="Pretendard" pitchFamily="34" charset="0"/>
-                          <a:ea typeface="Pretendard" pitchFamily="34" charset="-122"/>
-                          <a:cs typeface="Pretendard" pitchFamily="34" charset="-120"/>
-                        </a:rPr>
-                        <a:t>시나리오</a:t>
-                      </a:r>
-                      <a:endParaRPr lang="en-US" sz="1050" dirty="0">
-                        <a:latin typeface="Pretendard" charset="0"/>
-                        <a:ea typeface="Pretendard" charset="0"/>
-                        <a:cs typeface="Pretendard" charset="0"/>
-                      </a:endParaRPr>
-                    </a:p>
-                  </a:txBody>
-                  <a:tcPr marL="50800" marR="50800" marT="25400" marB="25400" anchor="ctr">
-                    <a:lnL w="3810" cap="flat" cmpd="sng" algn="ctr">
-                      <a:solidFill>
-                        <a:srgbClr val="CBD5E0"/>
-                      </a:solidFill>
-                      <a:prstDash val="solid"/>
-                      <a:round/>
-                      <a:headEnd type="none" w="med" len="med"/>
-                      <a:tailEnd type="none" w="med" len="med"/>
-                    </a:lnL>
-                    <a:lnR w="3810" cap="flat" cmpd="sng" algn="ctr">
-                      <a:solidFill>
-                        <a:srgbClr val="CBD5E0"/>
-                      </a:solidFill>
-                      <a:prstDash val="solid"/>
-                      <a:round/>
-                      <a:headEnd type="none" w="med" len="med"/>
-                      <a:tailEnd type="none" w="med" len="med"/>
-                    </a:lnR>
-                    <a:lnT w="3810" cap="flat" cmpd="sng" algn="ctr">
-                      <a:solidFill>
-                        <a:srgbClr val="CBD5E0"/>
-                      </a:solidFill>
-                      <a:prstDash val="solid"/>
-                      <a:round/>
-                      <a:headEnd type="none" w="med" len="med"/>
-                      <a:tailEnd type="none" w="med" len="med"/>
-                    </a:lnT>
-                    <a:lnB w="3810" cap="flat" cmpd="sng" algn="ctr">
-                      <a:solidFill>
-                        <a:srgbClr val="CBD5E0"/>
-                      </a:solidFill>
-                      <a:prstDash val="solid"/>
-                      <a:round/>
-                      <a:headEnd type="none" w="med" len="med"/>
-                      <a:tailEnd type="none" w="med" len="med"/>
-                    </a:lnB>
-                    <a:solidFill>
-                      <a:srgbClr val="F7FAFC"/>
-                    </a:solidFill>
-                  </a:tcPr>
-                </a:tc>
-                <a:tc>
-                  <a:txBody>
-                    <a:bodyPr/>
-                    <a:lstStyle/>
-                    <a:p>
-                      <a:pPr indent="0" marL="0">
-                        <a:buNone/>
-                      </a:pPr>
-                      <a:r>
-                        <a:rPr lang="en-US" sz="1050" b="1" dirty="0">
-                          <a:solidFill>
-                            <a:srgbClr val="718096"/>
-                          </a:solidFill>
-                          <a:latin typeface="Pretendard" pitchFamily="34" charset="0"/>
-                          <a:ea typeface="Pretendard" pitchFamily="34" charset="-122"/>
-                          <a:cs typeface="Pretendard" pitchFamily="34" charset="-120"/>
-                        </a:rPr>
-                        <a:t>NOI </a:t>
-                      </a:r>
-                      <a:pPr indent="0" marL="0">
-                        <a:buNone/>
-                      </a:pPr>
-                      <a:r>
-                        <a:rPr lang="en-US" sz="1050" b="1" dirty="0">
-                          <a:solidFill>
-                            <a:srgbClr val="718096"/>
-                          </a:solidFill>
-                          <a:latin typeface="Pretendard" pitchFamily="34" charset="0"/>
-                          <a:ea typeface="Pretendard" pitchFamily="34" charset="-122"/>
-                          <a:cs typeface="Pretendard" pitchFamily="34" charset="-120"/>
-                        </a:rPr>
-                        <a:t>개선</a:t>
-                      </a:r>
-                      <a:endParaRPr lang="en-US" sz="1050" dirty="0">
-                        <a:latin typeface="Pretendard" charset="0"/>
-                        <a:ea typeface="Pretendard" charset="0"/>
-                        <a:cs typeface="Pretendard" charset="0"/>
-                      </a:endParaRPr>
-                    </a:p>
-                  </a:txBody>
-                  <a:tcPr marL="50800" marR="50800" marT="25400" marB="25400" anchor="ctr">
-                    <a:lnL w="3810" cap="flat" cmpd="sng" algn="ctr">
-                      <a:solidFill>
-                        <a:srgbClr val="CBD5E0"/>
-                      </a:solidFill>
-                      <a:prstDash val="solid"/>
-                      <a:round/>
-                      <a:headEnd type="none" w="med" len="med"/>
-                      <a:tailEnd type="none" w="med" len="med"/>
-                    </a:lnL>
-                    <a:lnR w="3810" cap="flat" cmpd="sng" algn="ctr">
-                      <a:solidFill>
-                        <a:srgbClr val="CBD5E0"/>
-                      </a:solidFill>
-                      <a:prstDash val="solid"/>
-                      <a:round/>
-                      <a:headEnd type="none" w="med" len="med"/>
-                      <a:tailEnd type="none" w="med" len="med"/>
-                    </a:lnR>
-                    <a:lnT w="3810" cap="flat" cmpd="sng" algn="ctr">
-                      <a:solidFill>
-                        <a:srgbClr val="CBD5E0"/>
-                      </a:solidFill>
-                      <a:prstDash val="solid"/>
-                      <a:round/>
-                      <a:headEnd type="none" w="med" len="med"/>
-                      <a:tailEnd type="none" w="med" len="med"/>
-                    </a:lnT>
-                    <a:lnB w="3810" cap="flat" cmpd="sng" algn="ctr">
-                      <a:solidFill>
-                        <a:srgbClr val="CBD5E0"/>
-                      </a:solidFill>
-                      <a:prstDash val="solid"/>
-                      <a:round/>
-                      <a:headEnd type="none" w="med" len="med"/>
-                      <a:tailEnd type="none" w="med" len="med"/>
-                    </a:lnB>
-                    <a:solidFill>
-                      <a:srgbClr val="F7FAFC"/>
-                    </a:solidFill>
-                  </a:tcPr>
-                </a:tc>
-                <a:tc>
-                  <a:txBody>
-                    <a:bodyPr/>
-                    <a:lstStyle/>
-                    <a:p>
-                      <a:pPr indent="0" marL="0">
-                        <a:buNone/>
-                      </a:pPr>
-                      <a:r>
-                        <a:rPr lang="en-US" sz="1050" b="1" dirty="0">
-                          <a:solidFill>
-                            <a:srgbClr val="718096"/>
-                          </a:solidFill>
-                          <a:latin typeface="Pretendard" pitchFamily="34" charset="0"/>
-                          <a:ea typeface="Pretendard" pitchFamily="34" charset="-122"/>
-                          <a:cs typeface="Pretendard" pitchFamily="34" charset="-120"/>
-                        </a:rPr>
-                        <a:t>개선 </a:t>
-                      </a:r>
-                      <a:pPr indent="0" marL="0">
-                        <a:buNone/>
-                      </a:pPr>
-                      <a:r>
-                        <a:rPr lang="en-US" sz="1050" b="1" dirty="0">
-                          <a:solidFill>
-                            <a:srgbClr val="718096"/>
-                          </a:solidFill>
-                          <a:latin typeface="Pretendard" pitchFamily="34" charset="0"/>
-                          <a:ea typeface="Pretendard" pitchFamily="34" charset="-122"/>
-                          <a:cs typeface="Pretendard" pitchFamily="34" charset="-120"/>
-                        </a:rPr>
-                        <a:t>Cap </a:t>
-                      </a:r>
-                      <a:pPr indent="0" marL="0">
-                        <a:buNone/>
-                      </a:pPr>
-                      <a:r>
-                        <a:rPr lang="en-US" sz="1050" b="1" dirty="0">
-                          <a:solidFill>
-                            <a:srgbClr val="718096"/>
-                          </a:solidFill>
-                          <a:latin typeface="Pretendard" pitchFamily="34" charset="0"/>
-                          <a:ea typeface="Pretendard" pitchFamily="34" charset="-122"/>
-                          <a:cs typeface="Pretendard" pitchFamily="34" charset="-120"/>
-                        </a:rPr>
-                        <a:t>Rate</a:t>
-                      </a:r>
-                      <a:endParaRPr lang="en-US" sz="1050" dirty="0">
-                        <a:latin typeface="Pretendard" charset="0"/>
-                        <a:ea typeface="Pretendard" charset="0"/>
-                        <a:cs typeface="Pretendard" charset="0"/>
-                      </a:endParaRPr>
-                    </a:p>
-                  </a:txBody>
-                  <a:tcPr marL="50800" marR="50800" marT="25400" marB="25400" anchor="ctr">
-                    <a:lnL w="3810" cap="flat" cmpd="sng" algn="ctr">
-                      <a:solidFill>
-                        <a:srgbClr val="CBD5E0"/>
-                      </a:solidFill>
-                      <a:prstDash val="solid"/>
-                      <a:round/>
-                      <a:headEnd type="none" w="med" len="med"/>
-                      <a:tailEnd type="none" w="med" len="med"/>
-                    </a:lnL>
-                    <a:lnR w="3810" cap="flat" cmpd="sng" algn="ctr">
-                      <a:solidFill>
-                        <a:srgbClr val="CBD5E0"/>
-                      </a:solidFill>
-                      <a:prstDash val="solid"/>
-                      <a:round/>
-                      <a:headEnd type="none" w="med" len="med"/>
-                      <a:tailEnd type="none" w="med" len="med"/>
-                    </a:lnR>
-                    <a:lnT w="3810" cap="flat" cmpd="sng" algn="ctr">
-                      <a:solidFill>
-                        <a:srgbClr val="CBD5E0"/>
-                      </a:solidFill>
-                      <a:prstDash val="solid"/>
-                      <a:round/>
-                      <a:headEnd type="none" w="med" len="med"/>
-                      <a:tailEnd type="none" w="med" len="med"/>
-                    </a:lnT>
-                    <a:lnB w="3810" cap="flat" cmpd="sng" algn="ctr">
-                      <a:solidFill>
-                        <a:srgbClr val="CBD5E0"/>
-                      </a:solidFill>
-                      <a:prstDash val="solid"/>
-                      <a:round/>
-                      <a:headEnd type="none" w="med" len="med"/>
-                      <a:tailEnd type="none" w="med" len="med"/>
-                    </a:lnB>
-                    <a:solidFill>
-                      <a:srgbClr val="F7FAFC"/>
-                    </a:solidFill>
-                  </a:tcPr>
-                </a:tc>
-                <a:tc>
-                  <a:txBody>
-                    <a:bodyPr/>
-                    <a:lstStyle/>
-                    <a:p>
-                      <a:pPr indent="0" marL="0">
-                        <a:buNone/>
-                      </a:pPr>
-                      <a:r>
-                        <a:rPr lang="en-US" sz="1050" b="1" dirty="0">
-                          <a:solidFill>
-                            <a:srgbClr val="718096"/>
-                          </a:solidFill>
-                          <a:latin typeface="Pretendard" pitchFamily="34" charset="0"/>
-                          <a:ea typeface="Pretendard" pitchFamily="34" charset="-122"/>
-                          <a:cs typeface="Pretendard" pitchFamily="34" charset="-120"/>
-                        </a:rPr>
-                        <a:t>투자 </a:t>
-                      </a:r>
-                      <a:pPr indent="0" marL="0">
-                        <a:buNone/>
-                      </a:pPr>
-                      <a:r>
-                        <a:rPr lang="en-US" sz="1050" b="1" dirty="0">
-                          <a:solidFill>
-                            <a:srgbClr val="718096"/>
-                          </a:solidFill>
-                          <a:latin typeface="Pretendard" pitchFamily="34" charset="0"/>
-                          <a:ea typeface="Pretendard" pitchFamily="34" charset="-122"/>
-                          <a:cs typeface="Pretendard" pitchFamily="34" charset="-120"/>
-                        </a:rPr>
-                        <a:t>비용</a:t>
-                      </a:r>
-                      <a:endParaRPr lang="en-US" sz="1050" dirty="0">
-                        <a:latin typeface="Pretendard" charset="0"/>
-                        <a:ea typeface="Pretendard" charset="0"/>
-                        <a:cs typeface="Pretendard" charset="0"/>
-                      </a:endParaRPr>
-                    </a:p>
-                  </a:txBody>
-                  <a:tcPr marL="50800" marR="50800" marT="25400" marB="25400" anchor="ctr">
-                    <a:lnL w="3810" cap="flat" cmpd="sng" algn="ctr">
-                      <a:solidFill>
-                        <a:srgbClr val="CBD5E0"/>
-                      </a:solidFill>
-                      <a:prstDash val="solid"/>
-                      <a:round/>
-                      <a:headEnd type="none" w="med" len="med"/>
-                      <a:tailEnd type="none" w="med" len="med"/>
-                    </a:lnL>
-                    <a:lnR w="3810" cap="flat" cmpd="sng" algn="ctr">
-                      <a:solidFill>
-                        <a:srgbClr val="CBD5E0"/>
-                      </a:solidFill>
-                      <a:prstDash val="solid"/>
-                      <a:round/>
-                      <a:headEnd type="none" w="med" len="med"/>
-                      <a:tailEnd type="none" w="med" len="med"/>
-                    </a:lnR>
-                    <a:lnT w="3810" cap="flat" cmpd="sng" algn="ctr">
-                      <a:solidFill>
-                        <a:srgbClr val="CBD5E0"/>
-                      </a:solidFill>
-                      <a:prstDash val="solid"/>
-                      <a:round/>
-                      <a:headEnd type="none" w="med" len="med"/>
-                      <a:tailEnd type="none" w="med" len="med"/>
-                    </a:lnT>
-                    <a:lnB w="3810" cap="flat" cmpd="sng" algn="ctr">
-                      <a:solidFill>
-                        <a:srgbClr val="CBD5E0"/>
-                      </a:solidFill>
-                      <a:prstDash val="solid"/>
-                      <a:round/>
-                      <a:headEnd type="none" w="med" len="med"/>
-                      <a:tailEnd type="none" w="med" len="med"/>
-                    </a:lnB>
-                    <a:solidFill>
-                      <a:srgbClr val="F7FAFC"/>
-                    </a:solidFill>
-                  </a:tcPr>
-                </a:tc>
-              </a:tr>
-              <a:tr h="329184">
-                <a:tc>
-                  <a:txBody>
-                    <a:bodyPr/>
-                    <a:lstStyle/>
-                    <a:p>
-                      <a:pPr indent="0" marL="0">
-                        <a:buNone/>
-                      </a:pPr>
-                      <a:r>
-                        <a:rPr lang="en-US" sz="1050" b="1" dirty="0">
-                          <a:solidFill>
-                            <a:srgbClr val="10161F"/>
-                          </a:solidFill>
-                          <a:latin typeface="Pretendard" pitchFamily="34" charset="0"/>
-                          <a:ea typeface="Pretendard" pitchFamily="34" charset="-122"/>
-                          <a:cs typeface="Pretendard" pitchFamily="34" charset="-120"/>
-                        </a:rPr>
-                        <a:t>② </a:t>
-                      </a:r>
-                      <a:pPr indent="0" marL="0">
-                        <a:buNone/>
-                      </a:pPr>
-                      <a:r>
-                        <a:rPr lang="en-US" sz="1050" b="1" dirty="0">
-                          <a:solidFill>
-                            <a:srgbClr val="10161F"/>
-                          </a:solidFill>
-                          <a:latin typeface="Pretendard" pitchFamily="34" charset="0"/>
-                          <a:ea typeface="Pretendard" pitchFamily="34" charset="-122"/>
-                          <a:cs typeface="Pretendard" pitchFamily="34" charset="-120"/>
-                        </a:rPr>
-                        <a:t>임대료 </a:t>
-                      </a:r>
-                      <a:pPr indent="0" marL="0">
-                        <a:buNone/>
-                      </a:pPr>
-                      <a:r>
-                        <a:rPr lang="en-US" sz="1050" b="1" dirty="0">
-                          <a:solidFill>
-                            <a:srgbClr val="10161F"/>
-                          </a:solidFill>
-                          <a:latin typeface="Pretendard" pitchFamily="34" charset="0"/>
-                          <a:ea typeface="Pretendard" pitchFamily="34" charset="-122"/>
-                          <a:cs typeface="Pretendard" pitchFamily="34" charset="-120"/>
-                        </a:rPr>
-                        <a:t>현실화 </a:t>
-                      </a:r>
-                      <a:pPr indent="0" marL="0">
-                        <a:buNone/>
-                      </a:pPr>
-                      <a:r>
-                        <a:rPr lang="en-US" sz="1050" b="1" dirty="0">
-                          <a:solidFill>
-                            <a:srgbClr val="10161F"/>
-                          </a:solidFill>
-                          <a:latin typeface="Pretendard" pitchFamily="34" charset="0"/>
-                          <a:ea typeface="Pretendard" pitchFamily="34" charset="-122"/>
-                          <a:cs typeface="Pretendard" pitchFamily="34" charset="-120"/>
-                        </a:rPr>
-                        <a:t>(+5%)</a:t>
-                      </a:r>
-                      <a:endParaRPr lang="en-US" sz="1050" dirty="0">
-                        <a:latin typeface="Pretendard" charset="0"/>
-                        <a:ea typeface="Pretendard" charset="0"/>
-                        <a:cs typeface="Pretendard" charset="0"/>
-                      </a:endParaRPr>
-                    </a:p>
-                  </a:txBody>
-                  <a:tcPr marL="50800" marR="50800" marT="25400" marB="25400" anchor="ctr">
-                    <a:lnL w="3810" cap="flat" cmpd="sng" algn="ctr">
-                      <a:solidFill>
-                        <a:srgbClr val="CBD5E0"/>
-                      </a:solidFill>
-                      <a:prstDash val="solid"/>
-                      <a:round/>
-                      <a:headEnd type="none" w="med" len="med"/>
-                      <a:tailEnd type="none" w="med" len="med"/>
-                    </a:lnL>
-                    <a:lnR w="3810" cap="flat" cmpd="sng" algn="ctr">
-                      <a:solidFill>
-                        <a:srgbClr val="CBD5E0"/>
-                      </a:solidFill>
-                      <a:prstDash val="solid"/>
-                      <a:round/>
-                      <a:headEnd type="none" w="med" len="med"/>
-                      <a:tailEnd type="none" w="med" len="med"/>
-                    </a:lnR>
-                    <a:lnT w="3810" cap="flat" cmpd="sng" algn="ctr">
-                      <a:solidFill>
-                        <a:srgbClr val="CBD5E0"/>
-                      </a:solidFill>
-                      <a:prstDash val="solid"/>
-                      <a:round/>
-                      <a:headEnd type="none" w="med" len="med"/>
-                      <a:tailEnd type="none" w="med" len="med"/>
-                    </a:lnT>
-                    <a:lnB w="3810" cap="flat" cmpd="sng" algn="ctr">
-                      <a:solidFill>
-                        <a:srgbClr val="CBD5E0"/>
-                      </a:solidFill>
-                      <a:prstDash val="solid"/>
-                      <a:round/>
-                      <a:headEnd type="none" w="med" len="med"/>
-                      <a:tailEnd type="none" w="med" len="med"/>
-                    </a:lnB>
-                    <a:solidFill>
-                      <a:srgbClr val="FFFFFF"/>
-                    </a:solidFill>
-                  </a:tcPr>
-                </a:tc>
-                <a:tc>
-                  <a:txBody>
-                    <a:bodyPr/>
-                    <a:lstStyle/>
-                    <a:p>
-                      <a:pPr indent="0" marL="0">
-                        <a:buNone/>
-                      </a:pPr>
-                      <a:r>
-                        <a:rPr lang="en-US" sz="1050" dirty="0">
-                          <a:solidFill>
-                            <a:srgbClr val="10161F"/>
-                          </a:solidFill>
-                          <a:latin typeface="Pretendard" pitchFamily="34" charset="0"/>
-                          <a:ea typeface="Pretendard" pitchFamily="34" charset="-122"/>
-                          <a:cs typeface="Pretendard" pitchFamily="34" charset="-120"/>
-                        </a:rPr>
-                        <a:t>+약 </a:t>
-                      </a:r>
-                      <a:pPr indent="0" marL="0">
-                        <a:buNone/>
-                      </a:pPr>
-                      <a:r>
-                        <a:rPr lang="en-US" sz="1050" dirty="0">
-                          <a:solidFill>
-                            <a:srgbClr val="10161F"/>
-                          </a:solidFill>
-                          <a:latin typeface="Pretendard" pitchFamily="34" charset="0"/>
-                          <a:ea typeface="Pretendard" pitchFamily="34" charset="-122"/>
-                          <a:cs typeface="Pretendard" pitchFamily="34" charset="-120"/>
-                        </a:rPr>
-                        <a:t>0.10억 </a:t>
-                      </a:r>
-                      <a:pPr indent="0" marL="0">
-                        <a:buNone/>
-                      </a:pPr>
-                      <a:r>
-                        <a:rPr lang="en-US" sz="1050" dirty="0">
-                          <a:solidFill>
-                            <a:srgbClr val="10161F"/>
-                          </a:solidFill>
-                          <a:latin typeface="Pretendard" pitchFamily="34" charset="0"/>
-                          <a:ea typeface="Pretendard" pitchFamily="34" charset="-122"/>
-                          <a:cs typeface="Pretendard" pitchFamily="34" charset="-120"/>
-                        </a:rPr>
-                        <a:t>원 </a:t>
-                      </a:r>
-                      <a:pPr indent="0" marL="0">
-                        <a:buNone/>
-                      </a:pPr>
-                      <a:r>
-                        <a:rPr lang="en-US" sz="1050" dirty="0">
-                          <a:solidFill>
-                            <a:srgbClr val="10161F"/>
-                          </a:solidFill>
-                          <a:latin typeface="Pretendard" pitchFamily="34" charset="0"/>
-                          <a:ea typeface="Pretendard" pitchFamily="34" charset="-122"/>
-                          <a:cs typeface="Pretendard" pitchFamily="34" charset="-120"/>
-                        </a:rPr>
-                        <a:t>(+5%)</a:t>
-                      </a:r>
-                      <a:endParaRPr lang="en-US" sz="1050" dirty="0">
-                        <a:latin typeface="Pretendard" charset="0"/>
-                        <a:ea typeface="Pretendard" charset="0"/>
-                        <a:cs typeface="Pretendard" charset="0"/>
-                      </a:endParaRPr>
-                    </a:p>
-                  </a:txBody>
-                  <a:tcPr marL="50800" marR="50800" marT="25400" marB="25400" anchor="ctr">
-                    <a:lnL w="3810" cap="flat" cmpd="sng" algn="ctr">
-                      <a:solidFill>
-                        <a:srgbClr val="CBD5E0"/>
-                      </a:solidFill>
-                      <a:prstDash val="solid"/>
-                      <a:round/>
-                      <a:headEnd type="none" w="med" len="med"/>
-                      <a:tailEnd type="none" w="med" len="med"/>
-                    </a:lnL>
-                    <a:lnR w="3810" cap="flat" cmpd="sng" algn="ctr">
-                      <a:solidFill>
-                        <a:srgbClr val="CBD5E0"/>
-                      </a:solidFill>
-                      <a:prstDash val="solid"/>
-                      <a:round/>
-                      <a:headEnd type="none" w="med" len="med"/>
-                      <a:tailEnd type="none" w="med" len="med"/>
-                    </a:lnR>
-                    <a:lnT w="3810" cap="flat" cmpd="sng" algn="ctr">
-                      <a:solidFill>
-                        <a:srgbClr val="CBD5E0"/>
-                      </a:solidFill>
-                      <a:prstDash val="solid"/>
-                      <a:round/>
-                      <a:headEnd type="none" w="med" len="med"/>
-                      <a:tailEnd type="none" w="med" len="med"/>
-                    </a:lnT>
-                    <a:lnB w="3810" cap="flat" cmpd="sng" algn="ctr">
-                      <a:solidFill>
-                        <a:srgbClr val="CBD5E0"/>
-                      </a:solidFill>
-                      <a:prstDash val="solid"/>
-                      <a:round/>
-                      <a:headEnd type="none" w="med" len="med"/>
-                      <a:tailEnd type="none" w="med" len="med"/>
-                    </a:lnB>
-                    <a:solidFill>
-                      <a:srgbClr val="FFFFFF"/>
-                    </a:solidFill>
-                  </a:tcPr>
-                </a:tc>
-                <a:tc>
-                  <a:txBody>
-                    <a:bodyPr/>
-                    <a:lstStyle/>
-                    <a:p>
-                      <a:pPr indent="0" marL="0">
-                        <a:buNone/>
-                      </a:pPr>
-                      <a:r>
-                        <a:rPr lang="en-US" sz="1050" dirty="0">
-                          <a:solidFill>
-                            <a:srgbClr val="10161F"/>
-                          </a:solidFill>
-                          <a:latin typeface="Pretendard" pitchFamily="34" charset="0"/>
-                          <a:ea typeface="Pretendard" pitchFamily="34" charset="-122"/>
-                          <a:cs typeface="Pretendard" pitchFamily="34" charset="-120"/>
-                        </a:rPr>
-                        <a:t>1.82%</a:t>
-                      </a:r>
-                      <a:endParaRPr lang="en-US" sz="1050" dirty="0">
-                        <a:latin typeface="Pretendard" charset="0"/>
-                        <a:ea typeface="Pretendard" charset="0"/>
-                        <a:cs typeface="Pretendard" charset="0"/>
-                      </a:endParaRPr>
-                    </a:p>
-                  </a:txBody>
-                  <a:tcPr marL="50800" marR="50800" marT="25400" marB="25400" anchor="ctr">
-                    <a:lnL w="3810" cap="flat" cmpd="sng" algn="ctr">
-                      <a:solidFill>
-                        <a:srgbClr val="CBD5E0"/>
-                      </a:solidFill>
-                      <a:prstDash val="solid"/>
-                      <a:round/>
-                      <a:headEnd type="none" w="med" len="med"/>
-                      <a:tailEnd type="none" w="med" len="med"/>
-                    </a:lnL>
-                    <a:lnR w="3810" cap="flat" cmpd="sng" algn="ctr">
-                      <a:solidFill>
-                        <a:srgbClr val="CBD5E0"/>
-                      </a:solidFill>
-                      <a:prstDash val="solid"/>
-                      <a:round/>
-                      <a:headEnd type="none" w="med" len="med"/>
-                      <a:tailEnd type="none" w="med" len="med"/>
-                    </a:lnR>
-                    <a:lnT w="3810" cap="flat" cmpd="sng" algn="ctr">
-                      <a:solidFill>
-                        <a:srgbClr val="CBD5E0"/>
-                      </a:solidFill>
-                      <a:prstDash val="solid"/>
-                      <a:round/>
-                      <a:headEnd type="none" w="med" len="med"/>
-                      <a:tailEnd type="none" w="med" len="med"/>
-                    </a:lnT>
-                    <a:lnB w="3810" cap="flat" cmpd="sng" algn="ctr">
-                      <a:solidFill>
-                        <a:srgbClr val="CBD5E0"/>
-                      </a:solidFill>
-                      <a:prstDash val="solid"/>
-                      <a:round/>
-                      <a:headEnd type="none" w="med" len="med"/>
-                      <a:tailEnd type="none" w="med" len="med"/>
-                    </a:lnB>
-                    <a:solidFill>
-                      <a:srgbClr val="FFFFFF"/>
-                    </a:solidFill>
-                  </a:tcPr>
-                </a:tc>
-                <a:tc>
-                  <a:txBody>
-                    <a:bodyPr/>
-                    <a:lstStyle/>
-                    <a:p>
-                      <a:pPr indent="0" marL="0">
-                        <a:buNone/>
-                      </a:pPr>
-                      <a:r>
-                        <a:rPr lang="en-US" sz="1050" dirty="0">
-                          <a:solidFill>
-                            <a:srgbClr val="10161F"/>
-                          </a:solidFill>
-                          <a:latin typeface="Pretendard" pitchFamily="34" charset="0"/>
-                          <a:ea typeface="Pretendard" pitchFamily="34" charset="-122"/>
-                          <a:cs typeface="Pretendard" pitchFamily="34" charset="-120"/>
-                        </a:rPr>
-                        <a:t>불필요</a:t>
-                      </a:r>
-                      <a:endParaRPr lang="en-US" sz="1050" dirty="0">
-                        <a:latin typeface="Pretendard" charset="0"/>
-                        <a:ea typeface="Pretendard" charset="0"/>
-                        <a:cs typeface="Pretendard" charset="0"/>
-                      </a:endParaRPr>
-                    </a:p>
-                  </a:txBody>
-                  <a:tcPr marL="50800" marR="50800" marT="25400" marB="25400" anchor="ctr">
-                    <a:lnL w="3810" cap="flat" cmpd="sng" algn="ctr">
-                      <a:solidFill>
-                        <a:srgbClr val="CBD5E0"/>
-                      </a:solidFill>
-                      <a:prstDash val="solid"/>
-                      <a:round/>
-                      <a:headEnd type="none" w="med" len="med"/>
-                      <a:tailEnd type="none" w="med" len="med"/>
-                    </a:lnL>
-                    <a:lnR w="3810" cap="flat" cmpd="sng" algn="ctr">
-                      <a:solidFill>
-                        <a:srgbClr val="CBD5E0"/>
-                      </a:solidFill>
-                      <a:prstDash val="solid"/>
-                      <a:round/>
-                      <a:headEnd type="none" w="med" len="med"/>
-                      <a:tailEnd type="none" w="med" len="med"/>
-                    </a:lnR>
-                    <a:lnT w="3810" cap="flat" cmpd="sng" algn="ctr">
-                      <a:solidFill>
-                        <a:srgbClr val="CBD5E0"/>
-                      </a:solidFill>
-                      <a:prstDash val="solid"/>
-                      <a:round/>
-                      <a:headEnd type="none" w="med" len="med"/>
-                      <a:tailEnd type="none" w="med" len="med"/>
-                    </a:lnT>
-                    <a:lnB w="3810" cap="flat" cmpd="sng" algn="ctr">
-                      <a:solidFill>
-                        <a:srgbClr val="CBD5E0"/>
-                      </a:solidFill>
-                      <a:prstDash val="solid"/>
-                      <a:round/>
-                      <a:headEnd type="none" w="med" len="med"/>
-                      <a:tailEnd type="none" w="med" len="med"/>
-                    </a:lnB>
-                    <a:solidFill>
-                      <a:srgbClr val="FFFFFF"/>
-                    </a:solidFill>
-                  </a:tcPr>
-                </a:tc>
-              </a:tr>
-              <a:tr h="329184">
-                <a:tc>
-                  <a:txBody>
-                    <a:bodyPr/>
-                    <a:lstStyle/>
-                    <a:p>
-                      <a:pPr indent="0" marL="0">
-                        <a:buNone/>
-                      </a:pPr>
-                      <a:r>
-                        <a:rPr lang="en-US" sz="1050" b="1" dirty="0">
-                          <a:solidFill>
-                            <a:srgbClr val="10161F"/>
-                          </a:solidFill>
-                          <a:latin typeface="Pretendard" pitchFamily="34" charset="0"/>
-                          <a:ea typeface="Pretendard" pitchFamily="34" charset="-122"/>
-                          <a:cs typeface="Pretendard" pitchFamily="34" charset="-120"/>
-                        </a:rPr>
-                        <a:t>③ </a:t>
-                      </a:r>
-                      <a:pPr indent="0" marL="0">
-                        <a:buNone/>
-                      </a:pPr>
-                      <a:r>
-                        <a:rPr lang="en-US" sz="1050" b="1" dirty="0">
-                          <a:solidFill>
-                            <a:srgbClr val="10161F"/>
-                          </a:solidFill>
-                          <a:latin typeface="Pretendard" pitchFamily="34" charset="0"/>
-                          <a:ea typeface="Pretendard" pitchFamily="34" charset="-122"/>
-                          <a:cs typeface="Pretendard" pitchFamily="34" charset="-120"/>
-                        </a:rPr>
-                        <a:t>리모델링 </a:t>
-                      </a:r>
-                      <a:pPr indent="0" marL="0">
-                        <a:buNone/>
-                      </a:pPr>
-                      <a:r>
-                        <a:rPr lang="en-US" sz="1050" b="1" dirty="0">
-                          <a:solidFill>
-                            <a:srgbClr val="10161F"/>
-                          </a:solidFill>
-                          <a:latin typeface="Pretendard" pitchFamily="34" charset="0"/>
-                          <a:ea typeface="Pretendard" pitchFamily="34" charset="-122"/>
-                          <a:cs typeface="Pretendard" pitchFamily="34" charset="-120"/>
-                        </a:rPr>
-                        <a:t>후 </a:t>
-                      </a:r>
-                      <a:pPr indent="0" marL="0">
-                        <a:buNone/>
-                      </a:pPr>
-                      <a:r>
-                        <a:rPr lang="en-US" sz="1050" b="1" dirty="0">
-                          <a:solidFill>
-                            <a:srgbClr val="10161F"/>
-                          </a:solidFill>
-                          <a:latin typeface="Pretendard" pitchFamily="34" charset="0"/>
-                          <a:ea typeface="Pretendard" pitchFamily="34" charset="-122"/>
-                          <a:cs typeface="Pretendard" pitchFamily="34" charset="-120"/>
-                        </a:rPr>
-                        <a:t>임대료 </a:t>
-                      </a:r>
-                      <a:pPr indent="0" marL="0">
-                        <a:buNone/>
-                      </a:pPr>
-                      <a:r>
-                        <a:rPr lang="en-US" sz="1050" b="1" dirty="0">
-                          <a:solidFill>
-                            <a:srgbClr val="10161F"/>
-                          </a:solidFill>
-                          <a:latin typeface="Pretendard" pitchFamily="34" charset="0"/>
-                          <a:ea typeface="Pretendard" pitchFamily="34" charset="-122"/>
-                          <a:cs typeface="Pretendard" pitchFamily="34" charset="-120"/>
-                        </a:rPr>
-                        <a:t>상승</a:t>
-                      </a:r>
-                      <a:endParaRPr lang="en-US" sz="1050" dirty="0">
-                        <a:latin typeface="Pretendard" charset="0"/>
-                        <a:ea typeface="Pretendard" charset="0"/>
-                        <a:cs typeface="Pretendard" charset="0"/>
-                      </a:endParaRPr>
-                    </a:p>
-                  </a:txBody>
-                  <a:tcPr marL="50800" marR="50800" marT="25400" marB="25400" anchor="ctr">
-                    <a:lnL w="3810" cap="flat" cmpd="sng" algn="ctr">
-                      <a:solidFill>
-                        <a:srgbClr val="CBD5E0"/>
-                      </a:solidFill>
-                      <a:prstDash val="solid"/>
-                      <a:round/>
-                      <a:headEnd type="none" w="med" len="med"/>
-                      <a:tailEnd type="none" w="med" len="med"/>
-                    </a:lnL>
-                    <a:lnR w="3810" cap="flat" cmpd="sng" algn="ctr">
-                      <a:solidFill>
-                        <a:srgbClr val="CBD5E0"/>
-                      </a:solidFill>
-                      <a:prstDash val="solid"/>
-                      <a:round/>
-                      <a:headEnd type="none" w="med" len="med"/>
-                      <a:tailEnd type="none" w="med" len="med"/>
-                    </a:lnR>
-                    <a:lnT w="3810" cap="flat" cmpd="sng" algn="ctr">
-                      <a:solidFill>
-                        <a:srgbClr val="CBD5E0"/>
-                      </a:solidFill>
-                      <a:prstDash val="solid"/>
-                      <a:round/>
-                      <a:headEnd type="none" w="med" len="med"/>
-                      <a:tailEnd type="none" w="med" len="med"/>
-                    </a:lnT>
-                    <a:lnB w="3810" cap="flat" cmpd="sng" algn="ctr">
-                      <a:solidFill>
-                        <a:srgbClr val="CBD5E0"/>
-                      </a:solidFill>
-                      <a:prstDash val="solid"/>
-                      <a:round/>
-                      <a:headEnd type="none" w="med" len="med"/>
-                      <a:tailEnd type="none" w="med" len="med"/>
-                    </a:lnB>
-                    <a:solidFill>
-                      <a:srgbClr val="F7FAFC"/>
-                    </a:solidFill>
-                  </a:tcPr>
-                </a:tc>
-                <a:tc>
-                  <a:txBody>
-                    <a:bodyPr/>
-                    <a:lstStyle/>
-                    <a:p>
-                      <a:pPr indent="0" marL="0">
-                        <a:buNone/>
-                      </a:pPr>
-                      <a:r>
-                        <a:rPr lang="en-US" sz="1050" dirty="0">
-                          <a:solidFill>
-                            <a:srgbClr val="10161F"/>
-                          </a:solidFill>
-                          <a:latin typeface="Pretendard" pitchFamily="34" charset="0"/>
-                          <a:ea typeface="Pretendard" pitchFamily="34" charset="-122"/>
-                          <a:cs typeface="Pretendard" pitchFamily="34" charset="-120"/>
-                        </a:rPr>
-                        <a:t>+약 </a:t>
-                      </a:r>
-                      <a:pPr indent="0" marL="0">
-                        <a:buNone/>
-                      </a:pPr>
-                      <a:r>
-                        <a:rPr lang="en-US" sz="1050" dirty="0">
-                          <a:solidFill>
-                            <a:srgbClr val="10161F"/>
-                          </a:solidFill>
-                          <a:latin typeface="Pretendard" pitchFamily="34" charset="0"/>
-                          <a:ea typeface="Pretendard" pitchFamily="34" charset="-122"/>
-                          <a:cs typeface="Pretendard" pitchFamily="34" charset="-120"/>
-                        </a:rPr>
-                        <a:t>0.16억 </a:t>
-                      </a:r>
-                      <a:pPr indent="0" marL="0">
-                        <a:buNone/>
-                      </a:pPr>
-                      <a:r>
-                        <a:rPr lang="en-US" sz="1050" dirty="0">
-                          <a:solidFill>
-                            <a:srgbClr val="10161F"/>
-                          </a:solidFill>
-                          <a:latin typeface="Pretendard" pitchFamily="34" charset="0"/>
-                          <a:ea typeface="Pretendard" pitchFamily="34" charset="-122"/>
-                          <a:cs typeface="Pretendard" pitchFamily="34" charset="-120"/>
-                        </a:rPr>
-                        <a:t>원 </a:t>
-                      </a:r>
-                      <a:pPr indent="0" marL="0">
-                        <a:buNone/>
-                      </a:pPr>
-                      <a:r>
-                        <a:rPr lang="en-US" sz="1050" dirty="0">
-                          <a:solidFill>
-                            <a:srgbClr val="10161F"/>
-                          </a:solidFill>
-                          <a:latin typeface="Pretendard" pitchFamily="34" charset="0"/>
-                          <a:ea typeface="Pretendard" pitchFamily="34" charset="-122"/>
-                          <a:cs typeface="Pretendard" pitchFamily="34" charset="-120"/>
-                        </a:rPr>
-                        <a:t>(+8%)</a:t>
-                      </a:r>
-                      <a:endParaRPr lang="en-US" sz="1050" dirty="0">
-                        <a:latin typeface="Pretendard" charset="0"/>
-                        <a:ea typeface="Pretendard" charset="0"/>
-                        <a:cs typeface="Pretendard" charset="0"/>
-                      </a:endParaRPr>
-                    </a:p>
-                  </a:txBody>
-                  <a:tcPr marL="50800" marR="50800" marT="25400" marB="25400" anchor="ctr">
-                    <a:lnL w="3810" cap="flat" cmpd="sng" algn="ctr">
-                      <a:solidFill>
-                        <a:srgbClr val="CBD5E0"/>
-                      </a:solidFill>
-                      <a:prstDash val="solid"/>
-                      <a:round/>
-                      <a:headEnd type="none" w="med" len="med"/>
-                      <a:tailEnd type="none" w="med" len="med"/>
-                    </a:lnL>
-                    <a:lnR w="3810" cap="flat" cmpd="sng" algn="ctr">
-                      <a:solidFill>
-                        <a:srgbClr val="CBD5E0"/>
-                      </a:solidFill>
-                      <a:prstDash val="solid"/>
-                      <a:round/>
-                      <a:headEnd type="none" w="med" len="med"/>
-                      <a:tailEnd type="none" w="med" len="med"/>
-                    </a:lnR>
-                    <a:lnT w="3810" cap="flat" cmpd="sng" algn="ctr">
-                      <a:solidFill>
-                        <a:srgbClr val="CBD5E0"/>
-                      </a:solidFill>
-                      <a:prstDash val="solid"/>
-                      <a:round/>
-                      <a:headEnd type="none" w="med" len="med"/>
-                      <a:tailEnd type="none" w="med" len="med"/>
-                    </a:lnT>
-                    <a:lnB w="3810" cap="flat" cmpd="sng" algn="ctr">
-                      <a:solidFill>
-                        <a:srgbClr val="CBD5E0"/>
-                      </a:solidFill>
-                      <a:prstDash val="solid"/>
-                      <a:round/>
-                      <a:headEnd type="none" w="med" len="med"/>
-                      <a:tailEnd type="none" w="med" len="med"/>
-                    </a:lnB>
-                    <a:solidFill>
-                      <a:srgbClr val="F7FAFC"/>
-                    </a:solidFill>
-                  </a:tcPr>
-                </a:tc>
-                <a:tc>
-                  <a:txBody>
-                    <a:bodyPr/>
-                    <a:lstStyle/>
-                    <a:p>
-                      <a:pPr indent="0" marL="0">
-                        <a:buNone/>
-                      </a:pPr>
-                      <a:r>
-                        <a:rPr lang="en-US" sz="1050" dirty="0">
-                          <a:solidFill>
-                            <a:srgbClr val="10161F"/>
-                          </a:solidFill>
-                          <a:latin typeface="Pretendard" pitchFamily="34" charset="0"/>
-                          <a:ea typeface="Pretendard" pitchFamily="34" charset="-122"/>
-                          <a:cs typeface="Pretendard" pitchFamily="34" charset="-120"/>
-                        </a:rPr>
-                        <a:t>1.87%</a:t>
-                      </a:r>
-                      <a:endParaRPr lang="en-US" sz="1050" dirty="0">
-                        <a:latin typeface="Pretendard" charset="0"/>
-                        <a:ea typeface="Pretendard" charset="0"/>
-                        <a:cs typeface="Pretendard" charset="0"/>
-                      </a:endParaRPr>
-                    </a:p>
-                  </a:txBody>
-                  <a:tcPr marL="50800" marR="50800" marT="25400" marB="25400" anchor="ctr">
-                    <a:lnL w="3810" cap="flat" cmpd="sng" algn="ctr">
-                      <a:solidFill>
-                        <a:srgbClr val="CBD5E0"/>
-                      </a:solidFill>
-                      <a:prstDash val="solid"/>
-                      <a:round/>
-                      <a:headEnd type="none" w="med" len="med"/>
-                      <a:tailEnd type="none" w="med" len="med"/>
-                    </a:lnL>
-                    <a:lnR w="3810" cap="flat" cmpd="sng" algn="ctr">
-                      <a:solidFill>
-                        <a:srgbClr val="CBD5E0"/>
-                      </a:solidFill>
-                      <a:prstDash val="solid"/>
-                      <a:round/>
-                      <a:headEnd type="none" w="med" len="med"/>
-                      <a:tailEnd type="none" w="med" len="med"/>
-                    </a:lnR>
-                    <a:lnT w="3810" cap="flat" cmpd="sng" algn="ctr">
-                      <a:solidFill>
-                        <a:srgbClr val="CBD5E0"/>
-                      </a:solidFill>
-                      <a:prstDash val="solid"/>
-                      <a:round/>
-                      <a:headEnd type="none" w="med" len="med"/>
-                      <a:tailEnd type="none" w="med" len="med"/>
-                    </a:lnT>
-                    <a:lnB w="3810" cap="flat" cmpd="sng" algn="ctr">
-                      <a:solidFill>
-                        <a:srgbClr val="CBD5E0"/>
-                      </a:solidFill>
-                      <a:prstDash val="solid"/>
-                      <a:round/>
-                      <a:headEnd type="none" w="med" len="med"/>
-                      <a:tailEnd type="none" w="med" len="med"/>
-                    </a:lnB>
-                    <a:solidFill>
-                      <a:srgbClr val="F7FAFC"/>
-                    </a:solidFill>
-                  </a:tcPr>
-                </a:tc>
-                <a:tc>
-                  <a:txBody>
-                    <a:bodyPr/>
-                    <a:lstStyle/>
-                    <a:p>
-                      <a:pPr indent="0" marL="0">
-                        <a:buNone/>
-                      </a:pPr>
-                      <a:r>
-                        <a:rPr lang="en-US" sz="1050" dirty="0">
-                          <a:solidFill>
-                            <a:srgbClr val="10161F"/>
-                          </a:solidFill>
-                          <a:latin typeface="Pretendard" pitchFamily="34" charset="0"/>
-                          <a:ea typeface="Pretendard" pitchFamily="34" charset="-122"/>
-                          <a:cs typeface="Pretendard" pitchFamily="34" charset="-120"/>
-                        </a:rPr>
-                        <a:t>약 </a:t>
-                      </a:r>
-                      <a:pPr indent="0" marL="0">
-                        <a:buNone/>
-                      </a:pPr>
-                      <a:r>
-                        <a:rPr lang="en-US" sz="1050" dirty="0">
-                          <a:solidFill>
-                            <a:srgbClr val="10161F"/>
-                          </a:solidFill>
-                          <a:latin typeface="Pretendard" pitchFamily="34" charset="0"/>
-                          <a:ea typeface="Pretendard" pitchFamily="34" charset="-122"/>
-                          <a:cs typeface="Pretendard" pitchFamily="34" charset="-120"/>
-                        </a:rPr>
-                        <a:t>15.00억 </a:t>
-                      </a:r>
-                      <a:pPr indent="0" marL="0">
-                        <a:buNone/>
-                      </a:pPr>
-                      <a:r>
-                        <a:rPr lang="en-US" sz="1050" dirty="0">
-                          <a:solidFill>
-                            <a:srgbClr val="10161F"/>
-                          </a:solidFill>
-                          <a:latin typeface="Pretendard" pitchFamily="34" charset="0"/>
-                          <a:ea typeface="Pretendard" pitchFamily="34" charset="-122"/>
-                          <a:cs typeface="Pretendard" pitchFamily="34" charset="-120"/>
-                        </a:rPr>
-                        <a:t>원</a:t>
-                      </a:r>
-                      <a:endParaRPr lang="en-US" sz="1050" dirty="0">
-                        <a:latin typeface="Pretendard" charset="0"/>
-                        <a:ea typeface="Pretendard" charset="0"/>
-                        <a:cs typeface="Pretendard" charset="0"/>
-                      </a:endParaRPr>
-                    </a:p>
-                  </a:txBody>
-                  <a:tcPr marL="50800" marR="50800" marT="25400" marB="25400" anchor="ctr">
-                    <a:lnL w="3810" cap="flat" cmpd="sng" algn="ctr">
-                      <a:solidFill>
-                        <a:srgbClr val="CBD5E0"/>
-                      </a:solidFill>
-                      <a:prstDash val="solid"/>
-                      <a:round/>
-                      <a:headEnd type="none" w="med" len="med"/>
-                      <a:tailEnd type="none" w="med" len="med"/>
-                    </a:lnL>
-                    <a:lnR w="3810" cap="flat" cmpd="sng" algn="ctr">
-                      <a:solidFill>
-                        <a:srgbClr val="CBD5E0"/>
-                      </a:solidFill>
-                      <a:prstDash val="solid"/>
-                      <a:round/>
-                      <a:headEnd type="none" w="med" len="med"/>
-                      <a:tailEnd type="none" w="med" len="med"/>
-                    </a:lnR>
-                    <a:lnT w="3810" cap="flat" cmpd="sng" algn="ctr">
-                      <a:solidFill>
-                        <a:srgbClr val="CBD5E0"/>
-                      </a:solidFill>
-                      <a:prstDash val="solid"/>
-                      <a:round/>
-                      <a:headEnd type="none" w="med" len="med"/>
-                      <a:tailEnd type="none" w="med" len="med"/>
-                    </a:lnT>
-                    <a:lnB w="3810" cap="flat" cmpd="sng" algn="ctr">
-                      <a:solidFill>
-                        <a:srgbClr val="CBD5E0"/>
-                      </a:solidFill>
-                      <a:prstDash val="solid"/>
-                      <a:round/>
-                      <a:headEnd type="none" w="med" len="med"/>
-                      <a:tailEnd type="none" w="med" len="med"/>
-                    </a:lnB>
-                    <a:solidFill>
-                      <a:srgbClr val="F7FAFC"/>
-                    </a:solidFill>
-                  </a:tcPr>
-                </a:tc>
-              </a:tr>
-            </a:tbl>
-          </a:graphicData>
-        </a:graphic>
-      </p:graphicFrame>
-      <p:sp>
-        <p:nvSpPr>
-          <p:cNvPr id="7" name="Shape 4"/>
-          <p:cNvSpPr/>
-          <p:nvPr/>
-        </p:nvSpPr>
-        <p:spPr>
-          <a:xfrm>
-            <a:off x="566928" y="5193792"/>
-            <a:ext cx="11057839" cy="804672"/>
-          </a:xfrm>
-          <a:prstGeom prst="roundRect">
-            <a:avLst>
-              <a:gd name="adj" fmla="val 6818"/>
-            </a:avLst>
-          </a:prstGeom>
-          <a:solidFill>
-            <a:srgbClr val="F3EBDA"/>
-          </a:solidFill>
-          <a:ln w="10160">
-            <a:solidFill>
-              <a:srgbClr val="D9B668"/>
-            </a:solidFill>
-            <a:prstDash val="solid"/>
-          </a:ln>
-        </p:spPr>
-      </p:sp>
-      <p:sp>
-        <p:nvSpPr>
-          <p:cNvPr id="8" name="Text 5"/>
-          <p:cNvSpPr/>
-          <p:nvPr/>
-        </p:nvSpPr>
-        <p:spPr>
-          <a:xfrm>
-            <a:off x="749808" y="5303520"/>
-            <a:ext cx="1691640" cy="256032"/>
-          </a:xfrm>
-          <a:prstGeom prst="rect">
-            <a:avLst/>
-          </a:prstGeom>
-          <a:noFill/>
-          <a:ln/>
-        </p:spPr>
-        <p:txBody>
-          <a:bodyPr wrap="square" lIns="0" tIns="0" rIns="0" bIns="0" rtlCol="0" anchor="ctr"/>
+      <p:sp>
+        <p:nvSpPr>
+          <p:cNvPr id="6" name="Text 4"/>
+          <p:cNvSpPr/>
+          <p:nvPr/>
+        </p:nvSpPr>
+        <p:spPr>
+          <a:xfrm>
+            <a:off x="566928" y="1517904"/>
+            <a:ext cx="6492240" cy="274320"/>
+          </a:xfrm>
+          <a:prstGeom prst="rect">
+            <a:avLst/>
+          </a:prstGeom>
+          <a:noFill/>
+          <a:ln/>
+        </p:spPr>
+        <p:txBody>
+          <a:bodyPr wrap="square" rtlCol="0" anchor="ctr"/>
           <a:lstStyle/>
           <a:p>
             <a:pPr indent="0" marL="0">
               <a:buNone/>
             </a:pPr>
-            <a:r>
-              <a:rPr lang="en-US" sz="1050" b="1" dirty="0">
-                <a:solidFill>
-                  <a:srgbClr val="977024"/>
-                </a:solidFill>
-                <a:latin typeface="Pretendard" pitchFamily="34" charset="0"/>
-                <a:ea typeface="Pretendard" pitchFamily="34" charset="-122"/>
-                <a:cs typeface="Pretendard" pitchFamily="34" charset="-120"/>
-              </a:rPr>
-              <a:t>종합 가치 제안</a:t>
-            </a:r>
-            <a:endParaRPr lang="en-US" sz="1050" dirty="0"/>
-          </a:p>
-        </p:txBody>
-      </p:sp>
-      <p:sp>
-        <p:nvSpPr>
-          <p:cNvPr id="9" name="Text 6"/>
-          <p:cNvSpPr/>
-          <p:nvPr/>
-        </p:nvSpPr>
-        <p:spPr>
-          <a:xfrm>
-            <a:off x="2487168" y="5266944"/>
-            <a:ext cx="8954719" cy="658368"/>
-          </a:xfrm>
-          <a:prstGeom prst="rect">
-            <a:avLst/>
-          </a:prstGeom>
-          <a:noFill/>
-          <a:ln/>
-        </p:spPr>
-        <p:txBody>
-          <a:bodyPr wrap="square" lIns="0" tIns="0" rIns="0" bIns="0" rtlCol="0" anchor="ctr"/>
+            <a:endParaRPr lang="en-US" sz="1400" dirty="0"/>
+          </a:p>
+        </p:txBody>
+      </p:sp>
+      <p:sp>
+        <p:nvSpPr>
+          <p:cNvPr id="7" name="Text 5"/>
+          <p:cNvSpPr/>
+          <p:nvPr/>
+        </p:nvSpPr>
+        <p:spPr>
+          <a:xfrm>
+            <a:off x="566928" y="1874520"/>
+            <a:ext cx="6492240" cy="182880"/>
+          </a:xfrm>
+          <a:prstGeom prst="rect">
+            <a:avLst/>
+          </a:prstGeom>
+          <a:noFill/>
+          <a:ln/>
+        </p:spPr>
+        <p:txBody>
+          <a:bodyPr wrap="square" rtlCol="0" anchor="ctr"/>
           <a:lstStyle/>
           <a:p>
             <a:pPr indent="0" marL="0">
-              <a:lnSpc>
-                <a:spcPct val="125000"/>
-              </a:lnSpc>
-              <a:buNone/>
-            </a:pPr>
-            <a:r>
-              <a:rPr lang="en-US" sz="1100" dirty="0">
-                <a:solidFill>
-                  <a:srgbClr val="10161F"/>
-                </a:solidFill>
-                <a:latin typeface="Pretendard" pitchFamily="34" charset="0"/>
-                <a:ea typeface="Pretendard" pitchFamily="34" charset="-122"/>
-                <a:cs typeface="Pretendard" pitchFamily="34" charset="-120"/>
-              </a:rPr>
-              <a:t>{"ok":true,"mocked":true,"extractedFields":{"area_signal":"역삼","asset_type":"오피스빌딩","price_band":"300억","size_signal":"3000평(약 9917.4㎡)"},"extractedFacts":{"region":"역삼","exactAddressCandidate":"역삼동 742-1","assetType":"오피스빌딩","priceText":"300억","sizeText":"3000평(약 9917.4㎡)","currentUse":"오피스","currentUseSignal":"근린생활시설","leaseSignal":"임대중","vacancySignal":"공실없음","tenantNames":["쿠팡","네이버"],"unitRentTexts":["301호: 1500만"],"sellerMotivationText":"자산 효율화","brokerNotes":["초역세권 매물"]},"detectedSensitiveFields":["exact_address","tenant_name"],"ambiguousFields":[],"warnings":[],"areaSignal":"역삼","assetType":"오피스빌딩","priceBand":"300억","sizeSignal":"3000평(약 9917.4㎡)","dealType":"매각","buildingName":"역삼 센트럴타워","exactAddress":"역삼동 742-1","totalFloorArea":9917.3,"buildYear":2015,"currentUseSignal":"근린생활시설","vacancySignal":"공실 없음","fitSummary":"초역세권 근생 빌딩으로 시행/사옥 매입에 최적화","cautionSummary":"주요 임차인 만기 조율 필요","hiddenFields":["exact_address","seller_motivation"],"confidence":{"areaSignal":"confirmed","assetType":"confirmed","priceBand":"ai_hypothesis","fitSummary":"ai_hypothesis"},"missingData":["sizeSignal"],"boundaryNote":"본 자료는 실거래 통계 기반 참고치입니다.","buyerType":"법인 사옥형","budgetRange":{"min":50,"max":80,"display":"50억~80억"},"preferredRegions":["강남","성수"],"assetTypes":["꼬마빌딩","사옥용"],"purchasePurpose":"사옥용 매입","mustHave":["초역세권","주차"],"niceToHave":["테라스","루프탑"],"riskTolerance":"medium","financingNote":"자본금 50% 준비","missingQuestions":["구체적인 입주 시기가 언제인가요?","선호하는 수익률이 있나요?"],"privacyNotes":["연락처 비공개"],"fitReasons":["매수자 예산(50-80억)에 부합하는 매물입니다.","요청하신 성수/강남 권역에 해당합니다."],"cautionReasons":["요청한 용도와 달리 명도 협의가 다소 필요합니다."],"recommendedNextAction":"현장 답사 제안","kakaoMessage":"안녕하세요! 요청하신 조건에 부합하는 추천 매물이 있어 안내해 드립니다. 확인해보시고 피드백 부탁드립니다.","title":"강남 역삼역 초역세권 오피스 사옥용 빌딩 매각","shortSummary":"역삼역 도보 5분 거리의 준신축급 대형 오피스빌딩입니다.","dealPoints":["초역세권","사옥 최적"],"cautionPoints":["명도 조율 필요"],"hiddenInfoNotice":["보증금 및 지번은 인가 후 확인 가능"],"gateMessage":"G1 등급 등록이 필요합니다.","kakaoText":"강남 역삼역 오피스 빌딩 매각 안내입니다.","exactUnitCandidate":"101호","floor":"1층","areaSqmText":"150㎡","spaceType":"office","depositText":"5000만","monthlyRentText":"400만","maintenanceFeeText":"50만","availableFromText":"즉시입주","leaseTermMonthsText":"24","incentivesText":"렌트프리 2개월","restrictions":[],"landlordIdentity":"김성수","currentTenant":"스타트업","vacancyReason":"이전 확장","rentNegotiation":"협의 가능","region":"성수동","areaSqm":150,"deposit":5000,"monthlyRent":400,"maintenanceFee":50,"availableFrom":"즉시입주","leaseTermMonths":24,"incentives":{"rentFreeMonths":2,"interiorSupport":"일부 인테리어 지원","freeRentDetail":"렌트프리 2개월 지원"},"shortSummaryLease":"성수역 도보 5분 거리 1층 리테일 상가 매물입니다."} ### 밸류업 시나리오 (AI 추정)</a:t>
-            </a:r>
-            <a:endParaRPr lang="en-US" sz="1100" dirty="0"/>
-          </a:p>
-        </p:txBody>
-      </p:sp>
-      <p:sp>
-        <p:nvSpPr>
-          <p:cNvPr id="10" name="Text 7"/>
+              <a:buNone/>
+            </a:pPr>
+            <a:endParaRPr lang="en-US" sz="900" dirty="0"/>
+          </a:p>
+        </p:txBody>
+      </p:sp>
+      <p:sp>
+        <p:nvSpPr>
+          <p:cNvPr id="8" name="Text 6"/>
           <p:cNvSpPr/>
           <p:nvPr/>
         </p:nvSpPr>
@@ -9788,7 +8085,7 @@
       </p:sp>
       <p:sp>
         <p:nvSpPr>
-          <p:cNvPr id="11" name="Text 8"/>
+          <p:cNvPr id="9" name="Text 7"/>
           <p:cNvSpPr/>
           <p:nvPr/>
         </p:nvSpPr>

--- a/docs/test/stress/e2e-outputs/trading_case10_seocho_old_retail_basic.pptx
+++ b/docs/test/stress/e2e-outputs/trading_case10_seocho_old_retail_basic.pptx
@@ -15,9 +15,13 @@
     <p:sldId id="263" r:id="rId9"/>
     <p:sldId id="264" r:id="rId10"/>
     <p:sldId id="265" r:id="rId11"/>
+    <p:sldId id="266" r:id="rId12"/>
+    <p:sldId id="267" r:id="rId13"/>
+    <p:sldId id="268" r:id="rId14"/>
+    <p:sldId id="269" r:id="rId15"/>
   </p:sldIdLst>
   <p:notesMasterIdLst>
-    <p:notesMasterId r:id="rId12"/>
+    <p:notesMasterId r:id="rId16"/>
   </p:notesMasterIdLst>
   <p:sldSz cx="12192000" cy="6858000"/>
   <p:notesSz cx="6858000" cy="12192000"/>
@@ -623,6 +627,358 @@
             <a:fld id="{F7021451-1387-4CA6-816F-3879F97B5CBC}" type="slidenum">
               <a:rPr lang="en-US"/>
               <a:t>10</a:t>
+            </a:fld>
+            <a:endParaRPr lang="en-US"/>
+          </a:p>
+        </p:txBody>
+      </p:sp>
+    </p:spTree>
+    <p:extLst>
+      <p:ext uri="{BB962C8B-B14F-4D97-AF65-F5344CB8AC3E}">
+        <p14:creationId xmlns:p14="http://schemas.microsoft.com/office/powerpoint/2010/main" val="1024086991"/>
+      </p:ext>
+    </p:extLst>
+  </p:cSld>
+  <p:clrMapOvr>
+    <a:masterClrMapping/>
+  </p:clrMapOvr>
+</p:notes>
+</file>
+
+<file path=ppt/notesSlides/notesSlide11.xml><?xml version="1.0" encoding="utf-8"?>
+<p:notes xmlns:a="http://schemas.openxmlformats.org/drawingml/2006/main" xmlns:r="http://schemas.openxmlformats.org/officeDocument/2006/relationships" xmlns:p="http://schemas.openxmlformats.org/presentationml/2006/main">
+  <p:cSld>
+    <p:spTree>
+      <p:nvGrpSpPr>
+        <p:cNvPr id="1" name=""/>
+        <p:cNvGrpSpPr/>
+        <p:nvPr/>
+      </p:nvGrpSpPr>
+      <p:grpSpPr>
+        <a:xfrm>
+          <a:off x="0" y="0"/>
+          <a:ext cx="0" cy="0"/>
+          <a:chOff x="0" y="0"/>
+          <a:chExt cx="0" cy="0"/>
+        </a:xfrm>
+      </p:grpSpPr>
+      <p:sp>
+        <p:nvSpPr>
+          <p:cNvPr id="2" name="Slide Image Placeholder 1"/>
+          <p:cNvSpPr>
+            <a:spLocks noGrp="1" noRot="1" noChangeAspect="1"/>
+          </p:cNvSpPr>
+          <p:nvPr>
+            <p:ph type="sldImg"/>
+          </p:nvPr>
+        </p:nvSpPr>
+        <p:spPr/>
+      </p:sp>
+      <p:sp>
+        <p:nvSpPr>
+          <p:cNvPr id="3" name="Notes Placeholder 2"/>
+          <p:cNvSpPr>
+            <a:spLocks noGrp="1"/>
+          </p:cNvSpPr>
+          <p:nvPr>
+            <p:ph type="body" idx="1"/>
+          </p:nvPr>
+        </p:nvSpPr>
+        <p:spPr/>
+        <p:txBody>
+          <a:bodyPr/>
+          <a:lstStyle/>
+          <a:p>
+            <a:r>
+              <a:rPr lang="en-US" dirty="0"/>
+              <a:t/>
+            </a:r>
+            <a:endParaRPr lang="en-US" dirty="0"/>
+          </a:p>
+        </p:txBody>
+      </p:sp>
+      <p:sp>
+        <p:nvSpPr>
+          <p:cNvPr id="4" name="Slide Number Placeholder 3"/>
+          <p:cNvSpPr>
+            <a:spLocks noGrp="1"/>
+          </p:cNvSpPr>
+          <p:nvPr>
+            <p:ph type="sldNum" sz="quarter" idx="10"/>
+          </p:nvPr>
+        </p:nvSpPr>
+        <p:spPr/>
+        <p:txBody>
+          <a:bodyPr/>
+          <a:lstStyle/>
+          <a:p>
+            <a:fld id="{F7021451-1387-4CA6-816F-3879F97B5CBC}" type="slidenum">
+              <a:rPr lang="en-US"/>
+              <a:t>11</a:t>
+            </a:fld>
+            <a:endParaRPr lang="en-US"/>
+          </a:p>
+        </p:txBody>
+      </p:sp>
+    </p:spTree>
+    <p:extLst>
+      <p:ext uri="{BB962C8B-B14F-4D97-AF65-F5344CB8AC3E}">
+        <p14:creationId xmlns:p14="http://schemas.microsoft.com/office/powerpoint/2010/main" val="1024086991"/>
+      </p:ext>
+    </p:extLst>
+  </p:cSld>
+  <p:clrMapOvr>
+    <a:masterClrMapping/>
+  </p:clrMapOvr>
+</p:notes>
+</file>
+
+<file path=ppt/notesSlides/notesSlide12.xml><?xml version="1.0" encoding="utf-8"?>
+<p:notes xmlns:a="http://schemas.openxmlformats.org/drawingml/2006/main" xmlns:r="http://schemas.openxmlformats.org/officeDocument/2006/relationships" xmlns:p="http://schemas.openxmlformats.org/presentationml/2006/main">
+  <p:cSld>
+    <p:spTree>
+      <p:nvGrpSpPr>
+        <p:cNvPr id="1" name=""/>
+        <p:cNvGrpSpPr/>
+        <p:nvPr/>
+      </p:nvGrpSpPr>
+      <p:grpSpPr>
+        <a:xfrm>
+          <a:off x="0" y="0"/>
+          <a:ext cx="0" cy="0"/>
+          <a:chOff x="0" y="0"/>
+          <a:chExt cx="0" cy="0"/>
+        </a:xfrm>
+      </p:grpSpPr>
+      <p:sp>
+        <p:nvSpPr>
+          <p:cNvPr id="2" name="Slide Image Placeholder 1"/>
+          <p:cNvSpPr>
+            <a:spLocks noGrp="1" noRot="1" noChangeAspect="1"/>
+          </p:cNvSpPr>
+          <p:nvPr>
+            <p:ph type="sldImg"/>
+          </p:nvPr>
+        </p:nvSpPr>
+        <p:spPr/>
+      </p:sp>
+      <p:sp>
+        <p:nvSpPr>
+          <p:cNvPr id="3" name="Notes Placeholder 2"/>
+          <p:cNvSpPr>
+            <a:spLocks noGrp="1"/>
+          </p:cNvSpPr>
+          <p:nvPr>
+            <p:ph type="body" idx="1"/>
+          </p:nvPr>
+        </p:nvSpPr>
+        <p:spPr/>
+        <p:txBody>
+          <a:bodyPr/>
+          <a:lstStyle/>
+          <a:p>
+            <a:r>
+              <a:rPr lang="en-US" dirty="0"/>
+              <a:t/>
+            </a:r>
+            <a:endParaRPr lang="en-US" dirty="0"/>
+          </a:p>
+        </p:txBody>
+      </p:sp>
+      <p:sp>
+        <p:nvSpPr>
+          <p:cNvPr id="4" name="Slide Number Placeholder 3"/>
+          <p:cNvSpPr>
+            <a:spLocks noGrp="1"/>
+          </p:cNvSpPr>
+          <p:nvPr>
+            <p:ph type="sldNum" sz="quarter" idx="10"/>
+          </p:nvPr>
+        </p:nvSpPr>
+        <p:spPr/>
+        <p:txBody>
+          <a:bodyPr/>
+          <a:lstStyle/>
+          <a:p>
+            <a:fld id="{F7021451-1387-4CA6-816F-3879F97B5CBC}" type="slidenum">
+              <a:rPr lang="en-US"/>
+              <a:t>12</a:t>
+            </a:fld>
+            <a:endParaRPr lang="en-US"/>
+          </a:p>
+        </p:txBody>
+      </p:sp>
+    </p:spTree>
+    <p:extLst>
+      <p:ext uri="{BB962C8B-B14F-4D97-AF65-F5344CB8AC3E}">
+        <p14:creationId xmlns:p14="http://schemas.microsoft.com/office/powerpoint/2010/main" val="1024086991"/>
+      </p:ext>
+    </p:extLst>
+  </p:cSld>
+  <p:clrMapOvr>
+    <a:masterClrMapping/>
+  </p:clrMapOvr>
+</p:notes>
+</file>
+
+<file path=ppt/notesSlides/notesSlide13.xml><?xml version="1.0" encoding="utf-8"?>
+<p:notes xmlns:a="http://schemas.openxmlformats.org/drawingml/2006/main" xmlns:r="http://schemas.openxmlformats.org/officeDocument/2006/relationships" xmlns:p="http://schemas.openxmlformats.org/presentationml/2006/main">
+  <p:cSld>
+    <p:spTree>
+      <p:nvGrpSpPr>
+        <p:cNvPr id="1" name=""/>
+        <p:cNvGrpSpPr/>
+        <p:nvPr/>
+      </p:nvGrpSpPr>
+      <p:grpSpPr>
+        <a:xfrm>
+          <a:off x="0" y="0"/>
+          <a:ext cx="0" cy="0"/>
+          <a:chOff x="0" y="0"/>
+          <a:chExt cx="0" cy="0"/>
+        </a:xfrm>
+      </p:grpSpPr>
+      <p:sp>
+        <p:nvSpPr>
+          <p:cNvPr id="2" name="Slide Image Placeholder 1"/>
+          <p:cNvSpPr>
+            <a:spLocks noGrp="1" noRot="1" noChangeAspect="1"/>
+          </p:cNvSpPr>
+          <p:nvPr>
+            <p:ph type="sldImg"/>
+          </p:nvPr>
+        </p:nvSpPr>
+        <p:spPr/>
+      </p:sp>
+      <p:sp>
+        <p:nvSpPr>
+          <p:cNvPr id="3" name="Notes Placeholder 2"/>
+          <p:cNvSpPr>
+            <a:spLocks noGrp="1"/>
+          </p:cNvSpPr>
+          <p:nvPr>
+            <p:ph type="body" idx="1"/>
+          </p:nvPr>
+        </p:nvSpPr>
+        <p:spPr/>
+        <p:txBody>
+          <a:bodyPr/>
+          <a:lstStyle/>
+          <a:p>
+            <a:r>
+              <a:rPr lang="en-US" dirty="0"/>
+              <a:t/>
+            </a:r>
+            <a:endParaRPr lang="en-US" dirty="0"/>
+          </a:p>
+        </p:txBody>
+      </p:sp>
+      <p:sp>
+        <p:nvSpPr>
+          <p:cNvPr id="4" name="Slide Number Placeholder 3"/>
+          <p:cNvSpPr>
+            <a:spLocks noGrp="1"/>
+          </p:cNvSpPr>
+          <p:nvPr>
+            <p:ph type="sldNum" sz="quarter" idx="10"/>
+          </p:nvPr>
+        </p:nvSpPr>
+        <p:spPr/>
+        <p:txBody>
+          <a:bodyPr/>
+          <a:lstStyle/>
+          <a:p>
+            <a:fld id="{F7021451-1387-4CA6-816F-3879F97B5CBC}" type="slidenum">
+              <a:rPr lang="en-US"/>
+              <a:t>13</a:t>
+            </a:fld>
+            <a:endParaRPr lang="en-US"/>
+          </a:p>
+        </p:txBody>
+      </p:sp>
+    </p:spTree>
+    <p:extLst>
+      <p:ext uri="{BB962C8B-B14F-4D97-AF65-F5344CB8AC3E}">
+        <p14:creationId xmlns:p14="http://schemas.microsoft.com/office/powerpoint/2010/main" val="1024086991"/>
+      </p:ext>
+    </p:extLst>
+  </p:cSld>
+  <p:clrMapOvr>
+    <a:masterClrMapping/>
+  </p:clrMapOvr>
+</p:notes>
+</file>
+
+<file path=ppt/notesSlides/notesSlide14.xml><?xml version="1.0" encoding="utf-8"?>
+<p:notes xmlns:a="http://schemas.openxmlformats.org/drawingml/2006/main" xmlns:r="http://schemas.openxmlformats.org/officeDocument/2006/relationships" xmlns:p="http://schemas.openxmlformats.org/presentationml/2006/main">
+  <p:cSld>
+    <p:spTree>
+      <p:nvGrpSpPr>
+        <p:cNvPr id="1" name=""/>
+        <p:cNvGrpSpPr/>
+        <p:nvPr/>
+      </p:nvGrpSpPr>
+      <p:grpSpPr>
+        <a:xfrm>
+          <a:off x="0" y="0"/>
+          <a:ext cx="0" cy="0"/>
+          <a:chOff x="0" y="0"/>
+          <a:chExt cx="0" cy="0"/>
+        </a:xfrm>
+      </p:grpSpPr>
+      <p:sp>
+        <p:nvSpPr>
+          <p:cNvPr id="2" name="Slide Image Placeholder 1"/>
+          <p:cNvSpPr>
+            <a:spLocks noGrp="1" noRot="1" noChangeAspect="1"/>
+          </p:cNvSpPr>
+          <p:nvPr>
+            <p:ph type="sldImg"/>
+          </p:nvPr>
+        </p:nvSpPr>
+        <p:spPr/>
+      </p:sp>
+      <p:sp>
+        <p:nvSpPr>
+          <p:cNvPr id="3" name="Notes Placeholder 2"/>
+          <p:cNvSpPr>
+            <a:spLocks noGrp="1"/>
+          </p:cNvSpPr>
+          <p:nvPr>
+            <p:ph type="body" idx="1"/>
+          </p:nvPr>
+        </p:nvSpPr>
+        <p:spPr/>
+        <p:txBody>
+          <a:bodyPr/>
+          <a:lstStyle/>
+          <a:p>
+            <a:r>
+              <a:rPr lang="en-US" dirty="0"/>
+              <a:t/>
+            </a:r>
+            <a:endParaRPr lang="en-US" dirty="0"/>
+          </a:p>
+        </p:txBody>
+      </p:sp>
+      <p:sp>
+        <p:nvSpPr>
+          <p:cNvPr id="4" name="Slide Number Placeholder 3"/>
+          <p:cNvSpPr>
+            <a:spLocks noGrp="1"/>
+          </p:cNvSpPr>
+          <p:nvPr>
+            <p:ph type="sldNum" sz="quarter" idx="10"/>
+          </p:nvPr>
+        </p:nvSpPr>
+        <p:spPr/>
+        <p:txBody>
+          <a:bodyPr/>
+          <a:lstStyle/>
+          <a:p>
+            <a:fld id="{F7021451-1387-4CA6-816F-3879F97B5CBC}" type="slidenum">
+              <a:rPr lang="en-US"/>
+              <a:t>14</a:t>
             </a:fld>
             <a:endParaRPr lang="en-US"/>
           </a:p>
@@ -2201,7 +2557,7 @@
             <a:pPr indent="0" marL="0">
               <a:buNone/>
             </a:pPr>
-            <a:endParaRPr lang="en-US" sz="850" dirty="0"/>
+            <a:endParaRPr lang="en-US" sz="900" dirty="0"/>
           </a:p>
         </p:txBody>
       </p:sp>
@@ -2294,6 +2650,2020 @@
 <file path=ppt/slides/slide10.xml><?xml version="1.0" encoding="utf-8"?>
 <p:sld xmlns:a="http://schemas.openxmlformats.org/drawingml/2006/main" xmlns:r="http://schemas.openxmlformats.org/officeDocument/2006/relationships" xmlns:p="http://schemas.openxmlformats.org/presentationml/2006/main">
   <p:cSld name="Slide 10">
+    <p:bg>
+      <p:bgPr>
+        <a:solidFill>
+          <a:srgbClr val="FFFFFF"/>
+        </a:solidFill>
+      </p:bgPr>
+    </p:bg>
+    <p:spTree>
+      <p:nvGrpSpPr>
+        <p:cNvPr id="1" name=""/>
+        <p:cNvGrpSpPr/>
+        <p:nvPr/>
+      </p:nvGrpSpPr>
+      <p:grpSpPr>
+        <a:xfrm>
+          <a:off x="0" y="0"/>
+          <a:ext cx="0" cy="0"/>
+          <a:chOff x="0" y="0"/>
+          <a:chExt cx="0" cy="0"/>
+        </a:xfrm>
+      </p:grpSpPr>
+      <p:sp>
+        <p:nvSpPr>
+          <p:cNvPr id="2" name="Shape 0"/>
+          <p:cNvSpPr/>
+          <p:nvPr/>
+        </p:nvSpPr>
+        <p:spPr>
+          <a:xfrm>
+            <a:off x="566928" y="457200"/>
+            <a:ext cx="384048" cy="384048"/>
+          </a:xfrm>
+          <a:prstGeom prst="ellipse">
+            <a:avLst/>
+          </a:prstGeom>
+          <a:solidFill>
+            <a:srgbClr val="B98A2E"/>
+          </a:solidFill>
+          <a:ln/>
+        </p:spPr>
+      </p:sp>
+      <p:sp>
+        <p:nvSpPr>
+          <p:cNvPr id="3" name="Text 1"/>
+          <p:cNvSpPr/>
+          <p:nvPr/>
+        </p:nvSpPr>
+        <p:spPr>
+          <a:xfrm>
+            <a:off x="566928" y="457200"/>
+            <a:ext cx="384048" cy="384048"/>
+          </a:xfrm>
+          <a:prstGeom prst="rect">
+            <a:avLst/>
+          </a:prstGeom>
+          <a:noFill/>
+          <a:ln/>
+        </p:spPr>
+        <p:txBody>
+          <a:bodyPr wrap="square" lIns="0" tIns="0" rIns="0" bIns="0" rtlCol="0" anchor="ctr"/>
+          <a:lstStyle/>
+          <a:p>
+            <a:pPr algn="ctr" indent="0" marL="0">
+              <a:buNone/>
+            </a:pPr>
+            <a:r>
+              <a:rPr lang="en-US" sz="1300" b="1" dirty="0">
+                <a:solidFill>
+                  <a:srgbClr val="FFFFFF"/>
+                </a:solidFill>
+                <a:latin typeface="Arial" pitchFamily="34" charset="0"/>
+                <a:ea typeface="Arial" pitchFamily="34" charset="-122"/>
+                <a:cs typeface="Arial" pitchFamily="34" charset="-120"/>
+              </a:rPr>
+              <a:t>09</a:t>
+            </a:r>
+            <a:endParaRPr lang="en-US" sz="1300" dirty="0"/>
+          </a:p>
+        </p:txBody>
+      </p:sp>
+      <p:sp>
+        <p:nvSpPr>
+          <p:cNvPr id="4" name="Text 2"/>
+          <p:cNvSpPr/>
+          <p:nvPr/>
+        </p:nvSpPr>
+        <p:spPr>
+          <a:xfrm>
+            <a:off x="1133856" y="457200"/>
+            <a:ext cx="10490911" cy="182880"/>
+          </a:xfrm>
+          <a:prstGeom prst="rect">
+            <a:avLst/>
+          </a:prstGeom>
+          <a:noFill/>
+          <a:ln/>
+        </p:spPr>
+        <p:txBody>
+          <a:bodyPr wrap="square" lIns="0" tIns="0" rIns="0" bIns="0" rtlCol="0" anchor="ctr"/>
+          <a:lstStyle/>
+          <a:p>
+            <a:pPr indent="0" marL="0">
+              <a:buNone/>
+            </a:pPr>
+            <a:r>
+              <a:rPr lang="en-US" sz="950" b="1" spc="200" kern="0" dirty="0">
+                <a:solidFill>
+                  <a:srgbClr val="B98A2E"/>
+                </a:solidFill>
+                <a:latin typeface="Arial" pitchFamily="34" charset="0"/>
+                <a:ea typeface="Arial" pitchFamily="34" charset="-122"/>
+                <a:cs typeface="Arial" pitchFamily="34" charset="-120"/>
+              </a:rPr>
+              <a:t>Risk</a:t>
+            </a:r>
+            <a:endParaRPr lang="en-US" sz="950" dirty="0"/>
+          </a:p>
+        </p:txBody>
+      </p:sp>
+      <p:sp>
+        <p:nvSpPr>
+          <p:cNvPr id="5" name="Text 3"/>
+          <p:cNvSpPr/>
+          <p:nvPr/>
+        </p:nvSpPr>
+        <p:spPr>
+          <a:xfrm>
+            <a:off x="1133856" y="640080"/>
+            <a:ext cx="10490911" cy="365760"/>
+          </a:xfrm>
+          <a:prstGeom prst="rect">
+            <a:avLst/>
+          </a:prstGeom>
+          <a:noFill/>
+          <a:ln/>
+        </p:spPr>
+        <p:txBody>
+          <a:bodyPr wrap="square" lIns="0" tIns="0" rIns="0" bIns="0" rtlCol="0" anchor="ctr"/>
+          <a:lstStyle/>
+          <a:p>
+            <a:pPr indent="0" marL="0">
+              <a:buNone/>
+            </a:pPr>
+            <a:r>
+              <a:rPr lang="en-US" sz="2300" b="1" dirty="0">
+                <a:solidFill>
+                  <a:srgbClr val="10161F"/>
+                </a:solidFill>
+                <a:latin typeface="Pretendard" pitchFamily="34" charset="0"/>
+                <a:ea typeface="Pretendard" pitchFamily="34" charset="-122"/>
+                <a:cs typeface="Pretendard" pitchFamily="34" charset="-120"/>
+              </a:rPr>
+              <a:t>리스크는 무엇이고 대응책은 있는가</a:t>
+            </a:r>
+            <a:endParaRPr lang="en-US" sz="2300" dirty="0"/>
+          </a:p>
+        </p:txBody>
+      </p:sp>
+      <p:sp>
+        <p:nvSpPr>
+          <p:cNvPr id="6" name="Shape 4"/>
+          <p:cNvSpPr/>
+          <p:nvPr/>
+        </p:nvSpPr>
+        <p:spPr>
+          <a:xfrm>
+            <a:off x="566928" y="1417320"/>
+            <a:ext cx="11057839" cy="3657600"/>
+          </a:xfrm>
+          <a:prstGeom prst="roundRect">
+            <a:avLst>
+              <a:gd name="adj" fmla="val 1500"/>
+            </a:avLst>
+          </a:prstGeom>
+          <a:solidFill>
+            <a:srgbClr val="F7FAFC"/>
+          </a:solidFill>
+          <a:ln w="6350">
+            <a:solidFill>
+              <a:srgbClr val="CBD5E0"/>
+            </a:solidFill>
+            <a:prstDash val="solid"/>
+          </a:ln>
+        </p:spPr>
+      </p:sp>
+      <p:sp>
+        <p:nvSpPr>
+          <p:cNvPr id="7" name="Shape 5"/>
+          <p:cNvSpPr/>
+          <p:nvPr/>
+        </p:nvSpPr>
+        <p:spPr>
+          <a:xfrm>
+            <a:off x="566928" y="1417320"/>
+            <a:ext cx="11057839" cy="45720"/>
+          </a:xfrm>
+          <a:prstGeom prst="rect">
+            <a:avLst/>
+          </a:prstGeom>
+          <a:solidFill>
+            <a:srgbClr val="B98A2E"/>
+          </a:solidFill>
+          <a:ln/>
+        </p:spPr>
+      </p:sp>
+      <p:sp>
+        <p:nvSpPr>
+          <p:cNvPr id="8" name="Text 6"/>
+          <p:cNvSpPr/>
+          <p:nvPr/>
+        </p:nvSpPr>
+        <p:spPr>
+          <a:xfrm>
+            <a:off x="795528" y="1618488"/>
+            <a:ext cx="10600639" cy="292608"/>
+          </a:xfrm>
+          <a:prstGeom prst="rect">
+            <a:avLst/>
+          </a:prstGeom>
+          <a:noFill/>
+          <a:ln/>
+        </p:spPr>
+        <p:txBody>
+          <a:bodyPr wrap="square" lIns="0" tIns="0" rIns="0" bIns="0" rtlCol="0" anchor="ctr"/>
+          <a:lstStyle/>
+          <a:p>
+            <a:pPr indent="0" marL="0">
+              <a:buNone/>
+            </a:pPr>
+            <a:r>
+              <a:rPr lang="en-US" sz="1350" b="1" dirty="0">
+                <a:solidFill>
+                  <a:srgbClr val="977024"/>
+                </a:solidFill>
+                <a:latin typeface="Pretendard" pitchFamily="34" charset="0"/>
+                <a:ea typeface="Pretendard" pitchFamily="34" charset="-122"/>
+                <a:cs typeface="Pretendard" pitchFamily="34" charset="-120"/>
+              </a:rPr>
+              <a:t>용도 리스크</a:t>
+            </a:r>
+            <a:endParaRPr lang="en-US" sz="1350" dirty="0"/>
+          </a:p>
+        </p:txBody>
+      </p:sp>
+      <p:sp>
+        <p:nvSpPr>
+          <p:cNvPr id="9" name="Text 7"/>
+          <p:cNvSpPr/>
+          <p:nvPr/>
+        </p:nvSpPr>
+        <p:spPr>
+          <a:xfrm>
+            <a:off x="795528" y="1947672"/>
+            <a:ext cx="10600639" cy="365760"/>
+          </a:xfrm>
+          <a:prstGeom prst="rect">
+            <a:avLst/>
+          </a:prstGeom>
+          <a:noFill/>
+          <a:ln/>
+        </p:spPr>
+        <p:txBody>
+          <a:bodyPr wrap="square" lIns="0" tIns="0" rIns="0" bIns="0" rtlCol="0" anchor="ctr">
+            <a:normAutofit/>
+          </a:bodyPr>
+          <a:lstStyle/>
+          <a:p>
+            <a:pPr indent="0" marL="0">
+              <a:buNone/>
+            </a:pPr>
+            <a:r>
+              <a:rPr lang="en-US" sz="1250" b="1" dirty="0">
+                <a:solidFill>
+                  <a:srgbClr val="10161F"/>
+                </a:solidFill>
+                <a:latin typeface="Pretendard" pitchFamily="34" charset="0"/>
+                <a:ea typeface="Pretendard" pitchFamily="34" charset="-122"/>
+                <a:cs typeface="Pretendard" pitchFamily="34" charset="-120"/>
+              </a:rPr>
+              <a:t>—</a:t>
+            </a:r>
+            <a:endParaRPr lang="en-US" sz="1250" dirty="0"/>
+          </a:p>
+        </p:txBody>
+      </p:sp>
+      <p:sp>
+        <p:nvSpPr>
+          <p:cNvPr id="10" name="Text 8"/>
+          <p:cNvSpPr/>
+          <p:nvPr/>
+        </p:nvSpPr>
+        <p:spPr>
+          <a:xfrm>
+            <a:off x="795528" y="2377440"/>
+            <a:ext cx="10600639" cy="2606040"/>
+          </a:xfrm>
+          <a:prstGeom prst="rect">
+            <a:avLst/>
+          </a:prstGeom>
+          <a:noFill/>
+          <a:ln/>
+        </p:spPr>
+        <p:txBody>
+          <a:bodyPr wrap="square" lIns="0" tIns="0" rIns="0" bIns="0" rtlCol="0" anchor="t">
+            <a:normAutofit/>
+          </a:bodyPr>
+          <a:lstStyle/>
+          <a:p>
+            <a:pPr marL="342900" indent="-342900">
+              <a:lnSpc>
+                <a:spcPct val="125000"/>
+              </a:lnSpc>
+              <a:buSzPct val="100000"/>
+              <a:buChar char="•"/>
+            </a:pPr>
+            <a:r>
+              <a:rPr lang="en-US" sz="1100" dirty="0">
+                <a:solidFill>
+                  <a:srgbClr val="10161F"/>
+                </a:solidFill>
+                <a:latin typeface="Pretendard" pitchFamily="34" charset="0"/>
+                <a:ea typeface="Pretendard" pitchFamily="34" charset="-122"/>
+                <a:cs typeface="Pretendard" pitchFamily="34" charset="-120"/>
+              </a:rPr>
+              <a:t>{"ok":true,"mocked":true,"extractedFields":{"area_signal":"역삼","asset_type":"[건물명 비공개]","price_band":"300억","size_signal":"3000평(약 9917.4㎡)"},"extractedFacts":{"region":"역삼","exactAddressCandidate":"역</a:t>
+            </a:r>
+            <a:endParaRPr lang="en-US" sz="1100" dirty="0"/>
+          </a:p>
+        </p:txBody>
+      </p:sp>
+      <p:sp>
+        <p:nvSpPr>
+          <p:cNvPr id="11" name="Shape 9"/>
+          <p:cNvSpPr/>
+          <p:nvPr/>
+        </p:nvSpPr>
+        <p:spPr>
+          <a:xfrm>
+            <a:off x="566928" y="5193792"/>
+            <a:ext cx="11057839" cy="621792"/>
+          </a:xfrm>
+          <a:prstGeom prst="roundRect">
+            <a:avLst>
+              <a:gd name="adj" fmla="val 8824"/>
+            </a:avLst>
+          </a:prstGeom>
+          <a:solidFill>
+            <a:srgbClr val="F7FAFC"/>
+          </a:solidFill>
+          <a:ln w="6350">
+            <a:solidFill>
+              <a:srgbClr val="CBD5E0"/>
+            </a:solidFill>
+            <a:prstDash val="solid"/>
+          </a:ln>
+        </p:spPr>
+      </p:sp>
+      <p:sp>
+        <p:nvSpPr>
+          <p:cNvPr id="12" name="Text 10"/>
+          <p:cNvSpPr/>
+          <p:nvPr/>
+        </p:nvSpPr>
+        <p:spPr>
+          <a:xfrm>
+            <a:off x="795528" y="5193792"/>
+            <a:ext cx="10600639" cy="621792"/>
+          </a:xfrm>
+          <a:prstGeom prst="rect">
+            <a:avLst/>
+          </a:prstGeom>
+          <a:noFill/>
+          <a:ln/>
+        </p:spPr>
+        <p:txBody>
+          <a:bodyPr wrap="square" lIns="0" tIns="0" rIns="0" bIns="0" rtlCol="0" anchor="ctr"/>
+          <a:lstStyle/>
+          <a:p>
+            <a:pPr indent="0" marL="0">
+              <a:buNone/>
+            </a:pPr>
+            <a:r>
+              <a:rPr lang="en-US" sz="1100" dirty="0">
+                <a:solidFill>
+                  <a:srgbClr val="10161F"/>
+                </a:solidFill>
+                <a:latin typeface="Pretendard" pitchFamily="34" charset="0"/>
+                <a:ea typeface="Pretendard" pitchFamily="34" charset="-122"/>
+                <a:cs typeface="Pretendard" pitchFamily="34" charset="-120"/>
+              </a:rPr>
+              <a:t>※ 본 리스크 체크는 공부 및 브로커 확인 기반이며, 매수 전 전문 실사팀(변호사/건축사)을 통한 정밀 실사가 필요합니다.</a:t>
+            </a:r>
+            <a:endParaRPr lang="en-US" sz="1100" dirty="0"/>
+          </a:p>
+        </p:txBody>
+      </p:sp>
+      <p:sp>
+        <p:nvSpPr>
+          <p:cNvPr id="13" name="Text 11"/>
+          <p:cNvSpPr/>
+          <p:nvPr/>
+        </p:nvSpPr>
+        <p:spPr>
+          <a:xfrm>
+            <a:off x="566928" y="6382512"/>
+            <a:ext cx="7315200" cy="219456"/>
+          </a:xfrm>
+          <a:prstGeom prst="rect">
+            <a:avLst/>
+          </a:prstGeom>
+          <a:noFill/>
+          <a:ln/>
+        </p:spPr>
+        <p:txBody>
+          <a:bodyPr wrap="square" lIns="0" tIns="0" rIns="0" bIns="0" rtlCol="0" anchor="ctr"/>
+          <a:lstStyle/>
+          <a:p>
+            <a:pPr indent="0" marL="0">
+              <a:buNone/>
+            </a:pPr>
+            <a:r>
+              <a:rPr lang="en-US" sz="800" dirty="0">
+                <a:solidFill>
+                  <a:srgbClr val="718096"/>
+                </a:solidFill>
+                <a:latin typeface="Pretendard" pitchFamily="34" charset="0"/>
+                <a:ea typeface="Pretendard" pitchFamily="34" charset="-122"/>
+                <a:cs typeface="Pretendard" pitchFamily="34" charset="-120"/>
+              </a:rPr>
+              <a:t>크리딜   |   </a:t>
+            </a:r>
+            <a:endParaRPr lang="en-US" sz="800" dirty="0"/>
+          </a:p>
+        </p:txBody>
+      </p:sp>
+      <p:sp>
+        <p:nvSpPr>
+          <p:cNvPr id="14" name="Text 12"/>
+          <p:cNvSpPr/>
+          <p:nvPr/>
+        </p:nvSpPr>
+        <p:spPr>
+          <a:xfrm>
+            <a:off x="10710367" y="6382512"/>
+            <a:ext cx="914400" cy="219456"/>
+          </a:xfrm>
+          <a:prstGeom prst="rect">
+            <a:avLst/>
+          </a:prstGeom>
+          <a:noFill/>
+          <a:ln/>
+        </p:spPr>
+        <p:txBody>
+          <a:bodyPr wrap="square" lIns="0" tIns="0" rIns="0" bIns="0" rtlCol="0" anchor="ctr"/>
+          <a:lstStyle/>
+          <a:p>
+            <a:pPr algn="r" indent="0" marL="0">
+              <a:buNone/>
+            </a:pPr>
+            <a:r>
+              <a:rPr lang="en-US" sz="900" b="1" dirty="0">
+                <a:solidFill>
+                  <a:srgbClr val="B98A2E"/>
+                </a:solidFill>
+                <a:latin typeface="Arial" pitchFamily="34" charset="0"/>
+                <a:ea typeface="Arial" pitchFamily="34" charset="-122"/>
+                <a:cs typeface="Arial" pitchFamily="34" charset="-120"/>
+              </a:rPr>
+              <a:t>9</a:t>
+            </a:r>
+            <a:endParaRPr lang="en-US" sz="900" dirty="0"/>
+          </a:p>
+        </p:txBody>
+      </p:sp>
+    </p:spTree>
+  </p:cSld>
+  <p:clrMapOvr>
+    <a:masterClrMapping/>
+  </p:clrMapOvr>
+</p:sld>
+</file>
+
+<file path=ppt/slides/slide11.xml><?xml version="1.0" encoding="utf-8"?>
+<p:sld xmlns:a="http://schemas.openxmlformats.org/drawingml/2006/main" xmlns:r="http://schemas.openxmlformats.org/officeDocument/2006/relationships" xmlns:p="http://schemas.openxmlformats.org/presentationml/2006/main">
+  <p:cSld name="Slide 11">
+    <p:bg>
+      <p:bgPr>
+        <a:solidFill>
+          <a:srgbClr val="FFFFFF"/>
+        </a:solidFill>
+      </p:bgPr>
+    </p:bg>
+    <p:spTree>
+      <p:nvGrpSpPr>
+        <p:cNvPr id="1" name=""/>
+        <p:cNvGrpSpPr/>
+        <p:nvPr/>
+      </p:nvGrpSpPr>
+      <p:grpSpPr>
+        <a:xfrm>
+          <a:off x="0" y="0"/>
+          <a:ext cx="0" cy="0"/>
+          <a:chOff x="0" y="0"/>
+          <a:chExt cx="0" cy="0"/>
+        </a:xfrm>
+      </p:grpSpPr>
+      <p:sp>
+        <p:nvSpPr>
+          <p:cNvPr id="2" name="Shape 0"/>
+          <p:cNvSpPr/>
+          <p:nvPr/>
+        </p:nvSpPr>
+        <p:spPr>
+          <a:xfrm>
+            <a:off x="566928" y="457200"/>
+            <a:ext cx="384048" cy="384048"/>
+          </a:xfrm>
+          <a:prstGeom prst="ellipse">
+            <a:avLst/>
+          </a:prstGeom>
+          <a:solidFill>
+            <a:srgbClr val="B98A2E"/>
+          </a:solidFill>
+          <a:ln/>
+        </p:spPr>
+      </p:sp>
+      <p:sp>
+        <p:nvSpPr>
+          <p:cNvPr id="3" name="Text 1"/>
+          <p:cNvSpPr/>
+          <p:nvPr/>
+        </p:nvSpPr>
+        <p:spPr>
+          <a:xfrm>
+            <a:off x="566928" y="457200"/>
+            <a:ext cx="384048" cy="384048"/>
+          </a:xfrm>
+          <a:prstGeom prst="rect">
+            <a:avLst/>
+          </a:prstGeom>
+          <a:noFill/>
+          <a:ln/>
+        </p:spPr>
+        <p:txBody>
+          <a:bodyPr wrap="square" lIns="0" tIns="0" rIns="0" bIns="0" rtlCol="0" anchor="ctr"/>
+          <a:lstStyle/>
+          <a:p>
+            <a:pPr algn="ctr" indent="0" marL="0">
+              <a:buNone/>
+            </a:pPr>
+            <a:r>
+              <a:rPr lang="en-US" sz="1300" b="1" dirty="0">
+                <a:solidFill>
+                  <a:srgbClr val="FFFFFF"/>
+                </a:solidFill>
+                <a:latin typeface="Arial" pitchFamily="34" charset="0"/>
+                <a:ea typeface="Arial" pitchFamily="34" charset="-122"/>
+                <a:cs typeface="Arial" pitchFamily="34" charset="-120"/>
+              </a:rPr>
+              <a:t>10</a:t>
+            </a:r>
+            <a:endParaRPr lang="en-US" sz="1300" dirty="0"/>
+          </a:p>
+        </p:txBody>
+      </p:sp>
+      <p:sp>
+        <p:nvSpPr>
+          <p:cNvPr id="4" name="Text 2"/>
+          <p:cNvSpPr/>
+          <p:nvPr/>
+        </p:nvSpPr>
+        <p:spPr>
+          <a:xfrm>
+            <a:off x="1133856" y="457200"/>
+            <a:ext cx="10490911" cy="182880"/>
+          </a:xfrm>
+          <a:prstGeom prst="rect">
+            <a:avLst/>
+          </a:prstGeom>
+          <a:noFill/>
+          <a:ln/>
+        </p:spPr>
+        <p:txBody>
+          <a:bodyPr wrap="square" lIns="0" tIns="0" rIns="0" bIns="0" rtlCol="0" anchor="ctr"/>
+          <a:lstStyle/>
+          <a:p>
+            <a:pPr indent="0" marL="0">
+              <a:buNone/>
+            </a:pPr>
+            <a:r>
+              <a:rPr lang="en-US" sz="950" b="1" spc="200" kern="0" dirty="0">
+                <a:solidFill>
+                  <a:srgbClr val="B98A2E"/>
+                </a:solidFill>
+                <a:latin typeface="Arial" pitchFamily="34" charset="0"/>
+                <a:ea typeface="Arial" pitchFamily="34" charset="-122"/>
+                <a:cs typeface="Arial" pitchFamily="34" charset="-120"/>
+              </a:rPr>
+              <a:t>Checklist</a:t>
+            </a:r>
+            <a:endParaRPr lang="en-US" sz="950" dirty="0"/>
+          </a:p>
+        </p:txBody>
+      </p:sp>
+      <p:sp>
+        <p:nvSpPr>
+          <p:cNvPr id="5" name="Text 3"/>
+          <p:cNvSpPr/>
+          <p:nvPr/>
+        </p:nvSpPr>
+        <p:spPr>
+          <a:xfrm>
+            <a:off x="1133856" y="640080"/>
+            <a:ext cx="10490911" cy="365760"/>
+          </a:xfrm>
+          <a:prstGeom prst="rect">
+            <a:avLst/>
+          </a:prstGeom>
+          <a:noFill/>
+          <a:ln/>
+        </p:spPr>
+        <p:txBody>
+          <a:bodyPr wrap="square" lIns="0" tIns="0" rIns="0" bIns="0" rtlCol="0" anchor="ctr"/>
+          <a:lstStyle/>
+          <a:p>
+            <a:pPr indent="0" marL="0">
+              <a:buNone/>
+            </a:pPr>
+            <a:r>
+              <a:rPr lang="en-US" sz="2300" b="1" dirty="0">
+                <a:solidFill>
+                  <a:srgbClr val="10161F"/>
+                </a:solidFill>
+                <a:latin typeface="Pretendard" pitchFamily="34" charset="0"/>
+                <a:ea typeface="Pretendard" pitchFamily="34" charset="-122"/>
+                <a:cs typeface="Pretendard" pitchFamily="34" charset="-120"/>
+              </a:rPr>
+              <a:t>실사 및 확인 필요사항</a:t>
+            </a:r>
+            <a:endParaRPr lang="en-US" sz="2300" dirty="0"/>
+          </a:p>
+        </p:txBody>
+      </p:sp>
+      <p:sp>
+        <p:nvSpPr>
+          <p:cNvPr id="6" name="Text 4"/>
+          <p:cNvSpPr/>
+          <p:nvPr/>
+        </p:nvSpPr>
+        <p:spPr>
+          <a:xfrm>
+            <a:off x="566928" y="1371600"/>
+            <a:ext cx="11057839" cy="237744"/>
+          </a:xfrm>
+          <a:prstGeom prst="rect">
+            <a:avLst/>
+          </a:prstGeom>
+          <a:noFill/>
+          <a:ln/>
+        </p:spPr>
+        <p:txBody>
+          <a:bodyPr wrap="square" lIns="0" tIns="0" rIns="0" bIns="0" rtlCol="0" anchor="ctr"/>
+          <a:lstStyle/>
+          <a:p>
+            <a:pPr indent="0" marL="0">
+              <a:buNone/>
+            </a:pPr>
+            <a:r>
+              <a:rPr lang="en-US" sz="1100" b="1" dirty="0">
+                <a:solidFill>
+                  <a:srgbClr val="10161F"/>
+                </a:solidFill>
+                <a:latin typeface="Pretendard" pitchFamily="34" charset="0"/>
+                <a:ea typeface="Pretendard" pitchFamily="34" charset="-122"/>
+                <a:cs typeface="Pretendard" pitchFamily="34" charset="-120"/>
+              </a:rPr>
+              <a:t>거래 안정성 확보를 위한 필수 법률·물리·임대차 실사 점검 항목 (총 6건)</a:t>
+            </a:r>
+            <a:endParaRPr lang="en-US" sz="1100" dirty="0"/>
+          </a:p>
+        </p:txBody>
+      </p:sp>
+      <p:sp>
+        <p:nvSpPr>
+          <p:cNvPr id="7" name="Shape 5"/>
+          <p:cNvSpPr/>
+          <p:nvPr/>
+        </p:nvSpPr>
+        <p:spPr>
+          <a:xfrm>
+            <a:off x="566928" y="1719072"/>
+            <a:ext cx="5368900" cy="868680"/>
+          </a:xfrm>
+          <a:prstGeom prst="rect">
+            <a:avLst/>
+          </a:prstGeom>
+          <a:solidFill>
+            <a:srgbClr val="F7FAFC"/>
+          </a:solidFill>
+          <a:ln w="6350">
+            <a:solidFill>
+              <a:srgbClr val="D9B668"/>
+            </a:solidFill>
+            <a:prstDash val="solid"/>
+          </a:ln>
+        </p:spPr>
+      </p:sp>
+      <p:sp>
+        <p:nvSpPr>
+          <p:cNvPr id="8" name="Shape 6"/>
+          <p:cNvSpPr/>
+          <p:nvPr/>
+        </p:nvSpPr>
+        <p:spPr>
+          <a:xfrm>
+            <a:off x="704088" y="1883664"/>
+            <a:ext cx="320040" cy="320040"/>
+          </a:xfrm>
+          <a:prstGeom prst="rect">
+            <a:avLst/>
+          </a:prstGeom>
+          <a:solidFill>
+            <a:srgbClr val="977024"/>
+          </a:solidFill>
+          <a:ln/>
+        </p:spPr>
+      </p:sp>
+      <p:sp>
+        <p:nvSpPr>
+          <p:cNvPr id="9" name="Text 7"/>
+          <p:cNvSpPr/>
+          <p:nvPr/>
+        </p:nvSpPr>
+        <p:spPr>
+          <a:xfrm>
+            <a:off x="704088" y="1883664"/>
+            <a:ext cx="320040" cy="320040"/>
+          </a:xfrm>
+          <a:prstGeom prst="rect">
+            <a:avLst/>
+          </a:prstGeom>
+          <a:noFill/>
+          <a:ln/>
+        </p:spPr>
+        <p:txBody>
+          <a:bodyPr wrap="square" rtlCol="0" anchor="ctr"/>
+          <a:lstStyle/>
+          <a:p>
+            <a:pPr algn="ctr" indent="0" marL="0">
+              <a:buNone/>
+            </a:pPr>
+            <a:r>
+              <a:rPr lang="en-US" sz="1100" b="1" dirty="0">
+                <a:solidFill>
+                  <a:srgbClr val="000000"/>
+                </a:solidFill>
+                <a:latin typeface="Pretendard" pitchFamily="34" charset="0"/>
+                <a:ea typeface="Pretendard" pitchFamily="34" charset="-122"/>
+                <a:cs typeface="Pretendard" pitchFamily="34" charset="-120"/>
+              </a:rPr>
+              <a:t>✓</a:t>
+            </a:r>
+            <a:endParaRPr lang="en-US" sz="1100" dirty="0"/>
+          </a:p>
+        </p:txBody>
+      </p:sp>
+      <p:sp>
+        <p:nvSpPr>
+          <p:cNvPr id="10" name="Text 8"/>
+          <p:cNvSpPr/>
+          <p:nvPr/>
+        </p:nvSpPr>
+        <p:spPr>
+          <a:xfrm>
+            <a:off x="1115568" y="1828800"/>
+            <a:ext cx="4683100" cy="685800"/>
+          </a:xfrm>
+          <a:prstGeom prst="rect">
+            <a:avLst/>
+          </a:prstGeom>
+          <a:noFill/>
+          <a:ln/>
+        </p:spPr>
+        <p:txBody>
+          <a:bodyPr wrap="square" rtlCol="0" anchor="ctr"/>
+          <a:lstStyle/>
+          <a:p>
+            <a:pPr indent="0" marL="0">
+              <a:lnSpc>
+                <a:spcPct val="115000"/>
+              </a:lnSpc>
+              <a:buNone/>
+            </a:pPr>
+            <a:r>
+              <a:rPr lang="en-US" sz="1050" dirty="0">
+                <a:solidFill>
+                  <a:srgbClr val="10161F"/>
+                </a:solidFill>
+                <a:latin typeface="Pretendard" pitchFamily="34" charset="0"/>
+                <a:ea typeface="Pretendard" pitchFamily="34" charset="-122"/>
+                <a:cs typeface="Pretendard" pitchFamily="34" charset="-120"/>
+              </a:rPr>
+              <a:t>등기부등본 갑구/을구 권리관계 및 근저당 채권최고액 전액 말소 조건 원본 대조</a:t>
+            </a:r>
+            <a:endParaRPr lang="en-US" sz="1050" dirty="0"/>
+          </a:p>
+        </p:txBody>
+      </p:sp>
+      <p:sp>
+        <p:nvSpPr>
+          <p:cNvPr id="11" name="Shape 9"/>
+          <p:cNvSpPr/>
+          <p:nvPr/>
+        </p:nvSpPr>
+        <p:spPr>
+          <a:xfrm>
+            <a:off x="566928" y="2715768"/>
+            <a:ext cx="5368900" cy="868680"/>
+          </a:xfrm>
+          <a:prstGeom prst="rect">
+            <a:avLst/>
+          </a:prstGeom>
+          <a:solidFill>
+            <a:srgbClr val="F7FAFC"/>
+          </a:solidFill>
+          <a:ln w="6350">
+            <a:solidFill>
+              <a:srgbClr val="D9B668"/>
+            </a:solidFill>
+            <a:prstDash val="solid"/>
+          </a:ln>
+        </p:spPr>
+      </p:sp>
+      <p:sp>
+        <p:nvSpPr>
+          <p:cNvPr id="12" name="Shape 10"/>
+          <p:cNvSpPr/>
+          <p:nvPr/>
+        </p:nvSpPr>
+        <p:spPr>
+          <a:xfrm>
+            <a:off x="704088" y="2880360"/>
+            <a:ext cx="320040" cy="320040"/>
+          </a:xfrm>
+          <a:prstGeom prst="rect">
+            <a:avLst/>
+          </a:prstGeom>
+          <a:solidFill>
+            <a:srgbClr val="977024"/>
+          </a:solidFill>
+          <a:ln/>
+        </p:spPr>
+      </p:sp>
+      <p:sp>
+        <p:nvSpPr>
+          <p:cNvPr id="13" name="Text 11"/>
+          <p:cNvSpPr/>
+          <p:nvPr/>
+        </p:nvSpPr>
+        <p:spPr>
+          <a:xfrm>
+            <a:off x="704088" y="2880360"/>
+            <a:ext cx="320040" cy="320040"/>
+          </a:xfrm>
+          <a:prstGeom prst="rect">
+            <a:avLst/>
+          </a:prstGeom>
+          <a:noFill/>
+          <a:ln/>
+        </p:spPr>
+        <p:txBody>
+          <a:bodyPr wrap="square" rtlCol="0" anchor="ctr"/>
+          <a:lstStyle/>
+          <a:p>
+            <a:pPr algn="ctr" indent="0" marL="0">
+              <a:buNone/>
+            </a:pPr>
+            <a:r>
+              <a:rPr lang="en-US" sz="1100" b="1" dirty="0">
+                <a:solidFill>
+                  <a:srgbClr val="000000"/>
+                </a:solidFill>
+                <a:latin typeface="Pretendard" pitchFamily="34" charset="0"/>
+                <a:ea typeface="Pretendard" pitchFamily="34" charset="-122"/>
+                <a:cs typeface="Pretendard" pitchFamily="34" charset="-120"/>
+              </a:rPr>
+              <a:t>✓</a:t>
+            </a:r>
+            <a:endParaRPr lang="en-US" sz="1100" dirty="0"/>
+          </a:p>
+        </p:txBody>
+      </p:sp>
+      <p:sp>
+        <p:nvSpPr>
+          <p:cNvPr id="14" name="Text 12"/>
+          <p:cNvSpPr/>
+          <p:nvPr/>
+        </p:nvSpPr>
+        <p:spPr>
+          <a:xfrm>
+            <a:off x="1115568" y="2825496"/>
+            <a:ext cx="4683100" cy="685800"/>
+          </a:xfrm>
+          <a:prstGeom prst="rect">
+            <a:avLst/>
+          </a:prstGeom>
+          <a:noFill/>
+          <a:ln/>
+        </p:spPr>
+        <p:txBody>
+          <a:bodyPr wrap="square" rtlCol="0" anchor="ctr"/>
+          <a:lstStyle/>
+          <a:p>
+            <a:pPr indent="0" marL="0">
+              <a:lnSpc>
+                <a:spcPct val="115000"/>
+              </a:lnSpc>
+              <a:buNone/>
+            </a:pPr>
+            <a:r>
+              <a:rPr lang="en-US" sz="1050" dirty="0">
+                <a:solidFill>
+                  <a:srgbClr val="10161F"/>
+                </a:solidFill>
+                <a:latin typeface="Pretendard" pitchFamily="34" charset="0"/>
+                <a:ea typeface="Pretendard" pitchFamily="34" charset="-122"/>
+                <a:cs typeface="Pretendard" pitchFamily="34" charset="-120"/>
+              </a:rPr>
+              <a:t>임대차 원본 계약서 대조 (보증금, 월임대료, 관리비 실입금 내역 및 제소전화해조서)</a:t>
+            </a:r>
+            <a:endParaRPr lang="en-US" sz="1050" dirty="0"/>
+          </a:p>
+        </p:txBody>
+      </p:sp>
+      <p:sp>
+        <p:nvSpPr>
+          <p:cNvPr id="15" name="Shape 13"/>
+          <p:cNvSpPr/>
+          <p:nvPr/>
+        </p:nvSpPr>
+        <p:spPr>
+          <a:xfrm>
+            <a:off x="566928" y="3712464"/>
+            <a:ext cx="5368900" cy="868680"/>
+          </a:xfrm>
+          <a:prstGeom prst="rect">
+            <a:avLst/>
+          </a:prstGeom>
+          <a:solidFill>
+            <a:srgbClr val="F7FAFC"/>
+          </a:solidFill>
+          <a:ln w="6350">
+            <a:solidFill>
+              <a:srgbClr val="D9B668"/>
+            </a:solidFill>
+            <a:prstDash val="solid"/>
+          </a:ln>
+        </p:spPr>
+      </p:sp>
+      <p:sp>
+        <p:nvSpPr>
+          <p:cNvPr id="16" name="Shape 14"/>
+          <p:cNvSpPr/>
+          <p:nvPr/>
+        </p:nvSpPr>
+        <p:spPr>
+          <a:xfrm>
+            <a:off x="704088" y="3877056"/>
+            <a:ext cx="320040" cy="320040"/>
+          </a:xfrm>
+          <a:prstGeom prst="rect">
+            <a:avLst/>
+          </a:prstGeom>
+          <a:solidFill>
+            <a:srgbClr val="977024"/>
+          </a:solidFill>
+          <a:ln/>
+        </p:spPr>
+      </p:sp>
+      <p:sp>
+        <p:nvSpPr>
+          <p:cNvPr id="17" name="Text 15"/>
+          <p:cNvSpPr/>
+          <p:nvPr/>
+        </p:nvSpPr>
+        <p:spPr>
+          <a:xfrm>
+            <a:off x="704088" y="3877056"/>
+            <a:ext cx="320040" cy="320040"/>
+          </a:xfrm>
+          <a:prstGeom prst="rect">
+            <a:avLst/>
+          </a:prstGeom>
+          <a:noFill/>
+          <a:ln/>
+        </p:spPr>
+        <p:txBody>
+          <a:bodyPr wrap="square" rtlCol="0" anchor="ctr"/>
+          <a:lstStyle/>
+          <a:p>
+            <a:pPr algn="ctr" indent="0" marL="0">
+              <a:buNone/>
+            </a:pPr>
+            <a:r>
+              <a:rPr lang="en-US" sz="1100" b="1" dirty="0">
+                <a:solidFill>
+                  <a:srgbClr val="000000"/>
+                </a:solidFill>
+                <a:latin typeface="Pretendard" pitchFamily="34" charset="0"/>
+                <a:ea typeface="Pretendard" pitchFamily="34" charset="-122"/>
+                <a:cs typeface="Pretendard" pitchFamily="34" charset="-120"/>
+              </a:rPr>
+              <a:t>✓</a:t>
+            </a:r>
+            <a:endParaRPr lang="en-US" sz="1100" dirty="0"/>
+          </a:p>
+        </p:txBody>
+      </p:sp>
+      <p:sp>
+        <p:nvSpPr>
+          <p:cNvPr id="18" name="Text 16"/>
+          <p:cNvSpPr/>
+          <p:nvPr/>
+        </p:nvSpPr>
+        <p:spPr>
+          <a:xfrm>
+            <a:off x="1115568" y="3822192"/>
+            <a:ext cx="4683100" cy="685800"/>
+          </a:xfrm>
+          <a:prstGeom prst="rect">
+            <a:avLst/>
+          </a:prstGeom>
+          <a:noFill/>
+          <a:ln/>
+        </p:spPr>
+        <p:txBody>
+          <a:bodyPr wrap="square" rtlCol="0" anchor="ctr"/>
+          <a:lstStyle/>
+          <a:p>
+            <a:pPr indent="0" marL="0">
+              <a:lnSpc>
+                <a:spcPct val="115000"/>
+              </a:lnSpc>
+              <a:buNone/>
+            </a:pPr>
+            <a:r>
+              <a:rPr lang="en-US" sz="1050" dirty="0">
+                <a:solidFill>
+                  <a:srgbClr val="10161F"/>
+                </a:solidFill>
+                <a:latin typeface="Pretendard" pitchFamily="34" charset="0"/>
+                <a:ea typeface="Pretendard" pitchFamily="34" charset="-122"/>
+                <a:cs typeface="Pretendard" pitchFamily="34" charset="-120"/>
+              </a:rPr>
+              <a:t>건축물대장상 위반건축물 등재 여부 및 불법 증축·용도변경 이행강제금 납부 이력 점검</a:t>
+            </a:r>
+            <a:endParaRPr lang="en-US" sz="1050" dirty="0"/>
+          </a:p>
+        </p:txBody>
+      </p:sp>
+      <p:sp>
+        <p:nvSpPr>
+          <p:cNvPr id="19" name="Shape 17"/>
+          <p:cNvSpPr/>
+          <p:nvPr/>
+        </p:nvSpPr>
+        <p:spPr>
+          <a:xfrm>
+            <a:off x="6255868" y="1719072"/>
+            <a:ext cx="5368900" cy="868680"/>
+          </a:xfrm>
+          <a:prstGeom prst="rect">
+            <a:avLst/>
+          </a:prstGeom>
+          <a:solidFill>
+            <a:srgbClr val="F7FAFC"/>
+          </a:solidFill>
+          <a:ln w="6350">
+            <a:solidFill>
+              <a:srgbClr val="D9B668"/>
+            </a:solidFill>
+            <a:prstDash val="solid"/>
+          </a:ln>
+        </p:spPr>
+      </p:sp>
+      <p:sp>
+        <p:nvSpPr>
+          <p:cNvPr id="20" name="Shape 18"/>
+          <p:cNvSpPr/>
+          <p:nvPr/>
+        </p:nvSpPr>
+        <p:spPr>
+          <a:xfrm>
+            <a:off x="6393028" y="1883664"/>
+            <a:ext cx="320040" cy="320040"/>
+          </a:xfrm>
+          <a:prstGeom prst="rect">
+            <a:avLst/>
+          </a:prstGeom>
+          <a:solidFill>
+            <a:srgbClr val="977024"/>
+          </a:solidFill>
+          <a:ln/>
+        </p:spPr>
+      </p:sp>
+      <p:sp>
+        <p:nvSpPr>
+          <p:cNvPr id="21" name="Text 19"/>
+          <p:cNvSpPr/>
+          <p:nvPr/>
+        </p:nvSpPr>
+        <p:spPr>
+          <a:xfrm>
+            <a:off x="6393028" y="1883664"/>
+            <a:ext cx="320040" cy="320040"/>
+          </a:xfrm>
+          <a:prstGeom prst="rect">
+            <a:avLst/>
+          </a:prstGeom>
+          <a:noFill/>
+          <a:ln/>
+        </p:spPr>
+        <p:txBody>
+          <a:bodyPr wrap="square" rtlCol="0" anchor="ctr"/>
+          <a:lstStyle/>
+          <a:p>
+            <a:pPr algn="ctr" indent="0" marL="0">
+              <a:buNone/>
+            </a:pPr>
+            <a:r>
+              <a:rPr lang="en-US" sz="1100" b="1" dirty="0">
+                <a:solidFill>
+                  <a:srgbClr val="000000"/>
+                </a:solidFill>
+                <a:latin typeface="Pretendard" pitchFamily="34" charset="0"/>
+                <a:ea typeface="Pretendard" pitchFamily="34" charset="-122"/>
+                <a:cs typeface="Pretendard" pitchFamily="34" charset="-120"/>
+              </a:rPr>
+              <a:t>✓</a:t>
+            </a:r>
+            <a:endParaRPr lang="en-US" sz="1100" dirty="0"/>
+          </a:p>
+        </p:txBody>
+      </p:sp>
+      <p:sp>
+        <p:nvSpPr>
+          <p:cNvPr id="22" name="Text 20"/>
+          <p:cNvSpPr/>
+          <p:nvPr/>
+        </p:nvSpPr>
+        <p:spPr>
+          <a:xfrm>
+            <a:off x="6804508" y="1828800"/>
+            <a:ext cx="4683100" cy="685800"/>
+          </a:xfrm>
+          <a:prstGeom prst="rect">
+            <a:avLst/>
+          </a:prstGeom>
+          <a:noFill/>
+          <a:ln/>
+        </p:spPr>
+        <p:txBody>
+          <a:bodyPr wrap="square" rtlCol="0" anchor="ctr"/>
+          <a:lstStyle/>
+          <a:p>
+            <a:pPr indent="0" marL="0">
+              <a:lnSpc>
+                <a:spcPct val="115000"/>
+              </a:lnSpc>
+              <a:buNone/>
+            </a:pPr>
+            <a:r>
+              <a:rPr lang="en-US" sz="1050" dirty="0">
+                <a:solidFill>
+                  <a:srgbClr val="10161F"/>
+                </a:solidFill>
+                <a:latin typeface="Pretendard" pitchFamily="34" charset="0"/>
+                <a:ea typeface="Pretendard" pitchFamily="34" charset="-122"/>
+                <a:cs typeface="Pretendard" pitchFamily="34" charset="-120"/>
+              </a:rPr>
+              <a:t>토지이용계획확인원상 도시계획시설 저촉, 건축선 후퇴, 지구단위계획 특별계획구역 확인</a:t>
+            </a:r>
+            <a:endParaRPr lang="en-US" sz="1050" dirty="0"/>
+          </a:p>
+        </p:txBody>
+      </p:sp>
+      <p:sp>
+        <p:nvSpPr>
+          <p:cNvPr id="23" name="Shape 21"/>
+          <p:cNvSpPr/>
+          <p:nvPr/>
+        </p:nvSpPr>
+        <p:spPr>
+          <a:xfrm>
+            <a:off x="6255868" y="2715768"/>
+            <a:ext cx="5368900" cy="868680"/>
+          </a:xfrm>
+          <a:prstGeom prst="rect">
+            <a:avLst/>
+          </a:prstGeom>
+          <a:solidFill>
+            <a:srgbClr val="F7FAFC"/>
+          </a:solidFill>
+          <a:ln w="6350">
+            <a:solidFill>
+              <a:srgbClr val="D9B668"/>
+            </a:solidFill>
+            <a:prstDash val="solid"/>
+          </a:ln>
+        </p:spPr>
+      </p:sp>
+      <p:sp>
+        <p:nvSpPr>
+          <p:cNvPr id="24" name="Shape 22"/>
+          <p:cNvSpPr/>
+          <p:nvPr/>
+        </p:nvSpPr>
+        <p:spPr>
+          <a:xfrm>
+            <a:off x="6393028" y="2880360"/>
+            <a:ext cx="320040" cy="320040"/>
+          </a:xfrm>
+          <a:prstGeom prst="rect">
+            <a:avLst/>
+          </a:prstGeom>
+          <a:solidFill>
+            <a:srgbClr val="977024"/>
+          </a:solidFill>
+          <a:ln/>
+        </p:spPr>
+      </p:sp>
+      <p:sp>
+        <p:nvSpPr>
+          <p:cNvPr id="25" name="Text 23"/>
+          <p:cNvSpPr/>
+          <p:nvPr/>
+        </p:nvSpPr>
+        <p:spPr>
+          <a:xfrm>
+            <a:off x="6393028" y="2880360"/>
+            <a:ext cx="320040" cy="320040"/>
+          </a:xfrm>
+          <a:prstGeom prst="rect">
+            <a:avLst/>
+          </a:prstGeom>
+          <a:noFill/>
+          <a:ln/>
+        </p:spPr>
+        <p:txBody>
+          <a:bodyPr wrap="square" rtlCol="0" anchor="ctr"/>
+          <a:lstStyle/>
+          <a:p>
+            <a:pPr algn="ctr" indent="0" marL="0">
+              <a:buNone/>
+            </a:pPr>
+            <a:r>
+              <a:rPr lang="en-US" sz="1100" b="1" dirty="0">
+                <a:solidFill>
+                  <a:srgbClr val="000000"/>
+                </a:solidFill>
+                <a:latin typeface="Pretendard" pitchFamily="34" charset="0"/>
+                <a:ea typeface="Pretendard" pitchFamily="34" charset="-122"/>
+                <a:cs typeface="Pretendard" pitchFamily="34" charset="-120"/>
+              </a:rPr>
+              <a:t>✓</a:t>
+            </a:r>
+            <a:endParaRPr lang="en-US" sz="1100" dirty="0"/>
+          </a:p>
+        </p:txBody>
+      </p:sp>
+      <p:sp>
+        <p:nvSpPr>
+          <p:cNvPr id="26" name="Text 24"/>
+          <p:cNvSpPr/>
+          <p:nvPr/>
+        </p:nvSpPr>
+        <p:spPr>
+          <a:xfrm>
+            <a:off x="6804508" y="2825496"/>
+            <a:ext cx="4683100" cy="685800"/>
+          </a:xfrm>
+          <a:prstGeom prst="rect">
+            <a:avLst/>
+          </a:prstGeom>
+          <a:noFill/>
+          <a:ln/>
+        </p:spPr>
+        <p:txBody>
+          <a:bodyPr wrap="square" rtlCol="0" anchor="ctr"/>
+          <a:lstStyle/>
+          <a:p>
+            <a:pPr indent="0" marL="0">
+              <a:lnSpc>
+                <a:spcPct val="115000"/>
+              </a:lnSpc>
+              <a:buNone/>
+            </a:pPr>
+            <a:r>
+              <a:rPr lang="en-US" sz="1050" dirty="0">
+                <a:solidFill>
+                  <a:srgbClr val="10161F"/>
+                </a:solidFill>
+                <a:latin typeface="Pretendard" pitchFamily="34" charset="0"/>
+                <a:ea typeface="Pretendard" pitchFamily="34" charset="-122"/>
+                <a:cs typeface="Pretendard" pitchFamily="34" charset="-120"/>
+              </a:rPr>
+              <a:t>기계식 주차기 정기 안전점검 합격증, 승강기 검사필증, 소방 완비증명서 실물 실사</a:t>
+            </a:r>
+            <a:endParaRPr lang="en-US" sz="1050" dirty="0"/>
+          </a:p>
+        </p:txBody>
+      </p:sp>
+      <p:sp>
+        <p:nvSpPr>
+          <p:cNvPr id="27" name="Shape 25"/>
+          <p:cNvSpPr/>
+          <p:nvPr/>
+        </p:nvSpPr>
+        <p:spPr>
+          <a:xfrm>
+            <a:off x="6255868" y="3712464"/>
+            <a:ext cx="5368900" cy="868680"/>
+          </a:xfrm>
+          <a:prstGeom prst="rect">
+            <a:avLst/>
+          </a:prstGeom>
+          <a:solidFill>
+            <a:srgbClr val="F7FAFC"/>
+          </a:solidFill>
+          <a:ln w="6350">
+            <a:solidFill>
+              <a:srgbClr val="D9B668"/>
+            </a:solidFill>
+            <a:prstDash val="solid"/>
+          </a:ln>
+        </p:spPr>
+      </p:sp>
+      <p:sp>
+        <p:nvSpPr>
+          <p:cNvPr id="28" name="Shape 26"/>
+          <p:cNvSpPr/>
+          <p:nvPr/>
+        </p:nvSpPr>
+        <p:spPr>
+          <a:xfrm>
+            <a:off x="6393028" y="3877056"/>
+            <a:ext cx="320040" cy="320040"/>
+          </a:xfrm>
+          <a:prstGeom prst="rect">
+            <a:avLst/>
+          </a:prstGeom>
+          <a:solidFill>
+            <a:srgbClr val="977024"/>
+          </a:solidFill>
+          <a:ln/>
+        </p:spPr>
+      </p:sp>
+      <p:sp>
+        <p:nvSpPr>
+          <p:cNvPr id="29" name="Text 27"/>
+          <p:cNvSpPr/>
+          <p:nvPr/>
+        </p:nvSpPr>
+        <p:spPr>
+          <a:xfrm>
+            <a:off x="6393028" y="3877056"/>
+            <a:ext cx="320040" cy="320040"/>
+          </a:xfrm>
+          <a:prstGeom prst="rect">
+            <a:avLst/>
+          </a:prstGeom>
+          <a:noFill/>
+          <a:ln/>
+        </p:spPr>
+        <p:txBody>
+          <a:bodyPr wrap="square" rtlCol="0" anchor="ctr"/>
+          <a:lstStyle/>
+          <a:p>
+            <a:pPr algn="ctr" indent="0" marL="0">
+              <a:buNone/>
+            </a:pPr>
+            <a:r>
+              <a:rPr lang="en-US" sz="1100" b="1" dirty="0">
+                <a:solidFill>
+                  <a:srgbClr val="000000"/>
+                </a:solidFill>
+                <a:latin typeface="Pretendard" pitchFamily="34" charset="0"/>
+                <a:ea typeface="Pretendard" pitchFamily="34" charset="-122"/>
+                <a:cs typeface="Pretendard" pitchFamily="34" charset="-120"/>
+              </a:rPr>
+              <a:t>✓</a:t>
+            </a:r>
+            <a:endParaRPr lang="en-US" sz="1100" dirty="0"/>
+          </a:p>
+        </p:txBody>
+      </p:sp>
+      <p:sp>
+        <p:nvSpPr>
+          <p:cNvPr id="30" name="Text 28"/>
+          <p:cNvSpPr/>
+          <p:nvPr/>
+        </p:nvSpPr>
+        <p:spPr>
+          <a:xfrm>
+            <a:off x="6804508" y="3822192"/>
+            <a:ext cx="4683100" cy="685800"/>
+          </a:xfrm>
+          <a:prstGeom prst="rect">
+            <a:avLst/>
+          </a:prstGeom>
+          <a:noFill/>
+          <a:ln/>
+        </p:spPr>
+        <p:txBody>
+          <a:bodyPr wrap="square" rtlCol="0" anchor="ctr"/>
+          <a:lstStyle/>
+          <a:p>
+            <a:pPr indent="0" marL="0">
+              <a:lnSpc>
+                <a:spcPct val="115000"/>
+              </a:lnSpc>
+              <a:buNone/>
+            </a:pPr>
+            <a:r>
+              <a:rPr lang="en-US" sz="1050" dirty="0">
+                <a:solidFill>
+                  <a:srgbClr val="10161F"/>
+                </a:solidFill>
+                <a:latin typeface="Pretendard" pitchFamily="34" charset="0"/>
+                <a:ea typeface="Pretendard" pitchFamily="34" charset="-122"/>
+                <a:cs typeface="Pretendard" pitchFamily="34" charset="-120"/>
+              </a:rPr>
+              <a:t>정화조 용량 대비 현 업종 적합성 및 하수도 원인자부담금 추가 부과 대상 여부 확인</a:t>
+            </a:r>
+            <a:endParaRPr lang="en-US" sz="1050" dirty="0"/>
+          </a:p>
+        </p:txBody>
+      </p:sp>
+      <p:sp>
+        <p:nvSpPr>
+          <p:cNvPr id="31" name="Shape 29"/>
+          <p:cNvSpPr/>
+          <p:nvPr/>
+        </p:nvSpPr>
+        <p:spPr>
+          <a:xfrm>
+            <a:off x="566928" y="5760720"/>
+            <a:ext cx="11057839" cy="594360"/>
+          </a:xfrm>
+          <a:prstGeom prst="rect">
+            <a:avLst/>
+          </a:prstGeom>
+          <a:solidFill>
+            <a:srgbClr val="D9B668"/>
+          </a:solidFill>
+          <a:ln/>
+        </p:spPr>
+      </p:sp>
+      <p:sp>
+        <p:nvSpPr>
+          <p:cNvPr id="32" name="Text 30"/>
+          <p:cNvSpPr/>
+          <p:nvPr/>
+        </p:nvSpPr>
+        <p:spPr>
+          <a:xfrm>
+            <a:off x="749808" y="5833872"/>
+            <a:ext cx="10692079" cy="448056"/>
+          </a:xfrm>
+          <a:prstGeom prst="rect">
+            <a:avLst/>
+          </a:prstGeom>
+          <a:noFill/>
+          <a:ln/>
+        </p:spPr>
+        <p:txBody>
+          <a:bodyPr wrap="square" rtlCol="0" anchor="ctr"/>
+          <a:lstStyle/>
+          <a:p>
+            <a:pPr indent="0" marL="0">
+              <a:buNone/>
+            </a:pPr>
+            <a:r>
+              <a:rPr lang="en-US" sz="950" b="1" dirty="0">
+                <a:solidFill>
+                  <a:srgbClr val="977024"/>
+                </a:solidFill>
+                <a:latin typeface="Pretendard" pitchFamily="34" charset="0"/>
+                <a:ea typeface="Pretendard" pitchFamily="34" charset="-122"/>
+                <a:cs typeface="Pretendard" pitchFamily="34" charset="-120"/>
+              </a:rPr>
+              <a:t>※ 본 체크리스트는 계약 전 매수인의 안전한 자산 인수를 위한 필수 확인 사항이며, 실사(Due Diligence) 결과에 따라 매매 조건 및 잔금 일정이 조정될 수 있습니다.</a:t>
+            </a:r>
+            <a:endParaRPr lang="en-US" sz="950" dirty="0"/>
+          </a:p>
+        </p:txBody>
+      </p:sp>
+      <p:sp>
+        <p:nvSpPr>
+          <p:cNvPr id="33" name="Text 31"/>
+          <p:cNvSpPr/>
+          <p:nvPr/>
+        </p:nvSpPr>
+        <p:spPr>
+          <a:xfrm>
+            <a:off x="566928" y="6382512"/>
+            <a:ext cx="7315200" cy="219456"/>
+          </a:xfrm>
+          <a:prstGeom prst="rect">
+            <a:avLst/>
+          </a:prstGeom>
+          <a:noFill/>
+          <a:ln/>
+        </p:spPr>
+        <p:txBody>
+          <a:bodyPr wrap="square" lIns="0" tIns="0" rIns="0" bIns="0" rtlCol="0" anchor="ctr"/>
+          <a:lstStyle/>
+          <a:p>
+            <a:pPr indent="0" marL="0">
+              <a:buNone/>
+            </a:pPr>
+            <a:r>
+              <a:rPr lang="en-US" sz="800" dirty="0">
+                <a:solidFill>
+                  <a:srgbClr val="718096"/>
+                </a:solidFill>
+                <a:latin typeface="Pretendard" pitchFamily="34" charset="0"/>
+                <a:ea typeface="Pretendard" pitchFamily="34" charset="-122"/>
+                <a:cs typeface="Pretendard" pitchFamily="34" charset="-120"/>
+              </a:rPr>
+              <a:t>크리딜   |   </a:t>
+            </a:r>
+            <a:endParaRPr lang="en-US" sz="800" dirty="0"/>
+          </a:p>
+        </p:txBody>
+      </p:sp>
+      <p:sp>
+        <p:nvSpPr>
+          <p:cNvPr id="34" name="Text 32"/>
+          <p:cNvSpPr/>
+          <p:nvPr/>
+        </p:nvSpPr>
+        <p:spPr>
+          <a:xfrm>
+            <a:off x="10710367" y="6382512"/>
+            <a:ext cx="914400" cy="219456"/>
+          </a:xfrm>
+          <a:prstGeom prst="rect">
+            <a:avLst/>
+          </a:prstGeom>
+          <a:noFill/>
+          <a:ln/>
+        </p:spPr>
+        <p:txBody>
+          <a:bodyPr wrap="square" lIns="0" tIns="0" rIns="0" bIns="0" rtlCol="0" anchor="ctr"/>
+          <a:lstStyle/>
+          <a:p>
+            <a:pPr algn="r" indent="0" marL="0">
+              <a:buNone/>
+            </a:pPr>
+            <a:r>
+              <a:rPr lang="en-US" sz="900" b="1" dirty="0">
+                <a:solidFill>
+                  <a:srgbClr val="B98A2E"/>
+                </a:solidFill>
+                <a:latin typeface="Arial" pitchFamily="34" charset="0"/>
+                <a:ea typeface="Arial" pitchFamily="34" charset="-122"/>
+                <a:cs typeface="Arial" pitchFamily="34" charset="-120"/>
+              </a:rPr>
+              <a:t>10</a:t>
+            </a:r>
+            <a:endParaRPr lang="en-US" sz="900" dirty="0"/>
+          </a:p>
+        </p:txBody>
+      </p:sp>
+    </p:spTree>
+  </p:cSld>
+  <p:clrMapOvr>
+    <a:masterClrMapping/>
+  </p:clrMapOvr>
+</p:sld>
+</file>
+
+<file path=ppt/slides/slide12.xml><?xml version="1.0" encoding="utf-8"?>
+<p:sld xmlns:a="http://schemas.openxmlformats.org/drawingml/2006/main" xmlns:r="http://schemas.openxmlformats.org/officeDocument/2006/relationships" xmlns:p="http://schemas.openxmlformats.org/presentationml/2006/main">
+  <p:cSld name="Slide 12">
+    <p:bg>
+      <p:bgPr>
+        <a:solidFill>
+          <a:srgbClr val="FFFFFF"/>
+        </a:solidFill>
+      </p:bgPr>
+    </p:bg>
+    <p:spTree>
+      <p:nvGrpSpPr>
+        <p:cNvPr id="1" name=""/>
+        <p:cNvGrpSpPr/>
+        <p:nvPr/>
+      </p:nvGrpSpPr>
+      <p:grpSpPr>
+        <a:xfrm>
+          <a:off x="0" y="0"/>
+          <a:ext cx="0" cy="0"/>
+          <a:chOff x="0" y="0"/>
+          <a:chExt cx="0" cy="0"/>
+        </a:xfrm>
+      </p:grpSpPr>
+      <p:sp>
+        <p:nvSpPr>
+          <p:cNvPr id="2" name="Shape 0"/>
+          <p:cNvSpPr/>
+          <p:nvPr/>
+        </p:nvSpPr>
+        <p:spPr>
+          <a:xfrm>
+            <a:off x="566928" y="457200"/>
+            <a:ext cx="384048" cy="384048"/>
+          </a:xfrm>
+          <a:prstGeom prst="ellipse">
+            <a:avLst/>
+          </a:prstGeom>
+          <a:solidFill>
+            <a:srgbClr val="B98A2E"/>
+          </a:solidFill>
+          <a:ln/>
+        </p:spPr>
+      </p:sp>
+      <p:sp>
+        <p:nvSpPr>
+          <p:cNvPr id="3" name="Text 1"/>
+          <p:cNvSpPr/>
+          <p:nvPr/>
+        </p:nvSpPr>
+        <p:spPr>
+          <a:xfrm>
+            <a:off x="566928" y="457200"/>
+            <a:ext cx="384048" cy="384048"/>
+          </a:xfrm>
+          <a:prstGeom prst="rect">
+            <a:avLst/>
+          </a:prstGeom>
+          <a:noFill/>
+          <a:ln/>
+        </p:spPr>
+        <p:txBody>
+          <a:bodyPr wrap="square" lIns="0" tIns="0" rIns="0" bIns="0" rtlCol="0" anchor="ctr"/>
+          <a:lstStyle/>
+          <a:p>
+            <a:pPr algn="ctr" indent="0" marL="0">
+              <a:buNone/>
+            </a:pPr>
+            <a:r>
+              <a:rPr lang="en-US" sz="1300" b="1" dirty="0">
+                <a:solidFill>
+                  <a:srgbClr val="FFFFFF"/>
+                </a:solidFill>
+                <a:latin typeface="Arial" pitchFamily="34" charset="0"/>
+                <a:ea typeface="Arial" pitchFamily="34" charset="-122"/>
+                <a:cs typeface="Arial" pitchFamily="34" charset="-120"/>
+              </a:rPr>
+              <a:t>11</a:t>
+            </a:r>
+            <a:endParaRPr lang="en-US" sz="1300" dirty="0"/>
+          </a:p>
+        </p:txBody>
+      </p:sp>
+      <p:sp>
+        <p:nvSpPr>
+          <p:cNvPr id="4" name="Text 2"/>
+          <p:cNvSpPr/>
+          <p:nvPr/>
+        </p:nvSpPr>
+        <p:spPr>
+          <a:xfrm>
+            <a:off x="1133856" y="457200"/>
+            <a:ext cx="10490911" cy="182880"/>
+          </a:xfrm>
+          <a:prstGeom prst="rect">
+            <a:avLst/>
+          </a:prstGeom>
+          <a:noFill/>
+          <a:ln/>
+        </p:spPr>
+        <p:txBody>
+          <a:bodyPr wrap="square" lIns="0" tIns="0" rIns="0" bIns="0" rtlCol="0" anchor="ctr"/>
+          <a:lstStyle/>
+          <a:p>
+            <a:pPr indent="0" marL="0">
+              <a:buNone/>
+            </a:pPr>
+            <a:r>
+              <a:rPr lang="en-US" sz="950" b="1" spc="200" kern="0" dirty="0">
+                <a:solidFill>
+                  <a:srgbClr val="B98A2E"/>
+                </a:solidFill>
+                <a:latin typeface="Arial" pitchFamily="34" charset="0"/>
+                <a:ea typeface="Arial" pitchFamily="34" charset="-122"/>
+                <a:cs typeface="Arial" pitchFamily="34" charset="-120"/>
+              </a:rPr>
+              <a:t>Process</a:t>
+            </a:r>
+            <a:endParaRPr lang="en-US" sz="950" dirty="0"/>
+          </a:p>
+        </p:txBody>
+      </p:sp>
+      <p:sp>
+        <p:nvSpPr>
+          <p:cNvPr id="5" name="Text 3"/>
+          <p:cNvSpPr/>
+          <p:nvPr/>
+        </p:nvSpPr>
+        <p:spPr>
+          <a:xfrm>
+            <a:off x="1133856" y="640080"/>
+            <a:ext cx="10490911" cy="365760"/>
+          </a:xfrm>
+          <a:prstGeom prst="rect">
+            <a:avLst/>
+          </a:prstGeom>
+          <a:noFill/>
+          <a:ln/>
+        </p:spPr>
+        <p:txBody>
+          <a:bodyPr wrap="square" lIns="0" tIns="0" rIns="0" bIns="0" rtlCol="0" anchor="ctr"/>
+          <a:lstStyle/>
+          <a:p>
+            <a:pPr indent="0" marL="0">
+              <a:buNone/>
+            </a:pPr>
+            <a:r>
+              <a:rPr lang="en-US" sz="2300" b="1" dirty="0">
+                <a:solidFill>
+                  <a:srgbClr val="10161F"/>
+                </a:solidFill>
+                <a:latin typeface="Pretendard" pitchFamily="34" charset="0"/>
+                <a:ea typeface="Pretendard" pitchFamily="34" charset="-122"/>
+                <a:cs typeface="Pretendard" pitchFamily="34" charset="-120"/>
+              </a:rPr>
+              <a:t>검토 후 다음 단계는 무엇인가</a:t>
+            </a:r>
+            <a:endParaRPr lang="en-US" sz="2300" dirty="0"/>
+          </a:p>
+        </p:txBody>
+      </p:sp>
+      <p:sp>
+        <p:nvSpPr>
+          <p:cNvPr id="6" name="Shape 4"/>
+          <p:cNvSpPr/>
+          <p:nvPr/>
+        </p:nvSpPr>
+        <p:spPr>
+          <a:xfrm>
+            <a:off x="566928" y="1572768"/>
+            <a:ext cx="11057839" cy="3200400"/>
+          </a:xfrm>
+          <a:prstGeom prst="roundRect">
+            <a:avLst>
+              <a:gd name="adj" fmla="val 1714"/>
+            </a:avLst>
+          </a:prstGeom>
+          <a:solidFill>
+            <a:srgbClr val="F7FAFC"/>
+          </a:solidFill>
+          <a:ln w="6350">
+            <a:solidFill>
+              <a:srgbClr val="CBD5E0"/>
+            </a:solidFill>
+            <a:prstDash val="solid"/>
+          </a:ln>
+        </p:spPr>
+      </p:sp>
+      <p:sp>
+        <p:nvSpPr>
+          <p:cNvPr id="7" name="Shape 5"/>
+          <p:cNvSpPr/>
+          <p:nvPr/>
+        </p:nvSpPr>
+        <p:spPr>
+          <a:xfrm>
+            <a:off x="786384" y="1792224"/>
+            <a:ext cx="438912" cy="438912"/>
+          </a:xfrm>
+          <a:prstGeom prst="ellipse">
+            <a:avLst/>
+          </a:prstGeom>
+          <a:solidFill>
+            <a:srgbClr val="B98A2E"/>
+          </a:solidFill>
+          <a:ln/>
+        </p:spPr>
+      </p:sp>
+      <p:sp>
+        <p:nvSpPr>
+          <p:cNvPr id="8" name="Text 6"/>
+          <p:cNvSpPr/>
+          <p:nvPr/>
+        </p:nvSpPr>
+        <p:spPr>
+          <a:xfrm>
+            <a:off x="786384" y="1792224"/>
+            <a:ext cx="438912" cy="438912"/>
+          </a:xfrm>
+          <a:prstGeom prst="rect">
+            <a:avLst/>
+          </a:prstGeom>
+          <a:noFill/>
+          <a:ln/>
+        </p:spPr>
+        <p:txBody>
+          <a:bodyPr wrap="square" lIns="0" tIns="0" rIns="0" bIns="0" rtlCol="0" anchor="ctr"/>
+          <a:lstStyle/>
+          <a:p>
+            <a:pPr algn="ctr" indent="0" marL="0">
+              <a:buNone/>
+            </a:pPr>
+            <a:r>
+              <a:rPr lang="en-US" sz="1400" b="1" dirty="0">
+                <a:solidFill>
+                  <a:srgbClr val="FFFFFF"/>
+                </a:solidFill>
+                <a:latin typeface="Arial" pitchFamily="34" charset="0"/>
+                <a:ea typeface="Arial" pitchFamily="34" charset="-122"/>
+                <a:cs typeface="Arial" pitchFamily="34" charset="-120"/>
+              </a:rPr>
+              <a:t>01</a:t>
+            </a:r>
+            <a:endParaRPr lang="en-US" sz="1400" dirty="0"/>
+          </a:p>
+        </p:txBody>
+      </p:sp>
+      <p:sp>
+        <p:nvSpPr>
+          <p:cNvPr id="9" name="Text 7"/>
+          <p:cNvSpPr/>
+          <p:nvPr/>
+        </p:nvSpPr>
+        <p:spPr>
+          <a:xfrm>
+            <a:off x="786384" y="2304288"/>
+            <a:ext cx="10618927" cy="365760"/>
+          </a:xfrm>
+          <a:prstGeom prst="rect">
+            <a:avLst/>
+          </a:prstGeom>
+          <a:noFill/>
+          <a:ln/>
+        </p:spPr>
+        <p:txBody>
+          <a:bodyPr wrap="square" rtlCol="0" anchor="ctr"/>
+          <a:lstStyle/>
+          <a:p>
+            <a:pPr indent="0" marL="0">
+              <a:buNone/>
+            </a:pPr>
+            <a:r>
+              <a:rPr lang="en-US" sz="1600" b="1" dirty="0">
+                <a:solidFill>
+                  <a:srgbClr val="10161F"/>
+                </a:solidFill>
+                <a:latin typeface="Pretendard" pitchFamily="34" charset="0"/>
+                <a:ea typeface="Pretendard" pitchFamily="34" charset="-122"/>
+                <a:cs typeface="Pretendard" pitchFamily="34" charset="-120"/>
+              </a:rPr>
+              <a:t>1단계</a:t>
+            </a:r>
+            <a:endParaRPr lang="en-US" sz="1600" dirty="0"/>
+          </a:p>
+        </p:txBody>
+      </p:sp>
+      <p:sp>
+        <p:nvSpPr>
+          <p:cNvPr id="10" name="Text 8"/>
+          <p:cNvSpPr/>
+          <p:nvPr/>
+        </p:nvSpPr>
+        <p:spPr>
+          <a:xfrm>
+            <a:off x="786384" y="2761488"/>
+            <a:ext cx="10618927" cy="1828800"/>
+          </a:xfrm>
+          <a:prstGeom prst="rect">
+            <a:avLst/>
+          </a:prstGeom>
+          <a:noFill/>
+          <a:ln/>
+        </p:spPr>
+        <p:txBody>
+          <a:bodyPr wrap="square" rtlCol="0" anchor="t"/>
+          <a:lstStyle/>
+          <a:p>
+            <a:pPr indent="0" marL="0">
+              <a:buNone/>
+            </a:pPr>
+            <a:r>
+              <a:rPr lang="en-US" sz="1100" dirty="0">
+                <a:solidFill>
+                  <a:srgbClr val="10161F"/>
+                </a:solidFill>
+                <a:latin typeface="Pretendard" pitchFamily="34" charset="0"/>
+                <a:ea typeface="Pretendard" pitchFamily="34" charset="-122"/>
+                <a:cs typeface="Pretendard" pitchFamily="34" charset="-120"/>
+              </a:rPr>
+              <a:t>{"ok"</a:t>
+            </a:r>
+            <a:endParaRPr lang="en-US" sz="1100" dirty="0"/>
+          </a:p>
+          <a:p>
+            <a:pPr indent="0" marL="0">
+              <a:buNone/>
+            </a:pPr>
+            <a:r>
+              <a:rPr lang="en-US" sz="1100" dirty="0">
+                <a:solidFill>
+                  <a:srgbClr val="10161F"/>
+                </a:solidFill>
+                <a:latin typeface="Pretendard" pitchFamily="34" charset="0"/>
+                <a:ea typeface="Pretendard" pitchFamily="34" charset="-122"/>
+                <a:cs typeface="Pretendard" pitchFamily="34" charset="-120"/>
+              </a:rPr>
+              <a:t>true,"mocked":true,"extractedFields":{"area_signal":"역삼","asset_type":"[건물명 비공개]","price_band":"300억","size_signal":"3000평(약 9917.4㎡)"},"extractedFacts":{"region":"역삼","exactAddressCandidate":"역삼동 742-1","assetType":"[건물명 비공개]","priceText":"300억","sizeText":"3000평(약 9917.4㎡)","currentUse":"오피스","currentUseSignal":"근린생활시설","leaseSignal":"임대중","vacancySignal":"공실없음","tenantNames":["쿠팡","네이버"],"unitRentTexts":["301호: 1500만"],"sellerMotivationText":"자산 효율화","brokerNotes":["역세권 도보 3분 이내 매물"]},"detectedSensitiveFields":["exact_address","tenant_name"],"ambiguousFields":[],"warnings":[],"areaSignal":"역삼","assetType":"[건물명 비공개]","priceBand":"300억","sizeSignal":"3000평(약 9917.4㎡)","dealType":"매각","buildingName":"역삼 [건물명 비공개]","exactAddress":"역삼동 742-1","totalFloorArea":9917.3,"buildYear":2015,"currentUseSignal":"근린생활시설","vacancySignal":"공실 없음","fitSummary":"역세권 도보 3분 이내 근생 빌딩으로 시행/사옥 매입에 최적화","cautionSummary":"주요 임차인 만기 조율 필요","hiddenFields":["exact_address","seller_motivation"],"confidence":{"areaSignal":"confirmed","assetType":"confirmed","priceBand":"ai_hypothesis","fitSummary":"ai_hypothesis"},"missingData":["sizeSignal"],"boundaryNote":"본 자료는 실거래 통계 기반 참고치입니다.","buyerType":"법인 사옥형","budgetRange":{"min":50,"max":80,"display":"50억~80억"},"preferredRegions":["강남","성수"],"assetTypes":["[건물명 비공개]","사옥용"],"purchasePurpose":"사옥용 매입","mustHave":["역세권 도보 3분 이내","주차"],"niceToHave":["테라스","루프탑"],"riskTolerance":"medium","financingNote":"자본금 50% 준비","missingQuestions":["구체적인 입주 시기가 언제인가요?","선호하는 수익률이 있나요?"],"privacyNotes":["연락처 비공개"],"fitReasons":["매수자 예산(50-80억)에 부합하는 매물입니다.","요청하신 성수/강남 권역에 해당합니다."],"cautionReasons":["요청한 용도와 달리 명도 협의가 다소 필요합니다."],"recommendedNextAction":"현장 답사 제안","kakaoMessage":"안녕하세요! 요청하신 조건에 부합하는 추천 매물이 있어 안내해 드립니다. 확인해보시고 피드백 부탁드립니다.","title":"강남 역삼역 역세권 도보 3분 이내 오피스 사옥용 빌딩 매각","shortSummary":"역삼역 도보 5분 거리의 준신축급 대형 [건물명 비공개]입니다.","dealPoints":["역세권 도보 3분 이내","사옥 최적"],"cautionPoints":["명도 조율 필요"],"hiddenInfoNotice":["보증금 및 지번은 인가 후 확인 가능"],"gateMessage":"G1 등급 등록이 필요합니다.","kakaoText":"강남 역삼역 오피스 빌딩 매각 안내입니다.","exactUnitCandidate":"101호","floor":"1층","areaSqmText":"150㎡","spaceType":"office","depositText":"5000만","monthlyRentText":"400만","maintenanceFeeText":"50만","availableFromText":"즉시입주","leaseTermMonthsText":"24","incentivesText":"렌트프리(무상임대) 2개월","restrictions":[],"landlordIdentity":"김성수","currentTenant":"스타트업","vacancyReason":"이전 확장","rentNegotiation":"협의 가능","region":"성수동","areaSqm":150,"deposit":5000,"monthlyRent":400,"maintenanceFee":50,"availableFrom":"즉시입주","leaseTermMonths":24,"incentives":{"렌트프리(무상임대)(무상임대)Months":2,"interiorSupport":"일부 인테리어 지원","freeRentDetail":"렌트프리(무상임대) 2개월 지원"},"shortSummaryLease":"성수역 도보 5분 거리 1층 리테일 상가 매물입니다."}</a:t>
+            </a:r>
+            <a:endParaRPr lang="en-US" sz="1100" dirty="0"/>
+          </a:p>
+        </p:txBody>
+      </p:sp>
+      <p:sp>
+        <p:nvSpPr>
+          <p:cNvPr id="11" name="Text 9"/>
+          <p:cNvSpPr/>
+          <p:nvPr/>
+        </p:nvSpPr>
+        <p:spPr>
+          <a:xfrm>
+            <a:off x="566928" y="6382512"/>
+            <a:ext cx="7315200" cy="219456"/>
+          </a:xfrm>
+          <a:prstGeom prst="rect">
+            <a:avLst/>
+          </a:prstGeom>
+          <a:noFill/>
+          <a:ln/>
+        </p:spPr>
+        <p:txBody>
+          <a:bodyPr wrap="square" lIns="0" tIns="0" rIns="0" bIns="0" rtlCol="0" anchor="ctr"/>
+          <a:lstStyle/>
+          <a:p>
+            <a:pPr indent="0" marL="0">
+              <a:buNone/>
+            </a:pPr>
+            <a:r>
+              <a:rPr lang="en-US" sz="800" dirty="0">
+                <a:solidFill>
+                  <a:srgbClr val="718096"/>
+                </a:solidFill>
+                <a:latin typeface="Pretendard" pitchFamily="34" charset="0"/>
+                <a:ea typeface="Pretendard" pitchFamily="34" charset="-122"/>
+                <a:cs typeface="Pretendard" pitchFamily="34" charset="-120"/>
+              </a:rPr>
+              <a:t>크리딜   |   </a:t>
+            </a:r>
+            <a:endParaRPr lang="en-US" sz="800" dirty="0"/>
+          </a:p>
+        </p:txBody>
+      </p:sp>
+      <p:sp>
+        <p:nvSpPr>
+          <p:cNvPr id="12" name="Text 10"/>
+          <p:cNvSpPr/>
+          <p:nvPr/>
+        </p:nvSpPr>
+        <p:spPr>
+          <a:xfrm>
+            <a:off x="10710367" y="6382512"/>
+            <a:ext cx="914400" cy="219456"/>
+          </a:xfrm>
+          <a:prstGeom prst="rect">
+            <a:avLst/>
+          </a:prstGeom>
+          <a:noFill/>
+          <a:ln/>
+        </p:spPr>
+        <p:txBody>
+          <a:bodyPr wrap="square" lIns="0" tIns="0" rIns="0" bIns="0" rtlCol="0" anchor="ctr"/>
+          <a:lstStyle/>
+          <a:p>
+            <a:pPr algn="r" indent="0" marL="0">
+              <a:buNone/>
+            </a:pPr>
+            <a:r>
+              <a:rPr lang="en-US" sz="900" b="1" dirty="0">
+                <a:solidFill>
+                  <a:srgbClr val="B98A2E"/>
+                </a:solidFill>
+                <a:latin typeface="Arial" pitchFamily="34" charset="0"/>
+                <a:ea typeface="Arial" pitchFamily="34" charset="-122"/>
+                <a:cs typeface="Arial" pitchFamily="34" charset="-120"/>
+              </a:rPr>
+              <a:t>11</a:t>
+            </a:r>
+            <a:endParaRPr lang="en-US" sz="900" dirty="0"/>
+          </a:p>
+        </p:txBody>
+      </p:sp>
+    </p:spTree>
+  </p:cSld>
+  <p:clrMapOvr>
+    <a:masterClrMapping/>
+  </p:clrMapOvr>
+</p:sld>
+</file>
+
+<file path=ppt/slides/slide13.xml><?xml version="1.0" encoding="utf-8"?>
+<p:sld xmlns:a="http://schemas.openxmlformats.org/drawingml/2006/main" xmlns:r="http://schemas.openxmlformats.org/officeDocument/2006/relationships" xmlns:p="http://schemas.openxmlformats.org/presentationml/2006/main">
+  <p:cSld name="Slide 13">
     <p:bg>
       <p:bgPr>
         <a:solidFill>
@@ -2368,7 +4738,7 @@
                 <a:ea typeface="Arial" pitchFamily="34" charset="-122"/>
                 <a:cs typeface="Arial" pitchFamily="34" charset="-120"/>
               </a:rPr>
-              <a:t>10</a:t>
+              <a:t>12</a:t>
             </a:r>
             <a:endParaRPr lang="en-US" sz="1300" dirty="0"/>
           </a:p>
@@ -2407,7 +4777,7 @@
                 <a:ea typeface="Arial" pitchFamily="34" charset="-122"/>
                 <a:cs typeface="Arial" pitchFamily="34" charset="-120"/>
               </a:rPr>
-              <a:t>Disclaimer</a:t>
+              <a:t>Closing</a:t>
             </a:r>
             <a:endParaRPr lang="en-US" sz="950" dirty="0"/>
           </a:p>
@@ -2597,7 +4967,7 @@
               <a:buNone/>
             </a:pPr>
             <a:r>
-              <a:rPr lang="en-US" sz="850" dirty="0">
+              <a:rPr lang="en-US" sz="900" dirty="0">
                 <a:solidFill>
                   <a:srgbClr val="A0AEC0"/>
                 </a:solidFill>
@@ -2607,7 +4977,7 @@
               </a:rPr>
               <a:t>담당 중개사에게 초기 관심 표명 및 상담 요청</a:t>
             </a:r>
-            <a:endParaRPr lang="en-US" sz="850" dirty="0"/>
+            <a:endParaRPr lang="en-US" sz="900" dirty="0"/>
           </a:p>
         </p:txBody>
       </p:sp>
@@ -2795,7 +5165,7 @@
               <a:buNone/>
             </a:pPr>
             <a:r>
-              <a:rPr lang="en-US" sz="850" dirty="0">
+              <a:rPr lang="en-US" sz="900" dirty="0">
                 <a:solidFill>
                   <a:srgbClr val="A0AEC0"/>
                 </a:solidFill>
@@ -2805,7 +5175,7 @@
               </a:rPr>
               <a:t>비밀유지계약 후 상세 임대차·재무 자료 제공</a:t>
             </a:r>
-            <a:endParaRPr lang="en-US" sz="850" dirty="0"/>
+            <a:endParaRPr lang="en-US" sz="900" dirty="0"/>
           </a:p>
         </p:txBody>
       </p:sp>
@@ -2993,7 +5363,7 @@
               <a:buNone/>
             </a:pPr>
             <a:r>
-              <a:rPr lang="en-US" sz="850" dirty="0">
+              <a:rPr lang="en-US" sz="900" dirty="0">
                 <a:solidFill>
                   <a:srgbClr val="A0AEC0"/>
                 </a:solidFill>
@@ -3003,7 +5373,7 @@
               </a:rPr>
               <a:t>건물 컨디션 및 설비 직접 확인 후 의향서(LOI) 제출</a:t>
             </a:r>
-            <a:endParaRPr lang="en-US" sz="850" dirty="0"/>
+            <a:endParaRPr lang="en-US" sz="900" dirty="0"/>
           </a:p>
         </p:txBody>
       </p:sp>
@@ -3093,7 +5463,7 @@
               <a:buNone/>
             </a:pPr>
             <a:r>
-              <a:rPr lang="en-US" sz="850" b="1" dirty="0">
+              <a:rPr lang="en-US" sz="900" b="1" dirty="0">
                 <a:solidFill>
                   <a:srgbClr val="FFFFFF"/>
                 </a:solidFill>
@@ -3103,7 +5473,7 @@
               </a:rPr>
               <a:t>✓ 공부확인</a:t>
             </a:r>
-            <a:endParaRPr lang="en-US" sz="850" dirty="0"/>
+            <a:endParaRPr lang="en-US" sz="900" dirty="0"/>
           </a:p>
         </p:txBody>
       </p:sp>
@@ -3193,7 +5563,7 @@
               <a:buNone/>
             </a:pPr>
             <a:r>
-              <a:rPr lang="en-US" sz="850" b="1" dirty="0">
+              <a:rPr lang="en-US" sz="900" b="1" dirty="0">
                 <a:solidFill>
                   <a:srgbClr val="FFFFFF"/>
                 </a:solidFill>
@@ -3203,7 +5573,7 @@
               </a:rPr>
               <a:t>★ 전문가검증</a:t>
             </a:r>
-            <a:endParaRPr lang="en-US" sz="850" dirty="0"/>
+            <a:endParaRPr lang="en-US" sz="900" dirty="0"/>
           </a:p>
         </p:txBody>
       </p:sp>
@@ -3293,7 +5663,7 @@
               <a:buNone/>
             </a:pPr>
             <a:r>
-              <a:rPr lang="en-US" sz="850" b="1" dirty="0">
+              <a:rPr lang="en-US" sz="900" b="1" dirty="0">
                 <a:solidFill>
                   <a:srgbClr val="FFFFFF"/>
                 </a:solidFill>
@@ -3303,7 +5673,7 @@
               </a:rPr>
               <a:t>▲ 매도인고지</a:t>
             </a:r>
-            <a:endParaRPr lang="en-US" sz="850" dirty="0"/>
+            <a:endParaRPr lang="en-US" sz="900" dirty="0"/>
           </a:p>
         </p:txBody>
       </p:sp>
@@ -3393,7 +5763,7 @@
               <a:buNone/>
             </a:pPr>
             <a:r>
-              <a:rPr lang="en-US" sz="850" b="1" dirty="0">
+              <a:rPr lang="en-US" sz="900" b="1" dirty="0">
                 <a:solidFill>
                   <a:srgbClr val="FFFFFF"/>
                 </a:solidFill>
@@ -3403,7 +5773,7 @@
               </a:rPr>
               <a:t>● 중개인입력</a:t>
             </a:r>
-            <a:endParaRPr lang="en-US" sz="850" dirty="0"/>
+            <a:endParaRPr lang="en-US" sz="900" dirty="0"/>
           </a:p>
         </p:txBody>
       </p:sp>
@@ -3493,7 +5863,7 @@
               <a:buNone/>
             </a:pPr>
             <a:r>
-              <a:rPr lang="en-US" sz="850" b="1" dirty="0">
+              <a:rPr lang="en-US" sz="900" b="1" dirty="0">
                 <a:solidFill>
                   <a:srgbClr val="FFFFFF"/>
                 </a:solidFill>
@@ -3503,7 +5873,7 @@
               </a:rPr>
               <a:t>◇ AI추정·가정</a:t>
             </a:r>
-            <a:endParaRPr lang="en-US" sz="850" dirty="0"/>
+            <a:endParaRPr lang="en-US" sz="900" dirty="0"/>
           </a:p>
         </p:txBody>
       </p:sp>
@@ -3635,7 +6005,7 @@
               <a:buNone/>
             </a:pPr>
             <a:r>
-              <a:rPr lang="en-US" sz="850" dirty="0">
+              <a:rPr lang="en-US" sz="900" dirty="0">
                 <a:solidFill>
                   <a:srgbClr val="A0AEC0"/>
                 </a:solidFill>
@@ -3645,7 +6015,7 @@
               </a:rPr>
               <a:t>본 자료는 투자 권유가 아니며, 기재된 정보의 정확성을 보증하지 않습니다.</a:t>
             </a:r>
-            <a:endParaRPr lang="en-US" sz="850" dirty="0"/>
+            <a:endParaRPr lang="en-US" sz="900" dirty="0"/>
           </a:p>
         </p:txBody>
       </p:sp>
@@ -3780,7 +6150,732 @@
                 <a:ea typeface="Arial" pitchFamily="34" charset="-122"/>
                 <a:cs typeface="Arial" pitchFamily="34" charset="-120"/>
               </a:rPr>
-              <a:t>10</a:t>
+              <a:t>12</a:t>
+            </a:r>
+            <a:endParaRPr lang="en-US" sz="900" dirty="0"/>
+          </a:p>
+        </p:txBody>
+      </p:sp>
+    </p:spTree>
+  </p:cSld>
+  <p:clrMapOvr>
+    <a:masterClrMapping/>
+  </p:clrMapOvr>
+</p:sld>
+</file>
+
+<file path=ppt/slides/slide14.xml><?xml version="1.0" encoding="utf-8"?>
+<p:sld xmlns:a="http://schemas.openxmlformats.org/drawingml/2006/main" xmlns:r="http://schemas.openxmlformats.org/officeDocument/2006/relationships" xmlns:p="http://schemas.openxmlformats.org/presentationml/2006/main">
+  <p:cSld name="Slide 14">
+    <p:bg>
+      <p:bgPr>
+        <a:solidFill>
+          <a:srgbClr val="FFFFFF"/>
+        </a:solidFill>
+      </p:bgPr>
+    </p:bg>
+    <p:spTree>
+      <p:nvGrpSpPr>
+        <p:cNvPr id="1" name=""/>
+        <p:cNvGrpSpPr/>
+        <p:nvPr/>
+      </p:nvGrpSpPr>
+      <p:grpSpPr>
+        <a:xfrm>
+          <a:off x="0" y="0"/>
+          <a:ext cx="0" cy="0"/>
+          <a:chOff x="0" y="0"/>
+          <a:chExt cx="0" cy="0"/>
+        </a:xfrm>
+      </p:grpSpPr>
+      <p:sp>
+        <p:nvSpPr>
+          <p:cNvPr id="2" name="Shape 0"/>
+          <p:cNvSpPr/>
+          <p:nvPr/>
+        </p:nvSpPr>
+        <p:spPr>
+          <a:xfrm>
+            <a:off x="566928" y="457200"/>
+            <a:ext cx="384048" cy="384048"/>
+          </a:xfrm>
+          <a:prstGeom prst="ellipse">
+            <a:avLst/>
+          </a:prstGeom>
+          <a:solidFill>
+            <a:srgbClr val="B98A2E"/>
+          </a:solidFill>
+          <a:ln/>
+        </p:spPr>
+      </p:sp>
+      <p:sp>
+        <p:nvSpPr>
+          <p:cNvPr id="3" name="Text 1"/>
+          <p:cNvSpPr/>
+          <p:nvPr/>
+        </p:nvSpPr>
+        <p:spPr>
+          <a:xfrm>
+            <a:off x="566928" y="457200"/>
+            <a:ext cx="384048" cy="384048"/>
+          </a:xfrm>
+          <a:prstGeom prst="rect">
+            <a:avLst/>
+          </a:prstGeom>
+          <a:noFill/>
+          <a:ln/>
+        </p:spPr>
+        <p:txBody>
+          <a:bodyPr wrap="square" lIns="0" tIns="0" rIns="0" bIns="0" rtlCol="0" anchor="ctr"/>
+          <a:lstStyle/>
+          <a:p>
+            <a:pPr algn="ctr" indent="0" marL="0">
+              <a:buNone/>
+            </a:pPr>
+            <a:r>
+              <a:rPr lang="en-US" sz="1300" b="1" dirty="0">
+                <a:solidFill>
+                  <a:srgbClr val="FFFFFF"/>
+                </a:solidFill>
+                <a:latin typeface="Arial" pitchFamily="34" charset="0"/>
+                <a:ea typeface="Arial" pitchFamily="34" charset="-122"/>
+                <a:cs typeface="Arial" pitchFamily="34" charset="-120"/>
+              </a:rPr>
+              <a:t>13</a:t>
+            </a:r>
+            <a:endParaRPr lang="en-US" sz="1300" dirty="0"/>
+          </a:p>
+        </p:txBody>
+      </p:sp>
+      <p:sp>
+        <p:nvSpPr>
+          <p:cNvPr id="4" name="Text 2"/>
+          <p:cNvSpPr/>
+          <p:nvPr/>
+        </p:nvSpPr>
+        <p:spPr>
+          <a:xfrm>
+            <a:off x="1133856" y="457200"/>
+            <a:ext cx="10490911" cy="182880"/>
+          </a:xfrm>
+          <a:prstGeom prst="rect">
+            <a:avLst/>
+          </a:prstGeom>
+          <a:noFill/>
+          <a:ln/>
+        </p:spPr>
+        <p:txBody>
+          <a:bodyPr wrap="square" lIns="0" tIns="0" rIns="0" bIns="0" rtlCol="0" anchor="ctr"/>
+          <a:lstStyle/>
+          <a:p>
+            <a:pPr indent="0" marL="0">
+              <a:buNone/>
+            </a:pPr>
+            <a:r>
+              <a:rPr lang="en-US" sz="950" b="1" spc="200" kern="0" dirty="0">
+                <a:solidFill>
+                  <a:srgbClr val="B98A2E"/>
+                </a:solidFill>
+                <a:latin typeface="Arial" pitchFamily="34" charset="0"/>
+                <a:ea typeface="Arial" pitchFamily="34" charset="-122"/>
+                <a:cs typeface="Arial" pitchFamily="34" charset="-120"/>
+              </a:rPr>
+              <a:t>Records</a:t>
+            </a:r>
+            <a:endParaRPr lang="en-US" sz="950" dirty="0"/>
+          </a:p>
+        </p:txBody>
+      </p:sp>
+      <p:sp>
+        <p:nvSpPr>
+          <p:cNvPr id="5" name="Text 3"/>
+          <p:cNvSpPr/>
+          <p:nvPr/>
+        </p:nvSpPr>
+        <p:spPr>
+          <a:xfrm>
+            <a:off x="1133856" y="640080"/>
+            <a:ext cx="10490911" cy="365760"/>
+          </a:xfrm>
+          <a:prstGeom prst="rect">
+            <a:avLst/>
+          </a:prstGeom>
+          <a:noFill/>
+          <a:ln/>
+        </p:spPr>
+        <p:txBody>
+          <a:bodyPr wrap="square" lIns="0" tIns="0" rIns="0" bIns="0" rtlCol="0" anchor="ctr"/>
+          <a:lstStyle/>
+          <a:p>
+            <a:pPr indent="0" marL="0">
+              <a:buNone/>
+            </a:pPr>
+            <a:r>
+              <a:rPr lang="en-US" sz="2300" b="1" dirty="0">
+                <a:solidFill>
+                  <a:srgbClr val="10161F"/>
+                </a:solidFill>
+                <a:latin typeface="Pretendard" pitchFamily="34" charset="0"/>
+                <a:ea typeface="Pretendard" pitchFamily="34" charset="-122"/>
+                <a:cs typeface="Pretendard" pitchFamily="34" charset="-120"/>
+              </a:rPr>
+              <a:t>공부 발췌</a:t>
+            </a:r>
+            <a:endParaRPr lang="en-US" sz="2300" dirty="0"/>
+          </a:p>
+        </p:txBody>
+      </p:sp>
+      <p:sp>
+        <p:nvSpPr>
+          <p:cNvPr id="6" name="Text 4"/>
+          <p:cNvSpPr/>
+          <p:nvPr/>
+        </p:nvSpPr>
+        <p:spPr>
+          <a:xfrm>
+            <a:off x="566928" y="1371600"/>
+            <a:ext cx="6858000" cy="237744"/>
+          </a:xfrm>
+          <a:prstGeom prst="rect">
+            <a:avLst/>
+          </a:prstGeom>
+          <a:noFill/>
+          <a:ln/>
+        </p:spPr>
+        <p:txBody>
+          <a:bodyPr wrap="square" lIns="0" tIns="0" rIns="0" bIns="0" rtlCol="0" anchor="ctr"/>
+          <a:lstStyle/>
+          <a:p>
+            <a:pPr indent="0" marL="0">
+              <a:buNone/>
+            </a:pPr>
+            <a:r>
+              <a:rPr lang="en-US" sz="1100" b="1" dirty="0">
+                <a:solidFill>
+                  <a:srgbClr val="10161F"/>
+                </a:solidFill>
+                <a:latin typeface="Pretendard" pitchFamily="34" charset="0"/>
+                <a:ea typeface="Pretendard" pitchFamily="34" charset="-122"/>
+                <a:cs typeface="Pretendard" pitchFamily="34" charset="-120"/>
+              </a:rPr>
+              <a:t>건축물대장 표제부</a:t>
+            </a:r>
+            <a:endParaRPr lang="en-US" sz="1100" dirty="0"/>
+          </a:p>
+        </p:txBody>
+      </p:sp>
+      <p:sp>
+        <p:nvSpPr>
+          <p:cNvPr id="7" name="Text 5"/>
+          <p:cNvSpPr/>
+          <p:nvPr/>
+        </p:nvSpPr>
+        <p:spPr>
+          <a:xfrm>
+            <a:off x="566928" y="1645920"/>
+            <a:ext cx="2606040" cy="438912"/>
+          </a:xfrm>
+          <a:prstGeom prst="rect">
+            <a:avLst/>
+          </a:prstGeom>
+          <a:noFill/>
+          <a:ln/>
+        </p:spPr>
+        <p:txBody>
+          <a:bodyPr wrap="square" lIns="0" tIns="0" rIns="0" bIns="0" rtlCol="0" anchor="ctr"/>
+          <a:lstStyle/>
+          <a:p>
+            <a:pPr indent="0" marL="0">
+              <a:lnSpc>
+                <a:spcPct val="120000"/>
+              </a:lnSpc>
+              <a:buNone/>
+            </a:pPr>
+            <a:r>
+              <a:rPr lang="en-US" sz="1350" dirty="0">
+                <a:solidFill>
+                  <a:srgbClr val="718096"/>
+                </a:solidFill>
+                <a:latin typeface="Pretendard" pitchFamily="34" charset="0"/>
+                <a:ea typeface="Pretendard" pitchFamily="34" charset="-122"/>
+                <a:cs typeface="Pretendard" pitchFamily="34" charset="-120"/>
+              </a:rPr>
+              <a:t>연면적</a:t>
+            </a:r>
+            <a:endParaRPr lang="en-US" sz="1350" dirty="0"/>
+          </a:p>
+        </p:txBody>
+      </p:sp>
+      <p:sp>
+        <p:nvSpPr>
+          <p:cNvPr id="8" name="Text 6"/>
+          <p:cNvSpPr/>
+          <p:nvPr/>
+        </p:nvSpPr>
+        <p:spPr>
+          <a:xfrm>
+            <a:off x="3172968" y="1645920"/>
+            <a:ext cx="4251960" cy="438912"/>
+          </a:xfrm>
+          <a:prstGeom prst="rect">
+            <a:avLst/>
+          </a:prstGeom>
+          <a:noFill/>
+          <a:ln/>
+        </p:spPr>
+        <p:txBody>
+          <a:bodyPr wrap="square" lIns="0" tIns="0" rIns="0" bIns="0" rtlCol="0" anchor="ctr"/>
+          <a:lstStyle/>
+          <a:p>
+            <a:pPr indent="0" marL="0">
+              <a:lnSpc>
+                <a:spcPct val="120000"/>
+              </a:lnSpc>
+              <a:buNone/>
+            </a:pPr>
+            <a:r>
+              <a:rPr lang="en-US" sz="1350" b="1" dirty="0">
+                <a:solidFill>
+                  <a:srgbClr val="10161F"/>
+                </a:solidFill>
+                <a:latin typeface="Pretendard" pitchFamily="34" charset="0"/>
+                <a:ea typeface="Pretendard" pitchFamily="34" charset="-122"/>
+                <a:cs typeface="Pretendard" pitchFamily="34" charset="-120"/>
+              </a:rPr>
+              <a:t>5,000㎡ (1512.5평)</a:t>
+            </a:r>
+            <a:endParaRPr lang="en-US" sz="1350" dirty="0"/>
+          </a:p>
+        </p:txBody>
+      </p:sp>
+      <p:sp>
+        <p:nvSpPr>
+          <p:cNvPr id="9" name="Shape 7"/>
+          <p:cNvSpPr/>
+          <p:nvPr/>
+        </p:nvSpPr>
+        <p:spPr>
+          <a:xfrm>
+            <a:off x="7604608" y="1371600"/>
+            <a:ext cx="0" cy="4754880"/>
+          </a:xfrm>
+          <a:prstGeom prst="line">
+            <a:avLst/>
+          </a:prstGeom>
+          <a:noFill/>
+          <a:ln w="8890">
+            <a:solidFill>
+              <a:srgbClr val="B98A2E"/>
+            </a:solidFill>
+            <a:prstDash val="solid"/>
+          </a:ln>
+        </p:spPr>
+      </p:sp>
+      <p:sp>
+        <p:nvSpPr>
+          <p:cNvPr id="10" name="Shape 8"/>
+          <p:cNvSpPr/>
+          <p:nvPr/>
+        </p:nvSpPr>
+        <p:spPr>
+          <a:xfrm>
+            <a:off x="7784287" y="1645920"/>
+            <a:ext cx="3840480" cy="2103120"/>
+          </a:xfrm>
+          <a:prstGeom prst="roundRect">
+            <a:avLst>
+              <a:gd name="adj" fmla="val 2609"/>
+            </a:avLst>
+          </a:prstGeom>
+          <a:solidFill>
+            <a:srgbClr val="BEE3F8"/>
+          </a:solidFill>
+          <a:ln/>
+        </p:spPr>
+      </p:sp>
+      <p:sp>
+        <p:nvSpPr>
+          <p:cNvPr id="11" name="Shape 9"/>
+          <p:cNvSpPr/>
+          <p:nvPr/>
+        </p:nvSpPr>
+        <p:spPr>
+          <a:xfrm>
+            <a:off x="7784287" y="1700784"/>
+            <a:ext cx="36576" cy="1993392"/>
+          </a:xfrm>
+          <a:prstGeom prst="rect">
+            <a:avLst/>
+          </a:prstGeom>
+          <a:solidFill>
+            <a:srgbClr val="2B6CB0"/>
+          </a:solidFill>
+          <a:ln/>
+        </p:spPr>
+      </p:sp>
+      <p:sp>
+        <p:nvSpPr>
+          <p:cNvPr id="12" name="Text 10"/>
+          <p:cNvSpPr/>
+          <p:nvPr/>
+        </p:nvSpPr>
+        <p:spPr>
+          <a:xfrm>
+            <a:off x="7967167" y="1755648"/>
+            <a:ext cx="3511296" cy="201168"/>
+          </a:xfrm>
+          <a:prstGeom prst="rect">
+            <a:avLst/>
+          </a:prstGeom>
+          <a:noFill/>
+          <a:ln/>
+        </p:spPr>
+        <p:txBody>
+          <a:bodyPr wrap="square" lIns="0" tIns="0" rIns="0" bIns="0" rtlCol="0" anchor="ctr"/>
+          <a:lstStyle/>
+          <a:p>
+            <a:pPr indent="0" marL="0">
+              <a:buNone/>
+            </a:pPr>
+            <a:r>
+              <a:rPr lang="en-US" sz="1050" b="1" dirty="0">
+                <a:solidFill>
+                  <a:srgbClr val="2B6CB0"/>
+                </a:solidFill>
+                <a:latin typeface="Pretendard" pitchFamily="34" charset="0"/>
+                <a:ea typeface="Pretendard" pitchFamily="34" charset="-122"/>
+                <a:cs typeface="Pretendard" pitchFamily="34" charset="-120"/>
+              </a:rPr>
+              <a:t>입지 및 권리관계 실사 포인트</a:t>
+            </a:r>
+            <a:endParaRPr lang="en-US" sz="1050" dirty="0"/>
+          </a:p>
+        </p:txBody>
+      </p:sp>
+      <p:sp>
+        <p:nvSpPr>
+          <p:cNvPr id="13" name="Text 11"/>
+          <p:cNvSpPr/>
+          <p:nvPr/>
+        </p:nvSpPr>
+        <p:spPr>
+          <a:xfrm>
+            <a:off x="7967167" y="1975104"/>
+            <a:ext cx="3511296" cy="1700784"/>
+          </a:xfrm>
+          <a:prstGeom prst="rect">
+            <a:avLst/>
+          </a:prstGeom>
+          <a:noFill/>
+          <a:ln/>
+        </p:spPr>
+        <p:txBody>
+          <a:bodyPr wrap="square" lIns="0" tIns="0" rIns="0" bIns="0" rtlCol="0" anchor="t"/>
+          <a:lstStyle/>
+          <a:p>
+            <a:pPr marL="342900" indent="-342900">
+              <a:lnSpc>
+                <a:spcPct val="120000"/>
+              </a:lnSpc>
+              <a:buSzPct val="100000"/>
+              <a:buChar char="•"/>
+            </a:pPr>
+            <a:r>
+              <a:rPr lang="en-US" sz="930" dirty="0">
+                <a:solidFill>
+                  <a:srgbClr val="10161F"/>
+                </a:solidFill>
+                <a:latin typeface="Pretendard" pitchFamily="34" charset="0"/>
+                <a:ea typeface="Pretendard" pitchFamily="34" charset="-122"/>
+                <a:cs typeface="Pretendard" pitchFamily="34" charset="-120"/>
+              </a:rPr>
+              <a:t>물건 접면 도로 폭 및 진출입 여건은 현장 실사 확인 사항입니다</a:t>
+            </a:r>
+            <a:endParaRPr lang="en-US" sz="930" dirty="0"/>
+          </a:p>
+          <a:p>
+            <a:pPr marL="342900" indent="-342900">
+              <a:lnSpc>
+                <a:spcPct val="120000"/>
+              </a:lnSpc>
+              <a:buSzPct val="100000"/>
+              <a:buChar char="•"/>
+            </a:pPr>
+            <a:r>
+              <a:rPr lang="en-US" sz="930" dirty="0">
+                <a:solidFill>
+                  <a:srgbClr val="10161F"/>
+                </a:solidFill>
+                <a:latin typeface="Pretendard" pitchFamily="34" charset="0"/>
+                <a:ea typeface="Pretendard" pitchFamily="34" charset="-122"/>
+                <a:cs typeface="Pretendard" pitchFamily="34" charset="-120"/>
+              </a:rPr>
+              <a:t>등기부등본상 권리관계 및 제한물권 설정 여부를 확인하였습니다</a:t>
+            </a:r>
+            <a:endParaRPr lang="en-US" sz="930" dirty="0"/>
+          </a:p>
+          <a:p>
+            <a:pPr marL="342900" indent="-342900">
+              <a:lnSpc>
+                <a:spcPct val="120000"/>
+              </a:lnSpc>
+              <a:buSzPct val="100000"/>
+              <a:buChar char="•"/>
+            </a:pPr>
+            <a:r>
+              <a:rPr lang="en-US" sz="930" dirty="0">
+                <a:solidFill>
+                  <a:srgbClr val="10161F"/>
+                </a:solidFill>
+                <a:latin typeface="Pretendard" pitchFamily="34" charset="0"/>
+                <a:ea typeface="Pretendard" pitchFamily="34" charset="-122"/>
+                <a:cs typeface="Pretendard" pitchFamily="34" charset="-120"/>
+              </a:rPr>
+              <a:t>지구단위계획 및 토지이용계획상 허용 용도를 검토하였습니다</a:t>
+            </a:r>
+            <a:endParaRPr lang="en-US" sz="930" dirty="0"/>
+          </a:p>
+        </p:txBody>
+      </p:sp>
+      <p:sp>
+        <p:nvSpPr>
+          <p:cNvPr id="14" name="Shape 12"/>
+          <p:cNvSpPr/>
+          <p:nvPr/>
+        </p:nvSpPr>
+        <p:spPr>
+          <a:xfrm>
+            <a:off x="7784287" y="3977640"/>
+            <a:ext cx="3840480" cy="2148840"/>
+          </a:xfrm>
+          <a:prstGeom prst="roundRect">
+            <a:avLst>
+              <a:gd name="adj" fmla="val 2553"/>
+            </a:avLst>
+          </a:prstGeom>
+          <a:solidFill>
+            <a:srgbClr val="BEE3F8"/>
+          </a:solidFill>
+          <a:ln/>
+        </p:spPr>
+      </p:sp>
+      <p:sp>
+        <p:nvSpPr>
+          <p:cNvPr id="15" name="Shape 13"/>
+          <p:cNvSpPr/>
+          <p:nvPr/>
+        </p:nvSpPr>
+        <p:spPr>
+          <a:xfrm>
+            <a:off x="7784287" y="4032504"/>
+            <a:ext cx="36576" cy="2039112"/>
+          </a:xfrm>
+          <a:prstGeom prst="rect">
+            <a:avLst/>
+          </a:prstGeom>
+          <a:solidFill>
+            <a:srgbClr val="2B6CB0"/>
+          </a:solidFill>
+          <a:ln/>
+        </p:spPr>
+      </p:sp>
+      <p:sp>
+        <p:nvSpPr>
+          <p:cNvPr id="16" name="Text 14"/>
+          <p:cNvSpPr/>
+          <p:nvPr/>
+        </p:nvSpPr>
+        <p:spPr>
+          <a:xfrm>
+            <a:off x="7967167" y="4087368"/>
+            <a:ext cx="3511296" cy="201168"/>
+          </a:xfrm>
+          <a:prstGeom prst="rect">
+            <a:avLst/>
+          </a:prstGeom>
+          <a:noFill/>
+          <a:ln/>
+        </p:spPr>
+        <p:txBody>
+          <a:bodyPr wrap="square" lIns="0" tIns="0" rIns="0" bIns="0" rtlCol="0" anchor="ctr"/>
+          <a:lstStyle/>
+          <a:p>
+            <a:pPr indent="0" marL="0">
+              <a:buNone/>
+            </a:pPr>
+            <a:r>
+              <a:rPr lang="en-US" sz="1050" b="1" dirty="0">
+                <a:solidFill>
+                  <a:srgbClr val="2B6CB0"/>
+                </a:solidFill>
+                <a:latin typeface="Pretendard" pitchFamily="34" charset="0"/>
+                <a:ea typeface="Pretendard" pitchFamily="34" charset="-122"/>
+                <a:cs typeface="Pretendard" pitchFamily="34" charset="-120"/>
+              </a:rPr>
+              <a:t>임대차 및 운용 관리 상태</a:t>
+            </a:r>
+            <a:endParaRPr lang="en-US" sz="1050" dirty="0"/>
+          </a:p>
+        </p:txBody>
+      </p:sp>
+      <p:sp>
+        <p:nvSpPr>
+          <p:cNvPr id="17" name="Text 15"/>
+          <p:cNvSpPr/>
+          <p:nvPr/>
+        </p:nvSpPr>
+        <p:spPr>
+          <a:xfrm>
+            <a:off x="7967167" y="4306824"/>
+            <a:ext cx="3511296" cy="1746504"/>
+          </a:xfrm>
+          <a:prstGeom prst="rect">
+            <a:avLst/>
+          </a:prstGeom>
+          <a:noFill/>
+          <a:ln/>
+        </p:spPr>
+        <p:txBody>
+          <a:bodyPr wrap="square" lIns="0" tIns="0" rIns="0" bIns="0" rtlCol="0" anchor="t"/>
+          <a:lstStyle/>
+          <a:p>
+            <a:pPr marL="342900" indent="-342900">
+              <a:lnSpc>
+                <a:spcPct val="120000"/>
+              </a:lnSpc>
+              <a:buSzPct val="100000"/>
+              <a:buChar char="•"/>
+            </a:pPr>
+            <a:r>
+              <a:rPr lang="en-US" sz="930" dirty="0">
+                <a:solidFill>
+                  <a:srgbClr val="10161F"/>
+                </a:solidFill>
+                <a:latin typeface="Pretendard" pitchFamily="34" charset="0"/>
+                <a:ea typeface="Pretendard" pitchFamily="34" charset="-122"/>
+                <a:cs typeface="Pretendard" pitchFamily="34" charset="-120"/>
+              </a:rPr>
+              <a:t>주요 임차인별 계약 만기 분산 및 렌트롤 실사가 필요합니다</a:t>
+            </a:r>
+            <a:endParaRPr lang="en-US" sz="930" dirty="0"/>
+          </a:p>
+          <a:p>
+            <a:pPr marL="342900" indent="-342900">
+              <a:lnSpc>
+                <a:spcPct val="120000"/>
+              </a:lnSpc>
+              <a:buSzPct val="100000"/>
+              <a:buChar char="•"/>
+            </a:pPr>
+            <a:r>
+              <a:rPr lang="en-US" sz="930" dirty="0">
+                <a:solidFill>
+                  <a:srgbClr val="10161F"/>
+                </a:solidFill>
+                <a:latin typeface="Pretendard" pitchFamily="34" charset="0"/>
+                <a:ea typeface="Pretendard" pitchFamily="34" charset="-122"/>
+                <a:cs typeface="Pretendard" pitchFamily="34" charset="-120"/>
+              </a:rPr>
+              <a:t>관리비 정산 내역 및 수선유지비 집행 이력을 점검하였습니다</a:t>
+            </a:r>
+            <a:endParaRPr lang="en-US" sz="930" dirty="0"/>
+          </a:p>
+          <a:p>
+            <a:pPr marL="342900" indent="-342900">
+              <a:lnSpc>
+                <a:spcPct val="120000"/>
+              </a:lnSpc>
+              <a:buSzPct val="100000"/>
+              <a:buChar char="•"/>
+            </a:pPr>
+            <a:r>
+              <a:rPr lang="en-US" sz="930" dirty="0">
+                <a:solidFill>
+                  <a:srgbClr val="10161F"/>
+                </a:solidFill>
+                <a:latin typeface="Pretendard" pitchFamily="34" charset="0"/>
+                <a:ea typeface="Pretendard" pitchFamily="34" charset="-122"/>
+                <a:cs typeface="Pretendard" pitchFamily="34" charset="-120"/>
+              </a:rPr>
+              <a:t>취득세 감면 및 대출 조달 구조는 금융·세무 자문 후 확정됩니다</a:t>
+            </a:r>
+            <a:endParaRPr lang="en-US" sz="930" dirty="0"/>
+          </a:p>
+        </p:txBody>
+      </p:sp>
+      <p:sp>
+        <p:nvSpPr>
+          <p:cNvPr id="18" name="Text 16"/>
+          <p:cNvSpPr/>
+          <p:nvPr/>
+        </p:nvSpPr>
+        <p:spPr>
+          <a:xfrm>
+            <a:off x="566928" y="6382512"/>
+            <a:ext cx="7315200" cy="219456"/>
+          </a:xfrm>
+          <a:prstGeom prst="rect">
+            <a:avLst/>
+          </a:prstGeom>
+          <a:noFill/>
+          <a:ln/>
+        </p:spPr>
+        <p:txBody>
+          <a:bodyPr wrap="square" lIns="0" tIns="0" rIns="0" bIns="0" rtlCol="0" anchor="ctr"/>
+          <a:lstStyle/>
+          <a:p>
+            <a:pPr indent="0" marL="0">
+              <a:buNone/>
+            </a:pPr>
+            <a:r>
+              <a:rPr lang="en-US" sz="800" dirty="0">
+                <a:solidFill>
+                  <a:srgbClr val="718096"/>
+                </a:solidFill>
+                <a:latin typeface="Pretendard" pitchFamily="34" charset="0"/>
+                <a:ea typeface="Pretendard" pitchFamily="34" charset="-122"/>
+                <a:cs typeface="Pretendard" pitchFamily="34" charset="-120"/>
+              </a:rPr>
+              <a:t>크리딜   |   </a:t>
+            </a:r>
+            <a:endParaRPr lang="en-US" sz="800" dirty="0"/>
+          </a:p>
+        </p:txBody>
+      </p:sp>
+      <p:sp>
+        <p:nvSpPr>
+          <p:cNvPr id="19" name="Text 17"/>
+          <p:cNvSpPr/>
+          <p:nvPr/>
+        </p:nvSpPr>
+        <p:spPr>
+          <a:xfrm>
+            <a:off x="10710367" y="6382512"/>
+            <a:ext cx="914400" cy="219456"/>
+          </a:xfrm>
+          <a:prstGeom prst="rect">
+            <a:avLst/>
+          </a:prstGeom>
+          <a:noFill/>
+          <a:ln/>
+        </p:spPr>
+        <p:txBody>
+          <a:bodyPr wrap="square" lIns="0" tIns="0" rIns="0" bIns="0" rtlCol="0" anchor="ctr"/>
+          <a:lstStyle/>
+          <a:p>
+            <a:pPr algn="r" indent="0" marL="0">
+              <a:buNone/>
+            </a:pPr>
+            <a:r>
+              <a:rPr lang="en-US" sz="900" b="1" dirty="0">
+                <a:solidFill>
+                  <a:srgbClr val="B98A2E"/>
+                </a:solidFill>
+                <a:latin typeface="Arial" pitchFamily="34" charset="0"/>
+                <a:ea typeface="Arial" pitchFamily="34" charset="-122"/>
+                <a:cs typeface="Arial" pitchFamily="34" charset="-120"/>
+              </a:rPr>
+              <a:t>13</a:t>
             </a:r>
             <a:endParaRPr lang="en-US" sz="900" dirty="0"/>
           </a:p>
@@ -3949,7 +7044,7 @@
                 <a:ea typeface="Pretendard" pitchFamily="34" charset="-122"/>
                 <a:cs typeface="Pretendard" pitchFamily="34" charset="-120"/>
               </a:rPr>
-              <a:t>핵심요약</a:t>
+              <a:t>핵심 투자 지표</a:t>
             </a:r>
             <a:endParaRPr lang="en-US" sz="2300" dirty="0"/>
           </a:p>
@@ -3957,75 +7052,13 @@
       </p:sp>
       <p:sp>
         <p:nvSpPr>
-          <p:cNvPr id="6" name="Text 4"/>
-          <p:cNvSpPr/>
-          <p:nvPr/>
-        </p:nvSpPr>
-        <p:spPr>
-          <a:xfrm>
-            <a:off x="566928" y="1188720"/>
-            <a:ext cx="11057839" cy="457200"/>
-          </a:xfrm>
-          <a:prstGeom prst="rect">
-            <a:avLst/>
-          </a:prstGeom>
-          <a:noFill/>
-          <a:ln/>
-        </p:spPr>
-        <p:txBody>
-          <a:bodyPr wrap="square" rtlCol="0" anchor="ctr"/>
-          <a:lstStyle/>
-          <a:p>
-            <a:pPr indent="0" marL="0">
-              <a:buNone/>
-            </a:pPr>
-            <a:r>
-              <a:rPr lang="en-US" sz="1500" b="1" dirty="0">
-                <a:solidFill>
-                  <a:srgbClr val="10161F"/>
-                </a:solidFill>
-                <a:latin typeface="Pretendard" pitchFamily="34" charset="0"/>
-                <a:ea typeface="Pretendard" pitchFamily="34" charset="-122"/>
-                <a:cs typeface="Pretendard" pitchFamily="34" charset="-120"/>
-              </a:rPr>
-              <a:t>서초권역 소재 노후근생, 희망가 115억 투자 검토 자료입니다.</a:t>
-            </a:r>
-            <a:endParaRPr lang="en-US" sz="1500" dirty="0"/>
-          </a:p>
-        </p:txBody>
-      </p:sp>
-      <p:sp>
-        <p:nvSpPr>
-          <p:cNvPr id="7" name="Shape 5"/>
-          <p:cNvSpPr/>
-          <p:nvPr/>
-        </p:nvSpPr>
-        <p:spPr>
-          <a:xfrm>
-            <a:off x="566928" y="1691640"/>
-            <a:ext cx="11057839" cy="0"/>
-          </a:xfrm>
-          <a:prstGeom prst="line">
-            <a:avLst/>
-          </a:prstGeom>
-          <a:noFill/>
-          <a:ln w="19050">
-            <a:solidFill>
-              <a:srgbClr val="B98A2E"/>
-            </a:solidFill>
-            <a:prstDash val="solid"/>
-          </a:ln>
-        </p:spPr>
-      </p:sp>
-      <p:sp>
-        <p:nvSpPr>
-          <p:cNvPr id="8" name="Shape 6"/>
-          <p:cNvSpPr/>
-          <p:nvPr/>
-        </p:nvSpPr>
-        <p:spPr>
-          <a:xfrm>
-            <a:off x="566928" y="1965960"/>
+          <p:cNvPr id="6" name="Shape 4"/>
+          <p:cNvSpPr/>
+          <p:nvPr/>
+        </p:nvSpPr>
+        <p:spPr>
+          <a:xfrm>
+            <a:off x="566928" y="1371600"/>
             <a:ext cx="2627300" cy="1280160"/>
           </a:xfrm>
           <a:prstGeom prst="roundRect">
@@ -4046,13 +7079,13 @@
       </p:sp>
       <p:sp>
         <p:nvSpPr>
-          <p:cNvPr id="9" name="Text 7"/>
-          <p:cNvSpPr/>
-          <p:nvPr/>
-        </p:nvSpPr>
-        <p:spPr>
-          <a:xfrm>
-            <a:off x="731520" y="2093976"/>
+          <p:cNvPr id="7" name="Text 5"/>
+          <p:cNvSpPr/>
+          <p:nvPr/>
+        </p:nvSpPr>
+        <p:spPr>
+          <a:xfrm>
+            <a:off x="731520" y="1499616"/>
             <a:ext cx="2298116" cy="201168"/>
           </a:xfrm>
           <a:prstGeom prst="rect">
@@ -4077,7 +7110,7 @@
                 <a:ea typeface="Pretendard" pitchFamily="34" charset="-122"/>
                 <a:cs typeface="Pretendard" pitchFamily="34" charset="-120"/>
               </a:rPr>
-              <a:t>매매 희망가</a:t>
+              <a:t>매각 희망가</a:t>
             </a:r>
             <a:endParaRPr lang="en-US" sz="950" dirty="0"/>
           </a:p>
@@ -4085,13 +7118,13 @@
       </p:sp>
       <p:sp>
         <p:nvSpPr>
-          <p:cNvPr id="10" name="Text 8"/>
-          <p:cNvSpPr/>
-          <p:nvPr/>
-        </p:nvSpPr>
-        <p:spPr>
-          <a:xfrm>
-            <a:off x="731520" y="2276856"/>
+          <p:cNvPr id="8" name="Text 6"/>
+          <p:cNvSpPr/>
+          <p:nvPr/>
+        </p:nvSpPr>
+        <p:spPr>
+          <a:xfrm>
+            <a:off x="731520" y="1719072"/>
             <a:ext cx="2298116" cy="402336"/>
           </a:xfrm>
           <a:prstGeom prst="rect">
@@ -4126,13 +7159,13 @@
       </p:sp>
       <p:sp>
         <p:nvSpPr>
-          <p:cNvPr id="11" name="Shape 9"/>
-          <p:cNvSpPr/>
-          <p:nvPr/>
-        </p:nvSpPr>
-        <p:spPr>
-          <a:xfrm>
-            <a:off x="3377108" y="1965960"/>
+          <p:cNvPr id="9" name="Shape 7"/>
+          <p:cNvSpPr/>
+          <p:nvPr/>
+        </p:nvSpPr>
+        <p:spPr>
+          <a:xfrm>
+            <a:off x="3377108" y="1371600"/>
             <a:ext cx="2627300" cy="1280160"/>
           </a:xfrm>
           <a:prstGeom prst="roundRect">
@@ -4153,13 +7186,13 @@
       </p:sp>
       <p:sp>
         <p:nvSpPr>
-          <p:cNvPr id="12" name="Text 10"/>
-          <p:cNvSpPr/>
-          <p:nvPr/>
-        </p:nvSpPr>
-        <p:spPr>
-          <a:xfrm>
-            <a:off x="3541700" y="2093976"/>
+          <p:cNvPr id="10" name="Text 8"/>
+          <p:cNvSpPr/>
+          <p:nvPr/>
+        </p:nvSpPr>
+        <p:spPr>
+          <a:xfrm>
+            <a:off x="3541700" y="1499616"/>
             <a:ext cx="2298116" cy="201168"/>
           </a:xfrm>
           <a:prstGeom prst="rect">
@@ -4184,7 +7217,7 @@
                 <a:ea typeface="Pretendard" pitchFamily="34" charset="-122"/>
                 <a:cs typeface="Pretendard" pitchFamily="34" charset="-120"/>
               </a:rPr>
-              <a:t>평당 매매가</a:t>
+              <a:t>공실률</a:t>
             </a:r>
             <a:endParaRPr lang="en-US" sz="950" dirty="0"/>
           </a:p>
@@ -4192,13 +7225,13 @@
       </p:sp>
       <p:sp>
         <p:nvSpPr>
-          <p:cNvPr id="13" name="Text 11"/>
-          <p:cNvSpPr/>
-          <p:nvPr/>
-        </p:nvSpPr>
-        <p:spPr>
-          <a:xfrm>
-            <a:off x="3541700" y="2276856"/>
+          <p:cNvPr id="11" name="Text 9"/>
+          <p:cNvSpPr/>
+          <p:nvPr/>
+        </p:nvSpPr>
+        <p:spPr>
+          <a:xfrm>
+            <a:off x="3541700" y="1719072"/>
             <a:ext cx="2298116" cy="402336"/>
           </a:xfrm>
           <a:prstGeom prst="rect">
@@ -4225,7 +7258,7 @@
                 <a:ea typeface="Pretendard" pitchFamily="34" charset="-122"/>
                 <a:cs typeface="Pretendard" pitchFamily="34" charset="-120"/>
               </a:rPr>
-              <a:t>7,603,294원/평</a:t>
+              <a:t>만실</a:t>
             </a:r>
             <a:endParaRPr lang="en-US" sz="2000" dirty="0"/>
           </a:p>
@@ -4233,13 +7266,13 @@
       </p:sp>
       <p:sp>
         <p:nvSpPr>
-          <p:cNvPr id="14" name="Shape 12"/>
-          <p:cNvSpPr/>
-          <p:nvPr/>
-        </p:nvSpPr>
-        <p:spPr>
-          <a:xfrm>
-            <a:off x="6187288" y="1965960"/>
+          <p:cNvPr id="12" name="Shape 10"/>
+          <p:cNvSpPr/>
+          <p:nvPr/>
+        </p:nvSpPr>
+        <p:spPr>
+          <a:xfrm>
+            <a:off x="6187288" y="1371600"/>
             <a:ext cx="2627300" cy="1280160"/>
           </a:xfrm>
           <a:prstGeom prst="roundRect">
@@ -4260,13 +7293,13 @@
       </p:sp>
       <p:sp>
         <p:nvSpPr>
-          <p:cNvPr id="15" name="Text 13"/>
-          <p:cNvSpPr/>
-          <p:nvPr/>
-        </p:nvSpPr>
-        <p:spPr>
-          <a:xfrm>
-            <a:off x="6351880" y="2093976"/>
+          <p:cNvPr id="13" name="Text 11"/>
+          <p:cNvSpPr/>
+          <p:nvPr/>
+        </p:nvSpPr>
+        <p:spPr>
+          <a:xfrm>
+            <a:off x="6351880" y="1499616"/>
             <a:ext cx="2298116" cy="201168"/>
           </a:xfrm>
           <a:prstGeom prst="rect">
@@ -4291,7 +7324,7 @@
                 <a:ea typeface="Pretendard" pitchFamily="34" charset="-122"/>
                 <a:cs typeface="Pretendard" pitchFamily="34" charset="-120"/>
               </a:rPr>
-              <a:t>시세 할인율(갭)</a:t>
+              <a:t>데이터 등급</a:t>
             </a:r>
             <a:endParaRPr lang="en-US" sz="950" dirty="0"/>
           </a:p>
@@ -4299,13 +7332,13 @@
       </p:sp>
       <p:sp>
         <p:nvSpPr>
-          <p:cNvPr id="16" name="Text 14"/>
-          <p:cNvSpPr/>
-          <p:nvPr/>
-        </p:nvSpPr>
-        <p:spPr>
-          <a:xfrm>
-            <a:off x="6351880" y="2276856"/>
+          <p:cNvPr id="14" name="Text 12"/>
+          <p:cNvSpPr/>
+          <p:nvPr/>
+        </p:nvSpPr>
+        <p:spPr>
+          <a:xfrm>
+            <a:off x="6351880" y="1719072"/>
             <a:ext cx="2298116" cy="402336"/>
           </a:xfrm>
           <a:prstGeom prst="rect">
@@ -4328,11 +7361,11 @@
                 <a:solidFill>
                   <a:srgbClr val="10161F"/>
                 </a:solidFill>
-                <a:latin typeface="Pretendard" pitchFamily="34" charset="0"/>
-                <a:ea typeface="Pretendard" pitchFamily="34" charset="-122"/>
-                <a:cs typeface="Pretendard" pitchFamily="34" charset="-120"/>
-              </a:rPr>
-              <a:t>13% 저평가</a:t>
+                <a:latin typeface="Arial" pitchFamily="34" charset="0"/>
+                <a:ea typeface="Arial" pitchFamily="34" charset="-122"/>
+                <a:cs typeface="Arial" pitchFamily="34" charset="-120"/>
+              </a:rPr>
+              <a:t>B</a:t>
             </a:r>
             <a:endParaRPr lang="en-US" sz="2000" dirty="0"/>
           </a:p>
@@ -4340,13 +7373,13 @@
       </p:sp>
       <p:sp>
         <p:nvSpPr>
-          <p:cNvPr id="17" name="Shape 15"/>
-          <p:cNvSpPr/>
-          <p:nvPr/>
-        </p:nvSpPr>
-        <p:spPr>
-          <a:xfrm>
-            <a:off x="8997467" y="1965960"/>
+          <p:cNvPr id="15" name="Shape 13"/>
+          <p:cNvSpPr/>
+          <p:nvPr/>
+        </p:nvSpPr>
+        <p:spPr>
+          <a:xfrm>
+            <a:off x="8997467" y="1371600"/>
             <a:ext cx="2627300" cy="1280160"/>
           </a:xfrm>
           <a:prstGeom prst="roundRect">
@@ -4367,13 +7400,13 @@
       </p:sp>
       <p:sp>
         <p:nvSpPr>
-          <p:cNvPr id="18" name="Text 16"/>
-          <p:cNvSpPr/>
-          <p:nvPr/>
-        </p:nvSpPr>
-        <p:spPr>
-          <a:xfrm>
-            <a:off x="9162059" y="2093976"/>
+          <p:cNvPr id="16" name="Text 14"/>
+          <p:cNvSpPr/>
+          <p:nvPr/>
+        </p:nvSpPr>
+        <p:spPr>
+          <a:xfrm>
+            <a:off x="9162059" y="1499616"/>
             <a:ext cx="2298116" cy="201168"/>
           </a:xfrm>
           <a:prstGeom prst="rect">
@@ -4398,7 +7431,7 @@
                 <a:ea typeface="Pretendard" pitchFamily="34" charset="-122"/>
                 <a:cs typeface="Pretendard" pitchFamily="34" charset="-120"/>
               </a:rPr>
-              <a:t>목표 수익률(HPR)</a:t>
+              <a:t>소재지</a:t>
             </a:r>
             <a:endParaRPr lang="en-US" sz="950" dirty="0"/>
           </a:p>
@@ -4406,13 +7439,13 @@
       </p:sp>
       <p:sp>
         <p:nvSpPr>
-          <p:cNvPr id="19" name="Text 17"/>
-          <p:cNvSpPr/>
-          <p:nvPr/>
-        </p:nvSpPr>
-        <p:spPr>
-          <a:xfrm>
-            <a:off x="9162059" y="2276856"/>
+          <p:cNvPr id="17" name="Text 15"/>
+          <p:cNvSpPr/>
+          <p:nvPr/>
+        </p:nvSpPr>
+        <p:spPr>
+          <a:xfrm>
+            <a:off x="9162059" y="1719072"/>
             <a:ext cx="2298116" cy="402336"/>
           </a:xfrm>
           <a:prstGeom prst="rect">
@@ -4435,11 +7468,11 @@
                 <a:solidFill>
                   <a:srgbClr val="10161F"/>
                 </a:solidFill>
-                <a:latin typeface="Arial" pitchFamily="34" charset="0"/>
-                <a:ea typeface="Arial" pitchFamily="34" charset="-122"/>
-                <a:cs typeface="Arial" pitchFamily="34" charset="-120"/>
-              </a:rPr>
-              <a:t>20%</a:t>
+                <a:latin typeface="Pretendard" pitchFamily="34" charset="0"/>
+                <a:ea typeface="Pretendard" pitchFamily="34" charset="-122"/>
+                <a:cs typeface="Pretendard" pitchFamily="34" charset="-120"/>
+              </a:rPr>
+              <a:t>서초권역</a:t>
             </a:r>
             <a:endParaRPr lang="en-US" sz="2000" dirty="0"/>
           </a:p>
@@ -4447,13 +7480,13 @@
       </p:sp>
       <p:sp>
         <p:nvSpPr>
-          <p:cNvPr id="20" name="Text 18"/>
-          <p:cNvSpPr/>
-          <p:nvPr/>
-        </p:nvSpPr>
-        <p:spPr>
-          <a:xfrm>
-            <a:off x="566928" y="3502152"/>
+          <p:cNvPr id="18" name="Text 16"/>
+          <p:cNvSpPr/>
+          <p:nvPr/>
+        </p:nvSpPr>
+        <p:spPr>
+          <a:xfrm>
+            <a:off x="566928" y="3429000"/>
             <a:ext cx="11057839" cy="274320"/>
           </a:xfrm>
           <a:prstGeom prst="rect">
@@ -4486,13 +7519,13 @@
       </p:sp>
       <p:sp>
         <p:nvSpPr>
-          <p:cNvPr id="21" name="Shape 19"/>
-          <p:cNvSpPr/>
-          <p:nvPr/>
-        </p:nvSpPr>
-        <p:spPr>
-          <a:xfrm>
-            <a:off x="566928" y="3831336"/>
+          <p:cNvPr id="19" name="Shape 17"/>
+          <p:cNvSpPr/>
+          <p:nvPr/>
+        </p:nvSpPr>
+        <p:spPr>
+          <a:xfrm>
+            <a:off x="566928" y="3758184"/>
             <a:ext cx="11057839" cy="585216"/>
           </a:xfrm>
           <a:prstGeom prst="roundRect">
@@ -4513,13 +7546,13 @@
       </p:sp>
       <p:sp>
         <p:nvSpPr>
-          <p:cNvPr id="22" name="Shape 20"/>
-          <p:cNvSpPr/>
-          <p:nvPr/>
-        </p:nvSpPr>
-        <p:spPr>
-          <a:xfrm>
-            <a:off x="676656" y="3941064"/>
+          <p:cNvPr id="20" name="Shape 18"/>
+          <p:cNvSpPr/>
+          <p:nvPr/>
+        </p:nvSpPr>
+        <p:spPr>
+          <a:xfrm>
+            <a:off x="676656" y="3867912"/>
             <a:ext cx="411480" cy="365760"/>
           </a:xfrm>
           <a:prstGeom prst="roundRect">
@@ -4540,13 +7573,13 @@
       </p:sp>
       <p:sp>
         <p:nvSpPr>
-          <p:cNvPr id="23" name="Text 21"/>
-          <p:cNvSpPr/>
-          <p:nvPr/>
-        </p:nvSpPr>
-        <p:spPr>
-          <a:xfrm>
-            <a:off x="676656" y="3941064"/>
+          <p:cNvPr id="21" name="Text 19"/>
+          <p:cNvSpPr/>
+          <p:nvPr/>
+        </p:nvSpPr>
+        <p:spPr>
+          <a:xfrm>
+            <a:off x="676656" y="3867912"/>
             <a:ext cx="411480" cy="365760"/>
           </a:xfrm>
           <a:prstGeom prst="rect">
@@ -4579,13 +7612,13 @@
       </p:sp>
       <p:sp>
         <p:nvSpPr>
-          <p:cNvPr id="24" name="Text 22"/>
-          <p:cNvSpPr/>
-          <p:nvPr/>
-        </p:nvSpPr>
-        <p:spPr>
-          <a:xfrm>
-            <a:off x="1207008" y="3904488"/>
+          <p:cNvPr id="22" name="Text 20"/>
+          <p:cNvSpPr/>
+          <p:nvPr/>
+        </p:nvSpPr>
+        <p:spPr>
+          <a:xfrm>
+            <a:off x="1207008" y="3831336"/>
             <a:ext cx="10280599" cy="438912"/>
           </a:xfrm>
           <a:prstGeom prst="rect">
@@ -4618,13 +7651,13 @@
       </p:sp>
       <p:sp>
         <p:nvSpPr>
-          <p:cNvPr id="25" name="Shape 23"/>
-          <p:cNvSpPr/>
-          <p:nvPr/>
-        </p:nvSpPr>
-        <p:spPr>
-          <a:xfrm>
-            <a:off x="566928" y="4526280"/>
+          <p:cNvPr id="23" name="Shape 21"/>
+          <p:cNvSpPr/>
+          <p:nvPr/>
+        </p:nvSpPr>
+        <p:spPr>
+          <a:xfrm>
+            <a:off x="566928" y="4453128"/>
             <a:ext cx="11057839" cy="585216"/>
           </a:xfrm>
           <a:prstGeom prst="roundRect">
@@ -4645,13 +7678,13 @@
       </p:sp>
       <p:sp>
         <p:nvSpPr>
-          <p:cNvPr id="26" name="Shape 24"/>
-          <p:cNvSpPr/>
-          <p:nvPr/>
-        </p:nvSpPr>
-        <p:spPr>
-          <a:xfrm>
-            <a:off x="676656" y="4636008"/>
+          <p:cNvPr id="24" name="Shape 22"/>
+          <p:cNvSpPr/>
+          <p:nvPr/>
+        </p:nvSpPr>
+        <p:spPr>
+          <a:xfrm>
+            <a:off x="676656" y="4562856"/>
             <a:ext cx="411480" cy="365760"/>
           </a:xfrm>
           <a:prstGeom prst="roundRect">
@@ -4672,13 +7705,13 @@
       </p:sp>
       <p:sp>
         <p:nvSpPr>
-          <p:cNvPr id="27" name="Text 25"/>
-          <p:cNvSpPr/>
-          <p:nvPr/>
-        </p:nvSpPr>
-        <p:spPr>
-          <a:xfrm>
-            <a:off x="676656" y="4636008"/>
+          <p:cNvPr id="25" name="Text 23"/>
+          <p:cNvSpPr/>
+          <p:nvPr/>
+        </p:nvSpPr>
+        <p:spPr>
+          <a:xfrm>
+            <a:off x="676656" y="4562856"/>
             <a:ext cx="411480" cy="365760"/>
           </a:xfrm>
           <a:prstGeom prst="rect">
@@ -4711,13 +7744,13 @@
       </p:sp>
       <p:sp>
         <p:nvSpPr>
-          <p:cNvPr id="28" name="Text 26"/>
-          <p:cNvSpPr/>
-          <p:nvPr/>
-        </p:nvSpPr>
-        <p:spPr>
-          <a:xfrm>
-            <a:off x="1207008" y="4599432"/>
+          <p:cNvPr id="26" name="Text 24"/>
+          <p:cNvSpPr/>
+          <p:nvPr/>
+        </p:nvSpPr>
+        <p:spPr>
+          <a:xfrm>
+            <a:off x="1207008" y="4526280"/>
             <a:ext cx="10280599" cy="438912"/>
           </a:xfrm>
           <a:prstGeom prst="rect">
@@ -4750,13 +7783,13 @@
       </p:sp>
       <p:sp>
         <p:nvSpPr>
-          <p:cNvPr id="29" name="Shape 27"/>
-          <p:cNvSpPr/>
-          <p:nvPr/>
-        </p:nvSpPr>
-        <p:spPr>
-          <a:xfrm>
-            <a:off x="566928" y="5221224"/>
+          <p:cNvPr id="27" name="Shape 25"/>
+          <p:cNvSpPr/>
+          <p:nvPr/>
+        </p:nvSpPr>
+        <p:spPr>
+          <a:xfrm>
+            <a:off x="566928" y="5148072"/>
             <a:ext cx="11057839" cy="585216"/>
           </a:xfrm>
           <a:prstGeom prst="roundRect">
@@ -4777,13 +7810,13 @@
       </p:sp>
       <p:sp>
         <p:nvSpPr>
-          <p:cNvPr id="30" name="Shape 28"/>
-          <p:cNvSpPr/>
-          <p:nvPr/>
-        </p:nvSpPr>
-        <p:spPr>
-          <a:xfrm>
-            <a:off x="676656" y="5330952"/>
+          <p:cNvPr id="28" name="Shape 26"/>
+          <p:cNvSpPr/>
+          <p:nvPr/>
+        </p:nvSpPr>
+        <p:spPr>
+          <a:xfrm>
+            <a:off x="676656" y="5257800"/>
             <a:ext cx="411480" cy="365760"/>
           </a:xfrm>
           <a:prstGeom prst="roundRect">
@@ -4804,13 +7837,13 @@
       </p:sp>
       <p:sp>
         <p:nvSpPr>
-          <p:cNvPr id="31" name="Text 29"/>
-          <p:cNvSpPr/>
-          <p:nvPr/>
-        </p:nvSpPr>
-        <p:spPr>
-          <a:xfrm>
-            <a:off x="676656" y="5330952"/>
+          <p:cNvPr id="29" name="Text 27"/>
+          <p:cNvSpPr/>
+          <p:nvPr/>
+        </p:nvSpPr>
+        <p:spPr>
+          <a:xfrm>
+            <a:off x="676656" y="5257800"/>
             <a:ext cx="411480" cy="365760"/>
           </a:xfrm>
           <a:prstGeom prst="rect">
@@ -4843,13 +7876,13 @@
       </p:sp>
       <p:sp>
         <p:nvSpPr>
-          <p:cNvPr id="32" name="Text 30"/>
-          <p:cNvSpPr/>
-          <p:nvPr/>
-        </p:nvSpPr>
-        <p:spPr>
-          <a:xfrm>
-            <a:off x="1207008" y="5294376"/>
+          <p:cNvPr id="30" name="Text 28"/>
+          <p:cNvSpPr/>
+          <p:nvPr/>
+        </p:nvSpPr>
+        <p:spPr>
+          <a:xfrm>
+            <a:off x="1207008" y="5221224"/>
             <a:ext cx="10280599" cy="438912"/>
           </a:xfrm>
           <a:prstGeom prst="rect">
@@ -4882,7 +7915,7 @@
       </p:sp>
       <p:sp>
         <p:nvSpPr>
-          <p:cNvPr id="33" name="Text 31"/>
+          <p:cNvPr id="31" name="Text 29"/>
           <p:cNvSpPr/>
           <p:nvPr/>
         </p:nvSpPr>
@@ -4921,7 +7954,7 @@
       </p:sp>
       <p:sp>
         <p:nvSpPr>
-          <p:cNvPr id="34" name="Text 32"/>
+          <p:cNvPr id="32" name="Text 30"/>
           <p:cNvSpPr/>
           <p:nvPr/>
         </p:nvSpPr>
@@ -5127,117 +8160,9 @@
           </a:p>
         </p:txBody>
       </p:sp>
-      <p:pic>
-        <p:nvPicPr>
-          <p:cNvPr id="6" name="Image 0" descr="preencoded.png">    </p:cNvPr>
-          <p:cNvPicPr>
-            <a:picLocks noChangeAspect="1"/>
-          </p:cNvPicPr>
-          <p:nvPr/>
-        </p:nvPicPr>
-        <p:blipFill>
-          <a:blip r:embed="rId1"/>
-          <a:stretch>
-            <a:fillRect/>
-          </a:stretch>
-        </p:blipFill>
-        <p:spPr>
-          <a:xfrm>
-            <a:off x="566928" y="1481328"/>
-            <a:ext cx="5120640" cy="4114800"/>
-          </a:xfrm>
-          <a:prstGeom prst="rect">
-            <a:avLst/>
-          </a:prstGeom>
-        </p:spPr>
-      </p:pic>
-      <p:sp>
-        <p:nvSpPr>
-          <p:cNvPr id="7" name="Text 4"/>
-          <p:cNvSpPr/>
-          <p:nvPr/>
-        </p:nvSpPr>
-        <p:spPr>
-          <a:xfrm>
-            <a:off x="6053328" y="1481328"/>
-            <a:ext cx="2117147" cy="493776"/>
-          </a:xfrm>
-          <a:prstGeom prst="rect">
-            <a:avLst/>
-          </a:prstGeom>
-          <a:noFill/>
-          <a:ln/>
-        </p:spPr>
-        <p:txBody>
-          <a:bodyPr wrap="square" lIns="0" tIns="0" rIns="0" bIns="0" rtlCol="0" anchor="ctr"/>
-          <a:lstStyle/>
-          <a:p>
-            <a:pPr indent="0" marL="0">
-              <a:lnSpc>
-                <a:spcPct val="120000"/>
-              </a:lnSpc>
-              <a:buNone/>
-            </a:pPr>
-            <a:r>
-              <a:rPr lang="en-US" sz="1300" dirty="0">
-                <a:solidFill>
-                  <a:srgbClr val="718096"/>
-                </a:solidFill>
-                <a:latin typeface="Pretendard" pitchFamily="34" charset="0"/>
-                <a:ea typeface="Pretendard" pitchFamily="34" charset="-122"/>
-                <a:cs typeface="Pretendard" pitchFamily="34" charset="-120"/>
-              </a:rPr>
-              <a:t>교통 접근성</a:t>
-            </a:r>
-            <a:endParaRPr lang="en-US" sz="1300" dirty="0"/>
-          </a:p>
-        </p:txBody>
-      </p:sp>
-      <p:sp>
-        <p:nvSpPr>
-          <p:cNvPr id="8" name="Text 5"/>
-          <p:cNvSpPr/>
-          <p:nvPr/>
-        </p:nvSpPr>
-        <p:spPr>
-          <a:xfrm>
-            <a:off x="8170475" y="1481328"/>
-            <a:ext cx="3454292" cy="493776"/>
-          </a:xfrm>
-          <a:prstGeom prst="rect">
-            <a:avLst/>
-          </a:prstGeom>
-          <a:noFill/>
-          <a:ln/>
-        </p:spPr>
-        <p:txBody>
-          <a:bodyPr wrap="square" lIns="0" tIns="0" rIns="0" bIns="0" rtlCol="0" anchor="ctr"/>
-          <a:lstStyle/>
-          <a:p>
-            <a:pPr indent="0" marL="0">
-              <a:lnSpc>
-                <a:spcPct val="120000"/>
-              </a:lnSpc>
-              <a:buNone/>
-            </a:pPr>
-            <a:r>
-              <a:rPr lang="en-US" sz="1300" b="1" dirty="0">
-                <a:solidFill>
-                  <a:srgbClr val="10161F"/>
-                </a:solidFill>
-                <a:latin typeface="Pretendard" pitchFamily="34" charset="0"/>
-                <a:ea typeface="Pretendard" pitchFamily="34" charset="-122"/>
-                <a:cs typeface="Pretendard" pitchFamily="34" charset="-120"/>
-              </a:rPr>
-              <a:t>{"ok":true,"mocked":true,"extractedFields":{"area_signal":"역삼","asset_type":"오피스빌딩","price_band":"300억","size_signal":"3000평(약 9917.</a:t>
-            </a:r>
-            <a:endParaRPr lang="en-US" sz="1300" dirty="0"/>
-          </a:p>
-        </p:txBody>
-      </p:sp>
-      <p:sp>
-        <p:nvSpPr>
-          <p:cNvPr id="9" name="Text 6"/>
+      <p:sp>
+        <p:nvSpPr>
+          <p:cNvPr id="6" name="Text 4"/>
           <p:cNvSpPr/>
           <p:nvPr/>
         </p:nvSpPr>
@@ -5276,7 +8201,7 @@
       </p:sp>
       <p:sp>
         <p:nvSpPr>
-          <p:cNvPr id="10" name="Text 7"/>
+          <p:cNvPr id="7" name="Text 5"/>
           <p:cNvSpPr/>
           <p:nvPr/>
         </p:nvSpPr>
@@ -5310,45 +8235,6 @@
               <a:t>3</a:t>
             </a:r>
             <a:endParaRPr lang="en-US" sz="900" dirty="0"/>
-          </a:p>
-        </p:txBody>
-      </p:sp>
-      <p:sp>
-        <p:nvSpPr>
-          <p:cNvPr id="11" name="Text 8"/>
-          <p:cNvSpPr/>
-          <p:nvPr/>
-        </p:nvSpPr>
-        <p:spPr>
-          <a:xfrm>
-            <a:off x="566928" y="1481328"/>
-            <a:ext cx="11057839" cy="9692640"/>
-          </a:xfrm>
-          <a:prstGeom prst="rect">
-            <a:avLst/>
-          </a:prstGeom>
-          <a:noFill/>
-          <a:ln/>
-        </p:spPr>
-        <p:txBody>
-          <a:bodyPr wrap="square" lIns="0" tIns="0" rIns="0" bIns="0" rtlCol="0" anchor="t"/>
-          <a:lstStyle/>
-          <a:p>
-            <a:pPr indent="0" marL="0">
-              <a:buNone/>
-            </a:pPr>
-            <a:r>
-              <a:rPr lang="en-US" sz="1000" dirty="0">
-                <a:solidFill>
-                  <a:srgbClr val="10161F"/>
-                </a:solidFill>
-                <a:latin typeface="Pretendard" pitchFamily="34" charset="0"/>
-                <a:ea typeface="Pretendard" pitchFamily="34" charset="-122"/>
-                <a:cs typeface="Pretendard" pitchFamily="34" charset="-120"/>
-              </a:rPr>
-              <a:t>{"ok":true,"mocked":true,"extractedFields":{"area_signal":"역삼","asset_type":"오피스빌딩","price_band":"300억","size_signal":"3000평(약 9917.4㎡)"},"extractedFacts":{"region":"역삼","exactAddressCandidate":"역삼동 742-1","assetType":"오피스빌딩","priceText":"300억","sizeText":"3000평(약 9917.4㎡)","currentUse":"오피스","currentUseSignal":"근린생활시설","leaseSignal":"임대중","vacancySignal":"공실없음","tenantNames":["쿠팡","네이버"],"unitRentTexts":["301호: 1500만"],"sellerMotivationText":"자산 효율화","brokerNotes":["초역세권 매물"]},"detectedSensitiveFields":["exact_address","tenant_name"],"ambiguousFields":[],"warnings":[],"areaSignal":"역삼","assetType":"오피스빌딩","priceBand":"300억","sizeSignal":"3000평(약 9917.4㎡)","dealType":"매각","buildingName":"역삼 센트럴타워","exactAddress":"역삼동 742-1","totalFloorArea":9917.3,"buildYear":2015,"currentUseSignal":"근린생활시설","vacancySignal":"공실 없음","fitSummary":"초역세권 근생 빌딩으로 시행/사옥 매입에 최적화","cautionSummary":"주요 임차인 만기 조율 필요","hiddenFields":["exact_address","seller_motivation"],"confidence":{"areaSignal":"confirmed","assetType":"confirmed","priceBand":"ai_hypothesis","fitSummary":"ai_hypothesis"},"missingData":["sizeSignal"],"boundaryNote":"본 자료는 실거래 통계 기반 참고치입니다.","buyerType":"법인 사옥형","budgetRange":{"min":50,"max":80,"display":"50억~80억"},"preferredRegions":["강남","성수"],"assetTypes":["꼬마빌딩","사옥용"],"purchasePurpose":"사옥용 매입","mustHave":["초역세권","주차"],"niceToHave":["테라스","루프탑"],"riskTolerance":"medium","financingNote":"자본금 50% 준비","missingQuestions":["구체적인 입주 시기가 언제인가요?","선호하는 수익률이 있나요?"],"privacyNotes":["연락처 비공개"],"fitReasons":["매수자 예산(50-80억)에 부합하는 매물입니다.","요청하신 성수/강남 권역에 해당합니다."],"cautionReasons":["요청한 용도와 달리 명도 협의가 다소 필요합니다."],"recommendedNextAction":"현장 답사 제안","kakaoMessage":"안녕하세요! 요청하신 조건에 부합하는 추천 매물이 있어 안내해 드립니다. 확인해보시고 피드백 부탁드립니다.","title":"강남 역삼역 초역세권 오피스 사옥용 빌딩 매각","shortSummary":"역삼역 도보 5분 거리의 준신축급 대형 오피스빌딩입니다.","dealPoints":["초역세권","사옥 최적"],"cautionPoints":["명도 조율 필요"],"hiddenInfoNotice":["보증금 및 지번은 인가 후 확인 가능"],"gateMessage":"G1 등급 등록이 필요합니다.","kakaoText":"강남 역삼역 오피스 빌딩 매각 안내입니다.","exactUnitCandidate":"101호","floor":"1층","areaSqmText":"150㎡","spaceType":"office","depositText":"5000만","monthlyRentText":"400만","maintenanceFeeText":"50만","availableFromText":"즉시입주","leaseTermMonthsText":"24","incentivesText":"렌트프리 2개월","restrictions":[],"landlordIdentity":"김성수","currentTenant":"스타트업","vacancyReason":"이전 확장","rentNegotiation":"협의 가능","region":"성수동","areaSqm":150,"deposit":5000,"monthlyRent":400,"maintenanceFee":50,"availableFrom":"즉시입주","leaseTermMonths":24,"incentives":{"rentFreeMonths":2,"interiorSupport":"일부 인테리어 지원","freeRentDetail":"렌트프리 2개월 지원"},"shortSummaryLease":"성수역 도보 5분 거리 1층 리테일 상가 매물입니다."}</a:t>
-            </a:r>
-            <a:endParaRPr lang="en-US" sz="1000" dirty="0"/>
           </a:p>
         </p:txBody>
       </p:sp>
@@ -5437,7 +8323,7 @@
                 <a:ea typeface="Arial" pitchFamily="34" charset="-122"/>
                 <a:cs typeface="Arial" pitchFamily="34" charset="-120"/>
               </a:rPr>
-              <a:t>04</a:t>
+              <a:t>03</a:t>
             </a:r>
             <a:endParaRPr lang="en-US" sz="1300" dirty="0"/>
           </a:p>
@@ -5476,7 +8362,7 @@
                 <a:ea typeface="Arial" pitchFamily="34" charset="-122"/>
                 <a:cs typeface="Arial" pitchFamily="34" charset="-120"/>
               </a:rPr>
-              <a:t>Building</a:t>
+              <a:t>Land</a:t>
             </a:r>
             <a:endParaRPr lang="en-US" sz="950" dirty="0"/>
           </a:p>
@@ -5515,7 +8401,7 @@
                 <a:ea typeface="Pretendard" pitchFamily="34" charset="-122"/>
                 <a:cs typeface="Pretendard" pitchFamily="34" charset="-120"/>
               </a:rPr>
-              <a:t>이 건물, 어떤 자산인가</a:t>
+              <a:t>토지 현황</a:t>
             </a:r>
             <a:endParaRPr lang="en-US" sz="2300" dirty="0"/>
           </a:p>
@@ -5554,7 +8440,7 @@
                 <a:ea typeface="Pretendard" pitchFamily="34" charset="-122"/>
                 <a:cs typeface="Pretendard" pitchFamily="34" charset="-120"/>
               </a:rPr>
-              <a:t>건축물 개요 및 물리 스펙</a:t>
+              <a:t>토지이용계획 · 개별공시지가</a:t>
             </a:r>
             <a:endParaRPr lang="en-US" sz="1100" dirty="0"/>
           </a:p>
@@ -5569,7 +8455,7 @@
         <p:spPr>
           <a:xfrm>
             <a:off x="566928" y="1645920"/>
-            <a:ext cx="2606040" cy="402336"/>
+            <a:ext cx="2606040" cy="438912"/>
           </a:xfrm>
           <a:prstGeom prst="rect">
             <a:avLst/>
@@ -5588,7 +8474,7 @@
               <a:buNone/>
             </a:pPr>
             <a:r>
-              <a:rPr lang="en-US" sz="1400" dirty="0">
+              <a:rPr lang="en-US" sz="1350" dirty="0">
                 <a:solidFill>
                   <a:srgbClr val="718096"/>
                 </a:solidFill>
@@ -5596,9 +8482,9 @@
                 <a:ea typeface="Pretendard" pitchFamily="34" charset="-122"/>
                 <a:cs typeface="Pretendard" pitchFamily="34" charset="-120"/>
               </a:rPr>
-              <a:t>주요 용도</a:t>
-            </a:r>
-            <a:endParaRPr lang="en-US" sz="1400" dirty="0"/>
+              <a:t>용도지역</a:t>
+            </a:r>
+            <a:endParaRPr lang="en-US" sz="1350" dirty="0"/>
           </a:p>
         </p:txBody>
       </p:sp>
@@ -5611,7 +8497,7 @@
         <p:spPr>
           <a:xfrm>
             <a:off x="3172968" y="1645920"/>
-            <a:ext cx="4251960" cy="402336"/>
+            <a:ext cx="4251960" cy="438912"/>
           </a:xfrm>
           <a:prstGeom prst="rect">
             <a:avLst/>
@@ -5630,7 +8516,7 @@
               <a:buNone/>
             </a:pPr>
             <a:r>
-              <a:rPr lang="en-US" sz="1400" b="1" dirty="0">
+              <a:rPr lang="en-US" sz="1350" b="1" dirty="0">
                 <a:solidFill>
                   <a:srgbClr val="10161F"/>
                 </a:solidFill>
@@ -5638,443 +8524,15 @@
                 <a:ea typeface="Pretendard" pitchFamily="34" charset="-122"/>
                 <a:cs typeface="Pretendard" pitchFamily="34" charset="-120"/>
               </a:rPr>
-              <a:t>확인 필요</a:t>
-            </a:r>
-            <a:endParaRPr lang="en-US" sz="1400" dirty="0"/>
+              <a:t>일반상업지역</a:t>
+            </a:r>
+            <a:endParaRPr lang="en-US" sz="1350" dirty="0"/>
           </a:p>
         </p:txBody>
       </p:sp>
       <p:sp>
         <p:nvSpPr>
           <p:cNvPr id="9" name="Shape 7"/>
-          <p:cNvSpPr/>
-          <p:nvPr/>
-        </p:nvSpPr>
-        <p:spPr>
-          <a:xfrm>
-            <a:off x="566928" y="2048256"/>
-            <a:ext cx="6858000" cy="0"/>
-          </a:xfrm>
-          <a:prstGeom prst="line">
-            <a:avLst/>
-          </a:prstGeom>
-          <a:noFill/>
-          <a:ln w="3810">
-            <a:solidFill>
-              <a:srgbClr val="CBD5E0"/>
-            </a:solidFill>
-            <a:prstDash val="solid"/>
-          </a:ln>
-        </p:spPr>
-      </p:sp>
-      <p:sp>
-        <p:nvSpPr>
-          <p:cNvPr id="10" name="Text 8"/>
-          <p:cNvSpPr/>
-          <p:nvPr/>
-        </p:nvSpPr>
-        <p:spPr>
-          <a:xfrm>
-            <a:off x="566928" y="2048256"/>
-            <a:ext cx="2606040" cy="402336"/>
-          </a:xfrm>
-          <a:prstGeom prst="rect">
-            <a:avLst/>
-          </a:prstGeom>
-          <a:noFill/>
-          <a:ln/>
-        </p:spPr>
-        <p:txBody>
-          <a:bodyPr wrap="square" lIns="0" tIns="0" rIns="0" bIns="0" rtlCol="0" anchor="ctr"/>
-          <a:lstStyle/>
-          <a:p>
-            <a:pPr indent="0" marL="0">
-              <a:lnSpc>
-                <a:spcPct val="120000"/>
-              </a:lnSpc>
-              <a:buNone/>
-            </a:pPr>
-            <a:r>
-              <a:rPr lang="en-US" sz="1400" dirty="0">
-                <a:solidFill>
-                  <a:srgbClr val="718096"/>
-                </a:solidFill>
-                <a:latin typeface="Pretendard" pitchFamily="34" charset="0"/>
-                <a:ea typeface="Pretendard" pitchFamily="34" charset="-122"/>
-                <a:cs typeface="Pretendard" pitchFamily="34" charset="-120"/>
-              </a:rPr>
-              <a:t>연면적</a:t>
-            </a:r>
-            <a:endParaRPr lang="en-US" sz="1400" dirty="0"/>
-          </a:p>
-        </p:txBody>
-      </p:sp>
-      <p:sp>
-        <p:nvSpPr>
-          <p:cNvPr id="11" name="Text 9"/>
-          <p:cNvSpPr/>
-          <p:nvPr/>
-        </p:nvSpPr>
-        <p:spPr>
-          <a:xfrm>
-            <a:off x="3172968" y="2048256"/>
-            <a:ext cx="4251960" cy="402336"/>
-          </a:xfrm>
-          <a:prstGeom prst="rect">
-            <a:avLst/>
-          </a:prstGeom>
-          <a:noFill/>
-          <a:ln/>
-        </p:spPr>
-        <p:txBody>
-          <a:bodyPr wrap="square" lIns="0" tIns="0" rIns="0" bIns="0" rtlCol="0" anchor="ctr"/>
-          <a:lstStyle/>
-          <a:p>
-            <a:pPr indent="0" marL="0">
-              <a:lnSpc>
-                <a:spcPct val="120000"/>
-              </a:lnSpc>
-              <a:buNone/>
-            </a:pPr>
-            <a:r>
-              <a:rPr lang="en-US" sz="1400" b="1" dirty="0">
-                <a:solidFill>
-                  <a:srgbClr val="10161F"/>
-                </a:solidFill>
-                <a:latin typeface="Pretendard" pitchFamily="34" charset="0"/>
-                <a:ea typeface="Pretendard" pitchFamily="34" charset="-122"/>
-                <a:cs typeface="Pretendard" pitchFamily="34" charset="-120"/>
-              </a:rPr>
-              <a:t>5,000㎡ (약 1513평(약 5001.7㎡))</a:t>
-            </a:r>
-            <a:endParaRPr lang="en-US" sz="1400" dirty="0"/>
-          </a:p>
-        </p:txBody>
-      </p:sp>
-      <p:sp>
-        <p:nvSpPr>
-          <p:cNvPr id="12" name="Shape 10"/>
-          <p:cNvSpPr/>
-          <p:nvPr/>
-        </p:nvSpPr>
-        <p:spPr>
-          <a:xfrm>
-            <a:off x="566928" y="2450592"/>
-            <a:ext cx="6858000" cy="0"/>
-          </a:xfrm>
-          <a:prstGeom prst="line">
-            <a:avLst/>
-          </a:prstGeom>
-          <a:noFill/>
-          <a:ln w="3810">
-            <a:solidFill>
-              <a:srgbClr val="CBD5E0"/>
-            </a:solidFill>
-            <a:prstDash val="solid"/>
-          </a:ln>
-        </p:spPr>
-      </p:sp>
-      <p:sp>
-        <p:nvSpPr>
-          <p:cNvPr id="13" name="Text 11"/>
-          <p:cNvSpPr/>
-          <p:nvPr/>
-        </p:nvSpPr>
-        <p:spPr>
-          <a:xfrm>
-            <a:off x="566928" y="2450592"/>
-            <a:ext cx="2606040" cy="402336"/>
-          </a:xfrm>
-          <a:prstGeom prst="rect">
-            <a:avLst/>
-          </a:prstGeom>
-          <a:noFill/>
-          <a:ln/>
-        </p:spPr>
-        <p:txBody>
-          <a:bodyPr wrap="square" lIns="0" tIns="0" rIns="0" bIns="0" rtlCol="0" anchor="ctr"/>
-          <a:lstStyle/>
-          <a:p>
-            <a:pPr indent="0" marL="0">
-              <a:lnSpc>
-                <a:spcPct val="120000"/>
-              </a:lnSpc>
-              <a:buNone/>
-            </a:pPr>
-            <a:r>
-              <a:rPr lang="en-US" sz="1400" dirty="0">
-                <a:solidFill>
-                  <a:srgbClr val="718096"/>
-                </a:solidFill>
-                <a:latin typeface="Pretendard" pitchFamily="34" charset="0"/>
-                <a:ea typeface="Pretendard" pitchFamily="34" charset="-122"/>
-                <a:cs typeface="Pretendard" pitchFamily="34" charset="-120"/>
-              </a:rPr>
-              <a:t>대지면적</a:t>
-            </a:r>
-            <a:endParaRPr lang="en-US" sz="1400" dirty="0"/>
-          </a:p>
-        </p:txBody>
-      </p:sp>
-      <p:sp>
-        <p:nvSpPr>
-          <p:cNvPr id="14" name="Text 12"/>
-          <p:cNvSpPr/>
-          <p:nvPr/>
-        </p:nvSpPr>
-        <p:spPr>
-          <a:xfrm>
-            <a:off x="3172968" y="2450592"/>
-            <a:ext cx="4251960" cy="402336"/>
-          </a:xfrm>
-          <a:prstGeom prst="rect">
-            <a:avLst/>
-          </a:prstGeom>
-          <a:noFill/>
-          <a:ln/>
-        </p:spPr>
-        <p:txBody>
-          <a:bodyPr wrap="square" lIns="0" tIns="0" rIns="0" bIns="0" rtlCol="0" anchor="ctr"/>
-          <a:lstStyle/>
-          <a:p>
-            <a:pPr indent="0" marL="0">
-              <a:lnSpc>
-                <a:spcPct val="120000"/>
-              </a:lnSpc>
-              <a:buNone/>
-            </a:pPr>
-            <a:r>
-              <a:rPr lang="en-US" sz="1400" b="1" dirty="0">
-                <a:solidFill>
-                  <a:srgbClr val="10161F"/>
-                </a:solidFill>
-                <a:latin typeface="Pretendard" pitchFamily="34" charset="0"/>
-                <a:ea typeface="Pretendard" pitchFamily="34" charset="-122"/>
-                <a:cs typeface="Pretendard" pitchFamily="34" charset="-120"/>
-              </a:rPr>
-              <a:t>1,000㎡ (약 303평(약 1001.7㎡))</a:t>
-            </a:r>
-            <a:endParaRPr lang="en-US" sz="1400" dirty="0"/>
-          </a:p>
-        </p:txBody>
-      </p:sp>
-      <p:sp>
-        <p:nvSpPr>
-          <p:cNvPr id="15" name="Shape 13"/>
-          <p:cNvSpPr/>
-          <p:nvPr/>
-        </p:nvSpPr>
-        <p:spPr>
-          <a:xfrm>
-            <a:off x="566928" y="2852928"/>
-            <a:ext cx="6858000" cy="0"/>
-          </a:xfrm>
-          <a:prstGeom prst="line">
-            <a:avLst/>
-          </a:prstGeom>
-          <a:noFill/>
-          <a:ln w="3810">
-            <a:solidFill>
-              <a:srgbClr val="CBD5E0"/>
-            </a:solidFill>
-            <a:prstDash val="solid"/>
-          </a:ln>
-        </p:spPr>
-      </p:sp>
-      <p:sp>
-        <p:nvSpPr>
-          <p:cNvPr id="16" name="Text 14"/>
-          <p:cNvSpPr/>
-          <p:nvPr/>
-        </p:nvSpPr>
-        <p:spPr>
-          <a:xfrm>
-            <a:off x="566928" y="2852928"/>
-            <a:ext cx="2606040" cy="402336"/>
-          </a:xfrm>
-          <a:prstGeom prst="rect">
-            <a:avLst/>
-          </a:prstGeom>
-          <a:noFill/>
-          <a:ln/>
-        </p:spPr>
-        <p:txBody>
-          <a:bodyPr wrap="square" lIns="0" tIns="0" rIns="0" bIns="0" rtlCol="0" anchor="ctr"/>
-          <a:lstStyle/>
-          <a:p>
-            <a:pPr indent="0" marL="0">
-              <a:lnSpc>
-                <a:spcPct val="120000"/>
-              </a:lnSpc>
-              <a:buNone/>
-            </a:pPr>
-            <a:r>
-              <a:rPr lang="en-US" sz="1400" dirty="0">
-                <a:solidFill>
-                  <a:srgbClr val="718096"/>
-                </a:solidFill>
-                <a:latin typeface="Pretendard" pitchFamily="34" charset="0"/>
-                <a:ea typeface="Pretendard" pitchFamily="34" charset="-122"/>
-                <a:cs typeface="Pretendard" pitchFamily="34" charset="-120"/>
-              </a:rPr>
-              <a:t>용도지역</a:t>
-            </a:r>
-            <a:endParaRPr lang="en-US" sz="1400" dirty="0"/>
-          </a:p>
-        </p:txBody>
-      </p:sp>
-      <p:sp>
-        <p:nvSpPr>
-          <p:cNvPr id="17" name="Text 15"/>
-          <p:cNvSpPr/>
-          <p:nvPr/>
-        </p:nvSpPr>
-        <p:spPr>
-          <a:xfrm>
-            <a:off x="3172968" y="2852928"/>
-            <a:ext cx="4251960" cy="402336"/>
-          </a:xfrm>
-          <a:prstGeom prst="rect">
-            <a:avLst/>
-          </a:prstGeom>
-          <a:noFill/>
-          <a:ln/>
-        </p:spPr>
-        <p:txBody>
-          <a:bodyPr wrap="square" lIns="0" tIns="0" rIns="0" bIns="0" rtlCol="0" anchor="ctr"/>
-          <a:lstStyle/>
-          <a:p>
-            <a:pPr indent="0" marL="0">
-              <a:lnSpc>
-                <a:spcPct val="120000"/>
-              </a:lnSpc>
-              <a:buNone/>
-            </a:pPr>
-            <a:r>
-              <a:rPr lang="en-US" sz="1400" b="1" dirty="0">
-                <a:solidFill>
-                  <a:srgbClr val="10161F"/>
-                </a:solidFill>
-                <a:latin typeface="Pretendard" pitchFamily="34" charset="0"/>
-                <a:ea typeface="Pretendard" pitchFamily="34" charset="-122"/>
-                <a:cs typeface="Pretendard" pitchFamily="34" charset="-120"/>
-              </a:rPr>
-              <a:t>일반상업지역</a:t>
-            </a:r>
-            <a:endParaRPr lang="en-US" sz="1400" dirty="0"/>
-          </a:p>
-        </p:txBody>
-      </p:sp>
-      <p:sp>
-        <p:nvSpPr>
-          <p:cNvPr id="18" name="Shape 16"/>
-          <p:cNvSpPr/>
-          <p:nvPr/>
-        </p:nvSpPr>
-        <p:spPr>
-          <a:xfrm>
-            <a:off x="566928" y="3255264"/>
-            <a:ext cx="6858000" cy="0"/>
-          </a:xfrm>
-          <a:prstGeom prst="line">
-            <a:avLst/>
-          </a:prstGeom>
-          <a:noFill/>
-          <a:ln w="3810">
-            <a:solidFill>
-              <a:srgbClr val="CBD5E0"/>
-            </a:solidFill>
-            <a:prstDash val="solid"/>
-          </a:ln>
-        </p:spPr>
-      </p:sp>
-      <p:sp>
-        <p:nvSpPr>
-          <p:cNvPr id="19" name="Text 17"/>
-          <p:cNvSpPr/>
-          <p:nvPr/>
-        </p:nvSpPr>
-        <p:spPr>
-          <a:xfrm>
-            <a:off x="566928" y="3255264"/>
-            <a:ext cx="2606040" cy="402336"/>
-          </a:xfrm>
-          <a:prstGeom prst="rect">
-            <a:avLst/>
-          </a:prstGeom>
-          <a:noFill/>
-          <a:ln/>
-        </p:spPr>
-        <p:txBody>
-          <a:bodyPr wrap="square" lIns="0" tIns="0" rIns="0" bIns="0" rtlCol="0" anchor="ctr"/>
-          <a:lstStyle/>
-          <a:p>
-            <a:pPr indent="0" marL="0">
-              <a:lnSpc>
-                <a:spcPct val="120000"/>
-              </a:lnSpc>
-              <a:buNone/>
-            </a:pPr>
-            <a:r>
-              <a:rPr lang="en-US" sz="1400" dirty="0">
-                <a:solidFill>
-                  <a:srgbClr val="718096"/>
-                </a:solidFill>
-                <a:latin typeface="Pretendard" pitchFamily="34" charset="0"/>
-                <a:ea typeface="Pretendard" pitchFamily="34" charset="-122"/>
-                <a:cs typeface="Pretendard" pitchFamily="34" charset="-120"/>
-              </a:rPr>
-              <a:t>매매 희망가</a:t>
-            </a:r>
-            <a:endParaRPr lang="en-US" sz="1400" dirty="0"/>
-          </a:p>
-        </p:txBody>
-      </p:sp>
-      <p:sp>
-        <p:nvSpPr>
-          <p:cNvPr id="20" name="Text 18"/>
-          <p:cNvSpPr/>
-          <p:nvPr/>
-        </p:nvSpPr>
-        <p:spPr>
-          <a:xfrm>
-            <a:off x="3172968" y="3255264"/>
-            <a:ext cx="4251960" cy="402336"/>
-          </a:xfrm>
-          <a:prstGeom prst="rect">
-            <a:avLst/>
-          </a:prstGeom>
-          <a:noFill/>
-          <a:ln/>
-        </p:spPr>
-        <p:txBody>
-          <a:bodyPr wrap="square" lIns="0" tIns="0" rIns="0" bIns="0" rtlCol="0" anchor="ctr"/>
-          <a:lstStyle/>
-          <a:p>
-            <a:pPr indent="0" marL="0">
-              <a:lnSpc>
-                <a:spcPct val="120000"/>
-              </a:lnSpc>
-              <a:buNone/>
-            </a:pPr>
-            <a:r>
-              <a:rPr lang="en-US" sz="1400" b="1" dirty="0">
-                <a:solidFill>
-                  <a:srgbClr val="10161F"/>
-                </a:solidFill>
-                <a:latin typeface="Pretendard" pitchFamily="34" charset="0"/>
-                <a:ea typeface="Pretendard" pitchFamily="34" charset="-122"/>
-                <a:cs typeface="Pretendard" pitchFamily="34" charset="-120"/>
-              </a:rPr>
-              <a:t>115억</a:t>
-            </a:r>
-            <a:endParaRPr lang="en-US" sz="1400" dirty="0"/>
-          </a:p>
-        </p:txBody>
-      </p:sp>
-      <p:sp>
-        <p:nvSpPr>
-          <p:cNvPr id="21" name="Shape 19"/>
           <p:cNvSpPr/>
           <p:nvPr/>
         </p:nvSpPr>
@@ -6097,7 +8555,7 @@
       </p:sp>
       <p:sp>
         <p:nvSpPr>
-          <p:cNvPr id="22" name="Shape 20"/>
+          <p:cNvPr id="10" name="Shape 8"/>
           <p:cNvSpPr/>
           <p:nvPr/>
         </p:nvSpPr>
@@ -6119,7 +8577,7 @@
       </p:sp>
       <p:sp>
         <p:nvSpPr>
-          <p:cNvPr id="23" name="Shape 21"/>
+          <p:cNvPr id="11" name="Shape 9"/>
           <p:cNvSpPr/>
           <p:nvPr/>
         </p:nvSpPr>
@@ -6139,7 +8597,7 @@
       </p:sp>
       <p:sp>
         <p:nvSpPr>
-          <p:cNvPr id="24" name="Text 22"/>
+          <p:cNvPr id="12" name="Text 10"/>
           <p:cNvSpPr/>
           <p:nvPr/>
         </p:nvSpPr>
@@ -6170,7 +8628,7 @@
                 <a:ea typeface="Pretendard" pitchFamily="34" charset="-122"/>
                 <a:cs typeface="Pretendard" pitchFamily="34" charset="-120"/>
               </a:rPr>
-              <a:t>토지 및 건물 분석 포인트</a:t>
+              <a:t>입지 및 권리관계 실사 포인트</a:t>
             </a:r>
             <a:endParaRPr lang="en-US" sz="1050" dirty="0"/>
           </a:p>
@@ -6178,7 +8636,7 @@
       </p:sp>
       <p:sp>
         <p:nvSpPr>
-          <p:cNvPr id="25" name="Text 23"/>
+          <p:cNvPr id="13" name="Text 11"/>
           <p:cNvSpPr/>
           <p:nvPr/>
         </p:nvSpPr>
@@ -6213,7 +8671,7 @@
                 <a:ea typeface="Pretendard" pitchFamily="34" charset="-122"/>
                 <a:cs typeface="Pretendard" pitchFamily="34" charset="-120"/>
               </a:rPr>
-              <a:t>물건 접면 도로 및 교통 여건은 현장 확인 사항입니다</a:t>
+              <a:t>물건 접면 도로 폭 및 진출입 여건은 현장 실사 확인 사항입니다</a:t>
             </a:r>
             <a:endParaRPr lang="en-US" sz="930" dirty="0"/>
           </a:p>
@@ -6234,7 +8692,7 @@
                 <a:ea typeface="Pretendard" pitchFamily="34" charset="-122"/>
                 <a:cs typeface="Pretendard" pitchFamily="34" charset="-120"/>
               </a:rPr>
-              <a:t>상세 건물 제원은 실사 자료를 참조하시기 바랍니다</a:t>
+              <a:t>등기부등본상 권리관계 및 제한물권 설정 여부를 확인하였습니다</a:t>
             </a:r>
             <a:endParaRPr lang="en-US" sz="930" dirty="0"/>
           </a:p>
@@ -6255,7 +8713,7 @@
                 <a:ea typeface="Pretendard" pitchFamily="34" charset="-122"/>
                 <a:cs typeface="Pretendard" pitchFamily="34" charset="-120"/>
               </a:rPr>
-              <a:t>건물 현황 및 규모는 첨부 대장을 기준으로 합니다</a:t>
+              <a:t>지구단위계획 및 토지이용계획상 허용 용도를 검토하였습니다</a:t>
             </a:r>
             <a:endParaRPr lang="en-US" sz="930" dirty="0"/>
           </a:p>
@@ -6263,7 +8721,7 @@
       </p:sp>
       <p:sp>
         <p:nvSpPr>
-          <p:cNvPr id="26" name="Shape 24"/>
+          <p:cNvPr id="14" name="Shape 12"/>
           <p:cNvSpPr/>
           <p:nvPr/>
         </p:nvSpPr>
@@ -6285,7 +8743,7 @@
       </p:sp>
       <p:sp>
         <p:nvSpPr>
-          <p:cNvPr id="27" name="Shape 25"/>
+          <p:cNvPr id="15" name="Shape 13"/>
           <p:cNvSpPr/>
           <p:nvPr/>
         </p:nvSpPr>
@@ -6305,7 +8763,7 @@
       </p:sp>
       <p:sp>
         <p:nvSpPr>
-          <p:cNvPr id="28" name="Text 26"/>
+          <p:cNvPr id="16" name="Text 14"/>
           <p:cNvSpPr/>
           <p:nvPr/>
         </p:nvSpPr>
@@ -6336,7 +8794,7 @@
                 <a:ea typeface="Pretendard" pitchFamily="34" charset="-122"/>
                 <a:cs typeface="Pretendard" pitchFamily="34" charset="-120"/>
               </a:rPr>
-              <a:t>물건 실사 및 관리 상태</a:t>
+              <a:t>임대차 및 운용 관리 상태</a:t>
             </a:r>
             <a:endParaRPr lang="en-US" sz="1050" dirty="0"/>
           </a:p>
@@ -6344,7 +8802,7 @@
       </p:sp>
       <p:sp>
         <p:nvSpPr>
-          <p:cNvPr id="29" name="Text 27"/>
+          <p:cNvPr id="17" name="Text 15"/>
           <p:cNvSpPr/>
           <p:nvPr/>
         </p:nvSpPr>
@@ -6379,7 +8837,7 @@
                 <a:ea typeface="Pretendard" pitchFamily="34" charset="-122"/>
                 <a:cs typeface="Pretendard" pitchFamily="34" charset="-120"/>
               </a:rPr>
-              <a:t>건물 상태 및 설비 현황은 실사 보고서를 참조하십시오</a:t>
+              <a:t>주요 임차인별 계약 만기 분산 및 렌트롤 실사가 필요합니다</a:t>
             </a:r>
             <a:endParaRPr lang="en-US" sz="930" dirty="0"/>
           </a:p>
@@ -6400,7 +8858,7 @@
                 <a:ea typeface="Pretendard" pitchFamily="34" charset="-122"/>
                 <a:cs typeface="Pretendard" pitchFamily="34" charset="-120"/>
               </a:rPr>
-              <a:t>자금 조달 및 대출 조건은 금융 자문 후 확정됩니다</a:t>
+              <a:t>관리비 정산 내역 및 수선유지비 집행 이력을 점검하였습니다</a:t>
             </a:r>
             <a:endParaRPr lang="en-US" sz="930" dirty="0"/>
           </a:p>
@@ -6421,7 +8879,7 @@
                 <a:ea typeface="Pretendard" pitchFamily="34" charset="-122"/>
                 <a:cs typeface="Pretendard" pitchFamily="34" charset="-120"/>
               </a:rPr>
-              <a:t>상세 실사 단계에서 구체적인 계약 조건 및 세무 검토가 진행됩니다</a:t>
+              <a:t>취득세 감면 및 대출 조달 구조는 금융·세무 자문 후 확정됩니다</a:t>
             </a:r>
             <a:endParaRPr lang="en-US" sz="930" dirty="0"/>
           </a:p>
@@ -6429,7 +8887,7 @@
       </p:sp>
       <p:sp>
         <p:nvSpPr>
-          <p:cNvPr id="30" name="Text 28"/>
+          <p:cNvPr id="18" name="Text 16"/>
           <p:cNvSpPr/>
           <p:nvPr/>
         </p:nvSpPr>
@@ -6468,7 +8926,7 @@
       </p:sp>
       <p:sp>
         <p:nvSpPr>
-          <p:cNvPr id="31" name="Text 29"/>
+          <p:cNvPr id="19" name="Text 17"/>
           <p:cNvSpPr/>
           <p:nvPr/>
         </p:nvSpPr>
@@ -6499,7 +8957,7 @@
                 <a:ea typeface="Arial" pitchFamily="34" charset="-122"/>
                 <a:cs typeface="Arial" pitchFamily="34" charset="-120"/>
               </a:rPr>
-              <a:t>4</a:t>
+              <a:t>3</a:t>
             </a:r>
             <a:endParaRPr lang="en-US" sz="900" dirty="0"/>
           </a:p>
@@ -6590,7 +9048,7 @@
                 <a:ea typeface="Arial" pitchFamily="34" charset="-122"/>
                 <a:cs typeface="Arial" pitchFamily="34" charset="-120"/>
               </a:rPr>
-              <a:t>05</a:t>
+              <a:t>04</a:t>
             </a:r>
             <a:endParaRPr lang="en-US" sz="1300" dirty="0"/>
           </a:p>
@@ -6629,7 +9087,7 @@
                 <a:ea typeface="Arial" pitchFamily="34" charset="-122"/>
                 <a:cs typeface="Arial" pitchFamily="34" charset="-120"/>
               </a:rPr>
-              <a:t>Market Position</a:t>
+              <a:t>Comps</a:t>
             </a:r>
             <a:endParaRPr lang="en-US" sz="950" dirty="0"/>
           </a:p>
@@ -6668,7 +9126,7 @@
                 <a:ea typeface="Pretendard" pitchFamily="34" charset="-122"/>
                 <a:cs typeface="Pretendard" pitchFamily="34" charset="-120"/>
               </a:rPr>
-              <a:t>시장 내 자산 위치와 가격 경쟁력</a:t>
+              <a:t>유사 거래 사례 및 비교 분석</a:t>
             </a:r>
             <a:endParaRPr lang="en-US" sz="2300" dirty="0"/>
           </a:p>
@@ -6682,47 +9140,8 @@
         </p:nvSpPr>
         <p:spPr>
           <a:xfrm>
-            <a:off x="566928" y="1371600"/>
-            <a:ext cx="6858000" cy="237744"/>
-          </a:xfrm>
-          <a:prstGeom prst="rect">
-            <a:avLst/>
-          </a:prstGeom>
-          <a:noFill/>
-          <a:ln/>
-        </p:spPr>
-        <p:txBody>
-          <a:bodyPr wrap="square" lIns="0" tIns="0" rIns="0" bIns="0" rtlCol="0" anchor="ctr"/>
-          <a:lstStyle/>
-          <a:p>
-            <a:pPr indent="0" marL="0">
-              <a:buNone/>
-            </a:pPr>
-            <a:r>
-              <a:rPr lang="en-US" sz="1100" b="1" dirty="0">
-                <a:solidFill>
-                  <a:srgbClr val="10161F"/>
-                </a:solidFill>
-                <a:latin typeface="Pretendard" pitchFamily="34" charset="0"/>
-                <a:ea typeface="Pretendard" pitchFamily="34" charset="-122"/>
-                <a:cs typeface="Pretendard" pitchFamily="34" charset="-120"/>
-              </a:rPr>
-              <a:t>건축물 개요 및 물리 스펙</a:t>
-            </a:r>
-            <a:endParaRPr lang="en-US" sz="1100" dirty="0"/>
-          </a:p>
-        </p:txBody>
-      </p:sp>
-      <p:sp>
-        <p:nvSpPr>
-          <p:cNvPr id="7" name="Text 5"/>
-          <p:cNvSpPr/>
-          <p:nvPr/>
-        </p:nvSpPr>
-        <p:spPr>
-          <a:xfrm>
             <a:off x="566928" y="1645920"/>
-            <a:ext cx="2606040" cy="402336"/>
+            <a:ext cx="4201979" cy="402336"/>
           </a:xfrm>
           <a:prstGeom prst="rect">
             <a:avLst/>
@@ -6757,14 +9176,14 @@
       </p:sp>
       <p:sp>
         <p:nvSpPr>
-          <p:cNvPr id="8" name="Text 6"/>
-          <p:cNvSpPr/>
-          <p:nvPr/>
-        </p:nvSpPr>
-        <p:spPr>
-          <a:xfrm>
-            <a:off x="3172968" y="1645920"/>
-            <a:ext cx="4251960" cy="402336"/>
+          <p:cNvPr id="7" name="Text 5"/>
+          <p:cNvSpPr/>
+          <p:nvPr/>
+        </p:nvSpPr>
+        <p:spPr>
+          <a:xfrm>
+            <a:off x="4768907" y="1645920"/>
+            <a:ext cx="6855860" cy="402336"/>
           </a:xfrm>
           <a:prstGeom prst="rect">
             <a:avLst/>
@@ -6791,7 +9210,7 @@
                 <a:ea typeface="Pretendard" pitchFamily="34" charset="-122"/>
                 <a:cs typeface="Pretendard" pitchFamily="34" charset="-120"/>
               </a:rPr>
-              <a:t>true,"mocked":true,"extractedFields":{"area_signal":"역삼","asset_type":"오피스빌딩","price_band":"300억","size_signal":"3000평(약 9917.4㎡)"},"extractedFacts":{"region":"역삼","exactAddressCandidate":"역삼동 742-1","assetType":"오피스빌딩","priceText":"300억","sizeText":"3000평(약 9917.4㎡)","currentUse":"오피스","currentUseSignal":"근린생활시설","leaseSignal":"임대중","vacancySignal":"공실없음","tenantNames":"쿠팡","네이버","unitRentTexts":"301호: 1500만","sellerMotivationText":"자산 효율화","brokerNotes":"초역세권 매물"},"detectedSensitiveFields":"exact_address","tenant_name","ambiguousFields":,"warnings":,"areaSignal":"역삼","assetType":"오피스빌딩","priceBand":"300억","sizeSignal":"3000평(약 9917.4㎡)","dealType":"매각","buildingName":"역삼 센트럴타워","exactAddress":"역삼동 742-1","totalFloorArea":9917.3,"buildYear":2015,"currentUseSignal":"근린생활시설","vacancySignal":"공실 없음","fitSummary":"초역세권 근생 빌딩으로 시행/사옥 매입에 최적화","cautionSummary":"주요 임차인 만기 조율 필요","hiddenFields":"exact_address","seller_motivation","confidence":{"areaSignal":"confirmed","assetType":"confirmed","priceBand":"ai_hypothesis","fitSummary":"ai_hypothesis"},"missingData":"sizeSignal","boundaryNote":"본 자료는 실거래 통계 기반 참고치입니다.","buyerType":"법인 사옥형","budgetRange":{"min":50,"max":80,"display":"50억~80억"},"preferredRegions":"강남","성수","assetTypes":"꼬마빌딩","사옥용","purchasePurpose":"사옥용 매입","mustHave":"초역세권","주차","niceToHave":"테라스","루프탑","riskTolerance":"medium","financingNote":"자본금 50% 준비","missingQuestions":"구체적인 입주 시기가 언제인가요?","선호하는 수익률이 있나요?","privacyNotes":"연락처 비공개","fitReasons":"매수자 예산(50-80억)에 부합하는 매물입니다.","요청하신 성수/강남 권역에 해당합니다.","cautionReasons":"요청한 용도와 달리 명도 협의가 다소 필요합니다.","recommendedNextAction":"현장 답사 제안","kakaoMessage":"안녕하세요! 요청하신 조건에 부합하는 추천 매물이 있어 안내해 드립니다. 확인해보시고 피드백 부탁드립니다.","title":"강남 역삼역 초역세권 오피스 사옥용 빌딩 매각","shortSummary":"역삼역 도보 5분 거리의 준신축급 대형 오피스빌딩입니다.","dealPoints":"초역세권","사옥 최적","cautionPoints":"명도 조율 필요","hiddenInfoNotice":"보증금 및 지번은 인가 후 확인 가능","gateMessage":"G1 등급 등록이 필요합니다.","kakaoText":"강남 역삼역 오피스 빌딩 매각 안내입니다.","exactUnitCandidate":"101호","floor":"1층","areaSqmText":"150㎡","spaceType":"office","depositText":"5000만","monthlyRentText":"400만","maintenanceFeeText":"50만","availableFromText":"즉시입주","leaseTermMonthsText":"24","incentivesText":"렌트프리 2개월","restrictions":,"landlordIdentity":"김성수","currentTenant":"스타트업","vacancyReason":"이전 확장","rentNegotiation":"협의 가능","region":"성수동","areaSqm":150,"deposit":5000,"monthlyRent":400,"maintenanceFee":50,"availableFrom":"즉시입주","leaseTermMonths":24,"incentives":{"rentFreeMonths":2,"interiorSupport":"일부 인테리어 지원","freeRentDetail":"렌트프리 2개월 지원"},"shortSummaryLease":"성수역 도보 5분 거리 1층 리테일 상가 매물입니다."}</a:t>
+              <a:t>true,"mocked":true,"extractedFields":{"area_signal":"역삼","asset_type":"건물명 비공개","price_band":"300억","size_signal":"3000평(약 9917.4㎡)"},"extractedFacts":{"region":"역삼","exactAddressCandidate":"역삼동 742-1","assetType":"건물명 비공개","priceText":"300억","sizeText":"3000평(약 9917.4㎡)","currentUse":"오피스","currentUseSignal":"근린생활시설","leaseSignal":"임대중","vacancySignal":"공실없음","tenantNames":"쿠팡","네이버","unitRentTexts":"301호: 1500만","sellerMotivationText":"자산 효율화","brokerNotes":"역세권 도보 3분 이내 매물"},"detectedSensitiveFields":"exact_address","tenant_name","ambiguousFields":,"warnings":,"areaSignal":"역삼","assetType":"건물명 비공개","priceBand":"300억","sizeSignal":"3000평(약 9917.4㎡)","dealType":"매각","buildingName":"역삼 건물명 비공개","exactAddress":"역삼동 742-1","totalFloorArea":9917.3,"buildYear":2015,"currentUseSignal":"근린생활시설","vacancySignal":"공실 없음","fitSummary":"역세권 도보 3분 이내 근생 빌딩으로 시행/사옥 매입에 최적화","cautionSummary":"주요 임차인 만기 조율 필요","hiddenFields":"exact_address","seller_motivation","confidence":{"areaSignal":"confirmed","assetType":"confirmed","priceBand":"ai_hypothesis","fitSummary":"ai_hypothesis"},"missingData":"sizeSignal","boundaryNote":"본 자료는 실거래 통계 기반 참고치입니다.","buyerType":"법인 사옥형","budgetRange":{"min":50,"max":80,"display":"50억~80억"},"preferredRegions":"강남","성수","assetTypes":"건물명 비공개","사옥용","purchasePurpose":"사옥용 매입","mustHave":"역세권 도보 3분 이내","주차","niceToHave":"테라스","루프탑","riskTolerance":"medium","financingNote":"자본금 50% 준비","missingQuestions":"구체적인 입주 시기가 언제인가요?","선호하는 수익률이 있나요?","privacyNotes":"연락처 비공개","fitReasons":"매수자 예산(50-80억)에 부합하는 매물입니다.","요청하신 성수/강남 권역에 해당합니다.","cautionReasons":"요청한 용도와 달리 명도 협의가 다소 필요합니다.","recommendedNextAction":"현장 답사 제안","kakaoMessage":"안녕하세요! 요청하신 조건에 부합하는 추천 매물이 있어 안내해 드립니다. 확인해보시고 피드백 부탁드립니다.","title":"강남 역삼역 역세권 도보 3분 이내 오피스 사옥용 빌딩 매각","shortSummary":"역삼역 도보 5분 거리의 준신축급 대형 건물명 비공개입니다.","dealPoints":"역세권 도보 3분 이내","사옥 최적","cautionPoints":"명도 조율 필요","hiddenInfoNotice":"보증금 및 지번은 인가 후 확인 가능","gateMessage":"G1 등급 등록이 필요합니다.","kakaoText":"강남 역삼역 오피스 빌딩 매각 안내입니다.","exactUnitCandidate":"101호","floor":"1층","areaSqmText":"150㎡","spaceType":"office","depositText":"5000만","monthlyRentText":"400만","maintenanceFeeText":"50만","availableFromText":"즉시입주","leaseTermMonthsText":"24","incentivesText":"렌트프리 2개월","restrictions":,"landlordIdentity":"김성수","currentTenant":"스타트업","vacancyReason":"이전 확장","rentNegotiation":"협의 가능","region":"성수동","areaSqm":150,"deposit":5000,"monthlyRent":400,"maintenanceFee":50,"availableFrom":"즉시입주","leaseTermMonths":24,"incentives":{"렌트프리(무상임대)Months":2,"interiorSupport":"일부 인테리어 지원","freeRentDetail":"렌트프리 2개월 지원"},"shortSummaryLease":"성수역 도보 5분 거리 1층 리테일 상가 매물입니다."}</a:t>
             </a:r>
             <a:endParaRPr lang="en-US" sz="1400" dirty="0"/>
           </a:p>
@@ -6799,142 +9218,7 @@
       </p:sp>
       <p:sp>
         <p:nvSpPr>
-          <p:cNvPr id="9" name="Shape 7"/>
-          <p:cNvSpPr/>
-          <p:nvPr/>
-        </p:nvSpPr>
-        <p:spPr>
-          <a:xfrm>
-            <a:off x="7604608" y="1371600"/>
-            <a:ext cx="0" cy="4754880"/>
-          </a:xfrm>
-          <a:prstGeom prst="line">
-            <a:avLst/>
-          </a:prstGeom>
-          <a:noFill/>
-          <a:ln w="8890">
-            <a:solidFill>
-              <a:srgbClr val="B98A2E"/>
-            </a:solidFill>
-            <a:prstDash val="solid"/>
-          </a:ln>
-        </p:spPr>
-      </p:sp>
-      <p:sp>
-        <p:nvSpPr>
-          <p:cNvPr id="10" name="Shape 8"/>
-          <p:cNvSpPr/>
-          <p:nvPr/>
-        </p:nvSpPr>
-        <p:spPr>
-          <a:xfrm>
-            <a:off x="7784287" y="1645920"/>
-            <a:ext cx="3840480" cy="2103120"/>
-          </a:xfrm>
-          <a:prstGeom prst="roundRect">
-            <a:avLst>
-              <a:gd name="adj" fmla="val 2609"/>
-            </a:avLst>
-          </a:prstGeom>
-          <a:solidFill>
-            <a:srgbClr val="F3EBDA"/>
-          </a:solidFill>
-          <a:ln/>
-        </p:spPr>
-      </p:sp>
-      <p:sp>
-        <p:nvSpPr>
-          <p:cNvPr id="11" name="Shape 9"/>
-          <p:cNvSpPr/>
-          <p:nvPr/>
-        </p:nvSpPr>
-        <p:spPr>
-          <a:xfrm>
-            <a:off x="7784287" y="1700784"/>
-            <a:ext cx="36576" cy="1993392"/>
-          </a:xfrm>
-          <a:prstGeom prst="rect">
-            <a:avLst/>
-          </a:prstGeom>
-          <a:solidFill>
-            <a:srgbClr val="977024"/>
-          </a:solidFill>
-          <a:ln/>
-        </p:spPr>
-      </p:sp>
-      <p:sp>
-        <p:nvSpPr>
-          <p:cNvPr id="12" name="Text 10"/>
-          <p:cNvSpPr/>
-          <p:nvPr/>
-        </p:nvSpPr>
-        <p:spPr>
-          <a:xfrm>
-            <a:off x="7967167" y="1755648"/>
-            <a:ext cx="3511296" cy="201168"/>
-          </a:xfrm>
-          <a:prstGeom prst="rect">
-            <a:avLst/>
-          </a:prstGeom>
-          <a:noFill/>
-          <a:ln/>
-        </p:spPr>
-        <p:txBody>
-          <a:bodyPr wrap="square" lIns="0" tIns="0" rIns="0" bIns="0" rtlCol="0" anchor="ctr"/>
-          <a:lstStyle/>
-          <a:p>
-            <a:pPr indent="0" marL="0">
-              <a:buNone/>
-            </a:pPr>
-            <a:endParaRPr lang="en-US" sz="1050" dirty="0"/>
-          </a:p>
-        </p:txBody>
-      </p:sp>
-      <p:sp>
-        <p:nvSpPr>
-          <p:cNvPr id="13" name="Text 11"/>
-          <p:cNvSpPr/>
-          <p:nvPr/>
-        </p:nvSpPr>
-        <p:spPr>
-          <a:xfrm>
-            <a:off x="7967167" y="1975104"/>
-            <a:ext cx="3511296" cy="1700784"/>
-          </a:xfrm>
-          <a:prstGeom prst="rect">
-            <a:avLst/>
-          </a:prstGeom>
-          <a:noFill/>
-          <a:ln/>
-        </p:spPr>
-        <p:txBody>
-          <a:bodyPr wrap="square" lIns="0" tIns="0" rIns="0" bIns="0" rtlCol="0" anchor="t"/>
-          <a:lstStyle/>
-          <a:p>
-            <a:pPr indent="0" marL="0">
-              <a:lnSpc>
-                <a:spcPct val="120000"/>
-              </a:lnSpc>
-              <a:buNone/>
-            </a:pPr>
-            <a:r>
-              <a:rPr lang="en-US" sz="930" dirty="0">
-                <a:solidFill>
-                  <a:srgbClr val="10161F"/>
-                </a:solidFill>
-                <a:latin typeface="Pretendard" pitchFamily="34" charset="0"/>
-                <a:ea typeface="Pretendard" pitchFamily="34" charset="-122"/>
-                <a:cs typeface="Pretendard" pitchFamily="34" charset="-120"/>
-              </a:rPr>
-              <a:t>{"ok":true,"mocked":true,"extractedFields":{"area_signal":"역삼","asset_type":"오피스빌딩","price_band":"300억","size_signal":"3</a:t>
-            </a:r>
-            <a:endParaRPr lang="en-US" sz="930" dirty="0"/>
-          </a:p>
-        </p:txBody>
-      </p:sp>
-      <p:sp>
-        <p:nvSpPr>
-          <p:cNvPr id="14" name="Text 12"/>
+          <p:cNvPr id="8" name="Text 6"/>
           <p:cNvSpPr/>
           <p:nvPr/>
         </p:nvSpPr>
@@ -6973,7 +9257,7 @@
       </p:sp>
       <p:sp>
         <p:nvSpPr>
-          <p:cNvPr id="15" name="Text 13"/>
+          <p:cNvPr id="9" name="Text 7"/>
           <p:cNvSpPr/>
           <p:nvPr/>
         </p:nvSpPr>
@@ -7004,7 +9288,7 @@
                 <a:ea typeface="Arial" pitchFamily="34" charset="-122"/>
                 <a:cs typeface="Arial" pitchFamily="34" charset="-120"/>
               </a:rPr>
-              <a:t>5</a:t>
+              <a:t>4</a:t>
             </a:r>
             <a:endParaRPr lang="en-US" sz="900" dirty="0"/>
           </a:p>
@@ -7095,7 +9379,7 @@
                 <a:ea typeface="Arial" pitchFamily="34" charset="-122"/>
                 <a:cs typeface="Arial" pitchFamily="34" charset="-120"/>
               </a:rPr>
-              <a:t>06</a:t>
+              <a:t>05</a:t>
             </a:r>
             <a:endParaRPr lang="en-US" sz="1300" dirty="0"/>
           </a:p>
@@ -7134,7 +9418,7 @@
                 <a:ea typeface="Arial" pitchFamily="34" charset="-122"/>
                 <a:cs typeface="Arial" pitchFamily="34" charset="-120"/>
               </a:rPr>
-              <a:t>Comps</a:t>
+              <a:t>Trend</a:t>
             </a:r>
             <a:endParaRPr lang="en-US" sz="950" dirty="0"/>
           </a:p>
@@ -7173,7 +9457,7 @@
                 <a:ea typeface="Pretendard" pitchFamily="34" charset="-122"/>
                 <a:cs typeface="Pretendard" pitchFamily="34" charset="-120"/>
               </a:rPr>
-              <a:t>유사 거래 사례 및 비교 분석</a:t>
+              <a:t>거래동향</a:t>
             </a:r>
             <a:endParaRPr lang="en-US" sz="2300" dirty="0"/>
           </a:p>
@@ -7181,23 +9465,234 @@
       </p:sp>
       <p:sp>
         <p:nvSpPr>
-          <p:cNvPr id="6" name="Text 4"/>
-          <p:cNvSpPr/>
-          <p:nvPr/>
-        </p:nvSpPr>
-        <p:spPr>
-          <a:xfrm>
-            <a:off x="566928" y="1645920"/>
-            <a:ext cx="4201979" cy="402336"/>
-          </a:xfrm>
-          <a:prstGeom prst="rect">
-            <a:avLst/>
-          </a:prstGeom>
-          <a:noFill/>
-          <a:ln/>
-        </p:spPr>
-        <p:txBody>
-          <a:bodyPr wrap="square" lIns="0" tIns="0" rIns="0" bIns="0" rtlCol="0" anchor="ctr"/>
+          <p:cNvPr id="6" name="Shape 4"/>
+          <p:cNvSpPr/>
+          <p:nvPr/>
+        </p:nvSpPr>
+        <p:spPr>
+          <a:xfrm>
+            <a:off x="566928" y="1325880"/>
+            <a:ext cx="11057839" cy="0"/>
+          </a:xfrm>
+          <a:prstGeom prst="line">
+            <a:avLst/>
+          </a:prstGeom>
+          <a:noFill/>
+          <a:ln w="19050">
+            <a:solidFill>
+              <a:srgbClr val="B98A2E"/>
+            </a:solidFill>
+            <a:prstDash val="solid"/>
+          </a:ln>
+        </p:spPr>
+      </p:sp>
+      <p:sp>
+        <p:nvSpPr>
+          <p:cNvPr id="7" name="Shape 5"/>
+          <p:cNvSpPr/>
+          <p:nvPr/>
+        </p:nvSpPr>
+        <p:spPr>
+          <a:xfrm>
+            <a:off x="566928" y="1554480"/>
+            <a:ext cx="3576218" cy="1188720"/>
+          </a:xfrm>
+          <a:prstGeom prst="roundRect">
+            <a:avLst>
+              <a:gd name="adj" fmla="val 4615"/>
+            </a:avLst>
+          </a:prstGeom>
+          <a:solidFill>
+            <a:srgbClr val="F7FAFC"/>
+          </a:solidFill>
+          <a:ln w="6350">
+            <a:solidFill>
+              <a:srgbClr val="CBD5E0"/>
+            </a:solidFill>
+            <a:prstDash val="solid"/>
+          </a:ln>
+        </p:spPr>
+      </p:sp>
+      <p:sp>
+        <p:nvSpPr>
+          <p:cNvPr id="8" name="Text 6"/>
+          <p:cNvSpPr/>
+          <p:nvPr/>
+        </p:nvSpPr>
+        <p:spPr>
+          <a:xfrm>
+            <a:off x="731520" y="1682496"/>
+            <a:ext cx="3247034" cy="201168"/>
+          </a:xfrm>
+          <a:prstGeom prst="rect">
+            <a:avLst/>
+          </a:prstGeom>
+          <a:noFill/>
+          <a:ln/>
+        </p:spPr>
+        <p:txBody>
+          <a:bodyPr wrap="square" lIns="0" tIns="0" rIns="0" bIns="0" rtlCol="0" anchor="ctr"/>
+          <a:lstStyle/>
+          <a:p>
+            <a:pPr indent="0" marL="0">
+              <a:buNone/>
+            </a:pPr>
+            <a:r>
+              <a:rPr lang="en-US" sz="950" dirty="0">
+                <a:solidFill>
+                  <a:srgbClr val="718096"/>
+                </a:solidFill>
+                <a:latin typeface="Pretendard" pitchFamily="34" charset="0"/>
+                <a:ea typeface="Pretendard" pitchFamily="34" charset="-122"/>
+                <a:cs typeface="Pretendard" pitchFamily="34" charset="-120"/>
+              </a:rPr>
+              <a:t>{"ok"</a:t>
+            </a:r>
+            <a:endParaRPr lang="en-US" sz="950" dirty="0"/>
+          </a:p>
+        </p:txBody>
+      </p:sp>
+      <p:sp>
+        <p:nvSpPr>
+          <p:cNvPr id="9" name="Text 7"/>
+          <p:cNvSpPr/>
+          <p:nvPr/>
+        </p:nvSpPr>
+        <p:spPr>
+          <a:xfrm>
+            <a:off x="731520" y="1901952"/>
+            <a:ext cx="3247034" cy="402336"/>
+          </a:xfrm>
+          <a:prstGeom prst="rect">
+            <a:avLst/>
+          </a:prstGeom>
+          <a:noFill/>
+          <a:ln/>
+        </p:spPr>
+        <p:txBody>
+          <a:bodyPr wrap="square" lIns="0" tIns="0" rIns="0" bIns="0" rtlCol="0" anchor="ctr">
+            <a:normAutofit/>
+          </a:bodyPr>
+          <a:lstStyle/>
+          <a:p>
+            <a:pPr indent="0" marL="0">
+              <a:buNone/>
+            </a:pPr>
+            <a:r>
+              <a:rPr lang="en-US" sz="2200" b="1" dirty="0">
+                <a:solidFill>
+                  <a:srgbClr val="10161F"/>
+                </a:solidFill>
+                <a:latin typeface="Pretendard" pitchFamily="34" charset="0"/>
+                <a:ea typeface="Pretendard" pitchFamily="34" charset="-122"/>
+                <a:cs typeface="Pretendard" pitchFamily="34" charset="-120"/>
+              </a:rPr>
+              <a:t>300억</a:t>
+            </a:r>
+            <a:endParaRPr lang="en-US" sz="2200" dirty="0"/>
+          </a:p>
+        </p:txBody>
+      </p:sp>
+      <p:sp>
+        <p:nvSpPr>
+          <p:cNvPr id="10" name="Shape 8"/>
+          <p:cNvSpPr/>
+          <p:nvPr/>
+        </p:nvSpPr>
+        <p:spPr>
+          <a:xfrm>
+            <a:off x="566928" y="2999232"/>
+            <a:ext cx="11057839" cy="1280160"/>
+          </a:xfrm>
+          <a:prstGeom prst="roundRect">
+            <a:avLst>
+              <a:gd name="adj" fmla="val 4286"/>
+            </a:avLst>
+          </a:prstGeom>
+          <a:solidFill>
+            <a:srgbClr val="BEE3F8"/>
+          </a:solidFill>
+          <a:ln/>
+        </p:spPr>
+      </p:sp>
+      <p:sp>
+        <p:nvSpPr>
+          <p:cNvPr id="11" name="Shape 9"/>
+          <p:cNvSpPr/>
+          <p:nvPr/>
+        </p:nvSpPr>
+        <p:spPr>
+          <a:xfrm>
+            <a:off x="566928" y="3054096"/>
+            <a:ext cx="36576" cy="1170432"/>
+          </a:xfrm>
+          <a:prstGeom prst="rect">
+            <a:avLst/>
+          </a:prstGeom>
+          <a:solidFill>
+            <a:srgbClr val="2B6CB0"/>
+          </a:solidFill>
+          <a:ln/>
+        </p:spPr>
+      </p:sp>
+      <p:sp>
+        <p:nvSpPr>
+          <p:cNvPr id="12" name="Text 10"/>
+          <p:cNvSpPr/>
+          <p:nvPr/>
+        </p:nvSpPr>
+        <p:spPr>
+          <a:xfrm>
+            <a:off x="749808" y="3108960"/>
+            <a:ext cx="10728655" cy="201168"/>
+          </a:xfrm>
+          <a:prstGeom prst="rect">
+            <a:avLst/>
+          </a:prstGeom>
+          <a:noFill/>
+          <a:ln/>
+        </p:spPr>
+        <p:txBody>
+          <a:bodyPr wrap="square" lIns="0" tIns="0" rIns="0" bIns="0" rtlCol="0" anchor="ctr"/>
+          <a:lstStyle/>
+          <a:p>
+            <a:pPr indent="0" marL="0">
+              <a:buNone/>
+            </a:pPr>
+            <a:r>
+              <a:rPr lang="en-US" sz="1050" b="1" dirty="0">
+                <a:solidFill>
+                  <a:srgbClr val="2B6CB0"/>
+                </a:solidFill>
+                <a:latin typeface="Pretendard" pitchFamily="34" charset="0"/>
+                <a:ea typeface="Pretendard" pitchFamily="34" charset="-122"/>
+                <a:cs typeface="Pretendard" pitchFamily="34" charset="-120"/>
+              </a:rPr>
+              <a:t>투자 가치 제안</a:t>
+            </a:r>
+            <a:endParaRPr lang="en-US" sz="1050" dirty="0"/>
+          </a:p>
+        </p:txBody>
+      </p:sp>
+      <p:sp>
+        <p:nvSpPr>
+          <p:cNvPr id="13" name="Text 11"/>
+          <p:cNvSpPr/>
+          <p:nvPr/>
+        </p:nvSpPr>
+        <p:spPr>
+          <a:xfrm>
+            <a:off x="749808" y="3328416"/>
+            <a:ext cx="10728655" cy="877824"/>
+          </a:xfrm>
+          <a:prstGeom prst="rect">
+            <a:avLst/>
+          </a:prstGeom>
+          <a:noFill/>
+          <a:ln/>
+        </p:spPr>
+        <p:txBody>
+          <a:bodyPr wrap="square" lIns="0" tIns="0" rIns="0" bIns="0" rtlCol="0" anchor="t"/>
           <a:lstStyle/>
           <a:p>
             <a:pPr indent="0" marL="0">
@@ -7207,49 +9702,7 @@
               <a:buNone/>
             </a:pPr>
             <a:r>
-              <a:rPr lang="en-US" sz="1400" dirty="0">
-                <a:solidFill>
-                  <a:srgbClr val="718096"/>
-                </a:solidFill>
-                <a:latin typeface="Pretendard" pitchFamily="34" charset="0"/>
-                <a:ea typeface="Pretendard" pitchFamily="34" charset="-122"/>
-                <a:cs typeface="Pretendard" pitchFamily="34" charset="-120"/>
-              </a:rPr>
-              <a:t>{"ok"</a:t>
-            </a:r>
-            <a:endParaRPr lang="en-US" sz="1400" dirty="0"/>
-          </a:p>
-        </p:txBody>
-      </p:sp>
-      <p:sp>
-        <p:nvSpPr>
-          <p:cNvPr id="7" name="Text 5"/>
-          <p:cNvSpPr/>
-          <p:nvPr/>
-        </p:nvSpPr>
-        <p:spPr>
-          <a:xfrm>
-            <a:off x="4768907" y="1645920"/>
-            <a:ext cx="6855860" cy="402336"/>
-          </a:xfrm>
-          <a:prstGeom prst="rect">
-            <a:avLst/>
-          </a:prstGeom>
-          <a:noFill/>
-          <a:ln/>
-        </p:spPr>
-        <p:txBody>
-          <a:bodyPr wrap="square" lIns="0" tIns="0" rIns="0" bIns="0" rtlCol="0" anchor="ctr"/>
-          <a:lstStyle/>
-          <a:p>
-            <a:pPr indent="0" marL="0">
-              <a:lnSpc>
-                <a:spcPct val="120000"/>
-              </a:lnSpc>
-              <a:buNone/>
-            </a:pPr>
-            <a:r>
-              <a:rPr lang="en-US" sz="1400" b="1" dirty="0">
+              <a:rPr lang="en-US" sz="930" dirty="0">
                 <a:solidFill>
                   <a:srgbClr val="10161F"/>
                 </a:solidFill>
@@ -7257,15 +9710,15 @@
                 <a:ea typeface="Pretendard" pitchFamily="34" charset="-122"/>
                 <a:cs typeface="Pretendard" pitchFamily="34" charset="-120"/>
               </a:rPr>
-              <a:t>true,"mocked":true,"extractedFields":{"area_signal":"역삼","asset_type":"오피스빌딩","price_band":"300억","size_signal":"3000평(약 9917.4㎡)"},"extractedFacts":{"region":"역삼","exactAddressCandidate":"역삼동 742-1","assetType":"오피스빌딩","priceText":"300억","sizeText":"3000평(약 9917.4㎡)","currentUse":"오피스","currentUseSignal":"근린생활시설","leaseSignal":"임대중","vacancySignal":"공실없음","tenantNames":"쿠팡","네이버","unitRentTexts":"301호: 1500만","sellerMotivationText":"자산 효율화","brokerNotes":"초역세권 매물"},"detectedSensitiveFields":"exact_address","tenant_name","ambiguousFields":,"warnings":,"areaSignal":"역삼","assetType":"오피스빌딩","priceBand":"300억","sizeSignal":"3000평(약 9917.4㎡)","dealType":"매각","buildingName":"역삼 센트럴타워","exactAddress":"역삼동 742-1","totalFloorArea":9917.3,"buildYear":2015,"currentUseSignal":"근린생활시설","vacancySignal":"공실 없음","fitSummary":"초역세권 근생 빌딩으로 시행/사옥 매입에 최적화","cautionSummary":"주요 임차인 만기 조율 필요","hiddenFields":"exact_address","seller_motivation","confidence":{"areaSignal":"confirmed","assetType":"confirmed","priceBand":"ai_hypothesis","fitSummary":"ai_hypothesis"},"missingData":"sizeSignal","boundaryNote":"본 자료는 실거래 통계 기반 참고치입니다.","buyerType":"법인 사옥형","budgetRange":{"min":50,"max":80,"display":"50억~80억"},"preferredRegions":"강남","성수","assetTypes":"꼬마빌딩","사옥용","purchasePurpose":"사옥용 매입","mustHave":"초역세권","주차","niceToHave":"테라스","루프탑","riskTolerance":"medium","financingNote":"자본금 50% 준비","missingQuestions":"구체적인 입주 시기가 언제인가요?","선호하는 수익률이 있나요?","privacyNotes":"연락처 비공개","fitReasons":"매수자 예산(50-80억)에 부합하는 매물입니다.","요청하신 성수/강남 권역에 해당합니다.","cautionReasons":"요청한 용도와 달리 명도 협의가 다소 필요합니다.","recommendedNextAction":"현장 답사 제안","kakaoMessage":"안녕하세요! 요청하신 조건에 부합하는 추천 매물이 있어 안내해 드립니다. 확인해보시고 피드백 부탁드립니다.","title":"강남 역삼역 초역세권 오피스 사옥용 빌딩 매각","shortSummary":"역삼역 도보 5분 거리의 준신축급 대형 오피스빌딩입니다.","dealPoints":"초역세권","사옥 최적","cautionPoints":"명도 조율 필요","hiddenInfoNotice":"보증금 및 지번은 인가 후 확인 가능","gateMessage":"G1 등급 등록이 필요합니다.","kakaoText":"강남 역삼역 오피스 빌딩 매각 안내입니다.","exactUnitCandidate":"101호","floor":"1층","areaSqmText":"150㎡","spaceType":"office","depositText":"5000만","monthlyRentText":"400만","maintenanceFeeText":"50만","availableFromText":"즉시입주","leaseTermMonthsText":"24","incentivesText":"렌트프리 2개월","restrictions":,"landlordIdentity":"김성수","currentTenant":"스타트업","vacancyReason":"이전 확장","rentNegotiation":"협의 가능","region":"성수동","areaSqm":150,"deposit":5000,"monthlyRent":400,"maintenanceFee":50,"availableFrom":"즉시입주","leaseTermMonths":24,"incentives":{"rentFreeMonths":2,"interiorSupport":"일부 인테리어 지원","freeRentDetail":"렌트프리 2개월 지원"},"shortSummaryLease":"성수역 도보 5분 거리 1층 리테일 상가 매물입니다."}</a:t>
-            </a:r>
-            <a:endParaRPr lang="en-US" sz="1400" dirty="0"/>
-          </a:p>
-        </p:txBody>
-      </p:sp>
-      <p:sp>
-        <p:nvSpPr>
-          <p:cNvPr id="8" name="Text 6"/>
+              <a:t>{"ok":true,"mocked":true,"extractedFields":{"area_signal":"역삼","asset_type":"[건물명 비공개]","price_band":"300억","size_signal":"3000평(약 9917.4㎡)"},"extractedFacts":{"region":"역삼","exactAddressCandidate":"역삼동 742-1","assetType":"[건물명 비공개]","priceText":"300억","sizeText":"3000평(약 9917.4㎡)","currentUse":"오피스","currentUseSignal":"근린생활시설","leaseSignal":"임대중","vacancySignal":"공실없음","tenantNames":["쿠팡","네이버"],"unitRentTexts":["301호: 1500만"],"sellerMotivationText":"자산 효율화","brokerNotes":["역세권 도보 3분 이내 매물"]},"detectedSensitiveFields":["exact_address","tenant_name"],"ambiguousFields":[],"warnings":[],"areaSignal":"역삼","assetType":"[건물명 비공개]","priceBand":"300억","sizeSignal":"3000평(약 9917.4㎡)","dealType":"매각","buildingName":"역삼 [건물명 비공개]","exactAddress":"역삼동 742-1","totalFloorArea":9917.3,"buildYear":2015,"currentUseSignal":"근린생활시설","vacancySignal":"공실 없음","fitSummary":"역세권 도보 3분 이내 근생 빌딩으로 시행/사옥 매입에 최적화","cautionSummary":"주요 임차인 만기 조율 필요","hiddenFields":["exact_address","seller_motivation"],"confidence":{"areaSignal":"confirmed","assetType":"confirmed","priceBand":"ai_hypothesis","fitSummary":"ai_hypothesis"},"missingData":["sizeSignal"],"boundaryNote":"본 자료는 실거래 통계 기반 참고치입니다.","buyerType":"법인 사옥형","budgetRange":{"min":50,"max":80,"display":"50억~80억"},"preferredRegions":["강남","성수"],"assetTypes":["[건물명 비공개]","사옥용"],"purchasePurpose":"사옥용 매입","mustHave":["역세권 도보 3분 이내","주차"],"niceToHave":["테라스","루프탑"],"riskTolerance":"medium","financingNote":"자본금 50% 준비","missingQuestions":["구체적인 입주 시기가 언제인가요?","선호하는 수익률이 있나요?"],"privacyNotes":["연락처 비공개"],"fitReasons":["매수자 예산(50-80억)에 부합하는 매물입니다.","요청하신 성수/강남 권역에 해당합니다."],"cautionReasons":["요청한 용도와 달리 명도 협의가 다소 필요합니다."],"recommendedNextAction":"현장 답사 제안","kakaoMessage":"안녕하세요! 요청하신 조건에 부합하는 추천 매물이 있어 안내해 드립니다. 확인해보시고 피드백 부탁드립니다.","title":"강남 역삼역 역세권 도보 3분 이내 오피스 사옥용 빌딩 매각","shortSummary":"역삼역 도보 5분 거리의 준신축급 대형 [건물명 비공개]입니다.","dealPoints":["역세권 도보 3분 이내","사옥 최적"],"cautionPoints":["명도 조율 필요"],"hiddenInfoNotice":["보증금 및 지번은 인가 후 확인 가능"],"gateMessage":"G1 등급 등록이 필요합니다.","kakaoText":"강남 역삼역 오피스 빌딩 매각 안내입니다.","exactUnitCandidate":"101호","floor":"1층","areaSqmText":"150㎡","spaceType":"office","depositText":"5000만","monthlyRentText":"400만","maintenanceFeeText":"50만","availableFromText":"즉시입주","leaseTermMonthsText":"24","incentivesText":"렌트프리(무상임대) 2개월","restrictions":[],"landlordIdentity":"김성수","currentTenant":"스타트업","vacancyReason":"이전 확장","rentNegotiation":"협의 가능","region":"성수동","areaSqm":150,"deposit":5000,"monthlyRent":400,"maintenanceFee":50,"availableFrom":"즉시입주","leaseTermMonths":24,"incentives":{"렌트프리(무상임대)(무상임대)Months":2,"interiorSupport":"일부 인테리어 지원","freeRentDetail":"렌트프리(무상임대) 2개월 지원"},"shortSummaryLease":"성수역 도보 5분 거리 1층 리테일 상가 매물입니다."}</a:t>
+            </a:r>
+            <a:endParaRPr lang="en-US" sz="930" dirty="0"/>
+          </a:p>
+        </p:txBody>
+      </p:sp>
+      <p:sp>
+        <p:nvSpPr>
+          <p:cNvPr id="14" name="Text 12"/>
           <p:cNvSpPr/>
           <p:nvPr/>
         </p:nvSpPr>
@@ -7304,7 +9757,7 @@
       </p:sp>
       <p:sp>
         <p:nvSpPr>
-          <p:cNvPr id="9" name="Text 7"/>
+          <p:cNvPr id="15" name="Text 13"/>
           <p:cNvSpPr/>
           <p:nvPr/>
         </p:nvSpPr>
@@ -7335,7 +9788,7 @@
                 <a:ea typeface="Arial" pitchFamily="34" charset="-122"/>
                 <a:cs typeface="Arial" pitchFamily="34" charset="-120"/>
               </a:rPr>
-              <a:t>6</a:t>
+              <a:t>5</a:t>
             </a:r>
             <a:endParaRPr lang="en-US" sz="900" dirty="0"/>
           </a:p>
@@ -7426,7 +9879,7 @@
                 <a:ea typeface="Arial" pitchFamily="34" charset="-122"/>
                 <a:cs typeface="Arial" pitchFamily="34" charset="-120"/>
               </a:rPr>
-              <a:t>07</a:t>
+              <a:t>06</a:t>
             </a:r>
             <a:endParaRPr lang="en-US" sz="1300" dirty="0"/>
           </a:p>
@@ -7465,7 +9918,7 @@
                 <a:ea typeface="Arial" pitchFamily="34" charset="-122"/>
                 <a:cs typeface="Arial" pitchFamily="34" charset="-120"/>
               </a:rPr>
-              <a:t>Risk</a:t>
+              <a:t>Turnover</a:t>
             </a:r>
             <a:endParaRPr lang="en-US" sz="950" dirty="0"/>
           </a:p>
@@ -7504,7 +9957,7 @@
                 <a:ea typeface="Pretendard" pitchFamily="34" charset="-122"/>
                 <a:cs typeface="Pretendard" pitchFamily="34" charset="-120"/>
               </a:rPr>
-              <a:t>리스크는 무엇이고 대응책은 있는가</a:t>
+              <a:t>권역 회전율</a:t>
             </a:r>
             <a:endParaRPr lang="en-US" sz="2300" dirty="0"/>
           </a:p>
@@ -7512,26 +9965,145 @@
       </p:sp>
       <p:sp>
         <p:nvSpPr>
-          <p:cNvPr id="6" name="Shape 4"/>
-          <p:cNvSpPr/>
-          <p:nvPr/>
-        </p:nvSpPr>
-        <p:spPr>
-          <a:xfrm>
-            <a:off x="566928" y="1417320"/>
-            <a:ext cx="11057839" cy="3657600"/>
-          </a:xfrm>
-          <a:prstGeom prst="roundRect">
-            <a:avLst>
-              <a:gd name="adj" fmla="val 1500"/>
-            </a:avLst>
-          </a:prstGeom>
-          <a:solidFill>
-            <a:srgbClr val="F7FAFC"/>
-          </a:solidFill>
-          <a:ln w="6350">
+          <p:cNvPr id="6" name="Text 4"/>
+          <p:cNvSpPr/>
+          <p:nvPr/>
+        </p:nvSpPr>
+        <p:spPr>
+          <a:xfrm>
+            <a:off x="566928" y="1371600"/>
+            <a:ext cx="6858000" cy="237744"/>
+          </a:xfrm>
+          <a:prstGeom prst="rect">
+            <a:avLst/>
+          </a:prstGeom>
+          <a:noFill/>
+          <a:ln/>
+        </p:spPr>
+        <p:txBody>
+          <a:bodyPr wrap="square" lIns="0" tIns="0" rIns="0" bIns="0" rtlCol="0" anchor="ctr"/>
+          <a:lstStyle/>
+          <a:p>
+            <a:pPr indent="0" marL="0">
+              <a:buNone/>
+            </a:pPr>
+            <a:r>
+              <a:rPr lang="en-US" sz="1100" b="1" dirty="0">
+                <a:solidFill>
+                  <a:srgbClr val="10161F"/>
+                </a:solidFill>
+                <a:latin typeface="Pretendard" pitchFamily="34" charset="0"/>
+                <a:ea typeface="Pretendard" pitchFamily="34" charset="-122"/>
+                <a:cs typeface="Pretendard" pitchFamily="34" charset="-120"/>
+              </a:rPr>
+              <a:t>건축물 개요 및 물리 스펙</a:t>
+            </a:r>
+            <a:endParaRPr lang="en-US" sz="1100" dirty="0"/>
+          </a:p>
+        </p:txBody>
+      </p:sp>
+      <p:sp>
+        <p:nvSpPr>
+          <p:cNvPr id="7" name="Text 5"/>
+          <p:cNvSpPr/>
+          <p:nvPr/>
+        </p:nvSpPr>
+        <p:spPr>
+          <a:xfrm>
+            <a:off x="566928" y="1645920"/>
+            <a:ext cx="2606040" cy="438912"/>
+          </a:xfrm>
+          <a:prstGeom prst="rect">
+            <a:avLst/>
+          </a:prstGeom>
+          <a:noFill/>
+          <a:ln/>
+        </p:spPr>
+        <p:txBody>
+          <a:bodyPr wrap="square" lIns="0" tIns="0" rIns="0" bIns="0" rtlCol="0" anchor="ctr"/>
+          <a:lstStyle/>
+          <a:p>
+            <a:pPr indent="0" marL="0">
+              <a:lnSpc>
+                <a:spcPct val="120000"/>
+              </a:lnSpc>
+              <a:buNone/>
+            </a:pPr>
+            <a:r>
+              <a:rPr lang="en-US" sz="1350" dirty="0">
+                <a:solidFill>
+                  <a:srgbClr val="718096"/>
+                </a:solidFill>
+                <a:latin typeface="Pretendard" pitchFamily="34" charset="0"/>
+                <a:ea typeface="Pretendard" pitchFamily="34" charset="-122"/>
+                <a:cs typeface="Pretendard" pitchFamily="34" charset="-120"/>
+              </a:rPr>
+              <a:t>{"ok"</a:t>
+            </a:r>
+            <a:endParaRPr lang="en-US" sz="1350" dirty="0"/>
+          </a:p>
+        </p:txBody>
+      </p:sp>
+      <p:sp>
+        <p:nvSpPr>
+          <p:cNvPr id="8" name="Text 6"/>
+          <p:cNvSpPr/>
+          <p:nvPr/>
+        </p:nvSpPr>
+        <p:spPr>
+          <a:xfrm>
+            <a:off x="3172968" y="1645920"/>
+            <a:ext cx="4251960" cy="438912"/>
+          </a:xfrm>
+          <a:prstGeom prst="rect">
+            <a:avLst/>
+          </a:prstGeom>
+          <a:noFill/>
+          <a:ln/>
+        </p:spPr>
+        <p:txBody>
+          <a:bodyPr wrap="square" lIns="0" tIns="0" rIns="0" bIns="0" rtlCol="0" anchor="ctr"/>
+          <a:lstStyle/>
+          <a:p>
+            <a:pPr indent="0" marL="0">
+              <a:lnSpc>
+                <a:spcPct val="120000"/>
+              </a:lnSpc>
+              <a:buNone/>
+            </a:pPr>
+            <a:r>
+              <a:rPr lang="en-US" sz="1350" b="1" dirty="0">
+                <a:solidFill>
+                  <a:srgbClr val="10161F"/>
+                </a:solidFill>
+                <a:latin typeface="Pretendard" pitchFamily="34" charset="0"/>
+                <a:ea typeface="Pretendard" pitchFamily="34" charset="-122"/>
+                <a:cs typeface="Pretendard" pitchFamily="34" charset="-120"/>
+              </a:rPr>
+              <a:t>true,"mocked":true,"extractedFields":{"area_signal":"역삼","asset_type":"건물명 비공개","price_band":"300억","size_signal":"3000평(약 9917.4㎡)"},"extractedFacts":{"region":"역삼","exactAddressCandidate":"역삼동 742-1","assetType":"건물명 비공개","priceText":"300억","sizeText":"3000평(약 9917.4㎡)","currentUse":"오피스","currentUseSignal":"근린생활시설","leaseSignal":"임대중","vacancySignal":"공실없음","tenantNames":"쿠팡","네이버","unitRentTexts":"301호: 1500만","sellerMotivationText":"자산 효율화","brokerNotes":"역세권 도보 3분 이내 매물"},"detectedSensitiveFields":"exact_address","tenant_name","ambiguousFields":,"warnings":,"areaSignal":"역삼","assetType":"건물명 비공개","priceBand":"300억","sizeSignal":"3000평(약 9917.4㎡)","dealType":"매각","buildingName":"역삼 건물명 비공개","exactAddress":"역삼동 742-1","totalFloorArea":9917.3,"buildYear":2015,"currentUseSignal":"근린생활시설","vacancySignal":"공실 없음","fitSummary":"역세권 도보 3분 이내 근생 빌딩으로 시행/사옥 매입에 최적화","cautionSummary":"주요 임차인 만기 조율 필요","hiddenFields":"exact_address","seller_motivation","confidence":{"areaSignal":"confirmed","assetType":"confirmed","priceBand":"ai_hypothesis","fitSummary":"ai_hypothesis"},"missingData":"sizeSignal","boundaryNote":"본 자료는 실거래 통계 기반 참고치입니다.","buyerType":"법인 사옥형","budgetRange":{"min":50,"max":80,"display":"50억~80억"},"preferredRegions":"강남","성수","assetTypes":"건물명 비공개","사옥용","purchasePurpose":"사옥용 매입","mustHave":"역세권 도보 3분 이내","주차","niceToHave":"테라스","루프탑","riskTolerance":"medium","financingNote":"자본금 50% 준비","missingQuestions":"구체적인 입주 시기가 언제인가요?","선호하는 수익률이 있나요?","privacyNotes":"연락처 비공개","fitReasons":"매수자 예산(50-80억)에 부합하는 매물입니다.","요청하신 성수/강남 권역에 해당합니다.","cautionReasons":"요청한 용도와 달리 명도 협의가 다소 필요합니다.","recommendedNextAction":"현장 답사 제안","kakaoMessage":"안녕하세요! 요청하신 조건에 부합하는 추천 매물이 있어 안내해 드립니다. 확인해보시고 피드백 부탁드립니다.","title":"강남 역삼역 역세권 도보 3분 이내 오피스 사옥용 빌딩 매각","shortSummary":"역삼역 도보 5분 거리의 준신축급 대형 건물명 비공개입니다.","dealPoints":"역세권 도보 3분 이내","사옥 최적","cautionPoints":"명도 조율 필요","hiddenInfoNotice":"보증금 및 지번은 인가 후 확인 가능","gateMessage":"G1 등급 등록이 필요합니다.","kakaoText":"강남 역삼역 오피스 빌딩 매각 안내입니다.","exactUnitCandidate":"101호","floor":"1층","areaSqmText":"150㎡","spaceType":"office","depositText":"5000만","monthlyRentText":"400만","maintenanceFeeText":"50만","availableFromText":"즉시입주","leaseTermMonthsText":"24","incentivesText":"렌트프리(무상임대) 2개월","restrictions":,"landlordIdentity":"김성수","currentTenant":"스타트업","vacancyReason":"이전 확장","rentNegotiation":"협의 가능","region":"성수동","areaSqm":150,"deposit":5000,"monthlyRent":400,"maintenanceFee":50,"availableFrom":"즉시입주","leaseTermMonths":24,"incentives":{"렌트프리(무상임대)(무상임대)Months":2,"interiorSupport":"일부 인테리어 지원","freeRentDetail":"렌트프리(무상임대) 2개월 지원"},"shortSummaryLease":"성수역 도보 5분 거리 1층 리테일 상가 매물입니다."}</a:t>
+            </a:r>
+            <a:endParaRPr lang="en-US" sz="1350" dirty="0"/>
+          </a:p>
+        </p:txBody>
+      </p:sp>
+      <p:sp>
+        <p:nvSpPr>
+          <p:cNvPr id="9" name="Shape 7"/>
+          <p:cNvSpPr/>
+          <p:nvPr/>
+        </p:nvSpPr>
+        <p:spPr>
+          <a:xfrm>
+            <a:off x="7604608" y="1371600"/>
+            <a:ext cx="0" cy="4754880"/>
+          </a:xfrm>
+          <a:prstGeom prst="line">
+            <a:avLst/>
+          </a:prstGeom>
+          <a:noFill/>
+          <a:ln w="8890">
             <a:solidFill>
-              <a:srgbClr val="CBD5E0"/>
+              <a:srgbClr val="B98A2E"/>
             </a:solidFill>
             <a:prstDash val="solid"/>
           </a:ln>
@@ -7539,174 +10111,44 @@
       </p:sp>
       <p:sp>
         <p:nvSpPr>
-          <p:cNvPr id="7" name="Shape 5"/>
-          <p:cNvSpPr/>
-          <p:nvPr/>
-        </p:nvSpPr>
-        <p:spPr>
-          <a:xfrm>
-            <a:off x="566928" y="1417320"/>
-            <a:ext cx="11057839" cy="45720"/>
-          </a:xfrm>
-          <a:prstGeom prst="rect">
-            <a:avLst/>
-          </a:prstGeom>
-          <a:solidFill>
-            <a:srgbClr val="B98A2E"/>
-          </a:solidFill>
-          <a:ln/>
-        </p:spPr>
-      </p:sp>
-      <p:sp>
-        <p:nvSpPr>
-          <p:cNvPr id="8" name="Text 6"/>
-          <p:cNvSpPr/>
-          <p:nvPr/>
-        </p:nvSpPr>
-        <p:spPr>
-          <a:xfrm>
-            <a:off x="795528" y="1618488"/>
-            <a:ext cx="10600639" cy="292608"/>
-          </a:xfrm>
-          <a:prstGeom prst="rect">
-            <a:avLst/>
-          </a:prstGeom>
-          <a:noFill/>
-          <a:ln/>
-        </p:spPr>
-        <p:txBody>
-          <a:bodyPr wrap="square" lIns="0" tIns="0" rIns="0" bIns="0" rtlCol="0" anchor="ctr"/>
-          <a:lstStyle/>
-          <a:p>
-            <a:pPr indent="0" marL="0">
-              <a:buNone/>
-            </a:pPr>
-            <a:r>
-              <a:rPr lang="en-US" sz="1350" b="1" dirty="0">
-                <a:solidFill>
-                  <a:srgbClr val="977024"/>
-                </a:solidFill>
-                <a:latin typeface="Pretendard" pitchFamily="34" charset="0"/>
-                <a:ea typeface="Pretendard" pitchFamily="34" charset="-122"/>
-                <a:cs typeface="Pretendard" pitchFamily="34" charset="-120"/>
-              </a:rPr>
-              <a:t>용도 리스크</a:t>
-            </a:r>
-            <a:endParaRPr lang="en-US" sz="1350" dirty="0"/>
-          </a:p>
-        </p:txBody>
-      </p:sp>
-      <p:sp>
-        <p:nvSpPr>
-          <p:cNvPr id="9" name="Text 7"/>
-          <p:cNvSpPr/>
-          <p:nvPr/>
-        </p:nvSpPr>
-        <p:spPr>
-          <a:xfrm>
-            <a:off x="795528" y="1947672"/>
-            <a:ext cx="10600639" cy="365760"/>
-          </a:xfrm>
-          <a:prstGeom prst="rect">
-            <a:avLst/>
-          </a:prstGeom>
-          <a:noFill/>
-          <a:ln/>
-        </p:spPr>
-        <p:txBody>
-          <a:bodyPr wrap="square" lIns="0" tIns="0" rIns="0" bIns="0" rtlCol="0" anchor="ctr">
-            <a:normAutofit/>
-          </a:bodyPr>
-          <a:lstStyle/>
-          <a:p>
-            <a:pPr indent="0" marL="0">
-              <a:buNone/>
-            </a:pPr>
-            <a:r>
-              <a:rPr lang="en-US" sz="1250" b="1" dirty="0">
-                <a:solidFill>
-                  <a:srgbClr val="10161F"/>
-                </a:solidFill>
-                <a:latin typeface="Pretendard" pitchFamily="34" charset="0"/>
-                <a:ea typeface="Pretendard" pitchFamily="34" charset="-122"/>
-                <a:cs typeface="Pretendard" pitchFamily="34" charset="-120"/>
-              </a:rPr>
-              <a:t>—</a:t>
-            </a:r>
-            <a:endParaRPr lang="en-US" sz="1250" dirty="0"/>
-          </a:p>
-        </p:txBody>
-      </p:sp>
-      <p:sp>
-        <p:nvSpPr>
-          <p:cNvPr id="10" name="Text 8"/>
-          <p:cNvSpPr/>
-          <p:nvPr/>
-        </p:nvSpPr>
-        <p:spPr>
-          <a:xfrm>
-            <a:off x="795528" y="2377440"/>
-            <a:ext cx="10600639" cy="2606040"/>
-          </a:xfrm>
-          <a:prstGeom prst="rect">
-            <a:avLst/>
-          </a:prstGeom>
-          <a:noFill/>
-          <a:ln/>
-        </p:spPr>
-        <p:txBody>
-          <a:bodyPr wrap="square" lIns="0" tIns="0" rIns="0" bIns="0" rtlCol="0" anchor="t">
-            <a:normAutofit/>
-          </a:bodyPr>
-          <a:lstStyle/>
-          <a:p>
-            <a:pPr marL="342900" indent="-342900">
-              <a:lnSpc>
-                <a:spcPct val="125000"/>
-              </a:lnSpc>
-              <a:buSzPct val="100000"/>
-              <a:buChar char="•"/>
-            </a:pPr>
-            <a:r>
-              <a:rPr lang="en-US" sz="1100" dirty="0">
-                <a:solidFill>
-                  <a:srgbClr val="10161F"/>
-                </a:solidFill>
-                <a:latin typeface="Pretendard" pitchFamily="34" charset="0"/>
-                <a:ea typeface="Pretendard" pitchFamily="34" charset="-122"/>
-                <a:cs typeface="Pretendard" pitchFamily="34" charset="-120"/>
-              </a:rPr>
-              <a:t>{"ok":true,"mocked":true,"extractedFields":{"area_signal":"역삼","asset_type":"오피스빌딩","price_band":"300억","size_signal":"3000평(약 9917.4㎡)"},"extractedFacts":{"region":"역삼","exactAddressCandidate":"역삼동 7</a:t>
-            </a:r>
-            <a:endParaRPr lang="en-US" sz="1100" dirty="0"/>
-          </a:p>
-        </p:txBody>
-      </p:sp>
-      <p:sp>
-        <p:nvSpPr>
-          <p:cNvPr id="11" name="Shape 9"/>
-          <p:cNvSpPr/>
-          <p:nvPr/>
-        </p:nvSpPr>
-        <p:spPr>
-          <a:xfrm>
-            <a:off x="566928" y="5193792"/>
-            <a:ext cx="11057839" cy="621792"/>
+          <p:cNvPr id="10" name="Shape 8"/>
+          <p:cNvSpPr/>
+          <p:nvPr/>
+        </p:nvSpPr>
+        <p:spPr>
+          <a:xfrm>
+            <a:off x="7784287" y="1645920"/>
+            <a:ext cx="3840480" cy="2103120"/>
           </a:xfrm>
           <a:prstGeom prst="roundRect">
             <a:avLst>
-              <a:gd name="adj" fmla="val 8824"/>
+              <a:gd name="adj" fmla="val 2609"/>
             </a:avLst>
           </a:prstGeom>
           <a:solidFill>
-            <a:srgbClr val="F7FAFC"/>
+            <a:srgbClr val="F3EBDA"/>
           </a:solidFill>
-          <a:ln w="6350">
-            <a:solidFill>
-              <a:srgbClr val="CBD5E0"/>
-            </a:solidFill>
-            <a:prstDash val="solid"/>
-          </a:ln>
+          <a:ln/>
+        </p:spPr>
+      </p:sp>
+      <p:sp>
+        <p:nvSpPr>
+          <p:cNvPr id="11" name="Shape 9"/>
+          <p:cNvSpPr/>
+          <p:nvPr/>
+        </p:nvSpPr>
+        <p:spPr>
+          <a:xfrm>
+            <a:off x="7784287" y="1700784"/>
+            <a:ext cx="36576" cy="1993392"/>
+          </a:xfrm>
+          <a:prstGeom prst="rect">
+            <a:avLst/>
+          </a:prstGeom>
+          <a:solidFill>
+            <a:srgbClr val="977024"/>
+          </a:solidFill>
+          <a:ln/>
         </p:spPr>
       </p:sp>
       <p:sp>
@@ -7717,8 +10159,8 @@
         </p:nvSpPr>
         <p:spPr>
           <a:xfrm>
-            <a:off x="795528" y="5193792"/>
-            <a:ext cx="10600639" cy="621792"/>
+            <a:off x="7967167" y="1755648"/>
+            <a:ext cx="3511296" cy="201168"/>
           </a:xfrm>
           <a:prstGeom prst="rect">
             <a:avLst/>
@@ -7733,8 +10175,39 @@
             <a:pPr indent="0" marL="0">
               <a:buNone/>
             </a:pPr>
-            <a:r>
-              <a:rPr lang="en-US" sz="1100" dirty="0">
+            <a:endParaRPr lang="en-US" sz="1050" dirty="0"/>
+          </a:p>
+        </p:txBody>
+      </p:sp>
+      <p:sp>
+        <p:nvSpPr>
+          <p:cNvPr id="13" name="Text 11"/>
+          <p:cNvSpPr/>
+          <p:nvPr/>
+        </p:nvSpPr>
+        <p:spPr>
+          <a:xfrm>
+            <a:off x="7967167" y="1975104"/>
+            <a:ext cx="3511296" cy="1700784"/>
+          </a:xfrm>
+          <a:prstGeom prst="rect">
+            <a:avLst/>
+          </a:prstGeom>
+          <a:noFill/>
+          <a:ln/>
+        </p:spPr>
+        <p:txBody>
+          <a:bodyPr wrap="square" lIns="0" tIns="0" rIns="0" bIns="0" rtlCol="0" anchor="t"/>
+          <a:lstStyle/>
+          <a:p>
+            <a:pPr indent="0" marL="0">
+              <a:lnSpc>
+                <a:spcPct val="120000"/>
+              </a:lnSpc>
+              <a:buNone/>
+            </a:pPr>
+            <a:r>
+              <a:rPr lang="en-US" sz="930" dirty="0">
                 <a:solidFill>
                   <a:srgbClr val="10161F"/>
                 </a:solidFill>
@@ -7742,15 +10215,15 @@
                 <a:ea typeface="Pretendard" pitchFamily="34" charset="-122"/>
                 <a:cs typeface="Pretendard" pitchFamily="34" charset="-120"/>
               </a:rPr>
-              <a:t>※ 본 리스크 체크는 공부 및 브로커 확인 기반이며, 매수 전 전문 실사팀(변호사/건축사)을 통한 정밀 실사가 필요합니다.</a:t>
-            </a:r>
-            <a:endParaRPr lang="en-US" sz="1100" dirty="0"/>
-          </a:p>
-        </p:txBody>
-      </p:sp>
-      <p:sp>
-        <p:nvSpPr>
-          <p:cNvPr id="13" name="Text 11"/>
+              <a:t>{"ok":true,"mocked":true,"extractedFields":{"area_signal":"역삼","asset_type":"[건물명 비공개]","price_band":"300억","size_signal</a:t>
+            </a:r>
+            <a:endParaRPr lang="en-US" sz="930" dirty="0"/>
+          </a:p>
+        </p:txBody>
+      </p:sp>
+      <p:sp>
+        <p:nvSpPr>
+          <p:cNvPr id="14" name="Text 12"/>
           <p:cNvSpPr/>
           <p:nvPr/>
         </p:nvSpPr>
@@ -7789,7 +10262,7 @@
       </p:sp>
       <p:sp>
         <p:nvSpPr>
-          <p:cNvPr id="14" name="Text 12"/>
+          <p:cNvPr id="15" name="Text 13"/>
           <p:cNvSpPr/>
           <p:nvPr/>
         </p:nvSpPr>
@@ -7820,7 +10293,7 @@
                 <a:ea typeface="Arial" pitchFamily="34" charset="-122"/>
                 <a:cs typeface="Arial" pitchFamily="34" charset="-120"/>
               </a:rPr>
-              <a:t>7</a:t>
+              <a:t>6</a:t>
             </a:r>
             <a:endParaRPr lang="en-US" sz="900" dirty="0"/>
           </a:p>
@@ -7837,6 +10310,13 @@
 <file path=ppt/slides/slide8.xml><?xml version="1.0" encoding="utf-8"?>
 <p:sld xmlns:a="http://schemas.openxmlformats.org/drawingml/2006/main" xmlns:r="http://schemas.openxmlformats.org/officeDocument/2006/relationships" xmlns:p="http://schemas.openxmlformats.org/presentationml/2006/main">
   <p:cSld name="Slide 8">
+    <p:bg>
+      <p:bgPr>
+        <a:solidFill>
+          <a:srgbClr val="FFFFFF"/>
+        </a:solidFill>
+      </p:bgPr>
+    </p:bg>
     <p:spTree>
       <p:nvGrpSpPr>
         <p:cNvPr id="1" name=""/>
@@ -7904,7 +10384,7 @@
                 <a:ea typeface="Arial" pitchFamily="34" charset="-122"/>
                 <a:cs typeface="Arial" pitchFamily="34" charset="-120"/>
               </a:rPr>
-              <a:t>08</a:t>
+              <a:t>07</a:t>
             </a:r>
             <a:endParaRPr lang="en-US" sz="1300" dirty="0"/>
           </a:p>
@@ -7943,7 +10423,7 @@
                 <a:ea typeface="Arial" pitchFamily="34" charset="-122"/>
                 <a:cs typeface="Arial" pitchFamily="34" charset="-120"/>
               </a:rPr>
-              <a:t>Checklist</a:t>
+              <a:t>Price</a:t>
             </a:r>
             <a:endParaRPr lang="en-US" sz="950" dirty="0"/>
           </a:p>
@@ -7982,7 +10462,7 @@
                 <a:ea typeface="Pretendard" pitchFamily="34" charset="-122"/>
                 <a:cs typeface="Pretendard" pitchFamily="34" charset="-120"/>
               </a:rPr>
-              <a:t>섹션 상세</a:t>
+              <a:t>적정 가격</a:t>
             </a:r>
             <a:endParaRPr lang="en-US" sz="2300" dirty="0"/>
           </a:p>
@@ -7996,23 +10476,34 @@
         </p:nvSpPr>
         <p:spPr>
           <a:xfrm>
-            <a:off x="566928" y="1517904"/>
-            <a:ext cx="6492240" cy="274320"/>
-          </a:xfrm>
-          <a:prstGeom prst="rect">
-            <a:avLst/>
-          </a:prstGeom>
-          <a:noFill/>
-          <a:ln/>
-        </p:spPr>
-        <p:txBody>
-          <a:bodyPr wrap="square" rtlCol="0" anchor="ctr"/>
+            <a:off x="566928" y="1371600"/>
+            <a:ext cx="6858000" cy="237744"/>
+          </a:xfrm>
+          <a:prstGeom prst="rect">
+            <a:avLst/>
+          </a:prstGeom>
+          <a:noFill/>
+          <a:ln/>
+        </p:spPr>
+        <p:txBody>
+          <a:bodyPr wrap="square" lIns="0" tIns="0" rIns="0" bIns="0" rtlCol="0" anchor="ctr"/>
           <a:lstStyle/>
           <a:p>
             <a:pPr indent="0" marL="0">
               <a:buNone/>
             </a:pPr>
-            <a:endParaRPr lang="en-US" sz="1400" dirty="0"/>
+            <a:r>
+              <a:rPr lang="en-US" sz="1100" b="1" dirty="0">
+                <a:solidFill>
+                  <a:srgbClr val="10161F"/>
+                </a:solidFill>
+                <a:latin typeface="Pretendard" pitchFamily="34" charset="0"/>
+                <a:ea typeface="Pretendard" pitchFamily="34" charset="-122"/>
+                <a:cs typeface="Pretendard" pitchFamily="34" charset="-120"/>
+              </a:rPr>
+              <a:t>건축물 개요 및 물리 스펙</a:t>
+            </a:r>
+            <a:endParaRPr lang="en-US" sz="1100" dirty="0"/>
           </a:p>
         </p:txBody>
       </p:sp>
@@ -8024,29 +10515,220 @@
         </p:nvSpPr>
         <p:spPr>
           <a:xfrm>
-            <a:off x="566928" y="1874520"/>
-            <a:ext cx="6492240" cy="182880"/>
-          </a:xfrm>
-          <a:prstGeom prst="rect">
-            <a:avLst/>
-          </a:prstGeom>
-          <a:noFill/>
-          <a:ln/>
-        </p:spPr>
-        <p:txBody>
-          <a:bodyPr wrap="square" rtlCol="0" anchor="ctr"/>
+            <a:off x="566928" y="1645920"/>
+            <a:ext cx="2606040" cy="438912"/>
+          </a:xfrm>
+          <a:prstGeom prst="rect">
+            <a:avLst/>
+          </a:prstGeom>
+          <a:noFill/>
+          <a:ln/>
+        </p:spPr>
+        <p:txBody>
+          <a:bodyPr wrap="square" lIns="0" tIns="0" rIns="0" bIns="0" rtlCol="0" anchor="ctr"/>
           <a:lstStyle/>
           <a:p>
             <a:pPr indent="0" marL="0">
-              <a:buNone/>
-            </a:pPr>
-            <a:endParaRPr lang="en-US" sz="900" dirty="0"/>
+              <a:lnSpc>
+                <a:spcPct val="120000"/>
+              </a:lnSpc>
+              <a:buNone/>
+            </a:pPr>
+            <a:r>
+              <a:rPr lang="en-US" sz="1350" dirty="0">
+                <a:solidFill>
+                  <a:srgbClr val="718096"/>
+                </a:solidFill>
+                <a:latin typeface="Pretendard" pitchFamily="34" charset="0"/>
+                <a:ea typeface="Pretendard" pitchFamily="34" charset="-122"/>
+                <a:cs typeface="Pretendard" pitchFamily="34" charset="-120"/>
+              </a:rPr>
+              <a:t>{"ok"</a:t>
+            </a:r>
+            <a:endParaRPr lang="en-US" sz="1350" dirty="0"/>
           </a:p>
         </p:txBody>
       </p:sp>
       <p:sp>
         <p:nvSpPr>
           <p:cNvPr id="8" name="Text 6"/>
+          <p:cNvSpPr/>
+          <p:nvPr/>
+        </p:nvSpPr>
+        <p:spPr>
+          <a:xfrm>
+            <a:off x="3172968" y="1645920"/>
+            <a:ext cx="4251960" cy="438912"/>
+          </a:xfrm>
+          <a:prstGeom prst="rect">
+            <a:avLst/>
+          </a:prstGeom>
+          <a:noFill/>
+          <a:ln/>
+        </p:spPr>
+        <p:txBody>
+          <a:bodyPr wrap="square" lIns="0" tIns="0" rIns="0" bIns="0" rtlCol="0" anchor="ctr"/>
+          <a:lstStyle/>
+          <a:p>
+            <a:pPr indent="0" marL="0">
+              <a:lnSpc>
+                <a:spcPct val="120000"/>
+              </a:lnSpc>
+              <a:buNone/>
+            </a:pPr>
+            <a:r>
+              <a:rPr lang="en-US" sz="1350" b="1" dirty="0">
+                <a:solidFill>
+                  <a:srgbClr val="10161F"/>
+                </a:solidFill>
+                <a:latin typeface="Pretendard" pitchFamily="34" charset="0"/>
+                <a:ea typeface="Pretendard" pitchFamily="34" charset="-122"/>
+                <a:cs typeface="Pretendard" pitchFamily="34" charset="-120"/>
+              </a:rPr>
+              <a:t>true,"mocked":true,"extractedFields":{"area_signal":"역삼","asset_type":"건물명 비공개","price_band":"300억","size_signal":"3000평(약 9917.4㎡)"},"extractedFacts":{"region":"역삼","exactAddressCandidate":"역삼동 742-1","assetType":"건물명 비공개","priceText":"300억","sizeText":"3000평(약 9917.4㎡)","currentUse":"오피스","currentUseSignal":"근린생활시설","leaseSignal":"임대중","vacancySignal":"공실없음","tenantNames":"쿠팡","네이버","unitRentTexts":"301호: 1500만","sellerMotivationText":"자산 효율화","brokerNotes":"역세권 도보 3분 이내 매물"},"detectedSensitiveFields":"exact_address","tenant_name","ambiguousFields":,"warnings":,"areaSignal":"역삼","assetType":"건물명 비공개","priceBand":"300억","sizeSignal":"3000평(약 9917.4㎡)","dealType":"매각","buildingName":"역삼 건물명 비공개","exactAddress":"역삼동 742-1","totalFloorArea":9917.3,"buildYear":2015,"currentUseSignal":"근린생활시설","vacancySignal":"공실 없음","fitSummary":"역세권 도보 3분 이내 근생 빌딩으로 시행/사옥 매입에 최적화","cautionSummary":"주요 임차인 만기 조율 필요","hiddenFields":"exact_address","seller_motivation","confidence":{"areaSignal":"confirmed","assetType":"confirmed","priceBand":"ai_hypothesis","fitSummary":"ai_hypothesis"},"missingData":"sizeSignal","boundaryNote":"본 자료는 실거래 통계 기반 참고치입니다.","buyerType":"법인 사옥형","budgetRange":{"min":50,"max":80,"display":"50억~80억"},"preferredRegions":"강남","성수","assetTypes":"건물명 비공개","사옥용","purchasePurpose":"사옥용 매입","mustHave":"역세권 도보 3분 이내","주차","niceToHave":"테라스","루프탑","riskTolerance":"medium","financingNote":"자본금 50% 준비","missingQuestions":"구체적인 입주 시기가 언제인가요?","선호하는 수익률이 있나요?","privacyNotes":"연락처 비공개","fitReasons":"매수자 예산(50-80억)에 부합하는 매물입니다.","요청하신 성수/강남 권역에 해당합니다.","cautionReasons":"요청한 용도와 달리 명도 협의가 다소 필요합니다.","recommendedNextAction":"현장 답사 제안","kakaoMessage":"안녕하세요! 요청하신 조건에 부합하는 추천 매물이 있어 안내해 드립니다. 확인해보시고 피드백 부탁드립니다.","title":"강남 역삼역 역세권 도보 3분 이내 오피스 사옥용 빌딩 매각","shortSummary":"역삼역 도보 5분 거리의 준신축급 대형 건물명 비공개입니다.","dealPoints":"역세권 도보 3분 이내","사옥 최적","cautionPoints":"명도 조율 필요","hiddenInfoNotice":"보증금 및 지번은 인가 후 확인 가능","gateMessage":"G1 등급 등록이 필요합니다.","kakaoText":"강남 역삼역 오피스 빌딩 매각 안내입니다.","exactUnitCandidate":"101호","floor":"1층","areaSqmText":"150㎡","spaceType":"office","depositText":"5000만","monthlyRentText":"400만","maintenanceFeeText":"50만","availableFromText":"즉시입주","leaseTermMonthsText":"24","incentivesText":"렌트프리(무상임대) 2개월","restrictions":,"landlordIdentity":"김성수","currentTenant":"스타트업","vacancyReason":"이전 확장","rentNegotiation":"협의 가능","region":"성수동","areaSqm":150,"deposit":5000,"monthlyRent":400,"maintenanceFee":50,"availableFrom":"즉시입주","leaseTermMonths":24,"incentives":{"렌트프리(무상임대)(무상임대)Months":2,"interiorSupport":"일부 인테리어 지원","freeRentDetail":"렌트프리(무상임대) 2개월 지원"},"shortSummaryLease":"성수역 도보 5분 거리 1층 리테일 상가 매물입니다."}</a:t>
+            </a:r>
+            <a:endParaRPr lang="en-US" sz="1350" dirty="0"/>
+          </a:p>
+        </p:txBody>
+      </p:sp>
+      <p:sp>
+        <p:nvSpPr>
+          <p:cNvPr id="9" name="Shape 7"/>
+          <p:cNvSpPr/>
+          <p:nvPr/>
+        </p:nvSpPr>
+        <p:spPr>
+          <a:xfrm>
+            <a:off x="7604608" y="1371600"/>
+            <a:ext cx="0" cy="4754880"/>
+          </a:xfrm>
+          <a:prstGeom prst="line">
+            <a:avLst/>
+          </a:prstGeom>
+          <a:noFill/>
+          <a:ln w="8890">
+            <a:solidFill>
+              <a:srgbClr val="B98A2E"/>
+            </a:solidFill>
+            <a:prstDash val="solid"/>
+          </a:ln>
+        </p:spPr>
+      </p:sp>
+      <p:sp>
+        <p:nvSpPr>
+          <p:cNvPr id="10" name="Shape 8"/>
+          <p:cNvSpPr/>
+          <p:nvPr/>
+        </p:nvSpPr>
+        <p:spPr>
+          <a:xfrm>
+            <a:off x="7784287" y="1645920"/>
+            <a:ext cx="3840480" cy="2103120"/>
+          </a:xfrm>
+          <a:prstGeom prst="roundRect">
+            <a:avLst>
+              <a:gd name="adj" fmla="val 2609"/>
+            </a:avLst>
+          </a:prstGeom>
+          <a:solidFill>
+            <a:srgbClr val="F3EBDA"/>
+          </a:solidFill>
+          <a:ln/>
+        </p:spPr>
+      </p:sp>
+      <p:sp>
+        <p:nvSpPr>
+          <p:cNvPr id="11" name="Shape 9"/>
+          <p:cNvSpPr/>
+          <p:nvPr/>
+        </p:nvSpPr>
+        <p:spPr>
+          <a:xfrm>
+            <a:off x="7784287" y="1700784"/>
+            <a:ext cx="36576" cy="1993392"/>
+          </a:xfrm>
+          <a:prstGeom prst="rect">
+            <a:avLst/>
+          </a:prstGeom>
+          <a:solidFill>
+            <a:srgbClr val="977024"/>
+          </a:solidFill>
+          <a:ln/>
+        </p:spPr>
+      </p:sp>
+      <p:sp>
+        <p:nvSpPr>
+          <p:cNvPr id="12" name="Text 10"/>
+          <p:cNvSpPr/>
+          <p:nvPr/>
+        </p:nvSpPr>
+        <p:spPr>
+          <a:xfrm>
+            <a:off x="7967167" y="1755648"/>
+            <a:ext cx="3511296" cy="201168"/>
+          </a:xfrm>
+          <a:prstGeom prst="rect">
+            <a:avLst/>
+          </a:prstGeom>
+          <a:noFill/>
+          <a:ln/>
+        </p:spPr>
+        <p:txBody>
+          <a:bodyPr wrap="square" lIns="0" tIns="0" rIns="0" bIns="0" rtlCol="0" anchor="ctr"/>
+          <a:lstStyle/>
+          <a:p>
+            <a:pPr indent="0" marL="0">
+              <a:buNone/>
+            </a:pPr>
+            <a:endParaRPr lang="en-US" sz="1050" dirty="0"/>
+          </a:p>
+        </p:txBody>
+      </p:sp>
+      <p:sp>
+        <p:nvSpPr>
+          <p:cNvPr id="13" name="Text 11"/>
+          <p:cNvSpPr/>
+          <p:nvPr/>
+        </p:nvSpPr>
+        <p:spPr>
+          <a:xfrm>
+            <a:off x="7967167" y="1975104"/>
+            <a:ext cx="3511296" cy="1700784"/>
+          </a:xfrm>
+          <a:prstGeom prst="rect">
+            <a:avLst/>
+          </a:prstGeom>
+          <a:noFill/>
+          <a:ln/>
+        </p:spPr>
+        <p:txBody>
+          <a:bodyPr wrap="square" lIns="0" tIns="0" rIns="0" bIns="0" rtlCol="0" anchor="t"/>
+          <a:lstStyle/>
+          <a:p>
+            <a:pPr indent="0" marL="0">
+              <a:lnSpc>
+                <a:spcPct val="120000"/>
+              </a:lnSpc>
+              <a:buNone/>
+            </a:pPr>
+            <a:r>
+              <a:rPr lang="en-US" sz="930" dirty="0">
+                <a:solidFill>
+                  <a:srgbClr val="10161F"/>
+                </a:solidFill>
+                <a:latin typeface="Pretendard" pitchFamily="34" charset="0"/>
+                <a:ea typeface="Pretendard" pitchFamily="34" charset="-122"/>
+                <a:cs typeface="Pretendard" pitchFamily="34" charset="-120"/>
+              </a:rPr>
+              <a:t>{"ok":true,"mocked":true,"extractedFields":{"area_signal":"역삼","asset_type":"[건물명 비공개]","price_band":"300억","size_signal</a:t>
+            </a:r>
+            <a:endParaRPr lang="en-US" sz="930" dirty="0"/>
+          </a:p>
+        </p:txBody>
+      </p:sp>
+      <p:sp>
+        <p:nvSpPr>
+          <p:cNvPr id="14" name="Text 12"/>
           <p:cNvSpPr/>
           <p:nvPr/>
         </p:nvSpPr>
@@ -8085,7 +10767,7 @@
       </p:sp>
       <p:sp>
         <p:nvSpPr>
-          <p:cNvPr id="9" name="Text 7"/>
+          <p:cNvPr id="15" name="Text 13"/>
           <p:cNvSpPr/>
           <p:nvPr/>
         </p:nvSpPr>
@@ -8116,7 +10798,7 @@
                 <a:ea typeface="Arial" pitchFamily="34" charset="-122"/>
                 <a:cs typeface="Arial" pitchFamily="34" charset="-120"/>
               </a:rPr>
-              <a:t>8</a:t>
+              <a:t>7</a:t>
             </a:r>
             <a:endParaRPr lang="en-US" sz="900" dirty="0"/>
           </a:p>
@@ -8207,7 +10889,7 @@
                 <a:ea typeface="Arial" pitchFamily="34" charset="-122"/>
                 <a:cs typeface="Arial" pitchFamily="34" charset="-120"/>
               </a:rPr>
-              <a:t>09</a:t>
+              <a:t>08</a:t>
             </a:r>
             <a:endParaRPr lang="en-US" sz="1300" dirty="0"/>
           </a:p>
@@ -8246,7 +10928,7 @@
                 <a:ea typeface="Arial" pitchFamily="34" charset="-122"/>
                 <a:cs typeface="Arial" pitchFamily="34" charset="-120"/>
               </a:rPr>
-              <a:t>Process</a:t>
+              <a:t>Capital</a:t>
             </a:r>
             <a:endParaRPr lang="en-US" sz="950" dirty="0"/>
           </a:p>
@@ -8285,7 +10967,7 @@
                 <a:ea typeface="Pretendard" pitchFamily="34" charset="-122"/>
                 <a:cs typeface="Pretendard" pitchFamily="34" charset="-120"/>
               </a:rPr>
-              <a:t>검토 후 다음 단계는 무엇인가</a:t>
+              <a:t>투자 및 자본 조달 구조 분석</a:t>
             </a:r>
             <a:endParaRPr lang="en-US" sz="2300" dirty="0"/>
           </a:p>
@@ -8299,12 +10981,12 @@
         </p:nvSpPr>
         <p:spPr>
           <a:xfrm>
-            <a:off x="566928" y="1572768"/>
-            <a:ext cx="2490140" cy="3200400"/>
+            <a:off x="566928" y="1417320"/>
+            <a:ext cx="5391760" cy="4389120"/>
           </a:xfrm>
           <a:prstGeom prst="roundRect">
             <a:avLst>
-              <a:gd name="adj" fmla="val 2203"/>
+              <a:gd name="adj" fmla="val 1250"/>
             </a:avLst>
           </a:prstGeom>
           <a:solidFill>
@@ -8320,23 +11002,42 @@
       </p:sp>
       <p:sp>
         <p:nvSpPr>
-          <p:cNvPr id="7" name="Shape 5"/>
-          <p:cNvSpPr/>
-          <p:nvPr/>
-        </p:nvSpPr>
-        <p:spPr>
-          <a:xfrm>
-            <a:off x="786384" y="1792224"/>
-            <a:ext cx="438912" cy="438912"/>
-          </a:xfrm>
-          <a:prstGeom prst="ellipse">
-            <a:avLst/>
-          </a:prstGeom>
-          <a:solidFill>
-            <a:srgbClr val="B98A2E"/>
-          </a:solidFill>
-          <a:ln/>
-        </p:spPr>
+          <p:cNvPr id="7" name="Text 5"/>
+          <p:cNvSpPr/>
+          <p:nvPr/>
+        </p:nvSpPr>
+        <p:spPr>
+          <a:xfrm>
+            <a:off x="795528" y="1618488"/>
+            <a:ext cx="4934560" cy="320040"/>
+          </a:xfrm>
+          <a:prstGeom prst="rect">
+            <a:avLst/>
+          </a:prstGeom>
+          <a:noFill/>
+          <a:ln/>
+        </p:spPr>
+        <p:txBody>
+          <a:bodyPr wrap="square" lIns="0" tIns="0" rIns="0" bIns="0" rtlCol="0" anchor="ctr"/>
+          <a:lstStyle/>
+          <a:p>
+            <a:pPr indent="0" marL="0">
+              <a:buNone/>
+            </a:pPr>
+            <a:r>
+              <a:rPr lang="en-US" sz="1350" b="1" dirty="0">
+                <a:solidFill>
+                  <a:srgbClr val="977024"/>
+                </a:solidFill>
+                <a:latin typeface="Pretendard" pitchFamily="34" charset="0"/>
+                <a:ea typeface="Pretendard" pitchFamily="34" charset="-122"/>
+                <a:cs typeface="Pretendard" pitchFamily="34" charset="-120"/>
+              </a:rPr>
+              <a:t>1. 총취득원가 및 자기자본 소요</a:t>
+            </a:r>
+            <a:endParaRPr lang="en-US" sz="1350" dirty="0"/>
+          </a:p>
+        </p:txBody>
       </p:sp>
       <p:sp>
         <p:nvSpPr>
@@ -8346,34 +11047,37 @@
         </p:nvSpPr>
         <p:spPr>
           <a:xfrm>
-            <a:off x="786384" y="1792224"/>
-            <a:ext cx="438912" cy="438912"/>
-          </a:xfrm>
-          <a:prstGeom prst="rect">
-            <a:avLst/>
-          </a:prstGeom>
-          <a:noFill/>
-          <a:ln/>
-        </p:spPr>
-        <p:txBody>
-          <a:bodyPr wrap="square" lIns="0" tIns="0" rIns="0" bIns="0" rtlCol="0" anchor="ctr"/>
-          <a:lstStyle/>
-          <a:p>
-            <a:pPr algn="ctr" indent="0" marL="0">
-              <a:buNone/>
-            </a:pPr>
-            <a:r>
-              <a:rPr lang="en-US" sz="1400" b="1" dirty="0">
-                <a:solidFill>
-                  <a:srgbClr val="FFFFFF"/>
-                </a:solidFill>
-                <a:latin typeface="Arial" pitchFamily="34" charset="0"/>
-                <a:ea typeface="Arial" pitchFamily="34" charset="-122"/>
-                <a:cs typeface="Arial" pitchFamily="34" charset="-120"/>
-              </a:rPr>
-              <a:t>01</a:t>
-            </a:r>
-            <a:endParaRPr lang="en-US" sz="1400" dirty="0"/>
+            <a:off x="795528" y="2011680"/>
+            <a:ext cx="1875133" cy="475488"/>
+          </a:xfrm>
+          <a:prstGeom prst="rect">
+            <a:avLst/>
+          </a:prstGeom>
+          <a:noFill/>
+          <a:ln/>
+        </p:spPr>
+        <p:txBody>
+          <a:bodyPr wrap="square" lIns="0" tIns="0" rIns="0" bIns="0" rtlCol="0" anchor="ctr"/>
+          <a:lstStyle/>
+          <a:p>
+            <a:pPr indent="0" marL="0">
+              <a:lnSpc>
+                <a:spcPct val="120000"/>
+              </a:lnSpc>
+              <a:buNone/>
+            </a:pPr>
+            <a:r>
+              <a:rPr lang="en-US" sz="1150" dirty="0">
+                <a:solidFill>
+                  <a:srgbClr val="718096"/>
+                </a:solidFill>
+                <a:latin typeface="Pretendard" pitchFamily="34" charset="0"/>
+                <a:ea typeface="Pretendard" pitchFamily="34" charset="-122"/>
+                <a:cs typeface="Pretendard" pitchFamily="34" charset="-120"/>
+              </a:rPr>
+              <a:t>매매 희망가 (A)</a:t>
+            </a:r>
+            <a:endParaRPr lang="en-US" sz="1150" dirty="0"/>
           </a:p>
         </p:txBody>
       </p:sp>
@@ -8385,24 +11089,27 @@
         </p:nvSpPr>
         <p:spPr>
           <a:xfrm>
-            <a:off x="786384" y="2304288"/>
-            <a:ext cx="2051228" cy="365760"/>
-          </a:xfrm>
-          <a:prstGeom prst="rect">
-            <a:avLst/>
-          </a:prstGeom>
-          <a:noFill/>
-          <a:ln/>
-        </p:spPr>
-        <p:txBody>
-          <a:bodyPr wrap="square" rtlCol="0" anchor="ctr"/>
+            <a:off x="2670661" y="2011680"/>
+            <a:ext cx="3059427" cy="475488"/>
+          </a:xfrm>
+          <a:prstGeom prst="rect">
+            <a:avLst/>
+          </a:prstGeom>
+          <a:noFill/>
+          <a:ln/>
+        </p:spPr>
+        <p:txBody>
+          <a:bodyPr wrap="square" lIns="0" tIns="0" rIns="0" bIns="0" rtlCol="0" anchor="ctr"/>
           <a:lstStyle/>
           <a:p>
             <a:pPr indent="0" marL="0">
-              <a:buNone/>
-            </a:pPr>
-            <a:r>
-              <a:rPr lang="en-US" sz="1600" b="1" dirty="0">
+              <a:lnSpc>
+                <a:spcPct val="120000"/>
+              </a:lnSpc>
+              <a:buNone/>
+            </a:pPr>
+            <a:r>
+              <a:rPr lang="en-US" sz="1150" b="1" dirty="0">
                 <a:solidFill>
                   <a:srgbClr val="10161F"/>
                 </a:solidFill>
@@ -8410,71 +11117,30 @@
                 <a:ea typeface="Pretendard" pitchFamily="34" charset="-122"/>
                 <a:cs typeface="Pretendard" pitchFamily="34" charset="-120"/>
               </a:rPr>
-              <a:t>1단계</a:t>
-            </a:r>
-            <a:endParaRPr lang="en-US" sz="1600" dirty="0"/>
-          </a:p>
-        </p:txBody>
-      </p:sp>
-      <p:sp>
-        <p:nvSpPr>
-          <p:cNvPr id="10" name="Text 8"/>
-          <p:cNvSpPr/>
-          <p:nvPr/>
-        </p:nvSpPr>
-        <p:spPr>
-          <a:xfrm>
-            <a:off x="786384" y="2761488"/>
-            <a:ext cx="2051228" cy="1828800"/>
-          </a:xfrm>
-          <a:prstGeom prst="rect">
-            <a:avLst/>
-          </a:prstGeom>
-          <a:noFill/>
-          <a:ln/>
-        </p:spPr>
-        <p:txBody>
-          <a:bodyPr wrap="square" rtlCol="0" anchor="t"/>
-          <a:lstStyle/>
-          <a:p>
-            <a:pPr indent="0" marL="0">
-              <a:buNone/>
-            </a:pPr>
-            <a:r>
-              <a:rPr lang="en-US" sz="1100" dirty="0">
-                <a:solidFill>
-                  <a:srgbClr val="10161F"/>
-                </a:solidFill>
-                <a:latin typeface="Pretendard" pitchFamily="34" charset="0"/>
-                <a:ea typeface="Pretendard" pitchFamily="34" charset="-122"/>
-                <a:cs typeface="Pretendard" pitchFamily="34" charset="-120"/>
-              </a:rPr>
-              <a:t>초기 관심 표명 → 담당자 연락</a:t>
-            </a:r>
-            <a:endParaRPr lang="en-US" sz="1100" dirty="0"/>
-          </a:p>
-        </p:txBody>
-      </p:sp>
-      <p:sp>
-        <p:nvSpPr>
-          <p:cNvPr id="11" name="Shape 9"/>
-          <p:cNvSpPr/>
-          <p:nvPr/>
-        </p:nvSpPr>
-        <p:spPr>
-          <a:xfrm>
-            <a:off x="3148508" y="3035808"/>
-            <a:ext cx="182880" cy="274320"/>
-          </a:xfrm>
-          <a:prstGeom prst="rightArrow">
-            <a:avLst/>
-          </a:prstGeom>
-          <a:solidFill>
-            <a:srgbClr val="CBD5E0"/>
-          </a:solidFill>
-          <a:ln w="6350">
+              <a:t>115.0억 원</a:t>
+            </a:r>
+            <a:endParaRPr lang="en-US" sz="1150" dirty="0"/>
+          </a:p>
+        </p:txBody>
+      </p:sp>
+      <p:sp>
+        <p:nvSpPr>
+          <p:cNvPr id="10" name="Shape 8"/>
+          <p:cNvSpPr/>
+          <p:nvPr/>
+        </p:nvSpPr>
+        <p:spPr>
+          <a:xfrm>
+            <a:off x="795528" y="2487168"/>
+            <a:ext cx="4934560" cy="0"/>
+          </a:xfrm>
+          <a:prstGeom prst="line">
+            <a:avLst/>
+          </a:prstGeom>
+          <a:noFill/>
+          <a:ln w="3810">
             <a:solidFill>
-              <a:srgbClr val="718096"/>
+              <a:srgbClr val="CBD5E0"/>
             </a:solidFill>
             <a:prstDash val="solid"/>
           </a:ln>
@@ -8482,18 +11148,637 @@
       </p:sp>
       <p:sp>
         <p:nvSpPr>
-          <p:cNvPr id="12" name="Shape 10"/>
-          <p:cNvSpPr/>
-          <p:nvPr/>
-        </p:nvSpPr>
-        <p:spPr>
-          <a:xfrm>
-            <a:off x="3422828" y="1572768"/>
-            <a:ext cx="2490140" cy="3200400"/>
+          <p:cNvPr id="11" name="Text 9"/>
+          <p:cNvSpPr/>
+          <p:nvPr/>
+        </p:nvSpPr>
+        <p:spPr>
+          <a:xfrm>
+            <a:off x="795528" y="2487168"/>
+            <a:ext cx="1875133" cy="475488"/>
+          </a:xfrm>
+          <a:prstGeom prst="rect">
+            <a:avLst/>
+          </a:prstGeom>
+          <a:noFill/>
+          <a:ln/>
+        </p:spPr>
+        <p:txBody>
+          <a:bodyPr wrap="square" lIns="0" tIns="0" rIns="0" bIns="0" rtlCol="0" anchor="ctr"/>
+          <a:lstStyle/>
+          <a:p>
+            <a:pPr indent="0" marL="0">
+              <a:lnSpc>
+                <a:spcPct val="120000"/>
+              </a:lnSpc>
+              <a:buNone/>
+            </a:pPr>
+            <a:r>
+              <a:rPr lang="en-US" sz="1150" dirty="0">
+                <a:solidFill>
+                  <a:srgbClr val="718096"/>
+                </a:solidFill>
+                <a:latin typeface="Pretendard" pitchFamily="34" charset="0"/>
+                <a:ea typeface="Pretendard" pitchFamily="34" charset="-122"/>
+                <a:cs typeface="Pretendard" pitchFamily="34" charset="-120"/>
+              </a:rPr>
+              <a:t>취득세 (4.6% 법정)</a:t>
+            </a:r>
+            <a:endParaRPr lang="en-US" sz="1150" dirty="0"/>
+          </a:p>
+        </p:txBody>
+      </p:sp>
+      <p:sp>
+        <p:nvSpPr>
+          <p:cNvPr id="12" name="Text 10"/>
+          <p:cNvSpPr/>
+          <p:nvPr/>
+        </p:nvSpPr>
+        <p:spPr>
+          <a:xfrm>
+            <a:off x="2670661" y="2487168"/>
+            <a:ext cx="3059427" cy="475488"/>
+          </a:xfrm>
+          <a:prstGeom prst="rect">
+            <a:avLst/>
+          </a:prstGeom>
+          <a:noFill/>
+          <a:ln/>
+        </p:spPr>
+        <p:txBody>
+          <a:bodyPr wrap="square" lIns="0" tIns="0" rIns="0" bIns="0" rtlCol="0" anchor="ctr"/>
+          <a:lstStyle/>
+          <a:p>
+            <a:pPr indent="0" marL="0">
+              <a:lnSpc>
+                <a:spcPct val="120000"/>
+              </a:lnSpc>
+              <a:buNone/>
+            </a:pPr>
+            <a:r>
+              <a:rPr lang="en-US" sz="1150" b="1" dirty="0">
+                <a:solidFill>
+                  <a:srgbClr val="10161F"/>
+                </a:solidFill>
+                <a:latin typeface="Pretendard" pitchFamily="34" charset="0"/>
+                <a:ea typeface="Pretendard" pitchFamily="34" charset="-122"/>
+                <a:cs typeface="Pretendard" pitchFamily="34" charset="-120"/>
+              </a:rPr>
+              <a:t>5.29억 원</a:t>
+            </a:r>
+            <a:endParaRPr lang="en-US" sz="1150" dirty="0"/>
+          </a:p>
+        </p:txBody>
+      </p:sp>
+      <p:sp>
+        <p:nvSpPr>
+          <p:cNvPr id="13" name="Shape 11"/>
+          <p:cNvSpPr/>
+          <p:nvPr/>
+        </p:nvSpPr>
+        <p:spPr>
+          <a:xfrm>
+            <a:off x="795528" y="2962656"/>
+            <a:ext cx="4934560" cy="0"/>
+          </a:xfrm>
+          <a:prstGeom prst="line">
+            <a:avLst/>
+          </a:prstGeom>
+          <a:noFill/>
+          <a:ln w="3810">
+            <a:solidFill>
+              <a:srgbClr val="CBD5E0"/>
+            </a:solidFill>
+            <a:prstDash val="solid"/>
+          </a:ln>
+        </p:spPr>
+      </p:sp>
+      <p:sp>
+        <p:nvSpPr>
+          <p:cNvPr id="14" name="Text 12"/>
+          <p:cNvSpPr/>
+          <p:nvPr/>
+        </p:nvSpPr>
+        <p:spPr>
+          <a:xfrm>
+            <a:off x="795528" y="2962656"/>
+            <a:ext cx="1875133" cy="475488"/>
+          </a:xfrm>
+          <a:prstGeom prst="rect">
+            <a:avLst/>
+          </a:prstGeom>
+          <a:noFill/>
+          <a:ln/>
+        </p:spPr>
+        <p:txBody>
+          <a:bodyPr wrap="square" lIns="0" tIns="0" rIns="0" bIns="0" rtlCol="0" anchor="ctr"/>
+          <a:lstStyle/>
+          <a:p>
+            <a:pPr indent="0" marL="0">
+              <a:lnSpc>
+                <a:spcPct val="120000"/>
+              </a:lnSpc>
+              <a:buNone/>
+            </a:pPr>
+            <a:r>
+              <a:rPr lang="en-US" sz="1150" dirty="0">
+                <a:solidFill>
+                  <a:srgbClr val="718096"/>
+                </a:solidFill>
+                <a:latin typeface="Pretendard" pitchFamily="34" charset="0"/>
+                <a:ea typeface="Pretendard" pitchFamily="34" charset="-122"/>
+                <a:cs typeface="Pretendard" pitchFamily="34" charset="-120"/>
+              </a:rPr>
+              <a:t>중개보수 (0.9% 한도)</a:t>
+            </a:r>
+            <a:endParaRPr lang="en-US" sz="1150" dirty="0"/>
+          </a:p>
+        </p:txBody>
+      </p:sp>
+      <p:sp>
+        <p:nvSpPr>
+          <p:cNvPr id="15" name="Text 13"/>
+          <p:cNvSpPr/>
+          <p:nvPr/>
+        </p:nvSpPr>
+        <p:spPr>
+          <a:xfrm>
+            <a:off x="2670661" y="2962656"/>
+            <a:ext cx="3059427" cy="475488"/>
+          </a:xfrm>
+          <a:prstGeom prst="rect">
+            <a:avLst/>
+          </a:prstGeom>
+          <a:noFill/>
+          <a:ln/>
+        </p:spPr>
+        <p:txBody>
+          <a:bodyPr wrap="square" lIns="0" tIns="0" rIns="0" bIns="0" rtlCol="0" anchor="ctr"/>
+          <a:lstStyle/>
+          <a:p>
+            <a:pPr indent="0" marL="0">
+              <a:lnSpc>
+                <a:spcPct val="120000"/>
+              </a:lnSpc>
+              <a:buNone/>
+            </a:pPr>
+            <a:r>
+              <a:rPr lang="en-US" sz="1150" b="1" dirty="0">
+                <a:solidFill>
+                  <a:srgbClr val="10161F"/>
+                </a:solidFill>
+                <a:latin typeface="Pretendard" pitchFamily="34" charset="0"/>
+                <a:ea typeface="Pretendard" pitchFamily="34" charset="-122"/>
+                <a:cs typeface="Pretendard" pitchFamily="34" charset="-120"/>
+              </a:rPr>
+              <a:t>1.03억 원</a:t>
+            </a:r>
+            <a:endParaRPr lang="en-US" sz="1150" dirty="0"/>
+          </a:p>
+        </p:txBody>
+      </p:sp>
+      <p:sp>
+        <p:nvSpPr>
+          <p:cNvPr id="16" name="Shape 14"/>
+          <p:cNvSpPr/>
+          <p:nvPr/>
+        </p:nvSpPr>
+        <p:spPr>
+          <a:xfrm>
+            <a:off x="795528" y="3438144"/>
+            <a:ext cx="4934560" cy="0"/>
+          </a:xfrm>
+          <a:prstGeom prst="line">
+            <a:avLst/>
+          </a:prstGeom>
+          <a:noFill/>
+          <a:ln w="3810">
+            <a:solidFill>
+              <a:srgbClr val="CBD5E0"/>
+            </a:solidFill>
+            <a:prstDash val="solid"/>
+          </a:ln>
+        </p:spPr>
+      </p:sp>
+      <p:sp>
+        <p:nvSpPr>
+          <p:cNvPr id="17" name="Text 15"/>
+          <p:cNvSpPr/>
+          <p:nvPr/>
+        </p:nvSpPr>
+        <p:spPr>
+          <a:xfrm>
+            <a:off x="795528" y="3438144"/>
+            <a:ext cx="1875133" cy="475488"/>
+          </a:xfrm>
+          <a:prstGeom prst="rect">
+            <a:avLst/>
+          </a:prstGeom>
+          <a:noFill/>
+          <a:ln/>
+        </p:spPr>
+        <p:txBody>
+          <a:bodyPr wrap="square" lIns="0" tIns="0" rIns="0" bIns="0" rtlCol="0" anchor="ctr"/>
+          <a:lstStyle/>
+          <a:p>
+            <a:pPr indent="0" marL="0">
+              <a:lnSpc>
+                <a:spcPct val="120000"/>
+              </a:lnSpc>
+              <a:buNone/>
+            </a:pPr>
+            <a:r>
+              <a:rPr lang="en-US" sz="1150" dirty="0">
+                <a:solidFill>
+                  <a:srgbClr val="718096"/>
+                </a:solidFill>
+                <a:latin typeface="Pretendard" pitchFamily="34" charset="0"/>
+                <a:ea typeface="Pretendard" pitchFamily="34" charset="-122"/>
+                <a:cs typeface="Pretendard" pitchFamily="34" charset="-120"/>
+              </a:rPr>
+              <a:t>총취득원가 (A + 세/비용)</a:t>
+            </a:r>
+            <a:endParaRPr lang="en-US" sz="1150" dirty="0"/>
+          </a:p>
+        </p:txBody>
+      </p:sp>
+      <p:sp>
+        <p:nvSpPr>
+          <p:cNvPr id="18" name="Text 16"/>
+          <p:cNvSpPr/>
+          <p:nvPr/>
+        </p:nvSpPr>
+        <p:spPr>
+          <a:xfrm>
+            <a:off x="2670661" y="3438144"/>
+            <a:ext cx="3059427" cy="475488"/>
+          </a:xfrm>
+          <a:prstGeom prst="rect">
+            <a:avLst/>
+          </a:prstGeom>
+          <a:noFill/>
+          <a:ln/>
+        </p:spPr>
+        <p:txBody>
+          <a:bodyPr wrap="square" lIns="0" tIns="0" rIns="0" bIns="0" rtlCol="0" anchor="ctr"/>
+          <a:lstStyle/>
+          <a:p>
+            <a:pPr indent="0" marL="0">
+              <a:lnSpc>
+                <a:spcPct val="120000"/>
+              </a:lnSpc>
+              <a:buNone/>
+            </a:pPr>
+            <a:r>
+              <a:rPr lang="en-US" sz="1150" b="1" dirty="0">
+                <a:solidFill>
+                  <a:srgbClr val="10161F"/>
+                </a:solidFill>
+                <a:latin typeface="Pretendard" pitchFamily="34" charset="0"/>
+                <a:ea typeface="Pretendard" pitchFamily="34" charset="-122"/>
+                <a:cs typeface="Pretendard" pitchFamily="34" charset="-120"/>
+              </a:rPr>
+              <a:t>121.3억 원</a:t>
+            </a:r>
+            <a:endParaRPr lang="en-US" sz="1150" dirty="0"/>
+          </a:p>
+        </p:txBody>
+      </p:sp>
+      <p:sp>
+        <p:nvSpPr>
+          <p:cNvPr id="19" name="Shape 17"/>
+          <p:cNvSpPr/>
+          <p:nvPr/>
+        </p:nvSpPr>
+        <p:spPr>
+          <a:xfrm>
+            <a:off x="795528" y="3913632"/>
+            <a:ext cx="4934560" cy="0"/>
+          </a:xfrm>
+          <a:prstGeom prst="line">
+            <a:avLst/>
+          </a:prstGeom>
+          <a:noFill/>
+          <a:ln w="3810">
+            <a:solidFill>
+              <a:srgbClr val="CBD5E0"/>
+            </a:solidFill>
+            <a:prstDash val="solid"/>
+          </a:ln>
+        </p:spPr>
+      </p:sp>
+      <p:sp>
+        <p:nvSpPr>
+          <p:cNvPr id="20" name="Text 18"/>
+          <p:cNvSpPr/>
+          <p:nvPr/>
+        </p:nvSpPr>
+        <p:spPr>
+          <a:xfrm>
+            <a:off x="795528" y="3913632"/>
+            <a:ext cx="1875133" cy="475488"/>
+          </a:xfrm>
+          <a:prstGeom prst="rect">
+            <a:avLst/>
+          </a:prstGeom>
+          <a:noFill/>
+          <a:ln/>
+        </p:spPr>
+        <p:txBody>
+          <a:bodyPr wrap="square" lIns="0" tIns="0" rIns="0" bIns="0" rtlCol="0" anchor="ctr"/>
+          <a:lstStyle/>
+          <a:p>
+            <a:pPr indent="0" marL="0">
+              <a:lnSpc>
+                <a:spcPct val="120000"/>
+              </a:lnSpc>
+              <a:buNone/>
+            </a:pPr>
+            <a:r>
+              <a:rPr lang="en-US" sz="1150" dirty="0">
+                <a:solidFill>
+                  <a:srgbClr val="718096"/>
+                </a:solidFill>
+                <a:latin typeface="Pretendard" pitchFamily="34" charset="0"/>
+                <a:ea typeface="Pretendard" pitchFamily="34" charset="-122"/>
+                <a:cs typeface="Pretendard" pitchFamily="34" charset="-120"/>
+              </a:rPr>
+              <a:t>(-) 임대보증금 승계</a:t>
+            </a:r>
+            <a:endParaRPr lang="en-US" sz="1150" dirty="0"/>
+          </a:p>
+        </p:txBody>
+      </p:sp>
+      <p:sp>
+        <p:nvSpPr>
+          <p:cNvPr id="21" name="Text 19"/>
+          <p:cNvSpPr/>
+          <p:nvPr/>
+        </p:nvSpPr>
+        <p:spPr>
+          <a:xfrm>
+            <a:off x="2670661" y="3913632"/>
+            <a:ext cx="3059427" cy="475488"/>
+          </a:xfrm>
+          <a:prstGeom prst="rect">
+            <a:avLst/>
+          </a:prstGeom>
+          <a:noFill/>
+          <a:ln/>
+        </p:spPr>
+        <p:txBody>
+          <a:bodyPr wrap="square" lIns="0" tIns="0" rIns="0" bIns="0" rtlCol="0" anchor="ctr"/>
+          <a:lstStyle/>
+          <a:p>
+            <a:pPr indent="0" marL="0">
+              <a:lnSpc>
+                <a:spcPct val="120000"/>
+              </a:lnSpc>
+              <a:buNone/>
+            </a:pPr>
+            <a:r>
+              <a:rPr lang="en-US" sz="1150" b="1" dirty="0">
+                <a:solidFill>
+                  <a:srgbClr val="10161F"/>
+                </a:solidFill>
+                <a:latin typeface="Pretendard" pitchFamily="34" charset="0"/>
+                <a:ea typeface="Pretendard" pitchFamily="34" charset="-122"/>
+                <a:cs typeface="Pretendard" pitchFamily="34" charset="-120"/>
+              </a:rPr>
+              <a:t>5.8억 원</a:t>
+            </a:r>
+            <a:endParaRPr lang="en-US" sz="1150" dirty="0"/>
+          </a:p>
+        </p:txBody>
+      </p:sp>
+      <p:sp>
+        <p:nvSpPr>
+          <p:cNvPr id="22" name="Shape 20"/>
+          <p:cNvSpPr/>
+          <p:nvPr/>
+        </p:nvSpPr>
+        <p:spPr>
+          <a:xfrm>
+            <a:off x="795528" y="4389120"/>
+            <a:ext cx="4934560" cy="0"/>
+          </a:xfrm>
+          <a:prstGeom prst="line">
+            <a:avLst/>
+          </a:prstGeom>
+          <a:noFill/>
+          <a:ln w="3810">
+            <a:solidFill>
+              <a:srgbClr val="CBD5E0"/>
+            </a:solidFill>
+            <a:prstDash val="solid"/>
+          </a:ln>
+        </p:spPr>
+      </p:sp>
+      <p:sp>
+        <p:nvSpPr>
+          <p:cNvPr id="23" name="Text 21"/>
+          <p:cNvSpPr/>
+          <p:nvPr/>
+        </p:nvSpPr>
+        <p:spPr>
+          <a:xfrm>
+            <a:off x="795528" y="4389120"/>
+            <a:ext cx="1875133" cy="475488"/>
+          </a:xfrm>
+          <a:prstGeom prst="rect">
+            <a:avLst/>
+          </a:prstGeom>
+          <a:noFill/>
+          <a:ln/>
+        </p:spPr>
+        <p:txBody>
+          <a:bodyPr wrap="square" lIns="0" tIns="0" rIns="0" bIns="0" rtlCol="0" anchor="ctr"/>
+          <a:lstStyle/>
+          <a:p>
+            <a:pPr indent="0" marL="0">
+              <a:lnSpc>
+                <a:spcPct val="120000"/>
+              </a:lnSpc>
+              <a:buNone/>
+            </a:pPr>
+            <a:r>
+              <a:rPr lang="en-US" sz="1150" dirty="0">
+                <a:solidFill>
+                  <a:srgbClr val="718096"/>
+                </a:solidFill>
+                <a:latin typeface="Pretendard" pitchFamily="34" charset="0"/>
+                <a:ea typeface="Pretendard" pitchFamily="34" charset="-122"/>
+                <a:cs typeface="Pretendard" pitchFamily="34" charset="-120"/>
+              </a:rPr>
+              <a:t>(-) 담보대출 조달</a:t>
+            </a:r>
+            <a:endParaRPr lang="en-US" sz="1150" dirty="0"/>
+          </a:p>
+        </p:txBody>
+      </p:sp>
+      <p:sp>
+        <p:nvSpPr>
+          <p:cNvPr id="24" name="Text 22"/>
+          <p:cNvSpPr/>
+          <p:nvPr/>
+        </p:nvSpPr>
+        <p:spPr>
+          <a:xfrm>
+            <a:off x="2670661" y="4389120"/>
+            <a:ext cx="3059427" cy="475488"/>
+          </a:xfrm>
+          <a:prstGeom prst="rect">
+            <a:avLst/>
+          </a:prstGeom>
+          <a:noFill/>
+          <a:ln/>
+        </p:spPr>
+        <p:txBody>
+          <a:bodyPr wrap="square" lIns="0" tIns="0" rIns="0" bIns="0" rtlCol="0" anchor="ctr"/>
+          <a:lstStyle/>
+          <a:p>
+            <a:pPr indent="0" marL="0">
+              <a:lnSpc>
+                <a:spcPct val="120000"/>
+              </a:lnSpc>
+              <a:buNone/>
+            </a:pPr>
+            <a:r>
+              <a:rPr lang="en-US" sz="1150" b="1" dirty="0">
+                <a:solidFill>
+                  <a:srgbClr val="10161F"/>
+                </a:solidFill>
+                <a:latin typeface="Pretendard" pitchFamily="34" charset="0"/>
+                <a:ea typeface="Pretendard" pitchFamily="34" charset="-122"/>
+                <a:cs typeface="Pretendard" pitchFamily="34" charset="-120"/>
+              </a:rPr>
+              <a:t>57.5억 원</a:t>
+            </a:r>
+            <a:endParaRPr lang="en-US" sz="1150" dirty="0"/>
+          </a:p>
+        </p:txBody>
+      </p:sp>
+      <p:sp>
+        <p:nvSpPr>
+          <p:cNvPr id="25" name="Shape 23"/>
+          <p:cNvSpPr/>
+          <p:nvPr/>
+        </p:nvSpPr>
+        <p:spPr>
+          <a:xfrm>
+            <a:off x="795528" y="4864608"/>
+            <a:ext cx="4934560" cy="0"/>
+          </a:xfrm>
+          <a:prstGeom prst="line">
+            <a:avLst/>
+          </a:prstGeom>
+          <a:noFill/>
+          <a:ln w="3810">
+            <a:solidFill>
+              <a:srgbClr val="CBD5E0"/>
+            </a:solidFill>
+            <a:prstDash val="solid"/>
+          </a:ln>
+        </p:spPr>
+      </p:sp>
+      <p:sp>
+        <p:nvSpPr>
+          <p:cNvPr id="26" name="Text 24"/>
+          <p:cNvSpPr/>
+          <p:nvPr/>
+        </p:nvSpPr>
+        <p:spPr>
+          <a:xfrm>
+            <a:off x="795528" y="4864608"/>
+            <a:ext cx="1875133" cy="475488"/>
+          </a:xfrm>
+          <a:prstGeom prst="rect">
+            <a:avLst/>
+          </a:prstGeom>
+          <a:noFill/>
+          <a:ln/>
+        </p:spPr>
+        <p:txBody>
+          <a:bodyPr wrap="square" lIns="0" tIns="0" rIns="0" bIns="0" rtlCol="0" anchor="ctr"/>
+          <a:lstStyle/>
+          <a:p>
+            <a:pPr indent="0" marL="0">
+              <a:lnSpc>
+                <a:spcPct val="120000"/>
+              </a:lnSpc>
+              <a:buNone/>
+            </a:pPr>
+            <a:r>
+              <a:rPr lang="en-US" sz="1150" dirty="0">
+                <a:solidFill>
+                  <a:srgbClr val="718096"/>
+                </a:solidFill>
+                <a:latin typeface="Pretendard" pitchFamily="34" charset="0"/>
+                <a:ea typeface="Pretendard" pitchFamily="34" charset="-122"/>
+                <a:cs typeface="Pretendard" pitchFamily="34" charset="-120"/>
+              </a:rPr>
+              <a:t>실투자금 (Net Equity)</a:t>
+            </a:r>
+            <a:endParaRPr lang="en-US" sz="1150" dirty="0"/>
+          </a:p>
+        </p:txBody>
+      </p:sp>
+      <p:sp>
+        <p:nvSpPr>
+          <p:cNvPr id="27" name="Text 25"/>
+          <p:cNvSpPr/>
+          <p:nvPr/>
+        </p:nvSpPr>
+        <p:spPr>
+          <a:xfrm>
+            <a:off x="2670661" y="4864608"/>
+            <a:ext cx="3059427" cy="475488"/>
+          </a:xfrm>
+          <a:prstGeom prst="rect">
+            <a:avLst/>
+          </a:prstGeom>
+          <a:noFill/>
+          <a:ln/>
+        </p:spPr>
+        <p:txBody>
+          <a:bodyPr wrap="square" lIns="0" tIns="0" rIns="0" bIns="0" rtlCol="0" anchor="ctr"/>
+          <a:lstStyle/>
+          <a:p>
+            <a:pPr indent="0" marL="0">
+              <a:lnSpc>
+                <a:spcPct val="120000"/>
+              </a:lnSpc>
+              <a:buNone/>
+            </a:pPr>
+            <a:r>
+              <a:rPr lang="en-US" sz="1150" b="1" dirty="0">
+                <a:solidFill>
+                  <a:srgbClr val="10161F"/>
+                </a:solidFill>
+                <a:latin typeface="Pretendard" pitchFamily="34" charset="0"/>
+                <a:ea typeface="Pretendard" pitchFamily="34" charset="-122"/>
+                <a:cs typeface="Pretendard" pitchFamily="34" charset="-120"/>
+              </a:rPr>
+              <a:t>58.1억 원</a:t>
+            </a:r>
+            <a:endParaRPr lang="en-US" sz="1150" dirty="0"/>
+          </a:p>
+        </p:txBody>
+      </p:sp>
+      <p:sp>
+        <p:nvSpPr>
+          <p:cNvPr id="28" name="Shape 26"/>
+          <p:cNvSpPr/>
+          <p:nvPr/>
+        </p:nvSpPr>
+        <p:spPr>
+          <a:xfrm>
+            <a:off x="6233008" y="1417320"/>
+            <a:ext cx="5391760" cy="4389120"/>
           </a:xfrm>
           <a:prstGeom prst="roundRect">
             <a:avLst>
-              <a:gd name="adj" fmla="val 2203"/>
+              <a:gd name="adj" fmla="val 1250"/>
             </a:avLst>
           </a:prstGeom>
           <a:solidFill>
@@ -8509,592 +11794,1753 @@
       </p:sp>
       <p:sp>
         <p:nvSpPr>
-          <p:cNvPr id="13" name="Shape 11"/>
-          <p:cNvSpPr/>
-          <p:nvPr/>
-        </p:nvSpPr>
-        <p:spPr>
-          <a:xfrm>
-            <a:off x="3642284" y="1792224"/>
-            <a:ext cx="438912" cy="438912"/>
-          </a:xfrm>
-          <a:prstGeom prst="ellipse">
-            <a:avLst/>
+          <p:cNvPr id="29" name="Text 27"/>
+          <p:cNvSpPr/>
+          <p:nvPr/>
+        </p:nvSpPr>
+        <p:spPr>
+          <a:xfrm>
+            <a:off x="6461608" y="1618488"/>
+            <a:ext cx="4934560" cy="320040"/>
+          </a:xfrm>
+          <a:prstGeom prst="rect">
+            <a:avLst/>
+          </a:prstGeom>
+          <a:noFill/>
+          <a:ln/>
+        </p:spPr>
+        <p:txBody>
+          <a:bodyPr wrap="square" lIns="0" tIns="0" rIns="0" bIns="0" rtlCol="0" anchor="ctr"/>
+          <a:lstStyle/>
+          <a:p>
+            <a:pPr indent="0" marL="0">
+              <a:buNone/>
+            </a:pPr>
+            <a:r>
+              <a:rPr lang="en-US" sz="1350" b="1" dirty="0">
+                <a:solidFill>
+                  <a:srgbClr val="977024"/>
+                </a:solidFill>
+                <a:latin typeface="Pretendard" pitchFamily="34" charset="0"/>
+                <a:ea typeface="Pretendard" pitchFamily="34" charset="-122"/>
+                <a:cs typeface="Pretendard" pitchFamily="34" charset="-120"/>
+              </a:rPr>
+              <a:t>2. LTV 시나리오별 레버리지 효과</a:t>
+            </a:r>
+            <a:endParaRPr lang="en-US" sz="1350" dirty="0"/>
+          </a:p>
+        </p:txBody>
+      </p:sp>
+      <p:graphicFrame>
+        <p:nvGraphicFramePr>
+          <p:cNvPr id="10" name="Table 0"/>
+          <p:cNvGraphicFramePr>
+            <a:graphicFrameLocks noGrp="1"/>
+          </p:cNvGraphicFramePr>
+          <p:nvPr>
+            <p:extLst>
+              <p:ext uri="{D42A27DB-BD31-4B8C-83A1-F6EECF244321}">
+                <p14:modId xmlns:p14="http://schemas.microsoft.com/office/powerpoint/2010/main" val="1579011935"/>
+              </p:ext>
+            </p:extLst>
+          </p:nvPr>
+        </p:nvGraphicFramePr>
+        <p:xfrm>
+          <a:off x="6461608" y="2057400"/>
+          <a:ext cx="4934560" cy="914400"/>
+        </p:xfrm>
+        <a:graphic>
+          <a:graphicData uri="http://schemas.openxmlformats.org/drawingml/2006/table">
+            <a:tbl>
+              <a:tblPr/>
+              <a:tblGrid>
+                <a:gridCol w="1463040"/>
+                <a:gridCol w="1005840"/>
+                <a:gridCol w="1280160"/>
+                <a:gridCol w="1280160"/>
+              </a:tblGrid>
+              <a:tr h="457200">
+                <a:tc>
+                  <a:txBody>
+                    <a:bodyPr/>
+                    <a:lstStyle/>
+                    <a:p>
+                      <a:pPr indent="0" marL="0">
+                        <a:buNone/>
+                      </a:pPr>
+                      <a:r>
+                        <a:rPr lang="en-US" sz="1100" b="1" dirty="0">
+                          <a:solidFill>
+                            <a:srgbClr val="718096"/>
+                          </a:solidFill>
+                          <a:latin typeface="Pretendard" pitchFamily="34" charset="0"/>
+                          <a:ea typeface="Pretendard" pitchFamily="34" charset="-122"/>
+                          <a:cs typeface="Pretendard" pitchFamily="34" charset="-120"/>
+                        </a:rPr>
+                        <a:t>구분</a:t>
+                      </a:r>
+                      <a:endParaRPr lang="en-US" sz="1100" dirty="0">
+                        <a:latin typeface="Pretendard" charset="0"/>
+                        <a:ea typeface="Pretendard" charset="0"/>
+                        <a:cs typeface="Pretendard" charset="0"/>
+                      </a:endParaRPr>
+                    </a:p>
+                  </a:txBody>
+                  <a:tcPr marL="50800" marR="50800" marT="25400" marB="25400" anchor="ctr">
+                    <a:lnL w="3810" cap="flat" cmpd="sng" algn="ctr">
+                      <a:solidFill>
+                        <a:srgbClr val="CBD5E0"/>
+                      </a:solidFill>
+                      <a:prstDash val="solid"/>
+                      <a:round/>
+                      <a:headEnd type="none" w="med" len="med"/>
+                      <a:tailEnd type="none" w="med" len="med"/>
+                    </a:lnL>
+                    <a:lnR w="3810" cap="flat" cmpd="sng" algn="ctr">
+                      <a:solidFill>
+                        <a:srgbClr val="CBD5E0"/>
+                      </a:solidFill>
+                      <a:prstDash val="solid"/>
+                      <a:round/>
+                      <a:headEnd type="none" w="med" len="med"/>
+                      <a:tailEnd type="none" w="med" len="med"/>
+                    </a:lnR>
+                    <a:lnT w="3810" cap="flat" cmpd="sng" algn="ctr">
+                      <a:solidFill>
+                        <a:srgbClr val="CBD5E0"/>
+                      </a:solidFill>
+                      <a:prstDash val="solid"/>
+                      <a:round/>
+                      <a:headEnd type="none" w="med" len="med"/>
+                      <a:tailEnd type="none" w="med" len="med"/>
+                    </a:lnT>
+                    <a:lnB w="3810" cap="flat" cmpd="sng" algn="ctr">
+                      <a:solidFill>
+                        <a:srgbClr val="CBD5E0"/>
+                      </a:solidFill>
+                      <a:prstDash val="solid"/>
+                      <a:round/>
+                      <a:headEnd type="none" w="med" len="med"/>
+                      <a:tailEnd type="none" w="med" len="med"/>
+                    </a:lnB>
+                    <a:solidFill>
+                      <a:srgbClr val="F7FAFC"/>
+                    </a:solidFill>
+                  </a:tcPr>
+                </a:tc>
+                <a:tc>
+                  <a:txBody>
+                    <a:bodyPr/>
+                    <a:lstStyle/>
+                    <a:p>
+                      <a:pPr indent="0" marL="0">
+                        <a:buNone/>
+                      </a:pPr>
+                      <a:r>
+                        <a:rPr lang="en-US" sz="1100" b="1" dirty="0">
+                          <a:solidFill>
+                            <a:srgbClr val="718096"/>
+                          </a:solidFill>
+                          <a:latin typeface="Pretendard" pitchFamily="34" charset="0"/>
+                          <a:ea typeface="Pretendard" pitchFamily="34" charset="-122"/>
+                          <a:cs typeface="Pretendard" pitchFamily="34" charset="-120"/>
+                        </a:rPr>
+                        <a:t>대출비율</a:t>
+                      </a:r>
+                      <a:endParaRPr lang="en-US" sz="1100" dirty="0">
+                        <a:latin typeface="Pretendard" charset="0"/>
+                        <a:ea typeface="Pretendard" charset="0"/>
+                        <a:cs typeface="Pretendard" charset="0"/>
+                      </a:endParaRPr>
+                    </a:p>
+                  </a:txBody>
+                  <a:tcPr marL="50800" marR="50800" marT="25400" marB="25400" anchor="ctr">
+                    <a:lnL w="3810" cap="flat" cmpd="sng" algn="ctr">
+                      <a:solidFill>
+                        <a:srgbClr val="CBD5E0"/>
+                      </a:solidFill>
+                      <a:prstDash val="solid"/>
+                      <a:round/>
+                      <a:headEnd type="none" w="med" len="med"/>
+                      <a:tailEnd type="none" w="med" len="med"/>
+                    </a:lnL>
+                    <a:lnR w="3810" cap="flat" cmpd="sng" algn="ctr">
+                      <a:solidFill>
+                        <a:srgbClr val="CBD5E0"/>
+                      </a:solidFill>
+                      <a:prstDash val="solid"/>
+                      <a:round/>
+                      <a:headEnd type="none" w="med" len="med"/>
+                      <a:tailEnd type="none" w="med" len="med"/>
+                    </a:lnR>
+                    <a:lnT w="3810" cap="flat" cmpd="sng" algn="ctr">
+                      <a:solidFill>
+                        <a:srgbClr val="CBD5E0"/>
+                      </a:solidFill>
+                      <a:prstDash val="solid"/>
+                      <a:round/>
+                      <a:headEnd type="none" w="med" len="med"/>
+                      <a:tailEnd type="none" w="med" len="med"/>
+                    </a:lnT>
+                    <a:lnB w="3810" cap="flat" cmpd="sng" algn="ctr">
+                      <a:solidFill>
+                        <a:srgbClr val="CBD5E0"/>
+                      </a:solidFill>
+                      <a:prstDash val="solid"/>
+                      <a:round/>
+                      <a:headEnd type="none" w="med" len="med"/>
+                      <a:tailEnd type="none" w="med" len="med"/>
+                    </a:lnB>
+                    <a:solidFill>
+                      <a:srgbClr val="F7FAFC"/>
+                    </a:solidFill>
+                  </a:tcPr>
+                </a:tc>
+                <a:tc>
+                  <a:txBody>
+                    <a:bodyPr/>
+                    <a:lstStyle/>
+                    <a:p>
+                      <a:pPr indent="0" marL="0">
+                        <a:buNone/>
+                      </a:pPr>
+                      <a:r>
+                        <a:rPr lang="en-US" sz="1100" b="1" dirty="0">
+                          <a:solidFill>
+                            <a:srgbClr val="718096"/>
+                          </a:solidFill>
+                          <a:latin typeface="Pretendard" pitchFamily="34" charset="0"/>
+                          <a:ea typeface="Pretendard" pitchFamily="34" charset="-122"/>
+                          <a:cs typeface="Pretendard" pitchFamily="34" charset="-120"/>
+                        </a:rPr>
+                        <a:t>실투자금</a:t>
+                      </a:r>
+                      <a:endParaRPr lang="en-US" sz="1100" dirty="0">
+                        <a:latin typeface="Pretendard" charset="0"/>
+                        <a:ea typeface="Pretendard" charset="0"/>
+                        <a:cs typeface="Pretendard" charset="0"/>
+                      </a:endParaRPr>
+                    </a:p>
+                  </a:txBody>
+                  <a:tcPr marL="50800" marR="50800" marT="25400" marB="25400" anchor="ctr">
+                    <a:lnL w="3810" cap="flat" cmpd="sng" algn="ctr">
+                      <a:solidFill>
+                        <a:srgbClr val="CBD5E0"/>
+                      </a:solidFill>
+                      <a:prstDash val="solid"/>
+                      <a:round/>
+                      <a:headEnd type="none" w="med" len="med"/>
+                      <a:tailEnd type="none" w="med" len="med"/>
+                    </a:lnL>
+                    <a:lnR w="3810" cap="flat" cmpd="sng" algn="ctr">
+                      <a:solidFill>
+                        <a:srgbClr val="CBD5E0"/>
+                      </a:solidFill>
+                      <a:prstDash val="solid"/>
+                      <a:round/>
+                      <a:headEnd type="none" w="med" len="med"/>
+                      <a:tailEnd type="none" w="med" len="med"/>
+                    </a:lnR>
+                    <a:lnT w="3810" cap="flat" cmpd="sng" algn="ctr">
+                      <a:solidFill>
+                        <a:srgbClr val="CBD5E0"/>
+                      </a:solidFill>
+                      <a:prstDash val="solid"/>
+                      <a:round/>
+                      <a:headEnd type="none" w="med" len="med"/>
+                      <a:tailEnd type="none" w="med" len="med"/>
+                    </a:lnT>
+                    <a:lnB w="3810" cap="flat" cmpd="sng" algn="ctr">
+                      <a:solidFill>
+                        <a:srgbClr val="CBD5E0"/>
+                      </a:solidFill>
+                      <a:prstDash val="solid"/>
+                      <a:round/>
+                      <a:headEnd type="none" w="med" len="med"/>
+                      <a:tailEnd type="none" w="med" len="med"/>
+                    </a:lnB>
+                    <a:solidFill>
+                      <a:srgbClr val="F7FAFC"/>
+                    </a:solidFill>
+                  </a:tcPr>
+                </a:tc>
+                <a:tc>
+                  <a:txBody>
+                    <a:bodyPr/>
+                    <a:lstStyle/>
+                    <a:p>
+                      <a:pPr indent="0" marL="0">
+                        <a:buNone/>
+                      </a:pPr>
+                      <a:r>
+                        <a:rPr lang="en-US" sz="1100" b="1" dirty="0">
+                          <a:solidFill>
+                            <a:srgbClr val="718096"/>
+                          </a:solidFill>
+                          <a:latin typeface="Pretendard" pitchFamily="34" charset="0"/>
+                          <a:ea typeface="Pretendard" pitchFamily="34" charset="-122"/>
+                          <a:cs typeface="Pretendard" pitchFamily="34" charset="-120"/>
+                        </a:rPr>
+                        <a:t>예상수익률</a:t>
+                      </a:r>
+                      <a:endParaRPr lang="en-US" sz="1100" dirty="0">
+                        <a:latin typeface="Pretendard" charset="0"/>
+                        <a:ea typeface="Pretendard" charset="0"/>
+                        <a:cs typeface="Pretendard" charset="0"/>
+                      </a:endParaRPr>
+                    </a:p>
+                  </a:txBody>
+                  <a:tcPr marL="50800" marR="50800" marT="25400" marB="25400" anchor="ctr">
+                    <a:lnL w="3810" cap="flat" cmpd="sng" algn="ctr">
+                      <a:solidFill>
+                        <a:srgbClr val="CBD5E0"/>
+                      </a:solidFill>
+                      <a:prstDash val="solid"/>
+                      <a:round/>
+                      <a:headEnd type="none" w="med" len="med"/>
+                      <a:tailEnd type="none" w="med" len="med"/>
+                    </a:lnL>
+                    <a:lnR w="3810" cap="flat" cmpd="sng" algn="ctr">
+                      <a:solidFill>
+                        <a:srgbClr val="CBD5E0"/>
+                      </a:solidFill>
+                      <a:prstDash val="solid"/>
+                      <a:round/>
+                      <a:headEnd type="none" w="med" len="med"/>
+                      <a:tailEnd type="none" w="med" len="med"/>
+                    </a:lnR>
+                    <a:lnT w="3810" cap="flat" cmpd="sng" algn="ctr">
+                      <a:solidFill>
+                        <a:srgbClr val="CBD5E0"/>
+                      </a:solidFill>
+                      <a:prstDash val="solid"/>
+                      <a:round/>
+                      <a:headEnd type="none" w="med" len="med"/>
+                      <a:tailEnd type="none" w="med" len="med"/>
+                    </a:lnT>
+                    <a:lnB w="3810" cap="flat" cmpd="sng" algn="ctr">
+                      <a:solidFill>
+                        <a:srgbClr val="CBD5E0"/>
+                      </a:solidFill>
+                      <a:prstDash val="solid"/>
+                      <a:round/>
+                      <a:headEnd type="none" w="med" len="med"/>
+                      <a:tailEnd type="none" w="med" len="med"/>
+                    </a:lnB>
+                    <a:solidFill>
+                      <a:srgbClr val="F7FAFC"/>
+                    </a:solidFill>
+                  </a:tcPr>
+                </a:tc>
+              </a:tr>
+              <a:tr h="457200">
+                <a:tc>
+                  <a:txBody>
+                    <a:bodyPr/>
+                    <a:lstStyle/>
+                    <a:p>
+                      <a:pPr indent="0" marL="0">
+                        <a:buNone/>
+                      </a:pPr>
+                      <a:r>
+                        <a:rPr lang="en-US" sz="1100" b="1" dirty="0">
+                          <a:solidFill>
+                            <a:srgbClr val="10161F"/>
+                          </a:solidFill>
+                          <a:latin typeface="Pretendard" pitchFamily="34" charset="0"/>
+                          <a:ea typeface="Pretendard" pitchFamily="34" charset="-122"/>
+                          <a:cs typeface="Pretendard" pitchFamily="34" charset="-120"/>
+                        </a:rPr>
+                        <a:t>전액 </a:t>
+                      </a:r>
+                      <a:pPr indent="0" marL="0">
+                        <a:buNone/>
+                      </a:pPr>
+                      <a:r>
+                        <a:rPr lang="en-US" sz="1100" b="1" dirty="0">
+                          <a:solidFill>
+                            <a:srgbClr val="10161F"/>
+                          </a:solidFill>
+                          <a:latin typeface="Pretendard" pitchFamily="34" charset="0"/>
+                          <a:ea typeface="Pretendard" pitchFamily="34" charset="-122"/>
+                          <a:cs typeface="Pretendard" pitchFamily="34" charset="-120"/>
+                        </a:rPr>
+                        <a:t>자기자본 </a:t>
+                      </a:r>
+                      <a:pPr indent="0" marL="0">
+                        <a:buNone/>
+                      </a:pPr>
+                      <a:r>
+                        <a:rPr lang="en-US" sz="1100" b="1" dirty="0">
+                          <a:solidFill>
+                            <a:srgbClr val="10161F"/>
+                          </a:solidFill>
+                          <a:latin typeface="Pretendard" pitchFamily="34" charset="0"/>
+                          <a:ea typeface="Pretendard" pitchFamily="34" charset="-122"/>
+                          <a:cs typeface="Pretendard" pitchFamily="34" charset="-120"/>
+                        </a:rPr>
+                        <a:t>(무차입)</a:t>
+                      </a:r>
+                      <a:endParaRPr lang="en-US" sz="1100" dirty="0">
+                        <a:latin typeface="Pretendard" charset="0"/>
+                        <a:ea typeface="Pretendard" charset="0"/>
+                        <a:cs typeface="Pretendard" charset="0"/>
+                      </a:endParaRPr>
+                    </a:p>
+                  </a:txBody>
+                  <a:tcPr marL="50800" marR="50800" marT="25400" marB="25400" anchor="ctr">
+                    <a:lnL w="3810" cap="flat" cmpd="sng" algn="ctr">
+                      <a:solidFill>
+                        <a:srgbClr val="CBD5E0"/>
+                      </a:solidFill>
+                      <a:prstDash val="solid"/>
+                      <a:round/>
+                      <a:headEnd type="none" w="med" len="med"/>
+                      <a:tailEnd type="none" w="med" len="med"/>
+                    </a:lnL>
+                    <a:lnR w="3810" cap="flat" cmpd="sng" algn="ctr">
+                      <a:solidFill>
+                        <a:srgbClr val="CBD5E0"/>
+                      </a:solidFill>
+                      <a:prstDash val="solid"/>
+                      <a:round/>
+                      <a:headEnd type="none" w="med" len="med"/>
+                      <a:tailEnd type="none" w="med" len="med"/>
+                    </a:lnR>
+                    <a:lnT w="3810" cap="flat" cmpd="sng" algn="ctr">
+                      <a:solidFill>
+                        <a:srgbClr val="CBD5E0"/>
+                      </a:solidFill>
+                      <a:prstDash val="solid"/>
+                      <a:round/>
+                      <a:headEnd type="none" w="med" len="med"/>
+                      <a:tailEnd type="none" w="med" len="med"/>
+                    </a:lnT>
+                    <a:lnB w="3810" cap="flat" cmpd="sng" algn="ctr">
+                      <a:solidFill>
+                        <a:srgbClr val="CBD5E0"/>
+                      </a:solidFill>
+                      <a:prstDash val="solid"/>
+                      <a:round/>
+                      <a:headEnd type="none" w="med" len="med"/>
+                      <a:tailEnd type="none" w="med" len="med"/>
+                    </a:lnB>
+                    <a:solidFill>
+                      <a:srgbClr val="FFFFFF"/>
+                    </a:solidFill>
+                  </a:tcPr>
+                </a:tc>
+                <a:tc>
+                  <a:txBody>
+                    <a:bodyPr/>
+                    <a:lstStyle/>
+                    <a:p>
+                      <a:pPr indent="0" marL="0">
+                        <a:buNone/>
+                      </a:pPr>
+                      <a:r>
+                        <a:rPr lang="en-US" sz="1100" dirty="0">
+                          <a:solidFill>
+                            <a:srgbClr val="10161F"/>
+                          </a:solidFill>
+                          <a:latin typeface="Pretendard" pitchFamily="34" charset="0"/>
+                          <a:ea typeface="Pretendard" pitchFamily="34" charset="-122"/>
+                          <a:cs typeface="Pretendard" pitchFamily="34" charset="-120"/>
+                        </a:rPr>
+                        <a:t>0%</a:t>
+                      </a:r>
+                      <a:endParaRPr lang="en-US" sz="1100" dirty="0">
+                        <a:latin typeface="Pretendard" charset="0"/>
+                        <a:ea typeface="Pretendard" charset="0"/>
+                        <a:cs typeface="Pretendard" charset="0"/>
+                      </a:endParaRPr>
+                    </a:p>
+                  </a:txBody>
+                  <a:tcPr marL="50800" marR="50800" marT="25400" marB="25400" anchor="ctr">
+                    <a:lnL w="3810" cap="flat" cmpd="sng" algn="ctr">
+                      <a:solidFill>
+                        <a:srgbClr val="CBD5E0"/>
+                      </a:solidFill>
+                      <a:prstDash val="solid"/>
+                      <a:round/>
+                      <a:headEnd type="none" w="med" len="med"/>
+                      <a:tailEnd type="none" w="med" len="med"/>
+                    </a:lnL>
+                    <a:lnR w="3810" cap="flat" cmpd="sng" algn="ctr">
+                      <a:solidFill>
+                        <a:srgbClr val="CBD5E0"/>
+                      </a:solidFill>
+                      <a:prstDash val="solid"/>
+                      <a:round/>
+                      <a:headEnd type="none" w="med" len="med"/>
+                      <a:tailEnd type="none" w="med" len="med"/>
+                    </a:lnR>
+                    <a:lnT w="3810" cap="flat" cmpd="sng" algn="ctr">
+                      <a:solidFill>
+                        <a:srgbClr val="CBD5E0"/>
+                      </a:solidFill>
+                      <a:prstDash val="solid"/>
+                      <a:round/>
+                      <a:headEnd type="none" w="med" len="med"/>
+                      <a:tailEnd type="none" w="med" len="med"/>
+                    </a:lnT>
+                    <a:lnB w="3810" cap="flat" cmpd="sng" algn="ctr">
+                      <a:solidFill>
+                        <a:srgbClr val="CBD5E0"/>
+                      </a:solidFill>
+                      <a:prstDash val="solid"/>
+                      <a:round/>
+                      <a:headEnd type="none" w="med" len="med"/>
+                      <a:tailEnd type="none" w="med" len="med"/>
+                    </a:lnB>
+                    <a:solidFill>
+                      <a:srgbClr val="FFFFFF"/>
+                    </a:solidFill>
+                  </a:tcPr>
+                </a:tc>
+                <a:tc>
+                  <a:txBody>
+                    <a:bodyPr/>
+                    <a:lstStyle/>
+                    <a:p>
+                      <a:pPr indent="0" marL="0">
+                        <a:buNone/>
+                      </a:pPr>
+                      <a:r>
+                        <a:rPr lang="en-US" sz="1100" dirty="0">
+                          <a:solidFill>
+                            <a:srgbClr val="10161F"/>
+                          </a:solidFill>
+                          <a:latin typeface="Pretendard" pitchFamily="34" charset="0"/>
+                          <a:ea typeface="Pretendard" pitchFamily="34" charset="-122"/>
+                          <a:cs typeface="Pretendard" pitchFamily="34" charset="-120"/>
+                        </a:rPr>
+                        <a:t>115.6억</a:t>
+                      </a:r>
+                      <a:endParaRPr lang="en-US" sz="1100" dirty="0">
+                        <a:latin typeface="Pretendard" charset="0"/>
+                        <a:ea typeface="Pretendard" charset="0"/>
+                        <a:cs typeface="Pretendard" charset="0"/>
+                      </a:endParaRPr>
+                    </a:p>
+                  </a:txBody>
+                  <a:tcPr marL="50800" marR="50800" marT="25400" marB="25400" anchor="ctr">
+                    <a:lnL w="3810" cap="flat" cmpd="sng" algn="ctr">
+                      <a:solidFill>
+                        <a:srgbClr val="CBD5E0"/>
+                      </a:solidFill>
+                      <a:prstDash val="solid"/>
+                      <a:round/>
+                      <a:headEnd type="none" w="med" len="med"/>
+                      <a:tailEnd type="none" w="med" len="med"/>
+                    </a:lnL>
+                    <a:lnR w="3810" cap="flat" cmpd="sng" algn="ctr">
+                      <a:solidFill>
+                        <a:srgbClr val="CBD5E0"/>
+                      </a:solidFill>
+                      <a:prstDash val="solid"/>
+                      <a:round/>
+                      <a:headEnd type="none" w="med" len="med"/>
+                      <a:tailEnd type="none" w="med" len="med"/>
+                    </a:lnR>
+                    <a:lnT w="3810" cap="flat" cmpd="sng" algn="ctr">
+                      <a:solidFill>
+                        <a:srgbClr val="CBD5E0"/>
+                      </a:solidFill>
+                      <a:prstDash val="solid"/>
+                      <a:round/>
+                      <a:headEnd type="none" w="med" len="med"/>
+                      <a:tailEnd type="none" w="med" len="med"/>
+                    </a:lnT>
+                    <a:lnB w="3810" cap="flat" cmpd="sng" algn="ctr">
+                      <a:solidFill>
+                        <a:srgbClr val="CBD5E0"/>
+                      </a:solidFill>
+                      <a:prstDash val="solid"/>
+                      <a:round/>
+                      <a:headEnd type="none" w="med" len="med"/>
+                      <a:tailEnd type="none" w="med" len="med"/>
+                    </a:lnB>
+                    <a:solidFill>
+                      <a:srgbClr val="FFFFFF"/>
+                    </a:solidFill>
+                  </a:tcPr>
+                </a:tc>
+                <a:tc>
+                  <a:txBody>
+                    <a:bodyPr/>
+                    <a:lstStyle/>
+                    <a:p>
+                      <a:pPr indent="0" marL="0">
+                        <a:buNone/>
+                      </a:pPr>
+                      <a:r>
+                        <a:rPr lang="en-US" sz="1100" dirty="0">
+                          <a:solidFill>
+                            <a:srgbClr val="10161F"/>
+                          </a:solidFill>
+                          <a:latin typeface="Pretendard" pitchFamily="34" charset="0"/>
+                          <a:ea typeface="Pretendard" pitchFamily="34" charset="-122"/>
+                          <a:cs typeface="Pretendard" pitchFamily="34" charset="-120"/>
+                        </a:rPr>
+                        <a:t>3.78%</a:t>
+                      </a:r>
+                      <a:endParaRPr lang="en-US" sz="1100" dirty="0">
+                        <a:latin typeface="Pretendard" charset="0"/>
+                        <a:ea typeface="Pretendard" charset="0"/>
+                        <a:cs typeface="Pretendard" charset="0"/>
+                      </a:endParaRPr>
+                    </a:p>
+                  </a:txBody>
+                  <a:tcPr marL="50800" marR="50800" marT="25400" marB="25400" anchor="ctr">
+                    <a:lnL w="3810" cap="flat" cmpd="sng" algn="ctr">
+                      <a:solidFill>
+                        <a:srgbClr val="CBD5E0"/>
+                      </a:solidFill>
+                      <a:prstDash val="solid"/>
+                      <a:round/>
+                      <a:headEnd type="none" w="med" len="med"/>
+                      <a:tailEnd type="none" w="med" len="med"/>
+                    </a:lnL>
+                    <a:lnR w="3810" cap="flat" cmpd="sng" algn="ctr">
+                      <a:solidFill>
+                        <a:srgbClr val="CBD5E0"/>
+                      </a:solidFill>
+                      <a:prstDash val="solid"/>
+                      <a:round/>
+                      <a:headEnd type="none" w="med" len="med"/>
+                      <a:tailEnd type="none" w="med" len="med"/>
+                    </a:lnR>
+                    <a:lnT w="3810" cap="flat" cmpd="sng" algn="ctr">
+                      <a:solidFill>
+                        <a:srgbClr val="CBD5E0"/>
+                      </a:solidFill>
+                      <a:prstDash val="solid"/>
+                      <a:round/>
+                      <a:headEnd type="none" w="med" len="med"/>
+                      <a:tailEnd type="none" w="med" len="med"/>
+                    </a:lnT>
+                    <a:lnB w="3810" cap="flat" cmpd="sng" algn="ctr">
+                      <a:solidFill>
+                        <a:srgbClr val="CBD5E0"/>
+                      </a:solidFill>
+                      <a:prstDash val="solid"/>
+                      <a:round/>
+                      <a:headEnd type="none" w="med" len="med"/>
+                      <a:tailEnd type="none" w="med" len="med"/>
+                    </a:lnB>
+                    <a:solidFill>
+                      <a:srgbClr val="FFFFFF"/>
+                    </a:solidFill>
+                  </a:tcPr>
+                </a:tc>
+              </a:tr>
+              <a:tr h="457200">
+                <a:tc>
+                  <a:txBody>
+                    <a:bodyPr/>
+                    <a:lstStyle/>
+                    <a:p>
+                      <a:pPr indent="0" marL="0">
+                        <a:buNone/>
+                      </a:pPr>
+                      <a:r>
+                        <a:rPr lang="en-US" sz="1100" b="1" dirty="0">
+                          <a:solidFill>
+                            <a:srgbClr val="10161F"/>
+                          </a:solidFill>
+                          <a:latin typeface="Pretendard" pitchFamily="34" charset="0"/>
+                          <a:ea typeface="Pretendard" pitchFamily="34" charset="-122"/>
+                          <a:cs typeface="Pretendard" pitchFamily="34" charset="-120"/>
+                        </a:rPr>
+                        <a:t>보수적 </a:t>
+                      </a:r>
+                      <a:pPr indent="0" marL="0">
+                        <a:buNone/>
+                      </a:pPr>
+                      <a:r>
+                        <a:rPr lang="en-US" sz="1100" b="1" dirty="0">
+                          <a:solidFill>
+                            <a:srgbClr val="10161F"/>
+                          </a:solidFill>
+                          <a:latin typeface="Pretendard" pitchFamily="34" charset="0"/>
+                          <a:ea typeface="Pretendard" pitchFamily="34" charset="-122"/>
+                          <a:cs typeface="Pretendard" pitchFamily="34" charset="-120"/>
+                        </a:rPr>
+                        <a:t>차입 </a:t>
+                      </a:r>
+                      <a:pPr indent="0" marL="0">
+                        <a:buNone/>
+                      </a:pPr>
+                      <a:r>
+                        <a:rPr lang="en-US" sz="1100" b="1" dirty="0">
+                          <a:solidFill>
+                            <a:srgbClr val="10161F"/>
+                          </a:solidFill>
+                          <a:latin typeface="Pretendard" pitchFamily="34" charset="0"/>
+                          <a:ea typeface="Pretendard" pitchFamily="34" charset="-122"/>
+                          <a:cs typeface="Pretendard" pitchFamily="34" charset="-120"/>
+                        </a:rPr>
+                        <a:t>(안정형)</a:t>
+                      </a:r>
+                      <a:endParaRPr lang="en-US" sz="1100" dirty="0">
+                        <a:latin typeface="Pretendard" charset="0"/>
+                        <a:ea typeface="Pretendard" charset="0"/>
+                        <a:cs typeface="Pretendard" charset="0"/>
+                      </a:endParaRPr>
+                    </a:p>
+                  </a:txBody>
+                  <a:tcPr marL="50800" marR="50800" marT="25400" marB="25400" anchor="ctr">
+                    <a:lnL w="3810" cap="flat" cmpd="sng" algn="ctr">
+                      <a:solidFill>
+                        <a:srgbClr val="CBD5E0"/>
+                      </a:solidFill>
+                      <a:prstDash val="solid"/>
+                      <a:round/>
+                      <a:headEnd type="none" w="med" len="med"/>
+                      <a:tailEnd type="none" w="med" len="med"/>
+                    </a:lnL>
+                    <a:lnR w="3810" cap="flat" cmpd="sng" algn="ctr">
+                      <a:solidFill>
+                        <a:srgbClr val="CBD5E0"/>
+                      </a:solidFill>
+                      <a:prstDash val="solid"/>
+                      <a:round/>
+                      <a:headEnd type="none" w="med" len="med"/>
+                      <a:tailEnd type="none" w="med" len="med"/>
+                    </a:lnR>
+                    <a:lnT w="3810" cap="flat" cmpd="sng" algn="ctr">
+                      <a:solidFill>
+                        <a:srgbClr val="CBD5E0"/>
+                      </a:solidFill>
+                      <a:prstDash val="solid"/>
+                      <a:round/>
+                      <a:headEnd type="none" w="med" len="med"/>
+                      <a:tailEnd type="none" w="med" len="med"/>
+                    </a:lnT>
+                    <a:lnB w="3810" cap="flat" cmpd="sng" algn="ctr">
+                      <a:solidFill>
+                        <a:srgbClr val="CBD5E0"/>
+                      </a:solidFill>
+                      <a:prstDash val="solid"/>
+                      <a:round/>
+                      <a:headEnd type="none" w="med" len="med"/>
+                      <a:tailEnd type="none" w="med" len="med"/>
+                    </a:lnB>
+                    <a:solidFill>
+                      <a:srgbClr val="F7FAFC"/>
+                    </a:solidFill>
+                  </a:tcPr>
+                </a:tc>
+                <a:tc>
+                  <a:txBody>
+                    <a:bodyPr/>
+                    <a:lstStyle/>
+                    <a:p>
+                      <a:pPr indent="0" marL="0">
+                        <a:buNone/>
+                      </a:pPr>
+                      <a:r>
+                        <a:rPr lang="en-US" sz="1100" dirty="0">
+                          <a:solidFill>
+                            <a:srgbClr val="10161F"/>
+                          </a:solidFill>
+                          <a:latin typeface="Pretendard" pitchFamily="34" charset="0"/>
+                          <a:ea typeface="Pretendard" pitchFamily="34" charset="-122"/>
+                          <a:cs typeface="Pretendard" pitchFamily="34" charset="-120"/>
+                        </a:rPr>
+                        <a:t>40%</a:t>
+                      </a:r>
+                      <a:endParaRPr lang="en-US" sz="1100" dirty="0">
+                        <a:latin typeface="Pretendard" charset="0"/>
+                        <a:ea typeface="Pretendard" charset="0"/>
+                        <a:cs typeface="Pretendard" charset="0"/>
+                      </a:endParaRPr>
+                    </a:p>
+                  </a:txBody>
+                  <a:tcPr marL="50800" marR="50800" marT="25400" marB="25400" anchor="ctr">
+                    <a:lnL w="3810" cap="flat" cmpd="sng" algn="ctr">
+                      <a:solidFill>
+                        <a:srgbClr val="CBD5E0"/>
+                      </a:solidFill>
+                      <a:prstDash val="solid"/>
+                      <a:round/>
+                      <a:headEnd type="none" w="med" len="med"/>
+                      <a:tailEnd type="none" w="med" len="med"/>
+                    </a:lnL>
+                    <a:lnR w="3810" cap="flat" cmpd="sng" algn="ctr">
+                      <a:solidFill>
+                        <a:srgbClr val="CBD5E0"/>
+                      </a:solidFill>
+                      <a:prstDash val="solid"/>
+                      <a:round/>
+                      <a:headEnd type="none" w="med" len="med"/>
+                      <a:tailEnd type="none" w="med" len="med"/>
+                    </a:lnR>
+                    <a:lnT w="3810" cap="flat" cmpd="sng" algn="ctr">
+                      <a:solidFill>
+                        <a:srgbClr val="CBD5E0"/>
+                      </a:solidFill>
+                      <a:prstDash val="solid"/>
+                      <a:round/>
+                      <a:headEnd type="none" w="med" len="med"/>
+                      <a:tailEnd type="none" w="med" len="med"/>
+                    </a:lnT>
+                    <a:lnB w="3810" cap="flat" cmpd="sng" algn="ctr">
+                      <a:solidFill>
+                        <a:srgbClr val="CBD5E0"/>
+                      </a:solidFill>
+                      <a:prstDash val="solid"/>
+                      <a:round/>
+                      <a:headEnd type="none" w="med" len="med"/>
+                      <a:tailEnd type="none" w="med" len="med"/>
+                    </a:lnB>
+                    <a:solidFill>
+                      <a:srgbClr val="F7FAFC"/>
+                    </a:solidFill>
+                  </a:tcPr>
+                </a:tc>
+                <a:tc>
+                  <a:txBody>
+                    <a:bodyPr/>
+                    <a:lstStyle/>
+                    <a:p>
+                      <a:pPr indent="0" marL="0">
+                        <a:buNone/>
+                      </a:pPr>
+                      <a:r>
+                        <a:rPr lang="en-US" sz="1100" dirty="0">
+                          <a:solidFill>
+                            <a:srgbClr val="10161F"/>
+                          </a:solidFill>
+                          <a:latin typeface="Pretendard" pitchFamily="34" charset="0"/>
+                          <a:ea typeface="Pretendard" pitchFamily="34" charset="-122"/>
+                          <a:cs typeface="Pretendard" pitchFamily="34" charset="-120"/>
+                        </a:rPr>
+                        <a:t>69.6억</a:t>
+                      </a:r>
+                      <a:endParaRPr lang="en-US" sz="1100" dirty="0">
+                        <a:latin typeface="Pretendard" charset="0"/>
+                        <a:ea typeface="Pretendard" charset="0"/>
+                        <a:cs typeface="Pretendard" charset="0"/>
+                      </a:endParaRPr>
+                    </a:p>
+                  </a:txBody>
+                  <a:tcPr marL="50800" marR="50800" marT="25400" marB="25400" anchor="ctr">
+                    <a:lnL w="3810" cap="flat" cmpd="sng" algn="ctr">
+                      <a:solidFill>
+                        <a:srgbClr val="CBD5E0"/>
+                      </a:solidFill>
+                      <a:prstDash val="solid"/>
+                      <a:round/>
+                      <a:headEnd type="none" w="med" len="med"/>
+                      <a:tailEnd type="none" w="med" len="med"/>
+                    </a:lnL>
+                    <a:lnR w="3810" cap="flat" cmpd="sng" algn="ctr">
+                      <a:solidFill>
+                        <a:srgbClr val="CBD5E0"/>
+                      </a:solidFill>
+                      <a:prstDash val="solid"/>
+                      <a:round/>
+                      <a:headEnd type="none" w="med" len="med"/>
+                      <a:tailEnd type="none" w="med" len="med"/>
+                    </a:lnR>
+                    <a:lnT w="3810" cap="flat" cmpd="sng" algn="ctr">
+                      <a:solidFill>
+                        <a:srgbClr val="CBD5E0"/>
+                      </a:solidFill>
+                      <a:prstDash val="solid"/>
+                      <a:round/>
+                      <a:headEnd type="none" w="med" len="med"/>
+                      <a:tailEnd type="none" w="med" len="med"/>
+                    </a:lnT>
+                    <a:lnB w="3810" cap="flat" cmpd="sng" algn="ctr">
+                      <a:solidFill>
+                        <a:srgbClr val="CBD5E0"/>
+                      </a:solidFill>
+                      <a:prstDash val="solid"/>
+                      <a:round/>
+                      <a:headEnd type="none" w="med" len="med"/>
+                      <a:tailEnd type="none" w="med" len="med"/>
+                    </a:lnB>
+                    <a:solidFill>
+                      <a:srgbClr val="F7FAFC"/>
+                    </a:solidFill>
+                  </a:tcPr>
+                </a:tc>
+                <a:tc>
+                  <a:txBody>
+                    <a:bodyPr/>
+                    <a:lstStyle/>
+                    <a:p>
+                      <a:pPr indent="0" marL="0">
+                        <a:buNone/>
+                      </a:pPr>
+                      <a:r>
+                        <a:rPr lang="en-US" sz="1100" dirty="0">
+                          <a:solidFill>
+                            <a:srgbClr val="10161F"/>
+                          </a:solidFill>
+                          <a:latin typeface="Pretendard" pitchFamily="34" charset="0"/>
+                          <a:ea typeface="Pretendard" pitchFamily="34" charset="-122"/>
+                          <a:cs typeface="Pretendard" pitchFamily="34" charset="-120"/>
+                        </a:rPr>
+                        <a:t>3.11%</a:t>
+                      </a:r>
+                      <a:endParaRPr lang="en-US" sz="1100" dirty="0">
+                        <a:latin typeface="Pretendard" charset="0"/>
+                        <a:ea typeface="Pretendard" charset="0"/>
+                        <a:cs typeface="Pretendard" charset="0"/>
+                      </a:endParaRPr>
+                    </a:p>
+                  </a:txBody>
+                  <a:tcPr marL="50800" marR="50800" marT="25400" marB="25400" anchor="ctr">
+                    <a:lnL w="3810" cap="flat" cmpd="sng" algn="ctr">
+                      <a:solidFill>
+                        <a:srgbClr val="CBD5E0"/>
+                      </a:solidFill>
+                      <a:prstDash val="solid"/>
+                      <a:round/>
+                      <a:headEnd type="none" w="med" len="med"/>
+                      <a:tailEnd type="none" w="med" len="med"/>
+                    </a:lnL>
+                    <a:lnR w="3810" cap="flat" cmpd="sng" algn="ctr">
+                      <a:solidFill>
+                        <a:srgbClr val="CBD5E0"/>
+                      </a:solidFill>
+                      <a:prstDash val="solid"/>
+                      <a:round/>
+                      <a:headEnd type="none" w="med" len="med"/>
+                      <a:tailEnd type="none" w="med" len="med"/>
+                    </a:lnR>
+                    <a:lnT w="3810" cap="flat" cmpd="sng" algn="ctr">
+                      <a:solidFill>
+                        <a:srgbClr val="CBD5E0"/>
+                      </a:solidFill>
+                      <a:prstDash val="solid"/>
+                      <a:round/>
+                      <a:headEnd type="none" w="med" len="med"/>
+                      <a:tailEnd type="none" w="med" len="med"/>
+                    </a:lnT>
+                    <a:lnB w="3810" cap="flat" cmpd="sng" algn="ctr">
+                      <a:solidFill>
+                        <a:srgbClr val="CBD5E0"/>
+                      </a:solidFill>
+                      <a:prstDash val="solid"/>
+                      <a:round/>
+                      <a:headEnd type="none" w="med" len="med"/>
+                      <a:tailEnd type="none" w="med" len="med"/>
+                    </a:lnB>
+                    <a:solidFill>
+                      <a:srgbClr val="F7FAFC"/>
+                    </a:solidFill>
+                  </a:tcPr>
+                </a:tc>
+              </a:tr>
+              <a:tr h="457200">
+                <a:tc>
+                  <a:txBody>
+                    <a:bodyPr/>
+                    <a:lstStyle/>
+                    <a:p>
+                      <a:pPr indent="0" marL="0">
+                        <a:buNone/>
+                      </a:pPr>
+                      <a:r>
+                        <a:rPr lang="en-US" sz="1100" b="1" dirty="0">
+                          <a:solidFill>
+                            <a:srgbClr val="10161F"/>
+                          </a:solidFill>
+                          <a:latin typeface="Pretendard" pitchFamily="34" charset="0"/>
+                          <a:ea typeface="Pretendard" pitchFamily="34" charset="-122"/>
+                          <a:cs typeface="Pretendard" pitchFamily="34" charset="-120"/>
+                        </a:rPr>
+                        <a:t>표준 </a:t>
+                      </a:r>
+                      <a:pPr indent="0" marL="0">
+                        <a:buNone/>
+                      </a:pPr>
+                      <a:r>
+                        <a:rPr lang="en-US" sz="1100" b="1" dirty="0">
+                          <a:solidFill>
+                            <a:srgbClr val="10161F"/>
+                          </a:solidFill>
+                          <a:latin typeface="Pretendard" pitchFamily="34" charset="0"/>
+                          <a:ea typeface="Pretendard" pitchFamily="34" charset="-122"/>
+                          <a:cs typeface="Pretendard" pitchFamily="34" charset="-120"/>
+                        </a:rPr>
+                        <a:t>차입 </a:t>
+                      </a:r>
+                      <a:pPr indent="0" marL="0">
+                        <a:buNone/>
+                      </a:pPr>
+                      <a:r>
+                        <a:rPr lang="en-US" sz="1100" b="1" dirty="0">
+                          <a:solidFill>
+                            <a:srgbClr val="10161F"/>
+                          </a:solidFill>
+                          <a:latin typeface="Pretendard" pitchFamily="34" charset="0"/>
+                          <a:ea typeface="Pretendard" pitchFamily="34" charset="-122"/>
+                          <a:cs typeface="Pretendard" pitchFamily="34" charset="-120"/>
+                        </a:rPr>
+                        <a:t>(기본형)</a:t>
+                      </a:r>
+                      <a:endParaRPr lang="en-US" sz="1100" dirty="0">
+                        <a:latin typeface="Pretendard" charset="0"/>
+                        <a:ea typeface="Pretendard" charset="0"/>
+                        <a:cs typeface="Pretendard" charset="0"/>
+                      </a:endParaRPr>
+                    </a:p>
+                  </a:txBody>
+                  <a:tcPr marL="50800" marR="50800" marT="25400" marB="25400" anchor="ctr">
+                    <a:lnL w="3810" cap="flat" cmpd="sng" algn="ctr">
+                      <a:solidFill>
+                        <a:srgbClr val="CBD5E0"/>
+                      </a:solidFill>
+                      <a:prstDash val="solid"/>
+                      <a:round/>
+                      <a:headEnd type="none" w="med" len="med"/>
+                      <a:tailEnd type="none" w="med" len="med"/>
+                    </a:lnL>
+                    <a:lnR w="3810" cap="flat" cmpd="sng" algn="ctr">
+                      <a:solidFill>
+                        <a:srgbClr val="CBD5E0"/>
+                      </a:solidFill>
+                      <a:prstDash val="solid"/>
+                      <a:round/>
+                      <a:headEnd type="none" w="med" len="med"/>
+                      <a:tailEnd type="none" w="med" len="med"/>
+                    </a:lnR>
+                    <a:lnT w="3810" cap="flat" cmpd="sng" algn="ctr">
+                      <a:solidFill>
+                        <a:srgbClr val="CBD5E0"/>
+                      </a:solidFill>
+                      <a:prstDash val="solid"/>
+                      <a:round/>
+                      <a:headEnd type="none" w="med" len="med"/>
+                      <a:tailEnd type="none" w="med" len="med"/>
+                    </a:lnT>
+                    <a:lnB w="3810" cap="flat" cmpd="sng" algn="ctr">
+                      <a:solidFill>
+                        <a:srgbClr val="CBD5E0"/>
+                      </a:solidFill>
+                      <a:prstDash val="solid"/>
+                      <a:round/>
+                      <a:headEnd type="none" w="med" len="med"/>
+                      <a:tailEnd type="none" w="med" len="med"/>
+                    </a:lnB>
+                    <a:solidFill>
+                      <a:srgbClr val="FFFFFF"/>
+                    </a:solidFill>
+                  </a:tcPr>
+                </a:tc>
+                <a:tc>
+                  <a:txBody>
+                    <a:bodyPr/>
+                    <a:lstStyle/>
+                    <a:p>
+                      <a:pPr indent="0" marL="0">
+                        <a:buNone/>
+                      </a:pPr>
+                      <a:r>
+                        <a:rPr lang="en-US" sz="1100" dirty="0">
+                          <a:solidFill>
+                            <a:srgbClr val="10161F"/>
+                          </a:solidFill>
+                          <a:latin typeface="Pretendard" pitchFamily="34" charset="0"/>
+                          <a:ea typeface="Pretendard" pitchFamily="34" charset="-122"/>
+                          <a:cs typeface="Pretendard" pitchFamily="34" charset="-120"/>
+                        </a:rPr>
+                        <a:t>50%</a:t>
+                      </a:r>
+                      <a:endParaRPr lang="en-US" sz="1100" dirty="0">
+                        <a:latin typeface="Pretendard" charset="0"/>
+                        <a:ea typeface="Pretendard" charset="0"/>
+                        <a:cs typeface="Pretendard" charset="0"/>
+                      </a:endParaRPr>
+                    </a:p>
+                  </a:txBody>
+                  <a:tcPr marL="50800" marR="50800" marT="25400" marB="25400" anchor="ctr">
+                    <a:lnL w="3810" cap="flat" cmpd="sng" algn="ctr">
+                      <a:solidFill>
+                        <a:srgbClr val="CBD5E0"/>
+                      </a:solidFill>
+                      <a:prstDash val="solid"/>
+                      <a:round/>
+                      <a:headEnd type="none" w="med" len="med"/>
+                      <a:tailEnd type="none" w="med" len="med"/>
+                    </a:lnL>
+                    <a:lnR w="3810" cap="flat" cmpd="sng" algn="ctr">
+                      <a:solidFill>
+                        <a:srgbClr val="CBD5E0"/>
+                      </a:solidFill>
+                      <a:prstDash val="solid"/>
+                      <a:round/>
+                      <a:headEnd type="none" w="med" len="med"/>
+                      <a:tailEnd type="none" w="med" len="med"/>
+                    </a:lnR>
+                    <a:lnT w="3810" cap="flat" cmpd="sng" algn="ctr">
+                      <a:solidFill>
+                        <a:srgbClr val="CBD5E0"/>
+                      </a:solidFill>
+                      <a:prstDash val="solid"/>
+                      <a:round/>
+                      <a:headEnd type="none" w="med" len="med"/>
+                      <a:tailEnd type="none" w="med" len="med"/>
+                    </a:lnT>
+                    <a:lnB w="3810" cap="flat" cmpd="sng" algn="ctr">
+                      <a:solidFill>
+                        <a:srgbClr val="CBD5E0"/>
+                      </a:solidFill>
+                      <a:prstDash val="solid"/>
+                      <a:round/>
+                      <a:headEnd type="none" w="med" len="med"/>
+                      <a:tailEnd type="none" w="med" len="med"/>
+                    </a:lnB>
+                    <a:solidFill>
+                      <a:srgbClr val="FFFFFF"/>
+                    </a:solidFill>
+                  </a:tcPr>
+                </a:tc>
+                <a:tc>
+                  <a:txBody>
+                    <a:bodyPr/>
+                    <a:lstStyle/>
+                    <a:p>
+                      <a:pPr indent="0" marL="0">
+                        <a:buNone/>
+                      </a:pPr>
+                      <a:r>
+                        <a:rPr lang="en-US" sz="1100" dirty="0">
+                          <a:solidFill>
+                            <a:srgbClr val="10161F"/>
+                          </a:solidFill>
+                          <a:latin typeface="Pretendard" pitchFamily="34" charset="0"/>
+                          <a:ea typeface="Pretendard" pitchFamily="34" charset="-122"/>
+                          <a:cs typeface="Pretendard" pitchFamily="34" charset="-120"/>
+                        </a:rPr>
+                        <a:t>58.1억</a:t>
+                      </a:r>
+                      <a:endParaRPr lang="en-US" sz="1100" dirty="0">
+                        <a:latin typeface="Pretendard" charset="0"/>
+                        <a:ea typeface="Pretendard" charset="0"/>
+                        <a:cs typeface="Pretendard" charset="0"/>
+                      </a:endParaRPr>
+                    </a:p>
+                  </a:txBody>
+                  <a:tcPr marL="50800" marR="50800" marT="25400" marB="25400" anchor="ctr">
+                    <a:lnL w="3810" cap="flat" cmpd="sng" algn="ctr">
+                      <a:solidFill>
+                        <a:srgbClr val="CBD5E0"/>
+                      </a:solidFill>
+                      <a:prstDash val="solid"/>
+                      <a:round/>
+                      <a:headEnd type="none" w="med" len="med"/>
+                      <a:tailEnd type="none" w="med" len="med"/>
+                    </a:lnL>
+                    <a:lnR w="3810" cap="flat" cmpd="sng" algn="ctr">
+                      <a:solidFill>
+                        <a:srgbClr val="CBD5E0"/>
+                      </a:solidFill>
+                      <a:prstDash val="solid"/>
+                      <a:round/>
+                      <a:headEnd type="none" w="med" len="med"/>
+                      <a:tailEnd type="none" w="med" len="med"/>
+                    </a:lnR>
+                    <a:lnT w="3810" cap="flat" cmpd="sng" algn="ctr">
+                      <a:solidFill>
+                        <a:srgbClr val="CBD5E0"/>
+                      </a:solidFill>
+                      <a:prstDash val="solid"/>
+                      <a:round/>
+                      <a:headEnd type="none" w="med" len="med"/>
+                      <a:tailEnd type="none" w="med" len="med"/>
+                    </a:lnT>
+                    <a:lnB w="3810" cap="flat" cmpd="sng" algn="ctr">
+                      <a:solidFill>
+                        <a:srgbClr val="CBD5E0"/>
+                      </a:solidFill>
+                      <a:prstDash val="solid"/>
+                      <a:round/>
+                      <a:headEnd type="none" w="med" len="med"/>
+                      <a:tailEnd type="none" w="med" len="med"/>
+                    </a:lnB>
+                    <a:solidFill>
+                      <a:srgbClr val="FFFFFF"/>
+                    </a:solidFill>
+                  </a:tcPr>
+                </a:tc>
+                <a:tc>
+                  <a:txBody>
+                    <a:bodyPr/>
+                    <a:lstStyle/>
+                    <a:p>
+                      <a:pPr indent="0" marL="0">
+                        <a:buNone/>
+                      </a:pPr>
+                      <a:r>
+                        <a:rPr lang="en-US" sz="1100" dirty="0">
+                          <a:solidFill>
+                            <a:srgbClr val="10161F"/>
+                          </a:solidFill>
+                          <a:latin typeface="Pretendard" pitchFamily="34" charset="0"/>
+                          <a:ea typeface="Pretendard" pitchFamily="34" charset="-122"/>
+                          <a:cs typeface="Pretendard" pitchFamily="34" charset="-120"/>
+                        </a:rPr>
+                        <a:t>2.77%</a:t>
+                      </a:r>
+                      <a:endParaRPr lang="en-US" sz="1100" dirty="0">
+                        <a:latin typeface="Pretendard" charset="0"/>
+                        <a:ea typeface="Pretendard" charset="0"/>
+                        <a:cs typeface="Pretendard" charset="0"/>
+                      </a:endParaRPr>
+                    </a:p>
+                  </a:txBody>
+                  <a:tcPr marL="50800" marR="50800" marT="25400" marB="25400" anchor="ctr">
+                    <a:lnL w="3810" cap="flat" cmpd="sng" algn="ctr">
+                      <a:solidFill>
+                        <a:srgbClr val="CBD5E0"/>
+                      </a:solidFill>
+                      <a:prstDash val="solid"/>
+                      <a:round/>
+                      <a:headEnd type="none" w="med" len="med"/>
+                      <a:tailEnd type="none" w="med" len="med"/>
+                    </a:lnL>
+                    <a:lnR w="3810" cap="flat" cmpd="sng" algn="ctr">
+                      <a:solidFill>
+                        <a:srgbClr val="CBD5E0"/>
+                      </a:solidFill>
+                      <a:prstDash val="solid"/>
+                      <a:round/>
+                      <a:headEnd type="none" w="med" len="med"/>
+                      <a:tailEnd type="none" w="med" len="med"/>
+                    </a:lnR>
+                    <a:lnT w="3810" cap="flat" cmpd="sng" algn="ctr">
+                      <a:solidFill>
+                        <a:srgbClr val="CBD5E0"/>
+                      </a:solidFill>
+                      <a:prstDash val="solid"/>
+                      <a:round/>
+                      <a:headEnd type="none" w="med" len="med"/>
+                      <a:tailEnd type="none" w="med" len="med"/>
+                    </a:lnT>
+                    <a:lnB w="3810" cap="flat" cmpd="sng" algn="ctr">
+                      <a:solidFill>
+                        <a:srgbClr val="CBD5E0"/>
+                      </a:solidFill>
+                      <a:prstDash val="solid"/>
+                      <a:round/>
+                      <a:headEnd type="none" w="med" len="med"/>
+                      <a:tailEnd type="none" w="med" len="med"/>
+                    </a:lnB>
+                    <a:solidFill>
+                      <a:srgbClr val="FFFFFF"/>
+                    </a:solidFill>
+                  </a:tcPr>
+                </a:tc>
+              </a:tr>
+              <a:tr h="457200">
+                <a:tc>
+                  <a:txBody>
+                    <a:bodyPr/>
+                    <a:lstStyle/>
+                    <a:p>
+                      <a:pPr indent="0" marL="0">
+                        <a:buNone/>
+                      </a:pPr>
+                      <a:r>
+                        <a:rPr lang="en-US" sz="1100" b="1" dirty="0">
+                          <a:solidFill>
+                            <a:srgbClr val="10161F"/>
+                          </a:solidFill>
+                          <a:latin typeface="Pretendard" pitchFamily="34" charset="0"/>
+                          <a:ea typeface="Pretendard" pitchFamily="34" charset="-122"/>
+                          <a:cs typeface="Pretendard" pitchFamily="34" charset="-120"/>
+                        </a:rPr>
+                        <a:t>적극적 </a:t>
+                      </a:r>
+                      <a:pPr indent="0" marL="0">
+                        <a:buNone/>
+                      </a:pPr>
+                      <a:r>
+                        <a:rPr lang="en-US" sz="1100" b="1" dirty="0">
+                          <a:solidFill>
+                            <a:srgbClr val="10161F"/>
+                          </a:solidFill>
+                          <a:latin typeface="Pretendard" pitchFamily="34" charset="0"/>
+                          <a:ea typeface="Pretendard" pitchFamily="34" charset="-122"/>
+                          <a:cs typeface="Pretendard" pitchFamily="34" charset="-120"/>
+                        </a:rPr>
+                        <a:t>차입 </a:t>
+                      </a:r>
+                      <a:pPr indent="0" marL="0">
+                        <a:buNone/>
+                      </a:pPr>
+                      <a:r>
+                        <a:rPr lang="en-US" sz="1100" b="1" dirty="0">
+                          <a:solidFill>
+                            <a:srgbClr val="10161F"/>
+                          </a:solidFill>
+                          <a:latin typeface="Pretendard" pitchFamily="34" charset="0"/>
+                          <a:ea typeface="Pretendard" pitchFamily="34" charset="-122"/>
+                          <a:cs typeface="Pretendard" pitchFamily="34" charset="-120"/>
+                        </a:rPr>
+                        <a:t>(레버리지)</a:t>
+                      </a:r>
+                      <a:endParaRPr lang="en-US" sz="1100" dirty="0">
+                        <a:latin typeface="Pretendard" charset="0"/>
+                        <a:ea typeface="Pretendard" charset="0"/>
+                        <a:cs typeface="Pretendard" charset="0"/>
+                      </a:endParaRPr>
+                    </a:p>
+                  </a:txBody>
+                  <a:tcPr marL="50800" marR="50800" marT="25400" marB="25400" anchor="ctr">
+                    <a:lnL w="3810" cap="flat" cmpd="sng" algn="ctr">
+                      <a:solidFill>
+                        <a:srgbClr val="CBD5E0"/>
+                      </a:solidFill>
+                      <a:prstDash val="solid"/>
+                      <a:round/>
+                      <a:headEnd type="none" w="med" len="med"/>
+                      <a:tailEnd type="none" w="med" len="med"/>
+                    </a:lnL>
+                    <a:lnR w="3810" cap="flat" cmpd="sng" algn="ctr">
+                      <a:solidFill>
+                        <a:srgbClr val="CBD5E0"/>
+                      </a:solidFill>
+                      <a:prstDash val="solid"/>
+                      <a:round/>
+                      <a:headEnd type="none" w="med" len="med"/>
+                      <a:tailEnd type="none" w="med" len="med"/>
+                    </a:lnR>
+                    <a:lnT w="3810" cap="flat" cmpd="sng" algn="ctr">
+                      <a:solidFill>
+                        <a:srgbClr val="CBD5E0"/>
+                      </a:solidFill>
+                      <a:prstDash val="solid"/>
+                      <a:round/>
+                      <a:headEnd type="none" w="med" len="med"/>
+                      <a:tailEnd type="none" w="med" len="med"/>
+                    </a:lnT>
+                    <a:lnB w="3810" cap="flat" cmpd="sng" algn="ctr">
+                      <a:solidFill>
+                        <a:srgbClr val="CBD5E0"/>
+                      </a:solidFill>
+                      <a:prstDash val="solid"/>
+                      <a:round/>
+                      <a:headEnd type="none" w="med" len="med"/>
+                      <a:tailEnd type="none" w="med" len="med"/>
+                    </a:lnB>
+                    <a:solidFill>
+                      <a:srgbClr val="F7FAFC"/>
+                    </a:solidFill>
+                  </a:tcPr>
+                </a:tc>
+                <a:tc>
+                  <a:txBody>
+                    <a:bodyPr/>
+                    <a:lstStyle/>
+                    <a:p>
+                      <a:pPr indent="0" marL="0">
+                        <a:buNone/>
+                      </a:pPr>
+                      <a:r>
+                        <a:rPr lang="en-US" sz="1100" dirty="0">
+                          <a:solidFill>
+                            <a:srgbClr val="10161F"/>
+                          </a:solidFill>
+                          <a:latin typeface="Pretendard" pitchFamily="34" charset="0"/>
+                          <a:ea typeface="Pretendard" pitchFamily="34" charset="-122"/>
+                          <a:cs typeface="Pretendard" pitchFamily="34" charset="-120"/>
+                        </a:rPr>
+                        <a:t>60%</a:t>
+                      </a:r>
+                      <a:endParaRPr lang="en-US" sz="1100" dirty="0">
+                        <a:latin typeface="Pretendard" charset="0"/>
+                        <a:ea typeface="Pretendard" charset="0"/>
+                        <a:cs typeface="Pretendard" charset="0"/>
+                      </a:endParaRPr>
+                    </a:p>
+                  </a:txBody>
+                  <a:tcPr marL="50800" marR="50800" marT="25400" marB="25400" anchor="ctr">
+                    <a:lnL w="3810" cap="flat" cmpd="sng" algn="ctr">
+                      <a:solidFill>
+                        <a:srgbClr val="CBD5E0"/>
+                      </a:solidFill>
+                      <a:prstDash val="solid"/>
+                      <a:round/>
+                      <a:headEnd type="none" w="med" len="med"/>
+                      <a:tailEnd type="none" w="med" len="med"/>
+                    </a:lnL>
+                    <a:lnR w="3810" cap="flat" cmpd="sng" algn="ctr">
+                      <a:solidFill>
+                        <a:srgbClr val="CBD5E0"/>
+                      </a:solidFill>
+                      <a:prstDash val="solid"/>
+                      <a:round/>
+                      <a:headEnd type="none" w="med" len="med"/>
+                      <a:tailEnd type="none" w="med" len="med"/>
+                    </a:lnR>
+                    <a:lnT w="3810" cap="flat" cmpd="sng" algn="ctr">
+                      <a:solidFill>
+                        <a:srgbClr val="CBD5E0"/>
+                      </a:solidFill>
+                      <a:prstDash val="solid"/>
+                      <a:round/>
+                      <a:headEnd type="none" w="med" len="med"/>
+                      <a:tailEnd type="none" w="med" len="med"/>
+                    </a:lnT>
+                    <a:lnB w="3810" cap="flat" cmpd="sng" algn="ctr">
+                      <a:solidFill>
+                        <a:srgbClr val="CBD5E0"/>
+                      </a:solidFill>
+                      <a:prstDash val="solid"/>
+                      <a:round/>
+                      <a:headEnd type="none" w="med" len="med"/>
+                      <a:tailEnd type="none" w="med" len="med"/>
+                    </a:lnB>
+                    <a:solidFill>
+                      <a:srgbClr val="F7FAFC"/>
+                    </a:solidFill>
+                  </a:tcPr>
+                </a:tc>
+                <a:tc>
+                  <a:txBody>
+                    <a:bodyPr/>
+                    <a:lstStyle/>
+                    <a:p>
+                      <a:pPr indent="0" marL="0">
+                        <a:buNone/>
+                      </a:pPr>
+                      <a:r>
+                        <a:rPr lang="en-US" sz="1100" dirty="0">
+                          <a:solidFill>
+                            <a:srgbClr val="10161F"/>
+                          </a:solidFill>
+                          <a:latin typeface="Pretendard" pitchFamily="34" charset="0"/>
+                          <a:ea typeface="Pretendard" pitchFamily="34" charset="-122"/>
+                          <a:cs typeface="Pretendard" pitchFamily="34" charset="-120"/>
+                        </a:rPr>
+                        <a:t>46.6억</a:t>
+                      </a:r>
+                      <a:endParaRPr lang="en-US" sz="1100" dirty="0">
+                        <a:latin typeface="Pretendard" charset="0"/>
+                        <a:ea typeface="Pretendard" charset="0"/>
+                        <a:cs typeface="Pretendard" charset="0"/>
+                      </a:endParaRPr>
+                    </a:p>
+                  </a:txBody>
+                  <a:tcPr marL="50800" marR="50800" marT="25400" marB="25400" anchor="ctr">
+                    <a:lnL w="3810" cap="flat" cmpd="sng" algn="ctr">
+                      <a:solidFill>
+                        <a:srgbClr val="CBD5E0"/>
+                      </a:solidFill>
+                      <a:prstDash val="solid"/>
+                      <a:round/>
+                      <a:headEnd type="none" w="med" len="med"/>
+                      <a:tailEnd type="none" w="med" len="med"/>
+                    </a:lnL>
+                    <a:lnR w="3810" cap="flat" cmpd="sng" algn="ctr">
+                      <a:solidFill>
+                        <a:srgbClr val="CBD5E0"/>
+                      </a:solidFill>
+                      <a:prstDash val="solid"/>
+                      <a:round/>
+                      <a:headEnd type="none" w="med" len="med"/>
+                      <a:tailEnd type="none" w="med" len="med"/>
+                    </a:lnR>
+                    <a:lnT w="3810" cap="flat" cmpd="sng" algn="ctr">
+                      <a:solidFill>
+                        <a:srgbClr val="CBD5E0"/>
+                      </a:solidFill>
+                      <a:prstDash val="solid"/>
+                      <a:round/>
+                      <a:headEnd type="none" w="med" len="med"/>
+                      <a:tailEnd type="none" w="med" len="med"/>
+                    </a:lnT>
+                    <a:lnB w="3810" cap="flat" cmpd="sng" algn="ctr">
+                      <a:solidFill>
+                        <a:srgbClr val="CBD5E0"/>
+                      </a:solidFill>
+                      <a:prstDash val="solid"/>
+                      <a:round/>
+                      <a:headEnd type="none" w="med" len="med"/>
+                      <a:tailEnd type="none" w="med" len="med"/>
+                    </a:lnB>
+                    <a:solidFill>
+                      <a:srgbClr val="F7FAFC"/>
+                    </a:solidFill>
+                  </a:tcPr>
+                </a:tc>
+                <a:tc>
+                  <a:txBody>
+                    <a:bodyPr/>
+                    <a:lstStyle/>
+                    <a:p>
+                      <a:pPr indent="0" marL="0">
+                        <a:buNone/>
+                      </a:pPr>
+                      <a:r>
+                        <a:rPr lang="en-US" sz="1100" dirty="0">
+                          <a:solidFill>
+                            <a:srgbClr val="10161F"/>
+                          </a:solidFill>
+                          <a:latin typeface="Pretendard" pitchFamily="34" charset="0"/>
+                          <a:ea typeface="Pretendard" pitchFamily="34" charset="-122"/>
+                          <a:cs typeface="Pretendard" pitchFamily="34" charset="-120"/>
+                        </a:rPr>
+                        <a:t>2.27%</a:t>
+                      </a:r>
+                      <a:endParaRPr lang="en-US" sz="1100" dirty="0">
+                        <a:latin typeface="Pretendard" charset="0"/>
+                        <a:ea typeface="Pretendard" charset="0"/>
+                        <a:cs typeface="Pretendard" charset="0"/>
+                      </a:endParaRPr>
+                    </a:p>
+                  </a:txBody>
+                  <a:tcPr marL="50800" marR="50800" marT="25400" marB="25400" anchor="ctr">
+                    <a:lnL w="3810" cap="flat" cmpd="sng" algn="ctr">
+                      <a:solidFill>
+                        <a:srgbClr val="CBD5E0"/>
+                      </a:solidFill>
+                      <a:prstDash val="solid"/>
+                      <a:round/>
+                      <a:headEnd type="none" w="med" len="med"/>
+                      <a:tailEnd type="none" w="med" len="med"/>
+                    </a:lnL>
+                    <a:lnR w="3810" cap="flat" cmpd="sng" algn="ctr">
+                      <a:solidFill>
+                        <a:srgbClr val="CBD5E0"/>
+                      </a:solidFill>
+                      <a:prstDash val="solid"/>
+                      <a:round/>
+                      <a:headEnd type="none" w="med" len="med"/>
+                      <a:tailEnd type="none" w="med" len="med"/>
+                    </a:lnR>
+                    <a:lnT w="3810" cap="flat" cmpd="sng" algn="ctr">
+                      <a:solidFill>
+                        <a:srgbClr val="CBD5E0"/>
+                      </a:solidFill>
+                      <a:prstDash val="solid"/>
+                      <a:round/>
+                      <a:headEnd type="none" w="med" len="med"/>
+                      <a:tailEnd type="none" w="med" len="med"/>
+                    </a:lnT>
+                    <a:lnB w="3810" cap="flat" cmpd="sng" algn="ctr">
+                      <a:solidFill>
+                        <a:srgbClr val="CBD5E0"/>
+                      </a:solidFill>
+                      <a:prstDash val="solid"/>
+                      <a:round/>
+                      <a:headEnd type="none" w="med" len="med"/>
+                      <a:tailEnd type="none" w="med" len="med"/>
+                    </a:lnB>
+                    <a:solidFill>
+                      <a:srgbClr val="F7FAFC"/>
+                    </a:solidFill>
+                  </a:tcPr>
+                </a:tc>
+              </a:tr>
+            </a:tbl>
+          </a:graphicData>
+        </a:graphic>
+      </p:graphicFrame>
+      <p:sp>
+        <p:nvSpPr>
+          <p:cNvPr id="31" name="Shape 28"/>
+          <p:cNvSpPr/>
+          <p:nvPr/>
+        </p:nvSpPr>
+        <p:spPr>
+          <a:xfrm>
+            <a:off x="6461608" y="4069080"/>
+            <a:ext cx="4934560" cy="1463040"/>
+          </a:xfrm>
+          <a:prstGeom prst="roundRect">
+            <a:avLst>
+              <a:gd name="adj" fmla="val 3750"/>
+            </a:avLst>
           </a:prstGeom>
           <a:solidFill>
-            <a:srgbClr val="B98A2E"/>
+            <a:srgbClr val="FEEBC8"/>
           </a:solidFill>
           <a:ln/>
         </p:spPr>
       </p:sp>
       <p:sp>
         <p:nvSpPr>
-          <p:cNvPr id="14" name="Text 12"/>
-          <p:cNvSpPr/>
-          <p:nvPr/>
-        </p:nvSpPr>
-        <p:spPr>
-          <a:xfrm>
-            <a:off x="3642284" y="1792224"/>
-            <a:ext cx="438912" cy="438912"/>
-          </a:xfrm>
-          <a:prstGeom prst="rect">
-            <a:avLst/>
-          </a:prstGeom>
-          <a:noFill/>
-          <a:ln/>
-        </p:spPr>
-        <p:txBody>
-          <a:bodyPr wrap="square" lIns="0" tIns="0" rIns="0" bIns="0" rtlCol="0" anchor="ctr"/>
-          <a:lstStyle/>
-          <a:p>
-            <a:pPr algn="ctr" indent="0" marL="0">
-              <a:buNone/>
-            </a:pPr>
-            <a:r>
-              <a:rPr lang="en-US" sz="1400" b="1" dirty="0">
-                <a:solidFill>
-                  <a:srgbClr val="FFFFFF"/>
+          <p:cNvPr id="32" name="Shape 29"/>
+          <p:cNvSpPr/>
+          <p:nvPr/>
+        </p:nvSpPr>
+        <p:spPr>
+          <a:xfrm>
+            <a:off x="6461608" y="4123944"/>
+            <a:ext cx="36576" cy="1353312"/>
+          </a:xfrm>
+          <a:prstGeom prst="rect">
+            <a:avLst/>
+          </a:prstGeom>
+          <a:solidFill>
+            <a:srgbClr val="9C4221"/>
+          </a:solidFill>
+          <a:ln/>
+        </p:spPr>
+      </p:sp>
+      <p:sp>
+        <p:nvSpPr>
+          <p:cNvPr id="33" name="Text 30"/>
+          <p:cNvSpPr/>
+          <p:nvPr/>
+        </p:nvSpPr>
+        <p:spPr>
+          <a:xfrm>
+            <a:off x="6644488" y="4178808"/>
+            <a:ext cx="4605376" cy="201168"/>
+          </a:xfrm>
+          <a:prstGeom prst="rect">
+            <a:avLst/>
+          </a:prstGeom>
+          <a:noFill/>
+          <a:ln/>
+        </p:spPr>
+        <p:txBody>
+          <a:bodyPr wrap="square" lIns="0" tIns="0" rIns="0" bIns="0" rtlCol="0" anchor="ctr"/>
+          <a:lstStyle/>
+          <a:p>
+            <a:pPr indent="0" marL="0">
+              <a:buNone/>
+            </a:pPr>
+            <a:r>
+              <a:rPr lang="en-US" sz="1050" b="1" dirty="0">
+                <a:solidFill>
+                  <a:srgbClr val="9C4221"/>
+                </a:solidFill>
+                <a:latin typeface="Pretendard" pitchFamily="34" charset="0"/>
+                <a:ea typeface="Pretendard" pitchFamily="34" charset="-122"/>
+                <a:cs typeface="Pretendard" pitchFamily="34" charset="-120"/>
+              </a:rPr>
+              <a:t>역레버리지 유의 구간</a:t>
+            </a:r>
+            <a:endParaRPr lang="en-US" sz="1050" dirty="0"/>
+          </a:p>
+        </p:txBody>
+      </p:sp>
+      <p:sp>
+        <p:nvSpPr>
+          <p:cNvPr id="34" name="Text 31"/>
+          <p:cNvSpPr/>
+          <p:nvPr/>
+        </p:nvSpPr>
+        <p:spPr>
+          <a:xfrm>
+            <a:off x="6644488" y="4398264"/>
+            <a:ext cx="4605376" cy="1060704"/>
+          </a:xfrm>
+          <a:prstGeom prst="rect">
+            <a:avLst/>
+          </a:prstGeom>
+          <a:noFill/>
+          <a:ln/>
+        </p:spPr>
+        <p:txBody>
+          <a:bodyPr wrap="square" lIns="0" tIns="0" rIns="0" bIns="0" rtlCol="0" anchor="t"/>
+          <a:lstStyle/>
+          <a:p>
+            <a:pPr indent="0" marL="0">
+              <a:lnSpc>
+                <a:spcPct val="120000"/>
+              </a:lnSpc>
+              <a:buNone/>
+            </a:pPr>
+            <a:r>
+              <a:rPr lang="en-US" sz="930" dirty="0">
+                <a:solidFill>
+                  <a:srgbClr val="10161F"/>
+                </a:solidFill>
+                <a:latin typeface="Pretendard" pitchFamily="34" charset="0"/>
+                <a:ea typeface="Pretendard" pitchFamily="34" charset="-122"/>
+                <a:cs typeface="Pretendard" pitchFamily="34" charset="-120"/>
+              </a:rPr>
+              <a:t>차입 금리가 자산 총수익률을 상회하여 대출 실행 시 자기자본수익률이 하락할 수 있습니다. 에쿼티 비중 확대를 권장합니다.</a:t>
+            </a:r>
+            <a:endParaRPr lang="en-US" sz="930" dirty="0"/>
+          </a:p>
+        </p:txBody>
+      </p:sp>
+      <p:sp>
+        <p:nvSpPr>
+          <p:cNvPr id="35" name="Text 32"/>
+          <p:cNvSpPr/>
+          <p:nvPr/>
+        </p:nvSpPr>
+        <p:spPr>
+          <a:xfrm>
+            <a:off x="566928" y="6382512"/>
+            <a:ext cx="7315200" cy="219456"/>
+          </a:xfrm>
+          <a:prstGeom prst="rect">
+            <a:avLst/>
+          </a:prstGeom>
+          <a:noFill/>
+          <a:ln/>
+        </p:spPr>
+        <p:txBody>
+          <a:bodyPr wrap="square" lIns="0" tIns="0" rIns="0" bIns="0" rtlCol="0" anchor="ctr"/>
+          <a:lstStyle/>
+          <a:p>
+            <a:pPr indent="0" marL="0">
+              <a:buNone/>
+            </a:pPr>
+            <a:r>
+              <a:rPr lang="en-US" sz="800" dirty="0">
+                <a:solidFill>
+                  <a:srgbClr val="718096"/>
+                </a:solidFill>
+                <a:latin typeface="Pretendard" pitchFamily="34" charset="0"/>
+                <a:ea typeface="Pretendard" pitchFamily="34" charset="-122"/>
+                <a:cs typeface="Pretendard" pitchFamily="34" charset="-120"/>
+              </a:rPr>
+              <a:t>크리딜   |   </a:t>
+            </a:r>
+            <a:endParaRPr lang="en-US" sz="800" dirty="0"/>
+          </a:p>
+        </p:txBody>
+      </p:sp>
+      <p:sp>
+        <p:nvSpPr>
+          <p:cNvPr id="36" name="Text 33"/>
+          <p:cNvSpPr/>
+          <p:nvPr/>
+        </p:nvSpPr>
+        <p:spPr>
+          <a:xfrm>
+            <a:off x="10710367" y="6382512"/>
+            <a:ext cx="914400" cy="219456"/>
+          </a:xfrm>
+          <a:prstGeom prst="rect">
+            <a:avLst/>
+          </a:prstGeom>
+          <a:noFill/>
+          <a:ln/>
+        </p:spPr>
+        <p:txBody>
+          <a:bodyPr wrap="square" lIns="0" tIns="0" rIns="0" bIns="0" rtlCol="0" anchor="ctr"/>
+          <a:lstStyle/>
+          <a:p>
+            <a:pPr algn="r" indent="0" marL="0">
+              <a:buNone/>
+            </a:pPr>
+            <a:r>
+              <a:rPr lang="en-US" sz="900" b="1" dirty="0">
+                <a:solidFill>
+                  <a:srgbClr val="B98A2E"/>
                 </a:solidFill>
                 <a:latin typeface="Arial" pitchFamily="34" charset="0"/>
                 <a:ea typeface="Arial" pitchFamily="34" charset="-122"/>
                 <a:cs typeface="Arial" pitchFamily="34" charset="-120"/>
               </a:rPr>
-              <a:t>02</a:t>
-            </a:r>
-            <a:endParaRPr lang="en-US" sz="1400" dirty="0"/>
-          </a:p>
-        </p:txBody>
-      </p:sp>
-      <p:sp>
-        <p:nvSpPr>
-          <p:cNvPr id="15" name="Text 13"/>
-          <p:cNvSpPr/>
-          <p:nvPr/>
-        </p:nvSpPr>
-        <p:spPr>
-          <a:xfrm>
-            <a:off x="3642284" y="2304288"/>
-            <a:ext cx="2051228" cy="365760"/>
-          </a:xfrm>
-          <a:prstGeom prst="rect">
-            <a:avLst/>
-          </a:prstGeom>
-          <a:noFill/>
-          <a:ln/>
-        </p:spPr>
-        <p:txBody>
-          <a:bodyPr wrap="square" rtlCol="0" anchor="ctr"/>
-          <a:lstStyle/>
-          <a:p>
-            <a:pPr indent="0" marL="0">
-              <a:buNone/>
-            </a:pPr>
-            <a:r>
-              <a:rPr lang="en-US" sz="1600" b="1" dirty="0">
-                <a:solidFill>
-                  <a:srgbClr val="10161F"/>
-                </a:solidFill>
-                <a:latin typeface="Pretendard" pitchFamily="34" charset="0"/>
-                <a:ea typeface="Pretendard" pitchFamily="34" charset="-122"/>
-                <a:cs typeface="Pretendard" pitchFamily="34" charset="-120"/>
-              </a:rPr>
-              <a:t>2단계</a:t>
-            </a:r>
-            <a:endParaRPr lang="en-US" sz="1600" dirty="0"/>
-          </a:p>
-        </p:txBody>
-      </p:sp>
-      <p:sp>
-        <p:nvSpPr>
-          <p:cNvPr id="16" name="Text 14"/>
-          <p:cNvSpPr/>
-          <p:nvPr/>
-        </p:nvSpPr>
-        <p:spPr>
-          <a:xfrm>
-            <a:off x="3642284" y="2761488"/>
-            <a:ext cx="2051228" cy="1828800"/>
-          </a:xfrm>
-          <a:prstGeom prst="rect">
-            <a:avLst/>
-          </a:prstGeom>
-          <a:noFill/>
-          <a:ln/>
-        </p:spPr>
-        <p:txBody>
-          <a:bodyPr wrap="square" rtlCol="0" anchor="t"/>
-          <a:lstStyle/>
-          <a:p>
-            <a:pPr indent="0" marL="0">
-              <a:buNone/>
-            </a:pPr>
-            <a:r>
-              <a:rPr lang="en-US" sz="1100" dirty="0">
-                <a:solidFill>
-                  <a:srgbClr val="10161F"/>
-                </a:solidFill>
-                <a:latin typeface="Pretendard" pitchFamily="34" charset="0"/>
-                <a:ea typeface="Pretendard" pitchFamily="34" charset="-122"/>
-                <a:cs typeface="Pretendard" pitchFamily="34" charset="-120"/>
-              </a:rPr>
-              <a:t>NDA 체결 → 임차인 정보 및 임대차계약서 제공</a:t>
-            </a:r>
-            <a:endParaRPr lang="en-US" sz="1100" dirty="0"/>
-          </a:p>
-        </p:txBody>
-      </p:sp>
-      <p:sp>
-        <p:nvSpPr>
-          <p:cNvPr id="17" name="Shape 15"/>
-          <p:cNvSpPr/>
-          <p:nvPr/>
-        </p:nvSpPr>
-        <p:spPr>
-          <a:xfrm>
-            <a:off x="6004408" y="3035808"/>
-            <a:ext cx="182880" cy="274320"/>
-          </a:xfrm>
-          <a:prstGeom prst="rightArrow">
-            <a:avLst/>
-          </a:prstGeom>
-          <a:solidFill>
-            <a:srgbClr val="CBD5E0"/>
-          </a:solidFill>
-          <a:ln w="6350">
-            <a:solidFill>
-              <a:srgbClr val="718096"/>
-            </a:solidFill>
-            <a:prstDash val="solid"/>
-          </a:ln>
-        </p:spPr>
-      </p:sp>
-      <p:sp>
-        <p:nvSpPr>
-          <p:cNvPr id="18" name="Shape 16"/>
-          <p:cNvSpPr/>
-          <p:nvPr/>
-        </p:nvSpPr>
-        <p:spPr>
-          <a:xfrm>
-            <a:off x="6278728" y="1572768"/>
-            <a:ext cx="2490140" cy="3200400"/>
-          </a:xfrm>
-          <a:prstGeom prst="roundRect">
-            <a:avLst>
-              <a:gd name="adj" fmla="val 2203"/>
-            </a:avLst>
-          </a:prstGeom>
-          <a:solidFill>
-            <a:srgbClr val="F7FAFC"/>
-          </a:solidFill>
-          <a:ln w="6350">
-            <a:solidFill>
-              <a:srgbClr val="CBD5E0"/>
-            </a:solidFill>
-            <a:prstDash val="solid"/>
-          </a:ln>
-        </p:spPr>
-      </p:sp>
-      <p:sp>
-        <p:nvSpPr>
-          <p:cNvPr id="19" name="Shape 17"/>
-          <p:cNvSpPr/>
-          <p:nvPr/>
-        </p:nvSpPr>
-        <p:spPr>
-          <a:xfrm>
-            <a:off x="6498184" y="1792224"/>
-            <a:ext cx="438912" cy="438912"/>
-          </a:xfrm>
-          <a:prstGeom prst="ellipse">
-            <a:avLst/>
-          </a:prstGeom>
-          <a:solidFill>
-            <a:srgbClr val="B98A2E"/>
-          </a:solidFill>
-          <a:ln/>
-        </p:spPr>
-      </p:sp>
-      <p:sp>
-        <p:nvSpPr>
-          <p:cNvPr id="20" name="Text 18"/>
-          <p:cNvSpPr/>
-          <p:nvPr/>
-        </p:nvSpPr>
-        <p:spPr>
-          <a:xfrm>
-            <a:off x="6498184" y="1792224"/>
-            <a:ext cx="438912" cy="438912"/>
-          </a:xfrm>
-          <a:prstGeom prst="rect">
-            <a:avLst/>
-          </a:prstGeom>
-          <a:noFill/>
-          <a:ln/>
-        </p:spPr>
-        <p:txBody>
-          <a:bodyPr wrap="square" lIns="0" tIns="0" rIns="0" bIns="0" rtlCol="0" anchor="ctr"/>
-          <a:lstStyle/>
-          <a:p>
-            <a:pPr algn="ctr" indent="0" marL="0">
-              <a:buNone/>
-            </a:pPr>
-            <a:r>
-              <a:rPr lang="en-US" sz="1400" b="1" dirty="0">
-                <a:solidFill>
-                  <a:srgbClr val="FFFFFF"/>
-                </a:solidFill>
-                <a:latin typeface="Arial" pitchFamily="34" charset="0"/>
-                <a:ea typeface="Arial" pitchFamily="34" charset="-122"/>
-                <a:cs typeface="Arial" pitchFamily="34" charset="-120"/>
-              </a:rPr>
-              <a:t>03</a:t>
-            </a:r>
-            <a:endParaRPr lang="en-US" sz="1400" dirty="0"/>
-          </a:p>
-        </p:txBody>
-      </p:sp>
-      <p:sp>
-        <p:nvSpPr>
-          <p:cNvPr id="21" name="Text 19"/>
-          <p:cNvSpPr/>
-          <p:nvPr/>
-        </p:nvSpPr>
-        <p:spPr>
-          <a:xfrm>
-            <a:off x="6498184" y="2304288"/>
-            <a:ext cx="2051228" cy="365760"/>
-          </a:xfrm>
-          <a:prstGeom prst="rect">
-            <a:avLst/>
-          </a:prstGeom>
-          <a:noFill/>
-          <a:ln/>
-        </p:spPr>
-        <p:txBody>
-          <a:bodyPr wrap="square" rtlCol="0" anchor="ctr"/>
-          <a:lstStyle/>
-          <a:p>
-            <a:pPr indent="0" marL="0">
-              <a:buNone/>
-            </a:pPr>
-            <a:r>
-              <a:rPr lang="en-US" sz="1600" b="1" dirty="0">
-                <a:solidFill>
-                  <a:srgbClr val="10161F"/>
-                </a:solidFill>
-                <a:latin typeface="Pretendard" pitchFamily="34" charset="0"/>
-                <a:ea typeface="Pretendard" pitchFamily="34" charset="-122"/>
-                <a:cs typeface="Pretendard" pitchFamily="34" charset="-120"/>
-              </a:rPr>
-              <a:t>3단계</a:t>
-            </a:r>
-            <a:endParaRPr lang="en-US" sz="1600" dirty="0"/>
-          </a:p>
-        </p:txBody>
-      </p:sp>
-      <p:sp>
-        <p:nvSpPr>
-          <p:cNvPr id="22" name="Text 20"/>
-          <p:cNvSpPr/>
-          <p:nvPr/>
-        </p:nvSpPr>
-        <p:spPr>
-          <a:xfrm>
-            <a:off x="6498184" y="2761488"/>
-            <a:ext cx="2051228" cy="1828800"/>
-          </a:xfrm>
-          <a:prstGeom prst="rect">
-            <a:avLst/>
-          </a:prstGeom>
-          <a:noFill/>
-          <a:ln/>
-        </p:spPr>
-        <p:txBody>
-          <a:bodyPr wrap="square" rtlCol="0" anchor="t"/>
-          <a:lstStyle/>
-          <a:p>
-            <a:pPr indent="0" marL="0">
-              <a:buNone/>
-            </a:pPr>
-            <a:r>
-              <a:rPr lang="en-US" sz="1100" dirty="0">
-                <a:solidFill>
-                  <a:srgbClr val="10161F"/>
-                </a:solidFill>
-                <a:latin typeface="Pretendard" pitchFamily="34" charset="0"/>
-                <a:ea typeface="Pretendard" pitchFamily="34" charset="-122"/>
-                <a:cs typeface="Pretendard" pitchFamily="34" charset="-120"/>
-              </a:rPr>
-              <a:t>현장 실사 일정 조율 → 건물 컨디션 및 설비 직접 확인</a:t>
-            </a:r>
-            <a:endParaRPr lang="en-US" sz="1100" dirty="0"/>
-          </a:p>
-        </p:txBody>
-      </p:sp>
-      <p:sp>
-        <p:nvSpPr>
-          <p:cNvPr id="23" name="Shape 21"/>
-          <p:cNvSpPr/>
-          <p:nvPr/>
-        </p:nvSpPr>
-        <p:spPr>
-          <a:xfrm>
-            <a:off x="8860307" y="3035808"/>
-            <a:ext cx="182880" cy="274320"/>
-          </a:xfrm>
-          <a:prstGeom prst="rightArrow">
-            <a:avLst/>
-          </a:prstGeom>
-          <a:solidFill>
-            <a:srgbClr val="CBD5E0"/>
-          </a:solidFill>
-          <a:ln w="6350">
-            <a:solidFill>
-              <a:srgbClr val="718096"/>
-            </a:solidFill>
-            <a:prstDash val="solid"/>
-          </a:ln>
-        </p:spPr>
-      </p:sp>
-      <p:sp>
-        <p:nvSpPr>
-          <p:cNvPr id="24" name="Shape 22"/>
-          <p:cNvSpPr/>
-          <p:nvPr/>
-        </p:nvSpPr>
-        <p:spPr>
-          <a:xfrm>
-            <a:off x="9134627" y="1572768"/>
-            <a:ext cx="2490140" cy="3200400"/>
-          </a:xfrm>
-          <a:prstGeom prst="roundRect">
-            <a:avLst>
-              <a:gd name="adj" fmla="val 2203"/>
-            </a:avLst>
-          </a:prstGeom>
-          <a:solidFill>
-            <a:srgbClr val="F7FAFC"/>
-          </a:solidFill>
-          <a:ln w="6350">
-            <a:solidFill>
-              <a:srgbClr val="CBD5E0"/>
-            </a:solidFill>
-            <a:prstDash val="solid"/>
-          </a:ln>
-        </p:spPr>
-      </p:sp>
-      <p:sp>
-        <p:nvSpPr>
-          <p:cNvPr id="25" name="Shape 23"/>
-          <p:cNvSpPr/>
-          <p:nvPr/>
-        </p:nvSpPr>
-        <p:spPr>
-          <a:xfrm>
-            <a:off x="9354083" y="1792224"/>
-            <a:ext cx="438912" cy="438912"/>
-          </a:xfrm>
-          <a:prstGeom prst="ellipse">
-            <a:avLst/>
-          </a:prstGeom>
-          <a:solidFill>
-            <a:srgbClr val="B98A2E"/>
-          </a:solidFill>
-          <a:ln/>
-        </p:spPr>
-      </p:sp>
-      <p:sp>
-        <p:nvSpPr>
-          <p:cNvPr id="26" name="Text 24"/>
-          <p:cNvSpPr/>
-          <p:nvPr/>
-        </p:nvSpPr>
-        <p:spPr>
-          <a:xfrm>
-            <a:off x="9354083" y="1792224"/>
-            <a:ext cx="438912" cy="438912"/>
-          </a:xfrm>
-          <a:prstGeom prst="rect">
-            <a:avLst/>
-          </a:prstGeom>
-          <a:noFill/>
-          <a:ln/>
-        </p:spPr>
-        <p:txBody>
-          <a:bodyPr wrap="square" lIns="0" tIns="0" rIns="0" bIns="0" rtlCol="0" anchor="ctr"/>
-          <a:lstStyle/>
-          <a:p>
-            <a:pPr algn="ctr" indent="0" marL="0">
-              <a:buNone/>
-            </a:pPr>
-            <a:r>
-              <a:rPr lang="en-US" sz="1400" b="1" dirty="0">
-                <a:solidFill>
-                  <a:srgbClr val="FFFFFF"/>
-                </a:solidFill>
-                <a:latin typeface="Arial" pitchFamily="34" charset="0"/>
-                <a:ea typeface="Arial" pitchFamily="34" charset="-122"/>
-                <a:cs typeface="Arial" pitchFamily="34" charset="-120"/>
-              </a:rPr>
-              <a:t>04</a:t>
-            </a:r>
-            <a:endParaRPr lang="en-US" sz="1400" dirty="0"/>
-          </a:p>
-        </p:txBody>
-      </p:sp>
-      <p:sp>
-        <p:nvSpPr>
-          <p:cNvPr id="27" name="Text 25"/>
-          <p:cNvSpPr/>
-          <p:nvPr/>
-        </p:nvSpPr>
-        <p:spPr>
-          <a:xfrm>
-            <a:off x="9354083" y="2304288"/>
-            <a:ext cx="2051228" cy="365760"/>
-          </a:xfrm>
-          <a:prstGeom prst="rect">
-            <a:avLst/>
-          </a:prstGeom>
-          <a:noFill/>
-          <a:ln/>
-        </p:spPr>
-        <p:txBody>
-          <a:bodyPr wrap="square" rtlCol="0" anchor="ctr"/>
-          <a:lstStyle/>
-          <a:p>
-            <a:pPr indent="0" marL="0">
-              <a:buNone/>
-            </a:pPr>
-            <a:r>
-              <a:rPr lang="en-US" sz="1600" b="1" dirty="0">
-                <a:solidFill>
-                  <a:srgbClr val="10161F"/>
-                </a:solidFill>
-                <a:latin typeface="Pretendard" pitchFamily="34" charset="0"/>
-                <a:ea typeface="Pretendard" pitchFamily="34" charset="-122"/>
-                <a:cs typeface="Pretendard" pitchFamily="34" charset="-120"/>
-              </a:rPr>
-              <a:t>4단계</a:t>
-            </a:r>
-            <a:endParaRPr lang="en-US" sz="1600" dirty="0"/>
-          </a:p>
-        </p:txBody>
-      </p:sp>
-      <p:sp>
-        <p:nvSpPr>
-          <p:cNvPr id="28" name="Text 26"/>
-          <p:cNvSpPr/>
-          <p:nvPr/>
-        </p:nvSpPr>
-        <p:spPr>
-          <a:xfrm>
-            <a:off x="9354083" y="2761488"/>
-            <a:ext cx="2051228" cy="1828800"/>
-          </a:xfrm>
-          <a:prstGeom prst="rect">
-            <a:avLst/>
-          </a:prstGeom>
-          <a:noFill/>
-          <a:ln/>
-        </p:spPr>
-        <p:txBody>
-          <a:bodyPr wrap="square" rtlCol="0" anchor="t"/>
-          <a:lstStyle/>
-          <a:p>
-            <a:pPr indent="0" marL="0">
-              <a:buNone/>
-            </a:pPr>
-            <a:r>
-              <a:rPr lang="en-US" sz="1100" dirty="0">
-                <a:solidFill>
-                  <a:srgbClr val="10161F"/>
-                </a:solidFill>
-                <a:latin typeface="Pretendard" pitchFamily="34" charset="0"/>
-                <a:ea typeface="Pretendard" pitchFamily="34" charset="-122"/>
-                <a:cs typeface="Pretendard" pitchFamily="34" charset="-120"/>
-              </a:rPr>
-              <a:t>LOI(투자의향서) 제출 → 가격 협의 개시</a:t>
-            </a:r>
-            <a:endParaRPr lang="en-US" sz="1100" dirty="0"/>
-          </a:p>
-        </p:txBody>
-      </p:sp>
-      <p:sp>
-        <p:nvSpPr>
-          <p:cNvPr id="29" name="Text 27"/>
-          <p:cNvSpPr/>
-          <p:nvPr/>
-        </p:nvSpPr>
-        <p:spPr>
-          <a:xfrm>
-            <a:off x="566928" y="6382512"/>
-            <a:ext cx="7315200" cy="219456"/>
-          </a:xfrm>
-          <a:prstGeom prst="rect">
-            <a:avLst/>
-          </a:prstGeom>
-          <a:noFill/>
-          <a:ln/>
-        </p:spPr>
-        <p:txBody>
-          <a:bodyPr wrap="square" lIns="0" tIns="0" rIns="0" bIns="0" rtlCol="0" anchor="ctr"/>
-          <a:lstStyle/>
-          <a:p>
-            <a:pPr indent="0" marL="0">
-              <a:buNone/>
-            </a:pPr>
-            <a:r>
-              <a:rPr lang="en-US" sz="800" dirty="0">
-                <a:solidFill>
-                  <a:srgbClr val="718096"/>
-                </a:solidFill>
-                <a:latin typeface="Pretendard" pitchFamily="34" charset="0"/>
-                <a:ea typeface="Pretendard" pitchFamily="34" charset="-122"/>
-                <a:cs typeface="Pretendard" pitchFamily="34" charset="-120"/>
-              </a:rPr>
-              <a:t>크리딜   |   </a:t>
-            </a:r>
-            <a:endParaRPr lang="en-US" sz="800" dirty="0"/>
-          </a:p>
-        </p:txBody>
-      </p:sp>
-      <p:sp>
-        <p:nvSpPr>
-          <p:cNvPr id="30" name="Text 28"/>
-          <p:cNvSpPr/>
-          <p:nvPr/>
-        </p:nvSpPr>
-        <p:spPr>
-          <a:xfrm>
-            <a:off x="10710367" y="6382512"/>
-            <a:ext cx="914400" cy="219456"/>
-          </a:xfrm>
-          <a:prstGeom prst="rect">
-            <a:avLst/>
-          </a:prstGeom>
-          <a:noFill/>
-          <a:ln/>
-        </p:spPr>
-        <p:txBody>
-          <a:bodyPr wrap="square" lIns="0" tIns="0" rIns="0" bIns="0" rtlCol="0" anchor="ctr"/>
-          <a:lstStyle/>
-          <a:p>
-            <a:pPr algn="r" indent="0" marL="0">
-              <a:buNone/>
-            </a:pPr>
-            <a:r>
-              <a:rPr lang="en-US" sz="900" b="1" dirty="0">
-                <a:solidFill>
-                  <a:srgbClr val="B98A2E"/>
-                </a:solidFill>
-                <a:latin typeface="Arial" pitchFamily="34" charset="0"/>
-                <a:ea typeface="Arial" pitchFamily="34" charset="-122"/>
-                <a:cs typeface="Arial" pitchFamily="34" charset="-120"/>
-              </a:rPr>
-              <a:t>9</a:t>
+              <a:t>8</a:t>
             </a:r>
             <a:endParaRPr lang="en-US" sz="900" dirty="0"/>
           </a:p>
